--- a/pitch/SSB_VentureX.pptx
+++ b/pitch/SSB_VentureX.pptx
@@ -9997,7 +9997,7 @@
             <a:off x="9227668" y="3017520"/>
             <a:ext cx="1600200" cy="1600200"/>
           </a:xfrm>
-          <a:prstGeom prst="ellipse">
+          <a:prstGeom prst="rect">
             <a:avLst/>
           </a:prstGeom>
         </p:spPr>
@@ -10126,7 +10126,7 @@
             <a:off x="5295748" y="3017520"/>
             <a:ext cx="1600200" cy="1600200"/>
           </a:xfrm>
-          <a:prstGeom prst="ellipse">
+          <a:prstGeom prst="rect">
             <a:avLst/>
           </a:prstGeom>
         </p:spPr>
@@ -10255,7 +10255,7 @@
             <a:off x="1363828" y="3017520"/>
             <a:ext cx="1600200" cy="1600200"/>
           </a:xfrm>
-          <a:prstGeom prst="ellipse">
+          <a:prstGeom prst="rect">
             <a:avLst/>
           </a:prstGeom>
         </p:spPr>
@@ -11292,7 +11292,7 @@
                 <a:ea typeface="IBM Plex Sans Arabic" pitchFamily="34" charset="-122"/>
                 <a:cs typeface="IBM Plex Sans Arabic" pitchFamily="34" charset="-120"/>
               </a:rPr>
-              <a:t>هدر مالي صامت في فواتير السحابة للشركات الصغيرة والمتوسطة، من سيرفرات منسية وموارد زائدة، مع أدوات عالمية معقدة لا ترى السحب المحلية.</a:t>
+              <a:t>هدر مالي صامت في فواتير السحابة للشركات الصغيرة والمتوسطة، من سيرفرات منسية وموارد زائدة، مع أدوات عالمية معقدة لا ترى السحب المحلية</a:t>
             </a:r>
             <a:endParaRPr lang="en-US" sz="1600" dirty="0"/>
           </a:p>
@@ -11335,7 +11335,7 @@
                 <a:ea typeface="IBM Plex Sans Arabic" pitchFamily="34" charset="-122"/>
                 <a:cs typeface="IBM Plex Sans Arabic" pitchFamily="34" charset="-120"/>
               </a:rPr>
-              <a:t>لا توجد منصة محلية مستقلة تجمع السحب السعودية مع العالمية، وتنفّذ الحل بموافقة بشرية بدل تقارير لا ينفذها أحد.</a:t>
+              <a:t>لا توجد منصة محلية مستقلة تجمع السحب السعودية مع العالمية، وتنفّذ الحل بموافقة بشرية بدل تقارير لا ينفذها أحد</a:t>
             </a:r>
             <a:endParaRPr lang="en-US" sz="1600" dirty="0"/>
           </a:p>
@@ -11374,7 +11374,7 @@
                 <a:ea typeface="IBM Plex Sans Arabic" pitchFamily="34" charset="-122"/>
                 <a:cs typeface="IBM Plex Sans Arabic" pitchFamily="34" charset="-120"/>
               </a:rPr>
-              <a:t>المصادر: Flexera State of the Cloud 2026 (29%، 17%) · Uptime Institute, Annual Outage Analysis (40%) · MarketsandMarkets, Saudi Arabia Cloud Computing Market (5.1 مليار دولار)</a:t>
+              <a:t>المصادر: Flexera State of the Cloud 2026 · Uptime Institute Annual Outage Analysis · MarketsandMarkets Saudi Arabia Cloud Computing Market</a:t>
             </a:r>
             <a:endParaRPr lang="en-US" sz="1000" dirty="0"/>
           </a:p>
@@ -19791,7 +19791,7 @@
                 <a:ea typeface="IBM Plex Sans Arabic" pitchFamily="34" charset="-122"/>
                 <a:cs typeface="IBM Plex Sans Arabic" pitchFamily="34" charset="-120"/>
               </a:rPr>
-              <a:t>صلاحية مؤقتة لإجراء واحد (Just-in-time access) بدل صلاحيات كتابة دائمة.</a:t>
+              <a:t>صلاحية مؤقتة لإجراء واحد (Just-in-time access) بدل صلاحيات كتابة دائمة</a:t>
             </a:r>
             <a:endParaRPr lang="en-US" sz="1400" dirty="0"/>
           </a:p>

--- a/pitch/SSB_VentureX.pptx
+++ b/pitch/SSB_VentureX.pptx
@@ -15,11 +15,9 @@
     <p:sldId id="263" r:id="rId9"/>
     <p:sldId id="264" r:id="rId10"/>
     <p:sldId id="265" r:id="rId11"/>
-    <p:sldId id="266" r:id="rId12"/>
-    <p:sldId id="267" r:id="rId13"/>
   </p:sldIdLst>
   <p:notesMasterIdLst>
-    <p:notesMasterId r:id="rId14"/>
+    <p:notesMasterId r:id="rId12"/>
   </p:notesMasterIdLst>
   <p:sldSz cx="12192000" cy="6858000"/>
   <p:notesSz cx="6858000" cy="12192000"/>
@@ -643,182 +641,6 @@
 </p:notes>
 </file>
 
-<file path=ppt/notesSlides/notesSlide11.xml><?xml version="1.0" encoding="utf-8"?>
-<p:notes xmlns:a="http://schemas.openxmlformats.org/drawingml/2006/main" xmlns:r="http://schemas.openxmlformats.org/officeDocument/2006/relationships" xmlns:p="http://schemas.openxmlformats.org/presentationml/2006/main">
-  <p:cSld>
-    <p:spTree>
-      <p:nvGrpSpPr>
-        <p:cNvPr id="1" name=""/>
-        <p:cNvGrpSpPr/>
-        <p:nvPr/>
-      </p:nvGrpSpPr>
-      <p:grpSpPr>
-        <a:xfrm>
-          <a:off x="0" y="0"/>
-          <a:ext cx="0" cy="0"/>
-          <a:chOff x="0" y="0"/>
-          <a:chExt cx="0" cy="0"/>
-        </a:xfrm>
-      </p:grpSpPr>
-      <p:sp>
-        <p:nvSpPr>
-          <p:cNvPr id="2" name="Slide Image Placeholder 1"/>
-          <p:cNvSpPr>
-            <a:spLocks noGrp="1" noRot="1" noChangeAspect="1"/>
-          </p:cNvSpPr>
-          <p:nvPr>
-            <p:ph type="sldImg"/>
-          </p:nvPr>
-        </p:nvSpPr>
-        <p:spPr/>
-      </p:sp>
-      <p:sp>
-        <p:nvSpPr>
-          <p:cNvPr id="3" name="Notes Placeholder 2"/>
-          <p:cNvSpPr>
-            <a:spLocks noGrp="1"/>
-          </p:cNvSpPr>
-          <p:nvPr>
-            <p:ph type="body" idx="1"/>
-          </p:nvPr>
-        </p:nvSpPr>
-        <p:spPr/>
-        <p:txBody>
-          <a:bodyPr/>
-          <a:lstStyle/>
-          <a:p>
-            <a:r>
-              <a:rPr lang="en-US" dirty="0"/>
-              <a:t/>
-            </a:r>
-            <a:endParaRPr lang="en-US" dirty="0"/>
-          </a:p>
-        </p:txBody>
-      </p:sp>
-      <p:sp>
-        <p:nvSpPr>
-          <p:cNvPr id="4" name="Slide Number Placeholder 3"/>
-          <p:cNvSpPr>
-            <a:spLocks noGrp="1"/>
-          </p:cNvSpPr>
-          <p:nvPr>
-            <p:ph type="sldNum" sz="quarter" idx="10"/>
-          </p:nvPr>
-        </p:nvSpPr>
-        <p:spPr/>
-        <p:txBody>
-          <a:bodyPr/>
-          <a:lstStyle/>
-          <a:p>
-            <a:fld id="{F7021451-1387-4CA6-816F-3879F97B5CBC}" type="slidenum">
-              <a:rPr lang="en-US"/>
-              <a:t>11</a:t>
-            </a:fld>
-            <a:endParaRPr lang="en-US"/>
-          </a:p>
-        </p:txBody>
-      </p:sp>
-    </p:spTree>
-    <p:extLst>
-      <p:ext uri="{BB962C8B-B14F-4D97-AF65-F5344CB8AC3E}">
-        <p14:creationId xmlns:p14="http://schemas.microsoft.com/office/powerpoint/2010/main" val="1024086991"/>
-      </p:ext>
-    </p:extLst>
-  </p:cSld>
-  <p:clrMapOvr>
-    <a:masterClrMapping/>
-  </p:clrMapOvr>
-</p:notes>
-</file>
-
-<file path=ppt/notesSlides/notesSlide12.xml><?xml version="1.0" encoding="utf-8"?>
-<p:notes xmlns:a="http://schemas.openxmlformats.org/drawingml/2006/main" xmlns:r="http://schemas.openxmlformats.org/officeDocument/2006/relationships" xmlns:p="http://schemas.openxmlformats.org/presentationml/2006/main">
-  <p:cSld>
-    <p:spTree>
-      <p:nvGrpSpPr>
-        <p:cNvPr id="1" name=""/>
-        <p:cNvGrpSpPr/>
-        <p:nvPr/>
-      </p:nvGrpSpPr>
-      <p:grpSpPr>
-        <a:xfrm>
-          <a:off x="0" y="0"/>
-          <a:ext cx="0" cy="0"/>
-          <a:chOff x="0" y="0"/>
-          <a:chExt cx="0" cy="0"/>
-        </a:xfrm>
-      </p:grpSpPr>
-      <p:sp>
-        <p:nvSpPr>
-          <p:cNvPr id="2" name="Slide Image Placeholder 1"/>
-          <p:cNvSpPr>
-            <a:spLocks noGrp="1" noRot="1" noChangeAspect="1"/>
-          </p:cNvSpPr>
-          <p:nvPr>
-            <p:ph type="sldImg"/>
-          </p:nvPr>
-        </p:nvSpPr>
-        <p:spPr/>
-      </p:sp>
-      <p:sp>
-        <p:nvSpPr>
-          <p:cNvPr id="3" name="Notes Placeholder 2"/>
-          <p:cNvSpPr>
-            <a:spLocks noGrp="1"/>
-          </p:cNvSpPr>
-          <p:nvPr>
-            <p:ph type="body" idx="1"/>
-          </p:nvPr>
-        </p:nvSpPr>
-        <p:spPr/>
-        <p:txBody>
-          <a:bodyPr/>
-          <a:lstStyle/>
-          <a:p>
-            <a:r>
-              <a:rPr lang="en-US" dirty="0"/>
-              <a:t/>
-            </a:r>
-            <a:endParaRPr lang="en-US" dirty="0"/>
-          </a:p>
-        </p:txBody>
-      </p:sp>
-      <p:sp>
-        <p:nvSpPr>
-          <p:cNvPr id="4" name="Slide Number Placeholder 3"/>
-          <p:cNvSpPr>
-            <a:spLocks noGrp="1"/>
-          </p:cNvSpPr>
-          <p:nvPr>
-            <p:ph type="sldNum" sz="quarter" idx="10"/>
-          </p:nvPr>
-        </p:nvSpPr>
-        <p:spPr/>
-        <p:txBody>
-          <a:bodyPr/>
-          <a:lstStyle/>
-          <a:p>
-            <a:fld id="{F7021451-1387-4CA6-816F-3879F97B5CBC}" type="slidenum">
-              <a:rPr lang="en-US"/>
-              <a:t>12</a:t>
-            </a:fld>
-            <a:endParaRPr lang="en-US"/>
-          </a:p>
-        </p:txBody>
-      </p:sp>
-    </p:spTree>
-    <p:extLst>
-      <p:ext uri="{BB962C8B-B14F-4D97-AF65-F5344CB8AC3E}">
-        <p14:creationId xmlns:p14="http://schemas.microsoft.com/office/powerpoint/2010/main" val="1024086991"/>
-      </p:ext>
-    </p:extLst>
-  </p:cSld>
-  <p:clrMapOvr>
-    <a:masterClrMapping/>
-  </p:clrMapOvr>
-</p:notes>
-</file>
-
 <file path=ppt/notesSlides/notesSlide2.xml><?xml version="1.0" encoding="utf-8"?>
 <p:notes xmlns:a="http://schemas.openxmlformats.org/drawingml/2006/main" xmlns:r="http://schemas.openxmlformats.org/officeDocument/2006/relationships" xmlns:p="http://schemas.openxmlformats.org/presentationml/2006/main">
   <p:cSld>
@@ -3212,8 +3034,8 @@
         </p:nvSpPr>
         <p:spPr>
           <a:xfrm>
-            <a:off x="10074859" y="987552"/>
-            <a:ext cx="1659636" cy="384048"/>
+            <a:off x="10600639" y="987552"/>
+            <a:ext cx="1133856" cy="384048"/>
           </a:xfrm>
           <a:prstGeom prst="roundRect">
             <a:avLst>
@@ -3234,8 +3056,8 @@
         </p:nvSpPr>
         <p:spPr>
           <a:xfrm>
-            <a:off x="10074859" y="987552"/>
-            <a:ext cx="1659636" cy="384048"/>
+            <a:off x="10600639" y="987552"/>
+            <a:ext cx="1133856" cy="384048"/>
           </a:xfrm>
           <a:prstGeom prst="rect">
             <a:avLst/>
@@ -3259,7 +3081,7 @@
                 <a:ea typeface="IBM Plex Sans Arabic" pitchFamily="34" charset="-122"/>
                 <a:cs typeface="IBM Plex Sans Arabic" pitchFamily="34" charset="-120"/>
               </a:rPr>
-              <a:t>نموذج العمل</a:t>
+              <a:t>الختام</a:t>
             </a:r>
             <a:endParaRPr lang="en-US" sz="1300" dirty="0"/>
           </a:p>
@@ -3362,2893 +3184,6 @@
                 <a:cs typeface="IBM Plex Sans Arabic" pitchFamily="34" charset="-120"/>
               </a:rPr>
               <a:t>10</a:t>
-            </a:r>
-            <a:endParaRPr lang="en-US" sz="1100" dirty="0"/>
-          </a:p>
-        </p:txBody>
-      </p:sp>
-      <p:sp>
-        <p:nvSpPr>
-          <p:cNvPr id="22" name="Text 17"/>
-          <p:cNvSpPr txBox="1"/>
-          <p:nvPr/>
-        </p:nvSpPr>
-        <p:spPr>
-          <a:xfrm>
-            <a:off x="457200" y="1463040"/>
-            <a:ext cx="11277295" cy="658368"/>
-          </a:xfrm>
-          <a:prstGeom prst="rect">
-            <a:avLst/>
-          </a:prstGeom>
-          <a:noFill/>
-          <a:ln/>
-        </p:spPr>
-        <p:txBody>
-          <a:bodyPr wrap="square" lIns="0" tIns="0" rIns="0" bIns="0" rtlCol="0" anchor="ctr"/>
-          <a:lstStyle/>
-          <a:p>
-            <a:pPr rtl="1" algn="r" indent="0" marL="0">
-              <a:buNone/>
-            </a:pPr>
-            <a:r>
-              <a:rPr lang="en-US" sz="3000" b="1" dirty="0">
-                <a:solidFill>
-                  <a:srgbClr val="21141A"/>
-                </a:solidFill>
-                <a:latin typeface="IBM Plex Sans Arabic" pitchFamily="34" charset="0"/>
-                <a:ea typeface="IBM Plex Sans Arabic" pitchFamily="34" charset="-122"/>
-                <a:cs typeface="IBM Plex Sans Arabic" pitchFamily="34" charset="-120"/>
-              </a:rPr>
-              <a:t>ابدأ مجاناً، ثم ادفع لكل مورد</a:t>
-            </a:r>
-            <a:endParaRPr lang="en-US" sz="3000" dirty="0"/>
-          </a:p>
-        </p:txBody>
-      </p:sp>
-      <p:sp>
-        <p:nvSpPr>
-          <p:cNvPr id="23" name="Text 18"/>
-          <p:cNvSpPr txBox="1"/>
-          <p:nvPr/>
-        </p:nvSpPr>
-        <p:spPr>
-          <a:xfrm>
-            <a:off x="457200" y="2121408"/>
-            <a:ext cx="11277295" cy="384048"/>
-          </a:xfrm>
-          <a:prstGeom prst="rect">
-            <a:avLst/>
-          </a:prstGeom>
-          <a:noFill/>
-          <a:ln/>
-        </p:spPr>
-        <p:txBody>
-          <a:bodyPr wrap="square" lIns="0" tIns="0" rIns="0" bIns="0" rtlCol="0" anchor="ctr"/>
-          <a:lstStyle/>
-          <a:p>
-            <a:pPr rtl="1" algn="r" indent="0" marL="0">
-              <a:buNone/>
-            </a:pPr>
-            <a:r>
-              <a:rPr lang="en-US" sz="1600" dirty="0">
-                <a:solidFill>
-                  <a:srgbClr val="7F6C72"/>
-                </a:solidFill>
-                <a:latin typeface="IBM Plex Sans Arabic" pitchFamily="34" charset="0"/>
-                <a:ea typeface="IBM Plex Sans Arabic" pitchFamily="34" charset="-122"/>
-                <a:cs typeface="IBM Plex Sans Arabic" pitchFamily="34" charset="-120"/>
-              </a:rPr>
-              <a:t>بدون اشتراكات ثابتة: الدفع حسب الموارد المُدارة، ورسوم منفصلة للاستشارات المتقدمة</a:t>
-            </a:r>
-            <a:endParaRPr lang="en-US" sz="1600" dirty="0"/>
-          </a:p>
-        </p:txBody>
-      </p:sp>
-      <p:sp>
-        <p:nvSpPr>
-          <p:cNvPr id="24" name="Shape 19"/>
-          <p:cNvSpPr/>
-          <p:nvPr/>
-        </p:nvSpPr>
-        <p:spPr>
-          <a:xfrm>
-            <a:off x="8188757" y="2743200"/>
-            <a:ext cx="3545738" cy="3063240"/>
-          </a:xfrm>
-          <a:prstGeom prst="roundRect">
-            <a:avLst>
-              <a:gd name="adj" fmla="val 5373"/>
-            </a:avLst>
-          </a:prstGeom>
-          <a:solidFill>
-            <a:srgbClr val="FFFBF8"/>
-          </a:solidFill>
-          <a:ln w="9525">
-            <a:solidFill>
-              <a:srgbClr val="E3D5CC"/>
-            </a:solidFill>
-            <a:prstDash val="solid"/>
-          </a:ln>
-        </p:spPr>
-      </p:sp>
-      <p:sp>
-        <p:nvSpPr>
-          <p:cNvPr id="25" name="Text 20"/>
-          <p:cNvSpPr txBox="1"/>
-          <p:nvPr/>
-        </p:nvSpPr>
-        <p:spPr>
-          <a:xfrm>
-            <a:off x="8463077" y="2971800"/>
-            <a:ext cx="2997098" cy="347472"/>
-          </a:xfrm>
-          <a:prstGeom prst="rect">
-            <a:avLst/>
-          </a:prstGeom>
-          <a:noFill/>
-          <a:ln/>
-        </p:spPr>
-        <p:txBody>
-          <a:bodyPr wrap="square" lIns="0" tIns="0" rIns="0" bIns="0" rtlCol="0" anchor="t"/>
-          <a:lstStyle/>
-          <a:p>
-            <a:pPr rtl="1" algn="r" indent="0" marL="0">
-              <a:buNone/>
-            </a:pPr>
-            <a:r>
-              <a:rPr lang="en-US" sz="1600" b="1" dirty="0">
-                <a:solidFill>
-                  <a:srgbClr val="8E2F3C"/>
-                </a:solidFill>
-                <a:latin typeface="IBM Plex Sans Arabic" pitchFamily="34" charset="0"/>
-                <a:ea typeface="IBM Plex Sans Arabic" pitchFamily="34" charset="-122"/>
-                <a:cs typeface="IBM Plex Sans Arabic" pitchFamily="34" charset="-120"/>
-              </a:rPr>
-              <a:t>الفحص الأول</a:t>
-            </a:r>
-            <a:endParaRPr lang="en-US" sz="1600" dirty="0"/>
-          </a:p>
-        </p:txBody>
-      </p:sp>
-      <p:sp>
-        <p:nvSpPr>
-          <p:cNvPr id="26" name="Text 21"/>
-          <p:cNvSpPr txBox="1"/>
-          <p:nvPr/>
-        </p:nvSpPr>
-        <p:spPr>
-          <a:xfrm>
-            <a:off x="8463077" y="3337560"/>
-            <a:ext cx="2997098" cy="566928"/>
-          </a:xfrm>
-          <a:prstGeom prst="rect">
-            <a:avLst/>
-          </a:prstGeom>
-          <a:noFill/>
-          <a:ln/>
-        </p:spPr>
-        <p:txBody>
-          <a:bodyPr wrap="square" lIns="0" tIns="0" rIns="0" bIns="0" rtlCol="0" anchor="t"/>
-          <a:lstStyle/>
-          <a:p>
-            <a:pPr rtl="1" algn="r" indent="0" marL="0">
-              <a:buNone/>
-            </a:pPr>
-            <a:r>
-              <a:rPr lang="en-US" sz="3000" b="1" dirty="0">
-                <a:solidFill>
-                  <a:srgbClr val="21141A"/>
-                </a:solidFill>
-                <a:latin typeface="IBM Plex Sans Arabic" pitchFamily="34" charset="0"/>
-                <a:ea typeface="IBM Plex Sans Arabic" pitchFamily="34" charset="-122"/>
-                <a:cs typeface="IBM Plex Sans Arabic" pitchFamily="34" charset="-120"/>
-              </a:rPr>
-              <a:t>مجاني</a:t>
-            </a:r>
-            <a:endParaRPr lang="en-US" sz="3000" dirty="0"/>
-          </a:p>
-        </p:txBody>
-      </p:sp>
-      <p:sp>
-        <p:nvSpPr>
-          <p:cNvPr id="27" name="Text 22"/>
-          <p:cNvSpPr txBox="1"/>
-          <p:nvPr/>
-        </p:nvSpPr>
-        <p:spPr>
-          <a:xfrm>
-            <a:off x="8463077" y="3904488"/>
-            <a:ext cx="2997098" cy="292608"/>
-          </a:xfrm>
-          <a:prstGeom prst="rect">
-            <a:avLst/>
-          </a:prstGeom>
-          <a:noFill/>
-          <a:ln/>
-        </p:spPr>
-        <p:txBody>
-          <a:bodyPr wrap="square" lIns="0" tIns="0" rIns="0" bIns="0" rtlCol="0" anchor="t"/>
-          <a:lstStyle/>
-          <a:p>
-            <a:pPr rtl="1" algn="r" indent="0" marL="0">
-              <a:buNone/>
-            </a:pPr>
-            <a:r>
-              <a:rPr lang="en-US" sz="1200" dirty="0">
-                <a:solidFill>
-                  <a:srgbClr val="7F6C72"/>
-                </a:solidFill>
-                <a:latin typeface="IBM Plex Sans Arabic" pitchFamily="34" charset="0"/>
-                <a:ea typeface="IBM Plex Sans Arabic" pitchFamily="34" charset="-122"/>
-                <a:cs typeface="IBM Plex Sans Arabic" pitchFamily="34" charset="-120"/>
-              </a:rPr>
-              <a:t>مرة واحدة، بدون بطاقة</a:t>
-            </a:r>
-            <a:endParaRPr lang="en-US" sz="1200" dirty="0"/>
-          </a:p>
-        </p:txBody>
-      </p:sp>
-      <p:sp>
-        <p:nvSpPr>
-          <p:cNvPr id="28" name="Shape 23"/>
-          <p:cNvSpPr/>
-          <p:nvPr/>
-        </p:nvSpPr>
-        <p:spPr>
-          <a:xfrm>
-            <a:off x="8463077" y="4297680"/>
-            <a:ext cx="2997098" cy="0"/>
-          </a:xfrm>
-          <a:prstGeom prst="line">
-            <a:avLst/>
-          </a:prstGeom>
-          <a:noFill/>
-          <a:ln w="9525">
-            <a:solidFill>
-              <a:srgbClr val="E3D5CC"/>
-            </a:solidFill>
-            <a:prstDash val="solid"/>
-          </a:ln>
-        </p:spPr>
-      </p:sp>
-      <p:sp>
-        <p:nvSpPr>
-          <p:cNvPr id="29" name="Shape 24"/>
-          <p:cNvSpPr/>
-          <p:nvPr/>
-        </p:nvSpPr>
-        <p:spPr>
-          <a:xfrm>
-            <a:off x="11368735" y="4498848"/>
-            <a:ext cx="91440" cy="91440"/>
-          </a:xfrm>
-          <a:prstGeom prst="rect">
-            <a:avLst/>
-          </a:prstGeom>
-          <a:solidFill>
-            <a:srgbClr val="8E2F3C"/>
-          </a:solidFill>
-          <a:ln/>
-        </p:spPr>
-      </p:sp>
-      <p:sp>
-        <p:nvSpPr>
-          <p:cNvPr id="30" name="Text 25"/>
-          <p:cNvSpPr txBox="1"/>
-          <p:nvPr/>
-        </p:nvSpPr>
-        <p:spPr>
-          <a:xfrm>
-            <a:off x="8463077" y="4389120"/>
-            <a:ext cx="2859938" cy="310896"/>
-          </a:xfrm>
-          <a:prstGeom prst="rect">
-            <a:avLst/>
-          </a:prstGeom>
-          <a:noFill/>
-          <a:ln/>
-        </p:spPr>
-        <p:txBody>
-          <a:bodyPr wrap="square" lIns="0" tIns="0" rIns="0" bIns="0" rtlCol="0" anchor="t"/>
-          <a:lstStyle/>
-          <a:p>
-            <a:pPr rtl="1" algn="r" indent="0" marL="0">
-              <a:buNone/>
-            </a:pPr>
-            <a:r>
-              <a:rPr lang="en-US" sz="1300" dirty="0">
-                <a:solidFill>
-                  <a:srgbClr val="21141A"/>
-                </a:solidFill>
-                <a:latin typeface="IBM Plex Sans Arabic" pitchFamily="34" charset="0"/>
-                <a:ea typeface="IBM Plex Sans Arabic" pitchFamily="34" charset="-122"/>
-                <a:cs typeface="IBM Plex Sans Arabic" pitchFamily="34" charset="-120"/>
-              </a:rPr>
-              <a:t>ربط حسابات سحابية متعددة</a:t>
-            </a:r>
-            <a:endParaRPr lang="en-US" sz="1300" dirty="0"/>
-          </a:p>
-        </p:txBody>
-      </p:sp>
-      <p:sp>
-        <p:nvSpPr>
-          <p:cNvPr id="31" name="Shape 26"/>
-          <p:cNvSpPr/>
-          <p:nvPr/>
-        </p:nvSpPr>
-        <p:spPr>
-          <a:xfrm>
-            <a:off x="11368735" y="4837176"/>
-            <a:ext cx="91440" cy="91440"/>
-          </a:xfrm>
-          <a:prstGeom prst="rect">
-            <a:avLst/>
-          </a:prstGeom>
-          <a:solidFill>
-            <a:srgbClr val="8E2F3C"/>
-          </a:solidFill>
-          <a:ln/>
-        </p:spPr>
-      </p:sp>
-      <p:sp>
-        <p:nvSpPr>
-          <p:cNvPr id="32" name="Text 27"/>
-          <p:cNvSpPr txBox="1"/>
-          <p:nvPr/>
-        </p:nvSpPr>
-        <p:spPr>
-          <a:xfrm>
-            <a:off x="8463077" y="4727448"/>
-            <a:ext cx="2859938" cy="310896"/>
-          </a:xfrm>
-          <a:prstGeom prst="rect">
-            <a:avLst/>
-          </a:prstGeom>
-          <a:noFill/>
-          <a:ln/>
-        </p:spPr>
-        <p:txBody>
-          <a:bodyPr wrap="square" lIns="0" tIns="0" rIns="0" bIns="0" rtlCol="0" anchor="t"/>
-          <a:lstStyle/>
-          <a:p>
-            <a:pPr rtl="1" algn="r" indent="0" marL="0">
-              <a:buNone/>
-            </a:pPr>
-            <a:r>
-              <a:rPr lang="en-US" sz="1300" dirty="0">
-                <a:solidFill>
-                  <a:srgbClr val="21141A"/>
-                </a:solidFill>
-                <a:latin typeface="IBM Plex Sans Arabic" pitchFamily="34" charset="0"/>
-                <a:ea typeface="IBM Plex Sans Arabic" pitchFamily="34" charset="-122"/>
-                <a:cs typeface="IBM Plex Sans Arabic" pitchFamily="34" charset="-120"/>
-              </a:rPr>
-              <a:t>تقرير كامل عن الهدر PDF</a:t>
-            </a:r>
-            <a:endParaRPr lang="en-US" sz="1300" dirty="0"/>
-          </a:p>
-        </p:txBody>
-      </p:sp>
-      <p:sp>
-        <p:nvSpPr>
-          <p:cNvPr id="33" name="Shape 28"/>
-          <p:cNvSpPr/>
-          <p:nvPr/>
-        </p:nvSpPr>
-        <p:spPr>
-          <a:xfrm>
-            <a:off x="11368735" y="5175504"/>
-            <a:ext cx="91440" cy="91440"/>
-          </a:xfrm>
-          <a:prstGeom prst="rect">
-            <a:avLst/>
-          </a:prstGeom>
-          <a:solidFill>
-            <a:srgbClr val="8E2F3C"/>
-          </a:solidFill>
-          <a:ln/>
-        </p:spPr>
-      </p:sp>
-      <p:sp>
-        <p:nvSpPr>
-          <p:cNvPr id="34" name="Text 29"/>
-          <p:cNvSpPr txBox="1"/>
-          <p:nvPr/>
-        </p:nvSpPr>
-        <p:spPr>
-          <a:xfrm>
-            <a:off x="8463077" y="5065776"/>
-            <a:ext cx="2859938" cy="310896"/>
-          </a:xfrm>
-          <a:prstGeom prst="rect">
-            <a:avLst/>
-          </a:prstGeom>
-          <a:noFill/>
-          <a:ln/>
-        </p:spPr>
-        <p:txBody>
-          <a:bodyPr wrap="square" lIns="0" tIns="0" rIns="0" bIns="0" rtlCol="0" anchor="t"/>
-          <a:lstStyle/>
-          <a:p>
-            <a:pPr rtl="1" algn="r" indent="0" marL="0">
-              <a:buNone/>
-            </a:pPr>
-            <a:r>
-              <a:rPr lang="en-US" sz="1300" dirty="0">
-                <a:solidFill>
-                  <a:srgbClr val="21141A"/>
-                </a:solidFill>
-                <a:latin typeface="IBM Plex Sans Arabic" pitchFamily="34" charset="0"/>
-                <a:ea typeface="IBM Plex Sans Arabic" pitchFamily="34" charset="-122"/>
-                <a:cs typeface="IBM Plex Sans Arabic" pitchFamily="34" charset="-120"/>
-              </a:rPr>
-              <a:t>أعلى فرص التوفير وقيمتها</a:t>
-            </a:r>
-            <a:endParaRPr lang="en-US" sz="1300" dirty="0"/>
-          </a:p>
-        </p:txBody>
-      </p:sp>
-      <p:sp>
-        <p:nvSpPr>
-          <p:cNvPr id="35" name="Shape 30"/>
-          <p:cNvSpPr/>
-          <p:nvPr/>
-        </p:nvSpPr>
-        <p:spPr>
-          <a:xfrm>
-            <a:off x="4322978" y="2743200"/>
-            <a:ext cx="3545738" cy="3063240"/>
-          </a:xfrm>
-          <a:prstGeom prst="roundRect">
-            <a:avLst>
-              <a:gd name="adj" fmla="val 5373"/>
-            </a:avLst>
-          </a:prstGeom>
-          <a:solidFill>
-            <a:srgbClr val="8E2F3C"/>
-          </a:solidFill>
-          <a:ln/>
-        </p:spPr>
-      </p:sp>
-      <p:sp>
-        <p:nvSpPr>
-          <p:cNvPr id="36" name="Text 31"/>
-          <p:cNvSpPr txBox="1"/>
-          <p:nvPr/>
-        </p:nvSpPr>
-        <p:spPr>
-          <a:xfrm>
-            <a:off x="4597298" y="2971800"/>
-            <a:ext cx="2997098" cy="347472"/>
-          </a:xfrm>
-          <a:prstGeom prst="rect">
-            <a:avLst/>
-          </a:prstGeom>
-          <a:noFill/>
-          <a:ln/>
-        </p:spPr>
-        <p:txBody>
-          <a:bodyPr wrap="square" lIns="0" tIns="0" rIns="0" bIns="0" rtlCol="0" anchor="t"/>
-          <a:lstStyle/>
-          <a:p>
-            <a:pPr rtl="1" algn="r" indent="0" marL="0">
-              <a:buNone/>
-            </a:pPr>
-            <a:r>
-              <a:rPr lang="en-US" sz="1600" b="1" dirty="0">
-                <a:solidFill>
-                  <a:srgbClr val="FBF6EE"/>
-                </a:solidFill>
-                <a:latin typeface="IBM Plex Sans Arabic" pitchFamily="34" charset="0"/>
-                <a:ea typeface="IBM Plex Sans Arabic" pitchFamily="34" charset="-122"/>
-                <a:cs typeface="IBM Plex Sans Arabic" pitchFamily="34" charset="-120"/>
-              </a:rPr>
-              <a:t>حسب الاستخدام</a:t>
-            </a:r>
-            <a:endParaRPr lang="en-US" sz="1600" dirty="0"/>
-          </a:p>
-        </p:txBody>
-      </p:sp>
-      <p:sp>
-        <p:nvSpPr>
-          <p:cNvPr id="37" name="Text 32"/>
-          <p:cNvSpPr txBox="1"/>
-          <p:nvPr/>
-        </p:nvSpPr>
-        <p:spPr>
-          <a:xfrm>
-            <a:off x="4597298" y="3337560"/>
-            <a:ext cx="2997098" cy="566928"/>
-          </a:xfrm>
-          <a:prstGeom prst="rect">
-            <a:avLst/>
-          </a:prstGeom>
-          <a:noFill/>
-          <a:ln/>
-        </p:spPr>
-        <p:txBody>
-          <a:bodyPr wrap="square" lIns="0" tIns="0" rIns="0" bIns="0" rtlCol="0" anchor="t"/>
-          <a:lstStyle/>
-          <a:p>
-            <a:pPr rtl="1" algn="r" indent="0" marL="0">
-              <a:buNone/>
-            </a:pPr>
-            <a:r>
-              <a:rPr lang="en-US" sz="3000" b="1" dirty="0">
-                <a:solidFill>
-                  <a:srgbClr val="FBF6EE"/>
-                </a:solidFill>
-                <a:latin typeface="IBM Plex Sans Arabic" pitchFamily="34" charset="0"/>
-                <a:ea typeface="IBM Plex Sans Arabic" pitchFamily="34" charset="-122"/>
-                <a:cs typeface="IBM Plex Sans Arabic" pitchFamily="34" charset="-120"/>
-              </a:rPr>
-              <a:t>من 15 ريال</a:t>
-            </a:r>
-            <a:endParaRPr lang="en-US" sz="3000" dirty="0"/>
-          </a:p>
-        </p:txBody>
-      </p:sp>
-      <p:sp>
-        <p:nvSpPr>
-          <p:cNvPr id="38" name="Text 33"/>
-          <p:cNvSpPr txBox="1"/>
-          <p:nvPr/>
-        </p:nvSpPr>
-        <p:spPr>
-          <a:xfrm>
-            <a:off x="4597298" y="3904488"/>
-            <a:ext cx="2997098" cy="292608"/>
-          </a:xfrm>
-          <a:prstGeom prst="rect">
-            <a:avLst/>
-          </a:prstGeom>
-          <a:noFill/>
-          <a:ln/>
-        </p:spPr>
-        <p:txBody>
-          <a:bodyPr wrap="square" lIns="0" tIns="0" rIns="0" bIns="0" rtlCol="0" anchor="t"/>
-          <a:lstStyle/>
-          <a:p>
-            <a:pPr rtl="1" algn="r" indent="0" marL="0">
-              <a:buNone/>
-            </a:pPr>
-            <a:r>
-              <a:rPr lang="en-US" sz="1200" dirty="0">
-                <a:solidFill>
-                  <a:srgbClr val="F1E4DF"/>
-                </a:solidFill>
-                <a:latin typeface="IBM Plex Sans Arabic" pitchFamily="34" charset="0"/>
-                <a:ea typeface="IBM Plex Sans Arabic" pitchFamily="34" charset="-122"/>
-                <a:cs typeface="IBM Plex Sans Arabic" pitchFamily="34" charset="-120"/>
-              </a:rPr>
-              <a:t>لكل مورد مُدار شهرياً</a:t>
-            </a:r>
-            <a:endParaRPr lang="en-US" sz="1200" dirty="0"/>
-          </a:p>
-        </p:txBody>
-      </p:sp>
-      <p:sp>
-        <p:nvSpPr>
-          <p:cNvPr id="39" name="Shape 34"/>
-          <p:cNvSpPr/>
-          <p:nvPr/>
-        </p:nvSpPr>
-        <p:spPr>
-          <a:xfrm>
-            <a:off x="4597298" y="4297680"/>
-            <a:ext cx="2997098" cy="0"/>
-          </a:xfrm>
-          <a:prstGeom prst="line">
-            <a:avLst/>
-          </a:prstGeom>
-          <a:noFill/>
-          <a:ln w="9525">
-            <a:solidFill>
-              <a:srgbClr val="D48A93"/>
-            </a:solidFill>
-            <a:prstDash val="solid"/>
-          </a:ln>
-        </p:spPr>
-      </p:sp>
-      <p:sp>
-        <p:nvSpPr>
-          <p:cNvPr id="40" name="Shape 35"/>
-          <p:cNvSpPr/>
-          <p:nvPr/>
-        </p:nvSpPr>
-        <p:spPr>
-          <a:xfrm>
-            <a:off x="7502957" y="4498848"/>
-            <a:ext cx="91440" cy="91440"/>
-          </a:xfrm>
-          <a:prstGeom prst="rect">
-            <a:avLst/>
-          </a:prstGeom>
-          <a:solidFill>
-            <a:srgbClr val="C9A46E"/>
-          </a:solidFill>
-          <a:ln/>
-        </p:spPr>
-      </p:sp>
-      <p:sp>
-        <p:nvSpPr>
-          <p:cNvPr id="41" name="Text 36"/>
-          <p:cNvSpPr txBox="1"/>
-          <p:nvPr/>
-        </p:nvSpPr>
-        <p:spPr>
-          <a:xfrm>
-            <a:off x="4597298" y="4389120"/>
-            <a:ext cx="2859938" cy="310896"/>
-          </a:xfrm>
-          <a:prstGeom prst="rect">
-            <a:avLst/>
-          </a:prstGeom>
-          <a:noFill/>
-          <a:ln/>
-        </p:spPr>
-        <p:txBody>
-          <a:bodyPr wrap="square" lIns="0" tIns="0" rIns="0" bIns="0" rtlCol="0" anchor="t"/>
-          <a:lstStyle/>
-          <a:p>
-            <a:pPr rtl="1" algn="r" indent="0" marL="0">
-              <a:buNone/>
-            </a:pPr>
-            <a:r>
-              <a:rPr lang="en-US" sz="1300" dirty="0">
-                <a:solidFill>
-                  <a:srgbClr val="FBF6EE"/>
-                </a:solidFill>
-                <a:latin typeface="IBM Plex Sans Arabic" pitchFamily="34" charset="0"/>
-                <a:ea typeface="IBM Plex Sans Arabic" pitchFamily="34" charset="-122"/>
-                <a:cs typeface="IBM Plex Sans Arabic" pitchFamily="34" charset="-120"/>
-              </a:rPr>
-              <a:t>فحص مستمر وتوقع للفاتورة</a:t>
-            </a:r>
-            <a:endParaRPr lang="en-US" sz="1300" dirty="0"/>
-          </a:p>
-        </p:txBody>
-      </p:sp>
-      <p:sp>
-        <p:nvSpPr>
-          <p:cNvPr id="42" name="Shape 37"/>
-          <p:cNvSpPr/>
-          <p:nvPr/>
-        </p:nvSpPr>
-        <p:spPr>
-          <a:xfrm>
-            <a:off x="7502957" y="4837176"/>
-            <a:ext cx="91440" cy="91440"/>
-          </a:xfrm>
-          <a:prstGeom prst="rect">
-            <a:avLst/>
-          </a:prstGeom>
-          <a:solidFill>
-            <a:srgbClr val="C9A46E"/>
-          </a:solidFill>
-          <a:ln/>
-        </p:spPr>
-      </p:sp>
-      <p:sp>
-        <p:nvSpPr>
-          <p:cNvPr id="43" name="Text 38"/>
-          <p:cNvSpPr txBox="1"/>
-          <p:nvPr/>
-        </p:nvSpPr>
-        <p:spPr>
-          <a:xfrm>
-            <a:off x="4597298" y="4727448"/>
-            <a:ext cx="2859938" cy="310896"/>
-          </a:xfrm>
-          <a:prstGeom prst="rect">
-            <a:avLst/>
-          </a:prstGeom>
-          <a:noFill/>
-          <a:ln/>
-        </p:spPr>
-        <p:txBody>
-          <a:bodyPr wrap="square" lIns="0" tIns="0" rIns="0" bIns="0" rtlCol="0" anchor="t"/>
-          <a:lstStyle/>
-          <a:p>
-            <a:pPr rtl="1" algn="r" indent="0" marL="0">
-              <a:buNone/>
-            </a:pPr>
-            <a:r>
-              <a:rPr lang="en-US" sz="1300" dirty="0">
-                <a:solidFill>
-                  <a:srgbClr val="FBF6EE"/>
-                </a:solidFill>
-                <a:latin typeface="IBM Plex Sans Arabic" pitchFamily="34" charset="0"/>
-                <a:ea typeface="IBM Plex Sans Arabic" pitchFamily="34" charset="-122"/>
-                <a:cs typeface="IBM Plex Sans Arabic" pitchFamily="34" charset="-120"/>
-              </a:rPr>
-              <a:t>تنبيهات واتساب وتيليجرام</a:t>
-            </a:r>
-            <a:endParaRPr lang="en-US" sz="1300" dirty="0"/>
-          </a:p>
-        </p:txBody>
-      </p:sp>
-      <p:sp>
-        <p:nvSpPr>
-          <p:cNvPr id="44" name="Shape 39"/>
-          <p:cNvSpPr/>
-          <p:nvPr/>
-        </p:nvSpPr>
-        <p:spPr>
-          <a:xfrm>
-            <a:off x="7502957" y="5175504"/>
-            <a:ext cx="91440" cy="91440"/>
-          </a:xfrm>
-          <a:prstGeom prst="rect">
-            <a:avLst/>
-          </a:prstGeom>
-          <a:solidFill>
-            <a:srgbClr val="C9A46E"/>
-          </a:solidFill>
-          <a:ln/>
-        </p:spPr>
-      </p:sp>
-      <p:sp>
-        <p:nvSpPr>
-          <p:cNvPr id="45" name="Text 40"/>
-          <p:cNvSpPr txBox="1"/>
-          <p:nvPr/>
-        </p:nvSpPr>
-        <p:spPr>
-          <a:xfrm>
-            <a:off x="4597298" y="5065776"/>
-            <a:ext cx="2859938" cy="310896"/>
-          </a:xfrm>
-          <a:prstGeom prst="rect">
-            <a:avLst/>
-          </a:prstGeom>
-          <a:noFill/>
-          <a:ln/>
-        </p:spPr>
-        <p:txBody>
-          <a:bodyPr wrap="square" lIns="0" tIns="0" rIns="0" bIns="0" rtlCol="0" anchor="t"/>
-          <a:lstStyle/>
-          <a:p>
-            <a:pPr rtl="1" algn="r" indent="0" marL="0">
-              <a:buNone/>
-            </a:pPr>
-            <a:r>
-              <a:rPr lang="en-US" sz="1300" dirty="0">
-                <a:solidFill>
-                  <a:srgbClr val="FBF6EE"/>
-                </a:solidFill>
-                <a:latin typeface="IBM Plex Sans Arabic" pitchFamily="34" charset="0"/>
-                <a:ea typeface="IBM Plex Sans Arabic" pitchFamily="34" charset="-122"/>
-                <a:cs typeface="IBM Plex Sans Arabic" pitchFamily="34" charset="-120"/>
-              </a:rPr>
-              <a:t>إصلاح بنقرة مع سجل تدقيق</a:t>
-            </a:r>
-            <a:endParaRPr lang="en-US" sz="1300" dirty="0"/>
-          </a:p>
-        </p:txBody>
-      </p:sp>
-      <p:sp>
-        <p:nvSpPr>
-          <p:cNvPr id="46" name="Shape 41"/>
-          <p:cNvSpPr/>
-          <p:nvPr/>
-        </p:nvSpPr>
-        <p:spPr>
-          <a:xfrm>
-            <a:off x="7502957" y="5513832"/>
-            <a:ext cx="91440" cy="91440"/>
-          </a:xfrm>
-          <a:prstGeom prst="rect">
-            <a:avLst/>
-          </a:prstGeom>
-          <a:solidFill>
-            <a:srgbClr val="C9A46E"/>
-          </a:solidFill>
-          <a:ln/>
-        </p:spPr>
-      </p:sp>
-      <p:sp>
-        <p:nvSpPr>
-          <p:cNvPr id="47" name="Text 42"/>
-          <p:cNvSpPr txBox="1"/>
-          <p:nvPr/>
-        </p:nvSpPr>
-        <p:spPr>
-          <a:xfrm>
-            <a:off x="4597298" y="5404104"/>
-            <a:ext cx="2859938" cy="310896"/>
-          </a:xfrm>
-          <a:prstGeom prst="rect">
-            <a:avLst/>
-          </a:prstGeom>
-          <a:noFill/>
-          <a:ln/>
-        </p:spPr>
-        <p:txBody>
-          <a:bodyPr wrap="square" lIns="0" tIns="0" rIns="0" bIns="0" rtlCol="0" anchor="t"/>
-          <a:lstStyle/>
-          <a:p>
-            <a:pPr rtl="1" algn="r" indent="0" marL="0">
-              <a:buNone/>
-            </a:pPr>
-            <a:r>
-              <a:rPr lang="en-US" sz="1300" dirty="0">
-                <a:solidFill>
-                  <a:srgbClr val="FBF6EE"/>
-                </a:solidFill>
-                <a:latin typeface="IBM Plex Sans Arabic" pitchFamily="34" charset="0"/>
-                <a:ea typeface="IBM Plex Sans Arabic" pitchFamily="34" charset="-122"/>
-                <a:cs typeface="IBM Plex Sans Arabic" pitchFamily="34" charset="-120"/>
-              </a:rPr>
-              <a:t>سقف شهري تحدده أنت</a:t>
-            </a:r>
-            <a:endParaRPr lang="en-US" sz="1300" dirty="0"/>
-          </a:p>
-        </p:txBody>
-      </p:sp>
-      <p:sp>
-        <p:nvSpPr>
-          <p:cNvPr id="48" name="Shape 43"/>
-          <p:cNvSpPr/>
-          <p:nvPr/>
-        </p:nvSpPr>
-        <p:spPr>
-          <a:xfrm>
-            <a:off x="457200" y="2743200"/>
-            <a:ext cx="3545738" cy="3063240"/>
-          </a:xfrm>
-          <a:prstGeom prst="roundRect">
-            <a:avLst>
-              <a:gd name="adj" fmla="val 5373"/>
-            </a:avLst>
-          </a:prstGeom>
-          <a:solidFill>
-            <a:srgbClr val="FFFBF8"/>
-          </a:solidFill>
-          <a:ln w="9525">
-            <a:solidFill>
-              <a:srgbClr val="E3D5CC"/>
-            </a:solidFill>
-            <a:prstDash val="solid"/>
-          </a:ln>
-        </p:spPr>
-      </p:sp>
-      <p:sp>
-        <p:nvSpPr>
-          <p:cNvPr id="49" name="Text 44"/>
-          <p:cNvSpPr txBox="1"/>
-          <p:nvPr/>
-        </p:nvSpPr>
-        <p:spPr>
-          <a:xfrm>
-            <a:off x="731520" y="2971800"/>
-            <a:ext cx="2997098" cy="347472"/>
-          </a:xfrm>
-          <a:prstGeom prst="rect">
-            <a:avLst/>
-          </a:prstGeom>
-          <a:noFill/>
-          <a:ln/>
-        </p:spPr>
-        <p:txBody>
-          <a:bodyPr wrap="square" lIns="0" tIns="0" rIns="0" bIns="0" rtlCol="0" anchor="t"/>
-          <a:lstStyle/>
-          <a:p>
-            <a:pPr rtl="1" algn="r" indent="0" marL="0">
-              <a:buNone/>
-            </a:pPr>
-            <a:r>
-              <a:rPr lang="en-US" sz="1600" b="1" dirty="0">
-                <a:solidFill>
-                  <a:srgbClr val="8E2F3C"/>
-                </a:solidFill>
-                <a:latin typeface="IBM Plex Sans Arabic" pitchFamily="34" charset="0"/>
-                <a:ea typeface="IBM Plex Sans Arabic" pitchFamily="34" charset="-122"/>
-                <a:cs typeface="IBM Plex Sans Arabic" pitchFamily="34" charset="-120"/>
-              </a:rPr>
-              <a:t>استشارات FinOps</a:t>
-            </a:r>
-            <a:endParaRPr lang="en-US" sz="1600" dirty="0"/>
-          </a:p>
-        </p:txBody>
-      </p:sp>
-      <p:sp>
-        <p:nvSpPr>
-          <p:cNvPr id="50" name="Text 45"/>
-          <p:cNvSpPr txBox="1"/>
-          <p:nvPr/>
-        </p:nvSpPr>
-        <p:spPr>
-          <a:xfrm>
-            <a:off x="731520" y="3337560"/>
-            <a:ext cx="2997098" cy="566928"/>
-          </a:xfrm>
-          <a:prstGeom prst="rect">
-            <a:avLst/>
-          </a:prstGeom>
-          <a:noFill/>
-          <a:ln/>
-        </p:spPr>
-        <p:txBody>
-          <a:bodyPr wrap="square" lIns="0" tIns="0" rIns="0" bIns="0" rtlCol="0" anchor="t"/>
-          <a:lstStyle/>
-          <a:p>
-            <a:pPr rtl="1" algn="r" indent="0" marL="0">
-              <a:buNone/>
-            </a:pPr>
-            <a:r>
-              <a:rPr lang="en-US" sz="3000" b="1" dirty="0">
-                <a:solidFill>
-                  <a:srgbClr val="21141A"/>
-                </a:solidFill>
-                <a:latin typeface="IBM Plex Sans Arabic" pitchFamily="34" charset="0"/>
-                <a:ea typeface="IBM Plex Sans Arabic" pitchFamily="34" charset="-122"/>
-                <a:cs typeface="IBM Plex Sans Arabic" pitchFamily="34" charset="-120"/>
-              </a:rPr>
-              <a:t>حسب الطلب</a:t>
-            </a:r>
-            <a:endParaRPr lang="en-US" sz="3000" dirty="0"/>
-          </a:p>
-        </p:txBody>
-      </p:sp>
-      <p:sp>
-        <p:nvSpPr>
-          <p:cNvPr id="51" name="Text 46"/>
-          <p:cNvSpPr txBox="1"/>
-          <p:nvPr/>
-        </p:nvSpPr>
-        <p:spPr>
-          <a:xfrm>
-            <a:off x="731520" y="3904488"/>
-            <a:ext cx="2997098" cy="292608"/>
-          </a:xfrm>
-          <a:prstGeom prst="rect">
-            <a:avLst/>
-          </a:prstGeom>
-          <a:noFill/>
-          <a:ln/>
-        </p:spPr>
-        <p:txBody>
-          <a:bodyPr wrap="square" lIns="0" tIns="0" rIns="0" bIns="0" rtlCol="0" anchor="t"/>
-          <a:lstStyle/>
-          <a:p>
-            <a:pPr rtl="1" algn="r" indent="0" marL="0">
-              <a:buNone/>
-            </a:pPr>
-            <a:r>
-              <a:rPr lang="en-US" sz="1200" dirty="0">
-                <a:solidFill>
-                  <a:srgbClr val="7F6C72"/>
-                </a:solidFill>
-                <a:latin typeface="IBM Plex Sans Arabic" pitchFamily="34" charset="0"/>
-                <a:ea typeface="IBM Plex Sans Arabic" pitchFamily="34" charset="-122"/>
-                <a:cs typeface="IBM Plex Sans Arabic" pitchFamily="34" charset="-120"/>
-              </a:rPr>
-              <a:t>لكل مشروع</a:t>
-            </a:r>
-            <a:endParaRPr lang="en-US" sz="1200" dirty="0"/>
-          </a:p>
-        </p:txBody>
-      </p:sp>
-      <p:sp>
-        <p:nvSpPr>
-          <p:cNvPr id="52" name="Shape 47"/>
-          <p:cNvSpPr/>
-          <p:nvPr/>
-        </p:nvSpPr>
-        <p:spPr>
-          <a:xfrm>
-            <a:off x="731520" y="4297680"/>
-            <a:ext cx="2997098" cy="0"/>
-          </a:xfrm>
-          <a:prstGeom prst="line">
-            <a:avLst/>
-          </a:prstGeom>
-          <a:noFill/>
-          <a:ln w="9525">
-            <a:solidFill>
-              <a:srgbClr val="E3D5CC"/>
-            </a:solidFill>
-            <a:prstDash val="solid"/>
-          </a:ln>
-        </p:spPr>
-      </p:sp>
-      <p:sp>
-        <p:nvSpPr>
-          <p:cNvPr id="53" name="Shape 48"/>
-          <p:cNvSpPr/>
-          <p:nvPr/>
-        </p:nvSpPr>
-        <p:spPr>
-          <a:xfrm>
-            <a:off x="3637178" y="4498848"/>
-            <a:ext cx="91440" cy="91440"/>
-          </a:xfrm>
-          <a:prstGeom prst="rect">
-            <a:avLst/>
-          </a:prstGeom>
-          <a:solidFill>
-            <a:srgbClr val="8E2F3C"/>
-          </a:solidFill>
-          <a:ln/>
-        </p:spPr>
-      </p:sp>
-      <p:sp>
-        <p:nvSpPr>
-          <p:cNvPr id="54" name="Text 49"/>
-          <p:cNvSpPr txBox="1"/>
-          <p:nvPr/>
-        </p:nvSpPr>
-        <p:spPr>
-          <a:xfrm>
-            <a:off x="731520" y="4389120"/>
-            <a:ext cx="2859938" cy="310896"/>
-          </a:xfrm>
-          <a:prstGeom prst="rect">
-            <a:avLst/>
-          </a:prstGeom>
-          <a:noFill/>
-          <a:ln/>
-        </p:spPr>
-        <p:txBody>
-          <a:bodyPr wrap="square" lIns="0" tIns="0" rIns="0" bIns="0" rtlCol="0" anchor="t"/>
-          <a:lstStyle/>
-          <a:p>
-            <a:pPr rtl="1" algn="r" indent="0" marL="0">
-              <a:buNone/>
-            </a:pPr>
-            <a:r>
-              <a:rPr lang="en-US" sz="1300" dirty="0">
-                <a:solidFill>
-                  <a:srgbClr val="21141A"/>
-                </a:solidFill>
-                <a:latin typeface="IBM Plex Sans Arabic" pitchFamily="34" charset="0"/>
-                <a:ea typeface="IBM Plex Sans Arabic" pitchFamily="34" charset="-122"/>
-                <a:cs typeface="IBM Plex Sans Arabic" pitchFamily="34" charset="-120"/>
-              </a:rPr>
-              <a:t>مهندس FinOps مخصص</a:t>
-            </a:r>
-            <a:endParaRPr lang="en-US" sz="1300" dirty="0"/>
-          </a:p>
-        </p:txBody>
-      </p:sp>
-      <p:sp>
-        <p:nvSpPr>
-          <p:cNvPr id="55" name="Shape 50"/>
-          <p:cNvSpPr/>
-          <p:nvPr/>
-        </p:nvSpPr>
-        <p:spPr>
-          <a:xfrm>
-            <a:off x="3637178" y="4837176"/>
-            <a:ext cx="91440" cy="91440"/>
-          </a:xfrm>
-          <a:prstGeom prst="rect">
-            <a:avLst/>
-          </a:prstGeom>
-          <a:solidFill>
-            <a:srgbClr val="8E2F3C"/>
-          </a:solidFill>
-          <a:ln/>
-        </p:spPr>
-      </p:sp>
-      <p:sp>
-        <p:nvSpPr>
-          <p:cNvPr id="56" name="Text 51"/>
-          <p:cNvSpPr txBox="1"/>
-          <p:nvPr/>
-        </p:nvSpPr>
-        <p:spPr>
-          <a:xfrm>
-            <a:off x="731520" y="4727448"/>
-            <a:ext cx="2859938" cy="310896"/>
-          </a:xfrm>
-          <a:prstGeom prst="rect">
-            <a:avLst/>
-          </a:prstGeom>
-          <a:noFill/>
-          <a:ln/>
-        </p:spPr>
-        <p:txBody>
-          <a:bodyPr wrap="square" lIns="0" tIns="0" rIns="0" bIns="0" rtlCol="0" anchor="t"/>
-          <a:lstStyle/>
-          <a:p>
-            <a:pPr rtl="1" algn="r" indent="0" marL="0">
-              <a:buNone/>
-            </a:pPr>
-            <a:r>
-              <a:rPr lang="en-US" sz="1300" dirty="0">
-                <a:solidFill>
-                  <a:srgbClr val="21141A"/>
-                </a:solidFill>
-                <a:latin typeface="IBM Plex Sans Arabic" pitchFamily="34" charset="0"/>
-                <a:ea typeface="IBM Plex Sans Arabic" pitchFamily="34" charset="-122"/>
-                <a:cs typeface="IBM Plex Sans Arabic" pitchFamily="34" charset="-120"/>
-              </a:rPr>
-              <a:t>خطط الالتزام والحجوزات</a:t>
-            </a:r>
-            <a:endParaRPr lang="en-US" sz="1300" dirty="0"/>
-          </a:p>
-        </p:txBody>
-      </p:sp>
-      <p:sp>
-        <p:nvSpPr>
-          <p:cNvPr id="57" name="Shape 52"/>
-          <p:cNvSpPr/>
-          <p:nvPr/>
-        </p:nvSpPr>
-        <p:spPr>
-          <a:xfrm>
-            <a:off x="3637178" y="5175504"/>
-            <a:ext cx="91440" cy="91440"/>
-          </a:xfrm>
-          <a:prstGeom prst="rect">
-            <a:avLst/>
-          </a:prstGeom>
-          <a:solidFill>
-            <a:srgbClr val="8E2F3C"/>
-          </a:solidFill>
-          <a:ln/>
-        </p:spPr>
-      </p:sp>
-      <p:sp>
-        <p:nvSpPr>
-          <p:cNvPr id="58" name="Text 53"/>
-          <p:cNvSpPr txBox="1"/>
-          <p:nvPr/>
-        </p:nvSpPr>
-        <p:spPr>
-          <a:xfrm>
-            <a:off x="731520" y="5065776"/>
-            <a:ext cx="2859938" cy="310896"/>
-          </a:xfrm>
-          <a:prstGeom prst="rect">
-            <a:avLst/>
-          </a:prstGeom>
-          <a:noFill/>
-          <a:ln/>
-        </p:spPr>
-        <p:txBody>
-          <a:bodyPr wrap="square" lIns="0" tIns="0" rIns="0" bIns="0" rtlCol="0" anchor="t"/>
-          <a:lstStyle/>
-          <a:p>
-            <a:pPr rtl="1" algn="r" indent="0" marL="0">
-              <a:buNone/>
-            </a:pPr>
-            <a:r>
-              <a:rPr lang="en-US" sz="1300" dirty="0">
-                <a:solidFill>
-                  <a:srgbClr val="21141A"/>
-                </a:solidFill>
-                <a:latin typeface="IBM Plex Sans Arabic" pitchFamily="34" charset="0"/>
-                <a:ea typeface="IBM Plex Sans Arabic" pitchFamily="34" charset="-122"/>
-                <a:cs typeface="IBM Plex Sans Arabic" pitchFamily="34" charset="-120"/>
-              </a:rPr>
-              <a:t>حوكمة التكاليف بين الفرق</a:t>
-            </a:r>
-            <a:endParaRPr lang="en-US" sz="1300" dirty="0"/>
-          </a:p>
-        </p:txBody>
-      </p:sp>
-      <p:sp>
-        <p:nvSpPr>
-          <p:cNvPr id="59" name="Text 54"/>
-          <p:cNvSpPr txBox="1"/>
-          <p:nvPr/>
-        </p:nvSpPr>
-        <p:spPr>
-          <a:xfrm>
-            <a:off x="457200" y="5897880"/>
-            <a:ext cx="11277295" cy="274320"/>
-          </a:xfrm>
-          <a:prstGeom prst="rect">
-            <a:avLst/>
-          </a:prstGeom>
-          <a:noFill/>
-          <a:ln/>
-        </p:spPr>
-        <p:txBody>
-          <a:bodyPr wrap="square" lIns="0" tIns="0" rIns="0" bIns="0" rtlCol="0" anchor="t"/>
-          <a:lstStyle/>
-          <a:p>
-            <a:pPr rtl="1" algn="ctr" indent="0" marL="0">
-              <a:buNone/>
-            </a:pPr>
-            <a:r>
-              <a:rPr lang="en-US" sz="1250" dirty="0">
-                <a:solidFill>
-                  <a:srgbClr val="7F6C72"/>
-                </a:solidFill>
-                <a:latin typeface="IBM Plex Sans Arabic" pitchFamily="34" charset="0"/>
-                <a:ea typeface="IBM Plex Sans Arabic" pitchFamily="34" charset="-122"/>
-                <a:cs typeface="IBM Plex Sans Arabic" pitchFamily="34" charset="-120"/>
-              </a:rPr>
-              <a:t>العميل يوفر أكثر مما يدفع: في المثال المحسوب 9,202 ريال توفير شهري.</a:t>
-            </a:r>
-            <a:endParaRPr lang="en-US" sz="1250" dirty="0"/>
-          </a:p>
-        </p:txBody>
-      </p:sp>
-    </p:spTree>
-  </p:cSld>
-  <p:clrMapOvr>
-    <a:masterClrMapping/>
-  </p:clrMapOvr>
-</p:sld>
-</file>
-
-<file path=ppt/slides/slide11.xml><?xml version="1.0" encoding="utf-8"?>
-<p:sld xmlns:a="http://schemas.openxmlformats.org/drawingml/2006/main" xmlns:r="http://schemas.openxmlformats.org/officeDocument/2006/relationships" xmlns:p="http://schemas.openxmlformats.org/presentationml/2006/main">
-  <p:cSld name="Slide 11">
-    <p:bg>
-      <p:bgPr>
-        <a:solidFill>
-          <a:srgbClr val="F8F3EF"/>
-        </a:solidFill>
-      </p:bgPr>
-    </p:bg>
-    <p:spTree>
-      <p:nvGrpSpPr>
-        <p:cNvPr id="1" name=""/>
-        <p:cNvGrpSpPr/>
-        <p:nvPr/>
-      </p:nvGrpSpPr>
-      <p:grpSpPr>
-        <a:xfrm>
-          <a:off x="0" y="0"/>
-          <a:ext cx="0" cy="0"/>
-          <a:chOff x="0" y="0"/>
-          <a:chExt cx="0" cy="0"/>
-        </a:xfrm>
-      </p:grpSpPr>
-      <p:sp>
-        <p:nvSpPr>
-          <p:cNvPr id="2" name="Shape 0"/>
-          <p:cNvSpPr/>
-          <p:nvPr/>
-        </p:nvSpPr>
-        <p:spPr>
-          <a:xfrm>
-            <a:off x="3017520" y="384048"/>
-            <a:ext cx="100584" cy="100584"/>
-          </a:xfrm>
-          <a:prstGeom prst="rect">
-            <a:avLst/>
-          </a:prstGeom>
-          <a:solidFill>
-            <a:srgbClr val="D48A93"/>
-          </a:solidFill>
-          <a:ln/>
-        </p:spPr>
-      </p:sp>
-      <p:sp>
-        <p:nvSpPr>
-          <p:cNvPr id="3" name="Shape 1"/>
-          <p:cNvSpPr/>
-          <p:nvPr/>
-        </p:nvSpPr>
-        <p:spPr>
-          <a:xfrm>
-            <a:off x="3429000" y="658368"/>
-            <a:ext cx="64008" cy="64008"/>
-          </a:xfrm>
-          <a:prstGeom prst="rect">
-            <a:avLst/>
-          </a:prstGeom>
-          <a:solidFill>
-            <a:srgbClr val="C9A46E"/>
-          </a:solidFill>
-          <a:ln/>
-        </p:spPr>
-      </p:sp>
-      <p:sp>
-        <p:nvSpPr>
-          <p:cNvPr id="4" name="Shape 2"/>
-          <p:cNvSpPr/>
-          <p:nvPr/>
-        </p:nvSpPr>
-        <p:spPr>
-          <a:xfrm>
-            <a:off x="4206240" y="329184"/>
-            <a:ext cx="82296" cy="82296"/>
-          </a:xfrm>
-          <a:prstGeom prst="rect">
-            <a:avLst/>
-          </a:prstGeom>
-          <a:solidFill>
-            <a:srgbClr val="7FB27A"/>
-          </a:solidFill>
-          <a:ln/>
-        </p:spPr>
-      </p:sp>
-      <p:sp>
-        <p:nvSpPr>
-          <p:cNvPr id="5" name="Shape 3"/>
-          <p:cNvSpPr/>
-          <p:nvPr/>
-        </p:nvSpPr>
-        <p:spPr>
-          <a:xfrm>
-            <a:off x="4937760" y="603504"/>
-            <a:ext cx="54864" cy="54864"/>
-          </a:xfrm>
-          <a:prstGeom prst="rect">
-            <a:avLst/>
-          </a:prstGeom>
-          <a:solidFill>
-            <a:srgbClr val="D48A93"/>
-          </a:solidFill>
-          <a:ln/>
-        </p:spPr>
-      </p:sp>
-      <p:sp>
-        <p:nvSpPr>
-          <p:cNvPr id="6" name="Shape 4"/>
-          <p:cNvSpPr/>
-          <p:nvPr/>
-        </p:nvSpPr>
-        <p:spPr>
-          <a:xfrm>
-            <a:off x="7223760" y="365760"/>
-            <a:ext cx="73152" cy="73152"/>
-          </a:xfrm>
-          <a:prstGeom prst="rect">
-            <a:avLst/>
-          </a:prstGeom>
-          <a:solidFill>
-            <a:srgbClr val="C9A46E"/>
-          </a:solidFill>
-          <a:ln/>
-        </p:spPr>
-      </p:sp>
-      <p:sp>
-        <p:nvSpPr>
-          <p:cNvPr id="7" name="Shape 5"/>
-          <p:cNvSpPr/>
-          <p:nvPr/>
-        </p:nvSpPr>
-        <p:spPr>
-          <a:xfrm>
-            <a:off x="7955280" y="640080"/>
-            <a:ext cx="100584" cy="100584"/>
-          </a:xfrm>
-          <a:prstGeom prst="rect">
-            <a:avLst/>
-          </a:prstGeom>
-          <a:solidFill>
-            <a:srgbClr val="D48A93"/>
-          </a:solidFill>
-          <a:ln/>
-        </p:spPr>
-      </p:sp>
-      <p:sp>
-        <p:nvSpPr>
-          <p:cNvPr id="8" name="Shape 6"/>
-          <p:cNvSpPr/>
-          <p:nvPr/>
-        </p:nvSpPr>
-        <p:spPr>
-          <a:xfrm>
-            <a:off x="8686800" y="329184"/>
-            <a:ext cx="54864" cy="54864"/>
-          </a:xfrm>
-          <a:prstGeom prst="rect">
-            <a:avLst/>
-          </a:prstGeom>
-          <a:solidFill>
-            <a:srgbClr val="7FB27A"/>
-          </a:solidFill>
-          <a:ln/>
-        </p:spPr>
-      </p:sp>
-      <p:sp>
-        <p:nvSpPr>
-          <p:cNvPr id="9" name="Shape 7"/>
-          <p:cNvSpPr/>
-          <p:nvPr/>
-        </p:nvSpPr>
-        <p:spPr>
-          <a:xfrm>
-            <a:off x="9372600" y="566928"/>
-            <a:ext cx="73152" cy="73152"/>
-          </a:xfrm>
-          <a:prstGeom prst="rect">
-            <a:avLst/>
-          </a:prstGeom>
-          <a:solidFill>
-            <a:srgbClr val="E3D5CC"/>
-          </a:solidFill>
-          <a:ln/>
-        </p:spPr>
-      </p:sp>
-      <p:sp>
-        <p:nvSpPr>
-          <p:cNvPr id="10" name="Shape 8"/>
-          <p:cNvSpPr/>
-          <p:nvPr/>
-        </p:nvSpPr>
-        <p:spPr>
-          <a:xfrm>
-            <a:off x="2194560" y="6473952"/>
-            <a:ext cx="64008" cy="64008"/>
-          </a:xfrm>
-          <a:prstGeom prst="rect">
-            <a:avLst/>
-          </a:prstGeom>
-          <a:solidFill>
-            <a:srgbClr val="C9A46E"/>
-          </a:solidFill>
-          <a:ln/>
-        </p:spPr>
-      </p:sp>
-      <p:sp>
-        <p:nvSpPr>
-          <p:cNvPr id="11" name="Shape 9"/>
-          <p:cNvSpPr/>
-          <p:nvPr/>
-        </p:nvSpPr>
-        <p:spPr>
-          <a:xfrm>
-            <a:off x="4480560" y="6547104"/>
-            <a:ext cx="45720" cy="45720"/>
-          </a:xfrm>
-          <a:prstGeom prst="rect">
-            <a:avLst/>
-          </a:prstGeom>
-          <a:solidFill>
-            <a:srgbClr val="D48A93"/>
-          </a:solidFill>
-          <a:ln/>
-        </p:spPr>
-      </p:sp>
-      <p:sp>
-        <p:nvSpPr>
-          <p:cNvPr id="12" name="Shape 10"/>
-          <p:cNvSpPr/>
-          <p:nvPr/>
-        </p:nvSpPr>
-        <p:spPr>
-          <a:xfrm>
-            <a:off x="7589520" y="6492240"/>
-            <a:ext cx="54864" cy="54864"/>
-          </a:xfrm>
-          <a:prstGeom prst="rect">
-            <a:avLst/>
-          </a:prstGeom>
-          <a:solidFill>
-            <a:srgbClr val="7FB27A"/>
-          </a:solidFill>
-          <a:ln/>
-        </p:spPr>
-      </p:sp>
-      <p:sp>
-        <p:nvSpPr>
-          <p:cNvPr id="13" name="Shape 11"/>
-          <p:cNvSpPr/>
-          <p:nvPr/>
-        </p:nvSpPr>
-        <p:spPr>
-          <a:xfrm>
-            <a:off x="9692640" y="6528816"/>
-            <a:ext cx="73152" cy="73152"/>
-          </a:xfrm>
-          <a:prstGeom prst="rect">
-            <a:avLst/>
-          </a:prstGeom>
-          <a:solidFill>
-            <a:srgbClr val="D48A93"/>
-          </a:solidFill>
-          <a:ln/>
-        </p:spPr>
-      </p:sp>
-      <p:pic>
-        <p:nvPicPr>
-          <p:cNvPr id="14" name="Image 0" descr="/tmp/claude-0/-home-claude/750ff410-f4aa-5276-9360-1e19d018b112/scratchpad/c/assets/ct-icon.png">    </p:cNvPr>
-          <p:cNvPicPr>
-            <a:picLocks noChangeAspect="1"/>
-          </p:cNvPicPr>
-          <p:nvPr/>
-        </p:nvPicPr>
-        <p:blipFill>
-          <a:blip r:embed="rId1"/>
-          <a:stretch>
-            <a:fillRect/>
-          </a:stretch>
-        </p:blipFill>
-        <p:spPr>
-          <a:xfrm>
-            <a:off x="457200" y="329184"/>
-            <a:ext cx="384048" cy="384048"/>
-          </a:xfrm>
-          <a:prstGeom prst="rect">
-            <a:avLst/>
-          </a:prstGeom>
-        </p:spPr>
-      </p:pic>
-      <p:sp>
-        <p:nvSpPr>
-          <p:cNvPr id="15" name="Text 12"/>
-          <p:cNvSpPr txBox="1"/>
-          <p:nvPr/>
-        </p:nvSpPr>
-        <p:spPr>
-          <a:xfrm>
-            <a:off x="932688" y="320040"/>
-            <a:ext cx="1828800" cy="402336"/>
-          </a:xfrm>
-          <a:prstGeom prst="rect">
-            <a:avLst/>
-          </a:prstGeom>
-          <a:noFill/>
-          <a:ln/>
-        </p:spPr>
-        <p:txBody>
-          <a:bodyPr wrap="square" lIns="0" tIns="0" rIns="0" bIns="0" rtlCol="0" anchor="ctr"/>
-          <a:lstStyle/>
-          <a:p>
-            <a:pPr algn="l" indent="0" marL="0">
-              <a:buNone/>
-            </a:pPr>
-            <a:r>
-              <a:rPr lang="en-US" sz="1800" b="1" dirty="0">
-                <a:solidFill>
-                  <a:srgbClr val="21141A"/>
-                </a:solidFill>
-                <a:latin typeface="IBM Plex Sans Arabic" pitchFamily="34" charset="0"/>
-                <a:ea typeface="IBM Plex Sans Arabic" pitchFamily="34" charset="-122"/>
-                <a:cs typeface="IBM Plex Sans Arabic" pitchFamily="34" charset="-120"/>
-              </a:rPr>
-              <a:t>CloudTrim</a:t>
-            </a:r>
-            <a:endParaRPr lang="en-US" sz="1800" dirty="0"/>
-          </a:p>
-        </p:txBody>
-      </p:sp>
-      <p:pic>
-        <p:nvPicPr>
-          <p:cNvPr id="16" name="Image 1" descr="/tmp/claude-0/-home-claude/750ff410-f4aa-5276-9360-1e19d018b112/scratchpad/c/assets/venturex-ink.png">    </p:cNvPr>
-          <p:cNvPicPr>
-            <a:picLocks noChangeAspect="1"/>
-          </p:cNvPicPr>
-          <p:nvPr/>
-        </p:nvPicPr>
-        <p:blipFill>
-          <a:blip r:embed="rId2"/>
-          <a:stretch>
-            <a:fillRect/>
-          </a:stretch>
-        </p:blipFill>
-        <p:spPr>
-          <a:xfrm>
-            <a:off x="10490566" y="256032"/>
-            <a:ext cx="1243929" cy="548640"/>
-          </a:xfrm>
-          <a:prstGeom prst="rect">
-            <a:avLst/>
-          </a:prstGeom>
-        </p:spPr>
-      </p:pic>
-      <p:sp>
-        <p:nvSpPr>
-          <p:cNvPr id="17" name="Shape 13"/>
-          <p:cNvSpPr/>
-          <p:nvPr/>
-        </p:nvSpPr>
-        <p:spPr>
-          <a:xfrm>
-            <a:off x="9759391" y="987552"/>
-            <a:ext cx="1975104" cy="384048"/>
-          </a:xfrm>
-          <a:prstGeom prst="roundRect">
-            <a:avLst>
-              <a:gd name="adj" fmla="val 50000"/>
-            </a:avLst>
-          </a:prstGeom>
-          <a:solidFill>
-            <a:srgbClr val="8E2F3C"/>
-          </a:solidFill>
-          <a:ln/>
-        </p:spPr>
-      </p:sp>
-      <p:sp>
-        <p:nvSpPr>
-          <p:cNvPr id="18" name="Text 14"/>
-          <p:cNvSpPr txBox="1"/>
-          <p:nvPr/>
-        </p:nvSpPr>
-        <p:spPr>
-          <a:xfrm>
-            <a:off x="9759391" y="987552"/>
-            <a:ext cx="1975104" cy="384048"/>
-          </a:xfrm>
-          <a:prstGeom prst="rect">
-            <a:avLst/>
-          </a:prstGeom>
-          <a:noFill/>
-          <a:ln/>
-        </p:spPr>
-        <p:txBody>
-          <a:bodyPr wrap="square" lIns="0" tIns="0" rIns="0" bIns="0" rtlCol="0" anchor="ctr"/>
-          <a:lstStyle/>
-          <a:p>
-            <a:pPr rtl="1" algn="ctr" indent="0" marL="0">
-              <a:buNone/>
-            </a:pPr>
-            <a:r>
-              <a:rPr lang="en-US" sz="1300" b="1" dirty="0">
-                <a:solidFill>
-                  <a:srgbClr val="FBF6EE"/>
-                </a:solidFill>
-                <a:latin typeface="IBM Plex Sans Arabic" pitchFamily="34" charset="0"/>
-                <a:ea typeface="IBM Plex Sans Arabic" pitchFamily="34" charset="-122"/>
-                <a:cs typeface="IBM Plex Sans Arabic" pitchFamily="34" charset="-120"/>
-              </a:rPr>
-              <a:t>الخطوة التالية</a:t>
-            </a:r>
-            <a:endParaRPr lang="en-US" sz="1300" dirty="0"/>
-          </a:p>
-        </p:txBody>
-      </p:sp>
-      <p:pic>
-        <p:nvPicPr>
-          <p:cNvPr id="19" name="Image 2" descr="/tmp/claude-0/-home-claude/750ff410-f4aa-5276-9360-1e19d018b112/scratchpad/c/assets/organizers-ink.png">    </p:cNvPr>
-          <p:cNvPicPr>
-            <a:picLocks noChangeAspect="1"/>
-          </p:cNvPicPr>
-          <p:nvPr/>
-        </p:nvPicPr>
-        <p:blipFill>
-          <a:blip r:embed="rId3"/>
-          <a:stretch>
-            <a:fillRect/>
-          </a:stretch>
-        </p:blipFill>
-        <p:spPr>
-          <a:xfrm>
-            <a:off x="457200" y="6309360"/>
-            <a:ext cx="848839" cy="365760"/>
-          </a:xfrm>
-          <a:prstGeom prst="rect">
-            <a:avLst/>
-          </a:prstGeom>
-        </p:spPr>
-      </p:pic>
-      <p:sp>
-        <p:nvSpPr>
-          <p:cNvPr id="20" name="Text 15"/>
-          <p:cNvSpPr txBox="1"/>
-          <p:nvPr/>
-        </p:nvSpPr>
-        <p:spPr>
-          <a:xfrm>
-            <a:off x="4270248" y="6382512"/>
-            <a:ext cx="3657600" cy="274320"/>
-          </a:xfrm>
-          <a:prstGeom prst="rect">
-            <a:avLst/>
-          </a:prstGeom>
-          <a:noFill/>
-          <a:ln/>
-        </p:spPr>
-        <p:txBody>
-          <a:bodyPr wrap="square" lIns="0" tIns="0" rIns="0" bIns="0" rtlCol="0" anchor="t"/>
-          <a:lstStyle/>
-          <a:p>
-            <a:pPr rtl="1" algn="ctr" indent="0" marL="0">
-              <a:buNone/>
-            </a:pPr>
-            <a:r>
-              <a:rPr lang="en-US" sz="1000" dirty="0">
-                <a:solidFill>
-                  <a:srgbClr val="7F6C72"/>
-                </a:solidFill>
-                <a:latin typeface="IBM Plex Sans Arabic" pitchFamily="34" charset="0"/>
-                <a:ea typeface="IBM Plex Sans Arabic" pitchFamily="34" charset="-122"/>
-                <a:cs typeface="IBM Plex Sans Arabic" pitchFamily="34" charset="-120"/>
-              </a:rPr>
-              <a:t>VentureX 2026 · فريق SSB</a:t>
-            </a:r>
-            <a:endParaRPr lang="en-US" sz="1000" dirty="0"/>
-          </a:p>
-        </p:txBody>
-      </p:sp>
-      <p:sp>
-        <p:nvSpPr>
-          <p:cNvPr id="21" name="Text 16"/>
-          <p:cNvSpPr txBox="1"/>
-          <p:nvPr/>
-        </p:nvSpPr>
-        <p:spPr>
-          <a:xfrm>
-            <a:off x="11185855" y="6382512"/>
-            <a:ext cx="548640" cy="274320"/>
-          </a:xfrm>
-          <a:prstGeom prst="rect">
-            <a:avLst/>
-          </a:prstGeom>
-          <a:noFill/>
-          <a:ln/>
-        </p:spPr>
-        <p:txBody>
-          <a:bodyPr wrap="square" lIns="0" tIns="0" rIns="0" bIns="0" rtlCol="0" anchor="t"/>
-          <a:lstStyle/>
-          <a:p>
-            <a:pPr algn="r" indent="0" marL="0">
-              <a:buNone/>
-            </a:pPr>
-            <a:r>
-              <a:rPr lang="en-US" sz="1100" b="1" dirty="0">
-                <a:solidFill>
-                  <a:srgbClr val="7F6C72"/>
-                </a:solidFill>
-                <a:latin typeface="IBM Plex Sans Arabic" pitchFamily="34" charset="0"/>
-                <a:ea typeface="IBM Plex Sans Arabic" pitchFamily="34" charset="-122"/>
-                <a:cs typeface="IBM Plex Sans Arabic" pitchFamily="34" charset="-120"/>
-              </a:rPr>
-              <a:t>11</a:t>
-            </a:r>
-            <a:endParaRPr lang="en-US" sz="1100" dirty="0"/>
-          </a:p>
-        </p:txBody>
-      </p:sp>
-      <p:sp>
-        <p:nvSpPr>
-          <p:cNvPr id="22" name="Text 17"/>
-          <p:cNvSpPr txBox="1"/>
-          <p:nvPr/>
-        </p:nvSpPr>
-        <p:spPr>
-          <a:xfrm>
-            <a:off x="457200" y="1463040"/>
-            <a:ext cx="11277295" cy="658368"/>
-          </a:xfrm>
-          <a:prstGeom prst="rect">
-            <a:avLst/>
-          </a:prstGeom>
-          <a:noFill/>
-          <a:ln/>
-        </p:spPr>
-        <p:txBody>
-          <a:bodyPr wrap="square" lIns="0" tIns="0" rIns="0" bIns="0" rtlCol="0" anchor="ctr"/>
-          <a:lstStyle/>
-          <a:p>
-            <a:pPr rtl="1" algn="r" indent="0" marL="0">
-              <a:buNone/>
-            </a:pPr>
-            <a:r>
-              <a:rPr lang="en-US" sz="3000" b="1" dirty="0">
-                <a:solidFill>
-                  <a:srgbClr val="21141A"/>
-                </a:solidFill>
-                <a:latin typeface="IBM Plex Sans Arabic" pitchFamily="34" charset="0"/>
-                <a:ea typeface="IBM Plex Sans Arabic" pitchFamily="34" charset="-122"/>
-                <a:cs typeface="IBM Plex Sans Arabic" pitchFamily="34" charset="-120"/>
-              </a:rPr>
-              <a:t>كيف نطوّر الحل، وما الدعم الذي نحتاجه</a:t>
-            </a:r>
-            <a:endParaRPr lang="en-US" sz="3000" dirty="0"/>
-          </a:p>
-        </p:txBody>
-      </p:sp>
-      <p:sp>
-        <p:nvSpPr>
-          <p:cNvPr id="23" name="Text 18"/>
-          <p:cNvSpPr txBox="1"/>
-          <p:nvPr/>
-        </p:nvSpPr>
-        <p:spPr>
-          <a:xfrm>
-            <a:off x="6035040" y="2286000"/>
-            <a:ext cx="5699455" cy="365760"/>
-          </a:xfrm>
-          <a:prstGeom prst="rect">
-            <a:avLst/>
-          </a:prstGeom>
-          <a:noFill/>
-          <a:ln/>
-        </p:spPr>
-        <p:txBody>
-          <a:bodyPr wrap="square" lIns="0" tIns="0" rIns="0" bIns="0" rtlCol="0" anchor="t"/>
-          <a:lstStyle/>
-          <a:p>
-            <a:pPr rtl="1" algn="r" indent="0" marL="0">
-              <a:buNone/>
-            </a:pPr>
-            <a:r>
-              <a:rPr lang="en-US" sz="1700" b="1" dirty="0">
-                <a:solidFill>
-                  <a:srgbClr val="8E2F3C"/>
-                </a:solidFill>
-                <a:latin typeface="IBM Plex Sans Arabic" pitchFamily="34" charset="0"/>
-                <a:ea typeface="IBM Plex Sans Arabic" pitchFamily="34" charset="-122"/>
-                <a:cs typeface="IBM Plex Sans Arabic" pitchFamily="34" charset="-120"/>
-              </a:rPr>
-              <a:t>التطوير المستقبلي</a:t>
-            </a:r>
-            <a:endParaRPr lang="en-US" sz="1700" dirty="0"/>
-          </a:p>
-        </p:txBody>
-      </p:sp>
-      <p:sp>
-        <p:nvSpPr>
-          <p:cNvPr id="24" name="Shape 19"/>
-          <p:cNvSpPr/>
-          <p:nvPr/>
-        </p:nvSpPr>
-        <p:spPr>
-          <a:xfrm>
-            <a:off x="6035040" y="2743200"/>
-            <a:ext cx="5699455" cy="932688"/>
-          </a:xfrm>
-          <a:prstGeom prst="roundRect">
-            <a:avLst>
-              <a:gd name="adj" fmla="val 13725"/>
-            </a:avLst>
-          </a:prstGeom>
-          <a:solidFill>
-            <a:srgbClr val="FFFBF8"/>
-          </a:solidFill>
-          <a:ln w="9525">
-            <a:solidFill>
-              <a:srgbClr val="E3D5CC"/>
-            </a:solidFill>
-            <a:prstDash val="solid"/>
-          </a:ln>
-        </p:spPr>
-      </p:sp>
-      <p:sp>
-        <p:nvSpPr>
-          <p:cNvPr id="25" name="Text 20"/>
-          <p:cNvSpPr txBox="1"/>
-          <p:nvPr/>
-        </p:nvSpPr>
-        <p:spPr>
-          <a:xfrm>
-            <a:off x="6309360" y="2862072"/>
-            <a:ext cx="5150815" cy="329184"/>
-          </a:xfrm>
-          <a:prstGeom prst="rect">
-            <a:avLst/>
-          </a:prstGeom>
-          <a:noFill/>
-          <a:ln/>
-        </p:spPr>
-        <p:txBody>
-          <a:bodyPr wrap="square" lIns="0" tIns="0" rIns="0" bIns="0" rtlCol="0" anchor="t"/>
-          <a:lstStyle/>
-          <a:p>
-            <a:pPr rtl="1" algn="r" indent="0" marL="0">
-              <a:buNone/>
-            </a:pPr>
-            <a:r>
-              <a:rPr lang="en-US" sz="1600" b="1" dirty="0">
-                <a:solidFill>
-                  <a:srgbClr val="21141A"/>
-                </a:solidFill>
-                <a:latin typeface="IBM Plex Sans Arabic" pitchFamily="34" charset="0"/>
-                <a:ea typeface="IBM Plex Sans Arabic" pitchFamily="34" charset="-122"/>
-                <a:cs typeface="IBM Plex Sans Arabic" pitchFamily="34" charset="-120"/>
-              </a:rPr>
-              <a:t>مقارنة السحابات</a:t>
-            </a:r>
-            <a:endParaRPr lang="en-US" sz="1600" dirty="0"/>
-          </a:p>
-        </p:txBody>
-      </p:sp>
-      <p:sp>
-        <p:nvSpPr>
-          <p:cNvPr id="26" name="Text 21"/>
-          <p:cNvSpPr txBox="1"/>
-          <p:nvPr/>
-        </p:nvSpPr>
-        <p:spPr>
-          <a:xfrm>
-            <a:off x="6309360" y="3200400"/>
-            <a:ext cx="5150815" cy="411480"/>
-          </a:xfrm>
-          <a:prstGeom prst="rect">
-            <a:avLst/>
-          </a:prstGeom>
-          <a:noFill/>
-          <a:ln/>
-        </p:spPr>
-        <p:txBody>
-          <a:bodyPr wrap="square" lIns="0" tIns="0" rIns="0" bIns="0" rtlCol="0" anchor="t"/>
-          <a:lstStyle/>
-          <a:p>
-            <a:pPr rtl="1" algn="r" indent="0" marL="0">
-              <a:buNone/>
-            </a:pPr>
-            <a:r>
-              <a:rPr lang="en-US" sz="1250" dirty="0">
-                <a:solidFill>
-                  <a:srgbClr val="7F6C72"/>
-                </a:solidFill>
-                <a:latin typeface="IBM Plex Sans Arabic" pitchFamily="34" charset="0"/>
-                <a:ea typeface="IBM Plex Sans Arabic" pitchFamily="34" charset="-122"/>
-                <a:cs typeface="IBM Plex Sans Arabic" pitchFamily="34" charset="-120"/>
-              </a:rPr>
-              <a:t>مقارنة التكاليف بين المزودين واقتراح الانتقال للسحابة الأوفر بناءً على التحليل المالي.</a:t>
-            </a:r>
-            <a:endParaRPr lang="en-US" sz="1250" dirty="0"/>
-          </a:p>
-        </p:txBody>
-      </p:sp>
-      <p:sp>
-        <p:nvSpPr>
-          <p:cNvPr id="27" name="Shape 22"/>
-          <p:cNvSpPr/>
-          <p:nvPr/>
-        </p:nvSpPr>
-        <p:spPr>
-          <a:xfrm>
-            <a:off x="6035040" y="3822192"/>
-            <a:ext cx="5699455" cy="932688"/>
-          </a:xfrm>
-          <a:prstGeom prst="roundRect">
-            <a:avLst>
-              <a:gd name="adj" fmla="val 13725"/>
-            </a:avLst>
-          </a:prstGeom>
-          <a:solidFill>
-            <a:srgbClr val="FFFBF8"/>
-          </a:solidFill>
-          <a:ln w="9525">
-            <a:solidFill>
-              <a:srgbClr val="E3D5CC"/>
-            </a:solidFill>
-            <a:prstDash val="solid"/>
-          </a:ln>
-        </p:spPr>
-      </p:sp>
-      <p:sp>
-        <p:nvSpPr>
-          <p:cNvPr id="28" name="Text 23"/>
-          <p:cNvSpPr txBox="1"/>
-          <p:nvPr/>
-        </p:nvSpPr>
-        <p:spPr>
-          <a:xfrm>
-            <a:off x="6309360" y="3941064"/>
-            <a:ext cx="5150815" cy="329184"/>
-          </a:xfrm>
-          <a:prstGeom prst="rect">
-            <a:avLst/>
-          </a:prstGeom>
-          <a:noFill/>
-          <a:ln/>
-        </p:spPr>
-        <p:txBody>
-          <a:bodyPr wrap="square" lIns="0" tIns="0" rIns="0" bIns="0" rtlCol="0" anchor="t"/>
-          <a:lstStyle/>
-          <a:p>
-            <a:pPr rtl="1" algn="r" indent="0" marL="0">
-              <a:buNone/>
-            </a:pPr>
-            <a:r>
-              <a:rPr lang="en-US" sz="1600" b="1" dirty="0">
-                <a:solidFill>
-                  <a:srgbClr val="21141A"/>
-                </a:solidFill>
-                <a:latin typeface="IBM Plex Sans Arabic" pitchFamily="34" charset="0"/>
-                <a:ea typeface="IBM Plex Sans Arabic" pitchFamily="34" charset="-122"/>
-                <a:cs typeface="IBM Plex Sans Arabic" pitchFamily="34" charset="-120"/>
-              </a:rPr>
-              <a:t>البنية الهجينة</a:t>
-            </a:r>
-            <a:endParaRPr lang="en-US" sz="1600" dirty="0"/>
-          </a:p>
-        </p:txBody>
-      </p:sp>
-      <p:sp>
-        <p:nvSpPr>
-          <p:cNvPr id="29" name="Text 24"/>
-          <p:cNvSpPr txBox="1"/>
-          <p:nvPr/>
-        </p:nvSpPr>
-        <p:spPr>
-          <a:xfrm>
-            <a:off x="6309360" y="4279392"/>
-            <a:ext cx="5150815" cy="411480"/>
-          </a:xfrm>
-          <a:prstGeom prst="rect">
-            <a:avLst/>
-          </a:prstGeom>
-          <a:noFill/>
-          <a:ln/>
-        </p:spPr>
-        <p:txBody>
-          <a:bodyPr wrap="square" lIns="0" tIns="0" rIns="0" bIns="0" rtlCol="0" anchor="t"/>
-          <a:lstStyle/>
-          <a:p>
-            <a:pPr rtl="1" algn="r" indent="0" marL="0">
-              <a:buNone/>
-            </a:pPr>
-            <a:r>
-              <a:rPr lang="en-US" sz="1250" dirty="0">
-                <a:solidFill>
-                  <a:srgbClr val="7F6C72"/>
-                </a:solidFill>
-                <a:latin typeface="IBM Plex Sans Arabic" pitchFamily="34" charset="0"/>
-                <a:ea typeface="IBM Plex Sans Arabic" pitchFamily="34" charset="-122"/>
-                <a:cs typeface="IBM Plex Sans Arabic" pitchFamily="34" charset="-120"/>
-              </a:rPr>
-              <a:t>ربط السيرفرات المحلية (On-Premises) مع المنصات السحابية في لوحة واحدة.</a:t>
-            </a:r>
-            <a:endParaRPr lang="en-US" sz="1250" dirty="0"/>
-          </a:p>
-        </p:txBody>
-      </p:sp>
-      <p:sp>
-        <p:nvSpPr>
-          <p:cNvPr id="30" name="Shape 25"/>
-          <p:cNvSpPr/>
-          <p:nvPr/>
-        </p:nvSpPr>
-        <p:spPr>
-          <a:xfrm>
-            <a:off x="6035040" y="4901184"/>
-            <a:ext cx="5699455" cy="932688"/>
-          </a:xfrm>
-          <a:prstGeom prst="roundRect">
-            <a:avLst>
-              <a:gd name="adj" fmla="val 13725"/>
-            </a:avLst>
-          </a:prstGeom>
-          <a:solidFill>
-            <a:srgbClr val="FFFBF8"/>
-          </a:solidFill>
-          <a:ln w="9525">
-            <a:solidFill>
-              <a:srgbClr val="E3D5CC"/>
-            </a:solidFill>
-            <a:prstDash val="solid"/>
-          </a:ln>
-        </p:spPr>
-      </p:sp>
-      <p:sp>
-        <p:nvSpPr>
-          <p:cNvPr id="31" name="Text 26"/>
-          <p:cNvSpPr txBox="1"/>
-          <p:nvPr/>
-        </p:nvSpPr>
-        <p:spPr>
-          <a:xfrm>
-            <a:off x="6309360" y="5020056"/>
-            <a:ext cx="5150815" cy="329184"/>
-          </a:xfrm>
-          <a:prstGeom prst="rect">
-            <a:avLst/>
-          </a:prstGeom>
-          <a:noFill/>
-          <a:ln/>
-        </p:spPr>
-        <p:txBody>
-          <a:bodyPr wrap="square" lIns="0" tIns="0" rIns="0" bIns="0" rtlCol="0" anchor="t"/>
-          <a:lstStyle/>
-          <a:p>
-            <a:pPr rtl="1" algn="r" indent="0" marL="0">
-              <a:buNone/>
-            </a:pPr>
-            <a:r>
-              <a:rPr lang="en-US" sz="1600" b="1" dirty="0">
-                <a:solidFill>
-                  <a:srgbClr val="21141A"/>
-                </a:solidFill>
-                <a:latin typeface="IBM Plex Sans Arabic" pitchFamily="34" charset="0"/>
-                <a:ea typeface="IBM Plex Sans Arabic" pitchFamily="34" charset="-122"/>
-                <a:cs typeface="IBM Plex Sans Arabic" pitchFamily="34" charset="-120"/>
-              </a:rPr>
-              <a:t>مراقبة وإنذار مبكر 24/7</a:t>
-            </a:r>
-            <a:endParaRPr lang="en-US" sz="1600" dirty="0"/>
-          </a:p>
-        </p:txBody>
-      </p:sp>
-      <p:sp>
-        <p:nvSpPr>
-          <p:cNvPr id="32" name="Text 27"/>
-          <p:cNvSpPr txBox="1"/>
-          <p:nvPr/>
-        </p:nvSpPr>
-        <p:spPr>
-          <a:xfrm>
-            <a:off x="6309360" y="5358384"/>
-            <a:ext cx="5150815" cy="411480"/>
-          </a:xfrm>
-          <a:prstGeom prst="rect">
-            <a:avLst/>
-          </a:prstGeom>
-          <a:noFill/>
-          <a:ln/>
-        </p:spPr>
-        <p:txBody>
-          <a:bodyPr wrap="square" lIns="0" tIns="0" rIns="0" bIns="0" rtlCol="0" anchor="t"/>
-          <a:lstStyle/>
-          <a:p>
-            <a:pPr rtl="1" algn="r" indent="0" marL="0">
-              <a:buNone/>
-            </a:pPr>
-            <a:r>
-              <a:rPr lang="en-US" sz="1250" dirty="0">
-                <a:solidFill>
-                  <a:srgbClr val="7F6C72"/>
-                </a:solidFill>
-                <a:latin typeface="IBM Plex Sans Arabic" pitchFamily="34" charset="0"/>
-                <a:ea typeface="IBM Plex Sans Arabic" pitchFamily="34" charset="-122"/>
-                <a:cs typeface="IBM Plex Sans Arabic" pitchFamily="34" charset="-120"/>
-              </a:rPr>
-              <a:t>تنبيه واتساب فوري عند أي ارتفاع مفاجئ في الاستهلاك (Cost Spike).</a:t>
-            </a:r>
-            <a:endParaRPr lang="en-US" sz="1250" dirty="0"/>
-          </a:p>
-        </p:txBody>
-      </p:sp>
-      <p:sp>
-        <p:nvSpPr>
-          <p:cNvPr id="33" name="Shape 28"/>
-          <p:cNvSpPr/>
-          <p:nvPr/>
-        </p:nvSpPr>
-        <p:spPr>
-          <a:xfrm>
-            <a:off x="457200" y="2286000"/>
-            <a:ext cx="5303520" cy="3712464"/>
-          </a:xfrm>
-          <a:prstGeom prst="roundRect">
-            <a:avLst>
-              <a:gd name="adj" fmla="val 4433"/>
-            </a:avLst>
-          </a:prstGeom>
-          <a:solidFill>
-            <a:srgbClr val="8E2F3C"/>
-          </a:solidFill>
-          <a:ln/>
-        </p:spPr>
-      </p:sp>
-      <p:sp>
-        <p:nvSpPr>
-          <p:cNvPr id="34" name="Text 29"/>
-          <p:cNvSpPr txBox="1"/>
-          <p:nvPr/>
-        </p:nvSpPr>
-        <p:spPr>
-          <a:xfrm>
-            <a:off x="777240" y="2514600"/>
-            <a:ext cx="4663440" cy="384048"/>
-          </a:xfrm>
-          <a:prstGeom prst="rect">
-            <a:avLst/>
-          </a:prstGeom>
-          <a:noFill/>
-          <a:ln/>
-        </p:spPr>
-        <p:txBody>
-          <a:bodyPr wrap="square" lIns="0" tIns="0" rIns="0" bIns="0" rtlCol="0" anchor="t"/>
-          <a:lstStyle/>
-          <a:p>
-            <a:pPr rtl="1" algn="r" indent="0" marL="0">
-              <a:buNone/>
-            </a:pPr>
-            <a:r>
-              <a:rPr lang="en-US" sz="1800" b="1" dirty="0">
-                <a:solidFill>
-                  <a:srgbClr val="FBF6EE"/>
-                </a:solidFill>
-                <a:latin typeface="IBM Plex Sans Arabic" pitchFamily="34" charset="0"/>
-                <a:ea typeface="IBM Plex Sans Arabic" pitchFamily="34" charset="-122"/>
-                <a:cs typeface="IBM Plex Sans Arabic" pitchFamily="34" charset="-120"/>
-              </a:rPr>
-              <a:t>التوجيه والدعم</a:t>
-            </a:r>
-            <a:endParaRPr lang="en-US" sz="1800" dirty="0"/>
-          </a:p>
-        </p:txBody>
-      </p:sp>
-      <p:sp>
-        <p:nvSpPr>
-          <p:cNvPr id="35" name="Shape 30"/>
-          <p:cNvSpPr/>
-          <p:nvPr/>
-        </p:nvSpPr>
-        <p:spPr>
-          <a:xfrm>
-            <a:off x="5321808" y="3154680"/>
-            <a:ext cx="118872" cy="118872"/>
-          </a:xfrm>
-          <a:prstGeom prst="rect">
-            <a:avLst/>
-          </a:prstGeom>
-          <a:solidFill>
-            <a:srgbClr val="C9A46E"/>
-          </a:solidFill>
-          <a:ln/>
-        </p:spPr>
-      </p:sp>
-      <p:sp>
-        <p:nvSpPr>
-          <p:cNvPr id="36" name="Text 31"/>
-          <p:cNvSpPr txBox="1"/>
-          <p:nvPr/>
-        </p:nvSpPr>
-        <p:spPr>
-          <a:xfrm>
-            <a:off x="777240" y="3063240"/>
-            <a:ext cx="4434840" cy="822960"/>
-          </a:xfrm>
-          <a:prstGeom prst="rect">
-            <a:avLst/>
-          </a:prstGeom>
-          <a:noFill/>
-          <a:ln/>
-        </p:spPr>
-        <p:txBody>
-          <a:bodyPr wrap="square" lIns="0" tIns="0" rIns="0" bIns="0" rtlCol="0" anchor="t"/>
-          <a:lstStyle/>
-          <a:p>
-            <a:pPr rtl="1" algn="r" indent="0" marL="0">
-              <a:lnSpc>
-                <a:spcPct val="110000"/>
-              </a:lnSpc>
-              <a:buNone/>
-            </a:pPr>
-            <a:r>
-              <a:rPr lang="en-US" sz="1350" dirty="0">
-                <a:solidFill>
-                  <a:srgbClr val="FBF6EE"/>
-                </a:solidFill>
-                <a:latin typeface="IBM Plex Sans Arabic" pitchFamily="34" charset="0"/>
-                <a:ea typeface="IBM Plex Sans Arabic" pitchFamily="34" charset="-122"/>
-                <a:cs typeface="IBM Plex Sans Arabic" pitchFamily="34" charset="-120"/>
-              </a:rPr>
-              <a:t>توجيه من خبراء السحابة وأمن المعلومات لتطوير نموذج الذكاء الاصطناعي ورفع كفاءة الأمان وتوطين البيانات.</a:t>
-            </a:r>
-            <a:endParaRPr lang="en-US" sz="1350" dirty="0"/>
-          </a:p>
-        </p:txBody>
-      </p:sp>
-      <p:sp>
-        <p:nvSpPr>
-          <p:cNvPr id="37" name="Shape 32"/>
-          <p:cNvSpPr/>
-          <p:nvPr/>
-        </p:nvSpPr>
-        <p:spPr>
-          <a:xfrm>
-            <a:off x="5321808" y="4069080"/>
-            <a:ext cx="118872" cy="118872"/>
-          </a:xfrm>
-          <a:prstGeom prst="rect">
-            <a:avLst/>
-          </a:prstGeom>
-          <a:solidFill>
-            <a:srgbClr val="C9A46E"/>
-          </a:solidFill>
-          <a:ln/>
-        </p:spPr>
-      </p:sp>
-      <p:sp>
-        <p:nvSpPr>
-          <p:cNvPr id="38" name="Text 33"/>
-          <p:cNvSpPr txBox="1"/>
-          <p:nvPr/>
-        </p:nvSpPr>
-        <p:spPr>
-          <a:xfrm>
-            <a:off x="777240" y="3977640"/>
-            <a:ext cx="4434840" cy="822960"/>
-          </a:xfrm>
-          <a:prstGeom prst="rect">
-            <a:avLst/>
-          </a:prstGeom>
-          <a:noFill/>
-          <a:ln/>
-        </p:spPr>
-        <p:txBody>
-          <a:bodyPr wrap="square" lIns="0" tIns="0" rIns="0" bIns="0" rtlCol="0" anchor="t"/>
-          <a:lstStyle/>
-          <a:p>
-            <a:pPr rtl="1" algn="r" indent="0" marL="0">
-              <a:lnSpc>
-                <a:spcPct val="110000"/>
-              </a:lnSpc>
-              <a:buNone/>
-            </a:pPr>
-            <a:r>
-              <a:rPr lang="en-US" sz="1350" dirty="0">
-                <a:solidFill>
-                  <a:srgbClr val="FBF6EE"/>
-                </a:solidFill>
-                <a:latin typeface="IBM Plex Sans Arabic" pitchFamily="34" charset="0"/>
-                <a:ea typeface="IBM Plex Sans Arabic" pitchFamily="34" charset="-122"/>
-                <a:cs typeface="IBM Plex Sans Arabic" pitchFamily="34" charset="-120"/>
-              </a:rPr>
-              <a:t>شراكة مع مزود سحابة محلي لاختبار الربط مع STC Cloud أو SCCC أو CNTXT.</a:t>
-            </a:r>
-            <a:endParaRPr lang="en-US" sz="1350" dirty="0"/>
-          </a:p>
-        </p:txBody>
-      </p:sp>
-      <p:sp>
-        <p:nvSpPr>
-          <p:cNvPr id="39" name="Shape 34"/>
-          <p:cNvSpPr/>
-          <p:nvPr/>
-        </p:nvSpPr>
-        <p:spPr>
-          <a:xfrm>
-            <a:off x="5321808" y="4983480"/>
-            <a:ext cx="118872" cy="118872"/>
-          </a:xfrm>
-          <a:prstGeom prst="rect">
-            <a:avLst/>
-          </a:prstGeom>
-          <a:solidFill>
-            <a:srgbClr val="C9A46E"/>
-          </a:solidFill>
-          <a:ln/>
-        </p:spPr>
-      </p:sp>
-      <p:sp>
-        <p:nvSpPr>
-          <p:cNvPr id="40" name="Text 35"/>
-          <p:cNvSpPr txBox="1"/>
-          <p:nvPr/>
-        </p:nvSpPr>
-        <p:spPr>
-          <a:xfrm>
-            <a:off x="777240" y="4892040"/>
-            <a:ext cx="4434840" cy="822960"/>
-          </a:xfrm>
-          <a:prstGeom prst="rect">
-            <a:avLst/>
-          </a:prstGeom>
-          <a:noFill/>
-          <a:ln/>
-        </p:spPr>
-        <p:txBody>
-          <a:bodyPr wrap="square" lIns="0" tIns="0" rIns="0" bIns="0" rtlCol="0" anchor="t"/>
-          <a:lstStyle/>
-          <a:p>
-            <a:pPr rtl="1" algn="r" indent="0" marL="0">
-              <a:lnSpc>
-                <a:spcPct val="110000"/>
-              </a:lnSpc>
-              <a:buNone/>
-            </a:pPr>
-            <a:r>
-              <a:rPr lang="en-US" sz="1350" dirty="0">
-                <a:solidFill>
-                  <a:srgbClr val="FBF6EE"/>
-                </a:solidFill>
-                <a:latin typeface="IBM Plex Sans Arabic" pitchFamily="34" charset="0"/>
-                <a:ea typeface="IBM Plex Sans Arabic" pitchFamily="34" charset="-122"/>
-                <a:cs typeface="IBM Plex Sans Arabic" pitchFamily="34" charset="-120"/>
-              </a:rPr>
-              <a:t>تجربة الفحص المجاني مع 10 شركات حقيقية للتحقق من حجم الهدر.</a:t>
-            </a:r>
-            <a:endParaRPr lang="en-US" sz="1350" dirty="0"/>
-          </a:p>
-        </p:txBody>
-      </p:sp>
-    </p:spTree>
-  </p:cSld>
-  <p:clrMapOvr>
-    <a:masterClrMapping/>
-  </p:clrMapOvr>
-</p:sld>
-</file>
-
-<file path=ppt/slides/slide12.xml><?xml version="1.0" encoding="utf-8"?>
-<p:sld xmlns:a="http://schemas.openxmlformats.org/drawingml/2006/main" xmlns:r="http://schemas.openxmlformats.org/officeDocument/2006/relationships" xmlns:p="http://schemas.openxmlformats.org/presentationml/2006/main">
-  <p:cSld name="Slide 12">
-    <p:bg>
-      <p:bgPr>
-        <a:solidFill>
-          <a:srgbClr val="F8F3EF"/>
-        </a:solidFill>
-      </p:bgPr>
-    </p:bg>
-    <p:spTree>
-      <p:nvGrpSpPr>
-        <p:cNvPr id="1" name=""/>
-        <p:cNvGrpSpPr/>
-        <p:nvPr/>
-      </p:nvGrpSpPr>
-      <p:grpSpPr>
-        <a:xfrm>
-          <a:off x="0" y="0"/>
-          <a:ext cx="0" cy="0"/>
-          <a:chOff x="0" y="0"/>
-          <a:chExt cx="0" cy="0"/>
-        </a:xfrm>
-      </p:grpSpPr>
-      <p:sp>
-        <p:nvSpPr>
-          <p:cNvPr id="2" name="Shape 0"/>
-          <p:cNvSpPr/>
-          <p:nvPr/>
-        </p:nvSpPr>
-        <p:spPr>
-          <a:xfrm>
-            <a:off x="3017520" y="384048"/>
-            <a:ext cx="100584" cy="100584"/>
-          </a:xfrm>
-          <a:prstGeom prst="rect">
-            <a:avLst/>
-          </a:prstGeom>
-          <a:solidFill>
-            <a:srgbClr val="D48A93"/>
-          </a:solidFill>
-          <a:ln/>
-        </p:spPr>
-      </p:sp>
-      <p:sp>
-        <p:nvSpPr>
-          <p:cNvPr id="3" name="Shape 1"/>
-          <p:cNvSpPr/>
-          <p:nvPr/>
-        </p:nvSpPr>
-        <p:spPr>
-          <a:xfrm>
-            <a:off x="3429000" y="658368"/>
-            <a:ext cx="64008" cy="64008"/>
-          </a:xfrm>
-          <a:prstGeom prst="rect">
-            <a:avLst/>
-          </a:prstGeom>
-          <a:solidFill>
-            <a:srgbClr val="C9A46E"/>
-          </a:solidFill>
-          <a:ln/>
-        </p:spPr>
-      </p:sp>
-      <p:sp>
-        <p:nvSpPr>
-          <p:cNvPr id="4" name="Shape 2"/>
-          <p:cNvSpPr/>
-          <p:nvPr/>
-        </p:nvSpPr>
-        <p:spPr>
-          <a:xfrm>
-            <a:off x="4206240" y="329184"/>
-            <a:ext cx="82296" cy="82296"/>
-          </a:xfrm>
-          <a:prstGeom prst="rect">
-            <a:avLst/>
-          </a:prstGeom>
-          <a:solidFill>
-            <a:srgbClr val="7FB27A"/>
-          </a:solidFill>
-          <a:ln/>
-        </p:spPr>
-      </p:sp>
-      <p:sp>
-        <p:nvSpPr>
-          <p:cNvPr id="5" name="Shape 3"/>
-          <p:cNvSpPr/>
-          <p:nvPr/>
-        </p:nvSpPr>
-        <p:spPr>
-          <a:xfrm>
-            <a:off x="4937760" y="603504"/>
-            <a:ext cx="54864" cy="54864"/>
-          </a:xfrm>
-          <a:prstGeom prst="rect">
-            <a:avLst/>
-          </a:prstGeom>
-          <a:solidFill>
-            <a:srgbClr val="D48A93"/>
-          </a:solidFill>
-          <a:ln/>
-        </p:spPr>
-      </p:sp>
-      <p:sp>
-        <p:nvSpPr>
-          <p:cNvPr id="6" name="Shape 4"/>
-          <p:cNvSpPr/>
-          <p:nvPr/>
-        </p:nvSpPr>
-        <p:spPr>
-          <a:xfrm>
-            <a:off x="7223760" y="365760"/>
-            <a:ext cx="73152" cy="73152"/>
-          </a:xfrm>
-          <a:prstGeom prst="rect">
-            <a:avLst/>
-          </a:prstGeom>
-          <a:solidFill>
-            <a:srgbClr val="C9A46E"/>
-          </a:solidFill>
-          <a:ln/>
-        </p:spPr>
-      </p:sp>
-      <p:sp>
-        <p:nvSpPr>
-          <p:cNvPr id="7" name="Shape 5"/>
-          <p:cNvSpPr/>
-          <p:nvPr/>
-        </p:nvSpPr>
-        <p:spPr>
-          <a:xfrm>
-            <a:off x="7955280" y="640080"/>
-            <a:ext cx="100584" cy="100584"/>
-          </a:xfrm>
-          <a:prstGeom prst="rect">
-            <a:avLst/>
-          </a:prstGeom>
-          <a:solidFill>
-            <a:srgbClr val="D48A93"/>
-          </a:solidFill>
-          <a:ln/>
-        </p:spPr>
-      </p:sp>
-      <p:sp>
-        <p:nvSpPr>
-          <p:cNvPr id="8" name="Shape 6"/>
-          <p:cNvSpPr/>
-          <p:nvPr/>
-        </p:nvSpPr>
-        <p:spPr>
-          <a:xfrm>
-            <a:off x="8686800" y="329184"/>
-            <a:ext cx="54864" cy="54864"/>
-          </a:xfrm>
-          <a:prstGeom prst="rect">
-            <a:avLst/>
-          </a:prstGeom>
-          <a:solidFill>
-            <a:srgbClr val="7FB27A"/>
-          </a:solidFill>
-          <a:ln/>
-        </p:spPr>
-      </p:sp>
-      <p:sp>
-        <p:nvSpPr>
-          <p:cNvPr id="9" name="Shape 7"/>
-          <p:cNvSpPr/>
-          <p:nvPr/>
-        </p:nvSpPr>
-        <p:spPr>
-          <a:xfrm>
-            <a:off x="9372600" y="566928"/>
-            <a:ext cx="73152" cy="73152"/>
-          </a:xfrm>
-          <a:prstGeom prst="rect">
-            <a:avLst/>
-          </a:prstGeom>
-          <a:solidFill>
-            <a:srgbClr val="E3D5CC"/>
-          </a:solidFill>
-          <a:ln/>
-        </p:spPr>
-      </p:sp>
-      <p:sp>
-        <p:nvSpPr>
-          <p:cNvPr id="10" name="Shape 8"/>
-          <p:cNvSpPr/>
-          <p:nvPr/>
-        </p:nvSpPr>
-        <p:spPr>
-          <a:xfrm>
-            <a:off x="2194560" y="6473952"/>
-            <a:ext cx="64008" cy="64008"/>
-          </a:xfrm>
-          <a:prstGeom prst="rect">
-            <a:avLst/>
-          </a:prstGeom>
-          <a:solidFill>
-            <a:srgbClr val="C9A46E"/>
-          </a:solidFill>
-          <a:ln/>
-        </p:spPr>
-      </p:sp>
-      <p:sp>
-        <p:nvSpPr>
-          <p:cNvPr id="11" name="Shape 9"/>
-          <p:cNvSpPr/>
-          <p:nvPr/>
-        </p:nvSpPr>
-        <p:spPr>
-          <a:xfrm>
-            <a:off x="4480560" y="6547104"/>
-            <a:ext cx="45720" cy="45720"/>
-          </a:xfrm>
-          <a:prstGeom prst="rect">
-            <a:avLst/>
-          </a:prstGeom>
-          <a:solidFill>
-            <a:srgbClr val="D48A93"/>
-          </a:solidFill>
-          <a:ln/>
-        </p:spPr>
-      </p:sp>
-      <p:sp>
-        <p:nvSpPr>
-          <p:cNvPr id="12" name="Shape 10"/>
-          <p:cNvSpPr/>
-          <p:nvPr/>
-        </p:nvSpPr>
-        <p:spPr>
-          <a:xfrm>
-            <a:off x="7589520" y="6492240"/>
-            <a:ext cx="54864" cy="54864"/>
-          </a:xfrm>
-          <a:prstGeom prst="rect">
-            <a:avLst/>
-          </a:prstGeom>
-          <a:solidFill>
-            <a:srgbClr val="7FB27A"/>
-          </a:solidFill>
-          <a:ln/>
-        </p:spPr>
-      </p:sp>
-      <p:sp>
-        <p:nvSpPr>
-          <p:cNvPr id="13" name="Shape 11"/>
-          <p:cNvSpPr/>
-          <p:nvPr/>
-        </p:nvSpPr>
-        <p:spPr>
-          <a:xfrm>
-            <a:off x="9692640" y="6528816"/>
-            <a:ext cx="73152" cy="73152"/>
-          </a:xfrm>
-          <a:prstGeom prst="rect">
-            <a:avLst/>
-          </a:prstGeom>
-          <a:solidFill>
-            <a:srgbClr val="D48A93"/>
-          </a:solidFill>
-          <a:ln/>
-        </p:spPr>
-      </p:sp>
-      <p:pic>
-        <p:nvPicPr>
-          <p:cNvPr id="14" name="Image 0" descr="/tmp/claude-0/-home-claude/750ff410-f4aa-5276-9360-1e19d018b112/scratchpad/c/assets/ct-icon.png">    </p:cNvPr>
-          <p:cNvPicPr>
-            <a:picLocks noChangeAspect="1"/>
-          </p:cNvPicPr>
-          <p:nvPr/>
-        </p:nvPicPr>
-        <p:blipFill>
-          <a:blip r:embed="rId1"/>
-          <a:stretch>
-            <a:fillRect/>
-          </a:stretch>
-        </p:blipFill>
-        <p:spPr>
-          <a:xfrm>
-            <a:off x="457200" y="329184"/>
-            <a:ext cx="384048" cy="384048"/>
-          </a:xfrm>
-          <a:prstGeom prst="rect">
-            <a:avLst/>
-          </a:prstGeom>
-        </p:spPr>
-      </p:pic>
-      <p:sp>
-        <p:nvSpPr>
-          <p:cNvPr id="15" name="Text 12"/>
-          <p:cNvSpPr txBox="1"/>
-          <p:nvPr/>
-        </p:nvSpPr>
-        <p:spPr>
-          <a:xfrm>
-            <a:off x="932688" y="320040"/>
-            <a:ext cx="1828800" cy="402336"/>
-          </a:xfrm>
-          <a:prstGeom prst="rect">
-            <a:avLst/>
-          </a:prstGeom>
-          <a:noFill/>
-          <a:ln/>
-        </p:spPr>
-        <p:txBody>
-          <a:bodyPr wrap="square" lIns="0" tIns="0" rIns="0" bIns="0" rtlCol="0" anchor="ctr"/>
-          <a:lstStyle/>
-          <a:p>
-            <a:pPr algn="l" indent="0" marL="0">
-              <a:buNone/>
-            </a:pPr>
-            <a:r>
-              <a:rPr lang="en-US" sz="1800" b="1" dirty="0">
-                <a:solidFill>
-                  <a:srgbClr val="21141A"/>
-                </a:solidFill>
-                <a:latin typeface="IBM Plex Sans Arabic" pitchFamily="34" charset="0"/>
-                <a:ea typeface="IBM Plex Sans Arabic" pitchFamily="34" charset="-122"/>
-                <a:cs typeface="IBM Plex Sans Arabic" pitchFamily="34" charset="-120"/>
-              </a:rPr>
-              <a:t>CloudTrim</a:t>
-            </a:r>
-            <a:endParaRPr lang="en-US" sz="1800" dirty="0"/>
-          </a:p>
-        </p:txBody>
-      </p:sp>
-      <p:pic>
-        <p:nvPicPr>
-          <p:cNvPr id="16" name="Image 1" descr="/tmp/claude-0/-home-claude/750ff410-f4aa-5276-9360-1e19d018b112/scratchpad/c/assets/venturex-ink.png">    </p:cNvPr>
-          <p:cNvPicPr>
-            <a:picLocks noChangeAspect="1"/>
-          </p:cNvPicPr>
-          <p:nvPr/>
-        </p:nvPicPr>
-        <p:blipFill>
-          <a:blip r:embed="rId2"/>
-          <a:stretch>
-            <a:fillRect/>
-          </a:stretch>
-        </p:blipFill>
-        <p:spPr>
-          <a:xfrm>
-            <a:off x="10490566" y="256032"/>
-            <a:ext cx="1243929" cy="548640"/>
-          </a:xfrm>
-          <a:prstGeom prst="rect">
-            <a:avLst/>
-          </a:prstGeom>
-        </p:spPr>
-      </p:pic>
-      <p:sp>
-        <p:nvSpPr>
-          <p:cNvPr id="17" name="Shape 13"/>
-          <p:cNvSpPr/>
-          <p:nvPr/>
-        </p:nvSpPr>
-        <p:spPr>
-          <a:xfrm>
-            <a:off x="10600639" y="987552"/>
-            <a:ext cx="1133856" cy="384048"/>
-          </a:xfrm>
-          <a:prstGeom prst="roundRect">
-            <a:avLst>
-              <a:gd name="adj" fmla="val 50000"/>
-            </a:avLst>
-          </a:prstGeom>
-          <a:solidFill>
-            <a:srgbClr val="8E2F3C"/>
-          </a:solidFill>
-          <a:ln/>
-        </p:spPr>
-      </p:sp>
-      <p:sp>
-        <p:nvSpPr>
-          <p:cNvPr id="18" name="Text 14"/>
-          <p:cNvSpPr txBox="1"/>
-          <p:nvPr/>
-        </p:nvSpPr>
-        <p:spPr>
-          <a:xfrm>
-            <a:off x="10600639" y="987552"/>
-            <a:ext cx="1133856" cy="384048"/>
-          </a:xfrm>
-          <a:prstGeom prst="rect">
-            <a:avLst/>
-          </a:prstGeom>
-          <a:noFill/>
-          <a:ln/>
-        </p:spPr>
-        <p:txBody>
-          <a:bodyPr wrap="square" lIns="0" tIns="0" rIns="0" bIns="0" rtlCol="0" anchor="ctr"/>
-          <a:lstStyle/>
-          <a:p>
-            <a:pPr rtl="1" algn="ctr" indent="0" marL="0">
-              <a:buNone/>
-            </a:pPr>
-            <a:r>
-              <a:rPr lang="en-US" sz="1300" b="1" dirty="0">
-                <a:solidFill>
-                  <a:srgbClr val="FBF6EE"/>
-                </a:solidFill>
-                <a:latin typeface="IBM Plex Sans Arabic" pitchFamily="34" charset="0"/>
-                <a:ea typeface="IBM Plex Sans Arabic" pitchFamily="34" charset="-122"/>
-                <a:cs typeface="IBM Plex Sans Arabic" pitchFamily="34" charset="-120"/>
-              </a:rPr>
-              <a:t>الختام</a:t>
-            </a:r>
-            <a:endParaRPr lang="en-US" sz="1300" dirty="0"/>
-          </a:p>
-        </p:txBody>
-      </p:sp>
-      <p:pic>
-        <p:nvPicPr>
-          <p:cNvPr id="19" name="Image 2" descr="/tmp/claude-0/-home-claude/750ff410-f4aa-5276-9360-1e19d018b112/scratchpad/c/assets/organizers-ink.png">    </p:cNvPr>
-          <p:cNvPicPr>
-            <a:picLocks noChangeAspect="1"/>
-          </p:cNvPicPr>
-          <p:nvPr/>
-        </p:nvPicPr>
-        <p:blipFill>
-          <a:blip r:embed="rId3"/>
-          <a:stretch>
-            <a:fillRect/>
-          </a:stretch>
-        </p:blipFill>
-        <p:spPr>
-          <a:xfrm>
-            <a:off x="457200" y="6309360"/>
-            <a:ext cx="848839" cy="365760"/>
-          </a:xfrm>
-          <a:prstGeom prst="rect">
-            <a:avLst/>
-          </a:prstGeom>
-        </p:spPr>
-      </p:pic>
-      <p:sp>
-        <p:nvSpPr>
-          <p:cNvPr id="20" name="Text 15"/>
-          <p:cNvSpPr txBox="1"/>
-          <p:nvPr/>
-        </p:nvSpPr>
-        <p:spPr>
-          <a:xfrm>
-            <a:off x="4270248" y="6382512"/>
-            <a:ext cx="3657600" cy="274320"/>
-          </a:xfrm>
-          <a:prstGeom prst="rect">
-            <a:avLst/>
-          </a:prstGeom>
-          <a:noFill/>
-          <a:ln/>
-        </p:spPr>
-        <p:txBody>
-          <a:bodyPr wrap="square" lIns="0" tIns="0" rIns="0" bIns="0" rtlCol="0" anchor="t"/>
-          <a:lstStyle/>
-          <a:p>
-            <a:pPr rtl="1" algn="ctr" indent="0" marL="0">
-              <a:buNone/>
-            </a:pPr>
-            <a:r>
-              <a:rPr lang="en-US" sz="1000" dirty="0">
-                <a:solidFill>
-                  <a:srgbClr val="7F6C72"/>
-                </a:solidFill>
-                <a:latin typeface="IBM Plex Sans Arabic" pitchFamily="34" charset="0"/>
-                <a:ea typeface="IBM Plex Sans Arabic" pitchFamily="34" charset="-122"/>
-                <a:cs typeface="IBM Plex Sans Arabic" pitchFamily="34" charset="-120"/>
-              </a:rPr>
-              <a:t>VentureX 2026 · فريق SSB</a:t>
-            </a:r>
-            <a:endParaRPr lang="en-US" sz="1000" dirty="0"/>
-          </a:p>
-        </p:txBody>
-      </p:sp>
-      <p:sp>
-        <p:nvSpPr>
-          <p:cNvPr id="21" name="Text 16"/>
-          <p:cNvSpPr txBox="1"/>
-          <p:nvPr/>
-        </p:nvSpPr>
-        <p:spPr>
-          <a:xfrm>
-            <a:off x="11185855" y="6382512"/>
-            <a:ext cx="548640" cy="274320"/>
-          </a:xfrm>
-          <a:prstGeom prst="rect">
-            <a:avLst/>
-          </a:prstGeom>
-          <a:noFill/>
-          <a:ln/>
-        </p:spPr>
-        <p:txBody>
-          <a:bodyPr wrap="square" lIns="0" tIns="0" rIns="0" bIns="0" rtlCol="0" anchor="t"/>
-          <a:lstStyle/>
-          <a:p>
-            <a:pPr algn="r" indent="0" marL="0">
-              <a:buNone/>
-            </a:pPr>
-            <a:r>
-              <a:rPr lang="en-US" sz="1100" b="1" dirty="0">
-                <a:solidFill>
-                  <a:srgbClr val="7F6C72"/>
-                </a:solidFill>
-                <a:latin typeface="IBM Plex Sans Arabic" pitchFamily="34" charset="0"/>
-                <a:ea typeface="IBM Plex Sans Arabic" pitchFamily="34" charset="-122"/>
-                <a:cs typeface="IBM Plex Sans Arabic" pitchFamily="34" charset="-120"/>
-              </a:rPr>
-              <a:t>12</a:t>
             </a:r>
             <a:endParaRPr lang="en-US" sz="1100" dirty="0"/>
           </a:p>
@@ -8362,8 +5297,8 @@
         </p:nvSpPr>
         <p:spPr>
           <a:xfrm>
-            <a:off x="8915171" y="2304288"/>
-            <a:ext cx="2819324" cy="621792"/>
+            <a:off x="7975397" y="2304288"/>
+            <a:ext cx="3759098" cy="621792"/>
           </a:xfrm>
           <a:prstGeom prst="rect">
             <a:avLst/>
@@ -8401,8 +5336,8 @@
         </p:nvSpPr>
         <p:spPr>
           <a:xfrm>
-            <a:off x="9189491" y="2926080"/>
-            <a:ext cx="2270684" cy="548640"/>
+            <a:off x="8249717" y="2926080"/>
+            <a:ext cx="3210458" cy="548640"/>
           </a:xfrm>
           <a:prstGeom prst="rect">
             <a:avLst/>
@@ -8440,8 +5375,8 @@
         </p:nvSpPr>
         <p:spPr>
           <a:xfrm>
-            <a:off x="6095848" y="2304288"/>
-            <a:ext cx="2819324" cy="621792"/>
+            <a:off x="4216298" y="2304288"/>
+            <a:ext cx="3759098" cy="621792"/>
           </a:xfrm>
           <a:prstGeom prst="rect">
             <a:avLst/>
@@ -8479,8 +5414,8 @@
         </p:nvSpPr>
         <p:spPr>
           <a:xfrm>
-            <a:off x="6370168" y="2926080"/>
-            <a:ext cx="2270684" cy="548640"/>
+            <a:off x="4490618" y="2926080"/>
+            <a:ext cx="3210458" cy="548640"/>
           </a:xfrm>
           <a:prstGeom prst="rect">
             <a:avLst/>
@@ -8518,8 +5453,8 @@
         </p:nvSpPr>
         <p:spPr>
           <a:xfrm>
-            <a:off x="3276524" y="2304288"/>
-            <a:ext cx="2819324" cy="621792"/>
+            <a:off x="457200" y="2304288"/>
+            <a:ext cx="3759098" cy="621792"/>
           </a:xfrm>
           <a:prstGeom prst="rect">
             <a:avLst/>
@@ -8557,8 +5492,8 @@
         </p:nvSpPr>
         <p:spPr>
           <a:xfrm>
-            <a:off x="3550844" y="2926080"/>
-            <a:ext cx="2270684" cy="548640"/>
+            <a:off x="731520" y="2926080"/>
+            <a:ext cx="3210458" cy="548640"/>
           </a:xfrm>
           <a:prstGeom prst="rect">
             <a:avLst/>
@@ -8591,84 +5526,6 @@
       <p:sp>
         <p:nvSpPr>
           <p:cNvPr id="30" name="Text 25"/>
-          <p:cNvSpPr txBox="1"/>
-          <p:nvPr/>
-        </p:nvSpPr>
-        <p:spPr>
-          <a:xfrm>
-            <a:off x="457200" y="2304288"/>
-            <a:ext cx="2819324" cy="621792"/>
-          </a:xfrm>
-          <a:prstGeom prst="rect">
-            <a:avLst/>
-          </a:prstGeom>
-          <a:noFill/>
-          <a:ln/>
-        </p:spPr>
-        <p:txBody>
-          <a:bodyPr wrap="square" lIns="0" tIns="0" rIns="0" bIns="0" rtlCol="0" anchor="ctr"/>
-          <a:lstStyle/>
-          <a:p>
-            <a:pPr algn="ctr" indent="0" marL="0">
-              <a:buNone/>
-            </a:pPr>
-            <a:r>
-              <a:rPr lang="en-US" sz="3600" b="1" dirty="0">
-                <a:solidFill>
-                  <a:srgbClr val="8E2F3C"/>
-                </a:solidFill>
-                <a:latin typeface="IBM Plex Sans Arabic" pitchFamily="34" charset="0"/>
-                <a:ea typeface="IBM Plex Sans Arabic" pitchFamily="34" charset="-122"/>
-                <a:cs typeface="IBM Plex Sans Arabic" pitchFamily="34" charset="-120"/>
-              </a:rPr>
-              <a:t>$5.1B</a:t>
-            </a:r>
-            <a:endParaRPr lang="en-US" sz="3600" dirty="0"/>
-          </a:p>
-        </p:txBody>
-      </p:sp>
-      <p:sp>
-        <p:nvSpPr>
-          <p:cNvPr id="31" name="Text 26"/>
-          <p:cNvSpPr txBox="1"/>
-          <p:nvPr/>
-        </p:nvSpPr>
-        <p:spPr>
-          <a:xfrm>
-            <a:off x="731520" y="2926080"/>
-            <a:ext cx="2270684" cy="548640"/>
-          </a:xfrm>
-          <a:prstGeom prst="rect">
-            <a:avLst/>
-          </a:prstGeom>
-          <a:noFill/>
-          <a:ln/>
-        </p:spPr>
-        <p:txBody>
-          <a:bodyPr wrap="square" lIns="0" tIns="0" rIns="0" bIns="0" rtlCol="0" anchor="t"/>
-          <a:lstStyle/>
-          <a:p>
-            <a:pPr rtl="1" algn="ctr" indent="0" marL="0">
-              <a:buNone/>
-            </a:pPr>
-            <a:r>
-              <a:rPr lang="en-US" sz="1300" dirty="0">
-                <a:solidFill>
-                  <a:srgbClr val="21141A"/>
-                </a:solidFill>
-                <a:latin typeface="IBM Plex Sans Arabic" pitchFamily="34" charset="0"/>
-                <a:ea typeface="IBM Plex Sans Arabic" pitchFamily="34" charset="-122"/>
-                <a:cs typeface="IBM Plex Sans Arabic" pitchFamily="34" charset="-120"/>
-              </a:rPr>
-              <a:t>حجم سوق السحابة السعودي في 2025</a:t>
-            </a:r>
-            <a:endParaRPr lang="en-US" sz="1300" dirty="0"/>
-          </a:p>
-        </p:txBody>
-      </p:sp>
-      <p:sp>
-        <p:nvSpPr>
-          <p:cNvPr id="32" name="Text 27"/>
           <p:cNvSpPr txBox="1"/>
           <p:nvPr/>
         </p:nvSpPr>
@@ -8707,7 +5564,7 @@
       </p:sp>
       <p:sp>
         <p:nvSpPr>
-          <p:cNvPr id="33" name="Shape 28"/>
+          <p:cNvPr id="31" name="Shape 26"/>
           <p:cNvSpPr/>
           <p:nvPr/>
         </p:nvSpPr>
@@ -8729,7 +5586,7 @@
       </p:sp>
       <p:sp>
         <p:nvSpPr>
-          <p:cNvPr id="34" name="Text 29"/>
+          <p:cNvPr id="32" name="Text 27"/>
           <p:cNvSpPr txBox="1"/>
           <p:nvPr/>
         </p:nvSpPr>
@@ -8768,7 +5625,7 @@
       </p:sp>
       <p:sp>
         <p:nvSpPr>
-          <p:cNvPr id="35" name="Text 30"/>
+          <p:cNvPr id="33" name="Text 28"/>
           <p:cNvSpPr txBox="1"/>
           <p:nvPr/>
         </p:nvSpPr>
@@ -8807,7 +5664,7 @@
       </p:sp>
       <p:sp>
         <p:nvSpPr>
-          <p:cNvPr id="36" name="Text 31"/>
+          <p:cNvPr id="34" name="Text 29"/>
           <p:cNvSpPr txBox="1"/>
           <p:nvPr/>
         </p:nvSpPr>
@@ -8846,7 +5703,7 @@
       </p:sp>
       <p:sp>
         <p:nvSpPr>
-          <p:cNvPr id="37" name="Shape 32"/>
+          <p:cNvPr id="35" name="Shape 30"/>
           <p:cNvSpPr/>
           <p:nvPr/>
         </p:nvSpPr>
@@ -8868,7 +5725,7 @@
       </p:sp>
       <p:sp>
         <p:nvSpPr>
-          <p:cNvPr id="38" name="Text 33"/>
+          <p:cNvPr id="36" name="Text 31"/>
           <p:cNvSpPr txBox="1"/>
           <p:nvPr/>
         </p:nvSpPr>
@@ -8907,7 +5764,7 @@
       </p:sp>
       <p:sp>
         <p:nvSpPr>
-          <p:cNvPr id="39" name="Text 34"/>
+          <p:cNvPr id="37" name="Text 32"/>
           <p:cNvSpPr txBox="1"/>
           <p:nvPr/>
         </p:nvSpPr>
@@ -8946,7 +5803,7 @@
       </p:sp>
       <p:sp>
         <p:nvSpPr>
-          <p:cNvPr id="40" name="Text 35"/>
+          <p:cNvPr id="38" name="Text 33"/>
           <p:cNvSpPr txBox="1"/>
           <p:nvPr/>
         </p:nvSpPr>
@@ -8985,7 +5842,7 @@
       </p:sp>
       <p:sp>
         <p:nvSpPr>
-          <p:cNvPr id="41" name="Shape 36"/>
+          <p:cNvPr id="39" name="Shape 34"/>
           <p:cNvSpPr/>
           <p:nvPr/>
         </p:nvSpPr>
@@ -9007,7 +5864,7 @@
       </p:sp>
       <p:sp>
         <p:nvSpPr>
-          <p:cNvPr id="42" name="Text 37"/>
+          <p:cNvPr id="40" name="Text 35"/>
           <p:cNvSpPr txBox="1"/>
           <p:nvPr/>
         </p:nvSpPr>
@@ -9046,7 +5903,7 @@
       </p:sp>
       <p:sp>
         <p:nvSpPr>
-          <p:cNvPr id="43" name="Text 38"/>
+          <p:cNvPr id="41" name="Text 36"/>
           <p:cNvSpPr txBox="1"/>
           <p:nvPr/>
         </p:nvSpPr>
@@ -9085,7 +5942,7 @@
       </p:sp>
       <p:sp>
         <p:nvSpPr>
-          <p:cNvPr id="44" name="Text 39"/>
+          <p:cNvPr id="42" name="Text 37"/>
           <p:cNvSpPr txBox="1"/>
           <p:nvPr/>
         </p:nvSpPr>
@@ -9124,7 +5981,7 @@
       </p:sp>
       <p:sp>
         <p:nvSpPr>
-          <p:cNvPr id="45" name="Shape 40"/>
+          <p:cNvPr id="43" name="Shape 38"/>
           <p:cNvSpPr/>
           <p:nvPr/>
         </p:nvSpPr>
@@ -9146,7 +6003,7 @@
       </p:sp>
       <p:sp>
         <p:nvSpPr>
-          <p:cNvPr id="46" name="Text 41"/>
+          <p:cNvPr id="44" name="Text 39"/>
           <p:cNvSpPr txBox="1"/>
           <p:nvPr/>
         </p:nvSpPr>
@@ -9185,7 +6042,7 @@
       </p:sp>
       <p:sp>
         <p:nvSpPr>
-          <p:cNvPr id="47" name="Text 42"/>
+          <p:cNvPr id="45" name="Text 40"/>
           <p:cNvSpPr txBox="1"/>
           <p:nvPr/>
         </p:nvSpPr>
@@ -9224,7 +6081,7 @@
       </p:sp>
       <p:sp>
         <p:nvSpPr>
-          <p:cNvPr id="48" name="Text 43"/>
+          <p:cNvPr id="46" name="Text 41"/>
           <p:cNvSpPr txBox="1"/>
           <p:nvPr/>
         </p:nvSpPr>
@@ -9263,7 +6120,7 @@
       </p:sp>
       <p:sp>
         <p:nvSpPr>
-          <p:cNvPr id="49" name="Shape 44"/>
+          <p:cNvPr id="47" name="Shape 42"/>
           <p:cNvSpPr/>
           <p:nvPr/>
         </p:nvSpPr>
@@ -9290,7 +6147,7 @@
       </p:sp>
       <p:sp>
         <p:nvSpPr>
-          <p:cNvPr id="50" name="Text 45"/>
+          <p:cNvPr id="48" name="Text 43"/>
           <p:cNvSpPr txBox="1"/>
           <p:nvPr/>
         </p:nvSpPr>
@@ -9329,7 +6186,7 @@
       </p:sp>
       <p:sp>
         <p:nvSpPr>
-          <p:cNvPr id="51" name="Shape 46"/>
+          <p:cNvPr id="49" name="Shape 44"/>
           <p:cNvSpPr/>
           <p:nvPr/>
         </p:nvSpPr>
@@ -9349,7 +6206,7 @@
       </p:sp>
       <p:sp>
         <p:nvSpPr>
-          <p:cNvPr id="52" name="Text 47"/>
+          <p:cNvPr id="50" name="Text 45"/>
           <p:cNvSpPr txBox="1"/>
           <p:nvPr/>
         </p:nvSpPr>
@@ -9388,7 +6245,7 @@
       </p:sp>
       <p:sp>
         <p:nvSpPr>
-          <p:cNvPr id="53" name="Text 48"/>
+          <p:cNvPr id="51" name="Text 46"/>
           <p:cNvSpPr txBox="1"/>
           <p:nvPr/>
         </p:nvSpPr>
@@ -9427,7 +6284,7 @@
       </p:sp>
       <p:sp>
         <p:nvSpPr>
-          <p:cNvPr id="54" name="Shape 49"/>
+          <p:cNvPr id="52" name="Shape 47"/>
           <p:cNvSpPr/>
           <p:nvPr/>
         </p:nvSpPr>
@@ -9447,7 +6304,7 @@
       </p:sp>
       <p:sp>
         <p:nvSpPr>
-          <p:cNvPr id="55" name="Text 50"/>
+          <p:cNvPr id="53" name="Text 48"/>
           <p:cNvSpPr txBox="1"/>
           <p:nvPr/>
         </p:nvSpPr>
@@ -9486,7 +6343,7 @@
       </p:sp>
       <p:sp>
         <p:nvSpPr>
-          <p:cNvPr id="56" name="Text 51"/>
+          <p:cNvPr id="54" name="Text 49"/>
           <p:cNvSpPr txBox="1"/>
           <p:nvPr/>
         </p:nvSpPr>
@@ -9525,7 +6382,7 @@
       </p:sp>
       <p:sp>
         <p:nvSpPr>
-          <p:cNvPr id="57" name="Shape 52"/>
+          <p:cNvPr id="55" name="Shape 50"/>
           <p:cNvSpPr/>
           <p:nvPr/>
         </p:nvSpPr>
@@ -9545,7 +6402,7 @@
       </p:sp>
       <p:sp>
         <p:nvSpPr>
-          <p:cNvPr id="58" name="Text 53"/>
+          <p:cNvPr id="56" name="Text 51"/>
           <p:cNvSpPr txBox="1"/>
           <p:nvPr/>
         </p:nvSpPr>
@@ -9584,7 +6441,7 @@
       </p:sp>
       <p:sp>
         <p:nvSpPr>
-          <p:cNvPr id="59" name="Text 54"/>
+          <p:cNvPr id="57" name="Text 52"/>
           <p:cNvSpPr txBox="1"/>
           <p:nvPr/>
         </p:nvSpPr>
@@ -9623,7 +6480,7 @@
       </p:sp>
       <p:sp>
         <p:nvSpPr>
-          <p:cNvPr id="60" name="Text 55"/>
+          <p:cNvPr id="58" name="Text 53"/>
           <p:cNvSpPr txBox="1"/>
           <p:nvPr/>
         </p:nvSpPr>
@@ -9654,7 +6511,7 @@
                 <a:ea typeface="IBM Plex Sans Arabic" pitchFamily="34" charset="-122"/>
                 <a:cs typeface="IBM Plex Sans Arabic" pitchFamily="34" charset="-120"/>
               </a:rPr>
-              <a:t>المصادر: Flexera State of the Cloud 2026 · Uptime Institute Annual Outage Analysis · MarketsandMarkets Saudi Arabia Cloud Computing Market</a:t>
+              <a:t>المصادر: Flexera State of the Cloud 2026 · Uptime Institute Annual Outage Analysis</a:t>
             </a:r>
             <a:endParaRPr lang="en-US" sz="950" dirty="0"/>
           </a:p>
@@ -10254,7 +7111,7 @@
                 <a:ea typeface="IBM Plex Sans Arabic" pitchFamily="34" charset="-122"/>
                 <a:cs typeface="IBM Plex Sans Arabic" pitchFamily="34" charset="-120"/>
               </a:rPr>
-              <a:t>منصة SaaS بوكيل ذكاء اصطناعي، مع استشارات FinOps بشرية للحالات المعقدة</a:t>
+              <a:t>الابتكار: أول منصة FinOps محلية تجمع السحب السعودية والعالمية، وتنفّذ بموافقة بشرية وصلاحية مؤقتة</a:t>
             </a:r>
             <a:endParaRPr lang="en-US" sz="1600" dirty="0"/>
           </a:p>
@@ -13729,8 +10586,8 @@
         </p:nvSpPr>
         <p:spPr>
           <a:xfrm>
-            <a:off x="10285171" y="987552"/>
-            <a:ext cx="1449324" cy="384048"/>
+            <a:off x="9759391" y="987552"/>
+            <a:ext cx="1975104" cy="384048"/>
           </a:xfrm>
           <a:prstGeom prst="roundRect">
             <a:avLst>
@@ -13751,8 +10608,8 @@
         </p:nvSpPr>
         <p:spPr>
           <a:xfrm>
-            <a:off x="10285171" y="987552"/>
-            <a:ext cx="1449324" cy="384048"/>
+            <a:off x="9759391" y="987552"/>
+            <a:ext cx="1975104" cy="384048"/>
           </a:xfrm>
           <a:prstGeom prst="rect">
             <a:avLst/>
@@ -13776,7 +10633,7 @@
                 <a:ea typeface="IBM Plex Sans Arabic" pitchFamily="34" charset="-122"/>
                 <a:cs typeface="IBM Plex Sans Arabic" pitchFamily="34" charset="-120"/>
               </a:rPr>
-              <a:t>المنافسون</a:t>
+              <a:t>قابلية التنفيذ</a:t>
             </a:r>
             <a:endParaRPr lang="en-US" sz="1300" dirty="0"/>
           </a:p>
@@ -13909,7 +10766,7 @@
               <a:buNone/>
             </a:pPr>
             <a:r>
-              <a:rPr lang="en-US" sz="3000" b="1" dirty="0">
+              <a:rPr lang="en-US" sz="2600" b="1" dirty="0">
                 <a:solidFill>
                   <a:srgbClr val="21141A"/>
                 </a:solidFill>
@@ -13917,205 +10774,403 @@
                 <a:ea typeface="IBM Plex Sans Arabic" pitchFamily="34" charset="-122"/>
                 <a:cs typeface="IBM Plex Sans Arabic" pitchFamily="34" charset="-120"/>
               </a:rPr>
-              <a:t>مصمم للشركات السعودية من البداية، وليس معدّلاً لها</a:t>
-            </a:r>
-            <a:endParaRPr lang="en-US" sz="3000" dirty="0"/>
-          </a:p>
-        </p:txBody>
-      </p:sp>
-      <p:sp>
-        <p:nvSpPr>
-          <p:cNvPr id="23" name="Shape 18"/>
-          <p:cNvSpPr/>
-          <p:nvPr/>
-        </p:nvSpPr>
-        <p:spPr>
-          <a:xfrm>
-            <a:off x="5242560" y="2194560"/>
-            <a:ext cx="2164080" cy="3291840"/>
+              <a:t>قابل للتنفيذ اليوم: AWS أولاً، والمزودون المحليون في المرحلة الثانية</a:t>
+            </a:r>
+            <a:endParaRPr lang="en-US" sz="2600" dirty="0"/>
+          </a:p>
+        </p:txBody>
+      </p:sp>
+      <p:sp>
+        <p:nvSpPr>
+          <p:cNvPr id="23" name="Text 18"/>
+          <p:cNvSpPr txBox="1"/>
+          <p:nvPr/>
+        </p:nvSpPr>
+        <p:spPr>
+          <a:xfrm>
+            <a:off x="6263640" y="2286000"/>
+            <a:ext cx="5470855" cy="365760"/>
+          </a:xfrm>
+          <a:prstGeom prst="rect">
+            <a:avLst/>
+          </a:prstGeom>
+          <a:noFill/>
+          <a:ln/>
+        </p:spPr>
+        <p:txBody>
+          <a:bodyPr wrap="square" lIns="0" tIns="0" rIns="0" bIns="0" rtlCol="0" anchor="t"/>
+          <a:lstStyle/>
+          <a:p>
+            <a:pPr rtl="1" algn="r" indent="0" marL="0">
+              <a:buNone/>
+            </a:pPr>
+            <a:r>
+              <a:rPr lang="en-US" sz="1700" b="1" dirty="0">
+                <a:solidFill>
+                  <a:srgbClr val="8E2F3C"/>
+                </a:solidFill>
+                <a:latin typeface="IBM Plex Sans Arabic" pitchFamily="34" charset="0"/>
+                <a:ea typeface="IBM Plex Sans Arabic" pitchFamily="34" charset="-122"/>
+                <a:cs typeface="IBM Plex Sans Arabic" pitchFamily="34" charset="-120"/>
+              </a:rPr>
+              <a:t>كيف يعمل الآن</a:t>
+            </a:r>
+            <a:endParaRPr lang="en-US" sz="1700" dirty="0"/>
+          </a:p>
+        </p:txBody>
+      </p:sp>
+      <p:sp>
+        <p:nvSpPr>
+          <p:cNvPr id="24" name="Shape 19"/>
+          <p:cNvSpPr/>
+          <p:nvPr/>
+        </p:nvSpPr>
+        <p:spPr>
+          <a:xfrm>
+            <a:off x="11588191" y="2834640"/>
+            <a:ext cx="146304" cy="146304"/>
+          </a:xfrm>
+          <a:prstGeom prst="rect">
+            <a:avLst/>
+          </a:prstGeom>
+          <a:solidFill>
+            <a:srgbClr val="D48A93"/>
+          </a:solidFill>
+          <a:ln/>
+        </p:spPr>
+      </p:sp>
+      <p:sp>
+        <p:nvSpPr>
+          <p:cNvPr id="25" name="Text 20"/>
+          <p:cNvSpPr txBox="1"/>
+          <p:nvPr/>
+        </p:nvSpPr>
+        <p:spPr>
+          <a:xfrm>
+            <a:off x="6263640" y="2743200"/>
+            <a:ext cx="5150815" cy="320040"/>
+          </a:xfrm>
+          <a:prstGeom prst="rect">
+            <a:avLst/>
+          </a:prstGeom>
+          <a:noFill/>
+          <a:ln/>
+        </p:spPr>
+        <p:txBody>
+          <a:bodyPr wrap="square" lIns="0" tIns="0" rIns="0" bIns="0" rtlCol="0" anchor="t"/>
+          <a:lstStyle/>
+          <a:p>
+            <a:pPr rtl="1" algn="r" indent="0" marL="0">
+              <a:buNone/>
+            </a:pPr>
+            <a:r>
+              <a:rPr lang="en-US" sz="1500" b="1" dirty="0">
+                <a:solidFill>
+                  <a:srgbClr val="21141A"/>
+                </a:solidFill>
+                <a:latin typeface="IBM Plex Sans Arabic" pitchFamily="34" charset="0"/>
+                <a:ea typeface="IBM Plex Sans Arabic" pitchFamily="34" charset="-122"/>
+                <a:cs typeface="IBM Plex Sans Arabic" pitchFamily="34" charset="-120"/>
+              </a:rPr>
+              <a:t>ربط عبر API بصلاحيات قراءة</a:t>
+            </a:r>
+            <a:endParaRPr lang="en-US" sz="1500" dirty="0"/>
+          </a:p>
+        </p:txBody>
+      </p:sp>
+      <p:sp>
+        <p:nvSpPr>
+          <p:cNvPr id="26" name="Text 21"/>
+          <p:cNvSpPr txBox="1"/>
+          <p:nvPr/>
+        </p:nvSpPr>
+        <p:spPr>
+          <a:xfrm>
+            <a:off x="6263640" y="3072384"/>
+            <a:ext cx="5150815" cy="320040"/>
+          </a:xfrm>
+          <a:prstGeom prst="rect">
+            <a:avLst/>
+          </a:prstGeom>
+          <a:noFill/>
+          <a:ln/>
+        </p:spPr>
+        <p:txBody>
+          <a:bodyPr wrap="square" lIns="0" tIns="0" rIns="0" bIns="0" rtlCol="0" anchor="t"/>
+          <a:lstStyle/>
+          <a:p>
+            <a:pPr rtl="1" algn="r" indent="0" marL="0">
+              <a:buNone/>
+            </a:pPr>
+            <a:r>
+              <a:rPr lang="en-US" sz="1150" dirty="0">
+                <a:solidFill>
+                  <a:srgbClr val="7F6C72"/>
+                </a:solidFill>
+                <a:latin typeface="IBM Plex Sans Arabic" pitchFamily="34" charset="0"/>
+                <a:ea typeface="IBM Plex Sans Arabic" pitchFamily="34" charset="-122"/>
+                <a:cs typeface="IBM Plex Sans Arabic" pitchFamily="34" charset="-120"/>
+              </a:rPr>
+              <a:t>ce:GetCostAndUsage · ec2:DescribeVolumes · cloudwatch:GetMetricStatistics</a:t>
+            </a:r>
+            <a:endParaRPr lang="en-US" sz="1150" dirty="0"/>
+          </a:p>
+        </p:txBody>
+      </p:sp>
+      <p:sp>
+        <p:nvSpPr>
+          <p:cNvPr id="27" name="Shape 22"/>
+          <p:cNvSpPr/>
+          <p:nvPr/>
+        </p:nvSpPr>
+        <p:spPr>
+          <a:xfrm>
+            <a:off x="11588191" y="3566160"/>
+            <a:ext cx="146304" cy="146304"/>
+          </a:xfrm>
+          <a:prstGeom prst="rect">
+            <a:avLst/>
+          </a:prstGeom>
+          <a:solidFill>
+            <a:srgbClr val="C9A46E"/>
+          </a:solidFill>
+          <a:ln/>
+        </p:spPr>
+      </p:sp>
+      <p:sp>
+        <p:nvSpPr>
+          <p:cNvPr id="28" name="Text 23"/>
+          <p:cNvSpPr txBox="1"/>
+          <p:nvPr/>
+        </p:nvSpPr>
+        <p:spPr>
+          <a:xfrm>
+            <a:off x="6263640" y="3474720"/>
+            <a:ext cx="5150815" cy="320040"/>
+          </a:xfrm>
+          <a:prstGeom prst="rect">
+            <a:avLst/>
+          </a:prstGeom>
+          <a:noFill/>
+          <a:ln/>
+        </p:spPr>
+        <p:txBody>
+          <a:bodyPr wrap="square" lIns="0" tIns="0" rIns="0" bIns="0" rtlCol="0" anchor="t"/>
+          <a:lstStyle/>
+          <a:p>
+            <a:pPr rtl="1" algn="r" indent="0" marL="0">
+              <a:buNone/>
+            </a:pPr>
+            <a:r>
+              <a:rPr lang="en-US" sz="1500" b="1" dirty="0">
+                <a:solidFill>
+                  <a:srgbClr val="21141A"/>
+                </a:solidFill>
+                <a:latin typeface="IBM Plex Sans Arabic" pitchFamily="34" charset="0"/>
+                <a:ea typeface="IBM Plex Sans Arabic" pitchFamily="34" charset="-122"/>
+                <a:cs typeface="IBM Plex Sans Arabic" pitchFamily="34" charset="-120"/>
+              </a:rPr>
+              <a:t>قواعد هدر + نموذج ذكاء اصطناعي</a:t>
+            </a:r>
+            <a:endParaRPr lang="en-US" sz="1500" dirty="0"/>
+          </a:p>
+        </p:txBody>
+      </p:sp>
+      <p:sp>
+        <p:nvSpPr>
+          <p:cNvPr id="29" name="Text 24"/>
+          <p:cNvSpPr txBox="1"/>
+          <p:nvPr/>
+        </p:nvSpPr>
+        <p:spPr>
+          <a:xfrm>
+            <a:off x="6263640" y="3803904"/>
+            <a:ext cx="5150815" cy="320040"/>
+          </a:xfrm>
+          <a:prstGeom prst="rect">
+            <a:avLst/>
+          </a:prstGeom>
+          <a:noFill/>
+          <a:ln/>
+        </p:spPr>
+        <p:txBody>
+          <a:bodyPr wrap="square" lIns="0" tIns="0" rIns="0" bIns="0" rtlCol="0" anchor="t"/>
+          <a:lstStyle/>
+          <a:p>
+            <a:pPr rtl="1" algn="r" indent="0" marL="0">
+              <a:buNone/>
+            </a:pPr>
+            <a:r>
+              <a:rPr lang="en-US" sz="1150" dirty="0">
+                <a:solidFill>
+                  <a:srgbClr val="7F6C72"/>
+                </a:solidFill>
+                <a:latin typeface="IBM Plex Sans Arabic" pitchFamily="34" charset="0"/>
+                <a:ea typeface="IBM Plex Sans Arabic" pitchFamily="34" charset="-122"/>
+                <a:cs typeface="IBM Plex Sans Arabic" pitchFamily="34" charset="-120"/>
+              </a:rPr>
+              <a:t>القواعد ترشّح الموارد، والنموذج يرتب التوصيات ويشرحها بالعربية</a:t>
+            </a:r>
+            <a:endParaRPr lang="en-US" sz="1150" dirty="0"/>
+          </a:p>
+        </p:txBody>
+      </p:sp>
+      <p:sp>
+        <p:nvSpPr>
+          <p:cNvPr id="30" name="Shape 25"/>
+          <p:cNvSpPr/>
+          <p:nvPr/>
+        </p:nvSpPr>
+        <p:spPr>
+          <a:xfrm>
+            <a:off x="11588191" y="4297680"/>
+            <a:ext cx="146304" cy="146304"/>
+          </a:xfrm>
+          <a:prstGeom prst="rect">
+            <a:avLst/>
+          </a:prstGeom>
+          <a:solidFill>
+            <a:srgbClr val="7FB27A"/>
+          </a:solidFill>
+          <a:ln/>
+        </p:spPr>
+      </p:sp>
+      <p:sp>
+        <p:nvSpPr>
+          <p:cNvPr id="31" name="Text 26"/>
+          <p:cNvSpPr txBox="1"/>
+          <p:nvPr/>
+        </p:nvSpPr>
+        <p:spPr>
+          <a:xfrm>
+            <a:off x="6263640" y="4206240"/>
+            <a:ext cx="5150815" cy="320040"/>
+          </a:xfrm>
+          <a:prstGeom prst="rect">
+            <a:avLst/>
+          </a:prstGeom>
+          <a:noFill/>
+          <a:ln/>
+        </p:spPr>
+        <p:txBody>
+          <a:bodyPr wrap="square" lIns="0" tIns="0" rIns="0" bIns="0" rtlCol="0" anchor="t"/>
+          <a:lstStyle/>
+          <a:p>
+            <a:pPr rtl="1" algn="r" indent="0" marL="0">
+              <a:buNone/>
+            </a:pPr>
+            <a:r>
+              <a:rPr lang="en-US" sz="1500" b="1" dirty="0">
+                <a:solidFill>
+                  <a:srgbClr val="21141A"/>
+                </a:solidFill>
+                <a:latin typeface="IBM Plex Sans Arabic" pitchFamily="34" charset="0"/>
+                <a:ea typeface="IBM Plex Sans Arabic" pitchFamily="34" charset="-122"/>
+                <a:cs typeface="IBM Plex Sans Arabic" pitchFamily="34" charset="-120"/>
+              </a:rPr>
+              <a:t>زر موافقة واحد</a:t>
+            </a:r>
+            <a:endParaRPr lang="en-US" sz="1500" dirty="0"/>
+          </a:p>
+        </p:txBody>
+      </p:sp>
+      <p:sp>
+        <p:nvSpPr>
+          <p:cNvPr id="32" name="Text 27"/>
+          <p:cNvSpPr txBox="1"/>
+          <p:nvPr/>
+        </p:nvSpPr>
+        <p:spPr>
+          <a:xfrm>
+            <a:off x="6263640" y="4535424"/>
+            <a:ext cx="5150815" cy="320040"/>
+          </a:xfrm>
+          <a:prstGeom prst="rect">
+            <a:avLst/>
+          </a:prstGeom>
+          <a:noFill/>
+          <a:ln/>
+        </p:spPr>
+        <p:txBody>
+          <a:bodyPr wrap="square" lIns="0" tIns="0" rIns="0" bIns="0" rtlCol="0" anchor="t"/>
+          <a:lstStyle/>
+          <a:p>
+            <a:pPr rtl="1" algn="r" indent="0" marL="0">
+              <a:buNone/>
+            </a:pPr>
+            <a:r>
+              <a:rPr lang="en-US" sz="1150" dirty="0">
+                <a:solidFill>
+                  <a:srgbClr val="7F6C72"/>
+                </a:solidFill>
+                <a:latin typeface="IBM Plex Sans Arabic" pitchFamily="34" charset="0"/>
+                <a:ea typeface="IBM Plex Sans Arabic" pitchFamily="34" charset="-122"/>
+                <a:cs typeface="IBM Plex Sans Arabic" pitchFamily="34" charset="-120"/>
+              </a:rPr>
+              <a:t>يمنح صلاحية مؤقتة لـ 15 دقيقة لتنفيذ الإجراء ثم تُسحب</a:t>
+            </a:r>
+            <a:endParaRPr lang="en-US" sz="1150" dirty="0"/>
+          </a:p>
+        </p:txBody>
+      </p:sp>
+      <p:sp>
+        <p:nvSpPr>
+          <p:cNvPr id="33" name="Text 28"/>
+          <p:cNvSpPr txBox="1"/>
+          <p:nvPr/>
+        </p:nvSpPr>
+        <p:spPr>
+          <a:xfrm>
+            <a:off x="457200" y="2286000"/>
+            <a:ext cx="5394960" cy="365760"/>
+          </a:xfrm>
+          <a:prstGeom prst="rect">
+            <a:avLst/>
+          </a:prstGeom>
+          <a:noFill/>
+          <a:ln/>
+        </p:spPr>
+        <p:txBody>
+          <a:bodyPr wrap="square" lIns="0" tIns="0" rIns="0" bIns="0" rtlCol="0" anchor="t"/>
+          <a:lstStyle/>
+          <a:p>
+            <a:pPr rtl="1" algn="r" indent="0" marL="0">
+              <a:buNone/>
+            </a:pPr>
+            <a:r>
+              <a:rPr lang="en-US" sz="1700" b="1" dirty="0">
+                <a:solidFill>
+                  <a:srgbClr val="8E2F3C"/>
+                </a:solidFill>
+                <a:latin typeface="IBM Plex Sans Arabic" pitchFamily="34" charset="0"/>
+                <a:ea typeface="IBM Plex Sans Arabic" pitchFamily="34" charset="-122"/>
+                <a:cs typeface="IBM Plex Sans Arabic" pitchFamily="34" charset="-120"/>
+              </a:rPr>
+              <a:t>التقنيات المتوفرة</a:t>
+            </a:r>
+            <a:endParaRPr lang="en-US" sz="1700" dirty="0"/>
+          </a:p>
+        </p:txBody>
+      </p:sp>
+      <p:sp>
+        <p:nvSpPr>
+          <p:cNvPr id="34" name="Shape 29"/>
+          <p:cNvSpPr/>
+          <p:nvPr/>
+        </p:nvSpPr>
+        <p:spPr>
+          <a:xfrm>
+            <a:off x="4663440" y="2788920"/>
+            <a:ext cx="1188720" cy="384048"/>
           </a:xfrm>
           <a:prstGeom prst="roundRect">
             <a:avLst>
-              <a:gd name="adj" fmla="val 5915"/>
+              <a:gd name="adj" fmla="val 50000"/>
             </a:avLst>
           </a:prstGeom>
           <a:solidFill>
-            <a:srgbClr val="F1E4DF"/>
-          </a:solidFill>
-          <a:ln/>
-        </p:spPr>
-      </p:sp>
-      <p:sp>
-        <p:nvSpPr>
-          <p:cNvPr id="24" name="Text 19"/>
-          <p:cNvSpPr txBox="1"/>
-          <p:nvPr/>
-        </p:nvSpPr>
-        <p:spPr>
-          <a:xfrm>
-            <a:off x="5242560" y="2240280"/>
-            <a:ext cx="2164080" cy="548640"/>
-          </a:xfrm>
-          <a:prstGeom prst="rect">
-            <a:avLst/>
-          </a:prstGeom>
-          <a:noFill/>
-          <a:ln/>
-        </p:spPr>
-        <p:txBody>
-          <a:bodyPr wrap="square" lIns="0" tIns="0" rIns="0" bIns="0" rtlCol="0" anchor="ctr"/>
-          <a:lstStyle/>
-          <a:p>
-            <a:pPr rtl="1" algn="ctr" indent="0" marL="0">
-              <a:buNone/>
-            </a:pPr>
-            <a:r>
-              <a:rPr lang="en-US" sz="1700" b="1" dirty="0">
-                <a:solidFill>
-                  <a:srgbClr val="8E2F3C"/>
-                </a:solidFill>
-                <a:latin typeface="IBM Plex Sans Arabic" pitchFamily="34" charset="0"/>
-                <a:ea typeface="IBM Plex Sans Arabic" pitchFamily="34" charset="-122"/>
-                <a:cs typeface="IBM Plex Sans Arabic" pitchFamily="34" charset="-120"/>
-              </a:rPr>
-              <a:t>CloudTrim</a:t>
-            </a:r>
-            <a:endParaRPr lang="en-US" sz="1700" dirty="0"/>
-          </a:p>
-        </p:txBody>
-      </p:sp>
-      <p:sp>
-        <p:nvSpPr>
-          <p:cNvPr id="25" name="Text 20"/>
-          <p:cNvSpPr txBox="1"/>
-          <p:nvPr/>
-        </p:nvSpPr>
-        <p:spPr>
-          <a:xfrm>
-            <a:off x="2895600" y="2240280"/>
-            <a:ext cx="2164080" cy="548640"/>
-          </a:xfrm>
-          <a:prstGeom prst="rect">
-            <a:avLst/>
-          </a:prstGeom>
-          <a:noFill/>
-          <a:ln/>
-        </p:spPr>
-        <p:txBody>
-          <a:bodyPr wrap="square" lIns="0" tIns="0" rIns="0" bIns="0" rtlCol="0" anchor="ctr"/>
-          <a:lstStyle/>
-          <a:p>
-            <a:pPr rtl="1" algn="ctr" indent="0" marL="0">
-              <a:buNone/>
-            </a:pPr>
-            <a:r>
-              <a:rPr lang="en-US" sz="1400" b="1" dirty="0">
-                <a:solidFill>
-                  <a:srgbClr val="21141A"/>
-                </a:solidFill>
-                <a:latin typeface="IBM Plex Sans Arabic" pitchFamily="34" charset="0"/>
-                <a:ea typeface="IBM Plex Sans Arabic" pitchFamily="34" charset="-122"/>
-                <a:cs typeface="IBM Plex Sans Arabic" pitchFamily="34" charset="-120"/>
-              </a:rPr>
-              <a:t>منصات FinOps العالمية</a:t>
-            </a:r>
-            <a:endParaRPr lang="en-US" sz="1400" dirty="0"/>
-          </a:p>
-        </p:txBody>
-      </p:sp>
-      <p:sp>
-        <p:nvSpPr>
-          <p:cNvPr id="26" name="Text 21"/>
-          <p:cNvSpPr txBox="1"/>
-          <p:nvPr/>
-        </p:nvSpPr>
-        <p:spPr>
-          <a:xfrm>
-            <a:off x="548640" y="2240280"/>
-            <a:ext cx="2164080" cy="548640"/>
-          </a:xfrm>
-          <a:prstGeom prst="rect">
-            <a:avLst/>
-          </a:prstGeom>
-          <a:noFill/>
-          <a:ln/>
-        </p:spPr>
-        <p:txBody>
-          <a:bodyPr wrap="square" lIns="0" tIns="0" rIns="0" bIns="0" rtlCol="0" anchor="ctr"/>
-          <a:lstStyle/>
-          <a:p>
-            <a:pPr rtl="1" algn="ctr" indent="0" marL="0">
-              <a:buNone/>
-            </a:pPr>
-            <a:r>
-              <a:rPr lang="en-US" sz="1400" b="1" dirty="0">
-                <a:solidFill>
-                  <a:srgbClr val="21141A"/>
-                </a:solidFill>
-                <a:latin typeface="IBM Plex Sans Arabic" pitchFamily="34" charset="0"/>
-                <a:ea typeface="IBM Plex Sans Arabic" pitchFamily="34" charset="-122"/>
-                <a:cs typeface="IBM Plex Sans Arabic" pitchFamily="34" charset="-120"/>
-              </a:rPr>
-              <a:t>أدوات التكلفة المدمجة في السحابة</a:t>
-            </a:r>
-            <a:endParaRPr lang="en-US" sz="1400" dirty="0"/>
-          </a:p>
-        </p:txBody>
-      </p:sp>
-      <p:sp>
-        <p:nvSpPr>
-          <p:cNvPr id="27" name="Text 22"/>
-          <p:cNvSpPr txBox="1"/>
-          <p:nvPr/>
-        </p:nvSpPr>
-        <p:spPr>
-          <a:xfrm>
-            <a:off x="7680960" y="2240280"/>
-            <a:ext cx="4053535" cy="548640"/>
-          </a:xfrm>
-          <a:prstGeom prst="rect">
-            <a:avLst/>
-          </a:prstGeom>
-          <a:noFill/>
-          <a:ln/>
-        </p:spPr>
-        <p:txBody>
-          <a:bodyPr wrap="square" lIns="0" tIns="0" rIns="0" bIns="0" rtlCol="0" anchor="ctr"/>
-          <a:lstStyle/>
-          <a:p>
-            <a:pPr rtl="1" algn="r" indent="0" marL="0">
-              <a:buNone/>
-            </a:pPr>
-            <a:r>
-              <a:rPr lang="en-US" sz="1400" b="1" dirty="0">
-                <a:solidFill>
-                  <a:srgbClr val="7F6C72"/>
-                </a:solidFill>
-                <a:latin typeface="IBM Plex Sans Arabic" pitchFamily="34" charset="0"/>
-                <a:ea typeface="IBM Plex Sans Arabic" pitchFamily="34" charset="-122"/>
-                <a:cs typeface="IBM Plex Sans Arabic" pitchFamily="34" charset="-120"/>
-              </a:rPr>
-              <a:t>الميزة</a:t>
-            </a:r>
-            <a:endParaRPr lang="en-US" sz="1400" dirty="0"/>
-          </a:p>
-        </p:txBody>
-      </p:sp>
-      <p:sp>
-        <p:nvSpPr>
-          <p:cNvPr id="28" name="Shape 23"/>
-          <p:cNvSpPr/>
-          <p:nvPr/>
-        </p:nvSpPr>
-        <p:spPr>
-          <a:xfrm>
-            <a:off x="457200" y="2880360"/>
-            <a:ext cx="11277295" cy="0"/>
-          </a:xfrm>
-          <a:prstGeom prst="line">
-            <a:avLst/>
-          </a:prstGeom>
-          <a:noFill/>
+            <a:srgbClr val="FFFBF8"/>
+          </a:solidFill>
           <a:ln w="9525">
             <a:solidFill>
               <a:srgbClr val="E3D5CC"/>
@@ -14126,14 +11181,14 @@
       </p:sp>
       <p:sp>
         <p:nvSpPr>
-          <p:cNvPr id="29" name="Text 24"/>
-          <p:cNvSpPr txBox="1"/>
-          <p:nvPr/>
-        </p:nvSpPr>
-        <p:spPr>
-          <a:xfrm>
-            <a:off x="7680960" y="2880360"/>
-            <a:ext cx="4053535" cy="512064"/>
+          <p:cNvPr id="35" name="Text 30"/>
+          <p:cNvSpPr txBox="1"/>
+          <p:nvPr/>
+        </p:nvSpPr>
+        <p:spPr>
+          <a:xfrm>
+            <a:off x="4663440" y="2788920"/>
+            <a:ext cx="1188720" cy="384048"/>
           </a:xfrm>
           <a:prstGeom prst="rect">
             <a:avLst/>
@@ -14145,11 +11200,11 @@
           <a:bodyPr wrap="square" lIns="0" tIns="0" rIns="0" bIns="0" rtlCol="0" anchor="ctr"/>
           <a:lstStyle/>
           <a:p>
-            <a:pPr rtl="1" algn="r" indent="0" marL="0">
-              <a:buNone/>
-            </a:pPr>
-            <a:r>
-              <a:rPr lang="en-US" sz="1500" dirty="0">
+            <a:pPr rtl="1" algn="ctr" indent="0" marL="0">
+              <a:buNone/>
+            </a:pPr>
+            <a:r>
+              <a:rPr lang="en-US" sz="1200" b="1" dirty="0">
                 <a:solidFill>
                   <a:srgbClr val="21141A"/>
                 </a:solidFill>
@@ -14157,186 +11212,9 @@
                 <a:ea typeface="IBM Plex Sans Arabic" pitchFamily="34" charset="-122"/>
                 <a:cs typeface="IBM Plex Sans Arabic" pitchFamily="34" charset="-120"/>
               </a:rPr>
-              <a:t>STC وSCCC وCNTXT</a:t>
-            </a:r>
-            <a:endParaRPr lang="en-US" sz="1500" dirty="0"/>
-          </a:p>
-        </p:txBody>
-      </p:sp>
-      <p:sp>
-        <p:nvSpPr>
-          <p:cNvPr id="30" name="Shape 25"/>
-          <p:cNvSpPr/>
-          <p:nvPr/>
-        </p:nvSpPr>
-        <p:spPr>
-          <a:xfrm>
-            <a:off x="6141720" y="2953512"/>
-            <a:ext cx="365760" cy="365760"/>
-          </a:xfrm>
-          <a:prstGeom prst="ellipse">
-            <a:avLst/>
-          </a:prstGeom>
-          <a:solidFill>
-            <a:srgbClr val="7FB27A"/>
-          </a:solidFill>
-          <a:ln/>
-        </p:spPr>
-      </p:sp>
-      <p:sp>
-        <p:nvSpPr>
-          <p:cNvPr id="31" name="Text 26"/>
-          <p:cNvSpPr txBox="1"/>
-          <p:nvPr/>
-        </p:nvSpPr>
-        <p:spPr>
-          <a:xfrm>
-            <a:off x="6141720" y="2953512"/>
-            <a:ext cx="365760" cy="365760"/>
-          </a:xfrm>
-          <a:prstGeom prst="rect">
-            <a:avLst/>
-          </a:prstGeom>
-          <a:noFill/>
-          <a:ln/>
-        </p:spPr>
-        <p:txBody>
-          <a:bodyPr wrap="square" lIns="0" tIns="0" rIns="0" bIns="0" rtlCol="0" anchor="ctr"/>
-          <a:lstStyle/>
-          <a:p>
-            <a:pPr algn="ctr" indent="0" marL="0">
-              <a:buNone/>
-            </a:pPr>
-            <a:r>
-              <a:rPr lang="en-US" sz="1400" b="1" dirty="0">
-                <a:solidFill>
-                  <a:srgbClr val="FFFFFF"/>
-                </a:solidFill>
-                <a:latin typeface="IBM Plex Sans Arabic" pitchFamily="34" charset="0"/>
-                <a:ea typeface="IBM Plex Sans Arabic" pitchFamily="34" charset="-122"/>
-                <a:cs typeface="IBM Plex Sans Arabic" pitchFamily="34" charset="-120"/>
-              </a:rPr>
-              <a:t>✓</a:t>
-            </a:r>
-            <a:endParaRPr lang="en-US" sz="1400" dirty="0"/>
-          </a:p>
-        </p:txBody>
-      </p:sp>
-      <p:sp>
-        <p:nvSpPr>
-          <p:cNvPr id="32" name="Shape 27"/>
-          <p:cNvSpPr/>
-          <p:nvPr/>
-        </p:nvSpPr>
-        <p:spPr>
-          <a:xfrm>
-            <a:off x="3794760" y="2953512"/>
-            <a:ext cx="365760" cy="365760"/>
-          </a:xfrm>
-          <a:prstGeom prst="ellipse">
-            <a:avLst/>
-          </a:prstGeom>
-          <a:solidFill>
-            <a:srgbClr val="D48A93"/>
-          </a:solidFill>
-          <a:ln/>
-        </p:spPr>
-      </p:sp>
-      <p:sp>
-        <p:nvSpPr>
-          <p:cNvPr id="33" name="Text 28"/>
-          <p:cNvSpPr txBox="1"/>
-          <p:nvPr/>
-        </p:nvSpPr>
-        <p:spPr>
-          <a:xfrm>
-            <a:off x="3794760" y="2953512"/>
-            <a:ext cx="365760" cy="365760"/>
-          </a:xfrm>
-          <a:prstGeom prst="rect">
-            <a:avLst/>
-          </a:prstGeom>
-          <a:noFill/>
-          <a:ln/>
-        </p:spPr>
-        <p:txBody>
-          <a:bodyPr wrap="square" lIns="0" tIns="0" rIns="0" bIns="0" rtlCol="0" anchor="ctr"/>
-          <a:lstStyle/>
-          <a:p>
-            <a:pPr algn="ctr" indent="0" marL="0">
-              <a:buNone/>
-            </a:pPr>
-            <a:r>
-              <a:rPr lang="en-US" sz="1400" b="1" dirty="0">
-                <a:solidFill>
-                  <a:srgbClr val="FFFFFF"/>
-                </a:solidFill>
-                <a:latin typeface="IBM Plex Sans Arabic" pitchFamily="34" charset="0"/>
-                <a:ea typeface="IBM Plex Sans Arabic" pitchFamily="34" charset="-122"/>
-                <a:cs typeface="IBM Plex Sans Arabic" pitchFamily="34" charset="-120"/>
-              </a:rPr>
-              <a:t>✕</a:t>
-            </a:r>
-            <a:endParaRPr lang="en-US" sz="1400" dirty="0"/>
-          </a:p>
-        </p:txBody>
-      </p:sp>
-      <p:sp>
-        <p:nvSpPr>
-          <p:cNvPr id="34" name="Shape 29"/>
-          <p:cNvSpPr/>
-          <p:nvPr/>
-        </p:nvSpPr>
-        <p:spPr>
-          <a:xfrm>
-            <a:off x="1447800" y="2953512"/>
-            <a:ext cx="365760" cy="365760"/>
-          </a:xfrm>
-          <a:prstGeom prst="ellipse">
-            <a:avLst/>
-          </a:prstGeom>
-          <a:solidFill>
-            <a:srgbClr val="D48A93"/>
-          </a:solidFill>
-          <a:ln/>
-        </p:spPr>
-      </p:sp>
-      <p:sp>
-        <p:nvSpPr>
-          <p:cNvPr id="35" name="Text 30"/>
-          <p:cNvSpPr txBox="1"/>
-          <p:nvPr/>
-        </p:nvSpPr>
-        <p:spPr>
-          <a:xfrm>
-            <a:off x="1447800" y="2953512"/>
-            <a:ext cx="365760" cy="365760"/>
-          </a:xfrm>
-          <a:prstGeom prst="rect">
-            <a:avLst/>
-          </a:prstGeom>
-          <a:noFill/>
-          <a:ln/>
-        </p:spPr>
-        <p:txBody>
-          <a:bodyPr wrap="square" lIns="0" tIns="0" rIns="0" bIns="0" rtlCol="0" anchor="ctr"/>
-          <a:lstStyle/>
-          <a:p>
-            <a:pPr algn="ctr" indent="0" marL="0">
-              <a:buNone/>
-            </a:pPr>
-            <a:r>
-              <a:rPr lang="en-US" sz="1400" b="1" dirty="0">
-                <a:solidFill>
-                  <a:srgbClr val="FFFFFF"/>
-                </a:solidFill>
-                <a:latin typeface="IBM Plex Sans Arabic" pitchFamily="34" charset="0"/>
-                <a:ea typeface="IBM Plex Sans Arabic" pitchFamily="34" charset="-122"/>
-                <a:cs typeface="IBM Plex Sans Arabic" pitchFamily="34" charset="-120"/>
-              </a:rPr>
-              <a:t>✕</a:t>
-            </a:r>
-            <a:endParaRPr lang="en-US" sz="1400" dirty="0"/>
+              <a:t>Cloud APIs</a:t>
+            </a:r>
+            <a:endParaRPr lang="en-US" sz="1200" dirty="0"/>
           </a:p>
         </p:txBody>
       </p:sp>
@@ -14348,13 +11226,17 @@
         </p:nvSpPr>
         <p:spPr>
           <a:xfrm>
-            <a:off x="457200" y="3392424"/>
-            <a:ext cx="11277295" cy="0"/>
-          </a:xfrm>
-          <a:prstGeom prst="line">
-            <a:avLst/>
-          </a:prstGeom>
-          <a:noFill/>
+            <a:off x="2665476" y="2788920"/>
+            <a:ext cx="1888236" cy="384048"/>
+          </a:xfrm>
+          <a:prstGeom prst="roundRect">
+            <a:avLst>
+              <a:gd name="adj" fmla="val 50000"/>
+            </a:avLst>
+          </a:prstGeom>
+          <a:solidFill>
+            <a:srgbClr val="FFFBF8"/>
+          </a:solidFill>
           <a:ln w="9525">
             <a:solidFill>
               <a:srgbClr val="E3D5CC"/>
@@ -14371,8 +11253,8 @@
         </p:nvSpPr>
         <p:spPr>
           <a:xfrm>
-            <a:off x="7680960" y="3392424"/>
-            <a:ext cx="4053535" cy="512064"/>
+            <a:off x="2665476" y="2788920"/>
+            <a:ext cx="1888236" cy="384048"/>
           </a:xfrm>
           <a:prstGeom prst="rect">
             <a:avLst/>
@@ -14384,11 +11266,11 @@
           <a:bodyPr wrap="square" lIns="0" tIns="0" rIns="0" bIns="0" rtlCol="0" anchor="ctr"/>
           <a:lstStyle/>
           <a:p>
-            <a:pPr rtl="1" algn="r" indent="0" marL="0">
-              <a:buNone/>
-            </a:pPr>
-            <a:r>
-              <a:rPr lang="en-US" sz="1500" dirty="0">
+            <a:pPr rtl="1" algn="ctr" indent="0" marL="0">
+              <a:buNone/>
+            </a:pPr>
+            <a:r>
+              <a:rPr lang="en-US" sz="1200" b="1" dirty="0">
                 <a:solidFill>
                   <a:srgbClr val="21141A"/>
                 </a:solidFill>
@@ -14396,9 +11278,9 @@
                 <a:ea typeface="IBM Plex Sans Arabic" pitchFamily="34" charset="-122"/>
                 <a:cs typeface="IBM Plex Sans Arabic" pitchFamily="34" charset="-120"/>
               </a:rPr>
-              <a:t>موافقة بشرية قبل أي تغيير</a:t>
-            </a:r>
-            <a:endParaRPr lang="en-US" sz="1500" dirty="0"/>
+              <a:t>AWS IAM (قراءة فقط)</a:t>
+            </a:r>
+            <a:endParaRPr lang="en-US" sz="1200" dirty="0"/>
           </a:p>
         </p:txBody>
       </p:sp>
@@ -14410,190 +11292,17 @@
         </p:nvSpPr>
         <p:spPr>
           <a:xfrm>
-            <a:off x="6141720" y="3465576"/>
-            <a:ext cx="365760" cy="365760"/>
-          </a:xfrm>
-          <a:prstGeom prst="ellipse">
-            <a:avLst/>
-          </a:prstGeom>
-          <a:solidFill>
-            <a:srgbClr val="7FB27A"/>
-          </a:solidFill>
-          <a:ln/>
-        </p:spPr>
-      </p:sp>
-      <p:sp>
-        <p:nvSpPr>
-          <p:cNvPr id="39" name="Text 34"/>
-          <p:cNvSpPr txBox="1"/>
-          <p:nvPr/>
-        </p:nvSpPr>
-        <p:spPr>
-          <a:xfrm>
-            <a:off x="6141720" y="3465576"/>
-            <a:ext cx="365760" cy="365760"/>
-          </a:xfrm>
-          <a:prstGeom prst="rect">
-            <a:avLst/>
-          </a:prstGeom>
-          <a:noFill/>
-          <a:ln/>
-        </p:spPr>
-        <p:txBody>
-          <a:bodyPr wrap="square" lIns="0" tIns="0" rIns="0" bIns="0" rtlCol="0" anchor="ctr"/>
-          <a:lstStyle/>
-          <a:p>
-            <a:pPr algn="ctr" indent="0" marL="0">
-              <a:buNone/>
-            </a:pPr>
-            <a:r>
-              <a:rPr lang="en-US" sz="1400" b="1" dirty="0">
-                <a:solidFill>
-                  <a:srgbClr val="FFFFFF"/>
-                </a:solidFill>
-                <a:latin typeface="IBM Plex Sans Arabic" pitchFamily="34" charset="0"/>
-                <a:ea typeface="IBM Plex Sans Arabic" pitchFamily="34" charset="-122"/>
-                <a:cs typeface="IBM Plex Sans Arabic" pitchFamily="34" charset="-120"/>
-              </a:rPr>
-              <a:t>✓</a:t>
-            </a:r>
-            <a:endParaRPr lang="en-US" sz="1400" dirty="0"/>
-          </a:p>
-        </p:txBody>
-      </p:sp>
-      <p:sp>
-        <p:nvSpPr>
-          <p:cNvPr id="40" name="Shape 35"/>
-          <p:cNvSpPr/>
-          <p:nvPr/>
-        </p:nvSpPr>
-        <p:spPr>
-          <a:xfrm>
-            <a:off x="3794760" y="3465576"/>
-            <a:ext cx="365760" cy="365760"/>
-          </a:xfrm>
-          <a:prstGeom prst="ellipse">
-            <a:avLst/>
-          </a:prstGeom>
-          <a:solidFill>
-            <a:srgbClr val="C9A46E"/>
-          </a:solidFill>
-          <a:ln/>
-        </p:spPr>
-      </p:sp>
-      <p:sp>
-        <p:nvSpPr>
-          <p:cNvPr id="41" name="Text 36"/>
-          <p:cNvSpPr txBox="1"/>
-          <p:nvPr/>
-        </p:nvSpPr>
-        <p:spPr>
-          <a:xfrm>
-            <a:off x="3794760" y="3465576"/>
-            <a:ext cx="365760" cy="365760"/>
-          </a:xfrm>
-          <a:prstGeom prst="rect">
-            <a:avLst/>
-          </a:prstGeom>
-          <a:noFill/>
-          <a:ln/>
-        </p:spPr>
-        <p:txBody>
-          <a:bodyPr wrap="square" lIns="0" tIns="0" rIns="0" bIns="0" rtlCol="0" anchor="ctr"/>
-          <a:lstStyle/>
-          <a:p>
-            <a:pPr algn="ctr" indent="0" marL="0">
-              <a:buNone/>
-            </a:pPr>
-            <a:r>
-              <a:rPr lang="en-US" sz="1400" b="1" dirty="0">
-                <a:solidFill>
-                  <a:srgbClr val="FFFFFF"/>
-                </a:solidFill>
-                <a:latin typeface="IBM Plex Sans Arabic" pitchFamily="34" charset="0"/>
-                <a:ea typeface="IBM Plex Sans Arabic" pitchFamily="34" charset="-122"/>
-                <a:cs typeface="IBM Plex Sans Arabic" pitchFamily="34" charset="-120"/>
-              </a:rPr>
-              <a:t>~</a:t>
-            </a:r>
-            <a:endParaRPr lang="en-US" sz="1400" dirty="0"/>
-          </a:p>
-        </p:txBody>
-      </p:sp>
-      <p:sp>
-        <p:nvSpPr>
-          <p:cNvPr id="42" name="Shape 37"/>
-          <p:cNvSpPr/>
-          <p:nvPr/>
-        </p:nvSpPr>
-        <p:spPr>
-          <a:xfrm>
-            <a:off x="1447800" y="3465576"/>
-            <a:ext cx="365760" cy="365760"/>
-          </a:xfrm>
-          <a:prstGeom prst="ellipse">
-            <a:avLst/>
-          </a:prstGeom>
-          <a:solidFill>
-            <a:srgbClr val="D48A93"/>
-          </a:solidFill>
-          <a:ln/>
-        </p:spPr>
-      </p:sp>
-      <p:sp>
-        <p:nvSpPr>
-          <p:cNvPr id="43" name="Text 38"/>
-          <p:cNvSpPr txBox="1"/>
-          <p:nvPr/>
-        </p:nvSpPr>
-        <p:spPr>
-          <a:xfrm>
-            <a:off x="1447800" y="3465576"/>
-            <a:ext cx="365760" cy="365760"/>
-          </a:xfrm>
-          <a:prstGeom prst="rect">
-            <a:avLst/>
-          </a:prstGeom>
-          <a:noFill/>
-          <a:ln/>
-        </p:spPr>
-        <p:txBody>
-          <a:bodyPr wrap="square" lIns="0" tIns="0" rIns="0" bIns="0" rtlCol="0" anchor="ctr"/>
-          <a:lstStyle/>
-          <a:p>
-            <a:pPr algn="ctr" indent="0" marL="0">
-              <a:buNone/>
-            </a:pPr>
-            <a:r>
-              <a:rPr lang="en-US" sz="1400" b="1" dirty="0">
-                <a:solidFill>
-                  <a:srgbClr val="FFFFFF"/>
-                </a:solidFill>
-                <a:latin typeface="IBM Plex Sans Arabic" pitchFamily="34" charset="0"/>
-                <a:ea typeface="IBM Plex Sans Arabic" pitchFamily="34" charset="-122"/>
-                <a:cs typeface="IBM Plex Sans Arabic" pitchFamily="34" charset="-120"/>
-              </a:rPr>
-              <a:t>✕</a:t>
-            </a:r>
-            <a:endParaRPr lang="en-US" sz="1400" dirty="0"/>
-          </a:p>
-        </p:txBody>
-      </p:sp>
-      <p:sp>
-        <p:nvSpPr>
-          <p:cNvPr id="44" name="Shape 39"/>
-          <p:cNvSpPr/>
-          <p:nvPr/>
-        </p:nvSpPr>
-        <p:spPr>
-          <a:xfrm>
-            <a:off x="457200" y="3904488"/>
-            <a:ext cx="11277295" cy="0"/>
-          </a:xfrm>
-          <a:prstGeom prst="line">
-            <a:avLst/>
-          </a:prstGeom>
-          <a:noFill/>
+            <a:off x="745236" y="2788920"/>
+            <a:ext cx="1810512" cy="384048"/>
+          </a:xfrm>
+          <a:prstGeom prst="roundRect">
+            <a:avLst>
+              <a:gd name="adj" fmla="val 50000"/>
+            </a:avLst>
+          </a:prstGeom>
+          <a:solidFill>
+            <a:srgbClr val="FFFBF8"/>
+          </a:solidFill>
           <a:ln w="9525">
             <a:solidFill>
               <a:srgbClr val="E3D5CC"/>
@@ -14604,14 +11313,14 @@
       </p:sp>
       <p:sp>
         <p:nvSpPr>
-          <p:cNvPr id="45" name="Text 40"/>
-          <p:cNvSpPr txBox="1"/>
-          <p:nvPr/>
-        </p:nvSpPr>
-        <p:spPr>
-          <a:xfrm>
-            <a:off x="7680960" y="3904488"/>
-            <a:ext cx="4053535" cy="512064"/>
+          <p:cNvPr id="39" name="Text 34"/>
+          <p:cNvSpPr txBox="1"/>
+          <p:nvPr/>
+        </p:nvSpPr>
+        <p:spPr>
+          <a:xfrm>
+            <a:off x="745236" y="2788920"/>
+            <a:ext cx="1810512" cy="384048"/>
           </a:xfrm>
           <a:prstGeom prst="rect">
             <a:avLst/>
@@ -14623,11 +11332,11 @@
           <a:bodyPr wrap="square" lIns="0" tIns="0" rIns="0" bIns="0" rtlCol="0" anchor="ctr"/>
           <a:lstStyle/>
           <a:p>
-            <a:pPr rtl="1" algn="r" indent="0" marL="0">
-              <a:buNone/>
-            </a:pPr>
-            <a:r>
-              <a:rPr lang="en-US" sz="1500" dirty="0">
+            <a:pPr rtl="1" algn="ctr" indent="0" marL="0">
+              <a:buNone/>
+            </a:pPr>
+            <a:r>
+              <a:rPr lang="en-US" sz="1200" b="1" dirty="0">
                 <a:solidFill>
                   <a:srgbClr val="21141A"/>
                 </a:solidFill>
@@ -14635,204 +11344,31 @@
                 <a:ea typeface="IBM Plex Sans Arabic" pitchFamily="34" charset="-122"/>
                 <a:cs typeface="IBM Plex Sans Arabic" pitchFamily="34" charset="-120"/>
               </a:rPr>
-              <a:t>إصلاحات، وليس تقارير فقط</a:t>
-            </a:r>
-            <a:endParaRPr lang="en-US" sz="1500" dirty="0"/>
-          </a:p>
-        </p:txBody>
-      </p:sp>
-      <p:sp>
-        <p:nvSpPr>
-          <p:cNvPr id="46" name="Shape 41"/>
-          <p:cNvSpPr/>
-          <p:nvPr/>
-        </p:nvSpPr>
-        <p:spPr>
-          <a:xfrm>
-            <a:off x="6141720" y="3977640"/>
-            <a:ext cx="365760" cy="365760"/>
-          </a:xfrm>
-          <a:prstGeom prst="ellipse">
-            <a:avLst/>
-          </a:prstGeom>
-          <a:solidFill>
-            <a:srgbClr val="7FB27A"/>
-          </a:solidFill>
-          <a:ln/>
-        </p:spPr>
-      </p:sp>
-      <p:sp>
-        <p:nvSpPr>
-          <p:cNvPr id="47" name="Text 42"/>
-          <p:cNvSpPr txBox="1"/>
-          <p:nvPr/>
-        </p:nvSpPr>
-        <p:spPr>
-          <a:xfrm>
-            <a:off x="6141720" y="3977640"/>
-            <a:ext cx="365760" cy="365760"/>
-          </a:xfrm>
-          <a:prstGeom prst="rect">
-            <a:avLst/>
-          </a:prstGeom>
-          <a:noFill/>
-          <a:ln/>
-        </p:spPr>
-        <p:txBody>
-          <a:bodyPr wrap="square" lIns="0" tIns="0" rIns="0" bIns="0" rtlCol="0" anchor="ctr"/>
-          <a:lstStyle/>
-          <a:p>
-            <a:pPr algn="ctr" indent="0" marL="0">
-              <a:buNone/>
-            </a:pPr>
-            <a:r>
-              <a:rPr lang="en-US" sz="1400" b="1" dirty="0">
-                <a:solidFill>
-                  <a:srgbClr val="FFFFFF"/>
-                </a:solidFill>
-                <a:latin typeface="IBM Plex Sans Arabic" pitchFamily="34" charset="0"/>
-                <a:ea typeface="IBM Plex Sans Arabic" pitchFamily="34" charset="-122"/>
-                <a:cs typeface="IBM Plex Sans Arabic" pitchFamily="34" charset="-120"/>
-              </a:rPr>
-              <a:t>✓</a:t>
-            </a:r>
-            <a:endParaRPr lang="en-US" sz="1400" dirty="0"/>
-          </a:p>
-        </p:txBody>
-      </p:sp>
-      <p:sp>
-        <p:nvSpPr>
-          <p:cNvPr id="48" name="Shape 43"/>
-          <p:cNvSpPr/>
-          <p:nvPr/>
-        </p:nvSpPr>
-        <p:spPr>
-          <a:xfrm>
-            <a:off x="3794760" y="3977640"/>
-            <a:ext cx="365760" cy="365760"/>
-          </a:xfrm>
-          <a:prstGeom prst="ellipse">
-            <a:avLst/>
-          </a:prstGeom>
-          <a:solidFill>
-            <a:srgbClr val="C9A46E"/>
-          </a:solidFill>
-          <a:ln/>
-        </p:spPr>
-      </p:sp>
-      <p:sp>
-        <p:nvSpPr>
-          <p:cNvPr id="49" name="Text 44"/>
-          <p:cNvSpPr txBox="1"/>
-          <p:nvPr/>
-        </p:nvSpPr>
-        <p:spPr>
-          <a:xfrm>
-            <a:off x="3794760" y="3977640"/>
-            <a:ext cx="365760" cy="365760"/>
-          </a:xfrm>
-          <a:prstGeom prst="rect">
-            <a:avLst/>
-          </a:prstGeom>
-          <a:noFill/>
-          <a:ln/>
-        </p:spPr>
-        <p:txBody>
-          <a:bodyPr wrap="square" lIns="0" tIns="0" rIns="0" bIns="0" rtlCol="0" anchor="ctr"/>
-          <a:lstStyle/>
-          <a:p>
-            <a:pPr algn="ctr" indent="0" marL="0">
-              <a:buNone/>
-            </a:pPr>
-            <a:r>
-              <a:rPr lang="en-US" sz="1400" b="1" dirty="0">
-                <a:solidFill>
-                  <a:srgbClr val="FFFFFF"/>
-                </a:solidFill>
-                <a:latin typeface="IBM Plex Sans Arabic" pitchFamily="34" charset="0"/>
-                <a:ea typeface="IBM Plex Sans Arabic" pitchFamily="34" charset="-122"/>
-                <a:cs typeface="IBM Plex Sans Arabic" pitchFamily="34" charset="-120"/>
-              </a:rPr>
-              <a:t>~</a:t>
-            </a:r>
-            <a:endParaRPr lang="en-US" sz="1400" dirty="0"/>
-          </a:p>
-        </p:txBody>
-      </p:sp>
-      <p:sp>
-        <p:nvSpPr>
-          <p:cNvPr id="50" name="Shape 45"/>
-          <p:cNvSpPr/>
-          <p:nvPr/>
-        </p:nvSpPr>
-        <p:spPr>
-          <a:xfrm>
-            <a:off x="1447800" y="3977640"/>
-            <a:ext cx="365760" cy="365760"/>
-          </a:xfrm>
-          <a:prstGeom prst="ellipse">
-            <a:avLst/>
-          </a:prstGeom>
-          <a:solidFill>
-            <a:srgbClr val="D48A93"/>
-          </a:solidFill>
-          <a:ln/>
-        </p:spPr>
-      </p:sp>
-      <p:sp>
-        <p:nvSpPr>
-          <p:cNvPr id="51" name="Text 46"/>
-          <p:cNvSpPr txBox="1"/>
-          <p:nvPr/>
-        </p:nvSpPr>
-        <p:spPr>
-          <a:xfrm>
-            <a:off x="1447800" y="3977640"/>
-            <a:ext cx="365760" cy="365760"/>
-          </a:xfrm>
-          <a:prstGeom prst="rect">
-            <a:avLst/>
-          </a:prstGeom>
-          <a:noFill/>
-          <a:ln/>
-        </p:spPr>
-        <p:txBody>
-          <a:bodyPr wrap="square" lIns="0" tIns="0" rIns="0" bIns="0" rtlCol="0" anchor="ctr"/>
-          <a:lstStyle/>
-          <a:p>
-            <a:pPr algn="ctr" indent="0" marL="0">
-              <a:buNone/>
-            </a:pPr>
-            <a:r>
-              <a:rPr lang="en-US" sz="1400" b="1" dirty="0">
-                <a:solidFill>
-                  <a:srgbClr val="FFFFFF"/>
-                </a:solidFill>
-                <a:latin typeface="IBM Plex Sans Arabic" pitchFamily="34" charset="0"/>
-                <a:ea typeface="IBM Plex Sans Arabic" pitchFamily="34" charset="-122"/>
-                <a:cs typeface="IBM Plex Sans Arabic" pitchFamily="34" charset="-120"/>
-              </a:rPr>
-              <a:t>✕</a:t>
-            </a:r>
-            <a:endParaRPr lang="en-US" sz="1400" dirty="0"/>
-          </a:p>
-        </p:txBody>
-      </p:sp>
-      <p:sp>
-        <p:nvSpPr>
-          <p:cNvPr id="52" name="Shape 47"/>
-          <p:cNvSpPr/>
-          <p:nvPr/>
-        </p:nvSpPr>
-        <p:spPr>
-          <a:xfrm>
-            <a:off x="457200" y="4416552"/>
-            <a:ext cx="11277295" cy="0"/>
-          </a:xfrm>
-          <a:prstGeom prst="line">
-            <a:avLst/>
-          </a:prstGeom>
-          <a:noFill/>
+              <a:t>نموذج ذكاء اصطناعي</a:t>
+            </a:r>
+            <a:endParaRPr lang="en-US" sz="1200" dirty="0"/>
+          </a:p>
+        </p:txBody>
+      </p:sp>
+      <p:sp>
+        <p:nvSpPr>
+          <p:cNvPr id="40" name="Shape 35"/>
+          <p:cNvSpPr/>
+          <p:nvPr/>
+        </p:nvSpPr>
+        <p:spPr>
+          <a:xfrm>
+            <a:off x="4896612" y="3337560"/>
+            <a:ext cx="955548" cy="384048"/>
+          </a:xfrm>
+          <a:prstGeom prst="roundRect">
+            <a:avLst>
+              <a:gd name="adj" fmla="val 50000"/>
+            </a:avLst>
+          </a:prstGeom>
+          <a:solidFill>
+            <a:srgbClr val="FFFBF8"/>
+          </a:solidFill>
           <a:ln w="9525">
             <a:solidFill>
               <a:srgbClr val="E3D5CC"/>
@@ -14843,14 +11379,14 @@
       </p:sp>
       <p:sp>
         <p:nvSpPr>
-          <p:cNvPr id="53" name="Text 48"/>
-          <p:cNvSpPr txBox="1"/>
-          <p:nvPr/>
-        </p:nvSpPr>
-        <p:spPr>
-          <a:xfrm>
-            <a:off x="7680960" y="4416552"/>
-            <a:ext cx="4053535" cy="512064"/>
+          <p:cNvPr id="41" name="Text 36"/>
+          <p:cNvSpPr txBox="1"/>
+          <p:nvPr/>
+        </p:nvSpPr>
+        <p:spPr>
+          <a:xfrm>
+            <a:off x="4896612" y="3337560"/>
+            <a:ext cx="955548" cy="384048"/>
           </a:xfrm>
           <a:prstGeom prst="rect">
             <a:avLst/>
@@ -14862,11 +11398,11 @@
           <a:bodyPr wrap="square" lIns="0" tIns="0" rIns="0" bIns="0" rtlCol="0" anchor="ctr"/>
           <a:lstStyle/>
           <a:p>
-            <a:pPr rtl="1" algn="r" indent="0" marL="0">
-              <a:buNone/>
-            </a:pPr>
-            <a:r>
-              <a:rPr lang="en-US" sz="1500" dirty="0">
+            <a:pPr rtl="1" algn="ctr" indent="0" marL="0">
+              <a:buNone/>
+            </a:pPr>
+            <a:r>
+              <a:rPr lang="en-US" sz="1200" b="1" dirty="0">
                 <a:solidFill>
                   <a:srgbClr val="21141A"/>
                 </a:solidFill>
@@ -14874,204 +11410,31 @@
                 <a:ea typeface="IBM Plex Sans Arabic" pitchFamily="34" charset="-122"/>
                 <a:cs typeface="IBM Plex Sans Arabic" pitchFamily="34" charset="-120"/>
               </a:rPr>
-              <a:t>تنبيهات واتساب وواجهة عربية</a:t>
-            </a:r>
-            <a:endParaRPr lang="en-US" sz="1500" dirty="0"/>
-          </a:p>
-        </p:txBody>
-      </p:sp>
-      <p:sp>
-        <p:nvSpPr>
-          <p:cNvPr id="54" name="Shape 49"/>
-          <p:cNvSpPr/>
-          <p:nvPr/>
-        </p:nvSpPr>
-        <p:spPr>
-          <a:xfrm>
-            <a:off x="6141720" y="4489704"/>
-            <a:ext cx="365760" cy="365760"/>
-          </a:xfrm>
-          <a:prstGeom prst="ellipse">
-            <a:avLst/>
-          </a:prstGeom>
-          <a:solidFill>
-            <a:srgbClr val="7FB27A"/>
-          </a:solidFill>
-          <a:ln/>
-        </p:spPr>
-      </p:sp>
-      <p:sp>
-        <p:nvSpPr>
-          <p:cNvPr id="55" name="Text 50"/>
-          <p:cNvSpPr txBox="1"/>
-          <p:nvPr/>
-        </p:nvSpPr>
-        <p:spPr>
-          <a:xfrm>
-            <a:off x="6141720" y="4489704"/>
-            <a:ext cx="365760" cy="365760"/>
-          </a:xfrm>
-          <a:prstGeom prst="rect">
-            <a:avLst/>
-          </a:prstGeom>
-          <a:noFill/>
-          <a:ln/>
-        </p:spPr>
-        <p:txBody>
-          <a:bodyPr wrap="square" lIns="0" tIns="0" rIns="0" bIns="0" rtlCol="0" anchor="ctr"/>
-          <a:lstStyle/>
-          <a:p>
-            <a:pPr algn="ctr" indent="0" marL="0">
-              <a:buNone/>
-            </a:pPr>
-            <a:r>
-              <a:rPr lang="en-US" sz="1400" b="1" dirty="0">
-                <a:solidFill>
-                  <a:srgbClr val="FFFFFF"/>
-                </a:solidFill>
-                <a:latin typeface="IBM Plex Sans Arabic" pitchFamily="34" charset="0"/>
-                <a:ea typeface="IBM Plex Sans Arabic" pitchFamily="34" charset="-122"/>
-                <a:cs typeface="IBM Plex Sans Arabic" pitchFamily="34" charset="-120"/>
-              </a:rPr>
-              <a:t>✓</a:t>
-            </a:r>
-            <a:endParaRPr lang="en-US" sz="1400" dirty="0"/>
-          </a:p>
-        </p:txBody>
-      </p:sp>
-      <p:sp>
-        <p:nvSpPr>
-          <p:cNvPr id="56" name="Shape 51"/>
-          <p:cNvSpPr/>
-          <p:nvPr/>
-        </p:nvSpPr>
-        <p:spPr>
-          <a:xfrm>
-            <a:off x="3794760" y="4489704"/>
-            <a:ext cx="365760" cy="365760"/>
-          </a:xfrm>
-          <a:prstGeom prst="ellipse">
-            <a:avLst/>
-          </a:prstGeom>
-          <a:solidFill>
-            <a:srgbClr val="D48A93"/>
-          </a:solidFill>
-          <a:ln/>
-        </p:spPr>
-      </p:sp>
-      <p:sp>
-        <p:nvSpPr>
-          <p:cNvPr id="57" name="Text 52"/>
-          <p:cNvSpPr txBox="1"/>
-          <p:nvPr/>
-        </p:nvSpPr>
-        <p:spPr>
-          <a:xfrm>
-            <a:off x="3794760" y="4489704"/>
-            <a:ext cx="365760" cy="365760"/>
-          </a:xfrm>
-          <a:prstGeom prst="rect">
-            <a:avLst/>
-          </a:prstGeom>
-          <a:noFill/>
-          <a:ln/>
-        </p:spPr>
-        <p:txBody>
-          <a:bodyPr wrap="square" lIns="0" tIns="0" rIns="0" bIns="0" rtlCol="0" anchor="ctr"/>
-          <a:lstStyle/>
-          <a:p>
-            <a:pPr algn="ctr" indent="0" marL="0">
-              <a:buNone/>
-            </a:pPr>
-            <a:r>
-              <a:rPr lang="en-US" sz="1400" b="1" dirty="0">
-                <a:solidFill>
-                  <a:srgbClr val="FFFFFF"/>
-                </a:solidFill>
-                <a:latin typeface="IBM Plex Sans Arabic" pitchFamily="34" charset="0"/>
-                <a:ea typeface="IBM Plex Sans Arabic" pitchFamily="34" charset="-122"/>
-                <a:cs typeface="IBM Plex Sans Arabic" pitchFamily="34" charset="-120"/>
-              </a:rPr>
-              <a:t>✕</a:t>
-            </a:r>
-            <a:endParaRPr lang="en-US" sz="1400" dirty="0"/>
-          </a:p>
-        </p:txBody>
-      </p:sp>
-      <p:sp>
-        <p:nvSpPr>
-          <p:cNvPr id="58" name="Shape 53"/>
-          <p:cNvSpPr/>
-          <p:nvPr/>
-        </p:nvSpPr>
-        <p:spPr>
-          <a:xfrm>
-            <a:off x="1447800" y="4489704"/>
-            <a:ext cx="365760" cy="365760"/>
-          </a:xfrm>
-          <a:prstGeom prst="ellipse">
-            <a:avLst/>
-          </a:prstGeom>
-          <a:solidFill>
-            <a:srgbClr val="D48A93"/>
-          </a:solidFill>
-          <a:ln/>
-        </p:spPr>
-      </p:sp>
-      <p:sp>
-        <p:nvSpPr>
-          <p:cNvPr id="59" name="Text 54"/>
-          <p:cNvSpPr txBox="1"/>
-          <p:nvPr/>
-        </p:nvSpPr>
-        <p:spPr>
-          <a:xfrm>
-            <a:off x="1447800" y="4489704"/>
-            <a:ext cx="365760" cy="365760"/>
-          </a:xfrm>
-          <a:prstGeom prst="rect">
-            <a:avLst/>
-          </a:prstGeom>
-          <a:noFill/>
-          <a:ln/>
-        </p:spPr>
-        <p:txBody>
-          <a:bodyPr wrap="square" lIns="0" tIns="0" rIns="0" bIns="0" rtlCol="0" anchor="ctr"/>
-          <a:lstStyle/>
-          <a:p>
-            <a:pPr algn="ctr" indent="0" marL="0">
-              <a:buNone/>
-            </a:pPr>
-            <a:r>
-              <a:rPr lang="en-US" sz="1400" b="1" dirty="0">
-                <a:solidFill>
-                  <a:srgbClr val="FFFFFF"/>
-                </a:solidFill>
-                <a:latin typeface="IBM Plex Sans Arabic" pitchFamily="34" charset="0"/>
-                <a:ea typeface="IBM Plex Sans Arabic" pitchFamily="34" charset="-122"/>
-                <a:cs typeface="IBM Plex Sans Arabic" pitchFamily="34" charset="-120"/>
-              </a:rPr>
-              <a:t>✕</a:t>
-            </a:r>
-            <a:endParaRPr lang="en-US" sz="1400" dirty="0"/>
-          </a:p>
-        </p:txBody>
-      </p:sp>
-      <p:sp>
-        <p:nvSpPr>
-          <p:cNvPr id="60" name="Shape 55"/>
-          <p:cNvSpPr/>
-          <p:nvPr/>
-        </p:nvSpPr>
-        <p:spPr>
-          <a:xfrm>
-            <a:off x="457200" y="4928616"/>
-            <a:ext cx="11277295" cy="0"/>
-          </a:xfrm>
-          <a:prstGeom prst="line">
-            <a:avLst/>
-          </a:prstGeom>
-          <a:noFill/>
+              <a:t>Next.js</a:t>
+            </a:r>
+            <a:endParaRPr lang="en-US" sz="1200" dirty="0"/>
+          </a:p>
+        </p:txBody>
+      </p:sp>
+      <p:sp>
+        <p:nvSpPr>
+          <p:cNvPr id="42" name="Shape 37"/>
+          <p:cNvSpPr/>
+          <p:nvPr/>
+        </p:nvSpPr>
+        <p:spPr>
+          <a:xfrm>
+            <a:off x="3909060" y="3337560"/>
+            <a:ext cx="877824" cy="384048"/>
+          </a:xfrm>
+          <a:prstGeom prst="roundRect">
+            <a:avLst>
+              <a:gd name="adj" fmla="val 50000"/>
+            </a:avLst>
+          </a:prstGeom>
+          <a:solidFill>
+            <a:srgbClr val="FFFBF8"/>
+          </a:solidFill>
           <a:ln w="9525">
             <a:solidFill>
               <a:srgbClr val="E3D5CC"/>
@@ -15082,14 +11445,14 @@
       </p:sp>
       <p:sp>
         <p:nvSpPr>
-          <p:cNvPr id="61" name="Text 56"/>
-          <p:cNvSpPr txBox="1"/>
-          <p:nvPr/>
-        </p:nvSpPr>
-        <p:spPr>
-          <a:xfrm>
-            <a:off x="7680960" y="4928616"/>
-            <a:ext cx="4053535" cy="512064"/>
+          <p:cNvPr id="43" name="Text 38"/>
+          <p:cNvSpPr txBox="1"/>
+          <p:nvPr/>
+        </p:nvSpPr>
+        <p:spPr>
+          <a:xfrm>
+            <a:off x="3909060" y="3337560"/>
+            <a:ext cx="877824" cy="384048"/>
           </a:xfrm>
           <a:prstGeom prst="rect">
             <a:avLst/>
@@ -15101,11 +11464,321 @@
           <a:bodyPr wrap="square" lIns="0" tIns="0" rIns="0" bIns="0" rtlCol="0" anchor="ctr"/>
           <a:lstStyle/>
           <a:p>
+            <a:pPr rtl="1" algn="ctr" indent="0" marL="0">
+              <a:buNone/>
+            </a:pPr>
+            <a:r>
+              <a:rPr lang="en-US" sz="1200" b="1" dirty="0">
+                <a:solidFill>
+                  <a:srgbClr val="21141A"/>
+                </a:solidFill>
+                <a:latin typeface="IBM Plex Sans Arabic" pitchFamily="34" charset="0"/>
+                <a:ea typeface="IBM Plex Sans Arabic" pitchFamily="34" charset="-122"/>
+                <a:cs typeface="IBM Plex Sans Arabic" pitchFamily="34" charset="-120"/>
+              </a:rPr>
+              <a:t>Vercel</a:t>
+            </a:r>
+            <a:endParaRPr lang="en-US" sz="1200" dirty="0"/>
+          </a:p>
+        </p:txBody>
+      </p:sp>
+      <p:sp>
+        <p:nvSpPr>
+          <p:cNvPr id="44" name="Shape 39"/>
+          <p:cNvSpPr/>
+          <p:nvPr/>
+        </p:nvSpPr>
+        <p:spPr>
+          <a:xfrm>
+            <a:off x="1911096" y="3337560"/>
+            <a:ext cx="1888236" cy="384048"/>
+          </a:xfrm>
+          <a:prstGeom prst="roundRect">
+            <a:avLst>
+              <a:gd name="adj" fmla="val 50000"/>
+            </a:avLst>
+          </a:prstGeom>
+          <a:solidFill>
+            <a:srgbClr val="FFFBF8"/>
+          </a:solidFill>
+          <a:ln w="9525">
+            <a:solidFill>
+              <a:srgbClr val="E3D5CC"/>
+            </a:solidFill>
+            <a:prstDash val="solid"/>
+          </a:ln>
+        </p:spPr>
+      </p:sp>
+      <p:sp>
+        <p:nvSpPr>
+          <p:cNvPr id="45" name="Text 40"/>
+          <p:cNvSpPr txBox="1"/>
+          <p:nvPr/>
+        </p:nvSpPr>
+        <p:spPr>
+          <a:xfrm>
+            <a:off x="1911096" y="3337560"/>
+            <a:ext cx="1888236" cy="384048"/>
+          </a:xfrm>
+          <a:prstGeom prst="rect">
+            <a:avLst/>
+          </a:prstGeom>
+          <a:noFill/>
+          <a:ln/>
+        </p:spPr>
+        <p:txBody>
+          <a:bodyPr wrap="square" lIns="0" tIns="0" rIns="0" bIns="0" rtlCol="0" anchor="ctr"/>
+          <a:lstStyle/>
+          <a:p>
+            <a:pPr rtl="1" algn="ctr" indent="0" marL="0">
+              <a:buNone/>
+            </a:pPr>
+            <a:r>
+              <a:rPr lang="en-US" sz="1200" b="1" dirty="0">
+                <a:solidFill>
+                  <a:srgbClr val="21141A"/>
+                </a:solidFill>
+                <a:latin typeface="IBM Plex Sans Arabic" pitchFamily="34" charset="0"/>
+                <a:ea typeface="IBM Plex Sans Arabic" pitchFamily="34" charset="-122"/>
+                <a:cs typeface="IBM Plex Sans Arabic" pitchFamily="34" charset="-120"/>
+              </a:rPr>
+              <a:t>WhatsApp / Telegram</a:t>
+            </a:r>
+            <a:endParaRPr lang="en-US" sz="1200" dirty="0"/>
+          </a:p>
+        </p:txBody>
+      </p:sp>
+      <p:sp>
+        <p:nvSpPr>
+          <p:cNvPr id="46" name="Text 41"/>
+          <p:cNvSpPr txBox="1"/>
+          <p:nvPr/>
+        </p:nvSpPr>
+        <p:spPr>
+          <a:xfrm>
+            <a:off x="457200" y="3931920"/>
+            <a:ext cx="5394960" cy="548640"/>
+          </a:xfrm>
+          <a:prstGeom prst="rect">
+            <a:avLst/>
+          </a:prstGeom>
+          <a:noFill/>
+          <a:ln/>
+        </p:spPr>
+        <p:txBody>
+          <a:bodyPr wrap="square" lIns="0" tIns="0" rIns="0" bIns="0" rtlCol="0" anchor="t"/>
+          <a:lstStyle/>
+          <a:p>
             <a:pPr rtl="1" algn="r" indent="0" marL="0">
               <a:buNone/>
             </a:pPr>
             <a:r>
-              <a:rPr lang="en-US" sz="1500" dirty="0">
+              <a:rPr lang="en-US" sz="1300" dirty="0">
+                <a:solidFill>
+                  <a:srgbClr val="7F6C72"/>
+                </a:solidFill>
+                <a:latin typeface="IBM Plex Sans Arabic" pitchFamily="34" charset="0"/>
+                <a:ea typeface="IBM Plex Sans Arabic" pitchFamily="34" charset="-122"/>
+                <a:cs typeface="IBM Plex Sans Arabic" pitchFamily="34" charset="-120"/>
+              </a:rPr>
+              <a:t>النموذج الأولي يعمل الآن على Vercel، والقراءة عبر APIs رسمية منخفضة التكلفة.</a:t>
+            </a:r>
+            <a:endParaRPr lang="en-US" sz="1300" dirty="0"/>
+          </a:p>
+        </p:txBody>
+      </p:sp>
+      <p:sp>
+        <p:nvSpPr>
+          <p:cNvPr id="47" name="Shape 42"/>
+          <p:cNvSpPr/>
+          <p:nvPr/>
+        </p:nvSpPr>
+        <p:spPr>
+          <a:xfrm>
+            <a:off x="8097317" y="4983480"/>
+            <a:ext cx="3637178" cy="1143000"/>
+          </a:xfrm>
+          <a:prstGeom prst="roundRect">
+            <a:avLst>
+              <a:gd name="adj" fmla="val 11200"/>
+            </a:avLst>
+          </a:prstGeom>
+          <a:solidFill>
+            <a:srgbClr val="8E2F3C"/>
+          </a:solidFill>
+          <a:ln/>
+        </p:spPr>
+      </p:sp>
+      <p:sp>
+        <p:nvSpPr>
+          <p:cNvPr id="48" name="Text 43"/>
+          <p:cNvSpPr txBox="1"/>
+          <p:nvPr/>
+        </p:nvSpPr>
+        <p:spPr>
+          <a:xfrm>
+            <a:off x="8325917" y="5120640"/>
+            <a:ext cx="3179978" cy="329184"/>
+          </a:xfrm>
+          <a:prstGeom prst="rect">
+            <a:avLst/>
+          </a:prstGeom>
+          <a:noFill/>
+          <a:ln/>
+        </p:spPr>
+        <p:txBody>
+          <a:bodyPr wrap="square" lIns="0" tIns="0" rIns="0" bIns="0" rtlCol="0" anchor="t"/>
+          <a:lstStyle/>
+          <a:p>
+            <a:pPr rtl="1" algn="r" indent="0" marL="0">
+              <a:buNone/>
+            </a:pPr>
+            <a:r>
+              <a:rPr lang="en-US" sz="1500" b="1" dirty="0">
+                <a:solidFill>
+                  <a:srgbClr val="FBF6EE"/>
+                </a:solidFill>
+                <a:latin typeface="IBM Plex Sans Arabic" pitchFamily="34" charset="0"/>
+                <a:ea typeface="IBM Plex Sans Arabic" pitchFamily="34" charset="-122"/>
+                <a:cs typeface="IBM Plex Sans Arabic" pitchFamily="34" charset="-120"/>
+              </a:rPr>
+              <a:t>المرحلة 1 · الآن</a:t>
+            </a:r>
+            <a:endParaRPr lang="en-US" sz="1500" dirty="0"/>
+          </a:p>
+        </p:txBody>
+      </p:sp>
+      <p:sp>
+        <p:nvSpPr>
+          <p:cNvPr id="49" name="Text 44"/>
+          <p:cNvSpPr txBox="1"/>
+          <p:nvPr/>
+        </p:nvSpPr>
+        <p:spPr>
+          <a:xfrm>
+            <a:off x="8325917" y="5458968"/>
+            <a:ext cx="3179978" cy="594360"/>
+          </a:xfrm>
+          <a:prstGeom prst="rect">
+            <a:avLst/>
+          </a:prstGeom>
+          <a:noFill/>
+          <a:ln/>
+        </p:spPr>
+        <p:txBody>
+          <a:bodyPr wrap="square" lIns="0" tIns="0" rIns="0" bIns="0" rtlCol="0" anchor="t"/>
+          <a:lstStyle/>
+          <a:p>
+            <a:pPr rtl="1" algn="r" indent="0" marL="0">
+              <a:buNone/>
+            </a:pPr>
+            <a:r>
+              <a:rPr lang="en-US" sz="1250" dirty="0">
+                <a:solidFill>
+                  <a:srgbClr val="FBF6EE"/>
+                </a:solidFill>
+                <a:latin typeface="IBM Plex Sans Arabic" pitchFamily="34" charset="0"/>
+                <a:ea typeface="IBM Plex Sans Arabic" pitchFamily="34" charset="-122"/>
+                <a:cs typeface="IBM Plex Sans Arabic" pitchFamily="34" charset="-120"/>
+              </a:rPr>
+              <a:t>AWS + تيليجرام + 7 قواعد هدر + الموافقة بنقرة</a:t>
+            </a:r>
+            <a:endParaRPr lang="en-US" sz="1250" dirty="0"/>
+          </a:p>
+        </p:txBody>
+      </p:sp>
+      <p:sp>
+        <p:nvSpPr>
+          <p:cNvPr id="50" name="Shape 45"/>
+          <p:cNvSpPr/>
+          <p:nvPr/>
+        </p:nvSpPr>
+        <p:spPr>
+          <a:xfrm>
+            <a:off x="4277258" y="4983480"/>
+            <a:ext cx="3637178" cy="1143000"/>
+          </a:xfrm>
+          <a:prstGeom prst="roundRect">
+            <a:avLst>
+              <a:gd name="adj" fmla="val 11200"/>
+            </a:avLst>
+          </a:prstGeom>
+          <a:solidFill>
+            <a:srgbClr val="FFFBF8"/>
+          </a:solidFill>
+          <a:ln w="9525">
+            <a:solidFill>
+              <a:srgbClr val="E3D5CC"/>
+            </a:solidFill>
+            <a:prstDash val="solid"/>
+          </a:ln>
+        </p:spPr>
+      </p:sp>
+      <p:sp>
+        <p:nvSpPr>
+          <p:cNvPr id="51" name="Text 46"/>
+          <p:cNvSpPr txBox="1"/>
+          <p:nvPr/>
+        </p:nvSpPr>
+        <p:spPr>
+          <a:xfrm>
+            <a:off x="4505858" y="5120640"/>
+            <a:ext cx="3179978" cy="329184"/>
+          </a:xfrm>
+          <a:prstGeom prst="rect">
+            <a:avLst/>
+          </a:prstGeom>
+          <a:noFill/>
+          <a:ln/>
+        </p:spPr>
+        <p:txBody>
+          <a:bodyPr wrap="square" lIns="0" tIns="0" rIns="0" bIns="0" rtlCol="0" anchor="t"/>
+          <a:lstStyle/>
+          <a:p>
+            <a:pPr rtl="1" algn="r" indent="0" marL="0">
+              <a:buNone/>
+            </a:pPr>
+            <a:r>
+              <a:rPr lang="en-US" sz="1500" b="1" dirty="0">
+                <a:solidFill>
+                  <a:srgbClr val="8E2F3C"/>
+                </a:solidFill>
+                <a:latin typeface="IBM Plex Sans Arabic" pitchFamily="34" charset="0"/>
+                <a:ea typeface="IBM Plex Sans Arabic" pitchFamily="34" charset="-122"/>
+                <a:cs typeface="IBM Plex Sans Arabic" pitchFamily="34" charset="-120"/>
+              </a:rPr>
+              <a:t>المرحلة 2</a:t>
+            </a:r>
+            <a:endParaRPr lang="en-US" sz="1500" dirty="0"/>
+          </a:p>
+        </p:txBody>
+      </p:sp>
+      <p:sp>
+        <p:nvSpPr>
+          <p:cNvPr id="52" name="Text 47"/>
+          <p:cNvSpPr txBox="1"/>
+          <p:nvPr/>
+        </p:nvSpPr>
+        <p:spPr>
+          <a:xfrm>
+            <a:off x="4505858" y="5458968"/>
+            <a:ext cx="3179978" cy="594360"/>
+          </a:xfrm>
+          <a:prstGeom prst="rect">
+            <a:avLst/>
+          </a:prstGeom>
+          <a:noFill/>
+          <a:ln/>
+        </p:spPr>
+        <p:txBody>
+          <a:bodyPr wrap="square" lIns="0" tIns="0" rIns="0" bIns="0" rtlCol="0" anchor="t"/>
+          <a:lstStyle/>
+          <a:p>
+            <a:pPr rtl="1" algn="r" indent="0" marL="0">
+              <a:buNone/>
+            </a:pPr>
+            <a:r>
+              <a:rPr lang="en-US" sz="1250" dirty="0">
                 <a:solidFill>
                   <a:srgbClr val="21141A"/>
                 </a:solidFill>
@@ -15113,7 +11786,73 @@
                 <a:ea typeface="IBM Plex Sans Arabic" pitchFamily="34" charset="-122"/>
                 <a:cs typeface="IBM Plex Sans Arabic" pitchFamily="34" charset="-120"/>
               </a:rPr>
-              <a:t>أسعار مناسبة لـ 50 إلى 250 موظفاً</a:t>
+              <a:t>Azure وGCP + STC Cloud وSCCC وCNTXT عبر API أو رفع ملف الفاتورة</a:t>
+            </a:r>
+            <a:endParaRPr lang="en-US" sz="1250" dirty="0"/>
+          </a:p>
+        </p:txBody>
+      </p:sp>
+      <p:sp>
+        <p:nvSpPr>
+          <p:cNvPr id="53" name="Shape 48"/>
+          <p:cNvSpPr/>
+          <p:nvPr/>
+        </p:nvSpPr>
+        <p:spPr>
+          <a:xfrm>
+            <a:off x="457200" y="4983480"/>
+            <a:ext cx="3637178" cy="1143000"/>
+          </a:xfrm>
+          <a:prstGeom prst="roundRect">
+            <a:avLst>
+              <a:gd name="adj" fmla="val 11200"/>
+            </a:avLst>
+          </a:prstGeom>
+          <a:solidFill>
+            <a:srgbClr val="FFFBF8"/>
+          </a:solidFill>
+          <a:ln w="9525">
+            <a:solidFill>
+              <a:srgbClr val="E3D5CC"/>
+            </a:solidFill>
+            <a:prstDash val="solid"/>
+          </a:ln>
+        </p:spPr>
+      </p:sp>
+      <p:sp>
+        <p:nvSpPr>
+          <p:cNvPr id="54" name="Text 49"/>
+          <p:cNvSpPr txBox="1"/>
+          <p:nvPr/>
+        </p:nvSpPr>
+        <p:spPr>
+          <a:xfrm>
+            <a:off x="685800" y="5120640"/>
+            <a:ext cx="3179978" cy="329184"/>
+          </a:xfrm>
+          <a:prstGeom prst="rect">
+            <a:avLst/>
+          </a:prstGeom>
+          <a:noFill/>
+          <a:ln/>
+        </p:spPr>
+        <p:txBody>
+          <a:bodyPr wrap="square" lIns="0" tIns="0" rIns="0" bIns="0" rtlCol="0" anchor="t"/>
+          <a:lstStyle/>
+          <a:p>
+            <a:pPr rtl="1" algn="r" indent="0" marL="0">
+              <a:buNone/>
+            </a:pPr>
+            <a:r>
+              <a:rPr lang="en-US" sz="1500" b="1" dirty="0">
+                <a:solidFill>
+                  <a:srgbClr val="8E2F3C"/>
+                </a:solidFill>
+                <a:latin typeface="IBM Plex Sans Arabic" pitchFamily="34" charset="0"/>
+                <a:ea typeface="IBM Plex Sans Arabic" pitchFamily="34" charset="-122"/>
+                <a:cs typeface="IBM Plex Sans Arabic" pitchFamily="34" charset="-120"/>
+              </a:rPr>
+              <a:t>المرحلة 3</a:t>
             </a:r>
             <a:endParaRPr lang="en-US" sz="1500" dirty="0"/>
           </a:p>
@@ -15121,211 +11860,14 @@
       </p:sp>
       <p:sp>
         <p:nvSpPr>
-          <p:cNvPr id="62" name="Shape 57"/>
-          <p:cNvSpPr/>
-          <p:nvPr/>
-        </p:nvSpPr>
-        <p:spPr>
-          <a:xfrm>
-            <a:off x="6141720" y="5001768"/>
-            <a:ext cx="365760" cy="365760"/>
-          </a:xfrm>
-          <a:prstGeom prst="ellipse">
-            <a:avLst/>
-          </a:prstGeom>
-          <a:solidFill>
-            <a:srgbClr val="7FB27A"/>
-          </a:solidFill>
-          <a:ln/>
-        </p:spPr>
-      </p:sp>
-      <p:sp>
-        <p:nvSpPr>
-          <p:cNvPr id="63" name="Text 58"/>
-          <p:cNvSpPr txBox="1"/>
-          <p:nvPr/>
-        </p:nvSpPr>
-        <p:spPr>
-          <a:xfrm>
-            <a:off x="6141720" y="5001768"/>
-            <a:ext cx="365760" cy="365760"/>
-          </a:xfrm>
-          <a:prstGeom prst="rect">
-            <a:avLst/>
-          </a:prstGeom>
-          <a:noFill/>
-          <a:ln/>
-        </p:spPr>
-        <p:txBody>
-          <a:bodyPr wrap="square" lIns="0" tIns="0" rIns="0" bIns="0" rtlCol="0" anchor="ctr"/>
-          <a:lstStyle/>
-          <a:p>
-            <a:pPr algn="ctr" indent="0" marL="0">
-              <a:buNone/>
-            </a:pPr>
-            <a:r>
-              <a:rPr lang="en-US" sz="1400" b="1" dirty="0">
-                <a:solidFill>
-                  <a:srgbClr val="FFFFFF"/>
-                </a:solidFill>
-                <a:latin typeface="IBM Plex Sans Arabic" pitchFamily="34" charset="0"/>
-                <a:ea typeface="IBM Plex Sans Arabic" pitchFamily="34" charset="-122"/>
-                <a:cs typeface="IBM Plex Sans Arabic" pitchFamily="34" charset="-120"/>
-              </a:rPr>
-              <a:t>✓</a:t>
-            </a:r>
-            <a:endParaRPr lang="en-US" sz="1400" dirty="0"/>
-          </a:p>
-        </p:txBody>
-      </p:sp>
-      <p:sp>
-        <p:nvSpPr>
-          <p:cNvPr id="64" name="Shape 59"/>
-          <p:cNvSpPr/>
-          <p:nvPr/>
-        </p:nvSpPr>
-        <p:spPr>
-          <a:xfrm>
-            <a:off x="3794760" y="5001768"/>
-            <a:ext cx="365760" cy="365760"/>
-          </a:xfrm>
-          <a:prstGeom prst="ellipse">
-            <a:avLst/>
-          </a:prstGeom>
-          <a:solidFill>
-            <a:srgbClr val="D48A93"/>
-          </a:solidFill>
-          <a:ln/>
-        </p:spPr>
-      </p:sp>
-      <p:sp>
-        <p:nvSpPr>
-          <p:cNvPr id="65" name="Text 60"/>
-          <p:cNvSpPr txBox="1"/>
-          <p:nvPr/>
-        </p:nvSpPr>
-        <p:spPr>
-          <a:xfrm>
-            <a:off x="3794760" y="5001768"/>
-            <a:ext cx="365760" cy="365760"/>
-          </a:xfrm>
-          <a:prstGeom prst="rect">
-            <a:avLst/>
-          </a:prstGeom>
-          <a:noFill/>
-          <a:ln/>
-        </p:spPr>
-        <p:txBody>
-          <a:bodyPr wrap="square" lIns="0" tIns="0" rIns="0" bIns="0" rtlCol="0" anchor="ctr"/>
-          <a:lstStyle/>
-          <a:p>
-            <a:pPr algn="ctr" indent="0" marL="0">
-              <a:buNone/>
-            </a:pPr>
-            <a:r>
-              <a:rPr lang="en-US" sz="1400" b="1" dirty="0">
-                <a:solidFill>
-                  <a:srgbClr val="FFFFFF"/>
-                </a:solidFill>
-                <a:latin typeface="IBM Plex Sans Arabic" pitchFamily="34" charset="0"/>
-                <a:ea typeface="IBM Plex Sans Arabic" pitchFamily="34" charset="-122"/>
-                <a:cs typeface="IBM Plex Sans Arabic" pitchFamily="34" charset="-120"/>
-              </a:rPr>
-              <a:t>✕</a:t>
-            </a:r>
-            <a:endParaRPr lang="en-US" sz="1400" dirty="0"/>
-          </a:p>
-        </p:txBody>
-      </p:sp>
-      <p:sp>
-        <p:nvSpPr>
-          <p:cNvPr id="66" name="Shape 61"/>
-          <p:cNvSpPr/>
-          <p:nvPr/>
-        </p:nvSpPr>
-        <p:spPr>
-          <a:xfrm>
-            <a:off x="1447800" y="5001768"/>
-            <a:ext cx="365760" cy="365760"/>
-          </a:xfrm>
-          <a:prstGeom prst="ellipse">
-            <a:avLst/>
-          </a:prstGeom>
-          <a:solidFill>
-            <a:srgbClr val="7FB27A"/>
-          </a:solidFill>
-          <a:ln/>
-        </p:spPr>
-      </p:sp>
-      <p:sp>
-        <p:nvSpPr>
-          <p:cNvPr id="67" name="Text 62"/>
-          <p:cNvSpPr txBox="1"/>
-          <p:nvPr/>
-        </p:nvSpPr>
-        <p:spPr>
-          <a:xfrm>
-            <a:off x="1447800" y="5001768"/>
-            <a:ext cx="365760" cy="365760"/>
-          </a:xfrm>
-          <a:prstGeom prst="rect">
-            <a:avLst/>
-          </a:prstGeom>
-          <a:noFill/>
-          <a:ln/>
-        </p:spPr>
-        <p:txBody>
-          <a:bodyPr wrap="square" lIns="0" tIns="0" rIns="0" bIns="0" rtlCol="0" anchor="ctr"/>
-          <a:lstStyle/>
-          <a:p>
-            <a:pPr algn="ctr" indent="0" marL="0">
-              <a:buNone/>
-            </a:pPr>
-            <a:r>
-              <a:rPr lang="en-US" sz="1400" b="1" dirty="0">
-                <a:solidFill>
-                  <a:srgbClr val="FFFFFF"/>
-                </a:solidFill>
-                <a:latin typeface="IBM Plex Sans Arabic" pitchFamily="34" charset="0"/>
-                <a:ea typeface="IBM Plex Sans Arabic" pitchFamily="34" charset="-122"/>
-                <a:cs typeface="IBM Plex Sans Arabic" pitchFamily="34" charset="-120"/>
-              </a:rPr>
-              <a:t>✓</a:t>
-            </a:r>
-            <a:endParaRPr lang="en-US" sz="1400" dirty="0"/>
-          </a:p>
-        </p:txBody>
-      </p:sp>
-      <p:sp>
-        <p:nvSpPr>
-          <p:cNvPr id="68" name="Shape 63"/>
-          <p:cNvSpPr/>
-          <p:nvPr/>
-        </p:nvSpPr>
-        <p:spPr>
-          <a:xfrm>
-            <a:off x="3200400" y="5779008"/>
-            <a:ext cx="182880" cy="182880"/>
-          </a:xfrm>
-          <a:prstGeom prst="ellipse">
-            <a:avLst/>
-          </a:prstGeom>
-          <a:solidFill>
-            <a:srgbClr val="7FB27A"/>
-          </a:solidFill>
-          <a:ln/>
-        </p:spPr>
-      </p:sp>
-      <p:sp>
-        <p:nvSpPr>
-          <p:cNvPr id="69" name="Text 64"/>
-          <p:cNvSpPr txBox="1"/>
-          <p:nvPr/>
-        </p:nvSpPr>
-        <p:spPr>
-          <a:xfrm>
-            <a:off x="2514600" y="5715000"/>
-            <a:ext cx="612648" cy="310896"/>
+          <p:cNvPr id="55" name="Text 50"/>
+          <p:cNvSpPr txBox="1"/>
+          <p:nvPr/>
+        </p:nvSpPr>
+        <p:spPr>
+          <a:xfrm>
+            <a:off x="685800" y="5458968"/>
+            <a:ext cx="3179978" cy="594360"/>
           </a:xfrm>
           <a:prstGeom prst="rect">
             <a:avLst/>
@@ -15341,178 +11883,7 @@
               <a:buNone/>
             </a:pPr>
             <a:r>
-              <a:rPr lang="en-US" sz="1200" dirty="0">
-                <a:solidFill>
-                  <a:srgbClr val="7F6C72"/>
-                </a:solidFill>
-                <a:latin typeface="IBM Plex Sans Arabic" pitchFamily="34" charset="0"/>
-                <a:ea typeface="IBM Plex Sans Arabic" pitchFamily="34" charset="-122"/>
-                <a:cs typeface="IBM Plex Sans Arabic" pitchFamily="34" charset="-120"/>
-              </a:rPr>
-              <a:t>نعم</a:t>
-            </a:r>
-            <a:endParaRPr lang="en-US" sz="1200" dirty="0"/>
-          </a:p>
-        </p:txBody>
-      </p:sp>
-      <p:sp>
-        <p:nvSpPr>
-          <p:cNvPr id="70" name="Shape 65"/>
-          <p:cNvSpPr/>
-          <p:nvPr/>
-        </p:nvSpPr>
-        <p:spPr>
-          <a:xfrm>
-            <a:off x="2240280" y="5779008"/>
-            <a:ext cx="182880" cy="182880"/>
-          </a:xfrm>
-          <a:prstGeom prst="ellipse">
-            <a:avLst/>
-          </a:prstGeom>
-          <a:solidFill>
-            <a:srgbClr val="C9A46E"/>
-          </a:solidFill>
-          <a:ln/>
-        </p:spPr>
-      </p:sp>
-      <p:sp>
-        <p:nvSpPr>
-          <p:cNvPr id="71" name="Text 66"/>
-          <p:cNvSpPr txBox="1"/>
-          <p:nvPr/>
-        </p:nvSpPr>
-        <p:spPr>
-          <a:xfrm>
-            <a:off x="1554480" y="5715000"/>
-            <a:ext cx="612648" cy="310896"/>
-          </a:xfrm>
-          <a:prstGeom prst="rect">
-            <a:avLst/>
-          </a:prstGeom>
-          <a:noFill/>
-          <a:ln/>
-        </p:spPr>
-        <p:txBody>
-          <a:bodyPr wrap="square" lIns="0" tIns="0" rIns="0" bIns="0" rtlCol="0" anchor="t"/>
-          <a:lstStyle/>
-          <a:p>
-            <a:pPr rtl="1" algn="r" indent="0" marL="0">
-              <a:buNone/>
-            </a:pPr>
-            <a:r>
-              <a:rPr lang="en-US" sz="1200" dirty="0">
-                <a:solidFill>
-                  <a:srgbClr val="7F6C72"/>
-                </a:solidFill>
-                <a:latin typeface="IBM Plex Sans Arabic" pitchFamily="34" charset="0"/>
-                <a:ea typeface="IBM Plex Sans Arabic" pitchFamily="34" charset="-122"/>
-                <a:cs typeface="IBM Plex Sans Arabic" pitchFamily="34" charset="-120"/>
-              </a:rPr>
-              <a:t>جزئياً</a:t>
-            </a:r>
-            <a:endParaRPr lang="en-US" sz="1200" dirty="0"/>
-          </a:p>
-        </p:txBody>
-      </p:sp>
-      <p:sp>
-        <p:nvSpPr>
-          <p:cNvPr id="72" name="Shape 67"/>
-          <p:cNvSpPr/>
-          <p:nvPr/>
-        </p:nvSpPr>
-        <p:spPr>
-          <a:xfrm>
-            <a:off x="1280160" y="5779008"/>
-            <a:ext cx="182880" cy="182880"/>
-          </a:xfrm>
-          <a:prstGeom prst="ellipse">
-            <a:avLst/>
-          </a:prstGeom>
-          <a:solidFill>
-            <a:srgbClr val="D48A93"/>
-          </a:solidFill>
-          <a:ln/>
-        </p:spPr>
-      </p:sp>
-      <p:sp>
-        <p:nvSpPr>
-          <p:cNvPr id="73" name="Text 68"/>
-          <p:cNvSpPr txBox="1"/>
-          <p:nvPr/>
-        </p:nvSpPr>
-        <p:spPr>
-          <a:xfrm>
-            <a:off x="594360" y="5715000"/>
-            <a:ext cx="612648" cy="310896"/>
-          </a:xfrm>
-          <a:prstGeom prst="rect">
-            <a:avLst/>
-          </a:prstGeom>
-          <a:noFill/>
-          <a:ln/>
-        </p:spPr>
-        <p:txBody>
-          <a:bodyPr wrap="square" lIns="0" tIns="0" rIns="0" bIns="0" rtlCol="0" anchor="t"/>
-          <a:lstStyle/>
-          <a:p>
-            <a:pPr rtl="1" algn="r" indent="0" marL="0">
-              <a:buNone/>
-            </a:pPr>
-            <a:r>
-              <a:rPr lang="en-US" sz="1200" dirty="0">
-                <a:solidFill>
-                  <a:srgbClr val="7F6C72"/>
-                </a:solidFill>
-                <a:latin typeface="IBM Plex Sans Arabic" pitchFamily="34" charset="0"/>
-                <a:ea typeface="IBM Plex Sans Arabic" pitchFamily="34" charset="-122"/>
-                <a:cs typeface="IBM Plex Sans Arabic" pitchFamily="34" charset="-120"/>
-              </a:rPr>
-              <a:t>لا</a:t>
-            </a:r>
-            <a:endParaRPr lang="en-US" sz="1200" dirty="0"/>
-          </a:p>
-        </p:txBody>
-      </p:sp>
-      <p:sp>
-        <p:nvSpPr>
-          <p:cNvPr id="74" name="Text 69"/>
-          <p:cNvSpPr txBox="1"/>
-          <p:nvPr/>
-        </p:nvSpPr>
-        <p:spPr>
-          <a:xfrm>
-            <a:off x="3657600" y="5687568"/>
-            <a:ext cx="8076895" cy="365760"/>
-          </a:xfrm>
-          <a:prstGeom prst="rect">
-            <a:avLst/>
-          </a:prstGeom>
-          <a:noFill/>
-          <a:ln/>
-        </p:spPr>
-        <p:txBody>
-          <a:bodyPr wrap="square" lIns="0" tIns="0" rIns="0" bIns="0" rtlCol="0" anchor="ctr"/>
-          <a:lstStyle/>
-          <a:p>
-            <a:pPr algn="r" indent="0" marL="0">
-              <a:buNone/>
-            </a:pPr>
-            <a:r>
-              <a:rPr lang="en-US" sz="1400" b="1" dirty="0">
-                <a:solidFill>
-                  <a:srgbClr val="8E2F3C"/>
-                </a:solidFill>
-                <a:latin typeface="IBM Plex Sans Arabic" pitchFamily="34" charset="0"/>
-                <a:ea typeface="IBM Plex Sans Arabic" pitchFamily="34" charset="-122"/>
-                <a:cs typeface="IBM Plex Sans Arabic" pitchFamily="34" charset="-120"/>
-              </a:rPr>
-              <a:t>الابتكار الأوضح: </a:t>
-            </a:r>
-            <a:pPr algn="r" indent="0" marL="0">
-              <a:buNone/>
-            </a:pPr>
-            <a:r>
-              <a:rPr lang="en-US" sz="1400" dirty="0">
+              <a:rPr lang="en-US" sz="1250" dirty="0">
                 <a:solidFill>
                   <a:srgbClr val="21141A"/>
                 </a:solidFill>
@@ -15520,9 +11891,9 @@
                 <a:ea typeface="IBM Plex Sans Arabic" pitchFamily="34" charset="-122"/>
                 <a:cs typeface="IBM Plex Sans Arabic" pitchFamily="34" charset="-120"/>
               </a:rPr>
-              <a:t>صلاحية مؤقتة لإجراء واحد (Just-in-time access) بدل صلاحيات كتابة دائمة</a:t>
-            </a:r>
-            <a:endParaRPr lang="en-US" sz="1400" dirty="0"/>
+              <a:t>واتساب للأعمال + استضافة داخل المملكة + مسار ISO 27001</a:t>
+            </a:r>
+            <a:endParaRPr lang="en-US" sz="1250" dirty="0"/>
           </a:p>
         </p:txBody>
       </p:sp>
@@ -15940,7 +12311,7 @@
                 <a:ea typeface="IBM Plex Sans Arabic" pitchFamily="34" charset="-122"/>
                 <a:cs typeface="IBM Plex Sans Arabic" pitchFamily="34" charset="-120"/>
               </a:rPr>
-              <a:t>قابلية التنفيذ</a:t>
+              <a:t>النموذج الأولي</a:t>
             </a:r>
             <a:endParaRPr lang="en-US" sz="1300" dirty="0"/>
           </a:p>
@@ -16073,7 +12444,7 @@
               <a:buNone/>
             </a:pPr>
             <a:r>
-              <a:rPr lang="en-US" sz="2600" b="1" dirty="0">
+              <a:rPr lang="en-US" sz="3000" b="1" dirty="0">
                 <a:solidFill>
                   <a:srgbClr val="21141A"/>
                 </a:solidFill>
@@ -16081,398 +12452,26 @@
                 <a:ea typeface="IBM Plex Sans Arabic" pitchFamily="34" charset="-122"/>
                 <a:cs typeface="IBM Plex Sans Arabic" pitchFamily="34" charset="-120"/>
               </a:rPr>
-              <a:t>قابل للتنفيذ اليوم: AWS أولاً، والمزودون المحليون في المرحلة الثانية</a:t>
-            </a:r>
-            <a:endParaRPr lang="en-US" sz="2600" dirty="0"/>
-          </a:p>
-        </p:txBody>
-      </p:sp>
-      <p:sp>
-        <p:nvSpPr>
-          <p:cNvPr id="23" name="Text 18"/>
-          <p:cNvSpPr txBox="1"/>
-          <p:nvPr/>
-        </p:nvSpPr>
-        <p:spPr>
-          <a:xfrm>
-            <a:off x="6263640" y="2286000"/>
-            <a:ext cx="5470855" cy="365760"/>
-          </a:xfrm>
-          <a:prstGeom prst="rect">
-            <a:avLst/>
-          </a:prstGeom>
-          <a:noFill/>
-          <a:ln/>
-        </p:spPr>
-        <p:txBody>
-          <a:bodyPr wrap="square" lIns="0" tIns="0" rIns="0" bIns="0" rtlCol="0" anchor="t"/>
-          <a:lstStyle/>
-          <a:p>
-            <a:pPr rtl="1" algn="r" indent="0" marL="0">
-              <a:buNone/>
-            </a:pPr>
-            <a:r>
-              <a:rPr lang="en-US" sz="1700" b="1" dirty="0">
-                <a:solidFill>
-                  <a:srgbClr val="8E2F3C"/>
-                </a:solidFill>
-                <a:latin typeface="IBM Plex Sans Arabic" pitchFamily="34" charset="0"/>
-                <a:ea typeface="IBM Plex Sans Arabic" pitchFamily="34" charset="-122"/>
-                <a:cs typeface="IBM Plex Sans Arabic" pitchFamily="34" charset="-120"/>
-              </a:rPr>
-              <a:t>كيف يعمل الآن</a:t>
-            </a:r>
-            <a:endParaRPr lang="en-US" sz="1700" dirty="0"/>
-          </a:p>
-        </p:txBody>
-      </p:sp>
-      <p:sp>
-        <p:nvSpPr>
-          <p:cNvPr id="24" name="Shape 19"/>
-          <p:cNvSpPr/>
-          <p:nvPr/>
-        </p:nvSpPr>
-        <p:spPr>
-          <a:xfrm>
-            <a:off x="11588191" y="2834640"/>
-            <a:ext cx="146304" cy="146304"/>
-          </a:xfrm>
-          <a:prstGeom prst="rect">
-            <a:avLst/>
-          </a:prstGeom>
-          <a:solidFill>
-            <a:srgbClr val="D48A93"/>
-          </a:solidFill>
-          <a:ln/>
-        </p:spPr>
-      </p:sp>
-      <p:sp>
-        <p:nvSpPr>
-          <p:cNvPr id="25" name="Text 20"/>
-          <p:cNvSpPr txBox="1"/>
-          <p:nvPr/>
-        </p:nvSpPr>
-        <p:spPr>
-          <a:xfrm>
-            <a:off x="6263640" y="2743200"/>
-            <a:ext cx="5150815" cy="320040"/>
-          </a:xfrm>
-          <a:prstGeom prst="rect">
-            <a:avLst/>
-          </a:prstGeom>
-          <a:noFill/>
-          <a:ln/>
-        </p:spPr>
-        <p:txBody>
-          <a:bodyPr wrap="square" lIns="0" tIns="0" rIns="0" bIns="0" rtlCol="0" anchor="t"/>
-          <a:lstStyle/>
-          <a:p>
-            <a:pPr rtl="1" algn="r" indent="0" marL="0">
-              <a:buNone/>
-            </a:pPr>
-            <a:r>
-              <a:rPr lang="en-US" sz="1500" b="1" dirty="0">
-                <a:solidFill>
-                  <a:srgbClr val="21141A"/>
-                </a:solidFill>
-                <a:latin typeface="IBM Plex Sans Arabic" pitchFamily="34" charset="0"/>
-                <a:ea typeface="IBM Plex Sans Arabic" pitchFamily="34" charset="-122"/>
-                <a:cs typeface="IBM Plex Sans Arabic" pitchFamily="34" charset="-120"/>
-              </a:rPr>
-              <a:t>ربط عبر API بصلاحيات قراءة</a:t>
-            </a:r>
-            <a:endParaRPr lang="en-US" sz="1500" dirty="0"/>
-          </a:p>
-        </p:txBody>
-      </p:sp>
-      <p:sp>
-        <p:nvSpPr>
-          <p:cNvPr id="26" name="Text 21"/>
-          <p:cNvSpPr txBox="1"/>
-          <p:nvPr/>
-        </p:nvSpPr>
-        <p:spPr>
-          <a:xfrm>
-            <a:off x="6263640" y="3072384"/>
-            <a:ext cx="5150815" cy="320040"/>
-          </a:xfrm>
-          <a:prstGeom prst="rect">
-            <a:avLst/>
-          </a:prstGeom>
-          <a:noFill/>
-          <a:ln/>
-        </p:spPr>
-        <p:txBody>
-          <a:bodyPr wrap="square" lIns="0" tIns="0" rIns="0" bIns="0" rtlCol="0" anchor="t"/>
-          <a:lstStyle/>
-          <a:p>
-            <a:pPr rtl="1" algn="r" indent="0" marL="0">
-              <a:buNone/>
-            </a:pPr>
-            <a:r>
-              <a:rPr lang="en-US" sz="1150" dirty="0">
-                <a:solidFill>
-                  <a:srgbClr val="7F6C72"/>
-                </a:solidFill>
-                <a:latin typeface="IBM Plex Sans Arabic" pitchFamily="34" charset="0"/>
-                <a:ea typeface="IBM Plex Sans Arabic" pitchFamily="34" charset="-122"/>
-                <a:cs typeface="IBM Plex Sans Arabic" pitchFamily="34" charset="-120"/>
-              </a:rPr>
-              <a:t>ce:GetCostAndUsage · ec2:DescribeVolumes · cloudwatch:GetMetricStatistics</a:t>
-            </a:r>
-            <a:endParaRPr lang="en-US" sz="1150" dirty="0"/>
-          </a:p>
-        </p:txBody>
-      </p:sp>
-      <p:sp>
-        <p:nvSpPr>
-          <p:cNvPr id="27" name="Shape 22"/>
-          <p:cNvSpPr/>
-          <p:nvPr/>
-        </p:nvSpPr>
-        <p:spPr>
-          <a:xfrm>
-            <a:off x="11588191" y="3566160"/>
-            <a:ext cx="146304" cy="146304"/>
-          </a:xfrm>
-          <a:prstGeom prst="rect">
-            <a:avLst/>
-          </a:prstGeom>
-          <a:solidFill>
-            <a:srgbClr val="C9A46E"/>
-          </a:solidFill>
-          <a:ln/>
-        </p:spPr>
-      </p:sp>
-      <p:sp>
-        <p:nvSpPr>
-          <p:cNvPr id="28" name="Text 23"/>
-          <p:cNvSpPr txBox="1"/>
-          <p:nvPr/>
-        </p:nvSpPr>
-        <p:spPr>
-          <a:xfrm>
-            <a:off x="6263640" y="3474720"/>
-            <a:ext cx="5150815" cy="320040"/>
-          </a:xfrm>
-          <a:prstGeom prst="rect">
-            <a:avLst/>
-          </a:prstGeom>
-          <a:noFill/>
-          <a:ln/>
-        </p:spPr>
-        <p:txBody>
-          <a:bodyPr wrap="square" lIns="0" tIns="0" rIns="0" bIns="0" rtlCol="0" anchor="t"/>
-          <a:lstStyle/>
-          <a:p>
-            <a:pPr rtl="1" algn="r" indent="0" marL="0">
-              <a:buNone/>
-            </a:pPr>
-            <a:r>
-              <a:rPr lang="en-US" sz="1500" b="1" dirty="0">
-                <a:solidFill>
-                  <a:srgbClr val="21141A"/>
-                </a:solidFill>
-                <a:latin typeface="IBM Plex Sans Arabic" pitchFamily="34" charset="0"/>
-                <a:ea typeface="IBM Plex Sans Arabic" pitchFamily="34" charset="-122"/>
-                <a:cs typeface="IBM Plex Sans Arabic" pitchFamily="34" charset="-120"/>
-              </a:rPr>
-              <a:t>قواعد هدر + نموذج ذكاء اصطناعي</a:t>
-            </a:r>
-            <a:endParaRPr lang="en-US" sz="1500" dirty="0"/>
-          </a:p>
-        </p:txBody>
-      </p:sp>
-      <p:sp>
-        <p:nvSpPr>
-          <p:cNvPr id="29" name="Text 24"/>
-          <p:cNvSpPr txBox="1"/>
-          <p:nvPr/>
-        </p:nvSpPr>
-        <p:spPr>
-          <a:xfrm>
-            <a:off x="6263640" y="3803904"/>
-            <a:ext cx="5150815" cy="320040"/>
-          </a:xfrm>
-          <a:prstGeom prst="rect">
-            <a:avLst/>
-          </a:prstGeom>
-          <a:noFill/>
-          <a:ln/>
-        </p:spPr>
-        <p:txBody>
-          <a:bodyPr wrap="square" lIns="0" tIns="0" rIns="0" bIns="0" rtlCol="0" anchor="t"/>
-          <a:lstStyle/>
-          <a:p>
-            <a:pPr rtl="1" algn="r" indent="0" marL="0">
-              <a:buNone/>
-            </a:pPr>
-            <a:r>
-              <a:rPr lang="en-US" sz="1150" dirty="0">
-                <a:solidFill>
-                  <a:srgbClr val="7F6C72"/>
-                </a:solidFill>
-                <a:latin typeface="IBM Plex Sans Arabic" pitchFamily="34" charset="0"/>
-                <a:ea typeface="IBM Plex Sans Arabic" pitchFamily="34" charset="-122"/>
-                <a:cs typeface="IBM Plex Sans Arabic" pitchFamily="34" charset="-120"/>
-              </a:rPr>
-              <a:t>القواعد ترشّح الموارد، والنموذج يرتب التوصيات ويشرحها بالعربية</a:t>
-            </a:r>
-            <a:endParaRPr lang="en-US" sz="1150" dirty="0"/>
-          </a:p>
-        </p:txBody>
-      </p:sp>
-      <p:sp>
-        <p:nvSpPr>
-          <p:cNvPr id="30" name="Shape 25"/>
-          <p:cNvSpPr/>
-          <p:nvPr/>
-        </p:nvSpPr>
-        <p:spPr>
-          <a:xfrm>
-            <a:off x="11588191" y="4297680"/>
-            <a:ext cx="146304" cy="146304"/>
-          </a:xfrm>
-          <a:prstGeom prst="rect">
-            <a:avLst/>
-          </a:prstGeom>
-          <a:solidFill>
-            <a:srgbClr val="7FB27A"/>
-          </a:solidFill>
-          <a:ln/>
-        </p:spPr>
-      </p:sp>
-      <p:sp>
-        <p:nvSpPr>
-          <p:cNvPr id="31" name="Text 26"/>
-          <p:cNvSpPr txBox="1"/>
-          <p:nvPr/>
-        </p:nvSpPr>
-        <p:spPr>
-          <a:xfrm>
-            <a:off x="6263640" y="4206240"/>
-            <a:ext cx="5150815" cy="320040"/>
-          </a:xfrm>
-          <a:prstGeom prst="rect">
-            <a:avLst/>
-          </a:prstGeom>
-          <a:noFill/>
-          <a:ln/>
-        </p:spPr>
-        <p:txBody>
-          <a:bodyPr wrap="square" lIns="0" tIns="0" rIns="0" bIns="0" rtlCol="0" anchor="t"/>
-          <a:lstStyle/>
-          <a:p>
-            <a:pPr rtl="1" algn="r" indent="0" marL="0">
-              <a:buNone/>
-            </a:pPr>
-            <a:r>
-              <a:rPr lang="en-US" sz="1500" b="1" dirty="0">
-                <a:solidFill>
-                  <a:srgbClr val="21141A"/>
-                </a:solidFill>
-                <a:latin typeface="IBM Plex Sans Arabic" pitchFamily="34" charset="0"/>
-                <a:ea typeface="IBM Plex Sans Arabic" pitchFamily="34" charset="-122"/>
-                <a:cs typeface="IBM Plex Sans Arabic" pitchFamily="34" charset="-120"/>
-              </a:rPr>
-              <a:t>زر موافقة واحد</a:t>
-            </a:r>
-            <a:endParaRPr lang="en-US" sz="1500" dirty="0"/>
-          </a:p>
-        </p:txBody>
-      </p:sp>
-      <p:sp>
-        <p:nvSpPr>
-          <p:cNvPr id="32" name="Text 27"/>
-          <p:cNvSpPr txBox="1"/>
-          <p:nvPr/>
-        </p:nvSpPr>
-        <p:spPr>
-          <a:xfrm>
-            <a:off x="6263640" y="4535424"/>
-            <a:ext cx="5150815" cy="320040"/>
-          </a:xfrm>
-          <a:prstGeom prst="rect">
-            <a:avLst/>
-          </a:prstGeom>
-          <a:noFill/>
-          <a:ln/>
-        </p:spPr>
-        <p:txBody>
-          <a:bodyPr wrap="square" lIns="0" tIns="0" rIns="0" bIns="0" rtlCol="0" anchor="t"/>
-          <a:lstStyle/>
-          <a:p>
-            <a:pPr rtl="1" algn="r" indent="0" marL="0">
-              <a:buNone/>
-            </a:pPr>
-            <a:r>
-              <a:rPr lang="en-US" sz="1150" dirty="0">
-                <a:solidFill>
-                  <a:srgbClr val="7F6C72"/>
-                </a:solidFill>
-                <a:latin typeface="IBM Plex Sans Arabic" pitchFamily="34" charset="0"/>
-                <a:ea typeface="IBM Plex Sans Arabic" pitchFamily="34" charset="-122"/>
-                <a:cs typeface="IBM Plex Sans Arabic" pitchFamily="34" charset="-120"/>
-              </a:rPr>
-              <a:t>يمنح صلاحية مؤقتة لـ 15 دقيقة لتنفيذ الإجراء ثم تُسحب</a:t>
-            </a:r>
-            <a:endParaRPr lang="en-US" sz="1150" dirty="0"/>
-          </a:p>
-        </p:txBody>
-      </p:sp>
-      <p:sp>
-        <p:nvSpPr>
-          <p:cNvPr id="33" name="Text 28"/>
-          <p:cNvSpPr txBox="1"/>
+              <a:t>ما بنيناه فعلاً خلال التحدي</a:t>
+            </a:r>
+            <a:endParaRPr lang="en-US" sz="3000" dirty="0"/>
+          </a:p>
+        </p:txBody>
+      </p:sp>
+      <p:sp>
+        <p:nvSpPr>
+          <p:cNvPr id="23" name="Shape 18"/>
+          <p:cNvSpPr/>
           <p:nvPr/>
         </p:nvSpPr>
         <p:spPr>
           <a:xfrm>
             <a:off x="457200" y="2286000"/>
-            <a:ext cx="5394960" cy="365760"/>
-          </a:xfrm>
-          <a:prstGeom prst="rect">
-            <a:avLst/>
-          </a:prstGeom>
-          <a:noFill/>
-          <a:ln/>
-        </p:spPr>
-        <p:txBody>
-          <a:bodyPr wrap="square" lIns="0" tIns="0" rIns="0" bIns="0" rtlCol="0" anchor="t"/>
-          <a:lstStyle/>
-          <a:p>
-            <a:pPr rtl="1" algn="r" indent="0" marL="0">
-              <a:buNone/>
-            </a:pPr>
-            <a:r>
-              <a:rPr lang="en-US" sz="1700" b="1" dirty="0">
-                <a:solidFill>
-                  <a:srgbClr val="8E2F3C"/>
-                </a:solidFill>
-                <a:latin typeface="IBM Plex Sans Arabic" pitchFamily="34" charset="0"/>
-                <a:ea typeface="IBM Plex Sans Arabic" pitchFamily="34" charset="-122"/>
-                <a:cs typeface="IBM Plex Sans Arabic" pitchFamily="34" charset="-120"/>
-              </a:rPr>
-              <a:t>التقنيات المتوفرة</a:t>
-            </a:r>
-            <a:endParaRPr lang="en-US" sz="1700" dirty="0"/>
-          </a:p>
-        </p:txBody>
-      </p:sp>
-      <p:sp>
-        <p:nvSpPr>
-          <p:cNvPr id="34" name="Shape 29"/>
-          <p:cNvSpPr/>
-          <p:nvPr/>
-        </p:nvSpPr>
-        <p:spPr>
-          <a:xfrm>
-            <a:off x="4663440" y="2788920"/>
-            <a:ext cx="1188720" cy="384048"/>
+            <a:ext cx="5760720" cy="3135769"/>
           </a:xfrm>
           <a:prstGeom prst="roundRect">
             <a:avLst>
-              <a:gd name="adj" fmla="val 50000"/>
+              <a:gd name="adj" fmla="val 3499"/>
             </a:avLst>
           </a:prstGeom>
           <a:solidFill>
@@ -16486,40 +12485,64 @@
           </a:ln>
         </p:spPr>
       </p:sp>
-      <p:sp>
-        <p:nvSpPr>
-          <p:cNvPr id="35" name="Text 30"/>
-          <p:cNvSpPr txBox="1"/>
-          <p:nvPr/>
-        </p:nvSpPr>
-        <p:spPr>
-          <a:xfrm>
-            <a:off x="4663440" y="2788920"/>
-            <a:ext cx="1188720" cy="384048"/>
-          </a:xfrm>
-          <a:prstGeom prst="rect">
-            <a:avLst/>
-          </a:prstGeom>
-          <a:noFill/>
-          <a:ln/>
-        </p:spPr>
-        <p:txBody>
-          <a:bodyPr wrap="square" lIns="0" tIns="0" rIns="0" bIns="0" rtlCol="0" anchor="ctr"/>
+      <p:pic>
+        <p:nvPicPr>
+          <p:cNvPr id="24" name="Image 3" descr="/tmp/claude-0/-home-claude/750ff410-f4aa-5276-9360-1e19d018b112/scratchpad/c/assets/s-overview.png">    </p:cNvPr>
+          <p:cNvPicPr>
+            <a:picLocks noChangeAspect="1"/>
+          </p:cNvPicPr>
+          <p:nvPr/>
+        </p:nvPicPr>
+        <p:blipFill>
+          <a:blip r:embed="rId4"/>
+          <a:stretch>
+            <a:fillRect/>
+          </a:stretch>
+        </p:blipFill>
+        <p:spPr>
+          <a:xfrm>
+            <a:off x="530352" y="2359152"/>
+            <a:ext cx="5614416" cy="2989465"/>
+          </a:xfrm>
+          <a:prstGeom prst="rect">
+            <a:avLst/>
+          </a:prstGeom>
+        </p:spPr>
+      </p:pic>
+      <p:sp>
+        <p:nvSpPr>
+          <p:cNvPr id="25" name="Text 19"/>
+          <p:cNvSpPr txBox="1"/>
+          <p:nvPr/>
+        </p:nvSpPr>
+        <p:spPr>
+          <a:xfrm>
+            <a:off x="457200" y="5494921"/>
+            <a:ext cx="5760720" cy="292608"/>
+          </a:xfrm>
+          <a:prstGeom prst="rect">
+            <a:avLst/>
+          </a:prstGeom>
+          <a:noFill/>
+          <a:ln/>
+        </p:spPr>
+        <p:txBody>
+          <a:bodyPr wrap="square" lIns="0" tIns="0" rIns="0" bIns="0" rtlCol="0" anchor="t"/>
           <a:lstStyle/>
           <a:p>
             <a:pPr rtl="1" algn="ctr" indent="0" marL="0">
               <a:buNone/>
             </a:pPr>
             <a:r>
-              <a:rPr lang="en-US" sz="1200" b="1" dirty="0">
-                <a:solidFill>
-                  <a:srgbClr val="21141A"/>
-                </a:solidFill>
-                <a:latin typeface="IBM Plex Sans Arabic" pitchFamily="34" charset="0"/>
-                <a:ea typeface="IBM Plex Sans Arabic" pitchFamily="34" charset="-122"/>
-                <a:cs typeface="IBM Plex Sans Arabic" pitchFamily="34" charset="-120"/>
-              </a:rPr>
-              <a:t>Cloud APIs</a:t>
+              <a:rPr lang="en-US" sz="1200" dirty="0">
+                <a:solidFill>
+                  <a:srgbClr val="7F6C72"/>
+                </a:solidFill>
+                <a:latin typeface="IBM Plex Sans Arabic" pitchFamily="34" charset="0"/>
+                <a:ea typeface="IBM Plex Sans Arabic" pitchFamily="34" charset="-122"/>
+                <a:cs typeface="IBM Plex Sans Arabic" pitchFamily="34" charset="-120"/>
+              </a:rPr>
+              <a:t>لوحة التحكم: الفاتورة والهدر والتوقع</a:t>
             </a:r>
             <a:endParaRPr lang="en-US" sz="1200" dirty="0"/>
           </a:p>
@@ -16527,18 +12550,18 @@
       </p:sp>
       <p:sp>
         <p:nvSpPr>
-          <p:cNvPr id="36" name="Shape 31"/>
-          <p:cNvSpPr/>
-          <p:nvPr/>
-        </p:nvSpPr>
-        <p:spPr>
-          <a:xfrm>
-            <a:off x="2665476" y="2788920"/>
-            <a:ext cx="1888236" cy="384048"/>
+          <p:cNvPr id="26" name="Shape 20"/>
+          <p:cNvSpPr/>
+          <p:nvPr/>
+        </p:nvSpPr>
+        <p:spPr>
+          <a:xfrm>
+            <a:off x="8945575" y="2286000"/>
+            <a:ext cx="2788920" cy="3058467"/>
           </a:xfrm>
           <a:prstGeom prst="roundRect">
             <a:avLst>
-              <a:gd name="adj" fmla="val 50000"/>
+              <a:gd name="adj" fmla="val 3934"/>
             </a:avLst>
           </a:prstGeom>
           <a:solidFill>
@@ -16552,40 +12575,64 @@
           </a:ln>
         </p:spPr>
       </p:sp>
-      <p:sp>
-        <p:nvSpPr>
-          <p:cNvPr id="37" name="Text 32"/>
-          <p:cNvSpPr txBox="1"/>
-          <p:nvPr/>
-        </p:nvSpPr>
-        <p:spPr>
-          <a:xfrm>
-            <a:off x="2665476" y="2788920"/>
-            <a:ext cx="1888236" cy="384048"/>
-          </a:xfrm>
-          <a:prstGeom prst="rect">
-            <a:avLst/>
-          </a:prstGeom>
-          <a:noFill/>
-          <a:ln/>
-        </p:spPr>
-        <p:txBody>
-          <a:bodyPr wrap="square" lIns="0" tIns="0" rIns="0" bIns="0" rtlCol="0" anchor="ctr"/>
+      <p:pic>
+        <p:nvPicPr>
+          <p:cNvPr id="27" name="Image 4" descr="/tmp/claude-0/-home-claude/750ff410-f4aa-5276-9360-1e19d018b112/scratchpad/c/assets/s-approve.png">    </p:cNvPr>
+          <p:cNvPicPr>
+            <a:picLocks noChangeAspect="1"/>
+          </p:cNvPicPr>
+          <p:nvPr/>
+        </p:nvPicPr>
+        <p:blipFill>
+          <a:blip r:embed="rId5"/>
+          <a:stretch>
+            <a:fillRect/>
+          </a:stretch>
+        </p:blipFill>
+        <p:spPr>
+          <a:xfrm>
+            <a:off x="9018727" y="2359152"/>
+            <a:ext cx="2642616" cy="2912163"/>
+          </a:xfrm>
+          <a:prstGeom prst="rect">
+            <a:avLst/>
+          </a:prstGeom>
+        </p:spPr>
+      </p:pic>
+      <p:sp>
+        <p:nvSpPr>
+          <p:cNvPr id="28" name="Text 21"/>
+          <p:cNvSpPr txBox="1"/>
+          <p:nvPr/>
+        </p:nvSpPr>
+        <p:spPr>
+          <a:xfrm>
+            <a:off x="8945575" y="5417619"/>
+            <a:ext cx="2788920" cy="292608"/>
+          </a:xfrm>
+          <a:prstGeom prst="rect">
+            <a:avLst/>
+          </a:prstGeom>
+          <a:noFill/>
+          <a:ln/>
+        </p:spPr>
+        <p:txBody>
+          <a:bodyPr wrap="square" lIns="0" tIns="0" rIns="0" bIns="0" rtlCol="0" anchor="t"/>
           <a:lstStyle/>
           <a:p>
             <a:pPr rtl="1" algn="ctr" indent="0" marL="0">
               <a:buNone/>
             </a:pPr>
             <a:r>
-              <a:rPr lang="en-US" sz="1200" b="1" dirty="0">
-                <a:solidFill>
-                  <a:srgbClr val="21141A"/>
-                </a:solidFill>
-                <a:latin typeface="IBM Plex Sans Arabic" pitchFamily="34" charset="0"/>
-                <a:ea typeface="IBM Plex Sans Arabic" pitchFamily="34" charset="-122"/>
-                <a:cs typeface="IBM Plex Sans Arabic" pitchFamily="34" charset="-120"/>
-              </a:rPr>
-              <a:t>AWS IAM (قراءة فقط)</a:t>
+              <a:rPr lang="en-US" sz="1200" dirty="0">
+                <a:solidFill>
+                  <a:srgbClr val="7F6C72"/>
+                </a:solidFill>
+                <a:latin typeface="IBM Plex Sans Arabic" pitchFamily="34" charset="0"/>
+                <a:ea typeface="IBM Plex Sans Arabic" pitchFamily="34" charset="-122"/>
+                <a:cs typeface="IBM Plex Sans Arabic" pitchFamily="34" charset="-120"/>
+              </a:rPr>
+              <a:t>نافذة الموافقة والصلاحية المؤقتة</a:t>
             </a:r>
             <a:endParaRPr lang="en-US" sz="1200" dirty="0"/>
           </a:p>
@@ -16593,18 +12640,18 @@
       </p:sp>
       <p:sp>
         <p:nvSpPr>
-          <p:cNvPr id="38" name="Shape 33"/>
-          <p:cNvSpPr/>
-          <p:nvPr/>
-        </p:nvSpPr>
-        <p:spPr>
-          <a:xfrm>
-            <a:off x="745236" y="2788920"/>
-            <a:ext cx="1810512" cy="384048"/>
+          <p:cNvPr id="29" name="Shape 22"/>
+          <p:cNvSpPr/>
+          <p:nvPr/>
+        </p:nvSpPr>
+        <p:spPr>
+          <a:xfrm>
+            <a:off x="6446520" y="2286000"/>
+            <a:ext cx="2270455" cy="3108960"/>
           </a:xfrm>
           <a:prstGeom prst="roundRect">
             <a:avLst>
-              <a:gd name="adj" fmla="val 50000"/>
+              <a:gd name="adj" fmla="val 6444"/>
             </a:avLst>
           </a:prstGeom>
           <a:solidFill>
@@ -16620,14 +12667,125 @@
       </p:sp>
       <p:sp>
         <p:nvSpPr>
-          <p:cNvPr id="39" name="Text 34"/>
-          <p:cNvSpPr txBox="1"/>
-          <p:nvPr/>
-        </p:nvSpPr>
-        <p:spPr>
-          <a:xfrm>
-            <a:off x="745236" y="2788920"/>
-            <a:ext cx="1810512" cy="384048"/>
+          <p:cNvPr id="30" name="Text 23"/>
+          <p:cNvSpPr txBox="1"/>
+          <p:nvPr/>
+        </p:nvSpPr>
+        <p:spPr>
+          <a:xfrm>
+            <a:off x="6446520" y="2468880"/>
+            <a:ext cx="2270455" cy="347472"/>
+          </a:xfrm>
+          <a:prstGeom prst="rect">
+            <a:avLst/>
+          </a:prstGeom>
+          <a:noFill/>
+          <a:ln/>
+        </p:spPr>
+        <p:txBody>
+          <a:bodyPr wrap="square" lIns="0" tIns="0" rIns="0" bIns="0" rtlCol="0" anchor="t"/>
+          <a:lstStyle/>
+          <a:p>
+            <a:pPr rtl="1" algn="ctr" indent="0" marL="0">
+              <a:buNone/>
+            </a:pPr>
+            <a:r>
+              <a:rPr lang="en-US" sz="1500" b="1" dirty="0">
+                <a:solidFill>
+                  <a:srgbClr val="21141A"/>
+                </a:solidFill>
+                <a:latin typeface="IBM Plex Sans Arabic" pitchFamily="34" charset="0"/>
+                <a:ea typeface="IBM Plex Sans Arabic" pitchFamily="34" charset="-122"/>
+                <a:cs typeface="IBM Plex Sans Arabic" pitchFamily="34" charset="-120"/>
+              </a:rPr>
+              <a:t>جرّب العرض الحي</a:t>
+            </a:r>
+            <a:endParaRPr lang="en-US" sz="1500" dirty="0"/>
+          </a:p>
+        </p:txBody>
+      </p:sp>
+      <p:pic>
+        <p:nvPicPr>
+          <p:cNvPr id="31" name="Image 5" descr="/tmp/claude-0/-home-claude/750ff410-f4aa-5276-9360-1e19d018b112/scratchpad/c/assets/qr.png">    </p:cNvPr>
+          <p:cNvPicPr>
+            <a:picLocks noChangeAspect="1"/>
+          </p:cNvPicPr>
+          <p:nvPr/>
+        </p:nvPicPr>
+        <p:blipFill>
+          <a:blip r:embed="rId6"/>
+          <a:stretch>
+            <a:fillRect/>
+          </a:stretch>
+        </p:blipFill>
+        <p:spPr>
+          <a:xfrm>
+            <a:off x="6675120" y="2880360"/>
+            <a:ext cx="1813255" cy="1813255"/>
+          </a:xfrm>
+          <a:prstGeom prst="rect">
+            <a:avLst/>
+          </a:prstGeom>
+        </p:spPr>
+      </p:pic>
+      <p:sp>
+        <p:nvSpPr>
+          <p:cNvPr id="32" name="Text 24">
+            <a:hlinkClick r:id="rId7" tooltip=""/>
+          </p:cNvPr>
+          <p:cNvSpPr txBox="1"/>
+          <p:nvPr/>
+        </p:nvSpPr>
+        <p:spPr>
+          <a:xfrm>
+            <a:off x="6446520" y="4739335"/>
+            <a:ext cx="2270455" cy="292608"/>
+          </a:xfrm>
+          <a:prstGeom prst="rect">
+            <a:avLst/>
+          </a:prstGeom>
+          <a:noFill/>
+          <a:ln/>
+        </p:spPr>
+        <p:txBody>
+          <a:bodyPr wrap="square" lIns="0" tIns="0" rIns="0" bIns="0" rtlCol="0" anchor="t"/>
+          <a:lstStyle/>
+          <a:p>
+            <a:pPr algn="ctr" indent="0" marL="0">
+              <a:buNone/>
+            </a:pPr>
+            <a:r>
+              <a:rPr lang="en-US" sz="1100" b="1" u="sng" dirty="0">
+                <a:solidFill>
+                  <a:srgbClr val="8E2F3C"/>
+                </a:solidFill>
+                <a:latin typeface="IBM Plex Sans Arabic" pitchFamily="34" charset="0"/>
+                <a:ea typeface="IBM Plex Sans Arabic" pitchFamily="34" charset="-122"/>
+                <a:cs typeface="IBM Plex Sans Arabic" pitchFamily="34" charset="-120"/>
+                <a:hlinkClick r:id="rId7" invalidUrl="" action="" tgtFrame="" tooltip="" history="1" highlightClick="0" endSnd="0">
+                  <a:extLst>
+                    <a:ext uri="{A12FA001-AC4F-418D-AE19-62706E023703}">
+                      <ahyp:hlinkClr xmlns:ahyp="http://schemas.microsoft.com/office/drawing/2018/hyperlinkcolor" val="tx"/>
+                    </a:ext>
+                  </a:extLst>
+                </a:hlinkClick>
+              </a:rPr>
+              <a:t>cloudtrim-sa.vercel.app</a:t>
+            </a:r>
+            <a:endParaRPr lang="en-US" sz="1100" dirty="0"/>
+          </a:p>
+        </p:txBody>
+      </p:sp>
+      <p:sp>
+        <p:nvSpPr>
+          <p:cNvPr id="33" name="Text 25"/>
+          <p:cNvSpPr txBox="1"/>
+          <p:nvPr/>
+        </p:nvSpPr>
+        <p:spPr>
+          <a:xfrm>
+            <a:off x="457200" y="5760720"/>
+            <a:ext cx="11277295" cy="365760"/>
           </a:xfrm>
           <a:prstGeom prst="rect">
             <a:avLst/>
@@ -16643,7 +12801,7 @@
               <a:buNone/>
             </a:pPr>
             <a:r>
-              <a:rPr lang="en-US" sz="1200" b="1" dirty="0">
+              <a:rPr lang="en-US" sz="1300" dirty="0">
                 <a:solidFill>
                   <a:srgbClr val="21141A"/>
                 </a:solidFill>
@@ -16651,556 +12809,9 @@
                 <a:ea typeface="IBM Plex Sans Arabic" pitchFamily="34" charset="-122"/>
                 <a:cs typeface="IBM Plex Sans Arabic" pitchFamily="34" charset="-120"/>
               </a:rPr>
-              <a:t>نموذج ذكاء اصطناعي</a:t>
-            </a:r>
-            <a:endParaRPr lang="en-US" sz="1200" dirty="0"/>
-          </a:p>
-        </p:txBody>
-      </p:sp>
-      <p:sp>
-        <p:nvSpPr>
-          <p:cNvPr id="40" name="Shape 35"/>
-          <p:cNvSpPr/>
-          <p:nvPr/>
-        </p:nvSpPr>
-        <p:spPr>
-          <a:xfrm>
-            <a:off x="4896612" y="3337560"/>
-            <a:ext cx="955548" cy="384048"/>
-          </a:xfrm>
-          <a:prstGeom prst="roundRect">
-            <a:avLst>
-              <a:gd name="adj" fmla="val 50000"/>
-            </a:avLst>
-          </a:prstGeom>
-          <a:solidFill>
-            <a:srgbClr val="FFFBF8"/>
-          </a:solidFill>
-          <a:ln w="9525">
-            <a:solidFill>
-              <a:srgbClr val="E3D5CC"/>
-            </a:solidFill>
-            <a:prstDash val="solid"/>
-          </a:ln>
-        </p:spPr>
-      </p:sp>
-      <p:sp>
-        <p:nvSpPr>
-          <p:cNvPr id="41" name="Text 36"/>
-          <p:cNvSpPr txBox="1"/>
-          <p:nvPr/>
-        </p:nvSpPr>
-        <p:spPr>
-          <a:xfrm>
-            <a:off x="4896612" y="3337560"/>
-            <a:ext cx="955548" cy="384048"/>
-          </a:xfrm>
-          <a:prstGeom prst="rect">
-            <a:avLst/>
-          </a:prstGeom>
-          <a:noFill/>
-          <a:ln/>
-        </p:spPr>
-        <p:txBody>
-          <a:bodyPr wrap="square" lIns="0" tIns="0" rIns="0" bIns="0" rtlCol="0" anchor="ctr"/>
-          <a:lstStyle/>
-          <a:p>
-            <a:pPr rtl="1" algn="ctr" indent="0" marL="0">
-              <a:buNone/>
-            </a:pPr>
-            <a:r>
-              <a:rPr lang="en-US" sz="1200" b="1" dirty="0">
-                <a:solidFill>
-                  <a:srgbClr val="21141A"/>
-                </a:solidFill>
-                <a:latin typeface="IBM Plex Sans Arabic" pitchFamily="34" charset="0"/>
-                <a:ea typeface="IBM Plex Sans Arabic" pitchFamily="34" charset="-122"/>
-                <a:cs typeface="IBM Plex Sans Arabic" pitchFamily="34" charset="-120"/>
-              </a:rPr>
-              <a:t>Next.js</a:t>
-            </a:r>
-            <a:endParaRPr lang="en-US" sz="1200" dirty="0"/>
-          </a:p>
-        </p:txBody>
-      </p:sp>
-      <p:sp>
-        <p:nvSpPr>
-          <p:cNvPr id="42" name="Shape 37"/>
-          <p:cNvSpPr/>
-          <p:nvPr/>
-        </p:nvSpPr>
-        <p:spPr>
-          <a:xfrm>
-            <a:off x="3909060" y="3337560"/>
-            <a:ext cx="877824" cy="384048"/>
-          </a:xfrm>
-          <a:prstGeom prst="roundRect">
-            <a:avLst>
-              <a:gd name="adj" fmla="val 50000"/>
-            </a:avLst>
-          </a:prstGeom>
-          <a:solidFill>
-            <a:srgbClr val="FFFBF8"/>
-          </a:solidFill>
-          <a:ln w="9525">
-            <a:solidFill>
-              <a:srgbClr val="E3D5CC"/>
-            </a:solidFill>
-            <a:prstDash val="solid"/>
-          </a:ln>
-        </p:spPr>
-      </p:sp>
-      <p:sp>
-        <p:nvSpPr>
-          <p:cNvPr id="43" name="Text 38"/>
-          <p:cNvSpPr txBox="1"/>
-          <p:nvPr/>
-        </p:nvSpPr>
-        <p:spPr>
-          <a:xfrm>
-            <a:off x="3909060" y="3337560"/>
-            <a:ext cx="877824" cy="384048"/>
-          </a:xfrm>
-          <a:prstGeom prst="rect">
-            <a:avLst/>
-          </a:prstGeom>
-          <a:noFill/>
-          <a:ln/>
-        </p:spPr>
-        <p:txBody>
-          <a:bodyPr wrap="square" lIns="0" tIns="0" rIns="0" bIns="0" rtlCol="0" anchor="ctr"/>
-          <a:lstStyle/>
-          <a:p>
-            <a:pPr rtl="1" algn="ctr" indent="0" marL="0">
-              <a:buNone/>
-            </a:pPr>
-            <a:r>
-              <a:rPr lang="en-US" sz="1200" b="1" dirty="0">
-                <a:solidFill>
-                  <a:srgbClr val="21141A"/>
-                </a:solidFill>
-                <a:latin typeface="IBM Plex Sans Arabic" pitchFamily="34" charset="0"/>
-                <a:ea typeface="IBM Plex Sans Arabic" pitchFamily="34" charset="-122"/>
-                <a:cs typeface="IBM Plex Sans Arabic" pitchFamily="34" charset="-120"/>
-              </a:rPr>
-              <a:t>Vercel</a:t>
-            </a:r>
-            <a:endParaRPr lang="en-US" sz="1200" dirty="0"/>
-          </a:p>
-        </p:txBody>
-      </p:sp>
-      <p:sp>
-        <p:nvSpPr>
-          <p:cNvPr id="44" name="Shape 39"/>
-          <p:cNvSpPr/>
-          <p:nvPr/>
-        </p:nvSpPr>
-        <p:spPr>
-          <a:xfrm>
-            <a:off x="1911096" y="3337560"/>
-            <a:ext cx="1888236" cy="384048"/>
-          </a:xfrm>
-          <a:prstGeom prst="roundRect">
-            <a:avLst>
-              <a:gd name="adj" fmla="val 50000"/>
-            </a:avLst>
-          </a:prstGeom>
-          <a:solidFill>
-            <a:srgbClr val="FFFBF8"/>
-          </a:solidFill>
-          <a:ln w="9525">
-            <a:solidFill>
-              <a:srgbClr val="E3D5CC"/>
-            </a:solidFill>
-            <a:prstDash val="solid"/>
-          </a:ln>
-        </p:spPr>
-      </p:sp>
-      <p:sp>
-        <p:nvSpPr>
-          <p:cNvPr id="45" name="Text 40"/>
-          <p:cNvSpPr txBox="1"/>
-          <p:nvPr/>
-        </p:nvSpPr>
-        <p:spPr>
-          <a:xfrm>
-            <a:off x="1911096" y="3337560"/>
-            <a:ext cx="1888236" cy="384048"/>
-          </a:xfrm>
-          <a:prstGeom prst="rect">
-            <a:avLst/>
-          </a:prstGeom>
-          <a:noFill/>
-          <a:ln/>
-        </p:spPr>
-        <p:txBody>
-          <a:bodyPr wrap="square" lIns="0" tIns="0" rIns="0" bIns="0" rtlCol="0" anchor="ctr"/>
-          <a:lstStyle/>
-          <a:p>
-            <a:pPr rtl="1" algn="ctr" indent="0" marL="0">
-              <a:buNone/>
-            </a:pPr>
-            <a:r>
-              <a:rPr lang="en-US" sz="1200" b="1" dirty="0">
-                <a:solidFill>
-                  <a:srgbClr val="21141A"/>
-                </a:solidFill>
-                <a:latin typeface="IBM Plex Sans Arabic" pitchFamily="34" charset="0"/>
-                <a:ea typeface="IBM Plex Sans Arabic" pitchFamily="34" charset="-122"/>
-                <a:cs typeface="IBM Plex Sans Arabic" pitchFamily="34" charset="-120"/>
-              </a:rPr>
-              <a:t>WhatsApp / Telegram</a:t>
-            </a:r>
-            <a:endParaRPr lang="en-US" sz="1200" dirty="0"/>
-          </a:p>
-        </p:txBody>
-      </p:sp>
-      <p:sp>
-        <p:nvSpPr>
-          <p:cNvPr id="46" name="Text 41"/>
-          <p:cNvSpPr txBox="1"/>
-          <p:nvPr/>
-        </p:nvSpPr>
-        <p:spPr>
-          <a:xfrm>
-            <a:off x="457200" y="3931920"/>
-            <a:ext cx="5394960" cy="548640"/>
-          </a:xfrm>
-          <a:prstGeom prst="rect">
-            <a:avLst/>
-          </a:prstGeom>
-          <a:noFill/>
-          <a:ln/>
-        </p:spPr>
-        <p:txBody>
-          <a:bodyPr wrap="square" lIns="0" tIns="0" rIns="0" bIns="0" rtlCol="0" anchor="t"/>
-          <a:lstStyle/>
-          <a:p>
-            <a:pPr rtl="1" algn="r" indent="0" marL="0">
-              <a:buNone/>
-            </a:pPr>
-            <a:r>
-              <a:rPr lang="en-US" sz="1300" dirty="0">
-                <a:solidFill>
-                  <a:srgbClr val="7F6C72"/>
-                </a:solidFill>
-                <a:latin typeface="IBM Plex Sans Arabic" pitchFamily="34" charset="0"/>
-                <a:ea typeface="IBM Plex Sans Arabic" pitchFamily="34" charset="-122"/>
-                <a:cs typeface="IBM Plex Sans Arabic" pitchFamily="34" charset="-120"/>
-              </a:rPr>
-              <a:t>النموذج الأولي يعمل الآن على Vercel، والقراءة عبر APIs رسمية منخفضة التكلفة.</a:t>
+              <a:t>العرض على بيانات شركة افتراضية، والصلاحيات المعروضة هي صلاحيات AWS الحقيقية للقراءة.</a:t>
             </a:r>
             <a:endParaRPr lang="en-US" sz="1300" dirty="0"/>
-          </a:p>
-        </p:txBody>
-      </p:sp>
-      <p:sp>
-        <p:nvSpPr>
-          <p:cNvPr id="47" name="Shape 42"/>
-          <p:cNvSpPr/>
-          <p:nvPr/>
-        </p:nvSpPr>
-        <p:spPr>
-          <a:xfrm>
-            <a:off x="8097317" y="4983480"/>
-            <a:ext cx="3637178" cy="1143000"/>
-          </a:xfrm>
-          <a:prstGeom prst="roundRect">
-            <a:avLst>
-              <a:gd name="adj" fmla="val 11200"/>
-            </a:avLst>
-          </a:prstGeom>
-          <a:solidFill>
-            <a:srgbClr val="8E2F3C"/>
-          </a:solidFill>
-          <a:ln/>
-        </p:spPr>
-      </p:sp>
-      <p:sp>
-        <p:nvSpPr>
-          <p:cNvPr id="48" name="Text 43"/>
-          <p:cNvSpPr txBox="1"/>
-          <p:nvPr/>
-        </p:nvSpPr>
-        <p:spPr>
-          <a:xfrm>
-            <a:off x="8325917" y="5120640"/>
-            <a:ext cx="3179978" cy="329184"/>
-          </a:xfrm>
-          <a:prstGeom prst="rect">
-            <a:avLst/>
-          </a:prstGeom>
-          <a:noFill/>
-          <a:ln/>
-        </p:spPr>
-        <p:txBody>
-          <a:bodyPr wrap="square" lIns="0" tIns="0" rIns="0" bIns="0" rtlCol="0" anchor="t"/>
-          <a:lstStyle/>
-          <a:p>
-            <a:pPr rtl="1" algn="r" indent="0" marL="0">
-              <a:buNone/>
-            </a:pPr>
-            <a:r>
-              <a:rPr lang="en-US" sz="1500" b="1" dirty="0">
-                <a:solidFill>
-                  <a:srgbClr val="FBF6EE"/>
-                </a:solidFill>
-                <a:latin typeface="IBM Plex Sans Arabic" pitchFamily="34" charset="0"/>
-                <a:ea typeface="IBM Plex Sans Arabic" pitchFamily="34" charset="-122"/>
-                <a:cs typeface="IBM Plex Sans Arabic" pitchFamily="34" charset="-120"/>
-              </a:rPr>
-              <a:t>المرحلة 1 · الآن</a:t>
-            </a:r>
-            <a:endParaRPr lang="en-US" sz="1500" dirty="0"/>
-          </a:p>
-        </p:txBody>
-      </p:sp>
-      <p:sp>
-        <p:nvSpPr>
-          <p:cNvPr id="49" name="Text 44"/>
-          <p:cNvSpPr txBox="1"/>
-          <p:nvPr/>
-        </p:nvSpPr>
-        <p:spPr>
-          <a:xfrm>
-            <a:off x="8325917" y="5458968"/>
-            <a:ext cx="3179978" cy="594360"/>
-          </a:xfrm>
-          <a:prstGeom prst="rect">
-            <a:avLst/>
-          </a:prstGeom>
-          <a:noFill/>
-          <a:ln/>
-        </p:spPr>
-        <p:txBody>
-          <a:bodyPr wrap="square" lIns="0" tIns="0" rIns="0" bIns="0" rtlCol="0" anchor="t"/>
-          <a:lstStyle/>
-          <a:p>
-            <a:pPr rtl="1" algn="r" indent="0" marL="0">
-              <a:buNone/>
-            </a:pPr>
-            <a:r>
-              <a:rPr lang="en-US" sz="1250" dirty="0">
-                <a:solidFill>
-                  <a:srgbClr val="FBF6EE"/>
-                </a:solidFill>
-                <a:latin typeface="IBM Plex Sans Arabic" pitchFamily="34" charset="0"/>
-                <a:ea typeface="IBM Plex Sans Arabic" pitchFamily="34" charset="-122"/>
-                <a:cs typeface="IBM Plex Sans Arabic" pitchFamily="34" charset="-120"/>
-              </a:rPr>
-              <a:t>AWS + تيليجرام + 7 قواعد هدر + الموافقة بنقرة</a:t>
-            </a:r>
-            <a:endParaRPr lang="en-US" sz="1250" dirty="0"/>
-          </a:p>
-        </p:txBody>
-      </p:sp>
-      <p:sp>
-        <p:nvSpPr>
-          <p:cNvPr id="50" name="Shape 45"/>
-          <p:cNvSpPr/>
-          <p:nvPr/>
-        </p:nvSpPr>
-        <p:spPr>
-          <a:xfrm>
-            <a:off x="4277258" y="4983480"/>
-            <a:ext cx="3637178" cy="1143000"/>
-          </a:xfrm>
-          <a:prstGeom prst="roundRect">
-            <a:avLst>
-              <a:gd name="adj" fmla="val 11200"/>
-            </a:avLst>
-          </a:prstGeom>
-          <a:solidFill>
-            <a:srgbClr val="FFFBF8"/>
-          </a:solidFill>
-          <a:ln w="9525">
-            <a:solidFill>
-              <a:srgbClr val="E3D5CC"/>
-            </a:solidFill>
-            <a:prstDash val="solid"/>
-          </a:ln>
-        </p:spPr>
-      </p:sp>
-      <p:sp>
-        <p:nvSpPr>
-          <p:cNvPr id="51" name="Text 46"/>
-          <p:cNvSpPr txBox="1"/>
-          <p:nvPr/>
-        </p:nvSpPr>
-        <p:spPr>
-          <a:xfrm>
-            <a:off x="4505858" y="5120640"/>
-            <a:ext cx="3179978" cy="329184"/>
-          </a:xfrm>
-          <a:prstGeom prst="rect">
-            <a:avLst/>
-          </a:prstGeom>
-          <a:noFill/>
-          <a:ln/>
-        </p:spPr>
-        <p:txBody>
-          <a:bodyPr wrap="square" lIns="0" tIns="0" rIns="0" bIns="0" rtlCol="0" anchor="t"/>
-          <a:lstStyle/>
-          <a:p>
-            <a:pPr rtl="1" algn="r" indent="0" marL="0">
-              <a:buNone/>
-            </a:pPr>
-            <a:r>
-              <a:rPr lang="en-US" sz="1500" b="1" dirty="0">
-                <a:solidFill>
-                  <a:srgbClr val="8E2F3C"/>
-                </a:solidFill>
-                <a:latin typeface="IBM Plex Sans Arabic" pitchFamily="34" charset="0"/>
-                <a:ea typeface="IBM Plex Sans Arabic" pitchFamily="34" charset="-122"/>
-                <a:cs typeface="IBM Plex Sans Arabic" pitchFamily="34" charset="-120"/>
-              </a:rPr>
-              <a:t>المرحلة 2</a:t>
-            </a:r>
-            <a:endParaRPr lang="en-US" sz="1500" dirty="0"/>
-          </a:p>
-        </p:txBody>
-      </p:sp>
-      <p:sp>
-        <p:nvSpPr>
-          <p:cNvPr id="52" name="Text 47"/>
-          <p:cNvSpPr txBox="1"/>
-          <p:nvPr/>
-        </p:nvSpPr>
-        <p:spPr>
-          <a:xfrm>
-            <a:off x="4505858" y="5458968"/>
-            <a:ext cx="3179978" cy="594360"/>
-          </a:xfrm>
-          <a:prstGeom prst="rect">
-            <a:avLst/>
-          </a:prstGeom>
-          <a:noFill/>
-          <a:ln/>
-        </p:spPr>
-        <p:txBody>
-          <a:bodyPr wrap="square" lIns="0" tIns="0" rIns="0" bIns="0" rtlCol="0" anchor="t"/>
-          <a:lstStyle/>
-          <a:p>
-            <a:pPr rtl="1" algn="r" indent="0" marL="0">
-              <a:buNone/>
-            </a:pPr>
-            <a:r>
-              <a:rPr lang="en-US" sz="1250" dirty="0">
-                <a:solidFill>
-                  <a:srgbClr val="21141A"/>
-                </a:solidFill>
-                <a:latin typeface="IBM Plex Sans Arabic" pitchFamily="34" charset="0"/>
-                <a:ea typeface="IBM Plex Sans Arabic" pitchFamily="34" charset="-122"/>
-                <a:cs typeface="IBM Plex Sans Arabic" pitchFamily="34" charset="-120"/>
-              </a:rPr>
-              <a:t>Azure وGCP + STC Cloud وSCCC وCNTXT عبر API أو رفع ملف الفاتورة</a:t>
-            </a:r>
-            <a:endParaRPr lang="en-US" sz="1250" dirty="0"/>
-          </a:p>
-        </p:txBody>
-      </p:sp>
-      <p:sp>
-        <p:nvSpPr>
-          <p:cNvPr id="53" name="Shape 48"/>
-          <p:cNvSpPr/>
-          <p:nvPr/>
-        </p:nvSpPr>
-        <p:spPr>
-          <a:xfrm>
-            <a:off x="457200" y="4983480"/>
-            <a:ext cx="3637178" cy="1143000"/>
-          </a:xfrm>
-          <a:prstGeom prst="roundRect">
-            <a:avLst>
-              <a:gd name="adj" fmla="val 11200"/>
-            </a:avLst>
-          </a:prstGeom>
-          <a:solidFill>
-            <a:srgbClr val="FFFBF8"/>
-          </a:solidFill>
-          <a:ln w="9525">
-            <a:solidFill>
-              <a:srgbClr val="E3D5CC"/>
-            </a:solidFill>
-            <a:prstDash val="solid"/>
-          </a:ln>
-        </p:spPr>
-      </p:sp>
-      <p:sp>
-        <p:nvSpPr>
-          <p:cNvPr id="54" name="Text 49"/>
-          <p:cNvSpPr txBox="1"/>
-          <p:nvPr/>
-        </p:nvSpPr>
-        <p:spPr>
-          <a:xfrm>
-            <a:off x="685800" y="5120640"/>
-            <a:ext cx="3179978" cy="329184"/>
-          </a:xfrm>
-          <a:prstGeom prst="rect">
-            <a:avLst/>
-          </a:prstGeom>
-          <a:noFill/>
-          <a:ln/>
-        </p:spPr>
-        <p:txBody>
-          <a:bodyPr wrap="square" lIns="0" tIns="0" rIns="0" bIns="0" rtlCol="0" anchor="t"/>
-          <a:lstStyle/>
-          <a:p>
-            <a:pPr rtl="1" algn="r" indent="0" marL="0">
-              <a:buNone/>
-            </a:pPr>
-            <a:r>
-              <a:rPr lang="en-US" sz="1500" b="1" dirty="0">
-                <a:solidFill>
-                  <a:srgbClr val="8E2F3C"/>
-                </a:solidFill>
-                <a:latin typeface="IBM Plex Sans Arabic" pitchFamily="34" charset="0"/>
-                <a:ea typeface="IBM Plex Sans Arabic" pitchFamily="34" charset="-122"/>
-                <a:cs typeface="IBM Plex Sans Arabic" pitchFamily="34" charset="-120"/>
-              </a:rPr>
-              <a:t>المرحلة 3</a:t>
-            </a:r>
-            <a:endParaRPr lang="en-US" sz="1500" dirty="0"/>
-          </a:p>
-        </p:txBody>
-      </p:sp>
-      <p:sp>
-        <p:nvSpPr>
-          <p:cNvPr id="55" name="Text 50"/>
-          <p:cNvSpPr txBox="1"/>
-          <p:nvPr/>
-        </p:nvSpPr>
-        <p:spPr>
-          <a:xfrm>
-            <a:off x="685800" y="5458968"/>
-            <a:ext cx="3179978" cy="594360"/>
-          </a:xfrm>
-          <a:prstGeom prst="rect">
-            <a:avLst/>
-          </a:prstGeom>
-          <a:noFill/>
-          <a:ln/>
-        </p:spPr>
-        <p:txBody>
-          <a:bodyPr wrap="square" lIns="0" tIns="0" rIns="0" bIns="0" rtlCol="0" anchor="t"/>
-          <a:lstStyle/>
-          <a:p>
-            <a:pPr rtl="1" algn="r" indent="0" marL="0">
-              <a:buNone/>
-            </a:pPr>
-            <a:r>
-              <a:rPr lang="en-US" sz="1250" dirty="0">
-                <a:solidFill>
-                  <a:srgbClr val="21141A"/>
-                </a:solidFill>
-                <a:latin typeface="IBM Plex Sans Arabic" pitchFamily="34" charset="0"/>
-                <a:ea typeface="IBM Plex Sans Arabic" pitchFamily="34" charset="-122"/>
-                <a:cs typeface="IBM Plex Sans Arabic" pitchFamily="34" charset="-120"/>
-              </a:rPr>
-              <a:t>واتساب للأعمال + استضافة داخل المملكة + مسار ISO 27001</a:t>
-            </a:r>
-            <a:endParaRPr lang="en-US" sz="1250" dirty="0"/>
           </a:p>
         </p:txBody>
       </p:sp>
@@ -17571,8 +13182,8 @@
         </p:nvSpPr>
         <p:spPr>
           <a:xfrm>
-            <a:off x="9759391" y="987552"/>
-            <a:ext cx="1975104" cy="384048"/>
+            <a:off x="8918143" y="987552"/>
+            <a:ext cx="2816352" cy="384048"/>
           </a:xfrm>
           <a:prstGeom prst="roundRect">
             <a:avLst>
@@ -17593,8 +13204,8 @@
         </p:nvSpPr>
         <p:spPr>
           <a:xfrm>
-            <a:off x="9759391" y="987552"/>
-            <a:ext cx="1975104" cy="384048"/>
+            <a:off x="8918143" y="987552"/>
+            <a:ext cx="2816352" cy="384048"/>
           </a:xfrm>
           <a:prstGeom prst="rect">
             <a:avLst/>
@@ -17618,7 +13229,7 @@
                 <a:ea typeface="IBM Plex Sans Arabic" pitchFamily="34" charset="-122"/>
                 <a:cs typeface="IBM Plex Sans Arabic" pitchFamily="34" charset="-120"/>
               </a:rPr>
-              <a:t>النموذج الأولي</a:t>
+              <a:t>الأثر والقيمة المتوقعة</a:t>
             </a:r>
             <a:endParaRPr lang="en-US" sz="1300" dirty="0"/>
           </a:p>
@@ -17751,7 +13362,7 @@
               <a:buNone/>
             </a:pPr>
             <a:r>
-              <a:rPr lang="en-US" sz="3000" b="1" dirty="0">
+              <a:rPr lang="en-US" sz="2700" b="1" dirty="0">
                 <a:solidFill>
                   <a:srgbClr val="21141A"/>
                 </a:solidFill>
@@ -17759,9 +13370,9 @@
                 <a:ea typeface="IBM Plex Sans Arabic" pitchFamily="34" charset="-122"/>
                 <a:cs typeface="IBM Plex Sans Arabic" pitchFamily="34" charset="-120"/>
               </a:rPr>
-              <a:t>ما بنيناه فعلاً خلال التحدي</a:t>
-            </a:r>
-            <a:endParaRPr lang="en-US" sz="3000" dirty="0"/>
+              <a:t>مثال محسوب: نحو 110 آلاف ريال سنوياً لشركة من 120 موظفاً</a:t>
+            </a:r>
+            <a:endParaRPr lang="en-US" sz="2700" dirty="0"/>
           </a:p>
         </p:txBody>
       </p:sp>
@@ -17773,12 +13384,12 @@
         </p:nvSpPr>
         <p:spPr>
           <a:xfrm>
-            <a:off x="457200" y="2286000"/>
-            <a:ext cx="5760720" cy="3135769"/>
+            <a:off x="9223781" y="2331720"/>
+            <a:ext cx="2510714" cy="1463040"/>
           </a:xfrm>
           <a:prstGeom prst="roundRect">
             <a:avLst>
-              <a:gd name="adj" fmla="val 3499"/>
+              <a:gd name="adj" fmla="val 10000"/>
             </a:avLst>
           </a:prstGeom>
           <a:solidFill>
@@ -17792,40 +13403,16 @@
           </a:ln>
         </p:spPr>
       </p:sp>
-      <p:pic>
-        <p:nvPicPr>
-          <p:cNvPr id="24" name="Image 3" descr="/tmp/claude-0/-home-claude/750ff410-f4aa-5276-9360-1e19d018b112/scratchpad/c/assets/s-overview.png">    </p:cNvPr>
-          <p:cNvPicPr>
-            <a:picLocks noChangeAspect="1"/>
-          </p:cNvPicPr>
-          <p:nvPr/>
-        </p:nvPicPr>
-        <p:blipFill>
-          <a:blip r:embed="rId4"/>
-          <a:stretch>
-            <a:fillRect/>
-          </a:stretch>
-        </p:blipFill>
-        <p:spPr>
-          <a:xfrm>
-            <a:off x="530352" y="2359152"/>
-            <a:ext cx="5614416" cy="2989465"/>
-          </a:xfrm>
-          <a:prstGeom prst="rect">
-            <a:avLst/>
-          </a:prstGeom>
-        </p:spPr>
-      </p:pic>
-      <p:sp>
-        <p:nvSpPr>
-          <p:cNvPr id="25" name="Text 19"/>
-          <p:cNvSpPr txBox="1"/>
-          <p:nvPr/>
-        </p:nvSpPr>
-        <p:spPr>
-          <a:xfrm>
-            <a:off x="457200" y="5494921"/>
-            <a:ext cx="5760720" cy="292608"/>
+      <p:sp>
+        <p:nvSpPr>
+          <p:cNvPr id="24" name="Text 19"/>
+          <p:cNvSpPr txBox="1"/>
+          <p:nvPr/>
+        </p:nvSpPr>
+        <p:spPr>
+          <a:xfrm>
+            <a:off x="9223781" y="2532888"/>
+            <a:ext cx="2510714" cy="685800"/>
           </a:xfrm>
           <a:prstGeom prst="rect">
             <a:avLst/>
@@ -17837,38 +13424,116 @@
           <a:bodyPr wrap="square" lIns="0" tIns="0" rIns="0" bIns="0" rtlCol="0" anchor="t"/>
           <a:lstStyle/>
           <a:p>
+            <a:pPr algn="ctr" indent="0" marL="0">
+              <a:buNone/>
+            </a:pPr>
+            <a:r>
+              <a:rPr lang="en-US" sz="3600" b="1" dirty="0">
+                <a:solidFill>
+                  <a:srgbClr val="8E2F3C"/>
+                </a:solidFill>
+                <a:latin typeface="IBM Plex Sans Arabic" pitchFamily="34" charset="0"/>
+                <a:ea typeface="IBM Plex Sans Arabic" pitchFamily="34" charset="-122"/>
+                <a:cs typeface="IBM Plex Sans Arabic" pitchFamily="34" charset="-120"/>
+              </a:rPr>
+              <a:t>85,400</a:t>
+            </a:r>
+            <a:endParaRPr lang="en-US" sz="3600" dirty="0"/>
+          </a:p>
+        </p:txBody>
+      </p:sp>
+      <p:sp>
+        <p:nvSpPr>
+          <p:cNvPr id="25" name="Text 20"/>
+          <p:cNvSpPr txBox="1"/>
+          <p:nvPr/>
+        </p:nvSpPr>
+        <p:spPr>
+          <a:xfrm>
+            <a:off x="9360941" y="3246120"/>
+            <a:ext cx="2236394" cy="365760"/>
+          </a:xfrm>
+          <a:prstGeom prst="rect">
+            <a:avLst/>
+          </a:prstGeom>
+          <a:noFill/>
+          <a:ln/>
+        </p:spPr>
+        <p:txBody>
+          <a:bodyPr wrap="square" lIns="0" tIns="0" rIns="0" bIns="0" rtlCol="0" anchor="t"/>
+          <a:lstStyle/>
+          <a:p>
             <a:pPr rtl="1" algn="ctr" indent="0" marL="0">
               <a:buNone/>
             </a:pPr>
             <a:r>
-              <a:rPr lang="en-US" sz="1200" dirty="0">
-                <a:solidFill>
-                  <a:srgbClr val="7F6C72"/>
-                </a:solidFill>
-                <a:latin typeface="IBM Plex Sans Arabic" pitchFamily="34" charset="0"/>
-                <a:ea typeface="IBM Plex Sans Arabic" pitchFamily="34" charset="-122"/>
-                <a:cs typeface="IBM Plex Sans Arabic" pitchFamily="34" charset="-120"/>
-              </a:rPr>
-              <a:t>لوحة التحكم: الفاتورة والهدر والتوقع</a:t>
-            </a:r>
-            <a:endParaRPr lang="en-US" sz="1200" dirty="0"/>
-          </a:p>
-        </p:txBody>
-      </p:sp>
-      <p:sp>
-        <p:nvSpPr>
-          <p:cNvPr id="26" name="Shape 20"/>
-          <p:cNvSpPr/>
-          <p:nvPr/>
-        </p:nvSpPr>
-        <p:spPr>
-          <a:xfrm>
-            <a:off x="8945575" y="2286000"/>
-            <a:ext cx="2788920" cy="3058467"/>
+              <a:rPr lang="en-US" sz="1400" dirty="0">
+                <a:solidFill>
+                  <a:srgbClr val="21141A"/>
+                </a:solidFill>
+                <a:latin typeface="IBM Plex Sans Arabic" pitchFamily="34" charset="0"/>
+                <a:ea typeface="IBM Plex Sans Arabic" pitchFamily="34" charset="-122"/>
+                <a:cs typeface="IBM Plex Sans Arabic" pitchFamily="34" charset="-120"/>
+              </a:rPr>
+              <a:t>ريال فاتورة شهرية</a:t>
+            </a:r>
+            <a:endParaRPr lang="en-US" sz="1400" dirty="0"/>
+          </a:p>
+        </p:txBody>
+      </p:sp>
+      <p:sp>
+        <p:nvSpPr>
+          <p:cNvPr id="26" name="Text 21"/>
+          <p:cNvSpPr txBox="1"/>
+          <p:nvPr/>
+        </p:nvSpPr>
+        <p:spPr>
+          <a:xfrm>
+            <a:off x="8812301" y="2331720"/>
+            <a:ext cx="411480" cy="1463040"/>
+          </a:xfrm>
+          <a:prstGeom prst="rect">
+            <a:avLst/>
+          </a:prstGeom>
+          <a:noFill/>
+          <a:ln/>
+        </p:spPr>
+        <p:txBody>
+          <a:bodyPr wrap="square" lIns="0" tIns="0" rIns="0" bIns="0" rtlCol="0" anchor="ctr"/>
+          <a:lstStyle/>
+          <a:p>
+            <a:pPr algn="ctr" indent="0" marL="0">
+              <a:buNone/>
+            </a:pPr>
+            <a:r>
+              <a:rPr lang="en-US" sz="2200" b="1" dirty="0">
+                <a:solidFill>
+                  <a:srgbClr val="8E2F3C"/>
+                </a:solidFill>
+                <a:latin typeface="IBM Plex Sans Arabic" pitchFamily="34" charset="0"/>
+                <a:ea typeface="IBM Plex Sans Arabic" pitchFamily="34" charset="-122"/>
+                <a:cs typeface="IBM Plex Sans Arabic" pitchFamily="34" charset="-120"/>
+              </a:rPr>
+              <a:t>←</a:t>
+            </a:r>
+            <a:endParaRPr lang="en-US" sz="2200" dirty="0"/>
+          </a:p>
+        </p:txBody>
+      </p:sp>
+      <p:sp>
+        <p:nvSpPr>
+          <p:cNvPr id="27" name="Shape 22"/>
+          <p:cNvSpPr/>
+          <p:nvPr/>
+        </p:nvSpPr>
+        <p:spPr>
+          <a:xfrm>
+            <a:off x="6301588" y="2331720"/>
+            <a:ext cx="2510714" cy="1463040"/>
           </a:xfrm>
           <a:prstGeom prst="roundRect">
             <a:avLst>
-              <a:gd name="adj" fmla="val 3934"/>
+              <a:gd name="adj" fmla="val 10000"/>
             </a:avLst>
           </a:prstGeom>
           <a:solidFill>
@@ -17882,40 +13547,16 @@
           </a:ln>
         </p:spPr>
       </p:sp>
-      <p:pic>
-        <p:nvPicPr>
-          <p:cNvPr id="27" name="Image 4" descr="/tmp/claude-0/-home-claude/750ff410-f4aa-5276-9360-1e19d018b112/scratchpad/c/assets/s-approve.png">    </p:cNvPr>
-          <p:cNvPicPr>
-            <a:picLocks noChangeAspect="1"/>
-          </p:cNvPicPr>
-          <p:nvPr/>
-        </p:nvPicPr>
-        <p:blipFill>
-          <a:blip r:embed="rId5"/>
-          <a:stretch>
-            <a:fillRect/>
-          </a:stretch>
-        </p:blipFill>
-        <p:spPr>
-          <a:xfrm>
-            <a:off x="9018727" y="2359152"/>
-            <a:ext cx="2642616" cy="2912163"/>
-          </a:xfrm>
-          <a:prstGeom prst="rect">
-            <a:avLst/>
-          </a:prstGeom>
-        </p:spPr>
-      </p:pic>
-      <p:sp>
-        <p:nvSpPr>
-          <p:cNvPr id="28" name="Text 21"/>
-          <p:cNvSpPr txBox="1"/>
-          <p:nvPr/>
-        </p:nvSpPr>
-        <p:spPr>
-          <a:xfrm>
-            <a:off x="8945575" y="5417619"/>
-            <a:ext cx="2788920" cy="292608"/>
+      <p:sp>
+        <p:nvSpPr>
+          <p:cNvPr id="28" name="Text 23"/>
+          <p:cNvSpPr txBox="1"/>
+          <p:nvPr/>
+        </p:nvSpPr>
+        <p:spPr>
+          <a:xfrm>
+            <a:off x="6301588" y="2532888"/>
+            <a:ext cx="2510714" cy="685800"/>
           </a:xfrm>
           <a:prstGeom prst="rect">
             <a:avLst/>
@@ -17927,38 +13568,116 @@
           <a:bodyPr wrap="square" lIns="0" tIns="0" rIns="0" bIns="0" rtlCol="0" anchor="t"/>
           <a:lstStyle/>
           <a:p>
+            <a:pPr algn="ctr" indent="0" marL="0">
+              <a:buNone/>
+            </a:pPr>
+            <a:r>
+              <a:rPr lang="en-US" sz="3600" b="1" dirty="0">
+                <a:solidFill>
+                  <a:srgbClr val="8E2F3C"/>
+                </a:solidFill>
+                <a:latin typeface="IBM Plex Sans Arabic" pitchFamily="34" charset="0"/>
+                <a:ea typeface="IBM Plex Sans Arabic" pitchFamily="34" charset="-122"/>
+                <a:cs typeface="IBM Plex Sans Arabic" pitchFamily="34" charset="-120"/>
+              </a:rPr>
+              <a:t>7</a:t>
+            </a:r>
+            <a:endParaRPr lang="en-US" sz="3600" dirty="0"/>
+          </a:p>
+        </p:txBody>
+      </p:sp>
+      <p:sp>
+        <p:nvSpPr>
+          <p:cNvPr id="29" name="Text 24"/>
+          <p:cNvSpPr txBox="1"/>
+          <p:nvPr/>
+        </p:nvSpPr>
+        <p:spPr>
+          <a:xfrm>
+            <a:off x="6438748" y="3246120"/>
+            <a:ext cx="2236394" cy="365760"/>
+          </a:xfrm>
+          <a:prstGeom prst="rect">
+            <a:avLst/>
+          </a:prstGeom>
+          <a:noFill/>
+          <a:ln/>
+        </p:spPr>
+        <p:txBody>
+          <a:bodyPr wrap="square" lIns="0" tIns="0" rIns="0" bIns="0" rtlCol="0" anchor="t"/>
+          <a:lstStyle/>
+          <a:p>
             <a:pPr rtl="1" algn="ctr" indent="0" marL="0">
               <a:buNone/>
             </a:pPr>
             <a:r>
-              <a:rPr lang="en-US" sz="1200" dirty="0">
-                <a:solidFill>
-                  <a:srgbClr val="7F6C72"/>
-                </a:solidFill>
-                <a:latin typeface="IBM Plex Sans Arabic" pitchFamily="34" charset="0"/>
-                <a:ea typeface="IBM Plex Sans Arabic" pitchFamily="34" charset="-122"/>
-                <a:cs typeface="IBM Plex Sans Arabic" pitchFamily="34" charset="-120"/>
-              </a:rPr>
-              <a:t>نافذة الموافقة والصلاحية المؤقتة</a:t>
-            </a:r>
-            <a:endParaRPr lang="en-US" sz="1200" dirty="0"/>
-          </a:p>
-        </p:txBody>
-      </p:sp>
-      <p:sp>
-        <p:nvSpPr>
-          <p:cNvPr id="29" name="Shape 22"/>
-          <p:cNvSpPr/>
-          <p:nvPr/>
-        </p:nvSpPr>
-        <p:spPr>
-          <a:xfrm>
-            <a:off x="6446520" y="2286000"/>
-            <a:ext cx="2270455" cy="3108960"/>
+              <a:rPr lang="en-US" sz="1400" dirty="0">
+                <a:solidFill>
+                  <a:srgbClr val="21141A"/>
+                </a:solidFill>
+                <a:latin typeface="IBM Plex Sans Arabic" pitchFamily="34" charset="0"/>
+                <a:ea typeface="IBM Plex Sans Arabic" pitchFamily="34" charset="-122"/>
+                <a:cs typeface="IBM Plex Sans Arabic" pitchFamily="34" charset="-120"/>
+              </a:rPr>
+              <a:t>توصيات من الوكيل الذكي</a:t>
+            </a:r>
+            <a:endParaRPr lang="en-US" sz="1400" dirty="0"/>
+          </a:p>
+        </p:txBody>
+      </p:sp>
+      <p:sp>
+        <p:nvSpPr>
+          <p:cNvPr id="30" name="Text 25"/>
+          <p:cNvSpPr txBox="1"/>
+          <p:nvPr/>
+        </p:nvSpPr>
+        <p:spPr>
+          <a:xfrm>
+            <a:off x="5890108" y="2331720"/>
+            <a:ext cx="411480" cy="1463040"/>
+          </a:xfrm>
+          <a:prstGeom prst="rect">
+            <a:avLst/>
+          </a:prstGeom>
+          <a:noFill/>
+          <a:ln/>
+        </p:spPr>
+        <p:txBody>
+          <a:bodyPr wrap="square" lIns="0" tIns="0" rIns="0" bIns="0" rtlCol="0" anchor="ctr"/>
+          <a:lstStyle/>
+          <a:p>
+            <a:pPr algn="ctr" indent="0" marL="0">
+              <a:buNone/>
+            </a:pPr>
+            <a:r>
+              <a:rPr lang="en-US" sz="2200" b="1" dirty="0">
+                <a:solidFill>
+                  <a:srgbClr val="8E2F3C"/>
+                </a:solidFill>
+                <a:latin typeface="IBM Plex Sans Arabic" pitchFamily="34" charset="0"/>
+                <a:ea typeface="IBM Plex Sans Arabic" pitchFamily="34" charset="-122"/>
+                <a:cs typeface="IBM Plex Sans Arabic" pitchFamily="34" charset="-120"/>
+              </a:rPr>
+              <a:t>←</a:t>
+            </a:r>
+            <a:endParaRPr lang="en-US" sz="2200" dirty="0"/>
+          </a:p>
+        </p:txBody>
+      </p:sp>
+      <p:sp>
+        <p:nvSpPr>
+          <p:cNvPr id="31" name="Shape 26"/>
+          <p:cNvSpPr/>
+          <p:nvPr/>
+        </p:nvSpPr>
+        <p:spPr>
+          <a:xfrm>
+            <a:off x="3379394" y="2331720"/>
+            <a:ext cx="2510714" cy="1463040"/>
           </a:xfrm>
           <a:prstGeom prst="roundRect">
             <a:avLst>
-              <a:gd name="adj" fmla="val 6444"/>
+              <a:gd name="adj" fmla="val 10000"/>
             </a:avLst>
           </a:prstGeom>
           <a:solidFill>
@@ -17974,14 +13693,14 @@
       </p:sp>
       <p:sp>
         <p:nvSpPr>
-          <p:cNvPr id="30" name="Text 23"/>
-          <p:cNvSpPr txBox="1"/>
-          <p:nvPr/>
-        </p:nvSpPr>
-        <p:spPr>
-          <a:xfrm>
-            <a:off x="6446520" y="2468880"/>
-            <a:ext cx="2270455" cy="347472"/>
+          <p:cNvPr id="32" name="Text 27"/>
+          <p:cNvSpPr txBox="1"/>
+          <p:nvPr/>
+        </p:nvSpPr>
+        <p:spPr>
+          <a:xfrm>
+            <a:off x="3379394" y="2532888"/>
+            <a:ext cx="2510714" cy="685800"/>
           </a:xfrm>
           <a:prstGeom prst="rect">
             <a:avLst/>
@@ -17993,10 +13712,288 @@
           <a:bodyPr wrap="square" lIns="0" tIns="0" rIns="0" bIns="0" rtlCol="0" anchor="t"/>
           <a:lstStyle/>
           <a:p>
+            <a:pPr algn="ctr" indent="0" marL="0">
+              <a:buNone/>
+            </a:pPr>
+            <a:r>
+              <a:rPr lang="en-US" sz="3600" b="1" dirty="0">
+                <a:solidFill>
+                  <a:srgbClr val="8E2F3C"/>
+                </a:solidFill>
+                <a:latin typeface="IBM Plex Sans Arabic" pitchFamily="34" charset="0"/>
+                <a:ea typeface="IBM Plex Sans Arabic" pitchFamily="34" charset="-122"/>
+                <a:cs typeface="IBM Plex Sans Arabic" pitchFamily="34" charset="-120"/>
+              </a:rPr>
+              <a:t>9,202</a:t>
+            </a:r>
+            <a:endParaRPr lang="en-US" sz="3600" dirty="0"/>
+          </a:p>
+        </p:txBody>
+      </p:sp>
+      <p:sp>
+        <p:nvSpPr>
+          <p:cNvPr id="33" name="Text 28"/>
+          <p:cNvSpPr txBox="1"/>
+          <p:nvPr/>
+        </p:nvSpPr>
+        <p:spPr>
+          <a:xfrm>
+            <a:off x="3516554" y="3246120"/>
+            <a:ext cx="2236394" cy="365760"/>
+          </a:xfrm>
+          <a:prstGeom prst="rect">
+            <a:avLst/>
+          </a:prstGeom>
+          <a:noFill/>
+          <a:ln/>
+        </p:spPr>
+        <p:txBody>
+          <a:bodyPr wrap="square" lIns="0" tIns="0" rIns="0" bIns="0" rtlCol="0" anchor="t"/>
+          <a:lstStyle/>
+          <a:p>
             <a:pPr rtl="1" algn="ctr" indent="0" marL="0">
               <a:buNone/>
             </a:pPr>
             <a:r>
+              <a:rPr lang="en-US" sz="1400" dirty="0">
+                <a:solidFill>
+                  <a:srgbClr val="21141A"/>
+                </a:solidFill>
+                <a:latin typeface="IBM Plex Sans Arabic" pitchFamily="34" charset="0"/>
+                <a:ea typeface="IBM Plex Sans Arabic" pitchFamily="34" charset="-122"/>
+                <a:cs typeface="IBM Plex Sans Arabic" pitchFamily="34" charset="-120"/>
+              </a:rPr>
+              <a:t>ريال توفير شهري (10.8%)</a:t>
+            </a:r>
+            <a:endParaRPr lang="en-US" sz="1400" dirty="0"/>
+          </a:p>
+        </p:txBody>
+      </p:sp>
+      <p:sp>
+        <p:nvSpPr>
+          <p:cNvPr id="34" name="Text 29"/>
+          <p:cNvSpPr txBox="1"/>
+          <p:nvPr/>
+        </p:nvSpPr>
+        <p:spPr>
+          <a:xfrm>
+            <a:off x="2967914" y="2331720"/>
+            <a:ext cx="411480" cy="1463040"/>
+          </a:xfrm>
+          <a:prstGeom prst="rect">
+            <a:avLst/>
+          </a:prstGeom>
+          <a:noFill/>
+          <a:ln/>
+        </p:spPr>
+        <p:txBody>
+          <a:bodyPr wrap="square" lIns="0" tIns="0" rIns="0" bIns="0" rtlCol="0" anchor="ctr"/>
+          <a:lstStyle/>
+          <a:p>
+            <a:pPr algn="ctr" indent="0" marL="0">
+              <a:buNone/>
+            </a:pPr>
+            <a:r>
+              <a:rPr lang="en-US" sz="2200" b="1" dirty="0">
+                <a:solidFill>
+                  <a:srgbClr val="8E2F3C"/>
+                </a:solidFill>
+                <a:latin typeface="IBM Plex Sans Arabic" pitchFamily="34" charset="0"/>
+                <a:ea typeface="IBM Plex Sans Arabic" pitchFamily="34" charset="-122"/>
+                <a:cs typeface="IBM Plex Sans Arabic" pitchFamily="34" charset="-120"/>
+              </a:rPr>
+              <a:t>←</a:t>
+            </a:r>
+            <a:endParaRPr lang="en-US" sz="2200" dirty="0"/>
+          </a:p>
+        </p:txBody>
+      </p:sp>
+      <p:sp>
+        <p:nvSpPr>
+          <p:cNvPr id="35" name="Shape 30"/>
+          <p:cNvSpPr/>
+          <p:nvPr/>
+        </p:nvSpPr>
+        <p:spPr>
+          <a:xfrm>
+            <a:off x="457200" y="2331720"/>
+            <a:ext cx="2510714" cy="1463040"/>
+          </a:xfrm>
+          <a:prstGeom prst="roundRect">
+            <a:avLst>
+              <a:gd name="adj" fmla="val 10000"/>
+            </a:avLst>
+          </a:prstGeom>
+          <a:solidFill>
+            <a:srgbClr val="8E2F3C"/>
+          </a:solidFill>
+          <a:ln/>
+        </p:spPr>
+      </p:sp>
+      <p:sp>
+        <p:nvSpPr>
+          <p:cNvPr id="36" name="Text 31"/>
+          <p:cNvSpPr txBox="1"/>
+          <p:nvPr/>
+        </p:nvSpPr>
+        <p:spPr>
+          <a:xfrm>
+            <a:off x="457200" y="2532888"/>
+            <a:ext cx="2510714" cy="685800"/>
+          </a:xfrm>
+          <a:prstGeom prst="rect">
+            <a:avLst/>
+          </a:prstGeom>
+          <a:noFill/>
+          <a:ln/>
+        </p:spPr>
+        <p:txBody>
+          <a:bodyPr wrap="square" lIns="0" tIns="0" rIns="0" bIns="0" rtlCol="0" anchor="t"/>
+          <a:lstStyle/>
+          <a:p>
+            <a:pPr algn="ctr" indent="0" marL="0">
+              <a:buNone/>
+            </a:pPr>
+            <a:r>
+              <a:rPr lang="en-US" sz="3600" b="1" dirty="0">
+                <a:solidFill>
+                  <a:srgbClr val="FBF6EE"/>
+                </a:solidFill>
+                <a:latin typeface="IBM Plex Sans Arabic" pitchFamily="34" charset="0"/>
+                <a:ea typeface="IBM Plex Sans Arabic" pitchFamily="34" charset="-122"/>
+                <a:cs typeface="IBM Plex Sans Arabic" pitchFamily="34" charset="-120"/>
+              </a:rPr>
+              <a:t>110,424</a:t>
+            </a:r>
+            <a:endParaRPr lang="en-US" sz="3600" dirty="0"/>
+          </a:p>
+        </p:txBody>
+      </p:sp>
+      <p:sp>
+        <p:nvSpPr>
+          <p:cNvPr id="37" name="Text 32"/>
+          <p:cNvSpPr txBox="1"/>
+          <p:nvPr/>
+        </p:nvSpPr>
+        <p:spPr>
+          <a:xfrm>
+            <a:off x="594360" y="3246120"/>
+            <a:ext cx="2236394" cy="365760"/>
+          </a:xfrm>
+          <a:prstGeom prst="rect">
+            <a:avLst/>
+          </a:prstGeom>
+          <a:noFill/>
+          <a:ln/>
+        </p:spPr>
+        <p:txBody>
+          <a:bodyPr wrap="square" lIns="0" tIns="0" rIns="0" bIns="0" rtlCol="0" anchor="t"/>
+          <a:lstStyle/>
+          <a:p>
+            <a:pPr rtl="1" algn="ctr" indent="0" marL="0">
+              <a:buNone/>
+            </a:pPr>
+            <a:r>
+              <a:rPr lang="en-US" sz="1400" dirty="0">
+                <a:solidFill>
+                  <a:srgbClr val="FBF6EE"/>
+                </a:solidFill>
+                <a:latin typeface="IBM Plex Sans Arabic" pitchFamily="34" charset="0"/>
+                <a:ea typeface="IBM Plex Sans Arabic" pitchFamily="34" charset="-122"/>
+                <a:cs typeface="IBM Plex Sans Arabic" pitchFamily="34" charset="-120"/>
+              </a:rPr>
+              <a:t>ريال توفير سنوي</a:t>
+            </a:r>
+            <a:endParaRPr lang="en-US" sz="1400" dirty="0"/>
+          </a:p>
+        </p:txBody>
+      </p:sp>
+      <p:sp>
+        <p:nvSpPr>
+          <p:cNvPr id="38" name="Text 33"/>
+          <p:cNvSpPr txBox="1"/>
+          <p:nvPr/>
+        </p:nvSpPr>
+        <p:spPr>
+          <a:xfrm>
+            <a:off x="457200" y="4069080"/>
+            <a:ext cx="11277295" cy="365760"/>
+          </a:xfrm>
+          <a:prstGeom prst="rect">
+            <a:avLst/>
+          </a:prstGeom>
+          <a:noFill/>
+          <a:ln/>
+        </p:spPr>
+        <p:txBody>
+          <a:bodyPr wrap="square" lIns="0" tIns="0" rIns="0" bIns="0" rtlCol="0" anchor="t"/>
+          <a:lstStyle/>
+          <a:p>
+            <a:pPr rtl="1" algn="r" indent="0" marL="0">
+              <a:buNone/>
+            </a:pPr>
+            <a:r>
+              <a:rPr lang="en-US" sz="1700" b="1" dirty="0">
+                <a:solidFill>
+                  <a:srgbClr val="8E2F3C"/>
+                </a:solidFill>
+                <a:latin typeface="IBM Plex Sans Arabic" pitchFamily="34" charset="0"/>
+                <a:ea typeface="IBM Plex Sans Arabic" pitchFamily="34" charset="-122"/>
+                <a:cs typeface="IBM Plex Sans Arabic" pitchFamily="34" charset="-120"/>
+              </a:rPr>
+              <a:t>كيف نقيس الأثر</a:t>
+            </a:r>
+            <a:endParaRPr lang="en-US" sz="1700" dirty="0"/>
+          </a:p>
+        </p:txBody>
+      </p:sp>
+      <p:sp>
+        <p:nvSpPr>
+          <p:cNvPr id="39" name="Shape 34"/>
+          <p:cNvSpPr/>
+          <p:nvPr/>
+        </p:nvSpPr>
+        <p:spPr>
+          <a:xfrm>
+            <a:off x="8127797" y="4526280"/>
+            <a:ext cx="3606698" cy="960120"/>
+          </a:xfrm>
+          <a:prstGeom prst="roundRect">
+            <a:avLst>
+              <a:gd name="adj" fmla="val 13333"/>
+            </a:avLst>
+          </a:prstGeom>
+          <a:solidFill>
+            <a:srgbClr val="F1E4DF"/>
+          </a:solidFill>
+          <a:ln/>
+        </p:spPr>
+      </p:sp>
+      <p:sp>
+        <p:nvSpPr>
+          <p:cNvPr id="40" name="Text 35"/>
+          <p:cNvSpPr txBox="1"/>
+          <p:nvPr/>
+        </p:nvSpPr>
+        <p:spPr>
+          <a:xfrm>
+            <a:off x="8356397" y="4663440"/>
+            <a:ext cx="3149498" cy="329184"/>
+          </a:xfrm>
+          <a:prstGeom prst="rect">
+            <a:avLst/>
+          </a:prstGeom>
+          <a:noFill/>
+          <a:ln/>
+        </p:spPr>
+        <p:txBody>
+          <a:bodyPr wrap="square" lIns="0" tIns="0" rIns="0" bIns="0" rtlCol="0" anchor="t"/>
+          <a:lstStyle/>
+          <a:p>
+            <a:pPr rtl="1" algn="r" indent="0" marL="0">
+              <a:buNone/>
+            </a:pPr>
+            <a:r>
               <a:rPr lang="en-US" sz="1500" b="1" dirty="0">
                 <a:solidFill>
                   <a:srgbClr val="21141A"/>
@@ -18005,48 +14002,22 @@
                 <a:ea typeface="IBM Plex Sans Arabic" pitchFamily="34" charset="-122"/>
                 <a:cs typeface="IBM Plex Sans Arabic" pitchFamily="34" charset="-120"/>
               </a:rPr>
-              <a:t>جرّب العرض الحي</a:t>
+              <a:t>الريالات الموفرة فعلياً</a:t>
             </a:r>
             <a:endParaRPr lang="en-US" sz="1500" dirty="0"/>
           </a:p>
         </p:txBody>
       </p:sp>
-      <p:pic>
-        <p:nvPicPr>
-          <p:cNvPr id="31" name="Image 5" descr="/tmp/claude-0/-home-claude/750ff410-f4aa-5276-9360-1e19d018b112/scratchpad/c/assets/qr.png">    </p:cNvPr>
-          <p:cNvPicPr>
-            <a:picLocks noChangeAspect="1"/>
-          </p:cNvPicPr>
-          <p:nvPr/>
-        </p:nvPicPr>
-        <p:blipFill>
-          <a:blip r:embed="rId6"/>
-          <a:stretch>
-            <a:fillRect/>
-          </a:stretch>
-        </p:blipFill>
-        <p:spPr>
-          <a:xfrm>
-            <a:off x="6675120" y="2880360"/>
-            <a:ext cx="1813255" cy="1813255"/>
-          </a:xfrm>
-          <a:prstGeom prst="rect">
-            <a:avLst/>
-          </a:prstGeom>
-        </p:spPr>
-      </p:pic>
-      <p:sp>
-        <p:nvSpPr>
-          <p:cNvPr id="32" name="Text 24">
-            <a:hlinkClick r:id="rId7" tooltip=""/>
-          </p:cNvPr>
-          <p:cNvSpPr txBox="1"/>
-          <p:nvPr/>
-        </p:nvSpPr>
-        <p:spPr>
-          <a:xfrm>
-            <a:off x="6446520" y="4739335"/>
-            <a:ext cx="2270455" cy="292608"/>
+      <p:sp>
+        <p:nvSpPr>
+          <p:cNvPr id="41" name="Text 36"/>
+          <p:cNvSpPr txBox="1"/>
+          <p:nvPr/>
+        </p:nvSpPr>
+        <p:spPr>
+          <a:xfrm>
+            <a:off x="8356397" y="5029200"/>
+            <a:ext cx="3149498" cy="320040"/>
           </a:xfrm>
           <a:prstGeom prst="rect">
             <a:avLst/>
@@ -18058,41 +14029,234 @@
           <a:bodyPr wrap="square" lIns="0" tIns="0" rIns="0" bIns="0" rtlCol="0" anchor="t"/>
           <a:lstStyle/>
           <a:p>
-            <a:pPr algn="ctr" indent="0" marL="0">
-              <a:buNone/>
-            </a:pPr>
-            <a:r>
-              <a:rPr lang="en-US" sz="1100" b="1" u="sng" dirty="0">
-                <a:solidFill>
-                  <a:srgbClr val="8E2F3C"/>
-                </a:solidFill>
-                <a:latin typeface="IBM Plex Sans Arabic" pitchFamily="34" charset="0"/>
-                <a:ea typeface="IBM Plex Sans Arabic" pitchFamily="34" charset="-122"/>
-                <a:cs typeface="IBM Plex Sans Arabic" pitchFamily="34" charset="-120"/>
-                <a:hlinkClick r:id="rId7" invalidUrl="" action="" tgtFrame="" tooltip="" history="1" highlightClick="0" endSnd="0">
-                  <a:extLst>
-                    <a:ext uri="{A12FA001-AC4F-418D-AE19-62706E023703}">
-                      <ahyp:hlinkClr xmlns:ahyp="http://schemas.microsoft.com/office/drawing/2018/hyperlinkcolor" val="tx"/>
-                    </a:ext>
-                  </a:extLst>
-                </a:hlinkClick>
-              </a:rPr>
-              <a:t>cloudtrim-sa.vercel.app</a:t>
-            </a:r>
-            <a:endParaRPr lang="en-US" sz="1100" dirty="0"/>
-          </a:p>
-        </p:txBody>
-      </p:sp>
-      <p:sp>
-        <p:nvSpPr>
-          <p:cNvPr id="33" name="Text 25"/>
-          <p:cNvSpPr txBox="1"/>
-          <p:nvPr/>
-        </p:nvSpPr>
-        <p:spPr>
-          <a:xfrm>
-            <a:off x="457200" y="5760720"/>
-            <a:ext cx="11277295" cy="365760"/>
+            <a:pPr rtl="1" algn="r" indent="0" marL="0">
+              <a:buNone/>
+            </a:pPr>
+            <a:r>
+              <a:rPr lang="en-US" sz="1250" dirty="0">
+                <a:solidFill>
+                  <a:srgbClr val="7F6C72"/>
+                </a:solidFill>
+                <a:latin typeface="IBM Plex Sans Arabic" pitchFamily="34" charset="0"/>
+                <a:ea typeface="IBM Plex Sans Arabic" pitchFamily="34" charset="-122"/>
+                <a:cs typeface="IBM Plex Sans Arabic" pitchFamily="34" charset="-120"/>
+              </a:rPr>
+              <a:t>من فاتورة المزود نفسها قبل وبعد</a:t>
+            </a:r>
+            <a:endParaRPr lang="en-US" sz="1250" dirty="0"/>
+          </a:p>
+        </p:txBody>
+      </p:sp>
+      <p:sp>
+        <p:nvSpPr>
+          <p:cNvPr id="42" name="Shape 37"/>
+          <p:cNvSpPr/>
+          <p:nvPr/>
+        </p:nvSpPr>
+        <p:spPr>
+          <a:xfrm>
+            <a:off x="4292498" y="4526280"/>
+            <a:ext cx="3606698" cy="960120"/>
+          </a:xfrm>
+          <a:prstGeom prst="roundRect">
+            <a:avLst>
+              <a:gd name="adj" fmla="val 13333"/>
+            </a:avLst>
+          </a:prstGeom>
+          <a:solidFill>
+            <a:srgbClr val="F1E4DF"/>
+          </a:solidFill>
+          <a:ln/>
+        </p:spPr>
+      </p:sp>
+      <p:sp>
+        <p:nvSpPr>
+          <p:cNvPr id="43" name="Text 38"/>
+          <p:cNvSpPr txBox="1"/>
+          <p:nvPr/>
+        </p:nvSpPr>
+        <p:spPr>
+          <a:xfrm>
+            <a:off x="4521098" y="4663440"/>
+            <a:ext cx="3149498" cy="329184"/>
+          </a:xfrm>
+          <a:prstGeom prst="rect">
+            <a:avLst/>
+          </a:prstGeom>
+          <a:noFill/>
+          <a:ln/>
+        </p:spPr>
+        <p:txBody>
+          <a:bodyPr wrap="square" lIns="0" tIns="0" rIns="0" bIns="0" rtlCol="0" anchor="t"/>
+          <a:lstStyle/>
+          <a:p>
+            <a:pPr rtl="1" algn="r" indent="0" marL="0">
+              <a:buNone/>
+            </a:pPr>
+            <a:r>
+              <a:rPr lang="en-US" sz="1500" b="1" dirty="0">
+                <a:solidFill>
+                  <a:srgbClr val="21141A"/>
+                </a:solidFill>
+                <a:latin typeface="IBM Plex Sans Arabic" pitchFamily="34" charset="0"/>
+                <a:ea typeface="IBM Plex Sans Arabic" pitchFamily="34" charset="-122"/>
+                <a:cs typeface="IBM Plex Sans Arabic" pitchFamily="34" charset="-120"/>
+              </a:rPr>
+              <a:t>نسبة التوصيات المنفذة</a:t>
+            </a:r>
+            <a:endParaRPr lang="en-US" sz="1500" dirty="0"/>
+          </a:p>
+        </p:txBody>
+      </p:sp>
+      <p:sp>
+        <p:nvSpPr>
+          <p:cNvPr id="44" name="Text 39"/>
+          <p:cNvSpPr txBox="1"/>
+          <p:nvPr/>
+        </p:nvSpPr>
+        <p:spPr>
+          <a:xfrm>
+            <a:off x="4521098" y="5029200"/>
+            <a:ext cx="3149498" cy="320040"/>
+          </a:xfrm>
+          <a:prstGeom prst="rect">
+            <a:avLst/>
+          </a:prstGeom>
+          <a:noFill/>
+          <a:ln/>
+        </p:spPr>
+        <p:txBody>
+          <a:bodyPr wrap="square" lIns="0" tIns="0" rIns="0" bIns="0" rtlCol="0" anchor="t"/>
+          <a:lstStyle/>
+          <a:p>
+            <a:pPr rtl="1" algn="r" indent="0" marL="0">
+              <a:buNone/>
+            </a:pPr>
+            <a:r>
+              <a:rPr lang="en-US" sz="1250" dirty="0">
+                <a:solidFill>
+                  <a:srgbClr val="7F6C72"/>
+                </a:solidFill>
+                <a:latin typeface="IBM Plex Sans Arabic" pitchFamily="34" charset="0"/>
+                <a:ea typeface="IBM Plex Sans Arabic" pitchFamily="34" charset="-122"/>
+                <a:cs typeface="IBM Plex Sans Arabic" pitchFamily="34" charset="-120"/>
+              </a:rPr>
+              <a:t>كم توصية تحولت إلى توفير حقيقي</a:t>
+            </a:r>
+            <a:endParaRPr lang="en-US" sz="1250" dirty="0"/>
+          </a:p>
+        </p:txBody>
+      </p:sp>
+      <p:sp>
+        <p:nvSpPr>
+          <p:cNvPr id="45" name="Shape 40"/>
+          <p:cNvSpPr/>
+          <p:nvPr/>
+        </p:nvSpPr>
+        <p:spPr>
+          <a:xfrm>
+            <a:off x="457200" y="4526280"/>
+            <a:ext cx="3606698" cy="960120"/>
+          </a:xfrm>
+          <a:prstGeom prst="roundRect">
+            <a:avLst>
+              <a:gd name="adj" fmla="val 13333"/>
+            </a:avLst>
+          </a:prstGeom>
+          <a:solidFill>
+            <a:srgbClr val="F1E4DF"/>
+          </a:solidFill>
+          <a:ln/>
+        </p:spPr>
+      </p:sp>
+      <p:sp>
+        <p:nvSpPr>
+          <p:cNvPr id="46" name="Text 41"/>
+          <p:cNvSpPr txBox="1"/>
+          <p:nvPr/>
+        </p:nvSpPr>
+        <p:spPr>
+          <a:xfrm>
+            <a:off x="685800" y="4663440"/>
+            <a:ext cx="3149498" cy="329184"/>
+          </a:xfrm>
+          <a:prstGeom prst="rect">
+            <a:avLst/>
+          </a:prstGeom>
+          <a:noFill/>
+          <a:ln/>
+        </p:spPr>
+        <p:txBody>
+          <a:bodyPr wrap="square" lIns="0" tIns="0" rIns="0" bIns="0" rtlCol="0" anchor="t"/>
+          <a:lstStyle/>
+          <a:p>
+            <a:pPr rtl="1" algn="r" indent="0" marL="0">
+              <a:buNone/>
+            </a:pPr>
+            <a:r>
+              <a:rPr lang="en-US" sz="1500" b="1" dirty="0">
+                <a:solidFill>
+                  <a:srgbClr val="21141A"/>
+                </a:solidFill>
+                <a:latin typeface="IBM Plex Sans Arabic" pitchFamily="34" charset="0"/>
+                <a:ea typeface="IBM Plex Sans Arabic" pitchFamily="34" charset="-122"/>
+                <a:cs typeface="IBM Plex Sans Arabic" pitchFamily="34" charset="-120"/>
+              </a:rPr>
+              <a:t>زمن إزالة الهدر</a:t>
+            </a:r>
+            <a:endParaRPr lang="en-US" sz="1500" dirty="0"/>
+          </a:p>
+        </p:txBody>
+      </p:sp>
+      <p:sp>
+        <p:nvSpPr>
+          <p:cNvPr id="47" name="Text 42"/>
+          <p:cNvSpPr txBox="1"/>
+          <p:nvPr/>
+        </p:nvSpPr>
+        <p:spPr>
+          <a:xfrm>
+            <a:off x="685800" y="5029200"/>
+            <a:ext cx="3149498" cy="320040"/>
+          </a:xfrm>
+          <a:prstGeom prst="rect">
+            <a:avLst/>
+          </a:prstGeom>
+          <a:noFill/>
+          <a:ln/>
+        </p:spPr>
+        <p:txBody>
+          <a:bodyPr wrap="square" lIns="0" tIns="0" rIns="0" bIns="0" rtlCol="0" anchor="t"/>
+          <a:lstStyle/>
+          <a:p>
+            <a:pPr rtl="1" algn="r" indent="0" marL="0">
+              <a:buNone/>
+            </a:pPr>
+            <a:r>
+              <a:rPr lang="en-US" sz="1250" dirty="0">
+                <a:solidFill>
+                  <a:srgbClr val="7F6C72"/>
+                </a:solidFill>
+                <a:latin typeface="IBM Plex Sans Arabic" pitchFamily="34" charset="0"/>
+                <a:ea typeface="IBM Plex Sans Arabic" pitchFamily="34" charset="-122"/>
+                <a:cs typeface="IBM Plex Sans Arabic" pitchFamily="34" charset="-120"/>
+              </a:rPr>
+              <a:t>من أسابيع إلى دقائق بعد التنبيه</a:t>
+            </a:r>
+            <a:endParaRPr lang="en-US" sz="1250" dirty="0"/>
+          </a:p>
+        </p:txBody>
+      </p:sp>
+      <p:sp>
+        <p:nvSpPr>
+          <p:cNvPr id="48" name="Text 43"/>
+          <p:cNvSpPr txBox="1"/>
+          <p:nvPr/>
+        </p:nvSpPr>
+        <p:spPr>
+          <a:xfrm>
+            <a:off x="457200" y="5669280"/>
+            <a:ext cx="11277295" cy="457200"/>
           </a:xfrm>
           <a:prstGeom prst="rect">
             <a:avLst/>
@@ -18104,21 +14268,21 @@
           <a:bodyPr wrap="square" lIns="0" tIns="0" rIns="0" bIns="0" rtlCol="0" anchor="ctr"/>
           <a:lstStyle/>
           <a:p>
-            <a:pPr rtl="1" algn="ctr" indent="0" marL="0">
-              <a:buNone/>
-            </a:pPr>
-            <a:r>
-              <a:rPr lang="en-US" sz="1300" dirty="0">
-                <a:solidFill>
-                  <a:srgbClr val="21141A"/>
-                </a:solidFill>
-                <a:latin typeface="IBM Plex Sans Arabic" pitchFamily="34" charset="0"/>
-                <a:ea typeface="IBM Plex Sans Arabic" pitchFamily="34" charset="-122"/>
-                <a:cs typeface="IBM Plex Sans Arabic" pitchFamily="34" charset="-120"/>
-              </a:rPr>
-              <a:t>العرض على بيانات شركة افتراضية، والصلاحيات المعروضة هي صلاحيات AWS الحقيقية للقراءة.</a:t>
-            </a:r>
-            <a:endParaRPr lang="en-US" sz="1300" dirty="0"/>
+            <a:pPr rtl="1" algn="r" indent="0" marL="0">
+              <a:buNone/>
+            </a:pPr>
+            <a:r>
+              <a:rPr lang="en-US" sz="1250" dirty="0">
+                <a:solidFill>
+                  <a:srgbClr val="7F6C72"/>
+                </a:solidFill>
+                <a:latin typeface="IBM Plex Sans Arabic" pitchFamily="34" charset="0"/>
+                <a:ea typeface="IBM Plex Sans Arabic" pitchFamily="34" charset="-122"/>
+                <a:cs typeface="IBM Plex Sans Arabic" pitchFamily="34" charset="-120"/>
+              </a:rPr>
+              <a:t>المال الموفر يبقى في الشركة، ودعم السحب المحلية يخدم سيادة البيانات. الأرقام من النموذج الأولي على بيانات شركة افتراضية.</a:t>
+            </a:r>
+            <a:endParaRPr lang="en-US" sz="1250" dirty="0"/>
           </a:p>
         </p:txBody>
       </p:sp>
@@ -18489,8 +14653,8 @@
         </p:nvSpPr>
         <p:spPr>
           <a:xfrm>
-            <a:off x="8918143" y="987552"/>
-            <a:ext cx="2816352" cy="384048"/>
+            <a:off x="9759391" y="987552"/>
+            <a:ext cx="1975104" cy="384048"/>
           </a:xfrm>
           <a:prstGeom prst="roundRect">
             <a:avLst>
@@ -18511,8 +14675,8 @@
         </p:nvSpPr>
         <p:spPr>
           <a:xfrm>
-            <a:off x="8918143" y="987552"/>
-            <a:ext cx="2816352" cy="384048"/>
+            <a:off x="9759391" y="987552"/>
+            <a:ext cx="1975104" cy="384048"/>
           </a:xfrm>
           <a:prstGeom prst="rect">
             <a:avLst/>
@@ -18536,7 +14700,7 @@
                 <a:ea typeface="IBM Plex Sans Arabic" pitchFamily="34" charset="-122"/>
                 <a:cs typeface="IBM Plex Sans Arabic" pitchFamily="34" charset="-120"/>
               </a:rPr>
-              <a:t>الأثر والقيمة المتوقعة</a:t>
+              <a:t>الخطوة التالية</a:t>
             </a:r>
             <a:endParaRPr lang="en-US" sz="1300" dirty="0"/>
           </a:p>
@@ -18669,7 +14833,7 @@
               <a:buNone/>
             </a:pPr>
             <a:r>
-              <a:rPr lang="en-US" sz="2700" b="1" dirty="0">
+              <a:rPr lang="en-US" sz="3000" b="1" dirty="0">
                 <a:solidFill>
                   <a:srgbClr val="21141A"/>
                 </a:solidFill>
@@ -18677,26 +14841,65 @@
                 <a:ea typeface="IBM Plex Sans Arabic" pitchFamily="34" charset="-122"/>
                 <a:cs typeface="IBM Plex Sans Arabic" pitchFamily="34" charset="-120"/>
               </a:rPr>
-              <a:t>مثال محسوب: نحو 110 آلاف ريال سنوياً لشركة من 120 موظفاً</a:t>
-            </a:r>
-            <a:endParaRPr lang="en-US" sz="2700" dirty="0"/>
-          </a:p>
-        </p:txBody>
-      </p:sp>
-      <p:sp>
-        <p:nvSpPr>
-          <p:cNvPr id="23" name="Shape 18"/>
-          <p:cNvSpPr/>
-          <p:nvPr/>
-        </p:nvSpPr>
-        <p:spPr>
-          <a:xfrm>
-            <a:off x="9223781" y="2331720"/>
-            <a:ext cx="2510714" cy="1463040"/>
+              <a:t>كيف نطوّر الحل، وما الدعم الذي نحتاجه</a:t>
+            </a:r>
+            <a:endParaRPr lang="en-US" sz="3000" dirty="0"/>
+          </a:p>
+        </p:txBody>
+      </p:sp>
+      <p:sp>
+        <p:nvSpPr>
+          <p:cNvPr id="23" name="Text 18"/>
+          <p:cNvSpPr txBox="1"/>
+          <p:nvPr/>
+        </p:nvSpPr>
+        <p:spPr>
+          <a:xfrm>
+            <a:off x="6035040" y="2286000"/>
+            <a:ext cx="5699455" cy="365760"/>
+          </a:xfrm>
+          <a:prstGeom prst="rect">
+            <a:avLst/>
+          </a:prstGeom>
+          <a:noFill/>
+          <a:ln/>
+        </p:spPr>
+        <p:txBody>
+          <a:bodyPr wrap="square" lIns="0" tIns="0" rIns="0" bIns="0" rtlCol="0" anchor="t"/>
+          <a:lstStyle/>
+          <a:p>
+            <a:pPr rtl="1" algn="r" indent="0" marL="0">
+              <a:buNone/>
+            </a:pPr>
+            <a:r>
+              <a:rPr lang="en-US" sz="1700" b="1" dirty="0">
+                <a:solidFill>
+                  <a:srgbClr val="8E2F3C"/>
+                </a:solidFill>
+                <a:latin typeface="IBM Plex Sans Arabic" pitchFamily="34" charset="0"/>
+                <a:ea typeface="IBM Plex Sans Arabic" pitchFamily="34" charset="-122"/>
+                <a:cs typeface="IBM Plex Sans Arabic" pitchFamily="34" charset="-120"/>
+              </a:rPr>
+              <a:t>التطوير المستقبلي</a:t>
+            </a:r>
+            <a:endParaRPr lang="en-US" sz="1700" dirty="0"/>
+          </a:p>
+        </p:txBody>
+      </p:sp>
+      <p:sp>
+        <p:nvSpPr>
+          <p:cNvPr id="24" name="Shape 19"/>
+          <p:cNvSpPr/>
+          <p:nvPr/>
+        </p:nvSpPr>
+        <p:spPr>
+          <a:xfrm>
+            <a:off x="6035040" y="2743200"/>
+            <a:ext cx="5699455" cy="932688"/>
           </a:xfrm>
           <a:prstGeom prst="roundRect">
             <a:avLst>
-              <a:gd name="adj" fmla="val 10000"/>
+              <a:gd name="adj" fmla="val 13725"/>
             </a:avLst>
           </a:prstGeom>
           <a:solidFill>
@@ -18712,14 +14915,14 @@
       </p:sp>
       <p:sp>
         <p:nvSpPr>
-          <p:cNvPr id="24" name="Text 19"/>
-          <p:cNvSpPr txBox="1"/>
-          <p:nvPr/>
-        </p:nvSpPr>
-        <p:spPr>
-          <a:xfrm>
-            <a:off x="9223781" y="2532888"/>
-            <a:ext cx="2510714" cy="685800"/>
+          <p:cNvPr id="25" name="Text 20"/>
+          <p:cNvSpPr txBox="1"/>
+          <p:nvPr/>
+        </p:nvSpPr>
+        <p:spPr>
+          <a:xfrm>
+            <a:off x="6309360" y="2862072"/>
+            <a:ext cx="5150815" cy="329184"/>
           </a:xfrm>
           <a:prstGeom prst="rect">
             <a:avLst/>
@@ -18731,34 +14934,34 @@
           <a:bodyPr wrap="square" lIns="0" tIns="0" rIns="0" bIns="0" rtlCol="0" anchor="t"/>
           <a:lstStyle/>
           <a:p>
-            <a:pPr algn="ctr" indent="0" marL="0">
-              <a:buNone/>
-            </a:pPr>
-            <a:r>
-              <a:rPr lang="en-US" sz="3600" b="1" dirty="0">
-                <a:solidFill>
-                  <a:srgbClr val="8E2F3C"/>
-                </a:solidFill>
-                <a:latin typeface="IBM Plex Sans Arabic" pitchFamily="34" charset="0"/>
-                <a:ea typeface="IBM Plex Sans Arabic" pitchFamily="34" charset="-122"/>
-                <a:cs typeface="IBM Plex Sans Arabic" pitchFamily="34" charset="-120"/>
-              </a:rPr>
-              <a:t>85,400</a:t>
-            </a:r>
-            <a:endParaRPr lang="en-US" sz="3600" dirty="0"/>
-          </a:p>
-        </p:txBody>
-      </p:sp>
-      <p:sp>
-        <p:nvSpPr>
-          <p:cNvPr id="25" name="Text 20"/>
-          <p:cNvSpPr txBox="1"/>
-          <p:nvPr/>
-        </p:nvSpPr>
-        <p:spPr>
-          <a:xfrm>
-            <a:off x="9360941" y="3246120"/>
-            <a:ext cx="2236394" cy="365760"/>
+            <a:pPr rtl="1" algn="r" indent="0" marL="0">
+              <a:buNone/>
+            </a:pPr>
+            <a:r>
+              <a:rPr lang="en-US" sz="1600" b="1" dirty="0">
+                <a:solidFill>
+                  <a:srgbClr val="21141A"/>
+                </a:solidFill>
+                <a:latin typeface="IBM Plex Sans Arabic" pitchFamily="34" charset="0"/>
+                <a:ea typeface="IBM Plex Sans Arabic" pitchFamily="34" charset="-122"/>
+                <a:cs typeface="IBM Plex Sans Arabic" pitchFamily="34" charset="-120"/>
+              </a:rPr>
+              <a:t>مقارنة السحابات</a:t>
+            </a:r>
+            <a:endParaRPr lang="en-US" sz="1600" dirty="0"/>
+          </a:p>
+        </p:txBody>
+      </p:sp>
+      <p:sp>
+        <p:nvSpPr>
+          <p:cNvPr id="26" name="Text 21"/>
+          <p:cNvSpPr txBox="1"/>
+          <p:nvPr/>
+        </p:nvSpPr>
+        <p:spPr>
+          <a:xfrm>
+            <a:off x="6309360" y="3200400"/>
+            <a:ext cx="5150815" cy="411480"/>
           </a:xfrm>
           <a:prstGeom prst="rect">
             <a:avLst/>
@@ -18770,60 +14973,21 @@
           <a:bodyPr wrap="square" lIns="0" tIns="0" rIns="0" bIns="0" rtlCol="0" anchor="t"/>
           <a:lstStyle/>
           <a:p>
-            <a:pPr rtl="1" algn="ctr" indent="0" marL="0">
-              <a:buNone/>
-            </a:pPr>
-            <a:r>
-              <a:rPr lang="en-US" sz="1400" dirty="0">
-                <a:solidFill>
-                  <a:srgbClr val="21141A"/>
-                </a:solidFill>
-                <a:latin typeface="IBM Plex Sans Arabic" pitchFamily="34" charset="0"/>
-                <a:ea typeface="IBM Plex Sans Arabic" pitchFamily="34" charset="-122"/>
-                <a:cs typeface="IBM Plex Sans Arabic" pitchFamily="34" charset="-120"/>
-              </a:rPr>
-              <a:t>ريال فاتورة شهرية</a:t>
-            </a:r>
-            <a:endParaRPr lang="en-US" sz="1400" dirty="0"/>
-          </a:p>
-        </p:txBody>
-      </p:sp>
-      <p:sp>
-        <p:nvSpPr>
-          <p:cNvPr id="26" name="Text 21"/>
-          <p:cNvSpPr txBox="1"/>
-          <p:nvPr/>
-        </p:nvSpPr>
-        <p:spPr>
-          <a:xfrm>
-            <a:off x="8812301" y="2331720"/>
-            <a:ext cx="411480" cy="1463040"/>
-          </a:xfrm>
-          <a:prstGeom prst="rect">
-            <a:avLst/>
-          </a:prstGeom>
-          <a:noFill/>
-          <a:ln/>
-        </p:spPr>
-        <p:txBody>
-          <a:bodyPr wrap="square" lIns="0" tIns="0" rIns="0" bIns="0" rtlCol="0" anchor="ctr"/>
-          <a:lstStyle/>
-          <a:p>
-            <a:pPr algn="ctr" indent="0" marL="0">
-              <a:buNone/>
-            </a:pPr>
-            <a:r>
-              <a:rPr lang="en-US" sz="2200" b="1" dirty="0">
-                <a:solidFill>
-                  <a:srgbClr val="8E2F3C"/>
-                </a:solidFill>
-                <a:latin typeface="IBM Plex Sans Arabic" pitchFamily="34" charset="0"/>
-                <a:ea typeface="IBM Plex Sans Arabic" pitchFamily="34" charset="-122"/>
-                <a:cs typeface="IBM Plex Sans Arabic" pitchFamily="34" charset="-120"/>
-              </a:rPr>
-              <a:t>←</a:t>
-            </a:r>
-            <a:endParaRPr lang="en-US" sz="2200" dirty="0"/>
+            <a:pPr rtl="1" algn="r" indent="0" marL="0">
+              <a:buNone/>
+            </a:pPr>
+            <a:r>
+              <a:rPr lang="en-US" sz="1250" dirty="0">
+                <a:solidFill>
+                  <a:srgbClr val="7F6C72"/>
+                </a:solidFill>
+                <a:latin typeface="IBM Plex Sans Arabic" pitchFamily="34" charset="0"/>
+                <a:ea typeface="IBM Plex Sans Arabic" pitchFamily="34" charset="-122"/>
+                <a:cs typeface="IBM Plex Sans Arabic" pitchFamily="34" charset="-120"/>
+              </a:rPr>
+              <a:t>مقارنة التكاليف بين المزودين واقتراح الانتقال للسحابة الأوفر بناءً على التحليل المالي.</a:t>
+            </a:r>
+            <a:endParaRPr lang="en-US" sz="1250" dirty="0"/>
           </a:p>
         </p:txBody>
       </p:sp>
@@ -18835,12 +14999,12 @@
         </p:nvSpPr>
         <p:spPr>
           <a:xfrm>
-            <a:off x="6301588" y="2331720"/>
-            <a:ext cx="2510714" cy="1463040"/>
+            <a:off x="6035040" y="3822192"/>
+            <a:ext cx="5699455" cy="932688"/>
           </a:xfrm>
           <a:prstGeom prst="roundRect">
             <a:avLst>
-              <a:gd name="adj" fmla="val 10000"/>
+              <a:gd name="adj" fmla="val 13725"/>
             </a:avLst>
           </a:prstGeom>
           <a:solidFill>
@@ -18862,8 +15026,8 @@
         </p:nvSpPr>
         <p:spPr>
           <a:xfrm>
-            <a:off x="6301588" y="2532888"/>
-            <a:ext cx="2510714" cy="685800"/>
+            <a:off x="6309360" y="3941064"/>
+            <a:ext cx="5150815" cy="329184"/>
           </a:xfrm>
           <a:prstGeom prst="rect">
             <a:avLst/>
@@ -18875,21 +15039,21 @@
           <a:bodyPr wrap="square" lIns="0" tIns="0" rIns="0" bIns="0" rtlCol="0" anchor="t"/>
           <a:lstStyle/>
           <a:p>
-            <a:pPr algn="ctr" indent="0" marL="0">
-              <a:buNone/>
-            </a:pPr>
-            <a:r>
-              <a:rPr lang="en-US" sz="3600" b="1" dirty="0">
-                <a:solidFill>
-                  <a:srgbClr val="8E2F3C"/>
-                </a:solidFill>
-                <a:latin typeface="IBM Plex Sans Arabic" pitchFamily="34" charset="0"/>
-                <a:ea typeface="IBM Plex Sans Arabic" pitchFamily="34" charset="-122"/>
-                <a:cs typeface="IBM Plex Sans Arabic" pitchFamily="34" charset="-120"/>
-              </a:rPr>
-              <a:t>7</a:t>
-            </a:r>
-            <a:endParaRPr lang="en-US" sz="3600" dirty="0"/>
+            <a:pPr rtl="1" algn="r" indent="0" marL="0">
+              <a:buNone/>
+            </a:pPr>
+            <a:r>
+              <a:rPr lang="en-US" sz="1600" b="1" dirty="0">
+                <a:solidFill>
+                  <a:srgbClr val="21141A"/>
+                </a:solidFill>
+                <a:latin typeface="IBM Plex Sans Arabic" pitchFamily="34" charset="0"/>
+                <a:ea typeface="IBM Plex Sans Arabic" pitchFamily="34" charset="-122"/>
+                <a:cs typeface="IBM Plex Sans Arabic" pitchFamily="34" charset="-120"/>
+              </a:rPr>
+              <a:t>البنية الهجينة</a:t>
+            </a:r>
+            <a:endParaRPr lang="en-US" sz="1600" dirty="0"/>
           </a:p>
         </p:txBody>
       </p:sp>
@@ -18901,8 +15065,8 @@
         </p:nvSpPr>
         <p:spPr>
           <a:xfrm>
-            <a:off x="6438748" y="3246120"/>
-            <a:ext cx="2236394" cy="365760"/>
+            <a:off x="6309360" y="4279392"/>
+            <a:ext cx="5150815" cy="411480"/>
           </a:xfrm>
           <a:prstGeom prst="rect">
             <a:avLst/>
@@ -18914,77 +15078,38 @@
           <a:bodyPr wrap="square" lIns="0" tIns="0" rIns="0" bIns="0" rtlCol="0" anchor="t"/>
           <a:lstStyle/>
           <a:p>
-            <a:pPr rtl="1" algn="ctr" indent="0" marL="0">
-              <a:buNone/>
-            </a:pPr>
-            <a:r>
-              <a:rPr lang="en-US" sz="1400" dirty="0">
-                <a:solidFill>
-                  <a:srgbClr val="21141A"/>
-                </a:solidFill>
-                <a:latin typeface="IBM Plex Sans Arabic" pitchFamily="34" charset="0"/>
-                <a:ea typeface="IBM Plex Sans Arabic" pitchFamily="34" charset="-122"/>
-                <a:cs typeface="IBM Plex Sans Arabic" pitchFamily="34" charset="-120"/>
-              </a:rPr>
-              <a:t>توصيات من الوكيل الذكي</a:t>
-            </a:r>
-            <a:endParaRPr lang="en-US" sz="1400" dirty="0"/>
-          </a:p>
-        </p:txBody>
-      </p:sp>
-      <p:sp>
-        <p:nvSpPr>
-          <p:cNvPr id="30" name="Text 25"/>
-          <p:cNvSpPr txBox="1"/>
-          <p:nvPr/>
-        </p:nvSpPr>
-        <p:spPr>
-          <a:xfrm>
-            <a:off x="5890108" y="2331720"/>
-            <a:ext cx="411480" cy="1463040"/>
-          </a:xfrm>
-          <a:prstGeom prst="rect">
-            <a:avLst/>
-          </a:prstGeom>
-          <a:noFill/>
-          <a:ln/>
-        </p:spPr>
-        <p:txBody>
-          <a:bodyPr wrap="square" lIns="0" tIns="0" rIns="0" bIns="0" rtlCol="0" anchor="ctr"/>
-          <a:lstStyle/>
-          <a:p>
-            <a:pPr algn="ctr" indent="0" marL="0">
-              <a:buNone/>
-            </a:pPr>
-            <a:r>
-              <a:rPr lang="en-US" sz="2200" b="1" dirty="0">
-                <a:solidFill>
-                  <a:srgbClr val="8E2F3C"/>
-                </a:solidFill>
-                <a:latin typeface="IBM Plex Sans Arabic" pitchFamily="34" charset="0"/>
-                <a:ea typeface="IBM Plex Sans Arabic" pitchFamily="34" charset="-122"/>
-                <a:cs typeface="IBM Plex Sans Arabic" pitchFamily="34" charset="-120"/>
-              </a:rPr>
-              <a:t>←</a:t>
-            </a:r>
-            <a:endParaRPr lang="en-US" sz="2200" dirty="0"/>
-          </a:p>
-        </p:txBody>
-      </p:sp>
-      <p:sp>
-        <p:nvSpPr>
-          <p:cNvPr id="31" name="Shape 26"/>
-          <p:cNvSpPr/>
-          <p:nvPr/>
-        </p:nvSpPr>
-        <p:spPr>
-          <a:xfrm>
-            <a:off x="3379394" y="2331720"/>
-            <a:ext cx="2510714" cy="1463040"/>
+            <a:pPr rtl="1" algn="r" indent="0" marL="0">
+              <a:buNone/>
+            </a:pPr>
+            <a:r>
+              <a:rPr lang="en-US" sz="1250" dirty="0">
+                <a:solidFill>
+                  <a:srgbClr val="7F6C72"/>
+                </a:solidFill>
+                <a:latin typeface="IBM Plex Sans Arabic" pitchFamily="34" charset="0"/>
+                <a:ea typeface="IBM Plex Sans Arabic" pitchFamily="34" charset="-122"/>
+                <a:cs typeface="IBM Plex Sans Arabic" pitchFamily="34" charset="-120"/>
+              </a:rPr>
+              <a:t>ربط السيرفرات المحلية (On-Premises) مع المنصات السحابية في لوحة واحدة.</a:t>
+            </a:r>
+            <a:endParaRPr lang="en-US" sz="1250" dirty="0"/>
+          </a:p>
+        </p:txBody>
+      </p:sp>
+      <p:sp>
+        <p:nvSpPr>
+          <p:cNvPr id="30" name="Shape 25"/>
+          <p:cNvSpPr/>
+          <p:nvPr/>
+        </p:nvSpPr>
+        <p:spPr>
+          <a:xfrm>
+            <a:off x="6035040" y="4901184"/>
+            <a:ext cx="5699455" cy="932688"/>
           </a:xfrm>
           <a:prstGeom prst="roundRect">
             <a:avLst>
-              <a:gd name="adj" fmla="val 10000"/>
+              <a:gd name="adj" fmla="val 13725"/>
             </a:avLst>
           </a:prstGeom>
           <a:solidFill>
@@ -19000,14 +15125,53 @@
       </p:sp>
       <p:sp>
         <p:nvSpPr>
+          <p:cNvPr id="31" name="Text 26"/>
+          <p:cNvSpPr txBox="1"/>
+          <p:nvPr/>
+        </p:nvSpPr>
+        <p:spPr>
+          <a:xfrm>
+            <a:off x="6309360" y="5020056"/>
+            <a:ext cx="5150815" cy="329184"/>
+          </a:xfrm>
+          <a:prstGeom prst="rect">
+            <a:avLst/>
+          </a:prstGeom>
+          <a:noFill/>
+          <a:ln/>
+        </p:spPr>
+        <p:txBody>
+          <a:bodyPr wrap="square" lIns="0" tIns="0" rIns="0" bIns="0" rtlCol="0" anchor="t"/>
+          <a:lstStyle/>
+          <a:p>
+            <a:pPr rtl="1" algn="r" indent="0" marL="0">
+              <a:buNone/>
+            </a:pPr>
+            <a:r>
+              <a:rPr lang="en-US" sz="1600" b="1" dirty="0">
+                <a:solidFill>
+                  <a:srgbClr val="21141A"/>
+                </a:solidFill>
+                <a:latin typeface="IBM Plex Sans Arabic" pitchFamily="34" charset="0"/>
+                <a:ea typeface="IBM Plex Sans Arabic" pitchFamily="34" charset="-122"/>
+                <a:cs typeface="IBM Plex Sans Arabic" pitchFamily="34" charset="-120"/>
+              </a:rPr>
+              <a:t>مراقبة وإنذار مبكر 24/7</a:t>
+            </a:r>
+            <a:endParaRPr lang="en-US" sz="1600" dirty="0"/>
+          </a:p>
+        </p:txBody>
+      </p:sp>
+      <p:sp>
+        <p:nvSpPr>
           <p:cNvPr id="32" name="Text 27"/>
           <p:cNvSpPr txBox="1"/>
           <p:nvPr/>
         </p:nvSpPr>
         <p:spPr>
           <a:xfrm>
-            <a:off x="3379394" y="2532888"/>
-            <a:ext cx="2510714" cy="685800"/>
+            <a:off x="6309360" y="5358384"/>
+            <a:ext cx="5150815" cy="411480"/>
           </a:xfrm>
           <a:prstGeom prst="rect">
             <a:avLst/>
@@ -19019,116 +15183,38 @@
           <a:bodyPr wrap="square" lIns="0" tIns="0" rIns="0" bIns="0" rtlCol="0" anchor="t"/>
           <a:lstStyle/>
           <a:p>
-            <a:pPr algn="ctr" indent="0" marL="0">
-              <a:buNone/>
-            </a:pPr>
-            <a:r>
-              <a:rPr lang="en-US" sz="3600" b="1" dirty="0">
-                <a:solidFill>
-                  <a:srgbClr val="8E2F3C"/>
-                </a:solidFill>
-                <a:latin typeface="IBM Plex Sans Arabic" pitchFamily="34" charset="0"/>
-                <a:ea typeface="IBM Plex Sans Arabic" pitchFamily="34" charset="-122"/>
-                <a:cs typeface="IBM Plex Sans Arabic" pitchFamily="34" charset="-120"/>
-              </a:rPr>
-              <a:t>9,202</a:t>
-            </a:r>
-            <a:endParaRPr lang="en-US" sz="3600" dirty="0"/>
-          </a:p>
-        </p:txBody>
-      </p:sp>
-      <p:sp>
-        <p:nvSpPr>
-          <p:cNvPr id="33" name="Text 28"/>
-          <p:cNvSpPr txBox="1"/>
-          <p:nvPr/>
-        </p:nvSpPr>
-        <p:spPr>
-          <a:xfrm>
-            <a:off x="3516554" y="3246120"/>
-            <a:ext cx="2236394" cy="365760"/>
-          </a:xfrm>
-          <a:prstGeom prst="rect">
-            <a:avLst/>
-          </a:prstGeom>
-          <a:noFill/>
-          <a:ln/>
-        </p:spPr>
-        <p:txBody>
-          <a:bodyPr wrap="square" lIns="0" tIns="0" rIns="0" bIns="0" rtlCol="0" anchor="t"/>
-          <a:lstStyle/>
-          <a:p>
-            <a:pPr rtl="1" algn="ctr" indent="0" marL="0">
-              <a:buNone/>
-            </a:pPr>
-            <a:r>
-              <a:rPr lang="en-US" sz="1400" dirty="0">
-                <a:solidFill>
-                  <a:srgbClr val="21141A"/>
-                </a:solidFill>
-                <a:latin typeface="IBM Plex Sans Arabic" pitchFamily="34" charset="0"/>
-                <a:ea typeface="IBM Plex Sans Arabic" pitchFamily="34" charset="-122"/>
-                <a:cs typeface="IBM Plex Sans Arabic" pitchFamily="34" charset="-120"/>
-              </a:rPr>
-              <a:t>ريال توفير شهري (10.8%)</a:t>
-            </a:r>
-            <a:endParaRPr lang="en-US" sz="1400" dirty="0"/>
-          </a:p>
-        </p:txBody>
-      </p:sp>
-      <p:sp>
-        <p:nvSpPr>
-          <p:cNvPr id="34" name="Text 29"/>
-          <p:cNvSpPr txBox="1"/>
-          <p:nvPr/>
-        </p:nvSpPr>
-        <p:spPr>
-          <a:xfrm>
-            <a:off x="2967914" y="2331720"/>
-            <a:ext cx="411480" cy="1463040"/>
-          </a:xfrm>
-          <a:prstGeom prst="rect">
-            <a:avLst/>
-          </a:prstGeom>
-          <a:noFill/>
-          <a:ln/>
-        </p:spPr>
-        <p:txBody>
-          <a:bodyPr wrap="square" lIns="0" tIns="0" rIns="0" bIns="0" rtlCol="0" anchor="ctr"/>
-          <a:lstStyle/>
-          <a:p>
-            <a:pPr algn="ctr" indent="0" marL="0">
-              <a:buNone/>
-            </a:pPr>
-            <a:r>
-              <a:rPr lang="en-US" sz="2200" b="1" dirty="0">
-                <a:solidFill>
-                  <a:srgbClr val="8E2F3C"/>
-                </a:solidFill>
-                <a:latin typeface="IBM Plex Sans Arabic" pitchFamily="34" charset="0"/>
-                <a:ea typeface="IBM Plex Sans Arabic" pitchFamily="34" charset="-122"/>
-                <a:cs typeface="IBM Plex Sans Arabic" pitchFamily="34" charset="-120"/>
-              </a:rPr>
-              <a:t>←</a:t>
-            </a:r>
-            <a:endParaRPr lang="en-US" sz="2200" dirty="0"/>
-          </a:p>
-        </p:txBody>
-      </p:sp>
-      <p:sp>
-        <p:nvSpPr>
-          <p:cNvPr id="35" name="Shape 30"/>
-          <p:cNvSpPr/>
-          <p:nvPr/>
-        </p:nvSpPr>
-        <p:spPr>
-          <a:xfrm>
-            <a:off x="457200" y="2331720"/>
-            <a:ext cx="2510714" cy="1463040"/>
+            <a:pPr rtl="1" algn="r" indent="0" marL="0">
+              <a:buNone/>
+            </a:pPr>
+            <a:r>
+              <a:rPr lang="en-US" sz="1250" dirty="0">
+                <a:solidFill>
+                  <a:srgbClr val="7F6C72"/>
+                </a:solidFill>
+                <a:latin typeface="IBM Plex Sans Arabic" pitchFamily="34" charset="0"/>
+                <a:ea typeface="IBM Plex Sans Arabic" pitchFamily="34" charset="-122"/>
+                <a:cs typeface="IBM Plex Sans Arabic" pitchFamily="34" charset="-120"/>
+              </a:rPr>
+              <a:t>تنبيه واتساب فوري عند أي ارتفاع مفاجئ في الاستهلاك (Cost Spike).</a:t>
+            </a:r>
+            <a:endParaRPr lang="en-US" sz="1250" dirty="0"/>
+          </a:p>
+        </p:txBody>
+      </p:sp>
+      <p:sp>
+        <p:nvSpPr>
+          <p:cNvPr id="33" name="Shape 28"/>
+          <p:cNvSpPr/>
+          <p:nvPr/>
+        </p:nvSpPr>
+        <p:spPr>
+          <a:xfrm>
+            <a:off x="457200" y="2286000"/>
+            <a:ext cx="5303520" cy="3712464"/>
           </a:xfrm>
           <a:prstGeom prst="roundRect">
             <a:avLst>
-              <a:gd name="adj" fmla="val 10000"/>
+              <a:gd name="adj" fmla="val 4433"/>
             </a:avLst>
           </a:prstGeom>
           <a:solidFill>
@@ -19139,14 +15225,73 @@
       </p:sp>
       <p:sp>
         <p:nvSpPr>
+          <p:cNvPr id="34" name="Text 29"/>
+          <p:cNvSpPr txBox="1"/>
+          <p:nvPr/>
+        </p:nvSpPr>
+        <p:spPr>
+          <a:xfrm>
+            <a:off x="777240" y="2514600"/>
+            <a:ext cx="4663440" cy="384048"/>
+          </a:xfrm>
+          <a:prstGeom prst="rect">
+            <a:avLst/>
+          </a:prstGeom>
+          <a:noFill/>
+          <a:ln/>
+        </p:spPr>
+        <p:txBody>
+          <a:bodyPr wrap="square" lIns="0" tIns="0" rIns="0" bIns="0" rtlCol="0" anchor="t"/>
+          <a:lstStyle/>
+          <a:p>
+            <a:pPr rtl="1" algn="r" indent="0" marL="0">
+              <a:buNone/>
+            </a:pPr>
+            <a:r>
+              <a:rPr lang="en-US" sz="1800" b="1" dirty="0">
+                <a:solidFill>
+                  <a:srgbClr val="FBF6EE"/>
+                </a:solidFill>
+                <a:latin typeface="IBM Plex Sans Arabic" pitchFamily="34" charset="0"/>
+                <a:ea typeface="IBM Plex Sans Arabic" pitchFamily="34" charset="-122"/>
+                <a:cs typeface="IBM Plex Sans Arabic" pitchFamily="34" charset="-120"/>
+              </a:rPr>
+              <a:t>التوجيه والدعم</a:t>
+            </a:r>
+            <a:endParaRPr lang="en-US" sz="1800" dirty="0"/>
+          </a:p>
+        </p:txBody>
+      </p:sp>
+      <p:sp>
+        <p:nvSpPr>
+          <p:cNvPr id="35" name="Shape 30"/>
+          <p:cNvSpPr/>
+          <p:nvPr/>
+        </p:nvSpPr>
+        <p:spPr>
+          <a:xfrm>
+            <a:off x="5321808" y="3154680"/>
+            <a:ext cx="118872" cy="118872"/>
+          </a:xfrm>
+          <a:prstGeom prst="rect">
+            <a:avLst/>
+          </a:prstGeom>
+          <a:solidFill>
+            <a:srgbClr val="C9A46E"/>
+          </a:solidFill>
+          <a:ln/>
+        </p:spPr>
+      </p:sp>
+      <p:sp>
+        <p:nvSpPr>
           <p:cNvPr id="36" name="Text 31"/>
           <p:cNvSpPr txBox="1"/>
           <p:nvPr/>
         </p:nvSpPr>
         <p:spPr>
           <a:xfrm>
-            <a:off x="457200" y="2532888"/>
-            <a:ext cx="2510714" cy="685800"/>
+            <a:off x="777240" y="3063240"/>
+            <a:ext cx="4434840" cy="822960"/>
           </a:xfrm>
           <a:prstGeom prst="rect">
             <a:avLst/>
@@ -19158,11 +15303,14 @@
           <a:bodyPr wrap="square" lIns="0" tIns="0" rIns="0" bIns="0" rtlCol="0" anchor="t"/>
           <a:lstStyle/>
           <a:p>
-            <a:pPr algn="ctr" indent="0" marL="0">
-              <a:buNone/>
-            </a:pPr>
-            <a:r>
-              <a:rPr lang="en-US" sz="3600" b="1" dirty="0">
+            <a:pPr rtl="1" algn="r" indent="0" marL="0">
+              <a:lnSpc>
+                <a:spcPct val="110000"/>
+              </a:lnSpc>
+              <a:buNone/>
+            </a:pPr>
+            <a:r>
+              <a:rPr lang="en-US" sz="1350" dirty="0">
                 <a:solidFill>
                   <a:srgbClr val="FBF6EE"/>
                 </a:solidFill>
@@ -19170,22 +15318,42 @@
                 <a:ea typeface="IBM Plex Sans Arabic" pitchFamily="34" charset="-122"/>
                 <a:cs typeface="IBM Plex Sans Arabic" pitchFamily="34" charset="-120"/>
               </a:rPr>
-              <a:t>110,424</a:t>
-            </a:r>
-            <a:endParaRPr lang="en-US" sz="3600" dirty="0"/>
-          </a:p>
-        </p:txBody>
-      </p:sp>
-      <p:sp>
-        <p:nvSpPr>
-          <p:cNvPr id="37" name="Text 32"/>
-          <p:cNvSpPr txBox="1"/>
-          <p:nvPr/>
-        </p:nvSpPr>
-        <p:spPr>
-          <a:xfrm>
-            <a:off x="594360" y="3246120"/>
-            <a:ext cx="2236394" cy="365760"/>
+              <a:t>توجيه من خبراء السحابة وأمن المعلومات لتطوير نموذج الذكاء الاصطناعي ورفع كفاءة الأمان وتوطين البيانات.</a:t>
+            </a:r>
+            <a:endParaRPr lang="en-US" sz="1350" dirty="0"/>
+          </a:p>
+        </p:txBody>
+      </p:sp>
+      <p:sp>
+        <p:nvSpPr>
+          <p:cNvPr id="37" name="Shape 32"/>
+          <p:cNvSpPr/>
+          <p:nvPr/>
+        </p:nvSpPr>
+        <p:spPr>
+          <a:xfrm>
+            <a:off x="5321808" y="4069080"/>
+            <a:ext cx="118872" cy="118872"/>
+          </a:xfrm>
+          <a:prstGeom prst="rect">
+            <a:avLst/>
+          </a:prstGeom>
+          <a:solidFill>
+            <a:srgbClr val="C9A46E"/>
+          </a:solidFill>
+          <a:ln/>
+        </p:spPr>
+      </p:sp>
+      <p:sp>
+        <p:nvSpPr>
+          <p:cNvPr id="38" name="Text 33"/>
+          <p:cNvSpPr txBox="1"/>
+          <p:nvPr/>
+        </p:nvSpPr>
+        <p:spPr>
+          <a:xfrm>
+            <a:off x="777240" y="3977640"/>
+            <a:ext cx="4434840" cy="822960"/>
           </a:xfrm>
           <a:prstGeom prst="rect">
             <a:avLst/>
@@ -19197,11 +15365,14 @@
           <a:bodyPr wrap="square" lIns="0" tIns="0" rIns="0" bIns="0" rtlCol="0" anchor="t"/>
           <a:lstStyle/>
           <a:p>
-            <a:pPr rtl="1" algn="ctr" indent="0" marL="0">
-              <a:buNone/>
-            </a:pPr>
-            <a:r>
-              <a:rPr lang="en-US" sz="1400" dirty="0">
+            <a:pPr rtl="1" algn="r" indent="0" marL="0">
+              <a:lnSpc>
+                <a:spcPct val="110000"/>
+              </a:lnSpc>
+              <a:buNone/>
+            </a:pPr>
+            <a:r>
+              <a:rPr lang="en-US" sz="1350" dirty="0">
                 <a:solidFill>
                   <a:srgbClr val="FBF6EE"/>
                 </a:solidFill>
@@ -19209,22 +15380,42 @@
                 <a:ea typeface="IBM Plex Sans Arabic" pitchFamily="34" charset="-122"/>
                 <a:cs typeface="IBM Plex Sans Arabic" pitchFamily="34" charset="-120"/>
               </a:rPr>
-              <a:t>ريال توفير سنوي</a:t>
-            </a:r>
-            <a:endParaRPr lang="en-US" sz="1400" dirty="0"/>
-          </a:p>
-        </p:txBody>
-      </p:sp>
-      <p:sp>
-        <p:nvSpPr>
-          <p:cNvPr id="38" name="Text 33"/>
-          <p:cNvSpPr txBox="1"/>
-          <p:nvPr/>
-        </p:nvSpPr>
-        <p:spPr>
-          <a:xfrm>
-            <a:off x="457200" y="4069080"/>
-            <a:ext cx="11277295" cy="365760"/>
+              <a:t>شراكة مع مزود سحابة محلي لاختبار الربط مع STC Cloud أو SCCC أو CNTXT.</a:t>
+            </a:r>
+            <a:endParaRPr lang="en-US" sz="1350" dirty="0"/>
+          </a:p>
+        </p:txBody>
+      </p:sp>
+      <p:sp>
+        <p:nvSpPr>
+          <p:cNvPr id="39" name="Shape 34"/>
+          <p:cNvSpPr/>
+          <p:nvPr/>
+        </p:nvSpPr>
+        <p:spPr>
+          <a:xfrm>
+            <a:off x="5321808" y="4983480"/>
+            <a:ext cx="118872" cy="118872"/>
+          </a:xfrm>
+          <a:prstGeom prst="rect">
+            <a:avLst/>
+          </a:prstGeom>
+          <a:solidFill>
+            <a:srgbClr val="C9A46E"/>
+          </a:solidFill>
+          <a:ln/>
+        </p:spPr>
+      </p:sp>
+      <p:sp>
+        <p:nvSpPr>
+          <p:cNvPr id="40" name="Text 35"/>
+          <p:cNvSpPr txBox="1"/>
+          <p:nvPr/>
+        </p:nvSpPr>
+        <p:spPr>
+          <a:xfrm>
+            <a:off x="777240" y="4892040"/>
+            <a:ext cx="4434840" cy="822960"/>
           </a:xfrm>
           <a:prstGeom prst="rect">
             <a:avLst/>
@@ -19237,359 +15428,23 @@
           <a:lstStyle/>
           <a:p>
             <a:pPr rtl="1" algn="r" indent="0" marL="0">
-              <a:buNone/>
-            </a:pPr>
-            <a:r>
-              <a:rPr lang="en-US" sz="1700" b="1" dirty="0">
-                <a:solidFill>
-                  <a:srgbClr val="8E2F3C"/>
-                </a:solidFill>
-                <a:latin typeface="IBM Plex Sans Arabic" pitchFamily="34" charset="0"/>
-                <a:ea typeface="IBM Plex Sans Arabic" pitchFamily="34" charset="-122"/>
-                <a:cs typeface="IBM Plex Sans Arabic" pitchFamily="34" charset="-120"/>
-              </a:rPr>
-              <a:t>كيف نقيس الأثر</a:t>
-            </a:r>
-            <a:endParaRPr lang="en-US" sz="1700" dirty="0"/>
-          </a:p>
-        </p:txBody>
-      </p:sp>
-      <p:sp>
-        <p:nvSpPr>
-          <p:cNvPr id="39" name="Shape 34"/>
-          <p:cNvSpPr/>
-          <p:nvPr/>
-        </p:nvSpPr>
-        <p:spPr>
-          <a:xfrm>
-            <a:off x="8127797" y="4526280"/>
-            <a:ext cx="3606698" cy="960120"/>
-          </a:xfrm>
-          <a:prstGeom prst="roundRect">
-            <a:avLst>
-              <a:gd name="adj" fmla="val 13333"/>
-            </a:avLst>
-          </a:prstGeom>
-          <a:solidFill>
-            <a:srgbClr val="F1E4DF"/>
-          </a:solidFill>
-          <a:ln/>
-        </p:spPr>
-      </p:sp>
-      <p:sp>
-        <p:nvSpPr>
-          <p:cNvPr id="40" name="Text 35"/>
-          <p:cNvSpPr txBox="1"/>
-          <p:nvPr/>
-        </p:nvSpPr>
-        <p:spPr>
-          <a:xfrm>
-            <a:off x="8356397" y="4663440"/>
-            <a:ext cx="3149498" cy="329184"/>
-          </a:xfrm>
-          <a:prstGeom prst="rect">
-            <a:avLst/>
-          </a:prstGeom>
-          <a:noFill/>
-          <a:ln/>
-        </p:spPr>
-        <p:txBody>
-          <a:bodyPr wrap="square" lIns="0" tIns="0" rIns="0" bIns="0" rtlCol="0" anchor="t"/>
-          <a:lstStyle/>
-          <a:p>
-            <a:pPr rtl="1" algn="r" indent="0" marL="0">
-              <a:buNone/>
-            </a:pPr>
-            <a:r>
-              <a:rPr lang="en-US" sz="1500" b="1" dirty="0">
-                <a:solidFill>
-                  <a:srgbClr val="21141A"/>
-                </a:solidFill>
-                <a:latin typeface="IBM Plex Sans Arabic" pitchFamily="34" charset="0"/>
-                <a:ea typeface="IBM Plex Sans Arabic" pitchFamily="34" charset="-122"/>
-                <a:cs typeface="IBM Plex Sans Arabic" pitchFamily="34" charset="-120"/>
-              </a:rPr>
-              <a:t>الريالات الموفرة فعلياً</a:t>
-            </a:r>
-            <a:endParaRPr lang="en-US" sz="1500" dirty="0"/>
-          </a:p>
-        </p:txBody>
-      </p:sp>
-      <p:sp>
-        <p:nvSpPr>
-          <p:cNvPr id="41" name="Text 36"/>
-          <p:cNvSpPr txBox="1"/>
-          <p:nvPr/>
-        </p:nvSpPr>
-        <p:spPr>
-          <a:xfrm>
-            <a:off x="8356397" y="5029200"/>
-            <a:ext cx="3149498" cy="320040"/>
-          </a:xfrm>
-          <a:prstGeom prst="rect">
-            <a:avLst/>
-          </a:prstGeom>
-          <a:noFill/>
-          <a:ln/>
-        </p:spPr>
-        <p:txBody>
-          <a:bodyPr wrap="square" lIns="0" tIns="0" rIns="0" bIns="0" rtlCol="0" anchor="t"/>
-          <a:lstStyle/>
-          <a:p>
-            <a:pPr rtl="1" algn="r" indent="0" marL="0">
-              <a:buNone/>
-            </a:pPr>
-            <a:r>
-              <a:rPr lang="en-US" sz="1250" dirty="0">
-                <a:solidFill>
-                  <a:srgbClr val="7F6C72"/>
-                </a:solidFill>
-                <a:latin typeface="IBM Plex Sans Arabic" pitchFamily="34" charset="0"/>
-                <a:ea typeface="IBM Plex Sans Arabic" pitchFamily="34" charset="-122"/>
-                <a:cs typeface="IBM Plex Sans Arabic" pitchFamily="34" charset="-120"/>
-              </a:rPr>
-              <a:t>من فاتورة المزود نفسها قبل وبعد</a:t>
-            </a:r>
-            <a:endParaRPr lang="en-US" sz="1250" dirty="0"/>
-          </a:p>
-        </p:txBody>
-      </p:sp>
-      <p:sp>
-        <p:nvSpPr>
-          <p:cNvPr id="42" name="Shape 37"/>
-          <p:cNvSpPr/>
-          <p:nvPr/>
-        </p:nvSpPr>
-        <p:spPr>
-          <a:xfrm>
-            <a:off x="4292498" y="4526280"/>
-            <a:ext cx="3606698" cy="960120"/>
-          </a:xfrm>
-          <a:prstGeom prst="roundRect">
-            <a:avLst>
-              <a:gd name="adj" fmla="val 13333"/>
-            </a:avLst>
-          </a:prstGeom>
-          <a:solidFill>
-            <a:srgbClr val="F1E4DF"/>
-          </a:solidFill>
-          <a:ln/>
-        </p:spPr>
-      </p:sp>
-      <p:sp>
-        <p:nvSpPr>
-          <p:cNvPr id="43" name="Text 38"/>
-          <p:cNvSpPr txBox="1"/>
-          <p:nvPr/>
-        </p:nvSpPr>
-        <p:spPr>
-          <a:xfrm>
-            <a:off x="4521098" y="4663440"/>
-            <a:ext cx="3149498" cy="329184"/>
-          </a:xfrm>
-          <a:prstGeom prst="rect">
-            <a:avLst/>
-          </a:prstGeom>
-          <a:noFill/>
-          <a:ln/>
-        </p:spPr>
-        <p:txBody>
-          <a:bodyPr wrap="square" lIns="0" tIns="0" rIns="0" bIns="0" rtlCol="0" anchor="t"/>
-          <a:lstStyle/>
-          <a:p>
-            <a:pPr rtl="1" algn="r" indent="0" marL="0">
-              <a:buNone/>
-            </a:pPr>
-            <a:r>
-              <a:rPr lang="en-US" sz="1500" b="1" dirty="0">
-                <a:solidFill>
-                  <a:srgbClr val="21141A"/>
-                </a:solidFill>
-                <a:latin typeface="IBM Plex Sans Arabic" pitchFamily="34" charset="0"/>
-                <a:ea typeface="IBM Plex Sans Arabic" pitchFamily="34" charset="-122"/>
-                <a:cs typeface="IBM Plex Sans Arabic" pitchFamily="34" charset="-120"/>
-              </a:rPr>
-              <a:t>نسبة التوصيات المنفذة</a:t>
-            </a:r>
-            <a:endParaRPr lang="en-US" sz="1500" dirty="0"/>
-          </a:p>
-        </p:txBody>
-      </p:sp>
-      <p:sp>
-        <p:nvSpPr>
-          <p:cNvPr id="44" name="Text 39"/>
-          <p:cNvSpPr txBox="1"/>
-          <p:nvPr/>
-        </p:nvSpPr>
-        <p:spPr>
-          <a:xfrm>
-            <a:off x="4521098" y="5029200"/>
-            <a:ext cx="3149498" cy="320040"/>
-          </a:xfrm>
-          <a:prstGeom prst="rect">
-            <a:avLst/>
-          </a:prstGeom>
-          <a:noFill/>
-          <a:ln/>
-        </p:spPr>
-        <p:txBody>
-          <a:bodyPr wrap="square" lIns="0" tIns="0" rIns="0" bIns="0" rtlCol="0" anchor="t"/>
-          <a:lstStyle/>
-          <a:p>
-            <a:pPr rtl="1" algn="r" indent="0" marL="0">
-              <a:buNone/>
-            </a:pPr>
-            <a:r>
-              <a:rPr lang="en-US" sz="1250" dirty="0">
-                <a:solidFill>
-                  <a:srgbClr val="7F6C72"/>
-                </a:solidFill>
-                <a:latin typeface="IBM Plex Sans Arabic" pitchFamily="34" charset="0"/>
-                <a:ea typeface="IBM Plex Sans Arabic" pitchFamily="34" charset="-122"/>
-                <a:cs typeface="IBM Plex Sans Arabic" pitchFamily="34" charset="-120"/>
-              </a:rPr>
-              <a:t>كم توصية تحولت إلى توفير حقيقي</a:t>
-            </a:r>
-            <a:endParaRPr lang="en-US" sz="1250" dirty="0"/>
-          </a:p>
-        </p:txBody>
-      </p:sp>
-      <p:sp>
-        <p:nvSpPr>
-          <p:cNvPr id="45" name="Shape 40"/>
-          <p:cNvSpPr/>
-          <p:nvPr/>
-        </p:nvSpPr>
-        <p:spPr>
-          <a:xfrm>
-            <a:off x="457200" y="4526280"/>
-            <a:ext cx="3606698" cy="960120"/>
-          </a:xfrm>
-          <a:prstGeom prst="roundRect">
-            <a:avLst>
-              <a:gd name="adj" fmla="val 13333"/>
-            </a:avLst>
-          </a:prstGeom>
-          <a:solidFill>
-            <a:srgbClr val="F1E4DF"/>
-          </a:solidFill>
-          <a:ln/>
-        </p:spPr>
-      </p:sp>
-      <p:sp>
-        <p:nvSpPr>
-          <p:cNvPr id="46" name="Text 41"/>
-          <p:cNvSpPr txBox="1"/>
-          <p:nvPr/>
-        </p:nvSpPr>
-        <p:spPr>
-          <a:xfrm>
-            <a:off x="685800" y="4663440"/>
-            <a:ext cx="3149498" cy="329184"/>
-          </a:xfrm>
-          <a:prstGeom prst="rect">
-            <a:avLst/>
-          </a:prstGeom>
-          <a:noFill/>
-          <a:ln/>
-        </p:spPr>
-        <p:txBody>
-          <a:bodyPr wrap="square" lIns="0" tIns="0" rIns="0" bIns="0" rtlCol="0" anchor="t"/>
-          <a:lstStyle/>
-          <a:p>
-            <a:pPr rtl="1" algn="r" indent="0" marL="0">
-              <a:buNone/>
-            </a:pPr>
-            <a:r>
-              <a:rPr lang="en-US" sz="1500" b="1" dirty="0">
-                <a:solidFill>
-                  <a:srgbClr val="21141A"/>
-                </a:solidFill>
-                <a:latin typeface="IBM Plex Sans Arabic" pitchFamily="34" charset="0"/>
-                <a:ea typeface="IBM Plex Sans Arabic" pitchFamily="34" charset="-122"/>
-                <a:cs typeface="IBM Plex Sans Arabic" pitchFamily="34" charset="-120"/>
-              </a:rPr>
-              <a:t>زمن إزالة الهدر</a:t>
-            </a:r>
-            <a:endParaRPr lang="en-US" sz="1500" dirty="0"/>
-          </a:p>
-        </p:txBody>
-      </p:sp>
-      <p:sp>
-        <p:nvSpPr>
-          <p:cNvPr id="47" name="Text 42"/>
-          <p:cNvSpPr txBox="1"/>
-          <p:nvPr/>
-        </p:nvSpPr>
-        <p:spPr>
-          <a:xfrm>
-            <a:off x="685800" y="5029200"/>
-            <a:ext cx="3149498" cy="320040"/>
-          </a:xfrm>
-          <a:prstGeom prst="rect">
-            <a:avLst/>
-          </a:prstGeom>
-          <a:noFill/>
-          <a:ln/>
-        </p:spPr>
-        <p:txBody>
-          <a:bodyPr wrap="square" lIns="0" tIns="0" rIns="0" bIns="0" rtlCol="0" anchor="t"/>
-          <a:lstStyle/>
-          <a:p>
-            <a:pPr rtl="1" algn="r" indent="0" marL="0">
-              <a:buNone/>
-            </a:pPr>
-            <a:r>
-              <a:rPr lang="en-US" sz="1250" dirty="0">
-                <a:solidFill>
-                  <a:srgbClr val="7F6C72"/>
-                </a:solidFill>
-                <a:latin typeface="IBM Plex Sans Arabic" pitchFamily="34" charset="0"/>
-                <a:ea typeface="IBM Plex Sans Arabic" pitchFamily="34" charset="-122"/>
-                <a:cs typeface="IBM Plex Sans Arabic" pitchFamily="34" charset="-120"/>
-              </a:rPr>
-              <a:t>من أسابيع إلى دقائق بعد التنبيه</a:t>
-            </a:r>
-            <a:endParaRPr lang="en-US" sz="1250" dirty="0"/>
-          </a:p>
-        </p:txBody>
-      </p:sp>
-      <p:sp>
-        <p:nvSpPr>
-          <p:cNvPr id="48" name="Text 43"/>
-          <p:cNvSpPr txBox="1"/>
-          <p:nvPr/>
-        </p:nvSpPr>
-        <p:spPr>
-          <a:xfrm>
-            <a:off x="457200" y="5669280"/>
-            <a:ext cx="11277295" cy="457200"/>
-          </a:xfrm>
-          <a:prstGeom prst="rect">
-            <a:avLst/>
-          </a:prstGeom>
-          <a:noFill/>
-          <a:ln/>
-        </p:spPr>
-        <p:txBody>
-          <a:bodyPr wrap="square" lIns="0" tIns="0" rIns="0" bIns="0" rtlCol="0" anchor="ctr"/>
-          <a:lstStyle/>
-          <a:p>
-            <a:pPr rtl="1" algn="r" indent="0" marL="0">
-              <a:buNone/>
-            </a:pPr>
-            <a:r>
-              <a:rPr lang="en-US" sz="1250" dirty="0">
-                <a:solidFill>
-                  <a:srgbClr val="7F6C72"/>
-                </a:solidFill>
-                <a:latin typeface="IBM Plex Sans Arabic" pitchFamily="34" charset="0"/>
-                <a:ea typeface="IBM Plex Sans Arabic" pitchFamily="34" charset="-122"/>
-                <a:cs typeface="IBM Plex Sans Arabic" pitchFamily="34" charset="-120"/>
-              </a:rPr>
-              <a:t>المال الموفر يبقى في الشركة، ودعم السحب المحلية يخدم سيادة البيانات. الأرقام من النموذج الأولي على بيانات شركة افتراضية.</a:t>
-            </a:r>
-            <a:endParaRPr lang="en-US" sz="1250" dirty="0"/>
+              <a:lnSpc>
+                <a:spcPct val="110000"/>
+              </a:lnSpc>
+              <a:buNone/>
+            </a:pPr>
+            <a:r>
+              <a:rPr lang="en-US" sz="1350" dirty="0">
+                <a:solidFill>
+                  <a:srgbClr val="FBF6EE"/>
+                </a:solidFill>
+                <a:latin typeface="IBM Plex Sans Arabic" pitchFamily="34" charset="0"/>
+                <a:ea typeface="IBM Plex Sans Arabic" pitchFamily="34" charset="-122"/>
+                <a:cs typeface="IBM Plex Sans Arabic" pitchFamily="34" charset="-120"/>
+              </a:rPr>
+              <a:t>تجربة الفحص المجاني مع 10 شركات حقيقية للتحقق من حجم الهدر.</a:t>
+            </a:r>
+            <a:endParaRPr lang="en-US" sz="1350" dirty="0"/>
           </a:p>
         </p:txBody>
       </p:sp>

--- a/pitch/SSB_VentureX.pptx
+++ b/pitch/SSB_VentureX.pptx
@@ -2452,55 +2452,13 @@
       </p:sp>
       <p:sp>
         <p:nvSpPr>
-          <p:cNvPr id="33" name="Text 29"/>
-          <p:cNvSpPr txBox="1"/>
-          <p:nvPr/>
-        </p:nvSpPr>
-        <p:spPr>
-          <a:xfrm>
-            <a:off x="6400800" y="4160520"/>
-            <a:ext cx="5333695" cy="822960"/>
-          </a:xfrm>
-          <a:prstGeom prst="rect">
-            <a:avLst/>
-          </a:prstGeom>
-          <a:noFill/>
-          <a:ln/>
-        </p:spPr>
-        <p:txBody>
-          <a:bodyPr wrap="square" lIns="0" tIns="0" rIns="0" bIns="0" rtlCol="0" anchor="t"/>
-          <a:lstStyle/>
-          <a:p>
-            <a:pPr rtl="1" algn="r" indent="0" marL="0">
-              <a:lnSpc>
-                <a:spcPct val="115000"/>
-              </a:lnSpc>
-              <a:buNone/>
-            </a:pPr>
-            <a:r>
-              <a:rPr lang="en-US" sz="1600" dirty="0">
-                <a:solidFill>
-                  <a:srgbClr val="21141A"/>
-                </a:solidFill>
-                <a:latin typeface="IBM Plex Sans Arabic" pitchFamily="34" charset="0"/>
-                <a:ea typeface="IBM Plex Sans Arabic" pitchFamily="34" charset="-122"/>
-                <a:cs typeface="IBM Plex Sans Arabic" pitchFamily="34" charset="-120"/>
-              </a:rPr>
-              <a:t>منصة FinOps ذكية تكتشف الهدر في فاتورة السحابة وتشرحه، ولا تغيّر شيئاً قبل موافقة فريقكم بنقرة واحدة.</a:t>
-            </a:r>
-            <a:endParaRPr lang="en-US" sz="1600" dirty="0"/>
-          </a:p>
-        </p:txBody>
-      </p:sp>
-      <p:sp>
-        <p:nvSpPr>
-          <p:cNvPr id="34" name="Shape 30"/>
-          <p:cNvSpPr/>
-          <p:nvPr/>
-        </p:nvSpPr>
-        <p:spPr>
-          <a:xfrm>
-            <a:off x="10390327" y="5166360"/>
+          <p:cNvPr id="33" name="Shape 29"/>
+          <p:cNvSpPr/>
+          <p:nvPr/>
+        </p:nvSpPr>
+        <p:spPr>
+          <a:xfrm>
+            <a:off x="10390327" y="4434840"/>
             <a:ext cx="1344168" cy="420624"/>
           </a:xfrm>
           <a:prstGeom prst="roundRect">
@@ -2516,13 +2474,13 @@
       </p:sp>
       <p:sp>
         <p:nvSpPr>
-          <p:cNvPr id="35" name="Text 31"/>
+          <p:cNvPr id="34" name="Text 30"/>
           <p:cNvSpPr txBox="1"/>
           <p:nvPr/>
         </p:nvSpPr>
         <p:spPr>
           <a:xfrm>
-            <a:off x="10390327" y="5166360"/>
+            <a:off x="10390327" y="4434840"/>
             <a:ext cx="1344168" cy="420624"/>
           </a:xfrm>
           <a:prstGeom prst="rect">
@@ -2555,13 +2513,13 @@
       </p:sp>
       <p:sp>
         <p:nvSpPr>
-          <p:cNvPr id="36" name="Shape 32"/>
-          <p:cNvSpPr/>
-          <p:nvPr/>
-        </p:nvSpPr>
-        <p:spPr>
-          <a:xfrm>
-            <a:off x="8515807" y="5166360"/>
+          <p:cNvPr id="35" name="Shape 31"/>
+          <p:cNvSpPr/>
+          <p:nvPr/>
+        </p:nvSpPr>
+        <p:spPr>
+          <a:xfrm>
+            <a:off x="8515807" y="4434840"/>
             <a:ext cx="1737360" cy="420624"/>
           </a:xfrm>
           <a:prstGeom prst="roundRect">
@@ -2582,13 +2540,13 @@
       </p:sp>
       <p:sp>
         <p:nvSpPr>
-          <p:cNvPr id="37" name="Text 33"/>
+          <p:cNvPr id="36" name="Text 32"/>
           <p:cNvSpPr txBox="1"/>
           <p:nvPr/>
         </p:nvSpPr>
         <p:spPr>
           <a:xfrm>
-            <a:off x="8515807" y="5166360"/>
+            <a:off x="8515807" y="4434840"/>
             <a:ext cx="1737360" cy="420624"/>
           </a:xfrm>
           <a:prstGeom prst="rect">
@@ -2621,7 +2579,7 @@
       </p:sp>
       <p:pic>
         <p:nvPicPr>
-          <p:cNvPr id="38" name="Image 2" descr="/tmp/claude-0/-home-claude/750ff410-f4aa-5276-9360-1e19d018b112/scratchpad/c/assets/sponsors-ink.png">    </p:cNvPr>
+          <p:cNvPr id="37" name="Image 2" descr="/tmp/claude-0/-home-claude/750ff410-f4aa-5276-9360-1e19d018b112/scratchpad/c/assets/sponsors-ink.png">    </p:cNvPr>
           <p:cNvPicPr>
             <a:picLocks noChangeAspect="1"/>
           </p:cNvPicPr>
@@ -2645,7 +2603,7 @@
       </p:pic>
       <p:pic>
         <p:nvPicPr>
-          <p:cNvPr id="39" name="Image 3" descr="/tmp/claude-0/-home-claude/750ff410-f4aa-5276-9360-1e19d018b112/scratchpad/c/assets/organizers-ink.png">    </p:cNvPr>
+          <p:cNvPr id="38" name="Image 3" descr="/tmp/claude-0/-home-claude/750ff410-f4aa-5276-9360-1e19d018b112/scratchpad/c/assets/organizers-ink.png">    </p:cNvPr>
           <p:cNvPicPr>
             <a:picLocks noChangeAspect="1"/>
           </p:cNvPicPr>
@@ -3352,8 +3310,8 @@
         </p:nvSpPr>
         <p:spPr>
           <a:xfrm>
-            <a:off x="457200" y="1737360"/>
-            <a:ext cx="7528255" cy="868680"/>
+            <a:off x="457200" y="2194560"/>
+            <a:ext cx="7528255" cy="1005840"/>
           </a:xfrm>
           <a:prstGeom prst="rect">
             <a:avLst/>
@@ -3369,7 +3327,7 @@
               <a:buNone/>
             </a:pPr>
             <a:r>
-              <a:rPr lang="en-US" sz="4800" b="1" dirty="0">
+              <a:rPr lang="en-US" sz="6000" b="1" dirty="0">
                 <a:solidFill>
                   <a:srgbClr val="8E2F3C"/>
                 </a:solidFill>
@@ -3379,7 +3337,7 @@
               </a:rPr>
               <a:t>شكراً لكم</a:t>
             </a:r>
-            <a:endParaRPr lang="en-US" sz="4800" dirty="0"/>
+            <a:endParaRPr lang="en-US" sz="6000" dirty="0"/>
           </a:p>
         </p:txBody>
       </p:sp>
@@ -3391,7 +3349,7 @@
         </p:nvSpPr>
         <p:spPr>
           <a:xfrm>
-            <a:off x="457200" y="2697480"/>
+            <a:off x="457200" y="3337560"/>
             <a:ext cx="7528255" cy="548640"/>
           </a:xfrm>
           <a:prstGeom prst="rect">
@@ -3430,7 +3388,7 @@
         </p:nvSpPr>
         <p:spPr>
           <a:xfrm>
-            <a:off x="457200" y="3246120"/>
+            <a:off x="457200" y="3886200"/>
             <a:ext cx="7528255" cy="365760"/>
           </a:xfrm>
           <a:prstGeom prst="rect">
@@ -3461,243 +3419,9 @@
           </a:p>
         </p:txBody>
       </p:sp>
-      <p:sp>
-        <p:nvSpPr>
-          <p:cNvPr id="30" name="Text 24"/>
-          <p:cNvSpPr txBox="1"/>
-          <p:nvPr/>
-        </p:nvSpPr>
-        <p:spPr>
-          <a:xfrm>
-            <a:off x="6156655" y="3931920"/>
-            <a:ext cx="1828800" cy="365760"/>
-          </a:xfrm>
-          <a:prstGeom prst="rect">
-            <a:avLst/>
-          </a:prstGeom>
-          <a:noFill/>
-          <a:ln/>
-        </p:spPr>
-        <p:txBody>
-          <a:bodyPr wrap="square" lIns="0" tIns="0" rIns="0" bIns="0" rtlCol="0" anchor="ctr"/>
-          <a:lstStyle/>
-          <a:p>
-            <a:pPr rtl="1" algn="r" indent="0" marL="0">
-              <a:buNone/>
-            </a:pPr>
-            <a:r>
-              <a:rPr lang="en-US" sz="1400" b="1" dirty="0">
-                <a:solidFill>
-                  <a:srgbClr val="8E2F3C"/>
-                </a:solidFill>
-                <a:latin typeface="IBM Plex Sans Arabic" pitchFamily="34" charset="0"/>
-                <a:ea typeface="IBM Plex Sans Arabic" pitchFamily="34" charset="-122"/>
-                <a:cs typeface="IBM Plex Sans Arabic" pitchFamily="34" charset="-120"/>
-              </a:rPr>
-              <a:t>الموقع</a:t>
-            </a:r>
-            <a:endParaRPr lang="en-US" sz="1400" dirty="0"/>
-          </a:p>
-        </p:txBody>
-      </p:sp>
-      <p:sp>
-        <p:nvSpPr>
-          <p:cNvPr id="31" name="Text 25"/>
-          <p:cNvSpPr txBox="1"/>
-          <p:nvPr/>
-        </p:nvSpPr>
-        <p:spPr>
-          <a:xfrm>
-            <a:off x="457200" y="3931920"/>
-            <a:ext cx="5562295" cy="365760"/>
-          </a:xfrm>
-          <a:prstGeom prst="rect">
-            <a:avLst/>
-          </a:prstGeom>
-          <a:noFill/>
-          <a:ln/>
-        </p:spPr>
-        <p:txBody>
-          <a:bodyPr wrap="square" lIns="0" tIns="0" rIns="0" bIns="0" rtlCol="0" anchor="ctr"/>
-          <a:lstStyle/>
-          <a:p>
-            <a:pPr rtl="1" algn="r" indent="0" marL="0">
-              <a:buNone/>
-            </a:pPr>
-            <a:r>
-              <a:rPr lang="en-US" sz="1400" dirty="0">
-                <a:solidFill>
-                  <a:srgbClr val="21141A"/>
-                </a:solidFill>
-                <a:latin typeface="IBM Plex Sans Arabic" pitchFamily="34" charset="0"/>
-                <a:ea typeface="IBM Plex Sans Arabic" pitchFamily="34" charset="-122"/>
-                <a:cs typeface="IBM Plex Sans Arabic" pitchFamily="34" charset="-120"/>
-              </a:rPr>
-              <a:t>cloudtrim-sa.vercel.app</a:t>
-            </a:r>
-            <a:endParaRPr lang="en-US" sz="1400" dirty="0"/>
-          </a:p>
-        </p:txBody>
-      </p:sp>
-      <p:sp>
-        <p:nvSpPr>
-          <p:cNvPr id="32" name="Text 26"/>
-          <p:cNvSpPr txBox="1"/>
-          <p:nvPr/>
-        </p:nvSpPr>
-        <p:spPr>
-          <a:xfrm>
-            <a:off x="6156655" y="4407408"/>
-            <a:ext cx="1828800" cy="365760"/>
-          </a:xfrm>
-          <a:prstGeom prst="rect">
-            <a:avLst/>
-          </a:prstGeom>
-          <a:noFill/>
-          <a:ln/>
-        </p:spPr>
-        <p:txBody>
-          <a:bodyPr wrap="square" lIns="0" tIns="0" rIns="0" bIns="0" rtlCol="0" anchor="ctr"/>
-          <a:lstStyle/>
-          <a:p>
-            <a:pPr rtl="1" algn="r" indent="0" marL="0">
-              <a:buNone/>
-            </a:pPr>
-            <a:r>
-              <a:rPr lang="en-US" sz="1400" b="1" dirty="0">
-                <a:solidFill>
-                  <a:srgbClr val="8E2F3C"/>
-                </a:solidFill>
-                <a:latin typeface="IBM Plex Sans Arabic" pitchFamily="34" charset="0"/>
-                <a:ea typeface="IBM Plex Sans Arabic" pitchFamily="34" charset="-122"/>
-                <a:cs typeface="IBM Plex Sans Arabic" pitchFamily="34" charset="-120"/>
-              </a:rPr>
-              <a:t>العرض التجريبي</a:t>
-            </a:r>
-            <a:endParaRPr lang="en-US" sz="1400" dirty="0"/>
-          </a:p>
-        </p:txBody>
-      </p:sp>
-      <p:sp>
-        <p:nvSpPr>
-          <p:cNvPr id="33" name="Text 27"/>
-          <p:cNvSpPr txBox="1"/>
-          <p:nvPr/>
-        </p:nvSpPr>
-        <p:spPr>
-          <a:xfrm>
-            <a:off x="457200" y="4407408"/>
-            <a:ext cx="5562295" cy="365760"/>
-          </a:xfrm>
-          <a:prstGeom prst="rect">
-            <a:avLst/>
-          </a:prstGeom>
-          <a:noFill/>
-          <a:ln/>
-        </p:spPr>
-        <p:txBody>
-          <a:bodyPr wrap="square" lIns="0" tIns="0" rIns="0" bIns="0" rtlCol="0" anchor="ctr"/>
-          <a:lstStyle/>
-          <a:p>
-            <a:pPr rtl="1" algn="r" indent="0" marL="0">
-              <a:buNone/>
-            </a:pPr>
-            <a:r>
-              <a:rPr lang="en-US" sz="1400" dirty="0">
-                <a:solidFill>
-                  <a:srgbClr val="21141A"/>
-                </a:solidFill>
-                <a:latin typeface="IBM Plex Sans Arabic" pitchFamily="34" charset="0"/>
-                <a:ea typeface="IBM Plex Sans Arabic" pitchFamily="34" charset="-122"/>
-                <a:cs typeface="IBM Plex Sans Arabic" pitchFamily="34" charset="-120"/>
-              </a:rPr>
-              <a:t>cloudtrim-sa.vercel.app/demo</a:t>
-            </a:r>
-            <a:endParaRPr lang="en-US" sz="1400" dirty="0"/>
-          </a:p>
-        </p:txBody>
-      </p:sp>
-      <p:sp>
-        <p:nvSpPr>
-          <p:cNvPr id="34" name="Text 28"/>
-          <p:cNvSpPr txBox="1"/>
-          <p:nvPr/>
-        </p:nvSpPr>
-        <p:spPr>
-          <a:xfrm>
-            <a:off x="6156655" y="4882896"/>
-            <a:ext cx="1828800" cy="365760"/>
-          </a:xfrm>
-          <a:prstGeom prst="rect">
-            <a:avLst/>
-          </a:prstGeom>
-          <a:noFill/>
-          <a:ln/>
-        </p:spPr>
-        <p:txBody>
-          <a:bodyPr wrap="square" lIns="0" tIns="0" rIns="0" bIns="0" rtlCol="0" anchor="ctr"/>
-          <a:lstStyle/>
-          <a:p>
-            <a:pPr rtl="1" algn="r" indent="0" marL="0">
-              <a:buNone/>
-            </a:pPr>
-            <a:r>
-              <a:rPr lang="en-US" sz="1400" b="1" dirty="0">
-                <a:solidFill>
-                  <a:srgbClr val="8E2F3C"/>
-                </a:solidFill>
-                <a:latin typeface="IBM Plex Sans Arabic" pitchFamily="34" charset="0"/>
-                <a:ea typeface="IBM Plex Sans Arabic" pitchFamily="34" charset="-122"/>
-                <a:cs typeface="IBM Plex Sans Arabic" pitchFamily="34" charset="-120"/>
-              </a:rPr>
-              <a:t>الفريق</a:t>
-            </a:r>
-            <a:endParaRPr lang="en-US" sz="1400" dirty="0"/>
-          </a:p>
-        </p:txBody>
-      </p:sp>
-      <p:sp>
-        <p:nvSpPr>
-          <p:cNvPr id="35" name="Text 29"/>
-          <p:cNvSpPr txBox="1"/>
-          <p:nvPr/>
-        </p:nvSpPr>
-        <p:spPr>
-          <a:xfrm>
-            <a:off x="457200" y="4882896"/>
-            <a:ext cx="5562295" cy="365760"/>
-          </a:xfrm>
-          <a:prstGeom prst="rect">
-            <a:avLst/>
-          </a:prstGeom>
-          <a:noFill/>
-          <a:ln/>
-        </p:spPr>
-        <p:txBody>
-          <a:bodyPr wrap="square" lIns="0" tIns="0" rIns="0" bIns="0" rtlCol="0" anchor="ctr"/>
-          <a:lstStyle/>
-          <a:p>
-            <a:pPr rtl="1" algn="r" indent="0" marL="0">
-              <a:buNone/>
-            </a:pPr>
-            <a:r>
-              <a:rPr lang="en-US" sz="1400" dirty="0">
-                <a:solidFill>
-                  <a:srgbClr val="21141A"/>
-                </a:solidFill>
-                <a:latin typeface="IBM Plex Sans Arabic" pitchFamily="34" charset="0"/>
-                <a:ea typeface="IBM Plex Sans Arabic" pitchFamily="34" charset="-122"/>
-                <a:cs typeface="IBM Plex Sans Arabic" pitchFamily="34" charset="-120"/>
-              </a:rPr>
-              <a:t>SSB · مسار الحوسبة السحابية والبنية التحتية</a:t>
-            </a:r>
-            <a:endParaRPr lang="en-US" sz="1400" dirty="0"/>
-          </a:p>
-        </p:txBody>
-      </p:sp>
       <p:pic>
         <p:nvPicPr>
-          <p:cNvPr id="36" name="Image 4" descr="/tmp/claude-0/-home-claude/750ff410-f4aa-5276-9360-1e19d018b112/scratchpad/c/assets/sponsors-ink.png">    </p:cNvPr>
+          <p:cNvPr id="30" name="Image 4" descr="/tmp/claude-0/-home-claude/750ff410-f4aa-5276-9360-1e19d018b112/scratchpad/c/assets/sponsors-ink.png">    </p:cNvPr>
           <p:cNvPicPr>
             <a:picLocks noChangeAspect="1"/>
           </p:cNvPicPr>
@@ -4274,7 +3998,7 @@
                 <a:ea typeface="IBM Plex Sans Arabic" pitchFamily="34" charset="-122"/>
                 <a:cs typeface="IBM Plex Sans Arabic" pitchFamily="34" charset="-120"/>
               </a:rPr>
-              <a:t>فريق SSB: ثلاثة أعضاء، ومنتج يعمل</a:t>
+              <a:t>فريق SSB</a:t>
             </a:r>
             <a:endParaRPr lang="en-US" sz="3000" dirty="0"/>
           </a:p>
@@ -4282,46 +4006,7 @@
       </p:sp>
       <p:sp>
         <p:nvSpPr>
-          <p:cNvPr id="23" name="Text 18"/>
-          <p:cNvSpPr txBox="1"/>
-          <p:nvPr/>
-        </p:nvSpPr>
-        <p:spPr>
-          <a:xfrm>
-            <a:off x="457200" y="2121408"/>
-            <a:ext cx="11277295" cy="384048"/>
-          </a:xfrm>
-          <a:prstGeom prst="rect">
-            <a:avLst/>
-          </a:prstGeom>
-          <a:noFill/>
-          <a:ln/>
-        </p:spPr>
-        <p:txBody>
-          <a:bodyPr wrap="square" lIns="0" tIns="0" rIns="0" bIns="0" rtlCol="0" anchor="ctr"/>
-          <a:lstStyle/>
-          <a:p>
-            <a:pPr rtl="1" algn="r" indent="0" marL="0">
-              <a:buNone/>
-            </a:pPr>
-            <a:r>
-              <a:rPr lang="en-US" sz="1600" dirty="0">
-                <a:solidFill>
-                  <a:srgbClr val="7F6C72"/>
-                </a:solidFill>
-                <a:latin typeface="IBM Plex Sans Arabic" pitchFamily="34" charset="0"/>
-                <a:ea typeface="IBM Plex Sans Arabic" pitchFamily="34" charset="-122"/>
-                <a:cs typeface="IBM Plex Sans Arabic" pitchFamily="34" charset="-120"/>
-              </a:rPr>
-              <a:t>اسم المشروع: CloudTrim · مسار الحوسبة السحابية والبنية التحتية</a:t>
-            </a:r>
-            <a:endParaRPr lang="en-US" sz="1600" dirty="0"/>
-          </a:p>
-        </p:txBody>
-      </p:sp>
-      <p:sp>
-        <p:nvSpPr>
-          <p:cNvPr id="24" name="Shape 19"/>
+          <p:cNvPr id="23" name="Shape 18"/>
           <p:cNvSpPr/>
           <p:nvPr/>
         </p:nvSpPr>
@@ -4348,7 +4033,7 @@
       </p:sp>
       <p:pic>
         <p:nvPicPr>
-          <p:cNvPr id="25" name="Image 3" descr="صورة سلمان عبدالرحمن مشعل">    </p:cNvPr>
+          <p:cNvPr id="24" name="Image 3" descr="صورة سلمان عبدالرحمن مشعل">    </p:cNvPr>
           <p:cNvPicPr>
             <a:picLocks noChangeAspect="1"/>
           </p:cNvPicPr>
@@ -4372,7 +4057,7 @@
       </p:pic>
       <p:sp>
         <p:nvSpPr>
-          <p:cNvPr id="26" name="Text 20"/>
+          <p:cNvPr id="25" name="Text 19"/>
           <p:cNvSpPr txBox="1"/>
           <p:nvPr/>
         </p:nvSpPr>
@@ -4411,7 +4096,7 @@
       </p:sp>
       <p:sp>
         <p:nvSpPr>
-          <p:cNvPr id="27" name="Text 21"/>
+          <p:cNvPr id="26" name="Text 20"/>
           <p:cNvSpPr txBox="1"/>
           <p:nvPr/>
         </p:nvSpPr>
@@ -4450,7 +4135,7 @@
       </p:sp>
       <p:sp>
         <p:nvSpPr>
-          <p:cNvPr id="28" name="Shape 22"/>
+          <p:cNvPr id="27" name="Shape 21"/>
           <p:cNvSpPr/>
           <p:nvPr/>
         </p:nvSpPr>
@@ -4477,7 +4162,7 @@
       </p:sp>
       <p:pic>
         <p:nvPicPr>
-          <p:cNvPr id="29" name="Image 4" descr="صورة سليمان ممدوح مخانق">    </p:cNvPr>
+          <p:cNvPr id="28" name="Image 4" descr="صورة سليمان ممدوح مخانق">    </p:cNvPr>
           <p:cNvPicPr>
             <a:picLocks noChangeAspect="1"/>
           </p:cNvPicPr>
@@ -4501,7 +4186,7 @@
       </p:pic>
       <p:sp>
         <p:nvSpPr>
-          <p:cNvPr id="30" name="Text 23"/>
+          <p:cNvPr id="29" name="Text 22"/>
           <p:cNvSpPr txBox="1"/>
           <p:nvPr/>
         </p:nvSpPr>
@@ -4540,7 +4225,7 @@
       </p:sp>
       <p:sp>
         <p:nvSpPr>
-          <p:cNvPr id="31" name="Text 24"/>
+          <p:cNvPr id="30" name="Text 23"/>
           <p:cNvSpPr txBox="1"/>
           <p:nvPr/>
         </p:nvSpPr>
@@ -4579,7 +4264,7 @@
       </p:sp>
       <p:sp>
         <p:nvSpPr>
-          <p:cNvPr id="32" name="Shape 25"/>
+          <p:cNvPr id="31" name="Shape 24"/>
           <p:cNvSpPr/>
           <p:nvPr/>
         </p:nvSpPr>
@@ -4606,7 +4291,7 @@
       </p:sp>
       <p:pic>
         <p:nvPicPr>
-          <p:cNvPr id="33" name="Image 5" descr="صورة بلال أنس زكار">    </p:cNvPr>
+          <p:cNvPr id="32" name="Image 5" descr="صورة بلال أنس زكار">    </p:cNvPr>
           <p:cNvPicPr>
             <a:picLocks noChangeAspect="1"/>
           </p:cNvPicPr>
@@ -4630,7 +4315,7 @@
       </p:pic>
       <p:sp>
         <p:nvSpPr>
-          <p:cNvPr id="34" name="Text 26"/>
+          <p:cNvPr id="33" name="Text 25"/>
           <p:cNvSpPr txBox="1"/>
           <p:nvPr/>
         </p:nvSpPr>
@@ -4669,7 +4354,7 @@
       </p:sp>
       <p:sp>
         <p:nvSpPr>
-          <p:cNvPr id="35" name="Text 27"/>
+          <p:cNvPr id="34" name="Text 26"/>
           <p:cNvSpPr txBox="1"/>
           <p:nvPr/>
         </p:nvSpPr>
@@ -5236,8 +4921,8 @@
         </p:nvSpPr>
         <p:spPr>
           <a:xfrm>
-            <a:off x="457200" y="1463040"/>
-            <a:ext cx="11277295" cy="658368"/>
+            <a:off x="457200" y="1600200"/>
+            <a:ext cx="11277295" cy="731520"/>
           </a:xfrm>
           <a:prstGeom prst="rect">
             <a:avLst/>
@@ -5253,7 +4938,7 @@
               <a:buNone/>
             </a:pPr>
             <a:r>
-              <a:rPr lang="en-US" sz="3000" b="1" dirty="0">
+              <a:rPr lang="en-US" sz="3400" b="1" dirty="0">
                 <a:solidFill>
                   <a:srgbClr val="21141A"/>
                 </a:solidFill>
@@ -5261,9 +4946,9 @@
                 <a:ea typeface="IBM Plex Sans Arabic" pitchFamily="34" charset="-122"/>
                 <a:cs typeface="IBM Plex Sans Arabic" pitchFamily="34" charset="-120"/>
               </a:rPr>
-              <a:t>لماذا تخرج تكاليف السحابة عن السيطرة؟</a:t>
-            </a:r>
-            <a:endParaRPr lang="en-US" sz="3000" dirty="0"/>
+              <a:t>هدر صامت في فاتورة السحابة</a:t>
+            </a:r>
+            <a:endParaRPr lang="en-US" sz="3400" dirty="0"/>
           </a:p>
         </p:txBody>
       </p:sp>
@@ -5275,30 +4960,54 @@
         </p:nvSpPr>
         <p:spPr>
           <a:xfrm>
-            <a:off x="457200" y="2240280"/>
-            <a:ext cx="11277295" cy="1298448"/>
+            <a:off x="8188757" y="2743200"/>
+            <a:ext cx="3545738" cy="2377440"/>
           </a:xfrm>
           <a:prstGeom prst="roundRect">
             <a:avLst>
-              <a:gd name="adj" fmla="val 12676"/>
+              <a:gd name="adj" fmla="val 7692"/>
             </a:avLst>
           </a:prstGeom>
           <a:solidFill>
-            <a:srgbClr val="F1E4DF"/>
-          </a:solidFill>
-          <a:ln/>
-        </p:spPr>
-      </p:sp>
-      <p:sp>
-        <p:nvSpPr>
-          <p:cNvPr id="24" name="Text 19"/>
+            <a:srgbClr val="8E2F3C"/>
+          </a:solidFill>
+          <a:ln/>
+        </p:spPr>
+      </p:sp>
+      <p:pic>
+        <p:nvPicPr>
+          <p:cNvPr id="24" name="Image 3" descr="/tmp/claude-0/-home-claude/750ff410-f4aa-5276-9360-1e19d018b112/scratchpad/c/assets/i-wallet-cr.png">    </p:cNvPr>
+          <p:cNvPicPr>
+            <a:picLocks noChangeAspect="1"/>
+          </p:cNvPicPr>
+          <p:nvPr/>
+        </p:nvPicPr>
+        <p:blipFill>
+          <a:blip r:embed="rId4"/>
+          <a:stretch>
+            <a:fillRect/>
+          </a:stretch>
+        </p:blipFill>
+        <p:spPr>
+          <a:xfrm>
+            <a:off x="9687306" y="3017520"/>
+            <a:ext cx="548640" cy="548640"/>
+          </a:xfrm>
+          <a:prstGeom prst="rect">
+            <a:avLst/>
+          </a:prstGeom>
+        </p:spPr>
+      </p:pic>
+      <p:sp>
+        <p:nvSpPr>
+          <p:cNvPr id="25" name="Text 19"/>
           <p:cNvSpPr txBox="1"/>
           <p:nvPr/>
         </p:nvSpPr>
         <p:spPr>
           <a:xfrm>
-            <a:off x="7975397" y="2304288"/>
-            <a:ext cx="3759098" cy="621792"/>
+            <a:off x="8188757" y="3611880"/>
+            <a:ext cx="3545738" cy="868680"/>
           </a:xfrm>
           <a:prstGeom prst="rect">
             <a:avLst/>
@@ -5314,9 +5023,9 @@
               <a:buNone/>
             </a:pPr>
             <a:r>
-              <a:rPr lang="en-US" sz="3600" b="1" dirty="0">
+              <a:rPr lang="en-US" sz="5400" b="1" dirty="0">
                 <a:solidFill>
-                  <a:srgbClr val="8E2F3C"/>
+                  <a:srgbClr val="FBF6EE"/>
                 </a:solidFill>
                 <a:latin typeface="IBM Plex Sans Arabic" pitchFamily="34" charset="0"/>
                 <a:ea typeface="IBM Plex Sans Arabic" pitchFamily="34" charset="-122"/>
@@ -5324,20 +5033,20 @@
               </a:rPr>
               <a:t>29%</a:t>
             </a:r>
-            <a:endParaRPr lang="en-US" sz="3600" dirty="0"/>
-          </a:p>
-        </p:txBody>
-      </p:sp>
-      <p:sp>
-        <p:nvSpPr>
-          <p:cNvPr id="25" name="Text 20"/>
+            <a:endParaRPr lang="en-US" sz="5400" dirty="0"/>
+          </a:p>
+        </p:txBody>
+      </p:sp>
+      <p:sp>
+        <p:nvSpPr>
+          <p:cNvPr id="26" name="Text 20"/>
           <p:cNvSpPr txBox="1"/>
           <p:nvPr/>
         </p:nvSpPr>
         <p:spPr>
           <a:xfrm>
-            <a:off x="8249717" y="2926080"/>
-            <a:ext cx="3210458" cy="548640"/>
+            <a:off x="8463077" y="4526280"/>
+            <a:ext cx="2997098" cy="411480"/>
           </a:xfrm>
           <a:prstGeom prst="rect">
             <a:avLst/>
@@ -5346,37 +5055,88 @@
           <a:ln/>
         </p:spPr>
         <p:txBody>
-          <a:bodyPr wrap="square" lIns="0" tIns="0" rIns="0" bIns="0" rtlCol="0" anchor="t"/>
+          <a:bodyPr wrap="square" lIns="0" tIns="0" rIns="0" bIns="0" rtlCol="0" anchor="ctr"/>
           <a:lstStyle/>
           <a:p>
             <a:pPr rtl="1" algn="ctr" indent="0" marL="0">
               <a:buNone/>
             </a:pPr>
             <a:r>
-              <a:rPr lang="en-US" sz="1300" dirty="0">
+              <a:rPr lang="en-US" sz="1800" dirty="0">
                 <a:solidFill>
-                  <a:srgbClr val="21141A"/>
+                  <a:srgbClr val="FBF6EE"/>
                 </a:solidFill>
                 <a:latin typeface="IBM Plex Sans Arabic" pitchFamily="34" charset="0"/>
                 <a:ea typeface="IBM Plex Sans Arabic" pitchFamily="34" charset="-122"/>
                 <a:cs typeface="IBM Plex Sans Arabic" pitchFamily="34" charset="-120"/>
               </a:rPr>
-              <a:t>من الإنفاق السحابي مهدر</a:t>
-            </a:r>
-            <a:endParaRPr lang="en-US" sz="1300" dirty="0"/>
-          </a:p>
-        </p:txBody>
-      </p:sp>
-      <p:sp>
-        <p:nvSpPr>
-          <p:cNvPr id="26" name="Text 21"/>
+              <a:t>من الإنفاق مهدر</a:t>
+            </a:r>
+            <a:endParaRPr lang="en-US" sz="1800" dirty="0"/>
+          </a:p>
+        </p:txBody>
+      </p:sp>
+      <p:sp>
+        <p:nvSpPr>
+          <p:cNvPr id="27" name="Shape 21"/>
+          <p:cNvSpPr/>
+          <p:nvPr/>
+        </p:nvSpPr>
+        <p:spPr>
+          <a:xfrm>
+            <a:off x="4322978" y="2743200"/>
+            <a:ext cx="3545738" cy="2377440"/>
+          </a:xfrm>
+          <a:prstGeom prst="roundRect">
+            <a:avLst>
+              <a:gd name="adj" fmla="val 7692"/>
+            </a:avLst>
+          </a:prstGeom>
+          <a:solidFill>
+            <a:srgbClr val="FFFBF8"/>
+          </a:solidFill>
+          <a:ln w="9525">
+            <a:solidFill>
+              <a:srgbClr val="E3D5CC"/>
+            </a:solidFill>
+            <a:prstDash val="solid"/>
+          </a:ln>
+        </p:spPr>
+      </p:sp>
+      <p:pic>
+        <p:nvPicPr>
+          <p:cNvPr id="28" name="Image 4" descr="/tmp/claude-0/-home-claude/750ff410-f4aa-5276-9360-1e19d018b112/scratchpad/c/assets/i-trend-br.png">    </p:cNvPr>
+          <p:cNvPicPr>
+            <a:picLocks noChangeAspect="1"/>
+          </p:cNvPicPr>
+          <p:nvPr/>
+        </p:nvPicPr>
+        <p:blipFill>
+          <a:blip r:embed="rId5"/>
+          <a:stretch>
+            <a:fillRect/>
+          </a:stretch>
+        </p:blipFill>
+        <p:spPr>
+          <a:xfrm>
+            <a:off x="5821528" y="3017520"/>
+            <a:ext cx="548640" cy="548640"/>
+          </a:xfrm>
+          <a:prstGeom prst="rect">
+            <a:avLst/>
+          </a:prstGeom>
+        </p:spPr>
+      </p:pic>
+      <p:sp>
+        <p:nvSpPr>
+          <p:cNvPr id="29" name="Text 22"/>
           <p:cNvSpPr txBox="1"/>
           <p:nvPr/>
         </p:nvSpPr>
         <p:spPr>
           <a:xfrm>
-            <a:off x="4216298" y="2304288"/>
-            <a:ext cx="3759098" cy="621792"/>
+            <a:off x="4322978" y="3611880"/>
+            <a:ext cx="3545738" cy="868680"/>
           </a:xfrm>
           <a:prstGeom prst="rect">
             <a:avLst/>
@@ -5392,7 +5152,7 @@
               <a:buNone/>
             </a:pPr>
             <a:r>
-              <a:rPr lang="en-US" sz="3600" b="1" dirty="0">
+              <a:rPr lang="en-US" sz="5400" b="1" dirty="0">
                 <a:solidFill>
                   <a:srgbClr val="8E2F3C"/>
                 </a:solidFill>
@@ -5402,20 +5162,20 @@
               </a:rPr>
               <a:t>17%</a:t>
             </a:r>
-            <a:endParaRPr lang="en-US" sz="3600" dirty="0"/>
-          </a:p>
-        </p:txBody>
-      </p:sp>
-      <p:sp>
-        <p:nvSpPr>
-          <p:cNvPr id="27" name="Text 22"/>
+            <a:endParaRPr lang="en-US" sz="5400" dirty="0"/>
+          </a:p>
+        </p:txBody>
+      </p:sp>
+      <p:sp>
+        <p:nvSpPr>
+          <p:cNvPr id="30" name="Text 23"/>
           <p:cNvSpPr txBox="1"/>
           <p:nvPr/>
         </p:nvSpPr>
         <p:spPr>
           <a:xfrm>
-            <a:off x="4490618" y="2926080"/>
-            <a:ext cx="3210458" cy="548640"/>
+            <a:off x="4597298" y="4526280"/>
+            <a:ext cx="2997098" cy="411480"/>
           </a:xfrm>
           <a:prstGeom prst="rect">
             <a:avLst/>
@@ -5424,14 +5184,14 @@
           <a:ln/>
         </p:spPr>
         <p:txBody>
-          <a:bodyPr wrap="square" lIns="0" tIns="0" rIns="0" bIns="0" rtlCol="0" anchor="t"/>
+          <a:bodyPr wrap="square" lIns="0" tIns="0" rIns="0" bIns="0" rtlCol="0" anchor="ctr"/>
           <a:lstStyle/>
           <a:p>
             <a:pPr rtl="1" algn="ctr" indent="0" marL="0">
               <a:buNone/>
             </a:pPr>
             <a:r>
-              <a:rPr lang="en-US" sz="1300" dirty="0">
+              <a:rPr lang="en-US" sz="1800" dirty="0">
                 <a:solidFill>
                   <a:srgbClr val="21141A"/>
                 </a:solidFill>
@@ -5439,22 +5199,73 @@
                 <a:ea typeface="IBM Plex Sans Arabic" pitchFamily="34" charset="-122"/>
                 <a:cs typeface="IBM Plex Sans Arabic" pitchFamily="34" charset="-120"/>
               </a:rPr>
-              <a:t>متوسط تجاوز ميزانية السحابة</a:t>
-            </a:r>
-            <a:endParaRPr lang="en-US" sz="1300" dirty="0"/>
-          </a:p>
-        </p:txBody>
-      </p:sp>
-      <p:sp>
-        <p:nvSpPr>
-          <p:cNvPr id="28" name="Text 23"/>
+              <a:t>تجاوز للميزانية</a:t>
+            </a:r>
+            <a:endParaRPr lang="en-US" sz="1800" dirty="0"/>
+          </a:p>
+        </p:txBody>
+      </p:sp>
+      <p:sp>
+        <p:nvSpPr>
+          <p:cNvPr id="31" name="Shape 24"/>
+          <p:cNvSpPr/>
+          <p:nvPr/>
+        </p:nvSpPr>
+        <p:spPr>
+          <a:xfrm>
+            <a:off x="457200" y="2743200"/>
+            <a:ext cx="3545738" cy="2377440"/>
+          </a:xfrm>
+          <a:prstGeom prst="roundRect">
+            <a:avLst>
+              <a:gd name="adj" fmla="val 7692"/>
+            </a:avLst>
+          </a:prstGeom>
+          <a:solidFill>
+            <a:srgbClr val="FFFBF8"/>
+          </a:solidFill>
+          <a:ln w="9525">
+            <a:solidFill>
+              <a:srgbClr val="E3D5CC"/>
+            </a:solidFill>
+            <a:prstDash val="solid"/>
+          </a:ln>
+        </p:spPr>
+      </p:sp>
+      <p:pic>
+        <p:nvPicPr>
+          <p:cNvPr id="32" name="Image 5" descr="/tmp/claude-0/-home-claude/750ff410-f4aa-5276-9360-1e19d018b112/scratchpad/c/assets/i-server-br.png">    </p:cNvPr>
+          <p:cNvPicPr>
+            <a:picLocks noChangeAspect="1"/>
+          </p:cNvPicPr>
+          <p:nvPr/>
+        </p:nvPicPr>
+        <p:blipFill>
+          <a:blip r:embed="rId6"/>
+          <a:stretch>
+            <a:fillRect/>
+          </a:stretch>
+        </p:blipFill>
+        <p:spPr>
+          <a:xfrm>
+            <a:off x="1955749" y="3017520"/>
+            <a:ext cx="548640" cy="548640"/>
+          </a:xfrm>
+          <a:prstGeom prst="rect">
+            <a:avLst/>
+          </a:prstGeom>
+        </p:spPr>
+      </p:pic>
+      <p:sp>
+        <p:nvSpPr>
+          <p:cNvPr id="33" name="Text 25"/>
           <p:cNvSpPr txBox="1"/>
           <p:nvPr/>
         </p:nvSpPr>
         <p:spPr>
           <a:xfrm>
-            <a:off x="457200" y="2304288"/>
-            <a:ext cx="3759098" cy="621792"/>
+            <a:off x="457200" y="3611880"/>
+            <a:ext cx="3545738" cy="868680"/>
           </a:xfrm>
           <a:prstGeom prst="rect">
             <a:avLst/>
@@ -5470,7 +5281,7 @@
               <a:buNone/>
             </a:pPr>
             <a:r>
-              <a:rPr lang="en-US" sz="3600" b="1" dirty="0">
+              <a:rPr lang="en-US" sz="5400" b="1" dirty="0">
                 <a:solidFill>
                   <a:srgbClr val="8E2F3C"/>
                 </a:solidFill>
@@ -5480,20 +5291,20 @@
               </a:rPr>
               <a:t>40%</a:t>
             </a:r>
-            <a:endParaRPr lang="en-US" sz="3600" dirty="0"/>
-          </a:p>
-        </p:txBody>
-      </p:sp>
-      <p:sp>
-        <p:nvSpPr>
-          <p:cNvPr id="29" name="Text 24"/>
+            <a:endParaRPr lang="en-US" sz="5400" dirty="0"/>
+          </a:p>
+        </p:txBody>
+      </p:sp>
+      <p:sp>
+        <p:nvSpPr>
+          <p:cNvPr id="34" name="Text 26"/>
           <p:cNvSpPr txBox="1"/>
           <p:nvPr/>
         </p:nvSpPr>
         <p:spPr>
           <a:xfrm>
-            <a:off x="731520" y="2926080"/>
-            <a:ext cx="3210458" cy="548640"/>
+            <a:off x="731520" y="4526280"/>
+            <a:ext cx="2997098" cy="411480"/>
           </a:xfrm>
           <a:prstGeom prst="rect">
             <a:avLst/>
@@ -5502,14 +5313,14 @@
           <a:ln/>
         </p:spPr>
         <p:txBody>
-          <a:bodyPr wrap="square" lIns="0" tIns="0" rIns="0" bIns="0" rtlCol="0" anchor="t"/>
+          <a:bodyPr wrap="square" lIns="0" tIns="0" rIns="0" bIns="0" rtlCol="0" anchor="ctr"/>
           <a:lstStyle/>
           <a:p>
             <a:pPr rtl="1" algn="ctr" indent="0" marL="0">
               <a:buNone/>
             </a:pPr>
             <a:r>
-              <a:rPr lang="en-US" sz="1300" dirty="0">
+              <a:rPr lang="en-US" sz="1800" dirty="0">
                 <a:solidFill>
                   <a:srgbClr val="21141A"/>
                 </a:solidFill>
@@ -5517,22 +5328,22 @@
                 <a:ea typeface="IBM Plex Sans Arabic" pitchFamily="34" charset="-122"/>
                 <a:cs typeface="IBM Plex Sans Arabic" pitchFamily="34" charset="-120"/>
               </a:rPr>
-              <a:t>من المؤسسات تعرضت لعطل كبير سببه خطأ بشري</a:t>
-            </a:r>
-            <a:endParaRPr lang="en-US" sz="1300" dirty="0"/>
-          </a:p>
-        </p:txBody>
-      </p:sp>
-      <p:sp>
-        <p:nvSpPr>
-          <p:cNvPr id="30" name="Text 25"/>
+              <a:t>أعطال سببها خطأ بشري</a:t>
+            </a:r>
+            <a:endParaRPr lang="en-US" sz="1800" dirty="0"/>
+          </a:p>
+        </p:txBody>
+      </p:sp>
+      <p:sp>
+        <p:nvSpPr>
+          <p:cNvPr id="35" name="Text 27"/>
           <p:cNvSpPr txBox="1"/>
           <p:nvPr/>
         </p:nvSpPr>
         <p:spPr>
           <a:xfrm>
-            <a:off x="6263640" y="3675888"/>
-            <a:ext cx="5470855" cy="310896"/>
+            <a:off x="457200" y="5349240"/>
+            <a:ext cx="11277295" cy="411480"/>
           </a:xfrm>
           <a:prstGeom prst="rect">
             <a:avLst/>
@@ -5544,11 +5355,11 @@
           <a:bodyPr wrap="square" lIns="0" tIns="0" rIns="0" bIns="0" rtlCol="0" anchor="t"/>
           <a:lstStyle/>
           <a:p>
-            <a:pPr rtl="1" algn="r" indent="0" marL="0">
+            <a:pPr rtl="1" algn="ctr" indent="0" marL="0">
               <a:buNone/>
             </a:pPr>
             <a:r>
-              <a:rPr lang="en-US" sz="1600" b="1" dirty="0">
+              <a:rPr lang="en-US" sz="1800" b="1" dirty="0">
                 <a:solidFill>
                   <a:srgbClr val="8E2F3C"/>
                 </a:solidFill>
@@ -5556,44 +5367,22 @@
                 <a:ea typeface="IBM Plex Sans Arabic" pitchFamily="34" charset="-122"/>
                 <a:cs typeface="IBM Plex Sans Arabic" pitchFamily="34" charset="-120"/>
               </a:rPr>
-              <a:t>الأسباب الجذرية</a:t>
-            </a:r>
-            <a:endParaRPr lang="en-US" sz="1600" dirty="0"/>
-          </a:p>
-        </p:txBody>
-      </p:sp>
-      <p:sp>
-        <p:nvSpPr>
-          <p:cNvPr id="31" name="Shape 26"/>
-          <p:cNvSpPr/>
-          <p:nvPr/>
-        </p:nvSpPr>
-        <p:spPr>
-          <a:xfrm>
-            <a:off x="11350447" y="4078224"/>
-            <a:ext cx="384048" cy="384048"/>
-          </a:xfrm>
-          <a:prstGeom prst="roundRect">
-            <a:avLst>
-              <a:gd name="adj" fmla="val 19048"/>
-            </a:avLst>
-          </a:prstGeom>
-          <a:solidFill>
-            <a:srgbClr val="8E2F3C"/>
-          </a:solidFill>
-          <a:ln/>
-        </p:spPr>
-      </p:sp>
-      <p:sp>
-        <p:nvSpPr>
-          <p:cNvPr id="32" name="Text 27"/>
+              <a:t>ولا يوجد مختص FinOps في الشركات المتوسطة</a:t>
+            </a:r>
+            <a:endParaRPr lang="en-US" sz="1800" dirty="0"/>
+          </a:p>
+        </p:txBody>
+      </p:sp>
+      <p:sp>
+        <p:nvSpPr>
+          <p:cNvPr id="36" name="Text 28"/>
           <p:cNvSpPr txBox="1"/>
           <p:nvPr/>
         </p:nvSpPr>
         <p:spPr>
           <a:xfrm>
-            <a:off x="11350447" y="4078224"/>
-            <a:ext cx="384048" cy="384048"/>
+            <a:off x="457200" y="5989320"/>
+            <a:ext cx="11277295" cy="237744"/>
           </a:xfrm>
           <a:prstGeom prst="rect">
             <a:avLst/>
@@ -5605,901 +5394,7 @@
           <a:bodyPr wrap="square" lIns="0" tIns="0" rIns="0" bIns="0" rtlCol="0" anchor="ctr"/>
           <a:lstStyle/>
           <a:p>
-            <a:pPr algn="ctr" indent="0" marL="0">
-              <a:buNone/>
-            </a:pPr>
-            <a:r>
-              <a:rPr lang="en-US" sz="1200" b="1" dirty="0">
-                <a:solidFill>
-                  <a:srgbClr val="FBF6EE"/>
-                </a:solidFill>
-                <a:latin typeface="IBM Plex Sans Arabic" pitchFamily="34" charset="0"/>
-                <a:ea typeface="IBM Plex Sans Arabic" pitchFamily="34" charset="-122"/>
-                <a:cs typeface="IBM Plex Sans Arabic" pitchFamily="34" charset="-120"/>
-              </a:rPr>
-              <a:t>01</a:t>
-            </a:r>
-            <a:endParaRPr lang="en-US" sz="1200" dirty="0"/>
-          </a:p>
-        </p:txBody>
-      </p:sp>
-      <p:sp>
-        <p:nvSpPr>
-          <p:cNvPr id="33" name="Text 28"/>
-          <p:cNvSpPr txBox="1"/>
-          <p:nvPr/>
-        </p:nvSpPr>
-        <p:spPr>
-          <a:xfrm>
-            <a:off x="6263640" y="4041648"/>
-            <a:ext cx="4949647" cy="246888"/>
-          </a:xfrm>
-          <a:prstGeom prst="rect">
-            <a:avLst/>
-          </a:prstGeom>
-          <a:noFill/>
-          <a:ln/>
-        </p:spPr>
-        <p:txBody>
-          <a:bodyPr wrap="square" lIns="0" tIns="0" rIns="0" bIns="0" rtlCol="0" anchor="t"/>
-          <a:lstStyle/>
-          <a:p>
-            <a:pPr rtl="1" algn="r" indent="0" marL="0">
-              <a:buNone/>
-            </a:pPr>
-            <a:r>
-              <a:rPr lang="en-US" sz="1350" b="1" dirty="0">
-                <a:solidFill>
-                  <a:srgbClr val="21141A"/>
-                </a:solidFill>
-                <a:latin typeface="IBM Plex Sans Arabic" pitchFamily="34" charset="0"/>
-                <a:ea typeface="IBM Plex Sans Arabic" pitchFamily="34" charset="-122"/>
-                <a:cs typeface="IBM Plex Sans Arabic" pitchFamily="34" charset="-120"/>
-              </a:rPr>
-              <a:t>لا أحد يملك حذف الموارد</a:t>
-            </a:r>
-            <a:endParaRPr lang="en-US" sz="1350" dirty="0"/>
-          </a:p>
-        </p:txBody>
-      </p:sp>
-      <p:sp>
-        <p:nvSpPr>
-          <p:cNvPr id="34" name="Text 29"/>
-          <p:cNvSpPr txBox="1"/>
-          <p:nvPr/>
-        </p:nvSpPr>
-        <p:spPr>
-          <a:xfrm>
-            <a:off x="6263640" y="4288536"/>
-            <a:ext cx="4949647" cy="228600"/>
-          </a:xfrm>
-          <a:prstGeom prst="rect">
-            <a:avLst/>
-          </a:prstGeom>
-          <a:noFill/>
-          <a:ln/>
-        </p:spPr>
-        <p:txBody>
-          <a:bodyPr wrap="square" lIns="0" tIns="0" rIns="0" bIns="0" rtlCol="0" anchor="t"/>
-          <a:lstStyle/>
-          <a:p>
-            <a:pPr rtl="1" algn="r" indent="0" marL="0">
-              <a:buNone/>
-            </a:pPr>
-            <a:r>
-              <a:rPr lang="en-US" sz="1100" dirty="0">
-                <a:solidFill>
-                  <a:srgbClr val="7F6C72"/>
-                </a:solidFill>
-                <a:latin typeface="IBM Plex Sans Arabic" pitchFamily="34" charset="0"/>
-                <a:ea typeface="IBM Plex Sans Arabic" pitchFamily="34" charset="-122"/>
-                <a:cs typeface="IBM Plex Sans Arabic" pitchFamily="34" charset="-120"/>
-              </a:rPr>
-              <a:t>إنشاء المورد سهل وحذفه بلا مالك، والفاتورة تصل للمالية لا للمهندس</a:t>
-            </a:r>
-            <a:endParaRPr lang="en-US" sz="1100" dirty="0"/>
-          </a:p>
-        </p:txBody>
-      </p:sp>
-      <p:sp>
-        <p:nvSpPr>
-          <p:cNvPr id="35" name="Shape 30"/>
-          <p:cNvSpPr/>
-          <p:nvPr/>
-        </p:nvSpPr>
-        <p:spPr>
-          <a:xfrm>
-            <a:off x="11350447" y="4553712"/>
-            <a:ext cx="384048" cy="384048"/>
-          </a:xfrm>
-          <a:prstGeom prst="roundRect">
-            <a:avLst>
-              <a:gd name="adj" fmla="val 19048"/>
-            </a:avLst>
-          </a:prstGeom>
-          <a:solidFill>
-            <a:srgbClr val="8E2F3C"/>
-          </a:solidFill>
-          <a:ln/>
-        </p:spPr>
-      </p:sp>
-      <p:sp>
-        <p:nvSpPr>
-          <p:cNvPr id="36" name="Text 31"/>
-          <p:cNvSpPr txBox="1"/>
-          <p:nvPr/>
-        </p:nvSpPr>
-        <p:spPr>
-          <a:xfrm>
-            <a:off x="11350447" y="4553712"/>
-            <a:ext cx="384048" cy="384048"/>
-          </a:xfrm>
-          <a:prstGeom prst="rect">
-            <a:avLst/>
-          </a:prstGeom>
-          <a:noFill/>
-          <a:ln/>
-        </p:spPr>
-        <p:txBody>
-          <a:bodyPr wrap="square" lIns="0" tIns="0" rIns="0" bIns="0" rtlCol="0" anchor="ctr"/>
-          <a:lstStyle/>
-          <a:p>
-            <a:pPr algn="ctr" indent="0" marL="0">
-              <a:buNone/>
-            </a:pPr>
-            <a:r>
-              <a:rPr lang="en-US" sz="1200" b="1" dirty="0">
-                <a:solidFill>
-                  <a:srgbClr val="FBF6EE"/>
-                </a:solidFill>
-                <a:latin typeface="IBM Plex Sans Arabic" pitchFamily="34" charset="0"/>
-                <a:ea typeface="IBM Plex Sans Arabic" pitchFamily="34" charset="-122"/>
-                <a:cs typeface="IBM Plex Sans Arabic" pitchFamily="34" charset="-120"/>
-              </a:rPr>
-              <a:t>02</a:t>
-            </a:r>
-            <a:endParaRPr lang="en-US" sz="1200" dirty="0"/>
-          </a:p>
-        </p:txBody>
-      </p:sp>
-      <p:sp>
-        <p:nvSpPr>
-          <p:cNvPr id="37" name="Text 32"/>
-          <p:cNvSpPr txBox="1"/>
-          <p:nvPr/>
-        </p:nvSpPr>
-        <p:spPr>
-          <a:xfrm>
-            <a:off x="6263640" y="4517136"/>
-            <a:ext cx="4949647" cy="246888"/>
-          </a:xfrm>
-          <a:prstGeom prst="rect">
-            <a:avLst/>
-          </a:prstGeom>
-          <a:noFill/>
-          <a:ln/>
-        </p:spPr>
-        <p:txBody>
-          <a:bodyPr wrap="square" lIns="0" tIns="0" rIns="0" bIns="0" rtlCol="0" anchor="t"/>
-          <a:lstStyle/>
-          <a:p>
-            <a:pPr rtl="1" algn="r" indent="0" marL="0">
-              <a:buNone/>
-            </a:pPr>
-            <a:r>
-              <a:rPr lang="en-US" sz="1350" b="1" dirty="0">
-                <a:solidFill>
-                  <a:srgbClr val="21141A"/>
-                </a:solidFill>
-                <a:latin typeface="IBM Plex Sans Arabic" pitchFamily="34" charset="0"/>
-                <a:ea typeface="IBM Plex Sans Arabic" pitchFamily="34" charset="-122"/>
-                <a:cs typeface="IBM Plex Sans Arabic" pitchFamily="34" charset="-120"/>
-              </a:rPr>
-              <a:t>لا يوجد مختص FinOps</a:t>
-            </a:r>
-            <a:endParaRPr lang="en-US" sz="1350" dirty="0"/>
-          </a:p>
-        </p:txBody>
-      </p:sp>
-      <p:sp>
-        <p:nvSpPr>
-          <p:cNvPr id="38" name="Text 33"/>
-          <p:cNvSpPr txBox="1"/>
-          <p:nvPr/>
-        </p:nvSpPr>
-        <p:spPr>
-          <a:xfrm>
-            <a:off x="6263640" y="4764024"/>
-            <a:ext cx="4949647" cy="228600"/>
-          </a:xfrm>
-          <a:prstGeom prst="rect">
-            <a:avLst/>
-          </a:prstGeom>
-          <a:noFill/>
-          <a:ln/>
-        </p:spPr>
-        <p:txBody>
-          <a:bodyPr wrap="square" lIns="0" tIns="0" rIns="0" bIns="0" rtlCol="0" anchor="t"/>
-          <a:lstStyle/>
-          <a:p>
-            <a:pPr rtl="1" algn="r" indent="0" marL="0">
-              <a:buNone/>
-            </a:pPr>
-            <a:r>
-              <a:rPr lang="en-US" sz="1100" dirty="0">
-                <a:solidFill>
-                  <a:srgbClr val="7F6C72"/>
-                </a:solidFill>
-                <a:latin typeface="IBM Plex Sans Arabic" pitchFamily="34" charset="0"/>
-                <a:ea typeface="IBM Plex Sans Arabic" pitchFamily="34" charset="-122"/>
-                <a:cs typeface="IBM Plex Sans Arabic" pitchFamily="34" charset="-120"/>
-              </a:rPr>
-              <a:t>شركة من 50 إلى 250 موظفاً لا توظف فريقاً لتكاليف السحابة</a:t>
-            </a:r>
-            <a:endParaRPr lang="en-US" sz="1100" dirty="0"/>
-          </a:p>
-        </p:txBody>
-      </p:sp>
-      <p:sp>
-        <p:nvSpPr>
-          <p:cNvPr id="39" name="Shape 34"/>
-          <p:cNvSpPr/>
-          <p:nvPr/>
-        </p:nvSpPr>
-        <p:spPr>
-          <a:xfrm>
-            <a:off x="11350447" y="5029200"/>
-            <a:ext cx="384048" cy="384048"/>
-          </a:xfrm>
-          <a:prstGeom prst="roundRect">
-            <a:avLst>
-              <a:gd name="adj" fmla="val 19048"/>
-            </a:avLst>
-          </a:prstGeom>
-          <a:solidFill>
-            <a:srgbClr val="8E2F3C"/>
-          </a:solidFill>
-          <a:ln/>
-        </p:spPr>
-      </p:sp>
-      <p:sp>
-        <p:nvSpPr>
-          <p:cNvPr id="40" name="Text 35"/>
-          <p:cNvSpPr txBox="1"/>
-          <p:nvPr/>
-        </p:nvSpPr>
-        <p:spPr>
-          <a:xfrm>
-            <a:off x="11350447" y="5029200"/>
-            <a:ext cx="384048" cy="384048"/>
-          </a:xfrm>
-          <a:prstGeom prst="rect">
-            <a:avLst/>
-          </a:prstGeom>
-          <a:noFill/>
-          <a:ln/>
-        </p:spPr>
-        <p:txBody>
-          <a:bodyPr wrap="square" lIns="0" tIns="0" rIns="0" bIns="0" rtlCol="0" anchor="ctr"/>
-          <a:lstStyle/>
-          <a:p>
-            <a:pPr algn="ctr" indent="0" marL="0">
-              <a:buNone/>
-            </a:pPr>
-            <a:r>
-              <a:rPr lang="en-US" sz="1200" b="1" dirty="0">
-                <a:solidFill>
-                  <a:srgbClr val="FBF6EE"/>
-                </a:solidFill>
-                <a:latin typeface="IBM Plex Sans Arabic" pitchFamily="34" charset="0"/>
-                <a:ea typeface="IBM Plex Sans Arabic" pitchFamily="34" charset="-122"/>
-                <a:cs typeface="IBM Plex Sans Arabic" pitchFamily="34" charset="-120"/>
-              </a:rPr>
-              <a:t>03</a:t>
-            </a:r>
-            <a:endParaRPr lang="en-US" sz="1200" dirty="0"/>
-          </a:p>
-        </p:txBody>
-      </p:sp>
-      <p:sp>
-        <p:nvSpPr>
-          <p:cNvPr id="41" name="Text 36"/>
-          <p:cNvSpPr txBox="1"/>
-          <p:nvPr/>
-        </p:nvSpPr>
-        <p:spPr>
-          <a:xfrm>
-            <a:off x="6263640" y="4992624"/>
-            <a:ext cx="4949647" cy="246888"/>
-          </a:xfrm>
-          <a:prstGeom prst="rect">
-            <a:avLst/>
-          </a:prstGeom>
-          <a:noFill/>
-          <a:ln/>
-        </p:spPr>
-        <p:txBody>
-          <a:bodyPr wrap="square" lIns="0" tIns="0" rIns="0" bIns="0" rtlCol="0" anchor="t"/>
-          <a:lstStyle/>
-          <a:p>
-            <a:pPr rtl="1" algn="r" indent="0" marL="0">
-              <a:buNone/>
-            </a:pPr>
-            <a:r>
-              <a:rPr lang="en-US" sz="1350" b="1" dirty="0">
-                <a:solidFill>
-                  <a:srgbClr val="21141A"/>
-                </a:solidFill>
-                <a:latin typeface="IBM Plex Sans Arabic" pitchFamily="34" charset="0"/>
-                <a:ea typeface="IBM Plex Sans Arabic" pitchFamily="34" charset="-122"/>
-                <a:cs typeface="IBM Plex Sans Arabic" pitchFamily="34" charset="-120"/>
-              </a:rPr>
-              <a:t>الأدوات لا ترى السحب المحلية</a:t>
-            </a:r>
-            <a:endParaRPr lang="en-US" sz="1350" dirty="0"/>
-          </a:p>
-        </p:txBody>
-      </p:sp>
-      <p:sp>
-        <p:nvSpPr>
-          <p:cNvPr id="42" name="Text 37"/>
-          <p:cNvSpPr txBox="1"/>
-          <p:nvPr/>
-        </p:nvSpPr>
-        <p:spPr>
-          <a:xfrm>
-            <a:off x="6263640" y="5239512"/>
-            <a:ext cx="4949647" cy="228600"/>
-          </a:xfrm>
-          <a:prstGeom prst="rect">
-            <a:avLst/>
-          </a:prstGeom>
-          <a:noFill/>
-          <a:ln/>
-        </p:spPr>
-        <p:txBody>
-          <a:bodyPr wrap="square" lIns="0" tIns="0" rIns="0" bIns="0" rtlCol="0" anchor="t"/>
-          <a:lstStyle/>
-          <a:p>
-            <a:pPr rtl="1" algn="r" indent="0" marL="0">
-              <a:buNone/>
-            </a:pPr>
-            <a:r>
-              <a:rPr lang="en-US" sz="1100" dirty="0">
-                <a:solidFill>
-                  <a:srgbClr val="7F6C72"/>
-                </a:solidFill>
-                <a:latin typeface="IBM Plex Sans Arabic" pitchFamily="34" charset="0"/>
-                <a:ea typeface="IBM Plex Sans Arabic" pitchFamily="34" charset="-122"/>
-                <a:cs typeface="IBM Plex Sans Arabic" pitchFamily="34" charset="-120"/>
-              </a:rPr>
-              <a:t>STC Cloud وSCCC وCNTXT خارج أدوات FinOps العالمية</a:t>
-            </a:r>
-            <a:endParaRPr lang="en-US" sz="1100" dirty="0"/>
-          </a:p>
-        </p:txBody>
-      </p:sp>
-      <p:sp>
-        <p:nvSpPr>
-          <p:cNvPr id="43" name="Shape 38"/>
-          <p:cNvSpPr/>
-          <p:nvPr/>
-        </p:nvSpPr>
-        <p:spPr>
-          <a:xfrm>
-            <a:off x="11350447" y="5504688"/>
-            <a:ext cx="384048" cy="384048"/>
-          </a:xfrm>
-          <a:prstGeom prst="roundRect">
-            <a:avLst>
-              <a:gd name="adj" fmla="val 19048"/>
-            </a:avLst>
-          </a:prstGeom>
-          <a:solidFill>
-            <a:srgbClr val="8E2F3C"/>
-          </a:solidFill>
-          <a:ln/>
-        </p:spPr>
-      </p:sp>
-      <p:sp>
-        <p:nvSpPr>
-          <p:cNvPr id="44" name="Text 39"/>
-          <p:cNvSpPr txBox="1"/>
-          <p:nvPr/>
-        </p:nvSpPr>
-        <p:spPr>
-          <a:xfrm>
-            <a:off x="11350447" y="5504688"/>
-            <a:ext cx="384048" cy="384048"/>
-          </a:xfrm>
-          <a:prstGeom prst="rect">
-            <a:avLst/>
-          </a:prstGeom>
-          <a:noFill/>
-          <a:ln/>
-        </p:spPr>
-        <p:txBody>
-          <a:bodyPr wrap="square" lIns="0" tIns="0" rIns="0" bIns="0" rtlCol="0" anchor="ctr"/>
-          <a:lstStyle/>
-          <a:p>
-            <a:pPr algn="ctr" indent="0" marL="0">
-              <a:buNone/>
-            </a:pPr>
-            <a:r>
-              <a:rPr lang="en-US" sz="1200" b="1" dirty="0">
-                <a:solidFill>
-                  <a:srgbClr val="FBF6EE"/>
-                </a:solidFill>
-                <a:latin typeface="IBM Plex Sans Arabic" pitchFamily="34" charset="0"/>
-                <a:ea typeface="IBM Plex Sans Arabic" pitchFamily="34" charset="-122"/>
-                <a:cs typeface="IBM Plex Sans Arabic" pitchFamily="34" charset="-120"/>
-              </a:rPr>
-              <a:t>04</a:t>
-            </a:r>
-            <a:endParaRPr lang="en-US" sz="1200" dirty="0"/>
-          </a:p>
-        </p:txBody>
-      </p:sp>
-      <p:sp>
-        <p:nvSpPr>
-          <p:cNvPr id="45" name="Text 40"/>
-          <p:cNvSpPr txBox="1"/>
-          <p:nvPr/>
-        </p:nvSpPr>
-        <p:spPr>
-          <a:xfrm>
-            <a:off x="6263640" y="5468112"/>
-            <a:ext cx="4949647" cy="246888"/>
-          </a:xfrm>
-          <a:prstGeom prst="rect">
-            <a:avLst/>
-          </a:prstGeom>
-          <a:noFill/>
-          <a:ln/>
-        </p:spPr>
-        <p:txBody>
-          <a:bodyPr wrap="square" lIns="0" tIns="0" rIns="0" bIns="0" rtlCol="0" anchor="t"/>
-          <a:lstStyle/>
-          <a:p>
-            <a:pPr rtl="1" algn="r" indent="0" marL="0">
-              <a:buNone/>
-            </a:pPr>
-            <a:r>
-              <a:rPr lang="en-US" sz="1350" b="1" dirty="0">
-                <a:solidFill>
-                  <a:srgbClr val="21141A"/>
-                </a:solidFill>
-                <a:latin typeface="IBM Plex Sans Arabic" pitchFamily="34" charset="0"/>
-                <a:ea typeface="IBM Plex Sans Arabic" pitchFamily="34" charset="-122"/>
-                <a:cs typeface="IBM Plex Sans Arabic" pitchFamily="34" charset="-120"/>
-              </a:rPr>
-              <a:t>الخوف من التوقف</a:t>
-            </a:r>
-            <a:endParaRPr lang="en-US" sz="1350" dirty="0"/>
-          </a:p>
-        </p:txBody>
-      </p:sp>
-      <p:sp>
-        <p:nvSpPr>
-          <p:cNvPr id="46" name="Text 41"/>
-          <p:cNvSpPr txBox="1"/>
-          <p:nvPr/>
-        </p:nvSpPr>
-        <p:spPr>
-          <a:xfrm>
-            <a:off x="6263640" y="5715000"/>
-            <a:ext cx="4949647" cy="228600"/>
-          </a:xfrm>
-          <a:prstGeom prst="rect">
-            <a:avLst/>
-          </a:prstGeom>
-          <a:noFill/>
-          <a:ln/>
-        </p:spPr>
-        <p:txBody>
-          <a:bodyPr wrap="square" lIns="0" tIns="0" rIns="0" bIns="0" rtlCol="0" anchor="t"/>
-          <a:lstStyle/>
-          <a:p>
-            <a:pPr rtl="1" algn="r" indent="0" marL="0">
-              <a:buNone/>
-            </a:pPr>
-            <a:r>
-              <a:rPr lang="en-US" sz="1100" dirty="0">
-                <a:solidFill>
-                  <a:srgbClr val="7F6C72"/>
-                </a:solidFill>
-                <a:latin typeface="IBM Plex Sans Arabic" pitchFamily="34" charset="0"/>
-                <a:ea typeface="IBM Plex Sans Arabic" pitchFamily="34" charset="-122"/>
-                <a:cs typeface="IBM Plex Sans Arabic" pitchFamily="34" charset="-120"/>
-              </a:rPr>
-              <a:t>نقرة خاطئة قد توقف خدمة حيوية، فلا أحد يجرؤ على الإيقاف</a:t>
-            </a:r>
-            <a:endParaRPr lang="en-US" sz="1100" dirty="0"/>
-          </a:p>
-        </p:txBody>
-      </p:sp>
-      <p:sp>
-        <p:nvSpPr>
-          <p:cNvPr id="47" name="Shape 42"/>
-          <p:cNvSpPr/>
-          <p:nvPr/>
-        </p:nvSpPr>
-        <p:spPr>
-          <a:xfrm>
-            <a:off x="457200" y="3703320"/>
-            <a:ext cx="5440680" cy="2212848"/>
-          </a:xfrm>
-          <a:prstGeom prst="roundRect">
-            <a:avLst>
-              <a:gd name="adj" fmla="val 6612"/>
-            </a:avLst>
-          </a:prstGeom>
-          <a:solidFill>
-            <a:srgbClr val="FFFBF8"/>
-          </a:solidFill>
-          <a:ln w="9525">
-            <a:solidFill>
-              <a:srgbClr val="E3D5CC"/>
-            </a:solidFill>
-            <a:prstDash val="solid"/>
-          </a:ln>
-        </p:spPr>
-      </p:sp>
-      <p:sp>
-        <p:nvSpPr>
-          <p:cNvPr id="48" name="Text 43"/>
-          <p:cNvSpPr txBox="1"/>
-          <p:nvPr/>
-        </p:nvSpPr>
-        <p:spPr>
-          <a:xfrm>
-            <a:off x="731520" y="3822192"/>
-            <a:ext cx="4892040" cy="329184"/>
-          </a:xfrm>
-          <a:prstGeom prst="rect">
-            <a:avLst/>
-          </a:prstGeom>
-          <a:noFill/>
-          <a:ln/>
-        </p:spPr>
-        <p:txBody>
-          <a:bodyPr wrap="square" lIns="0" tIns="0" rIns="0" bIns="0" rtlCol="0" anchor="t"/>
-          <a:lstStyle/>
-          <a:p>
-            <a:pPr rtl="1" algn="r" indent="0" marL="0">
-              <a:buNone/>
-            </a:pPr>
-            <a:r>
-              <a:rPr lang="en-US" sz="1600" b="1" dirty="0">
-                <a:solidFill>
-                  <a:srgbClr val="21141A"/>
-                </a:solidFill>
-                <a:latin typeface="IBM Plex Sans Arabic" pitchFamily="34" charset="0"/>
-                <a:ea typeface="IBM Plex Sans Arabic" pitchFamily="34" charset="-122"/>
-                <a:cs typeface="IBM Plex Sans Arabic" pitchFamily="34" charset="-120"/>
-              </a:rPr>
-              <a:t>من يتأثر؟</a:t>
-            </a:r>
-            <a:endParaRPr lang="en-US" sz="1600" dirty="0"/>
-          </a:p>
-        </p:txBody>
-      </p:sp>
-      <p:sp>
-        <p:nvSpPr>
-          <p:cNvPr id="49" name="Shape 44"/>
-          <p:cNvSpPr/>
-          <p:nvPr/>
-        </p:nvSpPr>
-        <p:spPr>
-          <a:xfrm>
-            <a:off x="5477256" y="4315968"/>
-            <a:ext cx="146304" cy="146304"/>
-          </a:xfrm>
-          <a:prstGeom prst="rect">
-            <a:avLst/>
-          </a:prstGeom>
-          <a:solidFill>
-            <a:srgbClr val="D48A93"/>
-          </a:solidFill>
-          <a:ln/>
-        </p:spPr>
-      </p:sp>
-      <p:sp>
-        <p:nvSpPr>
-          <p:cNvPr id="50" name="Text 45"/>
-          <p:cNvSpPr txBox="1"/>
-          <p:nvPr/>
-        </p:nvSpPr>
-        <p:spPr>
-          <a:xfrm>
-            <a:off x="731520" y="4251960"/>
-            <a:ext cx="4663440" cy="256032"/>
-          </a:xfrm>
-          <a:prstGeom prst="rect">
-            <a:avLst/>
-          </a:prstGeom>
-          <a:noFill/>
-          <a:ln/>
-        </p:spPr>
-        <p:txBody>
-          <a:bodyPr wrap="square" lIns="0" tIns="0" rIns="0" bIns="0" rtlCol="0" anchor="t"/>
-          <a:lstStyle/>
-          <a:p>
-            <a:pPr rtl="1" algn="r" indent="0" marL="0">
-              <a:buNone/>
-            </a:pPr>
-            <a:r>
-              <a:rPr lang="en-US" sz="1400" b="1" dirty="0">
-                <a:solidFill>
-                  <a:srgbClr val="21141A"/>
-                </a:solidFill>
-                <a:latin typeface="IBM Plex Sans Arabic" pitchFamily="34" charset="0"/>
-                <a:ea typeface="IBM Plex Sans Arabic" pitchFamily="34" charset="-122"/>
-                <a:cs typeface="IBM Plex Sans Arabic" pitchFamily="34" charset="-120"/>
-              </a:rPr>
-              <a:t>المدير المالي</a:t>
-            </a:r>
-            <a:endParaRPr lang="en-US" sz="1400" dirty="0"/>
-          </a:p>
-        </p:txBody>
-      </p:sp>
-      <p:sp>
-        <p:nvSpPr>
-          <p:cNvPr id="51" name="Text 46"/>
-          <p:cNvSpPr txBox="1"/>
-          <p:nvPr/>
-        </p:nvSpPr>
-        <p:spPr>
-          <a:xfrm>
-            <a:off x="731520" y="4507992"/>
-            <a:ext cx="4663440" cy="237744"/>
-          </a:xfrm>
-          <a:prstGeom prst="rect">
-            <a:avLst/>
-          </a:prstGeom>
-          <a:noFill/>
-          <a:ln/>
-        </p:spPr>
-        <p:txBody>
-          <a:bodyPr wrap="square" lIns="0" tIns="0" rIns="0" bIns="0" rtlCol="0" anchor="t"/>
-          <a:lstStyle/>
-          <a:p>
-            <a:pPr rtl="1" algn="r" indent="0" marL="0">
-              <a:buNone/>
-            </a:pPr>
-            <a:r>
-              <a:rPr lang="en-US" sz="1200" dirty="0">
-                <a:solidFill>
-                  <a:srgbClr val="7F6C72"/>
-                </a:solidFill>
-                <a:latin typeface="IBM Plex Sans Arabic" pitchFamily="34" charset="0"/>
-                <a:ea typeface="IBM Plex Sans Arabic" pitchFamily="34" charset="-122"/>
-                <a:cs typeface="IBM Plex Sans Arabic" pitchFamily="34" charset="-120"/>
-              </a:rPr>
-              <a:t>ميزانية غير متوقعة كل شهر</a:t>
-            </a:r>
-            <a:endParaRPr lang="en-US" sz="1200" dirty="0"/>
-          </a:p>
-        </p:txBody>
-      </p:sp>
-      <p:sp>
-        <p:nvSpPr>
-          <p:cNvPr id="52" name="Shape 47"/>
-          <p:cNvSpPr/>
-          <p:nvPr/>
-        </p:nvSpPr>
-        <p:spPr>
-          <a:xfrm>
-            <a:off x="5477256" y="4846320"/>
-            <a:ext cx="146304" cy="146304"/>
-          </a:xfrm>
-          <a:prstGeom prst="rect">
-            <a:avLst/>
-          </a:prstGeom>
-          <a:solidFill>
-            <a:srgbClr val="C9A46E"/>
-          </a:solidFill>
-          <a:ln/>
-        </p:spPr>
-      </p:sp>
-      <p:sp>
-        <p:nvSpPr>
-          <p:cNvPr id="53" name="Text 48"/>
-          <p:cNvSpPr txBox="1"/>
-          <p:nvPr/>
-        </p:nvSpPr>
-        <p:spPr>
-          <a:xfrm>
-            <a:off x="731520" y="4782312"/>
-            <a:ext cx="4663440" cy="256032"/>
-          </a:xfrm>
-          <a:prstGeom prst="rect">
-            <a:avLst/>
-          </a:prstGeom>
-          <a:noFill/>
-          <a:ln/>
-        </p:spPr>
-        <p:txBody>
-          <a:bodyPr wrap="square" lIns="0" tIns="0" rIns="0" bIns="0" rtlCol="0" anchor="t"/>
-          <a:lstStyle/>
-          <a:p>
-            <a:pPr rtl="1" algn="r" indent="0" marL="0">
-              <a:buNone/>
-            </a:pPr>
-            <a:r>
-              <a:rPr lang="en-US" sz="1400" b="1" dirty="0">
-                <a:solidFill>
-                  <a:srgbClr val="21141A"/>
-                </a:solidFill>
-                <a:latin typeface="IBM Plex Sans Arabic" pitchFamily="34" charset="0"/>
-                <a:ea typeface="IBM Plex Sans Arabic" pitchFamily="34" charset="-122"/>
-                <a:cs typeface="IBM Plex Sans Arabic" pitchFamily="34" charset="-120"/>
-              </a:rPr>
-              <a:t>المؤسس</a:t>
-            </a:r>
-            <a:endParaRPr lang="en-US" sz="1400" dirty="0"/>
-          </a:p>
-        </p:txBody>
-      </p:sp>
-      <p:sp>
-        <p:nvSpPr>
-          <p:cNvPr id="54" name="Text 49"/>
-          <p:cNvSpPr txBox="1"/>
-          <p:nvPr/>
-        </p:nvSpPr>
-        <p:spPr>
-          <a:xfrm>
-            <a:off x="731520" y="5038344"/>
-            <a:ext cx="4663440" cy="237744"/>
-          </a:xfrm>
-          <a:prstGeom prst="rect">
-            <a:avLst/>
-          </a:prstGeom>
-          <a:noFill/>
-          <a:ln/>
-        </p:spPr>
-        <p:txBody>
-          <a:bodyPr wrap="square" lIns="0" tIns="0" rIns="0" bIns="0" rtlCol="0" anchor="t"/>
-          <a:lstStyle/>
-          <a:p>
-            <a:pPr rtl="1" algn="r" indent="0" marL="0">
-              <a:buNone/>
-            </a:pPr>
-            <a:r>
-              <a:rPr lang="en-US" sz="1200" dirty="0">
-                <a:solidFill>
-                  <a:srgbClr val="7F6C72"/>
-                </a:solidFill>
-                <a:latin typeface="IBM Plex Sans Arabic" pitchFamily="34" charset="0"/>
-                <a:ea typeface="IBM Plex Sans Arabic" pitchFamily="34" charset="-122"/>
-                <a:cs typeface="IBM Plex Sans Arabic" pitchFamily="34" charset="-120"/>
-              </a:rPr>
-              <a:t>السيولة تنفد أسرع مما يجب</a:t>
-            </a:r>
-            <a:endParaRPr lang="en-US" sz="1200" dirty="0"/>
-          </a:p>
-        </p:txBody>
-      </p:sp>
-      <p:sp>
-        <p:nvSpPr>
-          <p:cNvPr id="55" name="Shape 50"/>
-          <p:cNvSpPr/>
-          <p:nvPr/>
-        </p:nvSpPr>
-        <p:spPr>
-          <a:xfrm>
-            <a:off x="5477256" y="5376672"/>
-            <a:ext cx="146304" cy="146304"/>
-          </a:xfrm>
-          <a:prstGeom prst="rect">
-            <a:avLst/>
-          </a:prstGeom>
-          <a:solidFill>
-            <a:srgbClr val="7FB27A"/>
-          </a:solidFill>
-          <a:ln/>
-        </p:spPr>
-      </p:sp>
-      <p:sp>
-        <p:nvSpPr>
-          <p:cNvPr id="56" name="Text 51"/>
-          <p:cNvSpPr txBox="1"/>
-          <p:nvPr/>
-        </p:nvSpPr>
-        <p:spPr>
-          <a:xfrm>
-            <a:off x="731520" y="5312664"/>
-            <a:ext cx="4663440" cy="256032"/>
-          </a:xfrm>
-          <a:prstGeom prst="rect">
-            <a:avLst/>
-          </a:prstGeom>
-          <a:noFill/>
-          <a:ln/>
-        </p:spPr>
-        <p:txBody>
-          <a:bodyPr wrap="square" lIns="0" tIns="0" rIns="0" bIns="0" rtlCol="0" anchor="t"/>
-          <a:lstStyle/>
-          <a:p>
-            <a:pPr rtl="1" algn="r" indent="0" marL="0">
-              <a:buNone/>
-            </a:pPr>
-            <a:r>
-              <a:rPr lang="en-US" sz="1400" b="1" dirty="0">
-                <a:solidFill>
-                  <a:srgbClr val="21141A"/>
-                </a:solidFill>
-                <a:latin typeface="IBM Plex Sans Arabic" pitchFamily="34" charset="0"/>
-                <a:ea typeface="IBM Plex Sans Arabic" pitchFamily="34" charset="-122"/>
-                <a:cs typeface="IBM Plex Sans Arabic" pitchFamily="34" charset="-120"/>
-              </a:rPr>
-              <a:t>مهندس DevOps</a:t>
-            </a:r>
-            <a:endParaRPr lang="en-US" sz="1400" dirty="0"/>
-          </a:p>
-        </p:txBody>
-      </p:sp>
-      <p:sp>
-        <p:nvSpPr>
-          <p:cNvPr id="57" name="Text 52"/>
-          <p:cNvSpPr txBox="1"/>
-          <p:nvPr/>
-        </p:nvSpPr>
-        <p:spPr>
-          <a:xfrm>
-            <a:off x="731520" y="5568696"/>
-            <a:ext cx="4663440" cy="237744"/>
-          </a:xfrm>
-          <a:prstGeom prst="rect">
-            <a:avLst/>
-          </a:prstGeom>
-          <a:noFill/>
-          <a:ln/>
-        </p:spPr>
-        <p:txBody>
-          <a:bodyPr wrap="square" lIns="0" tIns="0" rIns="0" bIns="0" rtlCol="0" anchor="t"/>
-          <a:lstStyle/>
-          <a:p>
-            <a:pPr rtl="1" algn="r" indent="0" marL="0">
-              <a:buNone/>
-            </a:pPr>
-            <a:r>
-              <a:rPr lang="en-US" sz="1200" dirty="0">
-                <a:solidFill>
-                  <a:srgbClr val="7F6C72"/>
-                </a:solidFill>
-                <a:latin typeface="IBM Plex Sans Arabic" pitchFamily="34" charset="0"/>
-                <a:ea typeface="IBM Plex Sans Arabic" pitchFamily="34" charset="-122"/>
-                <a:cs typeface="IBM Plex Sans Arabic" pitchFamily="34" charset="-120"/>
-              </a:rPr>
-              <a:t>يُلام على أي توقف، فيتجنب الإيقاف</a:t>
-            </a:r>
-            <a:endParaRPr lang="en-US" sz="1200" dirty="0"/>
-          </a:p>
-        </p:txBody>
-      </p:sp>
-      <p:sp>
-        <p:nvSpPr>
-          <p:cNvPr id="58" name="Text 53"/>
-          <p:cNvSpPr txBox="1"/>
-          <p:nvPr/>
-        </p:nvSpPr>
-        <p:spPr>
-          <a:xfrm>
-            <a:off x="457200" y="6035040"/>
-            <a:ext cx="11277295" cy="237744"/>
-          </a:xfrm>
-          <a:prstGeom prst="rect">
-            <a:avLst/>
-          </a:prstGeom>
-          <a:noFill/>
-          <a:ln/>
-        </p:spPr>
-        <p:txBody>
-          <a:bodyPr wrap="square" lIns="0" tIns="0" rIns="0" bIns="0" rtlCol="0" anchor="ctr"/>
-          <a:lstStyle/>
-          <a:p>
-            <a:pPr rtl="1" algn="r" indent="0" marL="0">
+            <a:pPr algn="r" indent="0" marL="0">
               <a:buNone/>
             </a:pPr>
             <a:r>
@@ -6511,7 +5406,7 @@
                 <a:ea typeface="IBM Plex Sans Arabic" pitchFamily="34" charset="-122"/>
                 <a:cs typeface="IBM Plex Sans Arabic" pitchFamily="34" charset="-120"/>
               </a:rPr>
-              <a:t>المصادر: Flexera State of the Cloud 2026 · Uptime Institute Annual Outage Analysis</a:t>
+              <a:t>Flexera State of the Cloud 2026 · Uptime Institute</a:t>
             </a:r>
             <a:endParaRPr lang="en-US" sz="950" dirty="0"/>
           </a:p>
@@ -7039,16 +5934,40 @@
           </a:p>
         </p:txBody>
       </p:sp>
-      <p:sp>
-        <p:nvSpPr>
-          <p:cNvPr id="22" name="Text 17"/>
+      <p:pic>
+        <p:nvPicPr>
+          <p:cNvPr id="22" name="Image 3" descr="/tmp/claude-0/-home-claude/750ff410-f4aa-5276-9360-1e19d018b112/scratchpad/c/assets/ct-icon.png">    </p:cNvPr>
+          <p:cNvPicPr>
+            <a:picLocks noChangeAspect="1"/>
+          </p:cNvPicPr>
+          <p:nvPr/>
+        </p:nvPicPr>
+        <p:blipFill>
+          <a:blip r:embed="rId4"/>
+          <a:stretch>
+            <a:fillRect/>
+          </a:stretch>
+        </p:blipFill>
+        <p:spPr>
+          <a:xfrm>
+            <a:off x="11002975" y="1691640"/>
+            <a:ext cx="731520" cy="731520"/>
+          </a:xfrm>
+          <a:prstGeom prst="rect">
+            <a:avLst/>
+          </a:prstGeom>
+        </p:spPr>
+      </p:pic>
+      <p:sp>
+        <p:nvSpPr>
+          <p:cNvPr id="23" name="Text 17"/>
           <p:cNvSpPr txBox="1"/>
           <p:nvPr/>
         </p:nvSpPr>
         <p:spPr>
           <a:xfrm>
-            <a:off x="457200" y="1463040"/>
-            <a:ext cx="11277295" cy="658368"/>
+            <a:off x="5852160" y="1645920"/>
+            <a:ext cx="4967935" cy="822960"/>
           </a:xfrm>
           <a:prstGeom prst="rect">
             <a:avLst/>
@@ -7060,11 +5979,53 @@
           <a:bodyPr wrap="square" lIns="0" tIns="0" rIns="0" bIns="0" rtlCol="0" anchor="ctr"/>
           <a:lstStyle/>
           <a:p>
-            <a:pPr rtl="1" algn="r" indent="0" marL="0">
+            <a:pPr algn="r" indent="0" marL="0">
               <a:buNone/>
             </a:pPr>
             <a:r>
-              <a:rPr lang="en-US" sz="3000" b="1" dirty="0">
+              <a:rPr lang="en-US" sz="4400" b="1" dirty="0">
+                <a:solidFill>
+                  <a:srgbClr val="8E2F3C"/>
+                </a:solidFill>
+                <a:latin typeface="IBM Plex Sans Arabic" pitchFamily="34" charset="0"/>
+                <a:ea typeface="IBM Plex Sans Arabic" pitchFamily="34" charset="-122"/>
+                <a:cs typeface="IBM Plex Sans Arabic" pitchFamily="34" charset="-120"/>
+              </a:rPr>
+              <a:t>CloudTrim</a:t>
+            </a:r>
+            <a:endParaRPr lang="en-US" sz="4400" dirty="0"/>
+          </a:p>
+        </p:txBody>
+      </p:sp>
+      <p:sp>
+        <p:nvSpPr>
+          <p:cNvPr id="24" name="Text 18"/>
+          <p:cNvSpPr txBox="1"/>
+          <p:nvPr/>
+        </p:nvSpPr>
+        <p:spPr>
+          <a:xfrm>
+            <a:off x="5852160" y="2606040"/>
+            <a:ext cx="5882335" cy="822960"/>
+          </a:xfrm>
+          <a:prstGeom prst="rect">
+            <a:avLst/>
+          </a:prstGeom>
+          <a:noFill/>
+          <a:ln/>
+        </p:spPr>
+        <p:txBody>
+          <a:bodyPr wrap="square" lIns="0" tIns="0" rIns="0" bIns="0" rtlCol="0" anchor="t"/>
+          <a:lstStyle/>
+          <a:p>
+            <a:pPr rtl="1" algn="r" indent="0" marL="0">
+              <a:lnSpc>
+                <a:spcPct val="110000"/>
+              </a:lnSpc>
+              <a:buNone/>
+            </a:pPr>
+            <a:r>
+              <a:rPr lang="en-US" sz="2000" dirty="0">
                 <a:solidFill>
                   <a:srgbClr val="21141A"/>
                 </a:solidFill>
@@ -7072,22 +6033,68 @@
                 <a:ea typeface="IBM Plex Sans Arabic" pitchFamily="34" charset="-122"/>
                 <a:cs typeface="IBM Plex Sans Arabic" pitchFamily="34" charset="-120"/>
               </a:rPr>
-              <a:t>نكتشف الهدر، ونشرحه، وأنتم تقررون</a:t>
-            </a:r>
-            <a:endParaRPr lang="en-US" sz="3000" dirty="0"/>
-          </a:p>
-        </p:txBody>
-      </p:sp>
-      <p:sp>
-        <p:nvSpPr>
-          <p:cNvPr id="23" name="Text 18"/>
+              <a:t>يكتشف الهدر في فاتورة السحابة ويوفّره بموافقتك بنقرة واحدة</a:t>
+            </a:r>
+            <a:endParaRPr lang="en-US" sz="2000" dirty="0"/>
+          </a:p>
+        </p:txBody>
+      </p:sp>
+      <p:sp>
+        <p:nvSpPr>
+          <p:cNvPr id="25" name="Shape 19"/>
+          <p:cNvSpPr/>
+          <p:nvPr/>
+        </p:nvSpPr>
+        <p:spPr>
+          <a:xfrm>
+            <a:off x="11222431" y="3657600"/>
+            <a:ext cx="512064" cy="512064"/>
+          </a:xfrm>
+          <a:prstGeom prst="roundRect">
+            <a:avLst>
+              <a:gd name="adj" fmla="val 21429"/>
+            </a:avLst>
+          </a:prstGeom>
+          <a:solidFill>
+            <a:srgbClr val="F1E4DF"/>
+          </a:solidFill>
+          <a:ln/>
+        </p:spPr>
+      </p:sp>
+      <p:pic>
+        <p:nvPicPr>
+          <p:cNvPr id="26" name="Image 4" descr="/tmp/claude-0/-home-claude/750ff410-f4aa-5276-9360-1e19d018b112/scratchpad/c/assets/i-eye-br.png">    </p:cNvPr>
+          <p:cNvPicPr>
+            <a:picLocks noChangeAspect="1"/>
+          </p:cNvPicPr>
+          <p:nvPr/>
+        </p:nvPicPr>
+        <p:blipFill>
+          <a:blip r:embed="rId5"/>
+          <a:stretch>
+            <a:fillRect/>
+          </a:stretch>
+        </p:blipFill>
+        <p:spPr>
+          <a:xfrm>
+            <a:off x="11295583" y="3730752"/>
+            <a:ext cx="365760" cy="365760"/>
+          </a:xfrm>
+          <a:prstGeom prst="rect">
+            <a:avLst/>
+          </a:prstGeom>
+        </p:spPr>
+      </p:pic>
+      <p:sp>
+        <p:nvSpPr>
+          <p:cNvPr id="27" name="Text 20"/>
           <p:cNvSpPr txBox="1"/>
           <p:nvPr/>
         </p:nvSpPr>
         <p:spPr>
           <a:xfrm>
-            <a:off x="457200" y="2121408"/>
-            <a:ext cx="11277295" cy="384048"/>
+            <a:off x="5852160" y="3657600"/>
+            <a:ext cx="5196535" cy="512064"/>
           </a:xfrm>
           <a:prstGeom prst="rect">
             <a:avLst/>
@@ -7103,7 +6110,216 @@
               <a:buNone/>
             </a:pPr>
             <a:r>
-              <a:rPr lang="en-US" sz="1600" dirty="0">
+              <a:rPr lang="en-US" sz="1800" b="1" dirty="0">
+                <a:solidFill>
+                  <a:srgbClr val="21141A"/>
+                </a:solidFill>
+                <a:latin typeface="IBM Plex Sans Arabic" pitchFamily="34" charset="0"/>
+                <a:ea typeface="IBM Plex Sans Arabic" pitchFamily="34" charset="-122"/>
+                <a:cs typeface="IBM Plex Sans Arabic" pitchFamily="34" charset="-120"/>
+              </a:rPr>
+              <a:t>قراءة فقط</a:t>
+            </a:r>
+            <a:endParaRPr lang="en-US" sz="1800" dirty="0"/>
+          </a:p>
+        </p:txBody>
+      </p:sp>
+      <p:sp>
+        <p:nvSpPr>
+          <p:cNvPr id="28" name="Shape 21"/>
+          <p:cNvSpPr/>
+          <p:nvPr/>
+        </p:nvSpPr>
+        <p:spPr>
+          <a:xfrm>
+            <a:off x="11222431" y="4279392"/>
+            <a:ext cx="512064" cy="512064"/>
+          </a:xfrm>
+          <a:prstGeom prst="roundRect">
+            <a:avLst>
+              <a:gd name="adj" fmla="val 21429"/>
+            </a:avLst>
+          </a:prstGeom>
+          <a:solidFill>
+            <a:srgbClr val="F1E4DF"/>
+          </a:solidFill>
+          <a:ln/>
+        </p:spPr>
+      </p:sp>
+      <p:pic>
+        <p:nvPicPr>
+          <p:cNvPr id="29" name="Image 5" descr="/tmp/claude-0/-home-claude/750ff410-f4aa-5276-9360-1e19d018b112/scratchpad/c/assets/i-bot-br.png">    </p:cNvPr>
+          <p:cNvPicPr>
+            <a:picLocks noChangeAspect="1"/>
+          </p:cNvPicPr>
+          <p:nvPr/>
+        </p:nvPicPr>
+        <p:blipFill>
+          <a:blip r:embed="rId6"/>
+          <a:stretch>
+            <a:fillRect/>
+          </a:stretch>
+        </p:blipFill>
+        <p:spPr>
+          <a:xfrm>
+            <a:off x="11295583" y="4352544"/>
+            <a:ext cx="365760" cy="365760"/>
+          </a:xfrm>
+          <a:prstGeom prst="rect">
+            <a:avLst/>
+          </a:prstGeom>
+        </p:spPr>
+      </p:pic>
+      <p:sp>
+        <p:nvSpPr>
+          <p:cNvPr id="30" name="Text 22"/>
+          <p:cNvSpPr txBox="1"/>
+          <p:nvPr/>
+        </p:nvSpPr>
+        <p:spPr>
+          <a:xfrm>
+            <a:off x="5852160" y="4279392"/>
+            <a:ext cx="5196535" cy="512064"/>
+          </a:xfrm>
+          <a:prstGeom prst="rect">
+            <a:avLst/>
+          </a:prstGeom>
+          <a:noFill/>
+          <a:ln/>
+        </p:spPr>
+        <p:txBody>
+          <a:bodyPr wrap="square" lIns="0" tIns="0" rIns="0" bIns="0" rtlCol="0" anchor="ctr"/>
+          <a:lstStyle/>
+          <a:p>
+            <a:pPr rtl="1" algn="r" indent="0" marL="0">
+              <a:buNone/>
+            </a:pPr>
+            <a:r>
+              <a:rPr lang="en-US" sz="1800" b="1" dirty="0">
+                <a:solidFill>
+                  <a:srgbClr val="21141A"/>
+                </a:solidFill>
+                <a:latin typeface="IBM Plex Sans Arabic" pitchFamily="34" charset="0"/>
+                <a:ea typeface="IBM Plex Sans Arabic" pitchFamily="34" charset="-122"/>
+                <a:cs typeface="IBM Plex Sans Arabic" pitchFamily="34" charset="-120"/>
+              </a:rPr>
+              <a:t>الذكاء الاصطناعي يقترح</a:t>
+            </a:r>
+            <a:endParaRPr lang="en-US" sz="1800" dirty="0"/>
+          </a:p>
+        </p:txBody>
+      </p:sp>
+      <p:sp>
+        <p:nvSpPr>
+          <p:cNvPr id="31" name="Shape 23"/>
+          <p:cNvSpPr/>
+          <p:nvPr/>
+        </p:nvSpPr>
+        <p:spPr>
+          <a:xfrm>
+            <a:off x="11222431" y="4901184"/>
+            <a:ext cx="512064" cy="512064"/>
+          </a:xfrm>
+          <a:prstGeom prst="roundRect">
+            <a:avLst>
+              <a:gd name="adj" fmla="val 21429"/>
+            </a:avLst>
+          </a:prstGeom>
+          <a:solidFill>
+            <a:srgbClr val="F1E4DF"/>
+          </a:solidFill>
+          <a:ln/>
+        </p:spPr>
+      </p:sp>
+      <p:pic>
+        <p:nvPicPr>
+          <p:cNvPr id="32" name="Image 6" descr="/tmp/claude-0/-home-claude/750ff410-f4aa-5276-9360-1e19d018b112/scratchpad/c/assets/i-check-br.png">    </p:cNvPr>
+          <p:cNvPicPr>
+            <a:picLocks noChangeAspect="1"/>
+          </p:cNvPicPr>
+          <p:nvPr/>
+        </p:nvPicPr>
+        <p:blipFill>
+          <a:blip r:embed="rId7"/>
+          <a:stretch>
+            <a:fillRect/>
+          </a:stretch>
+        </p:blipFill>
+        <p:spPr>
+          <a:xfrm>
+            <a:off x="11295583" y="4974336"/>
+            <a:ext cx="365760" cy="365760"/>
+          </a:xfrm>
+          <a:prstGeom prst="rect">
+            <a:avLst/>
+          </a:prstGeom>
+        </p:spPr>
+      </p:pic>
+      <p:sp>
+        <p:nvSpPr>
+          <p:cNvPr id="33" name="Text 24"/>
+          <p:cNvSpPr txBox="1"/>
+          <p:nvPr/>
+        </p:nvSpPr>
+        <p:spPr>
+          <a:xfrm>
+            <a:off x="5852160" y="4901184"/>
+            <a:ext cx="5196535" cy="512064"/>
+          </a:xfrm>
+          <a:prstGeom prst="rect">
+            <a:avLst/>
+          </a:prstGeom>
+          <a:noFill/>
+          <a:ln/>
+        </p:spPr>
+        <p:txBody>
+          <a:bodyPr wrap="square" lIns="0" tIns="0" rIns="0" bIns="0" rtlCol="0" anchor="ctr"/>
+          <a:lstStyle/>
+          <a:p>
+            <a:pPr rtl="1" algn="r" indent="0" marL="0">
+              <a:buNone/>
+            </a:pPr>
+            <a:r>
+              <a:rPr lang="en-US" sz="1800" b="1" dirty="0">
+                <a:solidFill>
+                  <a:srgbClr val="21141A"/>
+                </a:solidFill>
+                <a:latin typeface="IBM Plex Sans Arabic" pitchFamily="34" charset="0"/>
+                <a:ea typeface="IBM Plex Sans Arabic" pitchFamily="34" charset="-122"/>
+                <a:cs typeface="IBM Plex Sans Arabic" pitchFamily="34" charset="-120"/>
+              </a:rPr>
+              <a:t>أنت توافق بنقرة</a:t>
+            </a:r>
+            <a:endParaRPr lang="en-US" sz="1800" dirty="0"/>
+          </a:p>
+        </p:txBody>
+      </p:sp>
+      <p:sp>
+        <p:nvSpPr>
+          <p:cNvPr id="34" name="Text 25"/>
+          <p:cNvSpPr txBox="1"/>
+          <p:nvPr/>
+        </p:nvSpPr>
+        <p:spPr>
+          <a:xfrm>
+            <a:off x="5852160" y="5623560"/>
+            <a:ext cx="5882335" cy="320040"/>
+          </a:xfrm>
+          <a:prstGeom prst="rect">
+            <a:avLst/>
+          </a:prstGeom>
+          <a:noFill/>
+          <a:ln/>
+        </p:spPr>
+        <p:txBody>
+          <a:bodyPr wrap="square" lIns="0" tIns="0" rIns="0" bIns="0" rtlCol="0" anchor="ctr"/>
+          <a:lstStyle/>
+          <a:p>
+            <a:pPr rtl="1" algn="r" indent="0" marL="0">
+              <a:buNone/>
+            </a:pPr>
+            <a:r>
+              <a:rPr lang="en-US" sz="1200" dirty="0">
                 <a:solidFill>
                   <a:srgbClr val="7F6C72"/>
                 </a:solidFill>
@@ -7111,26 +6327,26 @@
                 <a:ea typeface="IBM Plex Sans Arabic" pitchFamily="34" charset="-122"/>
                 <a:cs typeface="IBM Plex Sans Arabic" pitchFamily="34" charset="-120"/>
               </a:rPr>
-              <a:t>الابتكار: أول منصة FinOps محلية تجمع السحب السعودية والعالمية، وتنفّذ بموافقة بشرية وصلاحية مؤقتة</a:t>
-            </a:r>
-            <a:endParaRPr lang="en-US" sz="1600" dirty="0"/>
-          </a:p>
-        </p:txBody>
-      </p:sp>
-      <p:sp>
-        <p:nvSpPr>
-          <p:cNvPr id="24" name="Shape 19"/>
-          <p:cNvSpPr/>
-          <p:nvPr/>
-        </p:nvSpPr>
-        <p:spPr>
-          <a:xfrm>
-            <a:off x="9052331" y="2651760"/>
-            <a:ext cx="2682164" cy="1417320"/>
+              <a:t>متوافق مع NCA وPDPL وISO 27001</a:t>
+            </a:r>
+            <a:endParaRPr lang="en-US" sz="1200" dirty="0"/>
+          </a:p>
+        </p:txBody>
+      </p:sp>
+      <p:sp>
+        <p:nvSpPr>
+          <p:cNvPr id="35" name="Shape 26"/>
+          <p:cNvSpPr/>
+          <p:nvPr/>
+        </p:nvSpPr>
+        <p:spPr>
+          <a:xfrm>
+            <a:off x="1005840" y="1600200"/>
+            <a:ext cx="3840480" cy="4217286"/>
           </a:xfrm>
           <a:prstGeom prst="roundRect">
             <a:avLst>
-              <a:gd name="adj" fmla="val 9032"/>
+              <a:gd name="adj" fmla="val 2857"/>
             </a:avLst>
           </a:prstGeom>
           <a:solidFill>
@@ -7144,1586 +6360,30 @@
           </a:ln>
         </p:spPr>
       </p:sp>
-      <p:sp>
-        <p:nvSpPr>
-          <p:cNvPr id="25" name="Shape 20"/>
-          <p:cNvSpPr/>
-          <p:nvPr/>
-        </p:nvSpPr>
-        <p:spPr>
-          <a:xfrm>
-            <a:off x="9162059" y="2761488"/>
-            <a:ext cx="2462708" cy="402336"/>
-          </a:xfrm>
-          <a:prstGeom prst="roundRect">
-            <a:avLst>
-              <a:gd name="adj" fmla="val 22727"/>
-            </a:avLst>
-          </a:prstGeom>
-          <a:solidFill>
-            <a:srgbClr val="F1E4DF"/>
-          </a:solidFill>
-          <a:ln/>
-        </p:spPr>
-      </p:sp>
-      <p:sp>
-        <p:nvSpPr>
-          <p:cNvPr id="26" name="Text 21"/>
-          <p:cNvSpPr txBox="1"/>
-          <p:nvPr/>
-        </p:nvSpPr>
-        <p:spPr>
-          <a:xfrm>
-            <a:off x="9280931" y="2761488"/>
-            <a:ext cx="2224964" cy="402336"/>
-          </a:xfrm>
-          <a:prstGeom prst="rect">
-            <a:avLst/>
-          </a:prstGeom>
-          <a:noFill/>
-          <a:ln/>
-        </p:spPr>
-        <p:txBody>
-          <a:bodyPr wrap="square" lIns="0" tIns="0" rIns="0" bIns="0" rtlCol="0" anchor="ctr"/>
-          <a:lstStyle/>
-          <a:p>
-            <a:pPr rtl="1" algn="r" indent="0" marL="0">
-              <a:buNone/>
-            </a:pPr>
-            <a:r>
-              <a:rPr lang="en-US" sz="1250" b="1" dirty="0">
-                <a:solidFill>
-                  <a:srgbClr val="8E2F3C"/>
-                </a:solidFill>
-                <a:latin typeface="IBM Plex Sans Arabic" pitchFamily="34" charset="0"/>
-                <a:ea typeface="IBM Plex Sans Arabic" pitchFamily="34" charset="-122"/>
-                <a:cs typeface="IBM Plex Sans Arabic" pitchFamily="34" charset="-120"/>
-              </a:rPr>
-              <a:t>لا رؤية لأين يذهب المال</a:t>
-            </a:r>
-            <a:endParaRPr lang="en-US" sz="1250" dirty="0"/>
-          </a:p>
-        </p:txBody>
-      </p:sp>
-      <p:sp>
-        <p:nvSpPr>
-          <p:cNvPr id="27" name="Text 22"/>
-          <p:cNvSpPr txBox="1"/>
-          <p:nvPr/>
-        </p:nvSpPr>
-        <p:spPr>
-          <a:xfrm>
-            <a:off x="9280931" y="3273552"/>
-            <a:ext cx="2224964" cy="731520"/>
-          </a:xfrm>
-          <a:prstGeom prst="rect">
-            <a:avLst/>
-          </a:prstGeom>
-          <a:noFill/>
-          <a:ln/>
-        </p:spPr>
-        <p:txBody>
-          <a:bodyPr wrap="square" lIns="0" tIns="0" rIns="0" bIns="0" rtlCol="0" anchor="t"/>
-          <a:lstStyle/>
-          <a:p>
-            <a:pPr rtl="1" algn="r" indent="0" marL="0">
-              <a:lnSpc>
-                <a:spcPct val="110000"/>
-              </a:lnSpc>
-              <a:buNone/>
-            </a:pPr>
-            <a:r>
-              <a:rPr lang="en-US" sz="1350" dirty="0">
-                <a:solidFill>
-                  <a:srgbClr val="21141A"/>
-                </a:solidFill>
-                <a:latin typeface="IBM Plex Sans Arabic" pitchFamily="34" charset="0"/>
-                <a:ea typeface="IBM Plex Sans Arabic" pitchFamily="34" charset="-122"/>
-                <a:cs typeface="IBM Plex Sans Arabic" pitchFamily="34" charset="-120"/>
-              </a:rPr>
-              <a:t>موصلات للقراءة فقط ولوحة واحدة لكل السحابات</a:t>
-            </a:r>
-            <a:endParaRPr lang="en-US" sz="1350" dirty="0"/>
-          </a:p>
-        </p:txBody>
-      </p:sp>
-      <p:sp>
-        <p:nvSpPr>
-          <p:cNvPr id="28" name="Shape 23"/>
-          <p:cNvSpPr/>
-          <p:nvPr/>
-        </p:nvSpPr>
-        <p:spPr>
-          <a:xfrm>
-            <a:off x="6187288" y="2651760"/>
-            <a:ext cx="2682164" cy="1417320"/>
-          </a:xfrm>
-          <a:prstGeom prst="roundRect">
-            <a:avLst>
-              <a:gd name="adj" fmla="val 9032"/>
-            </a:avLst>
-          </a:prstGeom>
-          <a:solidFill>
-            <a:srgbClr val="FFFBF8"/>
-          </a:solidFill>
-          <a:ln w="9525">
-            <a:solidFill>
-              <a:srgbClr val="E3D5CC"/>
-            </a:solidFill>
-            <a:prstDash val="solid"/>
-          </a:ln>
-        </p:spPr>
-      </p:sp>
-      <p:sp>
-        <p:nvSpPr>
-          <p:cNvPr id="29" name="Shape 24"/>
-          <p:cNvSpPr/>
-          <p:nvPr/>
-        </p:nvSpPr>
-        <p:spPr>
-          <a:xfrm>
-            <a:off x="6297016" y="2761488"/>
-            <a:ext cx="2462708" cy="402336"/>
-          </a:xfrm>
-          <a:prstGeom prst="roundRect">
-            <a:avLst>
-              <a:gd name="adj" fmla="val 22727"/>
-            </a:avLst>
-          </a:prstGeom>
-          <a:solidFill>
-            <a:srgbClr val="F1E4DF"/>
-          </a:solidFill>
-          <a:ln/>
-        </p:spPr>
-      </p:sp>
-      <p:sp>
-        <p:nvSpPr>
-          <p:cNvPr id="30" name="Text 25"/>
-          <p:cNvSpPr txBox="1"/>
-          <p:nvPr/>
-        </p:nvSpPr>
-        <p:spPr>
-          <a:xfrm>
-            <a:off x="6415888" y="2761488"/>
-            <a:ext cx="2224964" cy="402336"/>
-          </a:xfrm>
-          <a:prstGeom prst="rect">
-            <a:avLst/>
-          </a:prstGeom>
-          <a:noFill/>
-          <a:ln/>
-        </p:spPr>
-        <p:txBody>
-          <a:bodyPr wrap="square" lIns="0" tIns="0" rIns="0" bIns="0" rtlCol="0" anchor="ctr"/>
-          <a:lstStyle/>
-          <a:p>
-            <a:pPr rtl="1" algn="r" indent="0" marL="0">
-              <a:buNone/>
-            </a:pPr>
-            <a:r>
-              <a:rPr lang="en-US" sz="1250" b="1" dirty="0">
-                <a:solidFill>
-                  <a:srgbClr val="8E2F3C"/>
-                </a:solidFill>
-                <a:latin typeface="IBM Plex Sans Arabic" pitchFamily="34" charset="0"/>
-                <a:ea typeface="IBM Plex Sans Arabic" pitchFamily="34" charset="-122"/>
-                <a:cs typeface="IBM Plex Sans Arabic" pitchFamily="34" charset="-120"/>
-              </a:rPr>
-              <a:t>لا أحد يملك المشكلة</a:t>
-            </a:r>
-            <a:endParaRPr lang="en-US" sz="1250" dirty="0"/>
-          </a:p>
-        </p:txBody>
-      </p:sp>
-      <p:sp>
-        <p:nvSpPr>
-          <p:cNvPr id="31" name="Text 26"/>
-          <p:cNvSpPr txBox="1"/>
-          <p:nvPr/>
-        </p:nvSpPr>
-        <p:spPr>
-          <a:xfrm>
-            <a:off x="6415888" y="3273552"/>
-            <a:ext cx="2224964" cy="731520"/>
-          </a:xfrm>
-          <a:prstGeom prst="rect">
-            <a:avLst/>
-          </a:prstGeom>
-          <a:noFill/>
-          <a:ln/>
-        </p:spPr>
-        <p:txBody>
-          <a:bodyPr wrap="square" lIns="0" tIns="0" rIns="0" bIns="0" rtlCol="0" anchor="t"/>
-          <a:lstStyle/>
-          <a:p>
-            <a:pPr rtl="1" algn="r" indent="0" marL="0">
-              <a:lnSpc>
-                <a:spcPct val="110000"/>
-              </a:lnSpc>
-              <a:buNone/>
-            </a:pPr>
-            <a:r>
-              <a:rPr lang="en-US" sz="1350" dirty="0">
-                <a:solidFill>
-                  <a:srgbClr val="21141A"/>
-                </a:solidFill>
-                <a:latin typeface="IBM Plex Sans Arabic" pitchFamily="34" charset="0"/>
-                <a:ea typeface="IBM Plex Sans Arabic" pitchFamily="34" charset="-122"/>
-                <a:cs typeface="IBM Plex Sans Arabic" pitchFamily="34" charset="-120"/>
-              </a:rPr>
-              <a:t>تنبيه واتساب أو تيليجرام لشخص محدد مع رابط الموافقة</a:t>
-            </a:r>
-            <a:endParaRPr lang="en-US" sz="1350" dirty="0"/>
-          </a:p>
-        </p:txBody>
-      </p:sp>
-      <p:sp>
-        <p:nvSpPr>
-          <p:cNvPr id="32" name="Shape 27"/>
-          <p:cNvSpPr/>
-          <p:nvPr/>
-        </p:nvSpPr>
-        <p:spPr>
-          <a:xfrm>
-            <a:off x="3322244" y="2651760"/>
-            <a:ext cx="2682164" cy="1417320"/>
-          </a:xfrm>
-          <a:prstGeom prst="roundRect">
-            <a:avLst>
-              <a:gd name="adj" fmla="val 9032"/>
-            </a:avLst>
-          </a:prstGeom>
-          <a:solidFill>
-            <a:srgbClr val="FFFBF8"/>
-          </a:solidFill>
-          <a:ln w="9525">
-            <a:solidFill>
-              <a:srgbClr val="E3D5CC"/>
-            </a:solidFill>
-            <a:prstDash val="solid"/>
-          </a:ln>
-        </p:spPr>
-      </p:sp>
-      <p:sp>
-        <p:nvSpPr>
-          <p:cNvPr id="33" name="Shape 28"/>
-          <p:cNvSpPr/>
-          <p:nvPr/>
-        </p:nvSpPr>
-        <p:spPr>
-          <a:xfrm>
-            <a:off x="3431972" y="2761488"/>
-            <a:ext cx="2462708" cy="402336"/>
-          </a:xfrm>
-          <a:prstGeom prst="roundRect">
-            <a:avLst>
-              <a:gd name="adj" fmla="val 22727"/>
-            </a:avLst>
-          </a:prstGeom>
-          <a:solidFill>
-            <a:srgbClr val="F1E4DF"/>
-          </a:solidFill>
-          <a:ln/>
-        </p:spPr>
-      </p:sp>
-      <p:sp>
-        <p:nvSpPr>
-          <p:cNvPr id="34" name="Text 29"/>
-          <p:cNvSpPr txBox="1"/>
-          <p:nvPr/>
-        </p:nvSpPr>
-        <p:spPr>
-          <a:xfrm>
-            <a:off x="3550844" y="2761488"/>
-            <a:ext cx="2224964" cy="402336"/>
-          </a:xfrm>
-          <a:prstGeom prst="rect">
-            <a:avLst/>
-          </a:prstGeom>
-          <a:noFill/>
-          <a:ln/>
-        </p:spPr>
-        <p:txBody>
-          <a:bodyPr wrap="square" lIns="0" tIns="0" rIns="0" bIns="0" rtlCol="0" anchor="ctr"/>
-          <a:lstStyle/>
-          <a:p>
-            <a:pPr rtl="1" algn="r" indent="0" marL="0">
-              <a:buNone/>
-            </a:pPr>
-            <a:r>
-              <a:rPr lang="en-US" sz="1250" b="1" dirty="0">
-                <a:solidFill>
-                  <a:srgbClr val="8E2F3C"/>
-                </a:solidFill>
-                <a:latin typeface="IBM Plex Sans Arabic" pitchFamily="34" charset="0"/>
-                <a:ea typeface="IBM Plex Sans Arabic" pitchFamily="34" charset="-122"/>
-                <a:cs typeface="IBM Plex Sans Arabic" pitchFamily="34" charset="-120"/>
-              </a:rPr>
-              <a:t>الخوف من التوقف</a:t>
-            </a:r>
-            <a:endParaRPr lang="en-US" sz="1250" dirty="0"/>
-          </a:p>
-        </p:txBody>
-      </p:sp>
-      <p:sp>
-        <p:nvSpPr>
-          <p:cNvPr id="35" name="Text 30"/>
-          <p:cNvSpPr txBox="1"/>
-          <p:nvPr/>
-        </p:nvSpPr>
-        <p:spPr>
-          <a:xfrm>
-            <a:off x="3550844" y="3273552"/>
-            <a:ext cx="2224964" cy="731520"/>
-          </a:xfrm>
-          <a:prstGeom prst="rect">
-            <a:avLst/>
-          </a:prstGeom>
-          <a:noFill/>
-          <a:ln/>
-        </p:spPr>
-        <p:txBody>
-          <a:bodyPr wrap="square" lIns="0" tIns="0" rIns="0" bIns="0" rtlCol="0" anchor="t"/>
-          <a:lstStyle/>
-          <a:p>
-            <a:pPr rtl="1" algn="r" indent="0" marL="0">
-              <a:lnSpc>
-                <a:spcPct val="110000"/>
-              </a:lnSpc>
-              <a:buNone/>
-            </a:pPr>
-            <a:r>
-              <a:rPr lang="en-US" sz="1350" dirty="0">
-                <a:solidFill>
-                  <a:srgbClr val="21141A"/>
-                </a:solidFill>
-                <a:latin typeface="IBM Plex Sans Arabic" pitchFamily="34" charset="0"/>
-                <a:ea typeface="IBM Plex Sans Arabic" pitchFamily="34" charset="-122"/>
-                <a:cs typeface="IBM Plex Sans Arabic" pitchFamily="34" charset="-120"/>
-              </a:rPr>
-              <a:t>موافقة بشرية، صلاحية مؤقتة، Snapshot، وتراجع بنقرة</a:t>
-            </a:r>
-            <a:endParaRPr lang="en-US" sz="1350" dirty="0"/>
-          </a:p>
-        </p:txBody>
-      </p:sp>
-      <p:sp>
-        <p:nvSpPr>
-          <p:cNvPr id="36" name="Shape 31"/>
-          <p:cNvSpPr/>
-          <p:nvPr/>
-        </p:nvSpPr>
-        <p:spPr>
-          <a:xfrm>
-            <a:off x="457200" y="2651760"/>
-            <a:ext cx="2682164" cy="1417320"/>
-          </a:xfrm>
-          <a:prstGeom prst="roundRect">
-            <a:avLst>
-              <a:gd name="adj" fmla="val 9032"/>
-            </a:avLst>
-          </a:prstGeom>
-          <a:solidFill>
-            <a:srgbClr val="FFFBF8"/>
-          </a:solidFill>
-          <a:ln w="9525">
-            <a:solidFill>
-              <a:srgbClr val="E3D5CC"/>
-            </a:solidFill>
-            <a:prstDash val="solid"/>
-          </a:ln>
-        </p:spPr>
-      </p:sp>
-      <p:sp>
-        <p:nvSpPr>
-          <p:cNvPr id="37" name="Shape 32"/>
-          <p:cNvSpPr/>
-          <p:nvPr/>
-        </p:nvSpPr>
-        <p:spPr>
-          <a:xfrm>
-            <a:off x="566928" y="2761488"/>
-            <a:ext cx="2462708" cy="402336"/>
-          </a:xfrm>
-          <a:prstGeom prst="roundRect">
-            <a:avLst>
-              <a:gd name="adj" fmla="val 22727"/>
-            </a:avLst>
-          </a:prstGeom>
-          <a:solidFill>
-            <a:srgbClr val="F1E4DF"/>
-          </a:solidFill>
-          <a:ln/>
-        </p:spPr>
-      </p:sp>
-      <p:sp>
-        <p:nvSpPr>
-          <p:cNvPr id="38" name="Text 33"/>
-          <p:cNvSpPr txBox="1"/>
-          <p:nvPr/>
-        </p:nvSpPr>
-        <p:spPr>
-          <a:xfrm>
-            <a:off x="685800" y="2761488"/>
-            <a:ext cx="2224964" cy="402336"/>
-          </a:xfrm>
-          <a:prstGeom prst="rect">
-            <a:avLst/>
-          </a:prstGeom>
-          <a:noFill/>
-          <a:ln/>
-        </p:spPr>
-        <p:txBody>
-          <a:bodyPr wrap="square" lIns="0" tIns="0" rIns="0" bIns="0" rtlCol="0" anchor="ctr"/>
-          <a:lstStyle/>
-          <a:p>
-            <a:pPr rtl="1" algn="r" indent="0" marL="0">
-              <a:buNone/>
-            </a:pPr>
-            <a:r>
-              <a:rPr lang="en-US" sz="1250" b="1" dirty="0">
-                <a:solidFill>
-                  <a:srgbClr val="8E2F3C"/>
-                </a:solidFill>
-                <a:latin typeface="IBM Plex Sans Arabic" pitchFamily="34" charset="0"/>
-                <a:ea typeface="IBM Plex Sans Arabic" pitchFamily="34" charset="-122"/>
-                <a:cs typeface="IBM Plex Sans Arabic" pitchFamily="34" charset="-120"/>
-              </a:rPr>
-              <a:t>الأدوات غالية وباشتراك ثابت</a:t>
-            </a:r>
-            <a:endParaRPr lang="en-US" sz="1250" dirty="0"/>
-          </a:p>
-        </p:txBody>
-      </p:sp>
-      <p:sp>
-        <p:nvSpPr>
-          <p:cNvPr id="39" name="Text 34"/>
-          <p:cNvSpPr txBox="1"/>
-          <p:nvPr/>
-        </p:nvSpPr>
-        <p:spPr>
-          <a:xfrm>
-            <a:off x="685800" y="3273552"/>
-            <a:ext cx="2224964" cy="731520"/>
-          </a:xfrm>
-          <a:prstGeom prst="rect">
-            <a:avLst/>
-          </a:prstGeom>
-          <a:noFill/>
-          <a:ln/>
-        </p:spPr>
-        <p:txBody>
-          <a:bodyPr wrap="square" lIns="0" tIns="0" rIns="0" bIns="0" rtlCol="0" anchor="t"/>
-          <a:lstStyle/>
-          <a:p>
-            <a:pPr rtl="1" algn="r" indent="0" marL="0">
-              <a:lnSpc>
-                <a:spcPct val="110000"/>
-              </a:lnSpc>
-              <a:buNone/>
-            </a:pPr>
-            <a:r>
-              <a:rPr lang="en-US" sz="1350" dirty="0">
-                <a:solidFill>
-                  <a:srgbClr val="21141A"/>
-                </a:solidFill>
-                <a:latin typeface="IBM Plex Sans Arabic" pitchFamily="34" charset="0"/>
-                <a:ea typeface="IBM Plex Sans Arabic" pitchFamily="34" charset="-122"/>
-                <a:cs typeface="IBM Plex Sans Arabic" pitchFamily="34" charset="-120"/>
-              </a:rPr>
-              <a:t>فحص أول مجاني، ثم دفع حسب الاستخدام بسقف شهري</a:t>
-            </a:r>
-            <a:endParaRPr lang="en-US" sz="1350" dirty="0"/>
-          </a:p>
-        </p:txBody>
-      </p:sp>
-      <p:sp>
-        <p:nvSpPr>
-          <p:cNvPr id="40" name="Text 35"/>
-          <p:cNvSpPr txBox="1"/>
-          <p:nvPr/>
-        </p:nvSpPr>
-        <p:spPr>
-          <a:xfrm>
-            <a:off x="457200" y="4251960"/>
-            <a:ext cx="11277295" cy="329184"/>
-          </a:xfrm>
-          <a:prstGeom prst="rect">
-            <a:avLst/>
-          </a:prstGeom>
-          <a:noFill/>
-          <a:ln/>
-        </p:spPr>
-        <p:txBody>
-          <a:bodyPr wrap="square" lIns="0" tIns="0" rIns="0" bIns="0" rtlCol="0" anchor="t"/>
-          <a:lstStyle/>
-          <a:p>
-            <a:pPr rtl="1" algn="r" indent="0" marL="0">
-              <a:buNone/>
-            </a:pPr>
-            <a:r>
-              <a:rPr lang="en-US" sz="1600" b="1" dirty="0">
-                <a:solidFill>
-                  <a:srgbClr val="8E2F3C"/>
-                </a:solidFill>
-                <a:latin typeface="IBM Plex Sans Arabic" pitchFamily="34" charset="0"/>
-                <a:ea typeface="IBM Plex Sans Arabic" pitchFamily="34" charset="-122"/>
-                <a:cs typeface="IBM Plex Sans Arabic" pitchFamily="34" charset="-120"/>
-              </a:rPr>
-              <a:t>الذكاء الاصطناعي يقترح، والإنسان يقرر</a:t>
-            </a:r>
-            <a:endParaRPr lang="en-US" sz="1600" dirty="0"/>
-          </a:p>
-        </p:txBody>
-      </p:sp>
-      <p:sp>
-        <p:nvSpPr>
-          <p:cNvPr id="41" name="Shape 36"/>
-          <p:cNvSpPr/>
-          <p:nvPr/>
-        </p:nvSpPr>
-        <p:spPr>
-          <a:xfrm>
-            <a:off x="9969246" y="4663440"/>
-            <a:ext cx="1765249" cy="749808"/>
-          </a:xfrm>
-          <a:prstGeom prst="roundRect">
-            <a:avLst>
-              <a:gd name="adj" fmla="val 14634"/>
-            </a:avLst>
-          </a:prstGeom>
-          <a:solidFill>
-            <a:srgbClr val="FFFBF8"/>
-          </a:solidFill>
-          <a:ln w="9525">
-            <a:solidFill>
-              <a:srgbClr val="E3D5CC"/>
-            </a:solidFill>
-            <a:prstDash val="solid"/>
-          </a:ln>
-        </p:spPr>
-      </p:sp>
-      <p:sp>
-        <p:nvSpPr>
-          <p:cNvPr id="42" name="Shape 37"/>
-          <p:cNvSpPr/>
-          <p:nvPr/>
-        </p:nvSpPr>
-        <p:spPr>
-          <a:xfrm>
-            <a:off x="11231575" y="4855464"/>
-            <a:ext cx="365760" cy="365760"/>
-          </a:xfrm>
-          <a:prstGeom prst="ellipse">
-            <a:avLst/>
-          </a:prstGeom>
-          <a:solidFill>
-            <a:srgbClr val="8E2F3C"/>
-          </a:solidFill>
-          <a:ln/>
-        </p:spPr>
-      </p:sp>
-      <p:sp>
-        <p:nvSpPr>
-          <p:cNvPr id="43" name="Text 38"/>
-          <p:cNvSpPr txBox="1"/>
-          <p:nvPr/>
-        </p:nvSpPr>
-        <p:spPr>
-          <a:xfrm>
-            <a:off x="11231575" y="4855464"/>
-            <a:ext cx="365760" cy="365760"/>
-          </a:xfrm>
-          <a:prstGeom prst="rect">
-            <a:avLst/>
-          </a:prstGeom>
-          <a:noFill/>
-          <a:ln/>
-        </p:spPr>
-        <p:txBody>
-          <a:bodyPr wrap="square" lIns="0" tIns="0" rIns="0" bIns="0" rtlCol="0" anchor="ctr"/>
-          <a:lstStyle/>
-          <a:p>
-            <a:pPr algn="ctr" indent="0" marL="0">
-              <a:buNone/>
-            </a:pPr>
-            <a:r>
-              <a:rPr lang="en-US" sz="1300" b="1" dirty="0">
-                <a:solidFill>
-                  <a:srgbClr val="FBF6EE"/>
-                </a:solidFill>
-                <a:latin typeface="IBM Plex Sans Arabic" pitchFamily="34" charset="0"/>
-                <a:ea typeface="IBM Plex Sans Arabic" pitchFamily="34" charset="-122"/>
-                <a:cs typeface="IBM Plex Sans Arabic" pitchFamily="34" charset="-120"/>
-              </a:rPr>
-              <a:t>1</a:t>
-            </a:r>
-            <a:endParaRPr lang="en-US" sz="1300" dirty="0"/>
-          </a:p>
-        </p:txBody>
-      </p:sp>
-      <p:sp>
-        <p:nvSpPr>
-          <p:cNvPr id="44" name="Text 39"/>
-          <p:cNvSpPr txBox="1"/>
-          <p:nvPr/>
-        </p:nvSpPr>
-        <p:spPr>
-          <a:xfrm>
-            <a:off x="10078974" y="4663440"/>
-            <a:ext cx="1125169" cy="749808"/>
-          </a:xfrm>
-          <a:prstGeom prst="rect">
-            <a:avLst/>
-          </a:prstGeom>
-          <a:noFill/>
-          <a:ln/>
-        </p:spPr>
-        <p:txBody>
-          <a:bodyPr wrap="square" lIns="0" tIns="0" rIns="0" bIns="0" rtlCol="0" anchor="ctr"/>
-          <a:lstStyle/>
-          <a:p>
-            <a:pPr rtl="1" algn="r" indent="0" marL="0">
-              <a:buNone/>
-            </a:pPr>
-            <a:r>
-              <a:rPr lang="en-US" sz="1200" b="1" dirty="0">
-                <a:solidFill>
-                  <a:srgbClr val="21141A"/>
-                </a:solidFill>
-                <a:latin typeface="IBM Plex Sans Arabic" pitchFamily="34" charset="0"/>
-                <a:ea typeface="IBM Plex Sans Arabic" pitchFamily="34" charset="-122"/>
-                <a:cs typeface="IBM Plex Sans Arabic" pitchFamily="34" charset="-120"/>
-              </a:rPr>
-              <a:t>فحص للقراءة فقط</a:t>
-            </a:r>
-            <a:endParaRPr lang="en-US" sz="1200" dirty="0"/>
-          </a:p>
-        </p:txBody>
-      </p:sp>
-      <p:sp>
-        <p:nvSpPr>
-          <p:cNvPr id="45" name="Shape 40"/>
-          <p:cNvSpPr/>
-          <p:nvPr/>
-        </p:nvSpPr>
-        <p:spPr>
-          <a:xfrm>
-            <a:off x="8066837" y="4663440"/>
-            <a:ext cx="1765249" cy="749808"/>
-          </a:xfrm>
-          <a:prstGeom prst="roundRect">
-            <a:avLst>
-              <a:gd name="adj" fmla="val 14634"/>
-            </a:avLst>
-          </a:prstGeom>
-          <a:solidFill>
-            <a:srgbClr val="FFFBF8"/>
-          </a:solidFill>
-          <a:ln w="9525">
-            <a:solidFill>
-              <a:srgbClr val="E3D5CC"/>
-            </a:solidFill>
-            <a:prstDash val="solid"/>
-          </a:ln>
-        </p:spPr>
-      </p:sp>
-      <p:sp>
-        <p:nvSpPr>
-          <p:cNvPr id="46" name="Shape 41"/>
-          <p:cNvSpPr/>
-          <p:nvPr/>
-        </p:nvSpPr>
-        <p:spPr>
-          <a:xfrm>
-            <a:off x="9329166" y="4855464"/>
-            <a:ext cx="365760" cy="365760"/>
-          </a:xfrm>
-          <a:prstGeom prst="ellipse">
-            <a:avLst/>
-          </a:prstGeom>
-          <a:solidFill>
-            <a:srgbClr val="8E2F3C"/>
-          </a:solidFill>
-          <a:ln/>
-        </p:spPr>
-      </p:sp>
-      <p:sp>
-        <p:nvSpPr>
-          <p:cNvPr id="47" name="Text 42"/>
-          <p:cNvSpPr txBox="1"/>
-          <p:nvPr/>
-        </p:nvSpPr>
-        <p:spPr>
-          <a:xfrm>
-            <a:off x="9329166" y="4855464"/>
-            <a:ext cx="365760" cy="365760"/>
-          </a:xfrm>
-          <a:prstGeom prst="rect">
-            <a:avLst/>
-          </a:prstGeom>
-          <a:noFill/>
-          <a:ln/>
-        </p:spPr>
-        <p:txBody>
-          <a:bodyPr wrap="square" lIns="0" tIns="0" rIns="0" bIns="0" rtlCol="0" anchor="ctr"/>
-          <a:lstStyle/>
-          <a:p>
-            <a:pPr algn="ctr" indent="0" marL="0">
-              <a:buNone/>
-            </a:pPr>
-            <a:r>
-              <a:rPr lang="en-US" sz="1300" b="1" dirty="0">
-                <a:solidFill>
-                  <a:srgbClr val="FBF6EE"/>
-                </a:solidFill>
-                <a:latin typeface="IBM Plex Sans Arabic" pitchFamily="34" charset="0"/>
-                <a:ea typeface="IBM Plex Sans Arabic" pitchFamily="34" charset="-122"/>
-                <a:cs typeface="IBM Plex Sans Arabic" pitchFamily="34" charset="-120"/>
-              </a:rPr>
-              <a:t>2</a:t>
-            </a:r>
-            <a:endParaRPr lang="en-US" sz="1300" dirty="0"/>
-          </a:p>
-        </p:txBody>
-      </p:sp>
-      <p:sp>
-        <p:nvSpPr>
-          <p:cNvPr id="48" name="Text 43"/>
-          <p:cNvSpPr txBox="1"/>
-          <p:nvPr/>
-        </p:nvSpPr>
-        <p:spPr>
-          <a:xfrm>
-            <a:off x="8176565" y="4663440"/>
-            <a:ext cx="1125169" cy="749808"/>
-          </a:xfrm>
-          <a:prstGeom prst="rect">
-            <a:avLst/>
-          </a:prstGeom>
-          <a:noFill/>
-          <a:ln/>
-        </p:spPr>
-        <p:txBody>
-          <a:bodyPr wrap="square" lIns="0" tIns="0" rIns="0" bIns="0" rtlCol="0" anchor="ctr"/>
-          <a:lstStyle/>
-          <a:p>
-            <a:pPr rtl="1" algn="r" indent="0" marL="0">
-              <a:buNone/>
-            </a:pPr>
-            <a:r>
-              <a:rPr lang="en-US" sz="1200" b="1" dirty="0">
-                <a:solidFill>
-                  <a:srgbClr val="21141A"/>
-                </a:solidFill>
-                <a:latin typeface="IBM Plex Sans Arabic" pitchFamily="34" charset="0"/>
-                <a:ea typeface="IBM Plex Sans Arabic" pitchFamily="34" charset="-122"/>
-                <a:cs typeface="IBM Plex Sans Arabic" pitchFamily="34" charset="-120"/>
-              </a:rPr>
-              <a:t>توصية الذكاء الاصطناعي</a:t>
-            </a:r>
-            <a:endParaRPr lang="en-US" sz="1200" dirty="0"/>
-          </a:p>
-        </p:txBody>
-      </p:sp>
-      <p:sp>
-        <p:nvSpPr>
-          <p:cNvPr id="49" name="Shape 44"/>
-          <p:cNvSpPr/>
-          <p:nvPr/>
-        </p:nvSpPr>
-        <p:spPr>
-          <a:xfrm>
-            <a:off x="6164428" y="4663440"/>
-            <a:ext cx="1765249" cy="749808"/>
-          </a:xfrm>
-          <a:prstGeom prst="roundRect">
-            <a:avLst>
-              <a:gd name="adj" fmla="val 14634"/>
-            </a:avLst>
-          </a:prstGeom>
-          <a:solidFill>
-            <a:srgbClr val="8E2F3C"/>
-          </a:solidFill>
-          <a:ln/>
-        </p:spPr>
-      </p:sp>
-      <p:sp>
-        <p:nvSpPr>
-          <p:cNvPr id="50" name="Shape 45"/>
-          <p:cNvSpPr/>
-          <p:nvPr/>
-        </p:nvSpPr>
-        <p:spPr>
-          <a:xfrm>
-            <a:off x="7426757" y="4855464"/>
-            <a:ext cx="365760" cy="365760"/>
-          </a:xfrm>
-          <a:prstGeom prst="ellipse">
-            <a:avLst/>
-          </a:prstGeom>
-          <a:solidFill>
-            <a:srgbClr val="FBF6EE"/>
-          </a:solidFill>
-          <a:ln/>
-        </p:spPr>
-      </p:sp>
-      <p:sp>
-        <p:nvSpPr>
-          <p:cNvPr id="51" name="Text 46"/>
-          <p:cNvSpPr txBox="1"/>
-          <p:nvPr/>
-        </p:nvSpPr>
-        <p:spPr>
-          <a:xfrm>
-            <a:off x="7426757" y="4855464"/>
-            <a:ext cx="365760" cy="365760"/>
-          </a:xfrm>
-          <a:prstGeom prst="rect">
-            <a:avLst/>
-          </a:prstGeom>
-          <a:noFill/>
-          <a:ln/>
-        </p:spPr>
-        <p:txBody>
-          <a:bodyPr wrap="square" lIns="0" tIns="0" rIns="0" bIns="0" rtlCol="0" anchor="ctr"/>
-          <a:lstStyle/>
-          <a:p>
-            <a:pPr algn="ctr" indent="0" marL="0">
-              <a:buNone/>
-            </a:pPr>
-            <a:r>
-              <a:rPr lang="en-US" sz="1300" b="1" dirty="0">
-                <a:solidFill>
-                  <a:srgbClr val="8E2F3C"/>
-                </a:solidFill>
-                <a:latin typeface="IBM Plex Sans Arabic" pitchFamily="34" charset="0"/>
-                <a:ea typeface="IBM Plex Sans Arabic" pitchFamily="34" charset="-122"/>
-                <a:cs typeface="IBM Plex Sans Arabic" pitchFamily="34" charset="-120"/>
-              </a:rPr>
-              <a:t>3</a:t>
-            </a:r>
-            <a:endParaRPr lang="en-US" sz="1300" dirty="0"/>
-          </a:p>
-        </p:txBody>
-      </p:sp>
-      <p:sp>
-        <p:nvSpPr>
-          <p:cNvPr id="52" name="Text 47"/>
-          <p:cNvSpPr txBox="1"/>
-          <p:nvPr/>
-        </p:nvSpPr>
-        <p:spPr>
-          <a:xfrm>
-            <a:off x="6274156" y="4663440"/>
-            <a:ext cx="1125169" cy="749808"/>
-          </a:xfrm>
-          <a:prstGeom prst="rect">
-            <a:avLst/>
-          </a:prstGeom>
-          <a:noFill/>
-          <a:ln/>
-        </p:spPr>
-        <p:txBody>
-          <a:bodyPr wrap="square" lIns="0" tIns="0" rIns="0" bIns="0" rtlCol="0" anchor="ctr"/>
-          <a:lstStyle/>
-          <a:p>
-            <a:pPr rtl="1" algn="r" indent="0" marL="0">
-              <a:buNone/>
-            </a:pPr>
-            <a:r>
-              <a:rPr lang="en-US" sz="1200" b="1" dirty="0">
-                <a:solidFill>
-                  <a:srgbClr val="FBF6EE"/>
-                </a:solidFill>
-                <a:latin typeface="IBM Plex Sans Arabic" pitchFamily="34" charset="0"/>
-                <a:ea typeface="IBM Plex Sans Arabic" pitchFamily="34" charset="-122"/>
-                <a:cs typeface="IBM Plex Sans Arabic" pitchFamily="34" charset="-120"/>
-              </a:rPr>
-              <a:t>موافقة بشرية</a:t>
-            </a:r>
-            <a:endParaRPr lang="en-US" sz="1200" dirty="0"/>
-          </a:p>
-        </p:txBody>
-      </p:sp>
-      <p:sp>
-        <p:nvSpPr>
-          <p:cNvPr id="53" name="Shape 48"/>
-          <p:cNvSpPr/>
-          <p:nvPr/>
-        </p:nvSpPr>
-        <p:spPr>
-          <a:xfrm>
-            <a:off x="4262018" y="4663440"/>
-            <a:ext cx="1765249" cy="749808"/>
-          </a:xfrm>
-          <a:prstGeom prst="roundRect">
-            <a:avLst>
-              <a:gd name="adj" fmla="val 14634"/>
-            </a:avLst>
-          </a:prstGeom>
-          <a:solidFill>
-            <a:srgbClr val="FFFBF8"/>
-          </a:solidFill>
-          <a:ln w="9525">
-            <a:solidFill>
-              <a:srgbClr val="E3D5CC"/>
-            </a:solidFill>
-            <a:prstDash val="solid"/>
-          </a:ln>
-        </p:spPr>
-      </p:sp>
-      <p:sp>
-        <p:nvSpPr>
-          <p:cNvPr id="54" name="Shape 49"/>
-          <p:cNvSpPr/>
-          <p:nvPr/>
-        </p:nvSpPr>
-        <p:spPr>
-          <a:xfrm>
-            <a:off x="5524348" y="4855464"/>
-            <a:ext cx="365760" cy="365760"/>
-          </a:xfrm>
-          <a:prstGeom prst="ellipse">
-            <a:avLst/>
-          </a:prstGeom>
-          <a:solidFill>
-            <a:srgbClr val="8E2F3C"/>
-          </a:solidFill>
-          <a:ln/>
-        </p:spPr>
-      </p:sp>
-      <p:sp>
-        <p:nvSpPr>
-          <p:cNvPr id="55" name="Text 50"/>
-          <p:cNvSpPr txBox="1"/>
-          <p:nvPr/>
-        </p:nvSpPr>
-        <p:spPr>
-          <a:xfrm>
-            <a:off x="5524348" y="4855464"/>
-            <a:ext cx="365760" cy="365760"/>
-          </a:xfrm>
-          <a:prstGeom prst="rect">
-            <a:avLst/>
-          </a:prstGeom>
-          <a:noFill/>
-          <a:ln/>
-        </p:spPr>
-        <p:txBody>
-          <a:bodyPr wrap="square" lIns="0" tIns="0" rIns="0" bIns="0" rtlCol="0" anchor="ctr"/>
-          <a:lstStyle/>
-          <a:p>
-            <a:pPr algn="ctr" indent="0" marL="0">
-              <a:buNone/>
-            </a:pPr>
-            <a:r>
-              <a:rPr lang="en-US" sz="1300" b="1" dirty="0">
-                <a:solidFill>
-                  <a:srgbClr val="FBF6EE"/>
-                </a:solidFill>
-                <a:latin typeface="IBM Plex Sans Arabic" pitchFamily="34" charset="0"/>
-                <a:ea typeface="IBM Plex Sans Arabic" pitchFamily="34" charset="-122"/>
-                <a:cs typeface="IBM Plex Sans Arabic" pitchFamily="34" charset="-120"/>
-              </a:rPr>
-              <a:t>4</a:t>
-            </a:r>
-            <a:endParaRPr lang="en-US" sz="1300" dirty="0"/>
-          </a:p>
-        </p:txBody>
-      </p:sp>
-      <p:sp>
-        <p:nvSpPr>
-          <p:cNvPr id="56" name="Text 51"/>
-          <p:cNvSpPr txBox="1"/>
-          <p:nvPr/>
-        </p:nvSpPr>
-        <p:spPr>
-          <a:xfrm>
-            <a:off x="4371746" y="4663440"/>
-            <a:ext cx="1125169" cy="749808"/>
-          </a:xfrm>
-          <a:prstGeom prst="rect">
-            <a:avLst/>
-          </a:prstGeom>
-          <a:noFill/>
-          <a:ln/>
-        </p:spPr>
-        <p:txBody>
-          <a:bodyPr wrap="square" lIns="0" tIns="0" rIns="0" bIns="0" rtlCol="0" anchor="ctr"/>
-          <a:lstStyle/>
-          <a:p>
-            <a:pPr rtl="1" algn="r" indent="0" marL="0">
-              <a:buNone/>
-            </a:pPr>
-            <a:r>
-              <a:rPr lang="en-US" sz="1200" b="1" dirty="0">
-                <a:solidFill>
-                  <a:srgbClr val="21141A"/>
-                </a:solidFill>
-                <a:latin typeface="IBM Plex Sans Arabic" pitchFamily="34" charset="0"/>
-                <a:ea typeface="IBM Plex Sans Arabic" pitchFamily="34" charset="-122"/>
-                <a:cs typeface="IBM Plex Sans Arabic" pitchFamily="34" charset="-120"/>
-              </a:rPr>
-              <a:t>صلاحية مؤقتة 15 دقيقة</a:t>
-            </a:r>
-            <a:endParaRPr lang="en-US" sz="1200" dirty="0"/>
-          </a:p>
-        </p:txBody>
-      </p:sp>
-      <p:sp>
-        <p:nvSpPr>
-          <p:cNvPr id="57" name="Shape 52"/>
-          <p:cNvSpPr/>
-          <p:nvPr/>
-        </p:nvSpPr>
-        <p:spPr>
-          <a:xfrm>
-            <a:off x="2359609" y="4663440"/>
-            <a:ext cx="1765249" cy="749808"/>
-          </a:xfrm>
-          <a:prstGeom prst="roundRect">
-            <a:avLst>
-              <a:gd name="adj" fmla="val 14634"/>
-            </a:avLst>
-          </a:prstGeom>
-          <a:solidFill>
-            <a:srgbClr val="FFFBF8"/>
-          </a:solidFill>
-          <a:ln w="9525">
-            <a:solidFill>
-              <a:srgbClr val="E3D5CC"/>
-            </a:solidFill>
-            <a:prstDash val="solid"/>
-          </a:ln>
-        </p:spPr>
-      </p:sp>
-      <p:sp>
-        <p:nvSpPr>
-          <p:cNvPr id="58" name="Shape 53"/>
-          <p:cNvSpPr/>
-          <p:nvPr/>
-        </p:nvSpPr>
-        <p:spPr>
-          <a:xfrm>
-            <a:off x="3621938" y="4855464"/>
-            <a:ext cx="365760" cy="365760"/>
-          </a:xfrm>
-          <a:prstGeom prst="ellipse">
-            <a:avLst/>
-          </a:prstGeom>
-          <a:solidFill>
-            <a:srgbClr val="8E2F3C"/>
-          </a:solidFill>
-          <a:ln/>
-        </p:spPr>
-      </p:sp>
-      <p:sp>
-        <p:nvSpPr>
-          <p:cNvPr id="59" name="Text 54"/>
-          <p:cNvSpPr txBox="1"/>
-          <p:nvPr/>
-        </p:nvSpPr>
-        <p:spPr>
-          <a:xfrm>
-            <a:off x="3621938" y="4855464"/>
-            <a:ext cx="365760" cy="365760"/>
-          </a:xfrm>
-          <a:prstGeom prst="rect">
-            <a:avLst/>
-          </a:prstGeom>
-          <a:noFill/>
-          <a:ln/>
-        </p:spPr>
-        <p:txBody>
-          <a:bodyPr wrap="square" lIns="0" tIns="0" rIns="0" bIns="0" rtlCol="0" anchor="ctr"/>
-          <a:lstStyle/>
-          <a:p>
-            <a:pPr algn="ctr" indent="0" marL="0">
-              <a:buNone/>
-            </a:pPr>
-            <a:r>
-              <a:rPr lang="en-US" sz="1300" b="1" dirty="0">
-                <a:solidFill>
-                  <a:srgbClr val="FBF6EE"/>
-                </a:solidFill>
-                <a:latin typeface="IBM Plex Sans Arabic" pitchFamily="34" charset="0"/>
-                <a:ea typeface="IBM Plex Sans Arabic" pitchFamily="34" charset="-122"/>
-                <a:cs typeface="IBM Plex Sans Arabic" pitchFamily="34" charset="-120"/>
-              </a:rPr>
-              <a:t>5</a:t>
-            </a:r>
-            <a:endParaRPr lang="en-US" sz="1300" dirty="0"/>
-          </a:p>
-        </p:txBody>
-      </p:sp>
-      <p:sp>
-        <p:nvSpPr>
-          <p:cNvPr id="60" name="Text 55"/>
-          <p:cNvSpPr txBox="1"/>
-          <p:nvPr/>
-        </p:nvSpPr>
-        <p:spPr>
-          <a:xfrm>
-            <a:off x="2469337" y="4663440"/>
-            <a:ext cx="1125169" cy="749808"/>
-          </a:xfrm>
-          <a:prstGeom prst="rect">
-            <a:avLst/>
-          </a:prstGeom>
-          <a:noFill/>
-          <a:ln/>
-        </p:spPr>
-        <p:txBody>
-          <a:bodyPr wrap="square" lIns="0" tIns="0" rIns="0" bIns="0" rtlCol="0" anchor="ctr"/>
-          <a:lstStyle/>
-          <a:p>
-            <a:pPr rtl="1" algn="r" indent="0" marL="0">
-              <a:buNone/>
-            </a:pPr>
-            <a:r>
-              <a:rPr lang="en-US" sz="1200" b="1" dirty="0">
-                <a:solidFill>
-                  <a:srgbClr val="21141A"/>
-                </a:solidFill>
-                <a:latin typeface="IBM Plex Sans Arabic" pitchFamily="34" charset="0"/>
-                <a:ea typeface="IBM Plex Sans Arabic" pitchFamily="34" charset="-122"/>
-                <a:cs typeface="IBM Plex Sans Arabic" pitchFamily="34" charset="-120"/>
-              </a:rPr>
-              <a:t>تنفيذ آمن مع تراجع</a:t>
-            </a:r>
-            <a:endParaRPr lang="en-US" sz="1200" dirty="0"/>
-          </a:p>
-        </p:txBody>
-      </p:sp>
-      <p:sp>
-        <p:nvSpPr>
-          <p:cNvPr id="61" name="Shape 56"/>
-          <p:cNvSpPr/>
-          <p:nvPr/>
-        </p:nvSpPr>
-        <p:spPr>
-          <a:xfrm>
-            <a:off x="457200" y="4663440"/>
-            <a:ext cx="1765249" cy="749808"/>
-          </a:xfrm>
-          <a:prstGeom prst="roundRect">
-            <a:avLst>
-              <a:gd name="adj" fmla="val 14634"/>
-            </a:avLst>
-          </a:prstGeom>
-          <a:solidFill>
-            <a:srgbClr val="FFFBF8"/>
-          </a:solidFill>
-          <a:ln w="9525">
-            <a:solidFill>
-              <a:srgbClr val="E3D5CC"/>
-            </a:solidFill>
-            <a:prstDash val="solid"/>
-          </a:ln>
-        </p:spPr>
-      </p:sp>
-      <p:sp>
-        <p:nvSpPr>
-          <p:cNvPr id="62" name="Shape 57"/>
-          <p:cNvSpPr/>
-          <p:nvPr/>
-        </p:nvSpPr>
-        <p:spPr>
-          <a:xfrm>
-            <a:off x="1719529" y="4855464"/>
-            <a:ext cx="365760" cy="365760"/>
-          </a:xfrm>
-          <a:prstGeom prst="ellipse">
-            <a:avLst/>
-          </a:prstGeom>
-          <a:solidFill>
-            <a:srgbClr val="8E2F3C"/>
-          </a:solidFill>
-          <a:ln/>
-        </p:spPr>
-      </p:sp>
-      <p:sp>
-        <p:nvSpPr>
-          <p:cNvPr id="63" name="Text 58"/>
-          <p:cNvSpPr txBox="1"/>
-          <p:nvPr/>
-        </p:nvSpPr>
-        <p:spPr>
-          <a:xfrm>
-            <a:off x="1719529" y="4855464"/>
-            <a:ext cx="365760" cy="365760"/>
-          </a:xfrm>
-          <a:prstGeom prst="rect">
-            <a:avLst/>
-          </a:prstGeom>
-          <a:noFill/>
-          <a:ln/>
-        </p:spPr>
-        <p:txBody>
-          <a:bodyPr wrap="square" lIns="0" tIns="0" rIns="0" bIns="0" rtlCol="0" anchor="ctr"/>
-          <a:lstStyle/>
-          <a:p>
-            <a:pPr algn="ctr" indent="0" marL="0">
-              <a:buNone/>
-            </a:pPr>
-            <a:r>
-              <a:rPr lang="en-US" sz="1300" b="1" dirty="0">
-                <a:solidFill>
-                  <a:srgbClr val="FBF6EE"/>
-                </a:solidFill>
-                <a:latin typeface="IBM Plex Sans Arabic" pitchFamily="34" charset="0"/>
-                <a:ea typeface="IBM Plex Sans Arabic" pitchFamily="34" charset="-122"/>
-                <a:cs typeface="IBM Plex Sans Arabic" pitchFamily="34" charset="-120"/>
-              </a:rPr>
-              <a:t>6</a:t>
-            </a:r>
-            <a:endParaRPr lang="en-US" sz="1300" dirty="0"/>
-          </a:p>
-        </p:txBody>
-      </p:sp>
-      <p:sp>
-        <p:nvSpPr>
-          <p:cNvPr id="64" name="Text 59"/>
-          <p:cNvSpPr txBox="1"/>
-          <p:nvPr/>
-        </p:nvSpPr>
-        <p:spPr>
-          <a:xfrm>
-            <a:off x="566928" y="4663440"/>
-            <a:ext cx="1125169" cy="749808"/>
-          </a:xfrm>
-          <a:prstGeom prst="rect">
-            <a:avLst/>
-          </a:prstGeom>
-          <a:noFill/>
-          <a:ln/>
-        </p:spPr>
-        <p:txBody>
-          <a:bodyPr wrap="square" lIns="0" tIns="0" rIns="0" bIns="0" rtlCol="0" anchor="ctr"/>
-          <a:lstStyle/>
-          <a:p>
-            <a:pPr rtl="1" algn="r" indent="0" marL="0">
-              <a:buNone/>
-            </a:pPr>
-            <a:r>
-              <a:rPr lang="en-US" sz="1200" b="1" dirty="0">
-                <a:solidFill>
-                  <a:srgbClr val="21141A"/>
-                </a:solidFill>
-                <a:latin typeface="IBM Plex Sans Arabic" pitchFamily="34" charset="0"/>
-                <a:ea typeface="IBM Plex Sans Arabic" pitchFamily="34" charset="-122"/>
-                <a:cs typeface="IBM Plex Sans Arabic" pitchFamily="34" charset="-120"/>
-              </a:rPr>
-              <a:t>سحب الصلاحية والتدقيق</a:t>
-            </a:r>
-            <a:endParaRPr lang="en-US" sz="1200" dirty="0"/>
-          </a:p>
-        </p:txBody>
-      </p:sp>
-      <p:sp>
-        <p:nvSpPr>
-          <p:cNvPr id="65" name="Text 60"/>
-          <p:cNvSpPr txBox="1"/>
-          <p:nvPr/>
-        </p:nvSpPr>
-        <p:spPr>
-          <a:xfrm>
-            <a:off x="7863840" y="5596128"/>
-            <a:ext cx="3870655" cy="347472"/>
-          </a:xfrm>
-          <a:prstGeom prst="rect">
-            <a:avLst/>
-          </a:prstGeom>
-          <a:noFill/>
-          <a:ln/>
-        </p:spPr>
-        <p:txBody>
-          <a:bodyPr wrap="square" lIns="0" tIns="0" rIns="0" bIns="0" rtlCol="0" anchor="ctr"/>
-          <a:lstStyle/>
-          <a:p>
-            <a:pPr rtl="1" algn="r" indent="0" marL="0">
-              <a:buNone/>
-            </a:pPr>
-            <a:r>
-              <a:rPr lang="en-US" sz="1200" b="1" dirty="0">
-                <a:solidFill>
-                  <a:srgbClr val="7F6C72"/>
-                </a:solidFill>
-                <a:latin typeface="IBM Plex Sans Arabic" pitchFamily="34" charset="0"/>
-                <a:ea typeface="IBM Plex Sans Arabic" pitchFamily="34" charset="-122"/>
-                <a:cs typeface="IBM Plex Sans Arabic" pitchFamily="34" charset="-120"/>
-              </a:rPr>
-              <a:t>متوافق مع (دون ادّعاء شهادة):</a:t>
-            </a:r>
-            <a:endParaRPr lang="en-US" sz="1200" dirty="0"/>
-          </a:p>
-        </p:txBody>
-      </p:sp>
-      <p:sp>
-        <p:nvSpPr>
-          <p:cNvPr id="66" name="Shape 61"/>
-          <p:cNvSpPr/>
-          <p:nvPr/>
-        </p:nvSpPr>
-        <p:spPr>
-          <a:xfrm>
-            <a:off x="6739128" y="5596128"/>
-            <a:ext cx="1033272" cy="347472"/>
-          </a:xfrm>
-          <a:prstGeom prst="roundRect">
-            <a:avLst>
-              <a:gd name="adj" fmla="val 50000"/>
-            </a:avLst>
-          </a:prstGeom>
-          <a:solidFill>
-            <a:srgbClr val="FFFBF8"/>
-          </a:solidFill>
-          <a:ln w="9525">
-            <a:solidFill>
-              <a:srgbClr val="E3D5CC"/>
-            </a:solidFill>
-            <a:prstDash val="solid"/>
-          </a:ln>
-        </p:spPr>
-      </p:sp>
-      <p:sp>
-        <p:nvSpPr>
-          <p:cNvPr id="67" name="Text 62"/>
-          <p:cNvSpPr txBox="1"/>
-          <p:nvPr/>
-        </p:nvSpPr>
-        <p:spPr>
-          <a:xfrm>
-            <a:off x="6739128" y="5596128"/>
-            <a:ext cx="1033272" cy="347472"/>
-          </a:xfrm>
-          <a:prstGeom prst="rect">
-            <a:avLst/>
-          </a:prstGeom>
-          <a:noFill/>
-          <a:ln/>
-        </p:spPr>
-        <p:txBody>
-          <a:bodyPr wrap="square" lIns="0" tIns="0" rIns="0" bIns="0" rtlCol="0" anchor="ctr"/>
-          <a:lstStyle/>
-          <a:p>
-            <a:pPr rtl="1" algn="ctr" indent="0" marL="0">
-              <a:buNone/>
-            </a:pPr>
-            <a:r>
-              <a:rPr lang="en-US" sz="1150" b="1" dirty="0">
-                <a:solidFill>
-                  <a:srgbClr val="21141A"/>
-                </a:solidFill>
-                <a:latin typeface="IBM Plex Sans Arabic" pitchFamily="34" charset="0"/>
-                <a:ea typeface="IBM Plex Sans Arabic" pitchFamily="34" charset="-122"/>
-                <a:cs typeface="IBM Plex Sans Arabic" pitchFamily="34" charset="-120"/>
-              </a:rPr>
-              <a:t>NCA ECC</a:t>
-            </a:r>
-            <a:endParaRPr lang="en-US" sz="1150" dirty="0"/>
-          </a:p>
-        </p:txBody>
-      </p:sp>
-      <p:sp>
-        <p:nvSpPr>
-          <p:cNvPr id="68" name="Shape 63"/>
-          <p:cNvSpPr/>
-          <p:nvPr/>
-        </p:nvSpPr>
-        <p:spPr>
-          <a:xfrm>
-            <a:off x="5843016" y="5596128"/>
-            <a:ext cx="786384" cy="347472"/>
-          </a:xfrm>
-          <a:prstGeom prst="roundRect">
-            <a:avLst>
-              <a:gd name="adj" fmla="val 50000"/>
-            </a:avLst>
-          </a:prstGeom>
-          <a:solidFill>
-            <a:srgbClr val="FFFBF8"/>
-          </a:solidFill>
-          <a:ln w="9525">
-            <a:solidFill>
-              <a:srgbClr val="E3D5CC"/>
-            </a:solidFill>
-            <a:prstDash val="solid"/>
-          </a:ln>
-        </p:spPr>
-      </p:sp>
-      <p:sp>
-        <p:nvSpPr>
-          <p:cNvPr id="69" name="Text 64"/>
-          <p:cNvSpPr txBox="1"/>
-          <p:nvPr/>
-        </p:nvSpPr>
-        <p:spPr>
-          <a:xfrm>
-            <a:off x="5843016" y="5596128"/>
-            <a:ext cx="786384" cy="347472"/>
-          </a:xfrm>
-          <a:prstGeom prst="rect">
-            <a:avLst/>
-          </a:prstGeom>
-          <a:noFill/>
-          <a:ln/>
-        </p:spPr>
-        <p:txBody>
-          <a:bodyPr wrap="square" lIns="0" tIns="0" rIns="0" bIns="0" rtlCol="0" anchor="ctr"/>
-          <a:lstStyle/>
-          <a:p>
-            <a:pPr rtl="1" algn="ctr" indent="0" marL="0">
-              <a:buNone/>
-            </a:pPr>
-            <a:r>
-              <a:rPr lang="en-US" sz="1150" b="1" dirty="0">
-                <a:solidFill>
-                  <a:srgbClr val="21141A"/>
-                </a:solidFill>
-                <a:latin typeface="IBM Plex Sans Arabic" pitchFamily="34" charset="0"/>
-                <a:ea typeface="IBM Plex Sans Arabic" pitchFamily="34" charset="-122"/>
-                <a:cs typeface="IBM Plex Sans Arabic" pitchFamily="34" charset="-120"/>
-              </a:rPr>
-              <a:t>PDPL</a:t>
-            </a:r>
-            <a:endParaRPr lang="en-US" sz="1150" dirty="0"/>
-          </a:p>
-        </p:txBody>
-      </p:sp>
-      <p:sp>
-        <p:nvSpPr>
-          <p:cNvPr id="70" name="Shape 65"/>
-          <p:cNvSpPr/>
-          <p:nvPr/>
-        </p:nvSpPr>
-        <p:spPr>
-          <a:xfrm>
-            <a:off x="4535424" y="5596128"/>
-            <a:ext cx="1197864" cy="347472"/>
-          </a:xfrm>
-          <a:prstGeom prst="roundRect">
-            <a:avLst>
-              <a:gd name="adj" fmla="val 50000"/>
-            </a:avLst>
-          </a:prstGeom>
-          <a:solidFill>
-            <a:srgbClr val="FFFBF8"/>
-          </a:solidFill>
-          <a:ln w="9525">
-            <a:solidFill>
-              <a:srgbClr val="E3D5CC"/>
-            </a:solidFill>
-            <a:prstDash val="solid"/>
-          </a:ln>
-        </p:spPr>
-      </p:sp>
-      <p:sp>
-        <p:nvSpPr>
-          <p:cNvPr id="71" name="Text 66"/>
-          <p:cNvSpPr txBox="1"/>
-          <p:nvPr/>
-        </p:nvSpPr>
-        <p:spPr>
-          <a:xfrm>
-            <a:off x="4535424" y="5596128"/>
-            <a:ext cx="1197864" cy="347472"/>
-          </a:xfrm>
-          <a:prstGeom prst="rect">
-            <a:avLst/>
-          </a:prstGeom>
-          <a:noFill/>
-          <a:ln/>
-        </p:spPr>
-        <p:txBody>
-          <a:bodyPr wrap="square" lIns="0" tIns="0" rIns="0" bIns="0" rtlCol="0" anchor="ctr"/>
-          <a:lstStyle/>
-          <a:p>
-            <a:pPr rtl="1" algn="ctr" indent="0" marL="0">
-              <a:buNone/>
-            </a:pPr>
-            <a:r>
-              <a:rPr lang="en-US" sz="1150" b="1" dirty="0">
-                <a:solidFill>
-                  <a:srgbClr val="21141A"/>
-                </a:solidFill>
-                <a:latin typeface="IBM Plex Sans Arabic" pitchFamily="34" charset="0"/>
-                <a:ea typeface="IBM Plex Sans Arabic" pitchFamily="34" charset="-122"/>
-                <a:cs typeface="IBM Plex Sans Arabic" pitchFamily="34" charset="-120"/>
-              </a:rPr>
-              <a:t>ISO 27001</a:t>
-            </a:r>
-            <a:endParaRPr lang="en-US" sz="1150" dirty="0"/>
-          </a:p>
-        </p:txBody>
-      </p:sp>
-      <p:sp>
-        <p:nvSpPr>
-          <p:cNvPr id="72" name="Shape 67"/>
-          <p:cNvSpPr/>
-          <p:nvPr/>
-        </p:nvSpPr>
-        <p:spPr>
-          <a:xfrm>
-            <a:off x="3227832" y="5596128"/>
-            <a:ext cx="1197864" cy="347472"/>
-          </a:xfrm>
-          <a:prstGeom prst="roundRect">
-            <a:avLst>
-              <a:gd name="adj" fmla="val 50000"/>
-            </a:avLst>
-          </a:prstGeom>
-          <a:solidFill>
-            <a:srgbClr val="FFFBF8"/>
-          </a:solidFill>
-          <a:ln w="9525">
-            <a:solidFill>
-              <a:srgbClr val="E3D5CC"/>
-            </a:solidFill>
-            <a:prstDash val="solid"/>
-          </a:ln>
-        </p:spPr>
-      </p:sp>
-      <p:sp>
-        <p:nvSpPr>
-          <p:cNvPr id="73" name="Text 68"/>
-          <p:cNvSpPr txBox="1"/>
-          <p:nvPr/>
-        </p:nvSpPr>
-        <p:spPr>
-          <a:xfrm>
-            <a:off x="3227832" y="5596128"/>
-            <a:ext cx="1197864" cy="347472"/>
-          </a:xfrm>
-          <a:prstGeom prst="rect">
-            <a:avLst/>
-          </a:prstGeom>
-          <a:noFill/>
-          <a:ln/>
-        </p:spPr>
-        <p:txBody>
-          <a:bodyPr wrap="square" lIns="0" tIns="0" rIns="0" bIns="0" rtlCol="0" anchor="ctr"/>
-          <a:lstStyle/>
-          <a:p>
-            <a:pPr rtl="1" algn="ctr" indent="0" marL="0">
-              <a:buNone/>
-            </a:pPr>
-            <a:r>
-              <a:rPr lang="en-US" sz="1150" b="1" dirty="0">
-                <a:solidFill>
-                  <a:srgbClr val="21141A"/>
-                </a:solidFill>
-                <a:latin typeface="IBM Plex Sans Arabic" pitchFamily="34" charset="0"/>
-                <a:ea typeface="IBM Plex Sans Arabic" pitchFamily="34" charset="-122"/>
-                <a:cs typeface="IBM Plex Sans Arabic" pitchFamily="34" charset="-120"/>
-              </a:rPr>
-              <a:t>ISO 27017</a:t>
-            </a:r>
-            <a:endParaRPr lang="en-US" sz="1150" dirty="0"/>
-          </a:p>
-        </p:txBody>
-      </p:sp>
+      <p:pic>
+        <p:nvPicPr>
+          <p:cNvPr id="36" name="Image 7" descr="/tmp/claude-0/-home-claude/750ff410-f4aa-5276-9360-1e19d018b112/scratchpad/c/assets/s-approve.png">    </p:cNvPr>
+          <p:cNvPicPr>
+            <a:picLocks noChangeAspect="1"/>
+          </p:cNvPicPr>
+          <p:nvPr/>
+        </p:nvPicPr>
+        <p:blipFill>
+          <a:blip r:embed="rId8"/>
+          <a:stretch>
+            <a:fillRect/>
+          </a:stretch>
+        </p:blipFill>
+        <p:spPr>
+          <a:xfrm>
+            <a:off x="1078992" y="1673352"/>
+            <a:ext cx="3694176" cy="4070982"/>
+          </a:xfrm>
+          <a:prstGeom prst="rect">
+            <a:avLst/>
+          </a:prstGeom>
+        </p:spPr>
+      </p:pic>
     </p:spTree>
   </p:cSld>
   <p:clrMapOvr>
@@ -9254,8 +6914,8 @@
         </p:nvSpPr>
         <p:spPr>
           <a:xfrm>
-            <a:off x="457200" y="1463040"/>
-            <a:ext cx="11277295" cy="658368"/>
+            <a:off x="457200" y="1600200"/>
+            <a:ext cx="11277295" cy="731520"/>
           </a:xfrm>
           <a:prstGeom prst="rect">
             <a:avLst/>
@@ -9271,7 +6931,7 @@
               <a:buNone/>
             </a:pPr>
             <a:r>
-              <a:rPr lang="en-US" sz="3000" b="1" dirty="0">
+              <a:rPr lang="en-US" sz="3400" b="1" dirty="0">
                 <a:solidFill>
                   <a:srgbClr val="21141A"/>
                 </a:solidFill>
@@ -9279,9 +6939,9 @@
                 <a:ea typeface="IBM Plex Sans Arabic" pitchFamily="34" charset="-122"/>
                 <a:cs typeface="IBM Plex Sans Arabic" pitchFamily="34" charset="-120"/>
               </a:rPr>
-              <a:t>شركات سعودية من 50 إلى 250 موظفاً، بلا فريق FinOps</a:t>
-            </a:r>
-            <a:endParaRPr lang="en-US" sz="3000" dirty="0"/>
+              <a:t>شركات سعودية من 50 إلى 250 موظفاً</a:t>
+            </a:r>
+            <a:endParaRPr lang="en-US" sz="3400" dirty="0"/>
           </a:p>
         </p:txBody>
       </p:sp>
@@ -9293,8 +6953,8 @@
         </p:nvSpPr>
         <p:spPr>
           <a:xfrm>
-            <a:off x="457200" y="2121408"/>
-            <a:ext cx="11277295" cy="384048"/>
+            <a:off x="457200" y="2331720"/>
+            <a:ext cx="11277295" cy="411480"/>
           </a:xfrm>
           <a:prstGeom prst="rect">
             <a:avLst/>
@@ -9303,14 +6963,14 @@
           <a:ln/>
         </p:spPr>
         <p:txBody>
-          <a:bodyPr wrap="square" lIns="0" tIns="0" rIns="0" bIns="0" rtlCol="0" anchor="ctr"/>
+          <a:bodyPr wrap="square" lIns="0" tIns="0" rIns="0" bIns="0" rtlCol="0" anchor="t"/>
           <a:lstStyle/>
           <a:p>
             <a:pPr rtl="1" algn="r" indent="0" marL="0">
               <a:buNone/>
             </a:pPr>
             <a:r>
-              <a:rPr lang="en-US" sz="1600" dirty="0">
+              <a:rPr lang="en-US" sz="1800" dirty="0">
                 <a:solidFill>
                   <a:srgbClr val="7F6C72"/>
                 </a:solidFill>
@@ -9318,9 +6978,9 @@
                 <a:ea typeface="IBM Plex Sans Arabic" pitchFamily="34" charset="-122"/>
                 <a:cs typeface="IBM Plex Sans Arabic" pitchFamily="34" charset="-120"/>
               </a:rPr>
-              <a:t>رواد الأعمال والشركات الناشئة والمتوسطة التي تفتقر لخبراء سحابة، وفاتورتها عشرات الآلاف شهرياً</a:t>
-            </a:r>
-            <a:endParaRPr lang="en-US" sz="1600" dirty="0"/>
+              <a:t>بلا فريق FinOps، وفاتورتها عشرات الآلاف شهرياً</a:t>
+            </a:r>
+            <a:endParaRPr lang="en-US" sz="1800" dirty="0"/>
           </a:p>
         </p:txBody>
       </p:sp>
@@ -9332,12 +6992,12 @@
         </p:nvSpPr>
         <p:spPr>
           <a:xfrm>
-            <a:off x="6263640" y="2743200"/>
-            <a:ext cx="5470855" cy="3291840"/>
+            <a:off x="8188757" y="3063240"/>
+            <a:ext cx="3545738" cy="2377440"/>
           </a:xfrm>
           <a:prstGeom prst="roundRect">
             <a:avLst>
-              <a:gd name="adj" fmla="val 5000"/>
+              <a:gd name="adj" fmla="val 7692"/>
             </a:avLst>
           </a:prstGeom>
           <a:solidFill>
@@ -9351,16 +7011,40 @@
           </a:ln>
         </p:spPr>
       </p:sp>
-      <p:sp>
-        <p:nvSpPr>
-          <p:cNvPr id="25" name="Text 20"/>
+      <p:pic>
+        <p:nvPicPr>
+          <p:cNvPr id="25" name="Image 3" descr="/tmp/claude-0/-home-claude/750ff410-f4aa-5276-9360-1e19d018b112/scratchpad/c/assets/i-building-br.png">    </p:cNvPr>
+          <p:cNvPicPr>
+            <a:picLocks noChangeAspect="1"/>
+          </p:cNvPicPr>
+          <p:nvPr/>
+        </p:nvPicPr>
+        <p:blipFill>
+          <a:blip r:embed="rId4"/>
+          <a:stretch>
+            <a:fillRect/>
+          </a:stretch>
+        </p:blipFill>
+        <p:spPr>
+          <a:xfrm>
+            <a:off x="9687306" y="3337560"/>
+            <a:ext cx="548640" cy="548640"/>
+          </a:xfrm>
+          <a:prstGeom prst="rect">
+            <a:avLst/>
+          </a:prstGeom>
+        </p:spPr>
+      </p:pic>
+      <p:sp>
+        <p:nvSpPr>
+          <p:cNvPr id="26" name="Text 20"/>
           <p:cNvSpPr txBox="1"/>
           <p:nvPr/>
         </p:nvSpPr>
         <p:spPr>
           <a:xfrm>
-            <a:off x="6583680" y="2926080"/>
-            <a:ext cx="4830775" cy="384048"/>
+            <a:off x="8188757" y="3931920"/>
+            <a:ext cx="3545738" cy="868680"/>
           </a:xfrm>
           <a:prstGeom prst="rect">
             <a:avLst/>
@@ -9369,14 +7053,53 @@
           <a:ln/>
         </p:spPr>
         <p:txBody>
-          <a:bodyPr wrap="square" lIns="0" tIns="0" rIns="0" bIns="0" rtlCol="0" anchor="t"/>
-          <a:lstStyle/>
-          <a:p>
-            <a:pPr rtl="1" algn="r" indent="0" marL="0">
+          <a:bodyPr wrap="square" lIns="0" tIns="0" rIns="0" bIns="0" rtlCol="0" anchor="ctr"/>
+          <a:lstStyle/>
+          <a:p>
+            <a:pPr algn="ctr" indent="0" marL="0">
               <a:buNone/>
             </a:pPr>
             <a:r>
-              <a:rPr lang="en-US" sz="1800" b="1" dirty="0">
+              <a:rPr lang="en-US" sz="4600" b="1" dirty="0">
+                <a:solidFill>
+                  <a:srgbClr val="8E2F3C"/>
+                </a:solidFill>
+                <a:latin typeface="IBM Plex Sans Arabic" pitchFamily="34" charset="0"/>
+                <a:ea typeface="IBM Plex Sans Arabic" pitchFamily="34" charset="-122"/>
+                <a:cs typeface="IBM Plex Sans Arabic" pitchFamily="34" charset="-120"/>
+              </a:rPr>
+              <a:t>50-250</a:t>
+            </a:r>
+            <a:endParaRPr lang="en-US" sz="4600" dirty="0"/>
+          </a:p>
+        </p:txBody>
+      </p:sp>
+      <p:sp>
+        <p:nvSpPr>
+          <p:cNvPr id="27" name="Text 21"/>
+          <p:cNvSpPr txBox="1"/>
+          <p:nvPr/>
+        </p:nvSpPr>
+        <p:spPr>
+          <a:xfrm>
+            <a:off x="8463077" y="4846320"/>
+            <a:ext cx="2997098" cy="411480"/>
+          </a:xfrm>
+          <a:prstGeom prst="rect">
+            <a:avLst/>
+          </a:prstGeom>
+          <a:noFill/>
+          <a:ln/>
+        </p:spPr>
+        <p:txBody>
+          <a:bodyPr wrap="square" lIns="0" tIns="0" rIns="0" bIns="0" rtlCol="0" anchor="ctr"/>
+          <a:lstStyle/>
+          <a:p>
+            <a:pPr rtl="1" algn="ctr" indent="0" marL="0">
+              <a:buNone/>
+            </a:pPr>
+            <a:r>
+              <a:rPr lang="en-US" sz="1800" dirty="0">
                 <a:solidFill>
                   <a:srgbClr val="21141A"/>
                 </a:solidFill>
@@ -9384,7 +7107,7 @@
                 <a:ea typeface="IBM Plex Sans Arabic" pitchFamily="34" charset="-122"/>
                 <a:cs typeface="IBM Plex Sans Arabic" pitchFamily="34" charset="-120"/>
               </a:rPr>
-              <a:t>شخصية العرض: "نخلة تك"</a:t>
+              <a:t>موظفاً</a:t>
             </a:r>
             <a:endParaRPr lang="en-US" sz="1800" dirty="0"/>
           </a:p>
@@ -9392,14 +7115,65 @@
       </p:sp>
       <p:sp>
         <p:nvSpPr>
-          <p:cNvPr id="26" name="Text 21"/>
+          <p:cNvPr id="28" name="Shape 22"/>
+          <p:cNvSpPr/>
+          <p:nvPr/>
+        </p:nvSpPr>
+        <p:spPr>
+          <a:xfrm>
+            <a:off x="4322978" y="3063240"/>
+            <a:ext cx="3545738" cy="2377440"/>
+          </a:xfrm>
+          <a:prstGeom prst="roundRect">
+            <a:avLst>
+              <a:gd name="adj" fmla="val 7692"/>
+            </a:avLst>
+          </a:prstGeom>
+          <a:solidFill>
+            <a:srgbClr val="FFFBF8"/>
+          </a:solidFill>
+          <a:ln w="9525">
+            <a:solidFill>
+              <a:srgbClr val="E3D5CC"/>
+            </a:solidFill>
+            <a:prstDash val="solid"/>
+          </a:ln>
+        </p:spPr>
+      </p:sp>
+      <p:pic>
+        <p:nvPicPr>
+          <p:cNvPr id="29" name="Image 4" descr="/tmp/claude-0/-home-claude/750ff410-f4aa-5276-9360-1e19d018b112/scratchpad/c/assets/i-cloud-br.png">    </p:cNvPr>
+          <p:cNvPicPr>
+            <a:picLocks noChangeAspect="1"/>
+          </p:cNvPicPr>
+          <p:nvPr/>
+        </p:nvPicPr>
+        <p:blipFill>
+          <a:blip r:embed="rId5"/>
+          <a:stretch>
+            <a:fillRect/>
+          </a:stretch>
+        </p:blipFill>
+        <p:spPr>
+          <a:xfrm>
+            <a:off x="5821528" y="3337560"/>
+            <a:ext cx="548640" cy="548640"/>
+          </a:xfrm>
+          <a:prstGeom prst="rect">
+            <a:avLst/>
+          </a:prstGeom>
+        </p:spPr>
+      </p:pic>
+      <p:sp>
+        <p:nvSpPr>
+          <p:cNvPr id="30" name="Text 23"/>
           <p:cNvSpPr txBox="1"/>
           <p:nvPr/>
         </p:nvSpPr>
         <p:spPr>
           <a:xfrm>
-            <a:off x="6583680" y="3310128"/>
-            <a:ext cx="4830775" cy="292608"/>
+            <a:off x="4322978" y="3931920"/>
+            <a:ext cx="3545738" cy="868680"/>
           </a:xfrm>
           <a:prstGeom prst="rect">
             <a:avLst/>
@@ -9408,14 +7182,216 @@
           <a:ln/>
         </p:spPr>
         <p:txBody>
-          <a:bodyPr wrap="square" lIns="0" tIns="0" rIns="0" bIns="0" rtlCol="0" anchor="t"/>
-          <a:lstStyle/>
-          <a:p>
-            <a:pPr rtl="1" algn="r" indent="0" marL="0">
+          <a:bodyPr wrap="square" lIns="0" tIns="0" rIns="0" bIns="0" rtlCol="0" anchor="ctr"/>
+          <a:lstStyle/>
+          <a:p>
+            <a:pPr algn="ctr" indent="0" marL="0">
               <a:buNone/>
             </a:pPr>
             <a:r>
-              <a:rPr lang="en-US" sz="1200" dirty="0">
+              <a:rPr lang="en-US" sz="4600" b="1" dirty="0">
+                <a:solidFill>
+                  <a:srgbClr val="8E2F3C"/>
+                </a:solidFill>
+                <a:latin typeface="IBM Plex Sans Arabic" pitchFamily="34" charset="0"/>
+                <a:ea typeface="IBM Plex Sans Arabic" pitchFamily="34" charset="-122"/>
+                <a:cs typeface="IBM Plex Sans Arabic" pitchFamily="34" charset="-120"/>
+              </a:rPr>
+              <a:t>$5.1B</a:t>
+            </a:r>
+            <a:endParaRPr lang="en-US" sz="4600" dirty="0"/>
+          </a:p>
+        </p:txBody>
+      </p:sp>
+      <p:sp>
+        <p:nvSpPr>
+          <p:cNvPr id="31" name="Text 24"/>
+          <p:cNvSpPr txBox="1"/>
+          <p:nvPr/>
+        </p:nvSpPr>
+        <p:spPr>
+          <a:xfrm>
+            <a:off x="4597298" y="4846320"/>
+            <a:ext cx="2997098" cy="411480"/>
+          </a:xfrm>
+          <a:prstGeom prst="rect">
+            <a:avLst/>
+          </a:prstGeom>
+          <a:noFill/>
+          <a:ln/>
+        </p:spPr>
+        <p:txBody>
+          <a:bodyPr wrap="square" lIns="0" tIns="0" rIns="0" bIns="0" rtlCol="0" anchor="ctr"/>
+          <a:lstStyle/>
+          <a:p>
+            <a:pPr rtl="1" algn="ctr" indent="0" marL="0">
+              <a:buNone/>
+            </a:pPr>
+            <a:r>
+              <a:rPr lang="en-US" sz="1800" dirty="0">
+                <a:solidFill>
+                  <a:srgbClr val="21141A"/>
+                </a:solidFill>
+                <a:latin typeface="IBM Plex Sans Arabic" pitchFamily="34" charset="0"/>
+                <a:ea typeface="IBM Plex Sans Arabic" pitchFamily="34" charset="-122"/>
+                <a:cs typeface="IBM Plex Sans Arabic" pitchFamily="34" charset="-120"/>
+              </a:rPr>
+              <a:t>سوق السحابة السعودي 2025</a:t>
+            </a:r>
+            <a:endParaRPr lang="en-US" sz="1800" dirty="0"/>
+          </a:p>
+        </p:txBody>
+      </p:sp>
+      <p:sp>
+        <p:nvSpPr>
+          <p:cNvPr id="32" name="Shape 25"/>
+          <p:cNvSpPr/>
+          <p:nvPr/>
+        </p:nvSpPr>
+        <p:spPr>
+          <a:xfrm>
+            <a:off x="457200" y="3063240"/>
+            <a:ext cx="3545738" cy="2377440"/>
+          </a:xfrm>
+          <a:prstGeom prst="roundRect">
+            <a:avLst>
+              <a:gd name="adj" fmla="val 7692"/>
+            </a:avLst>
+          </a:prstGeom>
+          <a:solidFill>
+            <a:srgbClr val="8E2F3C"/>
+          </a:solidFill>
+          <a:ln/>
+        </p:spPr>
+      </p:sp>
+      <p:pic>
+        <p:nvPicPr>
+          <p:cNvPr id="33" name="Image 5" descr="/tmp/claude-0/-home-claude/750ff410-f4aa-5276-9360-1e19d018b112/scratchpad/c/assets/i-trend-cr.png">    </p:cNvPr>
+          <p:cNvPicPr>
+            <a:picLocks noChangeAspect="1"/>
+          </p:cNvPicPr>
+          <p:nvPr/>
+        </p:nvPicPr>
+        <p:blipFill>
+          <a:blip r:embed="rId6"/>
+          <a:stretch>
+            <a:fillRect/>
+          </a:stretch>
+        </p:blipFill>
+        <p:spPr>
+          <a:xfrm>
+            <a:off x="1955749" y="3337560"/>
+            <a:ext cx="548640" cy="548640"/>
+          </a:xfrm>
+          <a:prstGeom prst="rect">
+            <a:avLst/>
+          </a:prstGeom>
+        </p:spPr>
+      </p:pic>
+      <p:sp>
+        <p:nvSpPr>
+          <p:cNvPr id="34" name="Text 26"/>
+          <p:cNvSpPr txBox="1"/>
+          <p:nvPr/>
+        </p:nvSpPr>
+        <p:spPr>
+          <a:xfrm>
+            <a:off x="457200" y="3931920"/>
+            <a:ext cx="3545738" cy="868680"/>
+          </a:xfrm>
+          <a:prstGeom prst="rect">
+            <a:avLst/>
+          </a:prstGeom>
+          <a:noFill/>
+          <a:ln/>
+        </p:spPr>
+        <p:txBody>
+          <a:bodyPr wrap="square" lIns="0" tIns="0" rIns="0" bIns="0" rtlCol="0" anchor="ctr"/>
+          <a:lstStyle/>
+          <a:p>
+            <a:pPr algn="ctr" indent="0" marL="0">
+              <a:buNone/>
+            </a:pPr>
+            <a:r>
+              <a:rPr lang="en-US" sz="4600" b="1" dirty="0">
+                <a:solidFill>
+                  <a:srgbClr val="FBF6EE"/>
+                </a:solidFill>
+                <a:latin typeface="IBM Plex Sans Arabic" pitchFamily="34" charset="0"/>
+                <a:ea typeface="IBM Plex Sans Arabic" pitchFamily="34" charset="-122"/>
+                <a:cs typeface="IBM Plex Sans Arabic" pitchFamily="34" charset="-120"/>
+              </a:rPr>
+              <a:t>$14.6B</a:t>
+            </a:r>
+            <a:endParaRPr lang="en-US" sz="4600" dirty="0"/>
+          </a:p>
+        </p:txBody>
+      </p:sp>
+      <p:sp>
+        <p:nvSpPr>
+          <p:cNvPr id="35" name="Text 27"/>
+          <p:cNvSpPr txBox="1"/>
+          <p:nvPr/>
+        </p:nvSpPr>
+        <p:spPr>
+          <a:xfrm>
+            <a:off x="731520" y="4846320"/>
+            <a:ext cx="2997098" cy="411480"/>
+          </a:xfrm>
+          <a:prstGeom prst="rect">
+            <a:avLst/>
+          </a:prstGeom>
+          <a:noFill/>
+          <a:ln/>
+        </p:spPr>
+        <p:txBody>
+          <a:bodyPr wrap="square" lIns="0" tIns="0" rIns="0" bIns="0" rtlCol="0" anchor="ctr"/>
+          <a:lstStyle/>
+          <a:p>
+            <a:pPr rtl="1" algn="ctr" indent="0" marL="0">
+              <a:buNone/>
+            </a:pPr>
+            <a:r>
+              <a:rPr lang="en-US" sz="1800" dirty="0">
+                <a:solidFill>
+                  <a:srgbClr val="FBF6EE"/>
+                </a:solidFill>
+                <a:latin typeface="IBM Plex Sans Arabic" pitchFamily="34" charset="0"/>
+                <a:ea typeface="IBM Plex Sans Arabic" pitchFamily="34" charset="-122"/>
+                <a:cs typeface="IBM Plex Sans Arabic" pitchFamily="34" charset="-120"/>
+              </a:rPr>
+              <a:t>المتوقع 2030</a:t>
+            </a:r>
+            <a:endParaRPr lang="en-US" sz="1800" dirty="0"/>
+          </a:p>
+        </p:txBody>
+      </p:sp>
+      <p:sp>
+        <p:nvSpPr>
+          <p:cNvPr id="36" name="Text 28"/>
+          <p:cNvSpPr txBox="1"/>
+          <p:nvPr/>
+        </p:nvSpPr>
+        <p:spPr>
+          <a:xfrm>
+            <a:off x="457200" y="5989320"/>
+            <a:ext cx="11277295" cy="237744"/>
+          </a:xfrm>
+          <a:prstGeom prst="rect">
+            <a:avLst/>
+          </a:prstGeom>
+          <a:noFill/>
+          <a:ln/>
+        </p:spPr>
+        <p:txBody>
+          <a:bodyPr wrap="square" lIns="0" tIns="0" rIns="0" bIns="0" rtlCol="0" anchor="ctr"/>
+          <a:lstStyle/>
+          <a:p>
+            <a:pPr algn="r" indent="0" marL="0">
+              <a:buNone/>
+            </a:pPr>
+            <a:r>
+              <a:rPr lang="en-US" sz="950" dirty="0">
                 <a:solidFill>
                   <a:srgbClr val="7F6C72"/>
                 </a:solidFill>
@@ -9423,799 +7399,9 @@
                 <a:ea typeface="IBM Plex Sans Arabic" pitchFamily="34" charset="-122"/>
                 <a:cs typeface="IBM Plex Sans Arabic" pitchFamily="34" charset="-120"/>
               </a:rPr>
-              <a:t>شركة افتراضية نستخدمها في النموذج الأولي</a:t>
-            </a:r>
-            <a:endParaRPr lang="en-US" sz="1200" dirty="0"/>
-          </a:p>
-        </p:txBody>
-      </p:sp>
-      <p:sp>
-        <p:nvSpPr>
-          <p:cNvPr id="27" name="Text 22"/>
-          <p:cNvSpPr txBox="1"/>
-          <p:nvPr/>
-        </p:nvSpPr>
-        <p:spPr>
-          <a:xfrm>
-            <a:off x="9804197" y="3703320"/>
-            <a:ext cx="1610258" cy="502920"/>
-          </a:xfrm>
-          <a:prstGeom prst="rect">
-            <a:avLst/>
-          </a:prstGeom>
-          <a:noFill/>
-          <a:ln/>
-        </p:spPr>
-        <p:txBody>
-          <a:bodyPr wrap="square" lIns="0" tIns="0" rIns="0" bIns="0" rtlCol="0" anchor="t"/>
-          <a:lstStyle/>
-          <a:p>
-            <a:pPr algn="ctr" indent="0" marL="0">
-              <a:buNone/>
-            </a:pPr>
-            <a:r>
-              <a:rPr lang="en-US" sz="2600" b="1" dirty="0">
-                <a:solidFill>
-                  <a:srgbClr val="8E2F3C"/>
-                </a:solidFill>
-                <a:latin typeface="IBM Plex Sans Arabic" pitchFamily="34" charset="0"/>
-                <a:ea typeface="IBM Plex Sans Arabic" pitchFamily="34" charset="-122"/>
-                <a:cs typeface="IBM Plex Sans Arabic" pitchFamily="34" charset="-120"/>
-              </a:rPr>
-              <a:t>120</a:t>
-            </a:r>
-            <a:endParaRPr lang="en-US" sz="2600" dirty="0"/>
-          </a:p>
-        </p:txBody>
-      </p:sp>
-      <p:sp>
-        <p:nvSpPr>
-          <p:cNvPr id="28" name="Text 23"/>
-          <p:cNvSpPr txBox="1"/>
-          <p:nvPr/>
-        </p:nvSpPr>
-        <p:spPr>
-          <a:xfrm>
-            <a:off x="9804197" y="4206240"/>
-            <a:ext cx="1610258" cy="292608"/>
-          </a:xfrm>
-          <a:prstGeom prst="rect">
-            <a:avLst/>
-          </a:prstGeom>
-          <a:noFill/>
-          <a:ln/>
-        </p:spPr>
-        <p:txBody>
-          <a:bodyPr wrap="square" lIns="0" tIns="0" rIns="0" bIns="0" rtlCol="0" anchor="t"/>
-          <a:lstStyle/>
-          <a:p>
-            <a:pPr rtl="1" algn="ctr" indent="0" marL="0">
-              <a:buNone/>
-            </a:pPr>
-            <a:r>
-              <a:rPr lang="en-US" sz="1200" dirty="0">
-                <a:solidFill>
-                  <a:srgbClr val="7F6C72"/>
-                </a:solidFill>
-                <a:latin typeface="IBM Plex Sans Arabic" pitchFamily="34" charset="0"/>
-                <a:ea typeface="IBM Plex Sans Arabic" pitchFamily="34" charset="-122"/>
-                <a:cs typeface="IBM Plex Sans Arabic" pitchFamily="34" charset="-120"/>
-              </a:rPr>
-              <a:t>موظفاً</a:t>
-            </a:r>
-            <a:endParaRPr lang="en-US" sz="1200" dirty="0"/>
-          </a:p>
-        </p:txBody>
-      </p:sp>
-      <p:sp>
-        <p:nvSpPr>
-          <p:cNvPr id="29" name="Text 24"/>
-          <p:cNvSpPr txBox="1"/>
-          <p:nvPr/>
-        </p:nvSpPr>
-        <p:spPr>
-          <a:xfrm>
-            <a:off x="8193938" y="3703320"/>
-            <a:ext cx="1610258" cy="502920"/>
-          </a:xfrm>
-          <a:prstGeom prst="rect">
-            <a:avLst/>
-          </a:prstGeom>
-          <a:noFill/>
-          <a:ln/>
-        </p:spPr>
-        <p:txBody>
-          <a:bodyPr wrap="square" lIns="0" tIns="0" rIns="0" bIns="0" rtlCol="0" anchor="t"/>
-          <a:lstStyle/>
-          <a:p>
-            <a:pPr algn="ctr" indent="0" marL="0">
-              <a:buNone/>
-            </a:pPr>
-            <a:r>
-              <a:rPr lang="en-US" sz="2600" b="1" dirty="0">
-                <a:solidFill>
-                  <a:srgbClr val="8E2F3C"/>
-                </a:solidFill>
-                <a:latin typeface="IBM Plex Sans Arabic" pitchFamily="34" charset="0"/>
-                <a:ea typeface="IBM Plex Sans Arabic" pitchFamily="34" charset="-122"/>
-                <a:cs typeface="IBM Plex Sans Arabic" pitchFamily="34" charset="-120"/>
-              </a:rPr>
-              <a:t>85,400</a:t>
-            </a:r>
-            <a:endParaRPr lang="en-US" sz="2600" dirty="0"/>
-          </a:p>
-        </p:txBody>
-      </p:sp>
-      <p:sp>
-        <p:nvSpPr>
-          <p:cNvPr id="30" name="Text 25"/>
-          <p:cNvSpPr txBox="1"/>
-          <p:nvPr/>
-        </p:nvSpPr>
-        <p:spPr>
-          <a:xfrm>
-            <a:off x="8193938" y="4206240"/>
-            <a:ext cx="1610258" cy="292608"/>
-          </a:xfrm>
-          <a:prstGeom prst="rect">
-            <a:avLst/>
-          </a:prstGeom>
-          <a:noFill/>
-          <a:ln/>
-        </p:spPr>
-        <p:txBody>
-          <a:bodyPr wrap="square" lIns="0" tIns="0" rIns="0" bIns="0" rtlCol="0" anchor="t"/>
-          <a:lstStyle/>
-          <a:p>
-            <a:pPr rtl="1" algn="ctr" indent="0" marL="0">
-              <a:buNone/>
-            </a:pPr>
-            <a:r>
-              <a:rPr lang="en-US" sz="1200" dirty="0">
-                <a:solidFill>
-                  <a:srgbClr val="7F6C72"/>
-                </a:solidFill>
-                <a:latin typeface="IBM Plex Sans Arabic" pitchFamily="34" charset="0"/>
-                <a:ea typeface="IBM Plex Sans Arabic" pitchFamily="34" charset="-122"/>
-                <a:cs typeface="IBM Plex Sans Arabic" pitchFamily="34" charset="-120"/>
-              </a:rPr>
-              <a:t>ريال فاتورة شهرية</a:t>
-            </a:r>
-            <a:endParaRPr lang="en-US" sz="1200" dirty="0"/>
-          </a:p>
-        </p:txBody>
-      </p:sp>
-      <p:sp>
-        <p:nvSpPr>
-          <p:cNvPr id="31" name="Text 26"/>
-          <p:cNvSpPr txBox="1"/>
-          <p:nvPr/>
-        </p:nvSpPr>
-        <p:spPr>
-          <a:xfrm>
-            <a:off x="6583680" y="3703320"/>
-            <a:ext cx="1610258" cy="502920"/>
-          </a:xfrm>
-          <a:prstGeom prst="rect">
-            <a:avLst/>
-          </a:prstGeom>
-          <a:noFill/>
-          <a:ln/>
-        </p:spPr>
-        <p:txBody>
-          <a:bodyPr wrap="square" lIns="0" tIns="0" rIns="0" bIns="0" rtlCol="0" anchor="t"/>
-          <a:lstStyle/>
-          <a:p>
-            <a:pPr algn="ctr" indent="0" marL="0">
-              <a:buNone/>
-            </a:pPr>
-            <a:r>
-              <a:rPr lang="en-US" sz="2600" b="1" dirty="0">
-                <a:solidFill>
-                  <a:srgbClr val="8E2F3C"/>
-                </a:solidFill>
-                <a:latin typeface="IBM Plex Sans Arabic" pitchFamily="34" charset="0"/>
-                <a:ea typeface="IBM Plex Sans Arabic" pitchFamily="34" charset="-122"/>
-                <a:cs typeface="IBM Plex Sans Arabic" pitchFamily="34" charset="-120"/>
-              </a:rPr>
-              <a:t>342</a:t>
-            </a:r>
-            <a:endParaRPr lang="en-US" sz="2600" dirty="0"/>
-          </a:p>
-        </p:txBody>
-      </p:sp>
-      <p:sp>
-        <p:nvSpPr>
-          <p:cNvPr id="32" name="Text 27"/>
-          <p:cNvSpPr txBox="1"/>
-          <p:nvPr/>
-        </p:nvSpPr>
-        <p:spPr>
-          <a:xfrm>
-            <a:off x="6583680" y="4206240"/>
-            <a:ext cx="1610258" cy="292608"/>
-          </a:xfrm>
-          <a:prstGeom prst="rect">
-            <a:avLst/>
-          </a:prstGeom>
-          <a:noFill/>
-          <a:ln/>
-        </p:spPr>
-        <p:txBody>
-          <a:bodyPr wrap="square" lIns="0" tIns="0" rIns="0" bIns="0" rtlCol="0" anchor="t"/>
-          <a:lstStyle/>
-          <a:p>
-            <a:pPr rtl="1" algn="ctr" indent="0" marL="0">
-              <a:buNone/>
-            </a:pPr>
-            <a:r>
-              <a:rPr lang="en-US" sz="1200" dirty="0">
-                <a:solidFill>
-                  <a:srgbClr val="7F6C72"/>
-                </a:solidFill>
-                <a:latin typeface="IBM Plex Sans Arabic" pitchFamily="34" charset="0"/>
-                <a:ea typeface="IBM Plex Sans Arabic" pitchFamily="34" charset="-122"/>
-                <a:cs typeface="IBM Plex Sans Arabic" pitchFamily="34" charset="-120"/>
-              </a:rPr>
-              <a:t>مورداً سحابياً</a:t>
-            </a:r>
-            <a:endParaRPr lang="en-US" sz="1200" dirty="0"/>
-          </a:p>
-        </p:txBody>
-      </p:sp>
-      <p:sp>
-        <p:nvSpPr>
-          <p:cNvPr id="33" name="Shape 28"/>
-          <p:cNvSpPr/>
-          <p:nvPr/>
-        </p:nvSpPr>
-        <p:spPr>
-          <a:xfrm>
-            <a:off x="9859061" y="4709160"/>
-            <a:ext cx="1500530" cy="1051560"/>
-          </a:xfrm>
-          <a:prstGeom prst="roundRect">
-            <a:avLst>
-              <a:gd name="adj" fmla="val 10435"/>
-            </a:avLst>
-          </a:prstGeom>
-          <a:solidFill>
-            <a:srgbClr val="F1E4DF"/>
-          </a:solidFill>
-          <a:ln/>
-        </p:spPr>
-      </p:sp>
-      <p:sp>
-        <p:nvSpPr>
-          <p:cNvPr id="34" name="Text 29"/>
-          <p:cNvSpPr txBox="1"/>
-          <p:nvPr/>
-        </p:nvSpPr>
-        <p:spPr>
-          <a:xfrm>
-            <a:off x="9895637" y="4846320"/>
-            <a:ext cx="1427378" cy="347472"/>
-          </a:xfrm>
-          <a:prstGeom prst="rect">
-            <a:avLst/>
-          </a:prstGeom>
-          <a:noFill/>
-          <a:ln/>
-        </p:spPr>
-        <p:txBody>
-          <a:bodyPr wrap="square" lIns="0" tIns="0" rIns="0" bIns="0" rtlCol="0" anchor="t"/>
-          <a:lstStyle/>
-          <a:p>
-            <a:pPr rtl="1" algn="ctr" indent="0" marL="0">
-              <a:buNone/>
-            </a:pPr>
-            <a:r>
-              <a:rPr lang="en-US" sz="1500" b="1" dirty="0">
-                <a:solidFill>
-                  <a:srgbClr val="21141A"/>
-                </a:solidFill>
-                <a:latin typeface="IBM Plex Sans Arabic" pitchFamily="34" charset="0"/>
-                <a:ea typeface="IBM Plex Sans Arabic" pitchFamily="34" charset="-122"/>
-                <a:cs typeface="IBM Plex Sans Arabic" pitchFamily="34" charset="-120"/>
-              </a:rPr>
-              <a:t>المهندس</a:t>
-            </a:r>
-            <a:endParaRPr lang="en-US" sz="1500" dirty="0"/>
-          </a:p>
-        </p:txBody>
-      </p:sp>
-      <p:sp>
-        <p:nvSpPr>
-          <p:cNvPr id="35" name="Text 30"/>
-          <p:cNvSpPr txBox="1"/>
-          <p:nvPr/>
-        </p:nvSpPr>
-        <p:spPr>
-          <a:xfrm>
-            <a:off x="9895637" y="5212080"/>
-            <a:ext cx="1427378" cy="320040"/>
-          </a:xfrm>
-          <a:prstGeom prst="rect">
-            <a:avLst/>
-          </a:prstGeom>
-          <a:noFill/>
-          <a:ln/>
-        </p:spPr>
-        <p:txBody>
-          <a:bodyPr wrap="square" lIns="0" tIns="0" rIns="0" bIns="0" rtlCol="0" anchor="t"/>
-          <a:lstStyle/>
-          <a:p>
-            <a:pPr rtl="1" algn="ctr" indent="0" marL="0">
-              <a:buNone/>
-            </a:pPr>
-            <a:r>
-              <a:rPr lang="en-US" sz="1200" dirty="0">
-                <a:solidFill>
-                  <a:srgbClr val="7F6C72"/>
-                </a:solidFill>
-                <a:latin typeface="IBM Plex Sans Arabic" pitchFamily="34" charset="0"/>
-                <a:ea typeface="IBM Plex Sans Arabic" pitchFamily="34" charset="-122"/>
-                <a:cs typeface="IBM Plex Sans Arabic" pitchFamily="34" charset="-120"/>
-              </a:rPr>
-              <a:t>يستلم التنبيه</a:t>
-            </a:r>
-            <a:endParaRPr lang="en-US" sz="1200" dirty="0"/>
-          </a:p>
-        </p:txBody>
-      </p:sp>
-      <p:sp>
-        <p:nvSpPr>
-          <p:cNvPr id="36" name="Shape 31"/>
-          <p:cNvSpPr/>
-          <p:nvPr/>
-        </p:nvSpPr>
-        <p:spPr>
-          <a:xfrm>
-            <a:off x="8248802" y="4709160"/>
-            <a:ext cx="1500530" cy="1051560"/>
-          </a:xfrm>
-          <a:prstGeom prst="roundRect">
-            <a:avLst>
-              <a:gd name="adj" fmla="val 10435"/>
-            </a:avLst>
-          </a:prstGeom>
-          <a:solidFill>
-            <a:srgbClr val="F1E4DF"/>
-          </a:solidFill>
-          <a:ln/>
-        </p:spPr>
-      </p:sp>
-      <p:sp>
-        <p:nvSpPr>
-          <p:cNvPr id="37" name="Text 32"/>
-          <p:cNvSpPr txBox="1"/>
-          <p:nvPr/>
-        </p:nvSpPr>
-        <p:spPr>
-          <a:xfrm>
-            <a:off x="8285378" y="4846320"/>
-            <a:ext cx="1427378" cy="347472"/>
-          </a:xfrm>
-          <a:prstGeom prst="rect">
-            <a:avLst/>
-          </a:prstGeom>
-          <a:noFill/>
-          <a:ln/>
-        </p:spPr>
-        <p:txBody>
-          <a:bodyPr wrap="square" lIns="0" tIns="0" rIns="0" bIns="0" rtlCol="0" anchor="t"/>
-          <a:lstStyle/>
-          <a:p>
-            <a:pPr rtl="1" algn="ctr" indent="0" marL="0">
-              <a:buNone/>
-            </a:pPr>
-            <a:r>
-              <a:rPr lang="en-US" sz="1500" b="1" dirty="0">
-                <a:solidFill>
-                  <a:srgbClr val="21141A"/>
-                </a:solidFill>
-                <a:latin typeface="IBM Plex Sans Arabic" pitchFamily="34" charset="0"/>
-                <a:ea typeface="IBM Plex Sans Arabic" pitchFamily="34" charset="-122"/>
-                <a:cs typeface="IBM Plex Sans Arabic" pitchFamily="34" charset="-120"/>
-              </a:rPr>
-              <a:t>المدير التقني</a:t>
-            </a:r>
-            <a:endParaRPr lang="en-US" sz="1500" dirty="0"/>
-          </a:p>
-        </p:txBody>
-      </p:sp>
-      <p:sp>
-        <p:nvSpPr>
-          <p:cNvPr id="38" name="Text 33"/>
-          <p:cNvSpPr txBox="1"/>
-          <p:nvPr/>
-        </p:nvSpPr>
-        <p:spPr>
-          <a:xfrm>
-            <a:off x="8285378" y="5212080"/>
-            <a:ext cx="1427378" cy="320040"/>
-          </a:xfrm>
-          <a:prstGeom prst="rect">
-            <a:avLst/>
-          </a:prstGeom>
-          <a:noFill/>
-          <a:ln/>
-        </p:spPr>
-        <p:txBody>
-          <a:bodyPr wrap="square" lIns="0" tIns="0" rIns="0" bIns="0" rtlCol="0" anchor="t"/>
-          <a:lstStyle/>
-          <a:p>
-            <a:pPr rtl="1" algn="ctr" indent="0" marL="0">
-              <a:buNone/>
-            </a:pPr>
-            <a:r>
-              <a:rPr lang="en-US" sz="1200" dirty="0">
-                <a:solidFill>
-                  <a:srgbClr val="7F6C72"/>
-                </a:solidFill>
-                <a:latin typeface="IBM Plex Sans Arabic" pitchFamily="34" charset="0"/>
-                <a:ea typeface="IBM Plex Sans Arabic" pitchFamily="34" charset="-122"/>
-                <a:cs typeface="IBM Plex Sans Arabic" pitchFamily="34" charset="-120"/>
-              </a:rPr>
-              <a:t>يوافق بنقرة</a:t>
-            </a:r>
-            <a:endParaRPr lang="en-US" sz="1200" dirty="0"/>
-          </a:p>
-        </p:txBody>
-      </p:sp>
-      <p:sp>
-        <p:nvSpPr>
-          <p:cNvPr id="39" name="Shape 34"/>
-          <p:cNvSpPr/>
-          <p:nvPr/>
-        </p:nvSpPr>
-        <p:spPr>
-          <a:xfrm>
-            <a:off x="6638544" y="4709160"/>
-            <a:ext cx="1500530" cy="1051560"/>
-          </a:xfrm>
-          <a:prstGeom prst="roundRect">
-            <a:avLst>
-              <a:gd name="adj" fmla="val 10435"/>
-            </a:avLst>
-          </a:prstGeom>
-          <a:solidFill>
-            <a:srgbClr val="F1E4DF"/>
-          </a:solidFill>
-          <a:ln/>
-        </p:spPr>
-      </p:sp>
-      <p:sp>
-        <p:nvSpPr>
-          <p:cNvPr id="40" name="Text 35"/>
-          <p:cNvSpPr txBox="1"/>
-          <p:nvPr/>
-        </p:nvSpPr>
-        <p:spPr>
-          <a:xfrm>
-            <a:off x="6675120" y="4846320"/>
-            <a:ext cx="1427378" cy="347472"/>
-          </a:xfrm>
-          <a:prstGeom prst="rect">
-            <a:avLst/>
-          </a:prstGeom>
-          <a:noFill/>
-          <a:ln/>
-        </p:spPr>
-        <p:txBody>
-          <a:bodyPr wrap="square" lIns="0" tIns="0" rIns="0" bIns="0" rtlCol="0" anchor="t"/>
-          <a:lstStyle/>
-          <a:p>
-            <a:pPr rtl="1" algn="ctr" indent="0" marL="0">
-              <a:buNone/>
-            </a:pPr>
-            <a:r>
-              <a:rPr lang="en-US" sz="1500" b="1" dirty="0">
-                <a:solidFill>
-                  <a:srgbClr val="21141A"/>
-                </a:solidFill>
-                <a:latin typeface="IBM Plex Sans Arabic" pitchFamily="34" charset="0"/>
-                <a:ea typeface="IBM Plex Sans Arabic" pitchFamily="34" charset="-122"/>
-                <a:cs typeface="IBM Plex Sans Arabic" pitchFamily="34" charset="-120"/>
-              </a:rPr>
-              <a:t>المدير المالي</a:t>
-            </a:r>
-            <a:endParaRPr lang="en-US" sz="1500" dirty="0"/>
-          </a:p>
-        </p:txBody>
-      </p:sp>
-      <p:sp>
-        <p:nvSpPr>
-          <p:cNvPr id="41" name="Text 36"/>
-          <p:cNvSpPr txBox="1"/>
-          <p:nvPr/>
-        </p:nvSpPr>
-        <p:spPr>
-          <a:xfrm>
-            <a:off x="6675120" y="5212080"/>
-            <a:ext cx="1427378" cy="320040"/>
-          </a:xfrm>
-          <a:prstGeom prst="rect">
-            <a:avLst/>
-          </a:prstGeom>
-          <a:noFill/>
-          <a:ln/>
-        </p:spPr>
-        <p:txBody>
-          <a:bodyPr wrap="square" lIns="0" tIns="0" rIns="0" bIns="0" rtlCol="0" anchor="t"/>
-          <a:lstStyle/>
-          <a:p>
-            <a:pPr rtl="1" algn="ctr" indent="0" marL="0">
-              <a:buNone/>
-            </a:pPr>
-            <a:r>
-              <a:rPr lang="en-US" sz="1200" dirty="0">
-                <a:solidFill>
-                  <a:srgbClr val="7F6C72"/>
-                </a:solidFill>
-                <a:latin typeface="IBM Plex Sans Arabic" pitchFamily="34" charset="0"/>
-                <a:ea typeface="IBM Plex Sans Arabic" pitchFamily="34" charset="-122"/>
-                <a:cs typeface="IBM Plex Sans Arabic" pitchFamily="34" charset="-120"/>
-              </a:rPr>
-              <a:t>يقرأ التقرير ويدفع</a:t>
-            </a:r>
-            <a:endParaRPr lang="en-US" sz="1200" dirty="0"/>
-          </a:p>
-        </p:txBody>
-      </p:sp>
-      <p:sp>
-        <p:nvSpPr>
-          <p:cNvPr id="42" name="Shape 37"/>
-          <p:cNvSpPr/>
-          <p:nvPr/>
-        </p:nvSpPr>
-        <p:spPr>
-          <a:xfrm>
-            <a:off x="457200" y="2743200"/>
-            <a:ext cx="5440680" cy="3291840"/>
-          </a:xfrm>
-          <a:prstGeom prst="roundRect">
-            <a:avLst>
-              <a:gd name="adj" fmla="val 5000"/>
-            </a:avLst>
-          </a:prstGeom>
-          <a:solidFill>
-            <a:srgbClr val="8E2F3C"/>
-          </a:solidFill>
-          <a:ln/>
-        </p:spPr>
-      </p:sp>
-      <p:sp>
-        <p:nvSpPr>
-          <p:cNvPr id="43" name="Text 38"/>
-          <p:cNvSpPr txBox="1"/>
-          <p:nvPr/>
-        </p:nvSpPr>
-        <p:spPr>
-          <a:xfrm>
-            <a:off x="822960" y="2926080"/>
-            <a:ext cx="4709160" cy="384048"/>
-          </a:xfrm>
-          <a:prstGeom prst="rect">
-            <a:avLst/>
-          </a:prstGeom>
-          <a:noFill/>
-          <a:ln/>
-        </p:spPr>
-        <p:txBody>
-          <a:bodyPr wrap="square" lIns="0" tIns="0" rIns="0" bIns="0" rtlCol="0" anchor="t"/>
-          <a:lstStyle/>
-          <a:p>
-            <a:pPr rtl="1" algn="r" indent="0" marL="0">
-              <a:buNone/>
-            </a:pPr>
-            <a:r>
-              <a:rPr lang="en-US" sz="1800" b="1" dirty="0">
-                <a:solidFill>
-                  <a:srgbClr val="FBF6EE"/>
-                </a:solidFill>
-                <a:latin typeface="IBM Plex Sans Arabic" pitchFamily="34" charset="0"/>
-                <a:ea typeface="IBM Plex Sans Arabic" pitchFamily="34" charset="-122"/>
-                <a:cs typeface="IBM Plex Sans Arabic" pitchFamily="34" charset="-120"/>
-              </a:rPr>
-              <a:t>حجم السوق</a:t>
-            </a:r>
-            <a:endParaRPr lang="en-US" sz="1800" dirty="0"/>
-          </a:p>
-        </p:txBody>
-      </p:sp>
-      <p:sp>
-        <p:nvSpPr>
-          <p:cNvPr id="44" name="Text 39"/>
-          <p:cNvSpPr txBox="1"/>
-          <p:nvPr/>
-        </p:nvSpPr>
-        <p:spPr>
-          <a:xfrm>
-            <a:off x="822960" y="3383280"/>
-            <a:ext cx="4709160" cy="777240"/>
-          </a:xfrm>
-          <a:prstGeom prst="rect">
-            <a:avLst/>
-          </a:prstGeom>
-          <a:noFill/>
-          <a:ln/>
-        </p:spPr>
-        <p:txBody>
-          <a:bodyPr wrap="square" lIns="0" tIns="0" rIns="0" bIns="0" rtlCol="0" anchor="t"/>
-          <a:lstStyle/>
-          <a:p>
-            <a:pPr algn="r" indent="0" marL="0">
-              <a:buNone/>
-            </a:pPr>
-            <a:r>
-              <a:rPr lang="en-US" sz="4800" b="1" dirty="0">
-                <a:solidFill>
-                  <a:srgbClr val="FBF6EE"/>
-                </a:solidFill>
-                <a:latin typeface="IBM Plex Sans Arabic" pitchFamily="34" charset="0"/>
-                <a:ea typeface="IBM Plex Sans Arabic" pitchFamily="34" charset="-122"/>
-                <a:cs typeface="IBM Plex Sans Arabic" pitchFamily="34" charset="-120"/>
-              </a:rPr>
-              <a:t>$5.1B</a:t>
-            </a:r>
-            <a:endParaRPr lang="en-US" sz="4800" dirty="0"/>
-          </a:p>
-        </p:txBody>
-      </p:sp>
-      <p:sp>
-        <p:nvSpPr>
-          <p:cNvPr id="45" name="Text 40"/>
-          <p:cNvSpPr txBox="1"/>
-          <p:nvPr/>
-        </p:nvSpPr>
-        <p:spPr>
-          <a:xfrm>
-            <a:off x="822960" y="4160520"/>
-            <a:ext cx="4709160" cy="347472"/>
-          </a:xfrm>
-          <a:prstGeom prst="rect">
-            <a:avLst/>
-          </a:prstGeom>
-          <a:noFill/>
-          <a:ln/>
-        </p:spPr>
-        <p:txBody>
-          <a:bodyPr wrap="square" lIns="0" tIns="0" rIns="0" bIns="0" rtlCol="0" anchor="t"/>
-          <a:lstStyle/>
-          <a:p>
-            <a:pPr rtl="1" algn="r" indent="0" marL="0">
-              <a:buNone/>
-            </a:pPr>
-            <a:r>
-              <a:rPr lang="en-US" sz="1500" dirty="0">
-                <a:solidFill>
-                  <a:srgbClr val="FBF6EE"/>
-                </a:solidFill>
-                <a:latin typeface="IBM Plex Sans Arabic" pitchFamily="34" charset="0"/>
-                <a:ea typeface="IBM Plex Sans Arabic" pitchFamily="34" charset="-122"/>
-                <a:cs typeface="IBM Plex Sans Arabic" pitchFamily="34" charset="-120"/>
-              </a:rPr>
-              <a:t>سوق الحوسبة السحابية في السعودية، 2025</a:t>
-            </a:r>
-            <a:endParaRPr lang="en-US" sz="1500" dirty="0"/>
-          </a:p>
-        </p:txBody>
-      </p:sp>
-      <p:sp>
-        <p:nvSpPr>
-          <p:cNvPr id="46" name="Text 41"/>
-          <p:cNvSpPr txBox="1"/>
-          <p:nvPr/>
-        </p:nvSpPr>
-        <p:spPr>
-          <a:xfrm>
-            <a:off x="822960" y="4617720"/>
-            <a:ext cx="4709160" cy="548640"/>
-          </a:xfrm>
-          <a:prstGeom prst="rect">
-            <a:avLst/>
-          </a:prstGeom>
-          <a:noFill/>
-          <a:ln/>
-        </p:spPr>
-        <p:txBody>
-          <a:bodyPr wrap="square" lIns="0" tIns="0" rIns="0" bIns="0" rtlCol="0" anchor="t"/>
-          <a:lstStyle/>
-          <a:p>
-            <a:pPr algn="r" indent="0" marL="0">
-              <a:buNone/>
-            </a:pPr>
-            <a:r>
-              <a:rPr lang="en-US" sz="3000" b="1" dirty="0">
-                <a:solidFill>
-                  <a:srgbClr val="C9A46E"/>
-                </a:solidFill>
-                <a:latin typeface="IBM Plex Sans Arabic" pitchFamily="34" charset="0"/>
-                <a:ea typeface="IBM Plex Sans Arabic" pitchFamily="34" charset="-122"/>
-                <a:cs typeface="IBM Plex Sans Arabic" pitchFamily="34" charset="-120"/>
-              </a:rPr>
-              <a:t>$14.6B</a:t>
-            </a:r>
-            <a:endParaRPr lang="en-US" sz="3000" dirty="0"/>
-          </a:p>
-        </p:txBody>
-      </p:sp>
-      <p:sp>
-        <p:nvSpPr>
-          <p:cNvPr id="47" name="Text 42"/>
-          <p:cNvSpPr txBox="1"/>
-          <p:nvPr/>
-        </p:nvSpPr>
-        <p:spPr>
-          <a:xfrm>
-            <a:off x="822960" y="5166360"/>
-            <a:ext cx="4709160" cy="320040"/>
-          </a:xfrm>
-          <a:prstGeom prst="rect">
-            <a:avLst/>
-          </a:prstGeom>
-          <a:noFill/>
-          <a:ln/>
-        </p:spPr>
-        <p:txBody>
-          <a:bodyPr wrap="square" lIns="0" tIns="0" rIns="0" bIns="0" rtlCol="0" anchor="t"/>
-          <a:lstStyle/>
-          <a:p>
-            <a:pPr rtl="1" algn="r" indent="0" marL="0">
-              <a:buNone/>
-            </a:pPr>
-            <a:r>
-              <a:rPr lang="en-US" sz="1500" dirty="0">
-                <a:solidFill>
-                  <a:srgbClr val="FBF6EE"/>
-                </a:solidFill>
-                <a:latin typeface="IBM Plex Sans Arabic" pitchFamily="34" charset="0"/>
-                <a:ea typeface="IBM Plex Sans Arabic" pitchFamily="34" charset="-122"/>
-                <a:cs typeface="IBM Plex Sans Arabic" pitchFamily="34" charset="-120"/>
-              </a:rPr>
-              <a:t>المتوقع بحلول 2030</a:t>
-            </a:r>
-            <a:endParaRPr lang="en-US" sz="1500" dirty="0"/>
-          </a:p>
-        </p:txBody>
-      </p:sp>
-      <p:sp>
-        <p:nvSpPr>
-          <p:cNvPr id="48" name="Text 43"/>
-          <p:cNvSpPr txBox="1"/>
-          <p:nvPr/>
-        </p:nvSpPr>
-        <p:spPr>
-          <a:xfrm>
-            <a:off x="822960" y="5577840"/>
-            <a:ext cx="4709160" cy="274320"/>
-          </a:xfrm>
-          <a:prstGeom prst="rect">
-            <a:avLst/>
-          </a:prstGeom>
-          <a:noFill/>
-          <a:ln/>
-        </p:spPr>
-        <p:txBody>
-          <a:bodyPr wrap="square" lIns="0" tIns="0" rIns="0" bIns="0" rtlCol="0" anchor="t"/>
-          <a:lstStyle/>
-          <a:p>
-            <a:pPr rtl="1" algn="r" indent="0" marL="0">
-              <a:buNone/>
-            </a:pPr>
-            <a:r>
-              <a:rPr lang="en-US" sz="1000" dirty="0">
-                <a:solidFill>
-                  <a:srgbClr val="F1E4DF"/>
-                </a:solidFill>
-                <a:latin typeface="IBM Plex Sans Arabic" pitchFamily="34" charset="0"/>
-                <a:ea typeface="IBM Plex Sans Arabic" pitchFamily="34" charset="-122"/>
-                <a:cs typeface="IBM Plex Sans Arabic" pitchFamily="34" charset="-120"/>
-              </a:rPr>
-              <a:t>المصدر: MarketsandMarkets</a:t>
-            </a:r>
-            <a:endParaRPr lang="en-US" sz="1000" dirty="0"/>
+              <a:t>MarketsandMarkets</a:t>
+            </a:r>
+            <a:endParaRPr lang="en-US" sz="950" dirty="0"/>
           </a:p>
         </p:txBody>
       </p:sp>
@@ -10749,8 +7935,8 @@
         </p:nvSpPr>
         <p:spPr>
           <a:xfrm>
-            <a:off x="457200" y="1463040"/>
-            <a:ext cx="11277295" cy="658368"/>
+            <a:off x="457200" y="1600200"/>
+            <a:ext cx="11277295" cy="731520"/>
           </a:xfrm>
           <a:prstGeom prst="rect">
             <a:avLst/>
@@ -10766,7 +7952,7 @@
               <a:buNone/>
             </a:pPr>
             <a:r>
-              <a:rPr lang="en-US" sz="2600" b="1" dirty="0">
+              <a:rPr lang="en-US" sz="3400" b="1" dirty="0">
                 <a:solidFill>
                   <a:srgbClr val="21141A"/>
                 </a:solidFill>
@@ -10774,22 +7960,68 @@
                 <a:ea typeface="IBM Plex Sans Arabic" pitchFamily="34" charset="-122"/>
                 <a:cs typeface="IBM Plex Sans Arabic" pitchFamily="34" charset="-120"/>
               </a:rPr>
-              <a:t>قابل للتنفيذ اليوم: AWS أولاً، والمزودون المحليون في المرحلة الثانية</a:t>
-            </a:r>
-            <a:endParaRPr lang="en-US" sz="2600" dirty="0"/>
-          </a:p>
-        </p:txBody>
-      </p:sp>
-      <p:sp>
-        <p:nvSpPr>
-          <p:cNvPr id="23" name="Text 18"/>
+              <a:t>AWS اليوم، والسحب المحلية تالياً</a:t>
+            </a:r>
+            <a:endParaRPr lang="en-US" sz="3400" dirty="0"/>
+          </a:p>
+        </p:txBody>
+      </p:sp>
+      <p:sp>
+        <p:nvSpPr>
+          <p:cNvPr id="23" name="Shape 18"/>
+          <p:cNvSpPr/>
+          <p:nvPr/>
+        </p:nvSpPr>
+        <p:spPr>
+          <a:xfrm>
+            <a:off x="8188757" y="2697480"/>
+            <a:ext cx="3545738" cy="2103120"/>
+          </a:xfrm>
+          <a:prstGeom prst="roundRect">
+            <a:avLst>
+              <a:gd name="adj" fmla="val 8696"/>
+            </a:avLst>
+          </a:prstGeom>
+          <a:solidFill>
+            <a:srgbClr val="8E2F3C"/>
+          </a:solidFill>
+          <a:ln/>
+        </p:spPr>
+      </p:sp>
+      <p:pic>
+        <p:nvPicPr>
+          <p:cNvPr id="24" name="Image 3" descr="/tmp/claude-0/-home-claude/750ff410-f4aa-5276-9360-1e19d018b112/scratchpad/c/assets/i-cloud-cr.png">    </p:cNvPr>
+          <p:cNvPicPr>
+            <a:picLocks noChangeAspect="1"/>
+          </p:cNvPicPr>
+          <p:nvPr/>
+        </p:nvPicPr>
+        <p:blipFill>
+          <a:blip r:embed="rId4"/>
+          <a:stretch>
+            <a:fillRect/>
+          </a:stretch>
+        </p:blipFill>
+        <p:spPr>
+          <a:xfrm>
+            <a:off x="9641586" y="2971800"/>
+            <a:ext cx="640080" cy="640080"/>
+          </a:xfrm>
+          <a:prstGeom prst="rect">
+            <a:avLst/>
+          </a:prstGeom>
+        </p:spPr>
+      </p:pic>
+      <p:sp>
+        <p:nvSpPr>
+          <p:cNvPr id="25" name="Text 19"/>
           <p:cNvSpPr txBox="1"/>
           <p:nvPr/>
         </p:nvSpPr>
         <p:spPr>
           <a:xfrm>
-            <a:off x="6263640" y="2286000"/>
-            <a:ext cx="5470855" cy="365760"/>
+            <a:off x="8188757" y="3703320"/>
+            <a:ext cx="3545738" cy="365760"/>
           </a:xfrm>
           <a:prstGeom prst="rect">
             <a:avLst/>
@@ -10801,11 +8033,179 @@
           <a:bodyPr wrap="square" lIns="0" tIns="0" rIns="0" bIns="0" rtlCol="0" anchor="t"/>
           <a:lstStyle/>
           <a:p>
-            <a:pPr rtl="1" algn="r" indent="0" marL="0">
+            <a:pPr rtl="1" algn="ctr" indent="0" marL="0">
               <a:buNone/>
             </a:pPr>
             <a:r>
-              <a:rPr lang="en-US" sz="1700" b="1" dirty="0">
+              <a:rPr lang="en-US" sz="1600" dirty="0">
+                <a:solidFill>
+                  <a:srgbClr val="F1E4DF"/>
+                </a:solidFill>
+                <a:latin typeface="IBM Plex Sans Arabic" pitchFamily="34" charset="0"/>
+                <a:ea typeface="IBM Plex Sans Arabic" pitchFamily="34" charset="-122"/>
+                <a:cs typeface="IBM Plex Sans Arabic" pitchFamily="34" charset="-120"/>
+              </a:rPr>
+              <a:t>الآن</a:t>
+            </a:r>
+            <a:endParaRPr lang="en-US" sz="1600" dirty="0"/>
+          </a:p>
+        </p:txBody>
+      </p:sp>
+      <p:sp>
+        <p:nvSpPr>
+          <p:cNvPr id="26" name="Text 20"/>
+          <p:cNvSpPr txBox="1"/>
+          <p:nvPr/>
+        </p:nvSpPr>
+        <p:spPr>
+          <a:xfrm>
+            <a:off x="8188757" y="4069080"/>
+            <a:ext cx="3545738" cy="502920"/>
+          </a:xfrm>
+          <a:prstGeom prst="rect">
+            <a:avLst/>
+          </a:prstGeom>
+          <a:noFill/>
+          <a:ln/>
+        </p:spPr>
+        <p:txBody>
+          <a:bodyPr wrap="square" lIns="0" tIns="0" rIns="0" bIns="0" rtlCol="0" anchor="t"/>
+          <a:lstStyle/>
+          <a:p>
+            <a:pPr rtl="1" algn="ctr" indent="0" marL="0">
+              <a:buNone/>
+            </a:pPr>
+            <a:r>
+              <a:rPr lang="en-US" sz="2400" b="1" dirty="0">
+                <a:solidFill>
+                  <a:srgbClr val="FBF6EE"/>
+                </a:solidFill>
+                <a:latin typeface="IBM Plex Sans Arabic" pitchFamily="34" charset="0"/>
+                <a:ea typeface="IBM Plex Sans Arabic" pitchFamily="34" charset="-122"/>
+                <a:cs typeface="IBM Plex Sans Arabic" pitchFamily="34" charset="-120"/>
+              </a:rPr>
+              <a:t>AWS</a:t>
+            </a:r>
+            <a:endParaRPr lang="en-US" sz="2400" dirty="0"/>
+          </a:p>
+        </p:txBody>
+      </p:sp>
+      <p:sp>
+        <p:nvSpPr>
+          <p:cNvPr id="27" name="Shape 21"/>
+          <p:cNvSpPr/>
+          <p:nvPr/>
+        </p:nvSpPr>
+        <p:spPr>
+          <a:xfrm>
+            <a:off x="4322978" y="2697480"/>
+            <a:ext cx="3545738" cy="2103120"/>
+          </a:xfrm>
+          <a:prstGeom prst="roundRect">
+            <a:avLst>
+              <a:gd name="adj" fmla="val 8696"/>
+            </a:avLst>
+          </a:prstGeom>
+          <a:solidFill>
+            <a:srgbClr val="FFFBF8"/>
+          </a:solidFill>
+          <a:ln w="9525">
+            <a:solidFill>
+              <a:srgbClr val="E3D5CC"/>
+            </a:solidFill>
+            <a:prstDash val="solid"/>
+          </a:ln>
+        </p:spPr>
+      </p:sp>
+      <p:pic>
+        <p:nvPicPr>
+          <p:cNvPr id="28" name="Image 4" descr="/tmp/claude-0/-home-claude/750ff410-f4aa-5276-9360-1e19d018b112/scratchpad/c/assets/i-layers-br.png">    </p:cNvPr>
+          <p:cNvPicPr>
+            <a:picLocks noChangeAspect="1"/>
+          </p:cNvPicPr>
+          <p:nvPr/>
+        </p:nvPicPr>
+        <p:blipFill>
+          <a:blip r:embed="rId5"/>
+          <a:stretch>
+            <a:fillRect/>
+          </a:stretch>
+        </p:blipFill>
+        <p:spPr>
+          <a:xfrm>
+            <a:off x="5775808" y="2971800"/>
+            <a:ext cx="640080" cy="640080"/>
+          </a:xfrm>
+          <a:prstGeom prst="rect">
+            <a:avLst/>
+          </a:prstGeom>
+        </p:spPr>
+      </p:pic>
+      <p:sp>
+        <p:nvSpPr>
+          <p:cNvPr id="29" name="Text 22"/>
+          <p:cNvSpPr txBox="1"/>
+          <p:nvPr/>
+        </p:nvSpPr>
+        <p:spPr>
+          <a:xfrm>
+            <a:off x="4322978" y="3703320"/>
+            <a:ext cx="3545738" cy="365760"/>
+          </a:xfrm>
+          <a:prstGeom prst="rect">
+            <a:avLst/>
+          </a:prstGeom>
+          <a:noFill/>
+          <a:ln/>
+        </p:spPr>
+        <p:txBody>
+          <a:bodyPr wrap="square" lIns="0" tIns="0" rIns="0" bIns="0" rtlCol="0" anchor="t"/>
+          <a:lstStyle/>
+          <a:p>
+            <a:pPr rtl="1" algn="ctr" indent="0" marL="0">
+              <a:buNone/>
+            </a:pPr>
+            <a:r>
+              <a:rPr lang="en-US" sz="1600" dirty="0">
+                <a:solidFill>
+                  <a:srgbClr val="7F6C72"/>
+                </a:solidFill>
+                <a:latin typeface="IBM Plex Sans Arabic" pitchFamily="34" charset="0"/>
+                <a:ea typeface="IBM Plex Sans Arabic" pitchFamily="34" charset="-122"/>
+                <a:cs typeface="IBM Plex Sans Arabic" pitchFamily="34" charset="-120"/>
+              </a:rPr>
+              <a:t>التالي</a:t>
+            </a:r>
+            <a:endParaRPr lang="en-US" sz="1600" dirty="0"/>
+          </a:p>
+        </p:txBody>
+      </p:sp>
+      <p:sp>
+        <p:nvSpPr>
+          <p:cNvPr id="30" name="Text 23"/>
+          <p:cNvSpPr txBox="1"/>
+          <p:nvPr/>
+        </p:nvSpPr>
+        <p:spPr>
+          <a:xfrm>
+            <a:off x="4322978" y="4069080"/>
+            <a:ext cx="3545738" cy="502920"/>
+          </a:xfrm>
+          <a:prstGeom prst="rect">
+            <a:avLst/>
+          </a:prstGeom>
+          <a:noFill/>
+          <a:ln/>
+        </p:spPr>
+        <p:txBody>
+          <a:bodyPr wrap="square" lIns="0" tIns="0" rIns="0" bIns="0" rtlCol="0" anchor="t"/>
+          <a:lstStyle/>
+          <a:p>
+            <a:pPr rtl="1" algn="ctr" indent="0" marL="0">
+              <a:buNone/>
+            </a:pPr>
+            <a:r>
+              <a:rPr lang="en-US" sz="2400" b="1" dirty="0">
                 <a:solidFill>
                   <a:srgbClr val="8E2F3C"/>
                 </a:solidFill>
@@ -10813,42 +8213,73 @@
                 <a:ea typeface="IBM Plex Sans Arabic" pitchFamily="34" charset="-122"/>
                 <a:cs typeface="IBM Plex Sans Arabic" pitchFamily="34" charset="-120"/>
               </a:rPr>
-              <a:t>كيف يعمل الآن</a:t>
-            </a:r>
-            <a:endParaRPr lang="en-US" sz="1700" dirty="0"/>
-          </a:p>
-        </p:txBody>
-      </p:sp>
-      <p:sp>
-        <p:nvSpPr>
-          <p:cNvPr id="24" name="Shape 19"/>
-          <p:cNvSpPr/>
-          <p:nvPr/>
-        </p:nvSpPr>
-        <p:spPr>
-          <a:xfrm>
-            <a:off x="11588191" y="2834640"/>
-            <a:ext cx="146304" cy="146304"/>
-          </a:xfrm>
-          <a:prstGeom prst="rect">
-            <a:avLst/>
-          </a:prstGeom>
-          <a:solidFill>
-            <a:srgbClr val="D48A93"/>
-          </a:solidFill>
-          <a:ln/>
-        </p:spPr>
-      </p:sp>
-      <p:sp>
-        <p:nvSpPr>
-          <p:cNvPr id="25" name="Text 20"/>
+              <a:t>Azure وGCP</a:t>
+            </a:r>
+            <a:endParaRPr lang="en-US" sz="2400" dirty="0"/>
+          </a:p>
+        </p:txBody>
+      </p:sp>
+      <p:sp>
+        <p:nvSpPr>
+          <p:cNvPr id="31" name="Shape 24"/>
+          <p:cNvSpPr/>
+          <p:nvPr/>
+        </p:nvSpPr>
+        <p:spPr>
+          <a:xfrm>
+            <a:off x="457200" y="2697480"/>
+            <a:ext cx="3545738" cy="2103120"/>
+          </a:xfrm>
+          <a:prstGeom prst="roundRect">
+            <a:avLst>
+              <a:gd name="adj" fmla="val 8696"/>
+            </a:avLst>
+          </a:prstGeom>
+          <a:solidFill>
+            <a:srgbClr val="FFFBF8"/>
+          </a:solidFill>
+          <a:ln w="9525">
+            <a:solidFill>
+              <a:srgbClr val="E3D5CC"/>
+            </a:solidFill>
+            <a:prstDash val="solid"/>
+          </a:ln>
+        </p:spPr>
+      </p:sp>
+      <p:pic>
+        <p:nvPicPr>
+          <p:cNvPr id="32" name="Image 5" descr="/tmp/claude-0/-home-claude/750ff410-f4aa-5276-9360-1e19d018b112/scratchpad/c/assets/i-map-br.png">    </p:cNvPr>
+          <p:cNvPicPr>
+            <a:picLocks noChangeAspect="1"/>
+          </p:cNvPicPr>
+          <p:nvPr/>
+        </p:nvPicPr>
+        <p:blipFill>
+          <a:blip r:embed="rId6"/>
+          <a:stretch>
+            <a:fillRect/>
+          </a:stretch>
+        </p:blipFill>
+        <p:spPr>
+          <a:xfrm>
+            <a:off x="1910029" y="2971800"/>
+            <a:ext cx="640080" cy="640080"/>
+          </a:xfrm>
+          <a:prstGeom prst="rect">
+            <a:avLst/>
+          </a:prstGeom>
+        </p:spPr>
+      </p:pic>
+      <p:sp>
+        <p:nvSpPr>
+          <p:cNvPr id="33" name="Text 25"/>
           <p:cNvSpPr txBox="1"/>
           <p:nvPr/>
         </p:nvSpPr>
         <p:spPr>
           <a:xfrm>
-            <a:off x="6263640" y="2743200"/>
-            <a:ext cx="5150815" cy="320040"/>
+            <a:off x="457200" y="3703320"/>
+            <a:ext cx="3545738" cy="365760"/>
           </a:xfrm>
           <a:prstGeom prst="rect">
             <a:avLst/>
@@ -10860,11 +8291,116 @@
           <a:bodyPr wrap="square" lIns="0" tIns="0" rIns="0" bIns="0" rtlCol="0" anchor="t"/>
           <a:lstStyle/>
           <a:p>
-            <a:pPr rtl="1" algn="r" indent="0" marL="0">
+            <a:pPr rtl="1" algn="ctr" indent="0" marL="0">
               <a:buNone/>
             </a:pPr>
             <a:r>
-              <a:rPr lang="en-US" sz="1500" b="1" dirty="0">
+              <a:rPr lang="en-US" sz="1600" dirty="0">
+                <a:solidFill>
+                  <a:srgbClr val="7F6C72"/>
+                </a:solidFill>
+                <a:latin typeface="IBM Plex Sans Arabic" pitchFamily="34" charset="0"/>
+                <a:ea typeface="IBM Plex Sans Arabic" pitchFamily="34" charset="-122"/>
+                <a:cs typeface="IBM Plex Sans Arabic" pitchFamily="34" charset="-120"/>
+              </a:rPr>
+              <a:t>ثم</a:t>
+            </a:r>
+            <a:endParaRPr lang="en-US" sz="1600" dirty="0"/>
+          </a:p>
+        </p:txBody>
+      </p:sp>
+      <p:sp>
+        <p:nvSpPr>
+          <p:cNvPr id="34" name="Text 26"/>
+          <p:cNvSpPr txBox="1"/>
+          <p:nvPr/>
+        </p:nvSpPr>
+        <p:spPr>
+          <a:xfrm>
+            <a:off x="457200" y="4069080"/>
+            <a:ext cx="3545738" cy="502920"/>
+          </a:xfrm>
+          <a:prstGeom prst="rect">
+            <a:avLst/>
+          </a:prstGeom>
+          <a:noFill/>
+          <a:ln/>
+        </p:spPr>
+        <p:txBody>
+          <a:bodyPr wrap="square" lIns="0" tIns="0" rIns="0" bIns="0" rtlCol="0" anchor="t"/>
+          <a:lstStyle/>
+          <a:p>
+            <a:pPr rtl="1" algn="ctr" indent="0" marL="0">
+              <a:buNone/>
+            </a:pPr>
+            <a:r>
+              <a:rPr lang="en-US" sz="2400" b="1" dirty="0">
+                <a:solidFill>
+                  <a:srgbClr val="8E2F3C"/>
+                </a:solidFill>
+                <a:latin typeface="IBM Plex Sans Arabic" pitchFamily="34" charset="0"/>
+                <a:ea typeface="IBM Plex Sans Arabic" pitchFamily="34" charset="-122"/>
+                <a:cs typeface="IBM Plex Sans Arabic" pitchFamily="34" charset="-120"/>
+              </a:rPr>
+              <a:t>STC وSCCC وCNTXT</a:t>
+            </a:r>
+            <a:endParaRPr lang="en-US" sz="2400" dirty="0"/>
+          </a:p>
+        </p:txBody>
+      </p:sp>
+      <p:sp>
+        <p:nvSpPr>
+          <p:cNvPr id="35" name="Shape 27"/>
+          <p:cNvSpPr/>
+          <p:nvPr/>
+        </p:nvSpPr>
+        <p:spPr>
+          <a:xfrm>
+            <a:off x="7353148" y="5257800"/>
+            <a:ext cx="1097280" cy="384048"/>
+          </a:xfrm>
+          <a:prstGeom prst="roundRect">
+            <a:avLst>
+              <a:gd name="adj" fmla="val 50000"/>
+            </a:avLst>
+          </a:prstGeom>
+          <a:solidFill>
+            <a:srgbClr val="FFFBF8"/>
+          </a:solidFill>
+          <a:ln w="9525">
+            <a:solidFill>
+              <a:srgbClr val="E3D5CC"/>
+            </a:solidFill>
+            <a:prstDash val="solid"/>
+          </a:ln>
+        </p:spPr>
+      </p:sp>
+      <p:sp>
+        <p:nvSpPr>
+          <p:cNvPr id="36" name="Text 28"/>
+          <p:cNvSpPr txBox="1"/>
+          <p:nvPr/>
+        </p:nvSpPr>
+        <p:spPr>
+          <a:xfrm>
+            <a:off x="7353148" y="5257800"/>
+            <a:ext cx="1097280" cy="384048"/>
+          </a:xfrm>
+          <a:prstGeom prst="rect">
+            <a:avLst/>
+          </a:prstGeom>
+          <a:noFill/>
+          <a:ln/>
+        </p:spPr>
+        <p:txBody>
+          <a:bodyPr wrap="square" lIns="0" tIns="0" rIns="0" bIns="0" rtlCol="0" anchor="ctr"/>
+          <a:lstStyle/>
+          <a:p>
+            <a:pPr rtl="1" algn="ctr" indent="0" marL="0">
+              <a:buNone/>
+            </a:pPr>
+            <a:r>
+              <a:rPr lang="en-US" sz="1300" b="1" dirty="0">
                 <a:solidFill>
                   <a:srgbClr val="21141A"/>
                 </a:solidFill>
@@ -10872,296 +8408,22 @@
                 <a:ea typeface="IBM Plex Sans Arabic" pitchFamily="34" charset="-122"/>
                 <a:cs typeface="IBM Plex Sans Arabic" pitchFamily="34" charset="-120"/>
               </a:rPr>
-              <a:t>ربط عبر API بصلاحيات قراءة</a:t>
-            </a:r>
-            <a:endParaRPr lang="en-US" sz="1500" dirty="0"/>
-          </a:p>
-        </p:txBody>
-      </p:sp>
-      <p:sp>
-        <p:nvSpPr>
-          <p:cNvPr id="26" name="Text 21"/>
-          <p:cNvSpPr txBox="1"/>
-          <p:nvPr/>
-        </p:nvSpPr>
-        <p:spPr>
-          <a:xfrm>
-            <a:off x="6263640" y="3072384"/>
-            <a:ext cx="5150815" cy="320040"/>
-          </a:xfrm>
-          <a:prstGeom prst="rect">
-            <a:avLst/>
-          </a:prstGeom>
-          <a:noFill/>
-          <a:ln/>
-        </p:spPr>
-        <p:txBody>
-          <a:bodyPr wrap="square" lIns="0" tIns="0" rIns="0" bIns="0" rtlCol="0" anchor="t"/>
-          <a:lstStyle/>
-          <a:p>
-            <a:pPr rtl="1" algn="r" indent="0" marL="0">
-              <a:buNone/>
-            </a:pPr>
-            <a:r>
-              <a:rPr lang="en-US" sz="1150" dirty="0">
-                <a:solidFill>
-                  <a:srgbClr val="7F6C72"/>
-                </a:solidFill>
-                <a:latin typeface="IBM Plex Sans Arabic" pitchFamily="34" charset="0"/>
-                <a:ea typeface="IBM Plex Sans Arabic" pitchFamily="34" charset="-122"/>
-                <a:cs typeface="IBM Plex Sans Arabic" pitchFamily="34" charset="-120"/>
-              </a:rPr>
-              <a:t>ce:GetCostAndUsage · ec2:DescribeVolumes · cloudwatch:GetMetricStatistics</a:t>
-            </a:r>
-            <a:endParaRPr lang="en-US" sz="1150" dirty="0"/>
-          </a:p>
-        </p:txBody>
-      </p:sp>
-      <p:sp>
-        <p:nvSpPr>
-          <p:cNvPr id="27" name="Shape 22"/>
-          <p:cNvSpPr/>
-          <p:nvPr/>
-        </p:nvSpPr>
-        <p:spPr>
-          <a:xfrm>
-            <a:off x="11588191" y="3566160"/>
-            <a:ext cx="146304" cy="146304"/>
-          </a:xfrm>
-          <a:prstGeom prst="rect">
-            <a:avLst/>
-          </a:prstGeom>
-          <a:solidFill>
-            <a:srgbClr val="C9A46E"/>
-          </a:solidFill>
-          <a:ln/>
-        </p:spPr>
-      </p:sp>
-      <p:sp>
-        <p:nvSpPr>
-          <p:cNvPr id="28" name="Text 23"/>
-          <p:cNvSpPr txBox="1"/>
-          <p:nvPr/>
-        </p:nvSpPr>
-        <p:spPr>
-          <a:xfrm>
-            <a:off x="6263640" y="3474720"/>
-            <a:ext cx="5150815" cy="320040"/>
-          </a:xfrm>
-          <a:prstGeom prst="rect">
-            <a:avLst/>
-          </a:prstGeom>
-          <a:noFill/>
-          <a:ln/>
-        </p:spPr>
-        <p:txBody>
-          <a:bodyPr wrap="square" lIns="0" tIns="0" rIns="0" bIns="0" rtlCol="0" anchor="t"/>
-          <a:lstStyle/>
-          <a:p>
-            <a:pPr rtl="1" algn="r" indent="0" marL="0">
-              <a:buNone/>
-            </a:pPr>
-            <a:r>
-              <a:rPr lang="en-US" sz="1500" b="1" dirty="0">
-                <a:solidFill>
-                  <a:srgbClr val="21141A"/>
-                </a:solidFill>
-                <a:latin typeface="IBM Plex Sans Arabic" pitchFamily="34" charset="0"/>
-                <a:ea typeface="IBM Plex Sans Arabic" pitchFamily="34" charset="-122"/>
-                <a:cs typeface="IBM Plex Sans Arabic" pitchFamily="34" charset="-120"/>
-              </a:rPr>
-              <a:t>قواعد هدر + نموذج ذكاء اصطناعي</a:t>
-            </a:r>
-            <a:endParaRPr lang="en-US" sz="1500" dirty="0"/>
-          </a:p>
-        </p:txBody>
-      </p:sp>
-      <p:sp>
-        <p:nvSpPr>
-          <p:cNvPr id="29" name="Text 24"/>
-          <p:cNvSpPr txBox="1"/>
-          <p:nvPr/>
-        </p:nvSpPr>
-        <p:spPr>
-          <a:xfrm>
-            <a:off x="6263640" y="3803904"/>
-            <a:ext cx="5150815" cy="320040"/>
-          </a:xfrm>
-          <a:prstGeom prst="rect">
-            <a:avLst/>
-          </a:prstGeom>
-          <a:noFill/>
-          <a:ln/>
-        </p:spPr>
-        <p:txBody>
-          <a:bodyPr wrap="square" lIns="0" tIns="0" rIns="0" bIns="0" rtlCol="0" anchor="t"/>
-          <a:lstStyle/>
-          <a:p>
-            <a:pPr rtl="1" algn="r" indent="0" marL="0">
-              <a:buNone/>
-            </a:pPr>
-            <a:r>
-              <a:rPr lang="en-US" sz="1150" dirty="0">
-                <a:solidFill>
-                  <a:srgbClr val="7F6C72"/>
-                </a:solidFill>
-                <a:latin typeface="IBM Plex Sans Arabic" pitchFamily="34" charset="0"/>
-                <a:ea typeface="IBM Plex Sans Arabic" pitchFamily="34" charset="-122"/>
-                <a:cs typeface="IBM Plex Sans Arabic" pitchFamily="34" charset="-120"/>
-              </a:rPr>
-              <a:t>القواعد ترشّح الموارد، والنموذج يرتب التوصيات ويشرحها بالعربية</a:t>
-            </a:r>
-            <a:endParaRPr lang="en-US" sz="1150" dirty="0"/>
-          </a:p>
-        </p:txBody>
-      </p:sp>
-      <p:sp>
-        <p:nvSpPr>
-          <p:cNvPr id="30" name="Shape 25"/>
-          <p:cNvSpPr/>
-          <p:nvPr/>
-        </p:nvSpPr>
-        <p:spPr>
-          <a:xfrm>
-            <a:off x="11588191" y="4297680"/>
-            <a:ext cx="146304" cy="146304"/>
-          </a:xfrm>
-          <a:prstGeom prst="rect">
-            <a:avLst/>
-          </a:prstGeom>
-          <a:solidFill>
-            <a:srgbClr val="7FB27A"/>
-          </a:solidFill>
-          <a:ln/>
-        </p:spPr>
-      </p:sp>
-      <p:sp>
-        <p:nvSpPr>
-          <p:cNvPr id="31" name="Text 26"/>
-          <p:cNvSpPr txBox="1"/>
-          <p:nvPr/>
-        </p:nvSpPr>
-        <p:spPr>
-          <a:xfrm>
-            <a:off x="6263640" y="4206240"/>
-            <a:ext cx="5150815" cy="320040"/>
-          </a:xfrm>
-          <a:prstGeom prst="rect">
-            <a:avLst/>
-          </a:prstGeom>
-          <a:noFill/>
-          <a:ln/>
-        </p:spPr>
-        <p:txBody>
-          <a:bodyPr wrap="square" lIns="0" tIns="0" rIns="0" bIns="0" rtlCol="0" anchor="t"/>
-          <a:lstStyle/>
-          <a:p>
-            <a:pPr rtl="1" algn="r" indent="0" marL="0">
-              <a:buNone/>
-            </a:pPr>
-            <a:r>
-              <a:rPr lang="en-US" sz="1500" b="1" dirty="0">
-                <a:solidFill>
-                  <a:srgbClr val="21141A"/>
-                </a:solidFill>
-                <a:latin typeface="IBM Plex Sans Arabic" pitchFamily="34" charset="0"/>
-                <a:ea typeface="IBM Plex Sans Arabic" pitchFamily="34" charset="-122"/>
-                <a:cs typeface="IBM Plex Sans Arabic" pitchFamily="34" charset="-120"/>
-              </a:rPr>
-              <a:t>زر موافقة واحد</a:t>
-            </a:r>
-            <a:endParaRPr lang="en-US" sz="1500" dirty="0"/>
-          </a:p>
-        </p:txBody>
-      </p:sp>
-      <p:sp>
-        <p:nvSpPr>
-          <p:cNvPr id="32" name="Text 27"/>
-          <p:cNvSpPr txBox="1"/>
-          <p:nvPr/>
-        </p:nvSpPr>
-        <p:spPr>
-          <a:xfrm>
-            <a:off x="6263640" y="4535424"/>
-            <a:ext cx="5150815" cy="320040"/>
-          </a:xfrm>
-          <a:prstGeom prst="rect">
-            <a:avLst/>
-          </a:prstGeom>
-          <a:noFill/>
-          <a:ln/>
-        </p:spPr>
-        <p:txBody>
-          <a:bodyPr wrap="square" lIns="0" tIns="0" rIns="0" bIns="0" rtlCol="0" anchor="t"/>
-          <a:lstStyle/>
-          <a:p>
-            <a:pPr rtl="1" algn="r" indent="0" marL="0">
-              <a:buNone/>
-            </a:pPr>
-            <a:r>
-              <a:rPr lang="en-US" sz="1150" dirty="0">
-                <a:solidFill>
-                  <a:srgbClr val="7F6C72"/>
-                </a:solidFill>
-                <a:latin typeface="IBM Plex Sans Arabic" pitchFamily="34" charset="0"/>
-                <a:ea typeface="IBM Plex Sans Arabic" pitchFamily="34" charset="-122"/>
-                <a:cs typeface="IBM Plex Sans Arabic" pitchFamily="34" charset="-120"/>
-              </a:rPr>
-              <a:t>يمنح صلاحية مؤقتة لـ 15 دقيقة لتنفيذ الإجراء ثم تُسحب</a:t>
-            </a:r>
-            <a:endParaRPr lang="en-US" sz="1150" dirty="0"/>
-          </a:p>
-        </p:txBody>
-      </p:sp>
-      <p:sp>
-        <p:nvSpPr>
-          <p:cNvPr id="33" name="Text 28"/>
-          <p:cNvSpPr txBox="1"/>
-          <p:nvPr/>
-        </p:nvSpPr>
-        <p:spPr>
-          <a:xfrm>
-            <a:off x="457200" y="2286000"/>
-            <a:ext cx="5394960" cy="365760"/>
-          </a:xfrm>
-          <a:prstGeom prst="rect">
-            <a:avLst/>
-          </a:prstGeom>
-          <a:noFill/>
-          <a:ln/>
-        </p:spPr>
-        <p:txBody>
-          <a:bodyPr wrap="square" lIns="0" tIns="0" rIns="0" bIns="0" rtlCol="0" anchor="t"/>
-          <a:lstStyle/>
-          <a:p>
-            <a:pPr rtl="1" algn="r" indent="0" marL="0">
-              <a:buNone/>
-            </a:pPr>
-            <a:r>
-              <a:rPr lang="en-US" sz="1700" b="1" dirty="0">
-                <a:solidFill>
-                  <a:srgbClr val="8E2F3C"/>
-                </a:solidFill>
-                <a:latin typeface="IBM Plex Sans Arabic" pitchFamily="34" charset="0"/>
-                <a:ea typeface="IBM Plex Sans Arabic" pitchFamily="34" charset="-122"/>
-                <a:cs typeface="IBM Plex Sans Arabic" pitchFamily="34" charset="-120"/>
-              </a:rPr>
-              <a:t>التقنيات المتوفرة</a:t>
-            </a:r>
-            <a:endParaRPr lang="en-US" sz="1700" dirty="0"/>
-          </a:p>
-        </p:txBody>
-      </p:sp>
-      <p:sp>
-        <p:nvSpPr>
-          <p:cNvPr id="34" name="Shape 29"/>
-          <p:cNvSpPr/>
-          <p:nvPr/>
-        </p:nvSpPr>
-        <p:spPr>
-          <a:xfrm>
-            <a:off x="4663440" y="2788920"/>
-            <a:ext cx="1188720" cy="384048"/>
+              <a:t>Next.js</a:t>
+            </a:r>
+            <a:endParaRPr lang="en-US" sz="1300" dirty="0"/>
+          </a:p>
+        </p:txBody>
+      </p:sp>
+      <p:sp>
+        <p:nvSpPr>
+          <p:cNvPr id="37" name="Shape 29"/>
+          <p:cNvSpPr/>
+          <p:nvPr/>
+        </p:nvSpPr>
+        <p:spPr>
+          <a:xfrm>
+            <a:off x="5844388" y="5257800"/>
+            <a:ext cx="1371600" cy="384048"/>
           </a:xfrm>
           <a:prstGeom prst="roundRect">
             <a:avLst>
@@ -11181,14 +8443,14 @@
       </p:sp>
       <p:sp>
         <p:nvSpPr>
-          <p:cNvPr id="35" name="Text 30"/>
+          <p:cNvPr id="38" name="Text 30"/>
           <p:cNvSpPr txBox="1"/>
           <p:nvPr/>
         </p:nvSpPr>
         <p:spPr>
           <a:xfrm>
-            <a:off x="4663440" y="2788920"/>
-            <a:ext cx="1188720" cy="384048"/>
+            <a:off x="5844388" y="5257800"/>
+            <a:ext cx="1371600" cy="384048"/>
           </a:xfrm>
           <a:prstGeom prst="rect">
             <a:avLst/>
@@ -11204,7 +8466,7 @@
               <a:buNone/>
             </a:pPr>
             <a:r>
-              <a:rPr lang="en-US" sz="1200" b="1" dirty="0">
+              <a:rPr lang="en-US" sz="1300" b="1" dirty="0">
                 <a:solidFill>
                   <a:srgbClr val="21141A"/>
                 </a:solidFill>
@@ -11214,20 +8476,20 @@
               </a:rPr>
               <a:t>Cloud APIs</a:t>
             </a:r>
-            <a:endParaRPr lang="en-US" sz="1200" dirty="0"/>
-          </a:p>
-        </p:txBody>
-      </p:sp>
-      <p:sp>
-        <p:nvSpPr>
-          <p:cNvPr id="36" name="Shape 31"/>
-          <p:cNvSpPr/>
-          <p:nvPr/>
-        </p:nvSpPr>
-        <p:spPr>
-          <a:xfrm>
-            <a:off x="2665476" y="2788920"/>
-            <a:ext cx="1888236" cy="384048"/>
+            <a:endParaRPr lang="en-US" sz="1300" dirty="0"/>
+          </a:p>
+        </p:txBody>
+      </p:sp>
+      <p:sp>
+        <p:nvSpPr>
+          <p:cNvPr id="39" name="Shape 31"/>
+          <p:cNvSpPr/>
+          <p:nvPr/>
+        </p:nvSpPr>
+        <p:spPr>
+          <a:xfrm>
+            <a:off x="5067148" y="5257800"/>
+            <a:ext cx="640080" cy="384048"/>
           </a:xfrm>
           <a:prstGeom prst="roundRect">
             <a:avLst>
@@ -11247,14 +8509,14 @@
       </p:sp>
       <p:sp>
         <p:nvSpPr>
-          <p:cNvPr id="37" name="Text 32"/>
+          <p:cNvPr id="40" name="Text 32"/>
           <p:cNvSpPr txBox="1"/>
           <p:nvPr/>
         </p:nvSpPr>
         <p:spPr>
           <a:xfrm>
-            <a:off x="2665476" y="2788920"/>
-            <a:ext cx="1888236" cy="384048"/>
+            <a:off x="5067148" y="5257800"/>
+            <a:ext cx="640080" cy="384048"/>
           </a:xfrm>
           <a:prstGeom prst="rect">
             <a:avLst/>
@@ -11270,7 +8532,7 @@
               <a:buNone/>
             </a:pPr>
             <a:r>
-              <a:rPr lang="en-US" sz="1200" b="1" dirty="0">
+              <a:rPr lang="en-US" sz="1300" b="1" dirty="0">
                 <a:solidFill>
                   <a:srgbClr val="21141A"/>
                 </a:solidFill>
@@ -11278,22 +8540,22 @@
                 <a:ea typeface="IBM Plex Sans Arabic" pitchFamily="34" charset="-122"/>
                 <a:cs typeface="IBM Plex Sans Arabic" pitchFamily="34" charset="-120"/>
               </a:rPr>
-              <a:t>AWS IAM (قراءة فقط)</a:t>
-            </a:r>
-            <a:endParaRPr lang="en-US" sz="1200" dirty="0"/>
-          </a:p>
-        </p:txBody>
-      </p:sp>
-      <p:sp>
-        <p:nvSpPr>
-          <p:cNvPr id="38" name="Shape 33"/>
-          <p:cNvSpPr/>
-          <p:nvPr/>
-        </p:nvSpPr>
-        <p:spPr>
-          <a:xfrm>
-            <a:off x="745236" y="2788920"/>
-            <a:ext cx="1810512" cy="384048"/>
+              <a:t>AI</a:t>
+            </a:r>
+            <a:endParaRPr lang="en-US" sz="1300" dirty="0"/>
+          </a:p>
+        </p:txBody>
+      </p:sp>
+      <p:sp>
+        <p:nvSpPr>
+          <p:cNvPr id="41" name="Shape 33"/>
+          <p:cNvSpPr/>
+          <p:nvPr/>
+        </p:nvSpPr>
+        <p:spPr>
+          <a:xfrm>
+            <a:off x="3741268" y="5257800"/>
+            <a:ext cx="1188720" cy="384048"/>
           </a:xfrm>
           <a:prstGeom prst="roundRect">
             <a:avLst>
@@ -11313,14 +8575,14 @@
       </p:sp>
       <p:sp>
         <p:nvSpPr>
-          <p:cNvPr id="39" name="Text 34"/>
+          <p:cNvPr id="42" name="Text 34"/>
           <p:cNvSpPr txBox="1"/>
           <p:nvPr/>
         </p:nvSpPr>
         <p:spPr>
           <a:xfrm>
-            <a:off x="745236" y="2788920"/>
-            <a:ext cx="1810512" cy="384048"/>
+            <a:off x="3741268" y="5257800"/>
+            <a:ext cx="1188720" cy="384048"/>
           </a:xfrm>
           <a:prstGeom prst="rect">
             <a:avLst/>
@@ -11336,7 +8598,7 @@
               <a:buNone/>
             </a:pPr>
             <a:r>
-              <a:rPr lang="en-US" sz="1200" b="1" dirty="0">
+              <a:rPr lang="en-US" sz="1300" b="1" dirty="0">
                 <a:solidFill>
                   <a:srgbClr val="21141A"/>
                 </a:solidFill>
@@ -11344,556 +8606,9 @@
                 <a:ea typeface="IBM Plex Sans Arabic" pitchFamily="34" charset="-122"/>
                 <a:cs typeface="IBM Plex Sans Arabic" pitchFamily="34" charset="-120"/>
               </a:rPr>
-              <a:t>نموذج ذكاء اصطناعي</a:t>
-            </a:r>
-            <a:endParaRPr lang="en-US" sz="1200" dirty="0"/>
-          </a:p>
-        </p:txBody>
-      </p:sp>
-      <p:sp>
-        <p:nvSpPr>
-          <p:cNvPr id="40" name="Shape 35"/>
-          <p:cNvSpPr/>
-          <p:nvPr/>
-        </p:nvSpPr>
-        <p:spPr>
-          <a:xfrm>
-            <a:off x="4896612" y="3337560"/>
-            <a:ext cx="955548" cy="384048"/>
-          </a:xfrm>
-          <a:prstGeom prst="roundRect">
-            <a:avLst>
-              <a:gd name="adj" fmla="val 50000"/>
-            </a:avLst>
-          </a:prstGeom>
-          <a:solidFill>
-            <a:srgbClr val="FFFBF8"/>
-          </a:solidFill>
-          <a:ln w="9525">
-            <a:solidFill>
-              <a:srgbClr val="E3D5CC"/>
-            </a:solidFill>
-            <a:prstDash val="solid"/>
-          </a:ln>
-        </p:spPr>
-      </p:sp>
-      <p:sp>
-        <p:nvSpPr>
-          <p:cNvPr id="41" name="Text 36"/>
-          <p:cNvSpPr txBox="1"/>
-          <p:nvPr/>
-        </p:nvSpPr>
-        <p:spPr>
-          <a:xfrm>
-            <a:off x="4896612" y="3337560"/>
-            <a:ext cx="955548" cy="384048"/>
-          </a:xfrm>
-          <a:prstGeom prst="rect">
-            <a:avLst/>
-          </a:prstGeom>
-          <a:noFill/>
-          <a:ln/>
-        </p:spPr>
-        <p:txBody>
-          <a:bodyPr wrap="square" lIns="0" tIns="0" rIns="0" bIns="0" rtlCol="0" anchor="ctr"/>
-          <a:lstStyle/>
-          <a:p>
-            <a:pPr rtl="1" algn="ctr" indent="0" marL="0">
-              <a:buNone/>
-            </a:pPr>
-            <a:r>
-              <a:rPr lang="en-US" sz="1200" b="1" dirty="0">
-                <a:solidFill>
-                  <a:srgbClr val="21141A"/>
-                </a:solidFill>
-                <a:latin typeface="IBM Plex Sans Arabic" pitchFamily="34" charset="0"/>
-                <a:ea typeface="IBM Plex Sans Arabic" pitchFamily="34" charset="-122"/>
-                <a:cs typeface="IBM Plex Sans Arabic" pitchFamily="34" charset="-120"/>
-              </a:rPr>
-              <a:t>Next.js</a:t>
-            </a:r>
-            <a:endParaRPr lang="en-US" sz="1200" dirty="0"/>
-          </a:p>
-        </p:txBody>
-      </p:sp>
-      <p:sp>
-        <p:nvSpPr>
-          <p:cNvPr id="42" name="Shape 37"/>
-          <p:cNvSpPr/>
-          <p:nvPr/>
-        </p:nvSpPr>
-        <p:spPr>
-          <a:xfrm>
-            <a:off x="3909060" y="3337560"/>
-            <a:ext cx="877824" cy="384048"/>
-          </a:xfrm>
-          <a:prstGeom prst="roundRect">
-            <a:avLst>
-              <a:gd name="adj" fmla="val 50000"/>
-            </a:avLst>
-          </a:prstGeom>
-          <a:solidFill>
-            <a:srgbClr val="FFFBF8"/>
-          </a:solidFill>
-          <a:ln w="9525">
-            <a:solidFill>
-              <a:srgbClr val="E3D5CC"/>
-            </a:solidFill>
-            <a:prstDash val="solid"/>
-          </a:ln>
-        </p:spPr>
-      </p:sp>
-      <p:sp>
-        <p:nvSpPr>
-          <p:cNvPr id="43" name="Text 38"/>
-          <p:cNvSpPr txBox="1"/>
-          <p:nvPr/>
-        </p:nvSpPr>
-        <p:spPr>
-          <a:xfrm>
-            <a:off x="3909060" y="3337560"/>
-            <a:ext cx="877824" cy="384048"/>
-          </a:xfrm>
-          <a:prstGeom prst="rect">
-            <a:avLst/>
-          </a:prstGeom>
-          <a:noFill/>
-          <a:ln/>
-        </p:spPr>
-        <p:txBody>
-          <a:bodyPr wrap="square" lIns="0" tIns="0" rIns="0" bIns="0" rtlCol="0" anchor="ctr"/>
-          <a:lstStyle/>
-          <a:p>
-            <a:pPr rtl="1" algn="ctr" indent="0" marL="0">
-              <a:buNone/>
-            </a:pPr>
-            <a:r>
-              <a:rPr lang="en-US" sz="1200" b="1" dirty="0">
-                <a:solidFill>
-                  <a:srgbClr val="21141A"/>
-                </a:solidFill>
-                <a:latin typeface="IBM Plex Sans Arabic" pitchFamily="34" charset="0"/>
-                <a:ea typeface="IBM Plex Sans Arabic" pitchFamily="34" charset="-122"/>
-                <a:cs typeface="IBM Plex Sans Arabic" pitchFamily="34" charset="-120"/>
-              </a:rPr>
-              <a:t>Vercel</a:t>
-            </a:r>
-            <a:endParaRPr lang="en-US" sz="1200" dirty="0"/>
-          </a:p>
-        </p:txBody>
-      </p:sp>
-      <p:sp>
-        <p:nvSpPr>
-          <p:cNvPr id="44" name="Shape 39"/>
-          <p:cNvSpPr/>
-          <p:nvPr/>
-        </p:nvSpPr>
-        <p:spPr>
-          <a:xfrm>
-            <a:off x="1911096" y="3337560"/>
-            <a:ext cx="1888236" cy="384048"/>
-          </a:xfrm>
-          <a:prstGeom prst="roundRect">
-            <a:avLst>
-              <a:gd name="adj" fmla="val 50000"/>
-            </a:avLst>
-          </a:prstGeom>
-          <a:solidFill>
-            <a:srgbClr val="FFFBF8"/>
-          </a:solidFill>
-          <a:ln w="9525">
-            <a:solidFill>
-              <a:srgbClr val="E3D5CC"/>
-            </a:solidFill>
-            <a:prstDash val="solid"/>
-          </a:ln>
-        </p:spPr>
-      </p:sp>
-      <p:sp>
-        <p:nvSpPr>
-          <p:cNvPr id="45" name="Text 40"/>
-          <p:cNvSpPr txBox="1"/>
-          <p:nvPr/>
-        </p:nvSpPr>
-        <p:spPr>
-          <a:xfrm>
-            <a:off x="1911096" y="3337560"/>
-            <a:ext cx="1888236" cy="384048"/>
-          </a:xfrm>
-          <a:prstGeom prst="rect">
-            <a:avLst/>
-          </a:prstGeom>
-          <a:noFill/>
-          <a:ln/>
-        </p:spPr>
-        <p:txBody>
-          <a:bodyPr wrap="square" lIns="0" tIns="0" rIns="0" bIns="0" rtlCol="0" anchor="ctr"/>
-          <a:lstStyle/>
-          <a:p>
-            <a:pPr rtl="1" algn="ctr" indent="0" marL="0">
-              <a:buNone/>
-            </a:pPr>
-            <a:r>
-              <a:rPr lang="en-US" sz="1200" b="1" dirty="0">
-                <a:solidFill>
-                  <a:srgbClr val="21141A"/>
-                </a:solidFill>
-                <a:latin typeface="IBM Plex Sans Arabic" pitchFamily="34" charset="0"/>
-                <a:ea typeface="IBM Plex Sans Arabic" pitchFamily="34" charset="-122"/>
-                <a:cs typeface="IBM Plex Sans Arabic" pitchFamily="34" charset="-120"/>
-              </a:rPr>
-              <a:t>WhatsApp / Telegram</a:t>
-            </a:r>
-            <a:endParaRPr lang="en-US" sz="1200" dirty="0"/>
-          </a:p>
-        </p:txBody>
-      </p:sp>
-      <p:sp>
-        <p:nvSpPr>
-          <p:cNvPr id="46" name="Text 41"/>
-          <p:cNvSpPr txBox="1"/>
-          <p:nvPr/>
-        </p:nvSpPr>
-        <p:spPr>
-          <a:xfrm>
-            <a:off x="457200" y="3931920"/>
-            <a:ext cx="5394960" cy="548640"/>
-          </a:xfrm>
-          <a:prstGeom prst="rect">
-            <a:avLst/>
-          </a:prstGeom>
-          <a:noFill/>
-          <a:ln/>
-        </p:spPr>
-        <p:txBody>
-          <a:bodyPr wrap="square" lIns="0" tIns="0" rIns="0" bIns="0" rtlCol="0" anchor="t"/>
-          <a:lstStyle/>
-          <a:p>
-            <a:pPr rtl="1" algn="r" indent="0" marL="0">
-              <a:buNone/>
-            </a:pPr>
-            <a:r>
-              <a:rPr lang="en-US" sz="1300" dirty="0">
-                <a:solidFill>
-                  <a:srgbClr val="7F6C72"/>
-                </a:solidFill>
-                <a:latin typeface="IBM Plex Sans Arabic" pitchFamily="34" charset="0"/>
-                <a:ea typeface="IBM Plex Sans Arabic" pitchFamily="34" charset="-122"/>
-                <a:cs typeface="IBM Plex Sans Arabic" pitchFamily="34" charset="-120"/>
-              </a:rPr>
-              <a:t>النموذج الأولي يعمل الآن على Vercel، والقراءة عبر APIs رسمية منخفضة التكلفة.</a:t>
+              <a:t>Telegram</a:t>
             </a:r>
             <a:endParaRPr lang="en-US" sz="1300" dirty="0"/>
-          </a:p>
-        </p:txBody>
-      </p:sp>
-      <p:sp>
-        <p:nvSpPr>
-          <p:cNvPr id="47" name="Shape 42"/>
-          <p:cNvSpPr/>
-          <p:nvPr/>
-        </p:nvSpPr>
-        <p:spPr>
-          <a:xfrm>
-            <a:off x="8097317" y="4983480"/>
-            <a:ext cx="3637178" cy="1143000"/>
-          </a:xfrm>
-          <a:prstGeom prst="roundRect">
-            <a:avLst>
-              <a:gd name="adj" fmla="val 11200"/>
-            </a:avLst>
-          </a:prstGeom>
-          <a:solidFill>
-            <a:srgbClr val="8E2F3C"/>
-          </a:solidFill>
-          <a:ln/>
-        </p:spPr>
-      </p:sp>
-      <p:sp>
-        <p:nvSpPr>
-          <p:cNvPr id="48" name="Text 43"/>
-          <p:cNvSpPr txBox="1"/>
-          <p:nvPr/>
-        </p:nvSpPr>
-        <p:spPr>
-          <a:xfrm>
-            <a:off x="8325917" y="5120640"/>
-            <a:ext cx="3179978" cy="329184"/>
-          </a:xfrm>
-          <a:prstGeom prst="rect">
-            <a:avLst/>
-          </a:prstGeom>
-          <a:noFill/>
-          <a:ln/>
-        </p:spPr>
-        <p:txBody>
-          <a:bodyPr wrap="square" lIns="0" tIns="0" rIns="0" bIns="0" rtlCol="0" anchor="t"/>
-          <a:lstStyle/>
-          <a:p>
-            <a:pPr rtl="1" algn="r" indent="0" marL="0">
-              <a:buNone/>
-            </a:pPr>
-            <a:r>
-              <a:rPr lang="en-US" sz="1500" b="1" dirty="0">
-                <a:solidFill>
-                  <a:srgbClr val="FBF6EE"/>
-                </a:solidFill>
-                <a:latin typeface="IBM Plex Sans Arabic" pitchFamily="34" charset="0"/>
-                <a:ea typeface="IBM Plex Sans Arabic" pitchFamily="34" charset="-122"/>
-                <a:cs typeface="IBM Plex Sans Arabic" pitchFamily="34" charset="-120"/>
-              </a:rPr>
-              <a:t>المرحلة 1 · الآن</a:t>
-            </a:r>
-            <a:endParaRPr lang="en-US" sz="1500" dirty="0"/>
-          </a:p>
-        </p:txBody>
-      </p:sp>
-      <p:sp>
-        <p:nvSpPr>
-          <p:cNvPr id="49" name="Text 44"/>
-          <p:cNvSpPr txBox="1"/>
-          <p:nvPr/>
-        </p:nvSpPr>
-        <p:spPr>
-          <a:xfrm>
-            <a:off x="8325917" y="5458968"/>
-            <a:ext cx="3179978" cy="594360"/>
-          </a:xfrm>
-          <a:prstGeom prst="rect">
-            <a:avLst/>
-          </a:prstGeom>
-          <a:noFill/>
-          <a:ln/>
-        </p:spPr>
-        <p:txBody>
-          <a:bodyPr wrap="square" lIns="0" tIns="0" rIns="0" bIns="0" rtlCol="0" anchor="t"/>
-          <a:lstStyle/>
-          <a:p>
-            <a:pPr rtl="1" algn="r" indent="0" marL="0">
-              <a:buNone/>
-            </a:pPr>
-            <a:r>
-              <a:rPr lang="en-US" sz="1250" dirty="0">
-                <a:solidFill>
-                  <a:srgbClr val="FBF6EE"/>
-                </a:solidFill>
-                <a:latin typeface="IBM Plex Sans Arabic" pitchFamily="34" charset="0"/>
-                <a:ea typeface="IBM Plex Sans Arabic" pitchFamily="34" charset="-122"/>
-                <a:cs typeface="IBM Plex Sans Arabic" pitchFamily="34" charset="-120"/>
-              </a:rPr>
-              <a:t>AWS + تيليجرام + 7 قواعد هدر + الموافقة بنقرة</a:t>
-            </a:r>
-            <a:endParaRPr lang="en-US" sz="1250" dirty="0"/>
-          </a:p>
-        </p:txBody>
-      </p:sp>
-      <p:sp>
-        <p:nvSpPr>
-          <p:cNvPr id="50" name="Shape 45"/>
-          <p:cNvSpPr/>
-          <p:nvPr/>
-        </p:nvSpPr>
-        <p:spPr>
-          <a:xfrm>
-            <a:off x="4277258" y="4983480"/>
-            <a:ext cx="3637178" cy="1143000"/>
-          </a:xfrm>
-          <a:prstGeom prst="roundRect">
-            <a:avLst>
-              <a:gd name="adj" fmla="val 11200"/>
-            </a:avLst>
-          </a:prstGeom>
-          <a:solidFill>
-            <a:srgbClr val="FFFBF8"/>
-          </a:solidFill>
-          <a:ln w="9525">
-            <a:solidFill>
-              <a:srgbClr val="E3D5CC"/>
-            </a:solidFill>
-            <a:prstDash val="solid"/>
-          </a:ln>
-        </p:spPr>
-      </p:sp>
-      <p:sp>
-        <p:nvSpPr>
-          <p:cNvPr id="51" name="Text 46"/>
-          <p:cNvSpPr txBox="1"/>
-          <p:nvPr/>
-        </p:nvSpPr>
-        <p:spPr>
-          <a:xfrm>
-            <a:off x="4505858" y="5120640"/>
-            <a:ext cx="3179978" cy="329184"/>
-          </a:xfrm>
-          <a:prstGeom prst="rect">
-            <a:avLst/>
-          </a:prstGeom>
-          <a:noFill/>
-          <a:ln/>
-        </p:spPr>
-        <p:txBody>
-          <a:bodyPr wrap="square" lIns="0" tIns="0" rIns="0" bIns="0" rtlCol="0" anchor="t"/>
-          <a:lstStyle/>
-          <a:p>
-            <a:pPr rtl="1" algn="r" indent="0" marL="0">
-              <a:buNone/>
-            </a:pPr>
-            <a:r>
-              <a:rPr lang="en-US" sz="1500" b="1" dirty="0">
-                <a:solidFill>
-                  <a:srgbClr val="8E2F3C"/>
-                </a:solidFill>
-                <a:latin typeface="IBM Plex Sans Arabic" pitchFamily="34" charset="0"/>
-                <a:ea typeface="IBM Plex Sans Arabic" pitchFamily="34" charset="-122"/>
-                <a:cs typeface="IBM Plex Sans Arabic" pitchFamily="34" charset="-120"/>
-              </a:rPr>
-              <a:t>المرحلة 2</a:t>
-            </a:r>
-            <a:endParaRPr lang="en-US" sz="1500" dirty="0"/>
-          </a:p>
-        </p:txBody>
-      </p:sp>
-      <p:sp>
-        <p:nvSpPr>
-          <p:cNvPr id="52" name="Text 47"/>
-          <p:cNvSpPr txBox="1"/>
-          <p:nvPr/>
-        </p:nvSpPr>
-        <p:spPr>
-          <a:xfrm>
-            <a:off x="4505858" y="5458968"/>
-            <a:ext cx="3179978" cy="594360"/>
-          </a:xfrm>
-          <a:prstGeom prst="rect">
-            <a:avLst/>
-          </a:prstGeom>
-          <a:noFill/>
-          <a:ln/>
-        </p:spPr>
-        <p:txBody>
-          <a:bodyPr wrap="square" lIns="0" tIns="0" rIns="0" bIns="0" rtlCol="0" anchor="t"/>
-          <a:lstStyle/>
-          <a:p>
-            <a:pPr rtl="1" algn="r" indent="0" marL="0">
-              <a:buNone/>
-            </a:pPr>
-            <a:r>
-              <a:rPr lang="en-US" sz="1250" dirty="0">
-                <a:solidFill>
-                  <a:srgbClr val="21141A"/>
-                </a:solidFill>
-                <a:latin typeface="IBM Plex Sans Arabic" pitchFamily="34" charset="0"/>
-                <a:ea typeface="IBM Plex Sans Arabic" pitchFamily="34" charset="-122"/>
-                <a:cs typeface="IBM Plex Sans Arabic" pitchFamily="34" charset="-120"/>
-              </a:rPr>
-              <a:t>Azure وGCP + STC Cloud وSCCC وCNTXT عبر API أو رفع ملف الفاتورة</a:t>
-            </a:r>
-            <a:endParaRPr lang="en-US" sz="1250" dirty="0"/>
-          </a:p>
-        </p:txBody>
-      </p:sp>
-      <p:sp>
-        <p:nvSpPr>
-          <p:cNvPr id="53" name="Shape 48"/>
-          <p:cNvSpPr/>
-          <p:nvPr/>
-        </p:nvSpPr>
-        <p:spPr>
-          <a:xfrm>
-            <a:off x="457200" y="4983480"/>
-            <a:ext cx="3637178" cy="1143000"/>
-          </a:xfrm>
-          <a:prstGeom prst="roundRect">
-            <a:avLst>
-              <a:gd name="adj" fmla="val 11200"/>
-            </a:avLst>
-          </a:prstGeom>
-          <a:solidFill>
-            <a:srgbClr val="FFFBF8"/>
-          </a:solidFill>
-          <a:ln w="9525">
-            <a:solidFill>
-              <a:srgbClr val="E3D5CC"/>
-            </a:solidFill>
-            <a:prstDash val="solid"/>
-          </a:ln>
-        </p:spPr>
-      </p:sp>
-      <p:sp>
-        <p:nvSpPr>
-          <p:cNvPr id="54" name="Text 49"/>
-          <p:cNvSpPr txBox="1"/>
-          <p:nvPr/>
-        </p:nvSpPr>
-        <p:spPr>
-          <a:xfrm>
-            <a:off x="685800" y="5120640"/>
-            <a:ext cx="3179978" cy="329184"/>
-          </a:xfrm>
-          <a:prstGeom prst="rect">
-            <a:avLst/>
-          </a:prstGeom>
-          <a:noFill/>
-          <a:ln/>
-        </p:spPr>
-        <p:txBody>
-          <a:bodyPr wrap="square" lIns="0" tIns="0" rIns="0" bIns="0" rtlCol="0" anchor="t"/>
-          <a:lstStyle/>
-          <a:p>
-            <a:pPr rtl="1" algn="r" indent="0" marL="0">
-              <a:buNone/>
-            </a:pPr>
-            <a:r>
-              <a:rPr lang="en-US" sz="1500" b="1" dirty="0">
-                <a:solidFill>
-                  <a:srgbClr val="8E2F3C"/>
-                </a:solidFill>
-                <a:latin typeface="IBM Plex Sans Arabic" pitchFamily="34" charset="0"/>
-                <a:ea typeface="IBM Plex Sans Arabic" pitchFamily="34" charset="-122"/>
-                <a:cs typeface="IBM Plex Sans Arabic" pitchFamily="34" charset="-120"/>
-              </a:rPr>
-              <a:t>المرحلة 3</a:t>
-            </a:r>
-            <a:endParaRPr lang="en-US" sz="1500" dirty="0"/>
-          </a:p>
-        </p:txBody>
-      </p:sp>
-      <p:sp>
-        <p:nvSpPr>
-          <p:cNvPr id="55" name="Text 50"/>
-          <p:cNvSpPr txBox="1"/>
-          <p:nvPr/>
-        </p:nvSpPr>
-        <p:spPr>
-          <a:xfrm>
-            <a:off x="685800" y="5458968"/>
-            <a:ext cx="3179978" cy="594360"/>
-          </a:xfrm>
-          <a:prstGeom prst="rect">
-            <a:avLst/>
-          </a:prstGeom>
-          <a:noFill/>
-          <a:ln/>
-        </p:spPr>
-        <p:txBody>
-          <a:bodyPr wrap="square" lIns="0" tIns="0" rIns="0" bIns="0" rtlCol="0" anchor="t"/>
-          <a:lstStyle/>
-          <a:p>
-            <a:pPr rtl="1" algn="r" indent="0" marL="0">
-              <a:buNone/>
-            </a:pPr>
-            <a:r>
-              <a:rPr lang="en-US" sz="1250" dirty="0">
-                <a:solidFill>
-                  <a:srgbClr val="21141A"/>
-                </a:solidFill>
-                <a:latin typeface="IBM Plex Sans Arabic" pitchFamily="34" charset="0"/>
-                <a:ea typeface="IBM Plex Sans Arabic" pitchFamily="34" charset="-122"/>
-                <a:cs typeface="IBM Plex Sans Arabic" pitchFamily="34" charset="-120"/>
-              </a:rPr>
-              <a:t>واتساب للأعمال + استضافة داخل المملكة + مسار ISO 27001</a:t>
-            </a:r>
-            <a:endParaRPr lang="en-US" sz="1250" dirty="0"/>
           </a:p>
         </p:txBody>
       </p:sp>
@@ -12427,8 +9142,8 @@
         </p:nvSpPr>
         <p:spPr>
           <a:xfrm>
-            <a:off x="457200" y="1463040"/>
-            <a:ext cx="11277295" cy="658368"/>
+            <a:off x="457200" y="1600200"/>
+            <a:ext cx="11277295" cy="731520"/>
           </a:xfrm>
           <a:prstGeom prst="rect">
             <a:avLst/>
@@ -12444,7 +9159,7 @@
               <a:buNone/>
             </a:pPr>
             <a:r>
-              <a:rPr lang="en-US" sz="3000" b="1" dirty="0">
+              <a:rPr lang="en-US" sz="3400" b="1" dirty="0">
                 <a:solidFill>
                   <a:srgbClr val="21141A"/>
                 </a:solidFill>
@@ -12452,9 +9167,9 @@
                 <a:ea typeface="IBM Plex Sans Arabic" pitchFamily="34" charset="-122"/>
                 <a:cs typeface="IBM Plex Sans Arabic" pitchFamily="34" charset="-120"/>
               </a:rPr>
-              <a:t>ما بنيناه فعلاً خلال التحدي</a:t>
-            </a:r>
-            <a:endParaRPr lang="en-US" sz="3000" dirty="0"/>
+              <a:t>يعمل الآن، جرّبه بنفسك</a:t>
+            </a:r>
+            <a:endParaRPr lang="en-US" sz="3400" dirty="0"/>
           </a:p>
         </p:txBody>
       </p:sp>
@@ -12466,12 +9181,12 @@
         </p:nvSpPr>
         <p:spPr>
           <a:xfrm>
-            <a:off x="457200" y="2286000"/>
-            <a:ext cx="5760720" cy="3135769"/>
+            <a:off x="5699455" y="2606040"/>
+            <a:ext cx="6035040" cy="3278124"/>
           </a:xfrm>
           <a:prstGeom prst="roundRect">
             <a:avLst>
-              <a:gd name="adj" fmla="val 3499"/>
+              <a:gd name="adj" fmla="val 3347"/>
             </a:avLst>
           </a:prstGeom>
           <a:solidFill>
@@ -12501,8 +9216,8 @@
         </p:blipFill>
         <p:spPr>
           <a:xfrm>
-            <a:off x="530352" y="2359152"/>
-            <a:ext cx="5614416" cy="2989465"/>
+            <a:off x="5772607" y="2679192"/>
+            <a:ext cx="5888736" cy="3131820"/>
           </a:xfrm>
           <a:prstGeom prst="rect">
             <a:avLst/>
@@ -12511,57 +9226,18 @@
       </p:pic>
       <p:sp>
         <p:nvSpPr>
-          <p:cNvPr id="25" name="Text 19"/>
-          <p:cNvSpPr txBox="1"/>
-          <p:nvPr/>
-        </p:nvSpPr>
-        <p:spPr>
-          <a:xfrm>
-            <a:off x="457200" y="5494921"/>
-            <a:ext cx="5760720" cy="292608"/>
-          </a:xfrm>
-          <a:prstGeom prst="rect">
-            <a:avLst/>
-          </a:prstGeom>
-          <a:noFill/>
-          <a:ln/>
-        </p:spPr>
-        <p:txBody>
-          <a:bodyPr wrap="square" lIns="0" tIns="0" rIns="0" bIns="0" rtlCol="0" anchor="t"/>
-          <a:lstStyle/>
-          <a:p>
-            <a:pPr rtl="1" algn="ctr" indent="0" marL="0">
-              <a:buNone/>
-            </a:pPr>
-            <a:r>
-              <a:rPr lang="en-US" sz="1200" dirty="0">
-                <a:solidFill>
-                  <a:srgbClr val="7F6C72"/>
-                </a:solidFill>
-                <a:latin typeface="IBM Plex Sans Arabic" pitchFamily="34" charset="0"/>
-                <a:ea typeface="IBM Plex Sans Arabic" pitchFamily="34" charset="-122"/>
-                <a:cs typeface="IBM Plex Sans Arabic" pitchFamily="34" charset="-120"/>
-              </a:rPr>
-              <a:t>لوحة التحكم: الفاتورة والهدر والتوقع</a:t>
-            </a:r>
-            <a:endParaRPr lang="en-US" sz="1200" dirty="0"/>
-          </a:p>
-        </p:txBody>
-      </p:sp>
-      <p:sp>
-        <p:nvSpPr>
-          <p:cNvPr id="26" name="Shape 20"/>
-          <p:cNvSpPr/>
-          <p:nvPr/>
-        </p:nvSpPr>
-        <p:spPr>
-          <a:xfrm>
-            <a:off x="8945575" y="2286000"/>
-            <a:ext cx="2788920" cy="3058467"/>
+          <p:cNvPr id="25" name="Shape 19"/>
+          <p:cNvSpPr/>
+          <p:nvPr/>
+        </p:nvSpPr>
+        <p:spPr>
+          <a:xfrm>
+            <a:off x="2773375" y="2606040"/>
+            <a:ext cx="2651760" cy="2907317"/>
           </a:xfrm>
           <a:prstGeom prst="roundRect">
             <a:avLst>
-              <a:gd name="adj" fmla="val 3934"/>
+              <a:gd name="adj" fmla="val 4138"/>
             </a:avLst>
           </a:prstGeom>
           <a:solidFill>
@@ -12577,7 +9253,7 @@
       </p:sp>
       <p:pic>
         <p:nvPicPr>
-          <p:cNvPr id="27" name="Image 4" descr="/tmp/claude-0/-home-claude/750ff410-f4aa-5276-9360-1e19d018b112/scratchpad/c/assets/s-approve.png">    </p:cNvPr>
+          <p:cNvPr id="26" name="Image 4" descr="/tmp/claude-0/-home-claude/750ff410-f4aa-5276-9360-1e19d018b112/scratchpad/c/assets/s-approve.png">    </p:cNvPr>
           <p:cNvPicPr>
             <a:picLocks noChangeAspect="1"/>
           </p:cNvPicPr>
@@ -12591,8 +9267,8 @@
         </p:blipFill>
         <p:spPr>
           <a:xfrm>
-            <a:off x="9018727" y="2359152"/>
-            <a:ext cx="2642616" cy="2912163"/>
+            <a:off x="2846527" y="2679192"/>
+            <a:ext cx="2505456" cy="2761013"/>
           </a:xfrm>
           <a:prstGeom prst="rect">
             <a:avLst/>
@@ -12601,112 +9277,51 @@
       </p:pic>
       <p:sp>
         <p:nvSpPr>
-          <p:cNvPr id="28" name="Text 21"/>
-          <p:cNvSpPr txBox="1"/>
-          <p:nvPr/>
-        </p:nvSpPr>
-        <p:spPr>
-          <a:xfrm>
-            <a:off x="8945575" y="5417619"/>
-            <a:ext cx="2788920" cy="292608"/>
-          </a:xfrm>
-          <a:prstGeom prst="rect">
-            <a:avLst/>
-          </a:prstGeom>
-          <a:noFill/>
-          <a:ln/>
-        </p:spPr>
-        <p:txBody>
-          <a:bodyPr wrap="square" lIns="0" tIns="0" rIns="0" bIns="0" rtlCol="0" anchor="t"/>
-          <a:lstStyle/>
-          <a:p>
-            <a:pPr rtl="1" algn="ctr" indent="0" marL="0">
-              <a:buNone/>
-            </a:pPr>
-            <a:r>
-              <a:rPr lang="en-US" sz="1200" dirty="0">
-                <a:solidFill>
-                  <a:srgbClr val="7F6C72"/>
-                </a:solidFill>
-                <a:latin typeface="IBM Plex Sans Arabic" pitchFamily="34" charset="0"/>
-                <a:ea typeface="IBM Plex Sans Arabic" pitchFamily="34" charset="-122"/>
-                <a:cs typeface="IBM Plex Sans Arabic" pitchFamily="34" charset="-120"/>
-              </a:rPr>
-              <a:t>نافذة الموافقة والصلاحية المؤقتة</a:t>
-            </a:r>
-            <a:endParaRPr lang="en-US" sz="1200" dirty="0"/>
-          </a:p>
-        </p:txBody>
-      </p:sp>
-      <p:sp>
-        <p:nvSpPr>
-          <p:cNvPr id="29" name="Shape 22"/>
-          <p:cNvSpPr/>
-          <p:nvPr/>
-        </p:nvSpPr>
-        <p:spPr>
-          <a:xfrm>
-            <a:off x="6446520" y="2286000"/>
-            <a:ext cx="2270455" cy="3108960"/>
+          <p:cNvPr id="27" name="Shape 20"/>
+          <p:cNvSpPr/>
+          <p:nvPr/>
+        </p:nvSpPr>
+        <p:spPr>
+          <a:xfrm>
+            <a:off x="457200" y="2606040"/>
+            <a:ext cx="2041855" cy="3154680"/>
           </a:xfrm>
           <a:prstGeom prst="roundRect">
             <a:avLst>
-              <a:gd name="adj" fmla="val 6444"/>
+              <a:gd name="adj" fmla="val 8061"/>
             </a:avLst>
           </a:prstGeom>
           <a:solidFill>
+            <a:srgbClr val="8E2F3C"/>
+          </a:solidFill>
+          <a:ln/>
+        </p:spPr>
+      </p:sp>
+      <p:sp>
+        <p:nvSpPr>
+          <p:cNvPr id="28" name="Shape 21"/>
+          <p:cNvSpPr/>
+          <p:nvPr/>
+        </p:nvSpPr>
+        <p:spPr>
+          <a:xfrm>
+            <a:off x="640080" y="2788920"/>
+            <a:ext cx="1676095" cy="1676095"/>
+          </a:xfrm>
+          <a:prstGeom prst="roundRect">
+            <a:avLst>
+              <a:gd name="adj" fmla="val 6547"/>
+            </a:avLst>
+          </a:prstGeom>
+          <a:solidFill>
             <a:srgbClr val="FFFBF8"/>
           </a:solidFill>
-          <a:ln w="9525">
-            <a:solidFill>
-              <a:srgbClr val="E3D5CC"/>
-            </a:solidFill>
-            <a:prstDash val="solid"/>
-          </a:ln>
-        </p:spPr>
-      </p:sp>
-      <p:sp>
-        <p:nvSpPr>
-          <p:cNvPr id="30" name="Text 23"/>
-          <p:cNvSpPr txBox="1"/>
-          <p:nvPr/>
-        </p:nvSpPr>
-        <p:spPr>
-          <a:xfrm>
-            <a:off x="6446520" y="2468880"/>
-            <a:ext cx="2270455" cy="347472"/>
-          </a:xfrm>
-          <a:prstGeom prst="rect">
-            <a:avLst/>
-          </a:prstGeom>
-          <a:noFill/>
-          <a:ln/>
-        </p:spPr>
-        <p:txBody>
-          <a:bodyPr wrap="square" lIns="0" tIns="0" rIns="0" bIns="0" rtlCol="0" anchor="t"/>
-          <a:lstStyle/>
-          <a:p>
-            <a:pPr rtl="1" algn="ctr" indent="0" marL="0">
-              <a:buNone/>
-            </a:pPr>
-            <a:r>
-              <a:rPr lang="en-US" sz="1500" b="1" dirty="0">
-                <a:solidFill>
-                  <a:srgbClr val="21141A"/>
-                </a:solidFill>
-                <a:latin typeface="IBM Plex Sans Arabic" pitchFamily="34" charset="0"/>
-                <a:ea typeface="IBM Plex Sans Arabic" pitchFamily="34" charset="-122"/>
-                <a:cs typeface="IBM Plex Sans Arabic" pitchFamily="34" charset="-120"/>
-              </a:rPr>
-              <a:t>جرّب العرض الحي</a:t>
-            </a:r>
-            <a:endParaRPr lang="en-US" sz="1500" dirty="0"/>
-          </a:p>
-        </p:txBody>
+          <a:ln/>
+        </p:spPr>
       </p:sp>
       <p:pic>
         <p:nvPicPr>
-          <p:cNvPr id="31" name="Image 5" descr="/tmp/claude-0/-home-claude/750ff410-f4aa-5276-9360-1e19d018b112/scratchpad/c/assets/qr.png">    </p:cNvPr>
+          <p:cNvPr id="29" name="Image 5" descr="/tmp/claude-0/-home-claude/750ff410-f4aa-5276-9360-1e19d018b112/scratchpad/c/assets/qr.png">    </p:cNvPr>
           <p:cNvPicPr>
             <a:picLocks noChangeAspect="1"/>
           </p:cNvPicPr>
@@ -12720,8 +9335,8 @@
         </p:blipFill>
         <p:spPr>
           <a:xfrm>
-            <a:off x="6675120" y="2880360"/>
-            <a:ext cx="1813255" cy="1813255"/>
+            <a:off x="731520" y="2880360"/>
+            <a:ext cx="1493215" cy="1493215"/>
           </a:xfrm>
           <a:prstGeom prst="rect">
             <a:avLst/>
@@ -12730,16 +9345,14 @@
       </p:pic>
       <p:sp>
         <p:nvSpPr>
-          <p:cNvPr id="32" name="Text 24">
-            <a:hlinkClick r:id="rId7" tooltip=""/>
-          </p:cNvPr>
+          <p:cNvPr id="30" name="Text 22"/>
           <p:cNvSpPr txBox="1"/>
           <p:nvPr/>
         </p:nvSpPr>
         <p:spPr>
           <a:xfrm>
-            <a:off x="6446520" y="4739335"/>
-            <a:ext cx="2270455" cy="292608"/>
+            <a:off x="457200" y="4556455"/>
+            <a:ext cx="2041855" cy="365760"/>
           </a:xfrm>
           <a:prstGeom prst="rect">
             <a:avLst/>
@@ -12749,69 +9362,23 @@
         </p:spPr>
         <p:txBody>
           <a:bodyPr wrap="square" lIns="0" tIns="0" rIns="0" bIns="0" rtlCol="0" anchor="t"/>
-          <a:lstStyle/>
-          <a:p>
-            <a:pPr algn="ctr" indent="0" marL="0">
-              <a:buNone/>
-            </a:pPr>
-            <a:r>
-              <a:rPr lang="en-US" sz="1100" b="1" u="sng" dirty="0">
-                <a:solidFill>
-                  <a:srgbClr val="8E2F3C"/>
-                </a:solidFill>
-                <a:latin typeface="IBM Plex Sans Arabic" pitchFamily="34" charset="0"/>
-                <a:ea typeface="IBM Plex Sans Arabic" pitchFamily="34" charset="-122"/>
-                <a:cs typeface="IBM Plex Sans Arabic" pitchFamily="34" charset="-120"/>
-                <a:hlinkClick r:id="rId7" invalidUrl="" action="" tgtFrame="" tooltip="" history="1" highlightClick="0" endSnd="0">
-                  <a:extLst>
-                    <a:ext uri="{A12FA001-AC4F-418D-AE19-62706E023703}">
-                      <ahyp:hlinkClr xmlns:ahyp="http://schemas.microsoft.com/office/drawing/2018/hyperlinkcolor" val="tx"/>
-                    </a:ext>
-                  </a:extLst>
-                </a:hlinkClick>
-              </a:rPr>
-              <a:t>cloudtrim-sa.vercel.app</a:t>
-            </a:r>
-            <a:endParaRPr lang="en-US" sz="1100" dirty="0"/>
-          </a:p>
-        </p:txBody>
-      </p:sp>
-      <p:sp>
-        <p:nvSpPr>
-          <p:cNvPr id="33" name="Text 25"/>
-          <p:cNvSpPr txBox="1"/>
-          <p:nvPr/>
-        </p:nvSpPr>
-        <p:spPr>
-          <a:xfrm>
-            <a:off x="457200" y="5760720"/>
-            <a:ext cx="11277295" cy="365760"/>
-          </a:xfrm>
-          <a:prstGeom prst="rect">
-            <a:avLst/>
-          </a:prstGeom>
-          <a:noFill/>
-          <a:ln/>
-        </p:spPr>
-        <p:txBody>
-          <a:bodyPr wrap="square" lIns="0" tIns="0" rIns="0" bIns="0" rtlCol="0" anchor="ctr"/>
           <a:lstStyle/>
           <a:p>
             <a:pPr rtl="1" algn="ctr" indent="0" marL="0">
               <a:buNone/>
             </a:pPr>
             <a:r>
-              <a:rPr lang="en-US" sz="1300" dirty="0">
+              <a:rPr lang="en-US" sz="1600" b="1" dirty="0">
                 <a:solidFill>
-                  <a:srgbClr val="21141A"/>
+                  <a:srgbClr val="FBF6EE"/>
                 </a:solidFill>
                 <a:latin typeface="IBM Plex Sans Arabic" pitchFamily="34" charset="0"/>
                 <a:ea typeface="IBM Plex Sans Arabic" pitchFamily="34" charset="-122"/>
                 <a:cs typeface="IBM Plex Sans Arabic" pitchFamily="34" charset="-120"/>
               </a:rPr>
-              <a:t>العرض على بيانات شركة افتراضية، والصلاحيات المعروضة هي صلاحيات AWS الحقيقية للقراءة.</a:t>
-            </a:r>
-            <a:endParaRPr lang="en-US" sz="1300" dirty="0"/>
+              <a:t>امسح وجرّب</a:t>
+            </a:r>
+            <a:endParaRPr lang="en-US" sz="1600" dirty="0"/>
           </a:p>
         </p:txBody>
       </p:sp>
@@ -13345,8 +9912,8 @@
         </p:nvSpPr>
         <p:spPr>
           <a:xfrm>
-            <a:off x="457200" y="1463040"/>
-            <a:ext cx="11277295" cy="658368"/>
+            <a:off x="457200" y="1600200"/>
+            <a:ext cx="11277295" cy="731520"/>
           </a:xfrm>
           <a:prstGeom prst="rect">
             <a:avLst/>
@@ -13362,7 +9929,7 @@
               <a:buNone/>
             </a:pPr>
             <a:r>
-              <a:rPr lang="en-US" sz="2700" b="1" dirty="0">
+              <a:rPr lang="en-US" sz="3400" b="1" dirty="0">
                 <a:solidFill>
                   <a:srgbClr val="21141A"/>
                 </a:solidFill>
@@ -13370,9 +9937,9 @@
                 <a:ea typeface="IBM Plex Sans Arabic" pitchFamily="34" charset="-122"/>
                 <a:cs typeface="IBM Plex Sans Arabic" pitchFamily="34" charset="-120"/>
               </a:rPr>
-              <a:t>مثال محسوب: نحو 110 آلاف ريال سنوياً لشركة من 120 موظفاً</a:t>
-            </a:r>
-            <a:endParaRPr lang="en-US" sz="2700" dirty="0"/>
+              <a:t>أثر بالأرقام</a:t>
+            </a:r>
+            <a:endParaRPr lang="en-US" sz="3400" dirty="0"/>
           </a:p>
         </p:txBody>
       </p:sp>
@@ -13384,12 +9951,12 @@
         </p:nvSpPr>
         <p:spPr>
           <a:xfrm>
-            <a:off x="9223781" y="2331720"/>
-            <a:ext cx="2510714" cy="1463040"/>
+            <a:off x="8188757" y="2697480"/>
+            <a:ext cx="3545738" cy="2377440"/>
           </a:xfrm>
           <a:prstGeom prst="roundRect">
             <a:avLst>
-              <a:gd name="adj" fmla="val 10000"/>
+              <a:gd name="adj" fmla="val 7692"/>
             </a:avLst>
           </a:prstGeom>
           <a:solidFill>
@@ -13403,16 +9970,40 @@
           </a:ln>
         </p:spPr>
       </p:sp>
-      <p:sp>
-        <p:nvSpPr>
-          <p:cNvPr id="24" name="Text 19"/>
+      <p:pic>
+        <p:nvPicPr>
+          <p:cNvPr id="24" name="Image 3" descr="/tmp/claude-0/-home-claude/750ff410-f4aa-5276-9360-1e19d018b112/scratchpad/c/assets/i-wallet-br.png">    </p:cNvPr>
+          <p:cNvPicPr>
+            <a:picLocks noChangeAspect="1"/>
+          </p:cNvPicPr>
+          <p:nvPr/>
+        </p:nvPicPr>
+        <p:blipFill>
+          <a:blip r:embed="rId4"/>
+          <a:stretch>
+            <a:fillRect/>
+          </a:stretch>
+        </p:blipFill>
+        <p:spPr>
+          <a:xfrm>
+            <a:off x="9687306" y="2971800"/>
+            <a:ext cx="548640" cy="548640"/>
+          </a:xfrm>
+          <a:prstGeom prst="rect">
+            <a:avLst/>
+          </a:prstGeom>
+        </p:spPr>
+      </p:pic>
+      <p:sp>
+        <p:nvSpPr>
+          <p:cNvPr id="25" name="Text 19"/>
           <p:cNvSpPr txBox="1"/>
           <p:nvPr/>
         </p:nvSpPr>
         <p:spPr>
           <a:xfrm>
-            <a:off x="9223781" y="2532888"/>
-            <a:ext cx="2510714" cy="685800"/>
+            <a:off x="8188757" y="3566160"/>
+            <a:ext cx="3545738" cy="868680"/>
           </a:xfrm>
           <a:prstGeom prst="rect">
             <a:avLst/>
@@ -13421,14 +10012,14 @@
           <a:ln/>
         </p:spPr>
         <p:txBody>
-          <a:bodyPr wrap="square" lIns="0" tIns="0" rIns="0" bIns="0" rtlCol="0" anchor="t"/>
+          <a:bodyPr wrap="square" lIns="0" tIns="0" rIns="0" bIns="0" rtlCol="0" anchor="ctr"/>
           <a:lstStyle/>
           <a:p>
             <a:pPr algn="ctr" indent="0" marL="0">
               <a:buNone/>
             </a:pPr>
             <a:r>
-              <a:rPr lang="en-US" sz="3600" b="1" dirty="0">
+              <a:rPr lang="en-US" sz="5400" b="1" dirty="0">
                 <a:solidFill>
                   <a:srgbClr val="8E2F3C"/>
                 </a:solidFill>
@@ -13436,22 +10027,22 @@
                 <a:ea typeface="IBM Plex Sans Arabic" pitchFamily="34" charset="-122"/>
                 <a:cs typeface="IBM Plex Sans Arabic" pitchFamily="34" charset="-120"/>
               </a:rPr>
-              <a:t>85,400</a:t>
-            </a:r>
-            <a:endParaRPr lang="en-US" sz="3600" dirty="0"/>
-          </a:p>
-        </p:txBody>
-      </p:sp>
-      <p:sp>
-        <p:nvSpPr>
-          <p:cNvPr id="25" name="Text 20"/>
+              <a:t>10.8%</a:t>
+            </a:r>
+            <a:endParaRPr lang="en-US" sz="5400" dirty="0"/>
+          </a:p>
+        </p:txBody>
+      </p:sp>
+      <p:sp>
+        <p:nvSpPr>
+          <p:cNvPr id="26" name="Text 20"/>
           <p:cNvSpPr txBox="1"/>
           <p:nvPr/>
         </p:nvSpPr>
         <p:spPr>
           <a:xfrm>
-            <a:off x="9360941" y="3246120"/>
-            <a:ext cx="2236394" cy="365760"/>
+            <a:off x="8463077" y="4480560"/>
+            <a:ext cx="2997098" cy="411480"/>
           </a:xfrm>
           <a:prstGeom prst="rect">
             <a:avLst/>
@@ -13460,14 +10051,14 @@
           <a:ln/>
         </p:spPr>
         <p:txBody>
-          <a:bodyPr wrap="square" lIns="0" tIns="0" rIns="0" bIns="0" rtlCol="0" anchor="t"/>
+          <a:bodyPr wrap="square" lIns="0" tIns="0" rIns="0" bIns="0" rtlCol="0" anchor="ctr"/>
           <a:lstStyle/>
           <a:p>
             <a:pPr rtl="1" algn="ctr" indent="0" marL="0">
               <a:buNone/>
             </a:pPr>
             <a:r>
-              <a:rPr lang="en-US" sz="1400" dirty="0">
+              <a:rPr lang="en-US" sz="1800" dirty="0">
                 <a:solidFill>
                   <a:srgbClr val="21141A"/>
                 </a:solidFill>
@@ -13475,22 +10066,68 @@
                 <a:ea typeface="IBM Plex Sans Arabic" pitchFamily="34" charset="-122"/>
                 <a:cs typeface="IBM Plex Sans Arabic" pitchFamily="34" charset="-120"/>
               </a:rPr>
-              <a:t>ريال فاتورة شهرية</a:t>
-            </a:r>
-            <a:endParaRPr lang="en-US" sz="1400" dirty="0"/>
-          </a:p>
-        </p:txBody>
-      </p:sp>
-      <p:sp>
-        <p:nvSpPr>
-          <p:cNvPr id="26" name="Text 21"/>
+              <a:t>توفير من الفاتورة</a:t>
+            </a:r>
+            <a:endParaRPr lang="en-US" sz="1800" dirty="0"/>
+          </a:p>
+        </p:txBody>
+      </p:sp>
+      <p:sp>
+        <p:nvSpPr>
+          <p:cNvPr id="27" name="Shape 21"/>
+          <p:cNvSpPr/>
+          <p:nvPr/>
+        </p:nvSpPr>
+        <p:spPr>
+          <a:xfrm>
+            <a:off x="4322978" y="2697480"/>
+            <a:ext cx="3545738" cy="2377440"/>
+          </a:xfrm>
+          <a:prstGeom prst="roundRect">
+            <a:avLst>
+              <a:gd name="adj" fmla="val 7692"/>
+            </a:avLst>
+          </a:prstGeom>
+          <a:solidFill>
+            <a:srgbClr val="8E2F3C"/>
+          </a:solidFill>
+          <a:ln/>
+        </p:spPr>
+      </p:sp>
+      <p:pic>
+        <p:nvPicPr>
+          <p:cNvPr id="28" name="Image 4" descr="/tmp/claude-0/-home-claude/750ff410-f4aa-5276-9360-1e19d018b112/scratchpad/c/assets/i-trend-cr.png">    </p:cNvPr>
+          <p:cNvPicPr>
+            <a:picLocks noChangeAspect="1"/>
+          </p:cNvPicPr>
+          <p:nvPr/>
+        </p:nvPicPr>
+        <p:blipFill>
+          <a:blip r:embed="rId5"/>
+          <a:stretch>
+            <a:fillRect/>
+          </a:stretch>
+        </p:blipFill>
+        <p:spPr>
+          <a:xfrm>
+            <a:off x="5821528" y="2971800"/>
+            <a:ext cx="548640" cy="548640"/>
+          </a:xfrm>
+          <a:prstGeom prst="rect">
+            <a:avLst/>
+          </a:prstGeom>
+        </p:spPr>
+      </p:pic>
+      <p:sp>
+        <p:nvSpPr>
+          <p:cNvPr id="29" name="Text 22"/>
           <p:cNvSpPr txBox="1"/>
           <p:nvPr/>
         </p:nvSpPr>
         <p:spPr>
           <a:xfrm>
-            <a:off x="8812301" y="2331720"/>
-            <a:ext cx="411480" cy="1463040"/>
+            <a:off x="4322978" y="3566160"/>
+            <a:ext cx="3545738" cy="868680"/>
           </a:xfrm>
           <a:prstGeom prst="rect">
             <a:avLst/>
@@ -13506,7 +10143,136 @@
               <a:buNone/>
             </a:pPr>
             <a:r>
-              <a:rPr lang="en-US" sz="2200" b="1" dirty="0">
+              <a:rPr lang="en-US" sz="5400" b="1" dirty="0">
+                <a:solidFill>
+                  <a:srgbClr val="FBF6EE"/>
+                </a:solidFill>
+                <a:latin typeface="IBM Plex Sans Arabic" pitchFamily="34" charset="0"/>
+                <a:ea typeface="IBM Plex Sans Arabic" pitchFamily="34" charset="-122"/>
+                <a:cs typeface="IBM Plex Sans Arabic" pitchFamily="34" charset="-120"/>
+              </a:rPr>
+              <a:t>110K</a:t>
+            </a:r>
+            <a:endParaRPr lang="en-US" sz="5400" dirty="0"/>
+          </a:p>
+        </p:txBody>
+      </p:sp>
+      <p:sp>
+        <p:nvSpPr>
+          <p:cNvPr id="30" name="Text 23"/>
+          <p:cNvSpPr txBox="1"/>
+          <p:nvPr/>
+        </p:nvSpPr>
+        <p:spPr>
+          <a:xfrm>
+            <a:off x="4597298" y="4480560"/>
+            <a:ext cx="2997098" cy="411480"/>
+          </a:xfrm>
+          <a:prstGeom prst="rect">
+            <a:avLst/>
+          </a:prstGeom>
+          <a:noFill/>
+          <a:ln/>
+        </p:spPr>
+        <p:txBody>
+          <a:bodyPr wrap="square" lIns="0" tIns="0" rIns="0" bIns="0" rtlCol="0" anchor="ctr"/>
+          <a:lstStyle/>
+          <a:p>
+            <a:pPr rtl="1" algn="ctr" indent="0" marL="0">
+              <a:buNone/>
+            </a:pPr>
+            <a:r>
+              <a:rPr lang="en-US" sz="1800" dirty="0">
+                <a:solidFill>
+                  <a:srgbClr val="FBF6EE"/>
+                </a:solidFill>
+                <a:latin typeface="IBM Plex Sans Arabic" pitchFamily="34" charset="0"/>
+                <a:ea typeface="IBM Plex Sans Arabic" pitchFamily="34" charset="-122"/>
+                <a:cs typeface="IBM Plex Sans Arabic" pitchFamily="34" charset="-120"/>
+              </a:rPr>
+              <a:t>ريال سنوياً</a:t>
+            </a:r>
+            <a:endParaRPr lang="en-US" sz="1800" dirty="0"/>
+          </a:p>
+        </p:txBody>
+      </p:sp>
+      <p:sp>
+        <p:nvSpPr>
+          <p:cNvPr id="31" name="Shape 24"/>
+          <p:cNvSpPr/>
+          <p:nvPr/>
+        </p:nvSpPr>
+        <p:spPr>
+          <a:xfrm>
+            <a:off x="457200" y="2697480"/>
+            <a:ext cx="3545738" cy="2377440"/>
+          </a:xfrm>
+          <a:prstGeom prst="roundRect">
+            <a:avLst>
+              <a:gd name="adj" fmla="val 7692"/>
+            </a:avLst>
+          </a:prstGeom>
+          <a:solidFill>
+            <a:srgbClr val="FFFBF8"/>
+          </a:solidFill>
+          <a:ln w="9525">
+            <a:solidFill>
+              <a:srgbClr val="E3D5CC"/>
+            </a:solidFill>
+            <a:prstDash val="solid"/>
+          </a:ln>
+        </p:spPr>
+      </p:sp>
+      <p:pic>
+        <p:nvPicPr>
+          <p:cNvPr id="32" name="Image 5" descr="/tmp/claude-0/-home-claude/750ff410-f4aa-5276-9360-1e19d018b112/scratchpad/c/assets/i-clock-br.png">    </p:cNvPr>
+          <p:cNvPicPr>
+            <a:picLocks noChangeAspect="1"/>
+          </p:cNvPicPr>
+          <p:nvPr/>
+        </p:nvPicPr>
+        <p:blipFill>
+          <a:blip r:embed="rId6"/>
+          <a:stretch>
+            <a:fillRect/>
+          </a:stretch>
+        </p:blipFill>
+        <p:spPr>
+          <a:xfrm>
+            <a:off x="1955749" y="2971800"/>
+            <a:ext cx="548640" cy="548640"/>
+          </a:xfrm>
+          <a:prstGeom prst="rect">
+            <a:avLst/>
+          </a:prstGeom>
+        </p:spPr>
+      </p:pic>
+      <p:sp>
+        <p:nvSpPr>
+          <p:cNvPr id="33" name="Text 25"/>
+          <p:cNvSpPr txBox="1"/>
+          <p:nvPr/>
+        </p:nvSpPr>
+        <p:spPr>
+          <a:xfrm>
+            <a:off x="457200" y="3566160"/>
+            <a:ext cx="3545738" cy="868680"/>
+          </a:xfrm>
+          <a:prstGeom prst="rect">
+            <a:avLst/>
+          </a:prstGeom>
+          <a:noFill/>
+          <a:ln/>
+        </p:spPr>
+        <p:txBody>
+          <a:bodyPr wrap="square" lIns="0" tIns="0" rIns="0" bIns="0" rtlCol="0" anchor="ctr"/>
+          <a:lstStyle/>
+          <a:p>
+            <a:pPr algn="ctr" indent="0" marL="0">
+              <a:buNone/>
+            </a:pPr>
+            <a:r>
+              <a:rPr lang="en-US" sz="5400" b="1" dirty="0">
                 <a:solidFill>
                   <a:srgbClr val="8E2F3C"/>
                 </a:solidFill>
@@ -13514,49 +10280,22 @@
                 <a:ea typeface="IBM Plex Sans Arabic" pitchFamily="34" charset="-122"/>
                 <a:cs typeface="IBM Plex Sans Arabic" pitchFamily="34" charset="-120"/>
               </a:rPr>
-              <a:t>←</a:t>
-            </a:r>
-            <a:endParaRPr lang="en-US" sz="2200" dirty="0"/>
-          </a:p>
-        </p:txBody>
-      </p:sp>
-      <p:sp>
-        <p:nvSpPr>
-          <p:cNvPr id="27" name="Shape 22"/>
-          <p:cNvSpPr/>
-          <p:nvPr/>
-        </p:nvSpPr>
-        <p:spPr>
-          <a:xfrm>
-            <a:off x="6301588" y="2331720"/>
-            <a:ext cx="2510714" cy="1463040"/>
-          </a:xfrm>
-          <a:prstGeom prst="roundRect">
-            <a:avLst>
-              <a:gd name="adj" fmla="val 10000"/>
-            </a:avLst>
-          </a:prstGeom>
-          <a:solidFill>
-            <a:srgbClr val="FFFBF8"/>
-          </a:solidFill>
-          <a:ln w="9525">
-            <a:solidFill>
-              <a:srgbClr val="E3D5CC"/>
-            </a:solidFill>
-            <a:prstDash val="solid"/>
-          </a:ln>
-        </p:spPr>
-      </p:sp>
-      <p:sp>
-        <p:nvSpPr>
-          <p:cNvPr id="28" name="Text 23"/>
+              <a:t>دقائق</a:t>
+            </a:r>
+            <a:endParaRPr lang="en-US" sz="5400" dirty="0"/>
+          </a:p>
+        </p:txBody>
+      </p:sp>
+      <p:sp>
+        <p:nvSpPr>
+          <p:cNvPr id="34" name="Text 26"/>
           <p:cNvSpPr txBox="1"/>
           <p:nvPr/>
         </p:nvSpPr>
         <p:spPr>
           <a:xfrm>
-            <a:off x="6301588" y="2532888"/>
-            <a:ext cx="2510714" cy="685800"/>
+            <a:off x="731520" y="4480560"/>
+            <a:ext cx="2997098" cy="411480"/>
           </a:xfrm>
           <a:prstGeom prst="rect">
             <a:avLst/>
@@ -13565,53 +10304,14 @@
           <a:ln/>
         </p:spPr>
         <p:txBody>
-          <a:bodyPr wrap="square" lIns="0" tIns="0" rIns="0" bIns="0" rtlCol="0" anchor="t"/>
-          <a:lstStyle/>
-          <a:p>
-            <a:pPr algn="ctr" indent="0" marL="0">
-              <a:buNone/>
-            </a:pPr>
-            <a:r>
-              <a:rPr lang="en-US" sz="3600" b="1" dirty="0">
-                <a:solidFill>
-                  <a:srgbClr val="8E2F3C"/>
-                </a:solidFill>
-                <a:latin typeface="IBM Plex Sans Arabic" pitchFamily="34" charset="0"/>
-                <a:ea typeface="IBM Plex Sans Arabic" pitchFamily="34" charset="-122"/>
-                <a:cs typeface="IBM Plex Sans Arabic" pitchFamily="34" charset="-120"/>
-              </a:rPr>
-              <a:t>7</a:t>
-            </a:r>
-            <a:endParaRPr lang="en-US" sz="3600" dirty="0"/>
-          </a:p>
-        </p:txBody>
-      </p:sp>
-      <p:sp>
-        <p:nvSpPr>
-          <p:cNvPr id="29" name="Text 24"/>
-          <p:cNvSpPr txBox="1"/>
-          <p:nvPr/>
-        </p:nvSpPr>
-        <p:spPr>
-          <a:xfrm>
-            <a:off x="6438748" y="3246120"/>
-            <a:ext cx="2236394" cy="365760"/>
-          </a:xfrm>
-          <a:prstGeom prst="rect">
-            <a:avLst/>
-          </a:prstGeom>
-          <a:noFill/>
-          <a:ln/>
-        </p:spPr>
-        <p:txBody>
-          <a:bodyPr wrap="square" lIns="0" tIns="0" rIns="0" bIns="0" rtlCol="0" anchor="t"/>
+          <a:bodyPr wrap="square" lIns="0" tIns="0" rIns="0" bIns="0" rtlCol="0" anchor="ctr"/>
           <a:lstStyle/>
           <a:p>
             <a:pPr rtl="1" algn="ctr" indent="0" marL="0">
               <a:buNone/>
             </a:pPr>
             <a:r>
-              <a:rPr lang="en-US" sz="1400" dirty="0">
+              <a:rPr lang="en-US" sz="1800" dirty="0">
                 <a:solidFill>
                   <a:srgbClr val="21141A"/>
                 </a:solidFill>
@@ -13619,127 +10319,22 @@
                 <a:ea typeface="IBM Plex Sans Arabic" pitchFamily="34" charset="-122"/>
                 <a:cs typeface="IBM Plex Sans Arabic" pitchFamily="34" charset="-120"/>
               </a:rPr>
-              <a:t>توصيات من الوكيل الذكي</a:t>
-            </a:r>
-            <a:endParaRPr lang="en-US" sz="1400" dirty="0"/>
-          </a:p>
-        </p:txBody>
-      </p:sp>
-      <p:sp>
-        <p:nvSpPr>
-          <p:cNvPr id="30" name="Text 25"/>
+              <a:t>بدل أسابيع</a:t>
+            </a:r>
+            <a:endParaRPr lang="en-US" sz="1800" dirty="0"/>
+          </a:p>
+        </p:txBody>
+      </p:sp>
+      <p:sp>
+        <p:nvSpPr>
+          <p:cNvPr id="35" name="Text 27"/>
           <p:cNvSpPr txBox="1"/>
           <p:nvPr/>
         </p:nvSpPr>
         <p:spPr>
           <a:xfrm>
-            <a:off x="5890108" y="2331720"/>
-            <a:ext cx="411480" cy="1463040"/>
-          </a:xfrm>
-          <a:prstGeom prst="rect">
-            <a:avLst/>
-          </a:prstGeom>
-          <a:noFill/>
-          <a:ln/>
-        </p:spPr>
-        <p:txBody>
-          <a:bodyPr wrap="square" lIns="0" tIns="0" rIns="0" bIns="0" rtlCol="0" anchor="ctr"/>
-          <a:lstStyle/>
-          <a:p>
-            <a:pPr algn="ctr" indent="0" marL="0">
-              <a:buNone/>
-            </a:pPr>
-            <a:r>
-              <a:rPr lang="en-US" sz="2200" b="1" dirty="0">
-                <a:solidFill>
-                  <a:srgbClr val="8E2F3C"/>
-                </a:solidFill>
-                <a:latin typeface="IBM Plex Sans Arabic" pitchFamily="34" charset="0"/>
-                <a:ea typeface="IBM Plex Sans Arabic" pitchFamily="34" charset="-122"/>
-                <a:cs typeface="IBM Plex Sans Arabic" pitchFamily="34" charset="-120"/>
-              </a:rPr>
-              <a:t>←</a:t>
-            </a:r>
-            <a:endParaRPr lang="en-US" sz="2200" dirty="0"/>
-          </a:p>
-        </p:txBody>
-      </p:sp>
-      <p:sp>
-        <p:nvSpPr>
-          <p:cNvPr id="31" name="Shape 26"/>
-          <p:cNvSpPr/>
-          <p:nvPr/>
-        </p:nvSpPr>
-        <p:spPr>
-          <a:xfrm>
-            <a:off x="3379394" y="2331720"/>
-            <a:ext cx="2510714" cy="1463040"/>
-          </a:xfrm>
-          <a:prstGeom prst="roundRect">
-            <a:avLst>
-              <a:gd name="adj" fmla="val 10000"/>
-            </a:avLst>
-          </a:prstGeom>
-          <a:solidFill>
-            <a:srgbClr val="FFFBF8"/>
-          </a:solidFill>
-          <a:ln w="9525">
-            <a:solidFill>
-              <a:srgbClr val="E3D5CC"/>
-            </a:solidFill>
-            <a:prstDash val="solid"/>
-          </a:ln>
-        </p:spPr>
-      </p:sp>
-      <p:sp>
-        <p:nvSpPr>
-          <p:cNvPr id="32" name="Text 27"/>
-          <p:cNvSpPr txBox="1"/>
-          <p:nvPr/>
-        </p:nvSpPr>
-        <p:spPr>
-          <a:xfrm>
-            <a:off x="3379394" y="2532888"/>
-            <a:ext cx="2510714" cy="685800"/>
-          </a:xfrm>
-          <a:prstGeom prst="rect">
-            <a:avLst/>
-          </a:prstGeom>
-          <a:noFill/>
-          <a:ln/>
-        </p:spPr>
-        <p:txBody>
-          <a:bodyPr wrap="square" lIns="0" tIns="0" rIns="0" bIns="0" rtlCol="0" anchor="t"/>
-          <a:lstStyle/>
-          <a:p>
-            <a:pPr algn="ctr" indent="0" marL="0">
-              <a:buNone/>
-            </a:pPr>
-            <a:r>
-              <a:rPr lang="en-US" sz="3600" b="1" dirty="0">
-                <a:solidFill>
-                  <a:srgbClr val="8E2F3C"/>
-                </a:solidFill>
-                <a:latin typeface="IBM Plex Sans Arabic" pitchFamily="34" charset="0"/>
-                <a:ea typeface="IBM Plex Sans Arabic" pitchFamily="34" charset="-122"/>
-                <a:cs typeface="IBM Plex Sans Arabic" pitchFamily="34" charset="-120"/>
-              </a:rPr>
-              <a:t>9,202</a:t>
-            </a:r>
-            <a:endParaRPr lang="en-US" sz="3600" dirty="0"/>
-          </a:p>
-        </p:txBody>
-      </p:sp>
-      <p:sp>
-        <p:nvSpPr>
-          <p:cNvPr id="33" name="Text 28"/>
-          <p:cNvSpPr txBox="1"/>
-          <p:nvPr/>
-        </p:nvSpPr>
-        <p:spPr>
-          <a:xfrm>
-            <a:off x="3516554" y="3246120"/>
-            <a:ext cx="2236394" cy="365760"/>
+            <a:off x="457200" y="5349240"/>
+            <a:ext cx="11277295" cy="365760"/>
           </a:xfrm>
           <a:prstGeom prst="rect">
             <a:avLst/>
@@ -13755,285 +10350,7 @@
               <a:buNone/>
             </a:pPr>
             <a:r>
-              <a:rPr lang="en-US" sz="1400" dirty="0">
-                <a:solidFill>
-                  <a:srgbClr val="21141A"/>
-                </a:solidFill>
-                <a:latin typeface="IBM Plex Sans Arabic" pitchFamily="34" charset="0"/>
-                <a:ea typeface="IBM Plex Sans Arabic" pitchFamily="34" charset="-122"/>
-                <a:cs typeface="IBM Plex Sans Arabic" pitchFamily="34" charset="-120"/>
-              </a:rPr>
-              <a:t>ريال توفير شهري (10.8%)</a:t>
-            </a:r>
-            <a:endParaRPr lang="en-US" sz="1400" dirty="0"/>
-          </a:p>
-        </p:txBody>
-      </p:sp>
-      <p:sp>
-        <p:nvSpPr>
-          <p:cNvPr id="34" name="Text 29"/>
-          <p:cNvSpPr txBox="1"/>
-          <p:nvPr/>
-        </p:nvSpPr>
-        <p:spPr>
-          <a:xfrm>
-            <a:off x="2967914" y="2331720"/>
-            <a:ext cx="411480" cy="1463040"/>
-          </a:xfrm>
-          <a:prstGeom prst="rect">
-            <a:avLst/>
-          </a:prstGeom>
-          <a:noFill/>
-          <a:ln/>
-        </p:spPr>
-        <p:txBody>
-          <a:bodyPr wrap="square" lIns="0" tIns="0" rIns="0" bIns="0" rtlCol="0" anchor="ctr"/>
-          <a:lstStyle/>
-          <a:p>
-            <a:pPr algn="ctr" indent="0" marL="0">
-              <a:buNone/>
-            </a:pPr>
-            <a:r>
-              <a:rPr lang="en-US" sz="2200" b="1" dirty="0">
-                <a:solidFill>
-                  <a:srgbClr val="8E2F3C"/>
-                </a:solidFill>
-                <a:latin typeface="IBM Plex Sans Arabic" pitchFamily="34" charset="0"/>
-                <a:ea typeface="IBM Plex Sans Arabic" pitchFamily="34" charset="-122"/>
-                <a:cs typeface="IBM Plex Sans Arabic" pitchFamily="34" charset="-120"/>
-              </a:rPr>
-              <a:t>←</a:t>
-            </a:r>
-            <a:endParaRPr lang="en-US" sz="2200" dirty="0"/>
-          </a:p>
-        </p:txBody>
-      </p:sp>
-      <p:sp>
-        <p:nvSpPr>
-          <p:cNvPr id="35" name="Shape 30"/>
-          <p:cNvSpPr/>
-          <p:nvPr/>
-        </p:nvSpPr>
-        <p:spPr>
-          <a:xfrm>
-            <a:off x="457200" y="2331720"/>
-            <a:ext cx="2510714" cy="1463040"/>
-          </a:xfrm>
-          <a:prstGeom prst="roundRect">
-            <a:avLst>
-              <a:gd name="adj" fmla="val 10000"/>
-            </a:avLst>
-          </a:prstGeom>
-          <a:solidFill>
-            <a:srgbClr val="8E2F3C"/>
-          </a:solidFill>
-          <a:ln/>
-        </p:spPr>
-      </p:sp>
-      <p:sp>
-        <p:nvSpPr>
-          <p:cNvPr id="36" name="Text 31"/>
-          <p:cNvSpPr txBox="1"/>
-          <p:nvPr/>
-        </p:nvSpPr>
-        <p:spPr>
-          <a:xfrm>
-            <a:off x="457200" y="2532888"/>
-            <a:ext cx="2510714" cy="685800"/>
-          </a:xfrm>
-          <a:prstGeom prst="rect">
-            <a:avLst/>
-          </a:prstGeom>
-          <a:noFill/>
-          <a:ln/>
-        </p:spPr>
-        <p:txBody>
-          <a:bodyPr wrap="square" lIns="0" tIns="0" rIns="0" bIns="0" rtlCol="0" anchor="t"/>
-          <a:lstStyle/>
-          <a:p>
-            <a:pPr algn="ctr" indent="0" marL="0">
-              <a:buNone/>
-            </a:pPr>
-            <a:r>
-              <a:rPr lang="en-US" sz="3600" b="1" dirty="0">
-                <a:solidFill>
-                  <a:srgbClr val="FBF6EE"/>
-                </a:solidFill>
-                <a:latin typeface="IBM Plex Sans Arabic" pitchFamily="34" charset="0"/>
-                <a:ea typeface="IBM Plex Sans Arabic" pitchFamily="34" charset="-122"/>
-                <a:cs typeface="IBM Plex Sans Arabic" pitchFamily="34" charset="-120"/>
-              </a:rPr>
-              <a:t>110,424</a:t>
-            </a:r>
-            <a:endParaRPr lang="en-US" sz="3600" dirty="0"/>
-          </a:p>
-        </p:txBody>
-      </p:sp>
-      <p:sp>
-        <p:nvSpPr>
-          <p:cNvPr id="37" name="Text 32"/>
-          <p:cNvSpPr txBox="1"/>
-          <p:nvPr/>
-        </p:nvSpPr>
-        <p:spPr>
-          <a:xfrm>
-            <a:off x="594360" y="3246120"/>
-            <a:ext cx="2236394" cy="365760"/>
-          </a:xfrm>
-          <a:prstGeom prst="rect">
-            <a:avLst/>
-          </a:prstGeom>
-          <a:noFill/>
-          <a:ln/>
-        </p:spPr>
-        <p:txBody>
-          <a:bodyPr wrap="square" lIns="0" tIns="0" rIns="0" bIns="0" rtlCol="0" anchor="t"/>
-          <a:lstStyle/>
-          <a:p>
-            <a:pPr rtl="1" algn="ctr" indent="0" marL="0">
-              <a:buNone/>
-            </a:pPr>
-            <a:r>
-              <a:rPr lang="en-US" sz="1400" dirty="0">
-                <a:solidFill>
-                  <a:srgbClr val="FBF6EE"/>
-                </a:solidFill>
-                <a:latin typeface="IBM Plex Sans Arabic" pitchFamily="34" charset="0"/>
-                <a:ea typeface="IBM Plex Sans Arabic" pitchFamily="34" charset="-122"/>
-                <a:cs typeface="IBM Plex Sans Arabic" pitchFamily="34" charset="-120"/>
-              </a:rPr>
-              <a:t>ريال توفير سنوي</a:t>
-            </a:r>
-            <a:endParaRPr lang="en-US" sz="1400" dirty="0"/>
-          </a:p>
-        </p:txBody>
-      </p:sp>
-      <p:sp>
-        <p:nvSpPr>
-          <p:cNvPr id="38" name="Text 33"/>
-          <p:cNvSpPr txBox="1"/>
-          <p:nvPr/>
-        </p:nvSpPr>
-        <p:spPr>
-          <a:xfrm>
-            <a:off x="457200" y="4069080"/>
-            <a:ext cx="11277295" cy="365760"/>
-          </a:xfrm>
-          <a:prstGeom prst="rect">
-            <a:avLst/>
-          </a:prstGeom>
-          <a:noFill/>
-          <a:ln/>
-        </p:spPr>
-        <p:txBody>
-          <a:bodyPr wrap="square" lIns="0" tIns="0" rIns="0" bIns="0" rtlCol="0" anchor="t"/>
-          <a:lstStyle/>
-          <a:p>
-            <a:pPr rtl="1" algn="r" indent="0" marL="0">
-              <a:buNone/>
-            </a:pPr>
-            <a:r>
-              <a:rPr lang="en-US" sz="1700" b="1" dirty="0">
-                <a:solidFill>
-                  <a:srgbClr val="8E2F3C"/>
-                </a:solidFill>
-                <a:latin typeface="IBM Plex Sans Arabic" pitchFamily="34" charset="0"/>
-                <a:ea typeface="IBM Plex Sans Arabic" pitchFamily="34" charset="-122"/>
-                <a:cs typeface="IBM Plex Sans Arabic" pitchFamily="34" charset="-120"/>
-              </a:rPr>
-              <a:t>كيف نقيس الأثر</a:t>
-            </a:r>
-            <a:endParaRPr lang="en-US" sz="1700" dirty="0"/>
-          </a:p>
-        </p:txBody>
-      </p:sp>
-      <p:sp>
-        <p:nvSpPr>
-          <p:cNvPr id="39" name="Shape 34"/>
-          <p:cNvSpPr/>
-          <p:nvPr/>
-        </p:nvSpPr>
-        <p:spPr>
-          <a:xfrm>
-            <a:off x="8127797" y="4526280"/>
-            <a:ext cx="3606698" cy="960120"/>
-          </a:xfrm>
-          <a:prstGeom prst="roundRect">
-            <a:avLst>
-              <a:gd name="adj" fmla="val 13333"/>
-            </a:avLst>
-          </a:prstGeom>
-          <a:solidFill>
-            <a:srgbClr val="F1E4DF"/>
-          </a:solidFill>
-          <a:ln/>
-        </p:spPr>
-      </p:sp>
-      <p:sp>
-        <p:nvSpPr>
-          <p:cNvPr id="40" name="Text 35"/>
-          <p:cNvSpPr txBox="1"/>
-          <p:nvPr/>
-        </p:nvSpPr>
-        <p:spPr>
-          <a:xfrm>
-            <a:off x="8356397" y="4663440"/>
-            <a:ext cx="3149498" cy="329184"/>
-          </a:xfrm>
-          <a:prstGeom prst="rect">
-            <a:avLst/>
-          </a:prstGeom>
-          <a:noFill/>
-          <a:ln/>
-        </p:spPr>
-        <p:txBody>
-          <a:bodyPr wrap="square" lIns="0" tIns="0" rIns="0" bIns="0" rtlCol="0" anchor="t"/>
-          <a:lstStyle/>
-          <a:p>
-            <a:pPr rtl="1" algn="r" indent="0" marL="0">
-              <a:buNone/>
-            </a:pPr>
-            <a:r>
-              <a:rPr lang="en-US" sz="1500" b="1" dirty="0">
-                <a:solidFill>
-                  <a:srgbClr val="21141A"/>
-                </a:solidFill>
-                <a:latin typeface="IBM Plex Sans Arabic" pitchFamily="34" charset="0"/>
-                <a:ea typeface="IBM Plex Sans Arabic" pitchFamily="34" charset="-122"/>
-                <a:cs typeface="IBM Plex Sans Arabic" pitchFamily="34" charset="-120"/>
-              </a:rPr>
-              <a:t>الريالات الموفرة فعلياً</a:t>
-            </a:r>
-            <a:endParaRPr lang="en-US" sz="1500" dirty="0"/>
-          </a:p>
-        </p:txBody>
-      </p:sp>
-      <p:sp>
-        <p:nvSpPr>
-          <p:cNvPr id="41" name="Text 36"/>
-          <p:cNvSpPr txBox="1"/>
-          <p:nvPr/>
-        </p:nvSpPr>
-        <p:spPr>
-          <a:xfrm>
-            <a:off x="8356397" y="5029200"/>
-            <a:ext cx="3149498" cy="320040"/>
-          </a:xfrm>
-          <a:prstGeom prst="rect">
-            <a:avLst/>
-          </a:prstGeom>
-          <a:noFill/>
-          <a:ln/>
-        </p:spPr>
-        <p:txBody>
-          <a:bodyPr wrap="square" lIns="0" tIns="0" rIns="0" bIns="0" rtlCol="0" anchor="t"/>
-          <a:lstStyle/>
-          <a:p>
-            <a:pPr rtl="1" algn="r" indent="0" marL="0">
-              <a:buNone/>
-            </a:pPr>
-            <a:r>
-              <a:rPr lang="en-US" sz="1250" dirty="0">
+              <a:rPr lang="en-US" sz="1500" dirty="0">
                 <a:solidFill>
                   <a:srgbClr val="7F6C72"/>
                 </a:solidFill>
@@ -14041,248 +10358,9 @@
                 <a:ea typeface="IBM Plex Sans Arabic" pitchFamily="34" charset="-122"/>
                 <a:cs typeface="IBM Plex Sans Arabic" pitchFamily="34" charset="-120"/>
               </a:rPr>
-              <a:t>من فاتورة المزود نفسها قبل وبعد</a:t>
-            </a:r>
-            <a:endParaRPr lang="en-US" sz="1250" dirty="0"/>
-          </a:p>
-        </p:txBody>
-      </p:sp>
-      <p:sp>
-        <p:nvSpPr>
-          <p:cNvPr id="42" name="Shape 37"/>
-          <p:cNvSpPr/>
-          <p:nvPr/>
-        </p:nvSpPr>
-        <p:spPr>
-          <a:xfrm>
-            <a:off x="4292498" y="4526280"/>
-            <a:ext cx="3606698" cy="960120"/>
-          </a:xfrm>
-          <a:prstGeom prst="roundRect">
-            <a:avLst>
-              <a:gd name="adj" fmla="val 13333"/>
-            </a:avLst>
-          </a:prstGeom>
-          <a:solidFill>
-            <a:srgbClr val="F1E4DF"/>
-          </a:solidFill>
-          <a:ln/>
-        </p:spPr>
-      </p:sp>
-      <p:sp>
-        <p:nvSpPr>
-          <p:cNvPr id="43" name="Text 38"/>
-          <p:cNvSpPr txBox="1"/>
-          <p:nvPr/>
-        </p:nvSpPr>
-        <p:spPr>
-          <a:xfrm>
-            <a:off x="4521098" y="4663440"/>
-            <a:ext cx="3149498" cy="329184"/>
-          </a:xfrm>
-          <a:prstGeom prst="rect">
-            <a:avLst/>
-          </a:prstGeom>
-          <a:noFill/>
-          <a:ln/>
-        </p:spPr>
-        <p:txBody>
-          <a:bodyPr wrap="square" lIns="0" tIns="0" rIns="0" bIns="0" rtlCol="0" anchor="t"/>
-          <a:lstStyle/>
-          <a:p>
-            <a:pPr rtl="1" algn="r" indent="0" marL="0">
-              <a:buNone/>
-            </a:pPr>
-            <a:r>
-              <a:rPr lang="en-US" sz="1500" b="1" dirty="0">
-                <a:solidFill>
-                  <a:srgbClr val="21141A"/>
-                </a:solidFill>
-                <a:latin typeface="IBM Plex Sans Arabic" pitchFamily="34" charset="0"/>
-                <a:ea typeface="IBM Plex Sans Arabic" pitchFamily="34" charset="-122"/>
-                <a:cs typeface="IBM Plex Sans Arabic" pitchFamily="34" charset="-120"/>
-              </a:rPr>
-              <a:t>نسبة التوصيات المنفذة</a:t>
+              <a:t>مثال: شركة افتراضية من 120 موظفاً</a:t>
             </a:r>
             <a:endParaRPr lang="en-US" sz="1500" dirty="0"/>
-          </a:p>
-        </p:txBody>
-      </p:sp>
-      <p:sp>
-        <p:nvSpPr>
-          <p:cNvPr id="44" name="Text 39"/>
-          <p:cNvSpPr txBox="1"/>
-          <p:nvPr/>
-        </p:nvSpPr>
-        <p:spPr>
-          <a:xfrm>
-            <a:off x="4521098" y="5029200"/>
-            <a:ext cx="3149498" cy="320040"/>
-          </a:xfrm>
-          <a:prstGeom prst="rect">
-            <a:avLst/>
-          </a:prstGeom>
-          <a:noFill/>
-          <a:ln/>
-        </p:spPr>
-        <p:txBody>
-          <a:bodyPr wrap="square" lIns="0" tIns="0" rIns="0" bIns="0" rtlCol="0" anchor="t"/>
-          <a:lstStyle/>
-          <a:p>
-            <a:pPr rtl="1" algn="r" indent="0" marL="0">
-              <a:buNone/>
-            </a:pPr>
-            <a:r>
-              <a:rPr lang="en-US" sz="1250" dirty="0">
-                <a:solidFill>
-                  <a:srgbClr val="7F6C72"/>
-                </a:solidFill>
-                <a:latin typeface="IBM Plex Sans Arabic" pitchFamily="34" charset="0"/>
-                <a:ea typeface="IBM Plex Sans Arabic" pitchFamily="34" charset="-122"/>
-                <a:cs typeface="IBM Plex Sans Arabic" pitchFamily="34" charset="-120"/>
-              </a:rPr>
-              <a:t>كم توصية تحولت إلى توفير حقيقي</a:t>
-            </a:r>
-            <a:endParaRPr lang="en-US" sz="1250" dirty="0"/>
-          </a:p>
-        </p:txBody>
-      </p:sp>
-      <p:sp>
-        <p:nvSpPr>
-          <p:cNvPr id="45" name="Shape 40"/>
-          <p:cNvSpPr/>
-          <p:nvPr/>
-        </p:nvSpPr>
-        <p:spPr>
-          <a:xfrm>
-            <a:off x="457200" y="4526280"/>
-            <a:ext cx="3606698" cy="960120"/>
-          </a:xfrm>
-          <a:prstGeom prst="roundRect">
-            <a:avLst>
-              <a:gd name="adj" fmla="val 13333"/>
-            </a:avLst>
-          </a:prstGeom>
-          <a:solidFill>
-            <a:srgbClr val="F1E4DF"/>
-          </a:solidFill>
-          <a:ln/>
-        </p:spPr>
-      </p:sp>
-      <p:sp>
-        <p:nvSpPr>
-          <p:cNvPr id="46" name="Text 41"/>
-          <p:cNvSpPr txBox="1"/>
-          <p:nvPr/>
-        </p:nvSpPr>
-        <p:spPr>
-          <a:xfrm>
-            <a:off x="685800" y="4663440"/>
-            <a:ext cx="3149498" cy="329184"/>
-          </a:xfrm>
-          <a:prstGeom prst="rect">
-            <a:avLst/>
-          </a:prstGeom>
-          <a:noFill/>
-          <a:ln/>
-        </p:spPr>
-        <p:txBody>
-          <a:bodyPr wrap="square" lIns="0" tIns="0" rIns="0" bIns="0" rtlCol="0" anchor="t"/>
-          <a:lstStyle/>
-          <a:p>
-            <a:pPr rtl="1" algn="r" indent="0" marL="0">
-              <a:buNone/>
-            </a:pPr>
-            <a:r>
-              <a:rPr lang="en-US" sz="1500" b="1" dirty="0">
-                <a:solidFill>
-                  <a:srgbClr val="21141A"/>
-                </a:solidFill>
-                <a:latin typeface="IBM Plex Sans Arabic" pitchFamily="34" charset="0"/>
-                <a:ea typeface="IBM Plex Sans Arabic" pitchFamily="34" charset="-122"/>
-                <a:cs typeface="IBM Plex Sans Arabic" pitchFamily="34" charset="-120"/>
-              </a:rPr>
-              <a:t>زمن إزالة الهدر</a:t>
-            </a:r>
-            <a:endParaRPr lang="en-US" sz="1500" dirty="0"/>
-          </a:p>
-        </p:txBody>
-      </p:sp>
-      <p:sp>
-        <p:nvSpPr>
-          <p:cNvPr id="47" name="Text 42"/>
-          <p:cNvSpPr txBox="1"/>
-          <p:nvPr/>
-        </p:nvSpPr>
-        <p:spPr>
-          <a:xfrm>
-            <a:off x="685800" y="5029200"/>
-            <a:ext cx="3149498" cy="320040"/>
-          </a:xfrm>
-          <a:prstGeom prst="rect">
-            <a:avLst/>
-          </a:prstGeom>
-          <a:noFill/>
-          <a:ln/>
-        </p:spPr>
-        <p:txBody>
-          <a:bodyPr wrap="square" lIns="0" tIns="0" rIns="0" bIns="0" rtlCol="0" anchor="t"/>
-          <a:lstStyle/>
-          <a:p>
-            <a:pPr rtl="1" algn="r" indent="0" marL="0">
-              <a:buNone/>
-            </a:pPr>
-            <a:r>
-              <a:rPr lang="en-US" sz="1250" dirty="0">
-                <a:solidFill>
-                  <a:srgbClr val="7F6C72"/>
-                </a:solidFill>
-                <a:latin typeface="IBM Plex Sans Arabic" pitchFamily="34" charset="0"/>
-                <a:ea typeface="IBM Plex Sans Arabic" pitchFamily="34" charset="-122"/>
-                <a:cs typeface="IBM Plex Sans Arabic" pitchFamily="34" charset="-120"/>
-              </a:rPr>
-              <a:t>من أسابيع إلى دقائق بعد التنبيه</a:t>
-            </a:r>
-            <a:endParaRPr lang="en-US" sz="1250" dirty="0"/>
-          </a:p>
-        </p:txBody>
-      </p:sp>
-      <p:sp>
-        <p:nvSpPr>
-          <p:cNvPr id="48" name="Text 43"/>
-          <p:cNvSpPr txBox="1"/>
-          <p:nvPr/>
-        </p:nvSpPr>
-        <p:spPr>
-          <a:xfrm>
-            <a:off x="457200" y="5669280"/>
-            <a:ext cx="11277295" cy="457200"/>
-          </a:xfrm>
-          <a:prstGeom prst="rect">
-            <a:avLst/>
-          </a:prstGeom>
-          <a:noFill/>
-          <a:ln/>
-        </p:spPr>
-        <p:txBody>
-          <a:bodyPr wrap="square" lIns="0" tIns="0" rIns="0" bIns="0" rtlCol="0" anchor="ctr"/>
-          <a:lstStyle/>
-          <a:p>
-            <a:pPr rtl="1" algn="r" indent="0" marL="0">
-              <a:buNone/>
-            </a:pPr>
-            <a:r>
-              <a:rPr lang="en-US" sz="1250" dirty="0">
-                <a:solidFill>
-                  <a:srgbClr val="7F6C72"/>
-                </a:solidFill>
-                <a:latin typeface="IBM Plex Sans Arabic" pitchFamily="34" charset="0"/>
-                <a:ea typeface="IBM Plex Sans Arabic" pitchFamily="34" charset="-122"/>
-                <a:cs typeface="IBM Plex Sans Arabic" pitchFamily="34" charset="-120"/>
-              </a:rPr>
-              <a:t>المال الموفر يبقى في الشركة، ودعم السحب المحلية يخدم سيادة البيانات. الأرقام من النموذج الأولي على بيانات شركة افتراضية.</a:t>
-            </a:r>
-            <a:endParaRPr lang="en-US" sz="1250" dirty="0"/>
           </a:p>
         </p:txBody>
       </p:sp>
@@ -14816,8 +10894,8 @@
         </p:nvSpPr>
         <p:spPr>
           <a:xfrm>
-            <a:off x="457200" y="1463040"/>
-            <a:ext cx="11277295" cy="658368"/>
+            <a:off x="457200" y="1600200"/>
+            <a:ext cx="11277295" cy="731520"/>
           </a:xfrm>
           <a:prstGeom prst="rect">
             <a:avLst/>
@@ -14833,7 +10911,7 @@
               <a:buNone/>
             </a:pPr>
             <a:r>
-              <a:rPr lang="en-US" sz="3000" b="1" dirty="0">
+              <a:rPr lang="en-US" sz="3400" b="1" dirty="0">
                 <a:solidFill>
                   <a:srgbClr val="21141A"/>
                 </a:solidFill>
@@ -14841,22 +10919,68 @@
                 <a:ea typeface="IBM Plex Sans Arabic" pitchFamily="34" charset="-122"/>
                 <a:cs typeface="IBM Plex Sans Arabic" pitchFamily="34" charset="-120"/>
               </a:rPr>
-              <a:t>كيف نطوّر الحل، وما الدعم الذي نحتاجه</a:t>
-            </a:r>
-            <a:endParaRPr lang="en-US" sz="3000" dirty="0"/>
-          </a:p>
-        </p:txBody>
-      </p:sp>
-      <p:sp>
-        <p:nvSpPr>
-          <p:cNvPr id="23" name="Text 18"/>
+              <a:t>ما بعد التحدي</a:t>
+            </a:r>
+            <a:endParaRPr lang="en-US" sz="3400" dirty="0"/>
+          </a:p>
+        </p:txBody>
+      </p:sp>
+      <p:sp>
+        <p:nvSpPr>
+          <p:cNvPr id="23" name="Shape 18"/>
+          <p:cNvSpPr/>
+          <p:nvPr/>
+        </p:nvSpPr>
+        <p:spPr>
+          <a:xfrm>
+            <a:off x="8188757" y="2697480"/>
+            <a:ext cx="3545738" cy="1920240"/>
+          </a:xfrm>
+          <a:prstGeom prst="roundRect">
+            <a:avLst>
+              <a:gd name="adj" fmla="val 9524"/>
+            </a:avLst>
+          </a:prstGeom>
+          <a:solidFill>
+            <a:srgbClr val="8E2F3C"/>
+          </a:solidFill>
+          <a:ln/>
+        </p:spPr>
+      </p:sp>
+      <p:pic>
+        <p:nvPicPr>
+          <p:cNvPr id="24" name="Image 3" descr="/tmp/claude-0/-home-claude/750ff410-f4aa-5276-9360-1e19d018b112/scratchpad/c/assets/i-scale-cr.png">    </p:cNvPr>
+          <p:cNvPicPr>
+            <a:picLocks noChangeAspect="1"/>
+          </p:cNvPicPr>
+          <p:nvPr/>
+        </p:nvPicPr>
+        <p:blipFill>
+          <a:blip r:embed="rId4"/>
+          <a:stretch>
+            <a:fillRect/>
+          </a:stretch>
+        </p:blipFill>
+        <p:spPr>
+          <a:xfrm>
+            <a:off x="9618726" y="3017520"/>
+            <a:ext cx="685800" cy="685800"/>
+          </a:xfrm>
+          <a:prstGeom prst="rect">
+            <a:avLst/>
+          </a:prstGeom>
+        </p:spPr>
+      </p:pic>
+      <p:sp>
+        <p:nvSpPr>
+          <p:cNvPr id="25" name="Text 19"/>
           <p:cNvSpPr txBox="1"/>
           <p:nvPr/>
         </p:nvSpPr>
         <p:spPr>
           <a:xfrm>
-            <a:off x="6035040" y="2286000"/>
-            <a:ext cx="5699455" cy="365760"/>
+            <a:off x="8188757" y="3886200"/>
+            <a:ext cx="3545738" cy="457200"/>
           </a:xfrm>
           <a:prstGeom prst="rect">
             <a:avLst/>
@@ -14868,61 +10992,80 @@
           <a:bodyPr wrap="square" lIns="0" tIns="0" rIns="0" bIns="0" rtlCol="0" anchor="t"/>
           <a:lstStyle/>
           <a:p>
-            <a:pPr rtl="1" algn="r" indent="0" marL="0">
+            <a:pPr rtl="1" algn="ctr" indent="0" marL="0">
               <a:buNone/>
             </a:pPr>
             <a:r>
-              <a:rPr lang="en-US" sz="1700" b="1" dirty="0">
+              <a:rPr lang="en-US" sz="2200" b="1" dirty="0">
                 <a:solidFill>
-                  <a:srgbClr val="8E2F3C"/>
+                  <a:srgbClr val="FBF6EE"/>
                 </a:solidFill>
                 <a:latin typeface="IBM Plex Sans Arabic" pitchFamily="34" charset="0"/>
                 <a:ea typeface="IBM Plex Sans Arabic" pitchFamily="34" charset="-122"/>
                 <a:cs typeface="IBM Plex Sans Arabic" pitchFamily="34" charset="-120"/>
               </a:rPr>
-              <a:t>التطوير المستقبلي</a:t>
-            </a:r>
-            <a:endParaRPr lang="en-US" sz="1700" dirty="0"/>
-          </a:p>
-        </p:txBody>
-      </p:sp>
-      <p:sp>
-        <p:nvSpPr>
-          <p:cNvPr id="24" name="Shape 19"/>
-          <p:cNvSpPr/>
-          <p:nvPr/>
-        </p:nvSpPr>
-        <p:spPr>
-          <a:xfrm>
-            <a:off x="6035040" y="2743200"/>
-            <a:ext cx="5699455" cy="932688"/>
+              <a:t>مقارنة السحابات</a:t>
+            </a:r>
+            <a:endParaRPr lang="en-US" sz="2200" dirty="0"/>
+          </a:p>
+        </p:txBody>
+      </p:sp>
+      <p:sp>
+        <p:nvSpPr>
+          <p:cNvPr id="26" name="Shape 20"/>
+          <p:cNvSpPr/>
+          <p:nvPr/>
+        </p:nvSpPr>
+        <p:spPr>
+          <a:xfrm>
+            <a:off x="4322978" y="2697480"/>
+            <a:ext cx="3545738" cy="1920240"/>
           </a:xfrm>
           <a:prstGeom prst="roundRect">
             <a:avLst>
-              <a:gd name="adj" fmla="val 13725"/>
+              <a:gd name="adj" fmla="val 9524"/>
             </a:avLst>
           </a:prstGeom>
           <a:solidFill>
-            <a:srgbClr val="FFFBF8"/>
-          </a:solidFill>
-          <a:ln w="9525">
-            <a:solidFill>
-              <a:srgbClr val="E3D5CC"/>
-            </a:solidFill>
-            <a:prstDash val="solid"/>
-          </a:ln>
-        </p:spPr>
-      </p:sp>
-      <p:sp>
-        <p:nvSpPr>
-          <p:cNvPr id="25" name="Text 20"/>
+            <a:srgbClr val="8E2F3C"/>
+          </a:solidFill>
+          <a:ln/>
+        </p:spPr>
+      </p:sp>
+      <p:pic>
+        <p:nvPicPr>
+          <p:cNvPr id="27" name="Image 4" descr="/tmp/claude-0/-home-claude/750ff410-f4aa-5276-9360-1e19d018b112/scratchpad/c/assets/i-server-cr.png">    </p:cNvPr>
+          <p:cNvPicPr>
+            <a:picLocks noChangeAspect="1"/>
+          </p:cNvPicPr>
+          <p:nvPr/>
+        </p:nvPicPr>
+        <p:blipFill>
+          <a:blip r:embed="rId5"/>
+          <a:stretch>
+            <a:fillRect/>
+          </a:stretch>
+        </p:blipFill>
+        <p:spPr>
+          <a:xfrm>
+            <a:off x="5752948" y="3017520"/>
+            <a:ext cx="685800" cy="685800"/>
+          </a:xfrm>
+          <a:prstGeom prst="rect">
+            <a:avLst/>
+          </a:prstGeom>
+        </p:spPr>
+      </p:pic>
+      <p:sp>
+        <p:nvSpPr>
+          <p:cNvPr id="28" name="Text 21"/>
           <p:cNvSpPr txBox="1"/>
           <p:nvPr/>
         </p:nvSpPr>
         <p:spPr>
           <a:xfrm>
-            <a:off x="6309360" y="2862072"/>
-            <a:ext cx="5150815" cy="329184"/>
+            <a:off x="4322978" y="3886200"/>
+            <a:ext cx="3545738" cy="457200"/>
           </a:xfrm>
           <a:prstGeom prst="rect">
             <a:avLst/>
@@ -14934,11 +11077,135 @@
           <a:bodyPr wrap="square" lIns="0" tIns="0" rIns="0" bIns="0" rtlCol="0" anchor="t"/>
           <a:lstStyle/>
           <a:p>
-            <a:pPr rtl="1" algn="r" indent="0" marL="0">
+            <a:pPr rtl="1" algn="ctr" indent="0" marL="0">
               <a:buNone/>
             </a:pPr>
             <a:r>
-              <a:rPr lang="en-US" sz="1600" b="1" dirty="0">
+              <a:rPr lang="en-US" sz="2200" b="1" dirty="0">
+                <a:solidFill>
+                  <a:srgbClr val="FBF6EE"/>
+                </a:solidFill>
+                <a:latin typeface="IBM Plex Sans Arabic" pitchFamily="34" charset="0"/>
+                <a:ea typeface="IBM Plex Sans Arabic" pitchFamily="34" charset="-122"/>
+                <a:cs typeface="IBM Plex Sans Arabic" pitchFamily="34" charset="-120"/>
+              </a:rPr>
+              <a:t>البنية الهجينة</a:t>
+            </a:r>
+            <a:endParaRPr lang="en-US" sz="2200" dirty="0"/>
+          </a:p>
+        </p:txBody>
+      </p:sp>
+      <p:sp>
+        <p:nvSpPr>
+          <p:cNvPr id="29" name="Shape 22"/>
+          <p:cNvSpPr/>
+          <p:nvPr/>
+        </p:nvSpPr>
+        <p:spPr>
+          <a:xfrm>
+            <a:off x="457200" y="2697480"/>
+            <a:ext cx="3545738" cy="1920240"/>
+          </a:xfrm>
+          <a:prstGeom prst="roundRect">
+            <a:avLst>
+              <a:gd name="adj" fmla="val 9524"/>
+            </a:avLst>
+          </a:prstGeom>
+          <a:solidFill>
+            <a:srgbClr val="8E2F3C"/>
+          </a:solidFill>
+          <a:ln/>
+        </p:spPr>
+      </p:sp>
+      <p:pic>
+        <p:nvPicPr>
+          <p:cNvPr id="30" name="Image 5" descr="/tmp/claude-0/-home-claude/750ff410-f4aa-5276-9360-1e19d018b112/scratchpad/c/assets/i-bell-cr.png">    </p:cNvPr>
+          <p:cNvPicPr>
+            <a:picLocks noChangeAspect="1"/>
+          </p:cNvPicPr>
+          <p:nvPr/>
+        </p:nvPicPr>
+        <p:blipFill>
+          <a:blip r:embed="rId6"/>
+          <a:stretch>
+            <a:fillRect/>
+          </a:stretch>
+        </p:blipFill>
+        <p:spPr>
+          <a:xfrm>
+            <a:off x="1887169" y="3017520"/>
+            <a:ext cx="685800" cy="685800"/>
+          </a:xfrm>
+          <a:prstGeom prst="rect">
+            <a:avLst/>
+          </a:prstGeom>
+        </p:spPr>
+      </p:pic>
+      <p:sp>
+        <p:nvSpPr>
+          <p:cNvPr id="31" name="Text 23"/>
+          <p:cNvSpPr txBox="1"/>
+          <p:nvPr/>
+        </p:nvSpPr>
+        <p:spPr>
+          <a:xfrm>
+            <a:off x="457200" y="3886200"/>
+            <a:ext cx="3545738" cy="457200"/>
+          </a:xfrm>
+          <a:prstGeom prst="rect">
+            <a:avLst/>
+          </a:prstGeom>
+          <a:noFill/>
+          <a:ln/>
+        </p:spPr>
+        <p:txBody>
+          <a:bodyPr wrap="square" lIns="0" tIns="0" rIns="0" bIns="0" rtlCol="0" anchor="t"/>
+          <a:lstStyle/>
+          <a:p>
+            <a:pPr rtl="1" algn="ctr" indent="0" marL="0">
+              <a:buNone/>
+            </a:pPr>
+            <a:r>
+              <a:rPr lang="en-US" sz="2200" b="1" dirty="0">
+                <a:solidFill>
+                  <a:srgbClr val="FBF6EE"/>
+                </a:solidFill>
+                <a:latin typeface="IBM Plex Sans Arabic" pitchFamily="34" charset="0"/>
+                <a:ea typeface="IBM Plex Sans Arabic" pitchFamily="34" charset="-122"/>
+                <a:cs typeface="IBM Plex Sans Arabic" pitchFamily="34" charset="-120"/>
+              </a:rPr>
+              <a:t>إنذار مبكر 24/7</a:t>
+            </a:r>
+            <a:endParaRPr lang="en-US" sz="2200" dirty="0"/>
+          </a:p>
+        </p:txBody>
+      </p:sp>
+      <p:sp>
+        <p:nvSpPr>
+          <p:cNvPr id="32" name="Text 24"/>
+          <p:cNvSpPr txBox="1"/>
+          <p:nvPr/>
+        </p:nvSpPr>
+        <p:spPr>
+          <a:xfrm>
+            <a:off x="457200" y="5029200"/>
+            <a:ext cx="11277295" cy="457200"/>
+          </a:xfrm>
+          <a:prstGeom prst="rect">
+            <a:avLst/>
+          </a:prstGeom>
+          <a:noFill/>
+          <a:ln/>
+        </p:spPr>
+        <p:txBody>
+          <a:bodyPr wrap="square" lIns="0" tIns="0" rIns="0" bIns="0" rtlCol="0" anchor="ctr"/>
+          <a:lstStyle/>
+          <a:p>
+            <a:pPr rtl="1" algn="ctr" indent="0" marL="0">
+              <a:buNone/>
+            </a:pPr>
+            <a:r>
+              <a:rPr lang="en-US" sz="1800" b="1" dirty="0">
                 <a:solidFill>
                   <a:srgbClr val="21141A"/>
                 </a:solidFill>
@@ -14946,505 +11213,9 @@
                 <a:ea typeface="IBM Plex Sans Arabic" pitchFamily="34" charset="-122"/>
                 <a:cs typeface="IBM Plex Sans Arabic" pitchFamily="34" charset="-120"/>
               </a:rPr>
-              <a:t>مقارنة السحابات</a:t>
-            </a:r>
-            <a:endParaRPr lang="en-US" sz="1600" dirty="0"/>
-          </a:p>
-        </p:txBody>
-      </p:sp>
-      <p:sp>
-        <p:nvSpPr>
-          <p:cNvPr id="26" name="Text 21"/>
-          <p:cNvSpPr txBox="1"/>
-          <p:nvPr/>
-        </p:nvSpPr>
-        <p:spPr>
-          <a:xfrm>
-            <a:off x="6309360" y="3200400"/>
-            <a:ext cx="5150815" cy="411480"/>
-          </a:xfrm>
-          <a:prstGeom prst="rect">
-            <a:avLst/>
-          </a:prstGeom>
-          <a:noFill/>
-          <a:ln/>
-        </p:spPr>
-        <p:txBody>
-          <a:bodyPr wrap="square" lIns="0" tIns="0" rIns="0" bIns="0" rtlCol="0" anchor="t"/>
-          <a:lstStyle/>
-          <a:p>
-            <a:pPr rtl="1" algn="r" indent="0" marL="0">
-              <a:buNone/>
-            </a:pPr>
-            <a:r>
-              <a:rPr lang="en-US" sz="1250" dirty="0">
-                <a:solidFill>
-                  <a:srgbClr val="7F6C72"/>
-                </a:solidFill>
-                <a:latin typeface="IBM Plex Sans Arabic" pitchFamily="34" charset="0"/>
-                <a:ea typeface="IBM Plex Sans Arabic" pitchFamily="34" charset="-122"/>
-                <a:cs typeface="IBM Plex Sans Arabic" pitchFamily="34" charset="-120"/>
-              </a:rPr>
-              <a:t>مقارنة التكاليف بين المزودين واقتراح الانتقال للسحابة الأوفر بناءً على التحليل المالي.</a:t>
-            </a:r>
-            <a:endParaRPr lang="en-US" sz="1250" dirty="0"/>
-          </a:p>
-        </p:txBody>
-      </p:sp>
-      <p:sp>
-        <p:nvSpPr>
-          <p:cNvPr id="27" name="Shape 22"/>
-          <p:cNvSpPr/>
-          <p:nvPr/>
-        </p:nvSpPr>
-        <p:spPr>
-          <a:xfrm>
-            <a:off x="6035040" y="3822192"/>
-            <a:ext cx="5699455" cy="932688"/>
-          </a:xfrm>
-          <a:prstGeom prst="roundRect">
-            <a:avLst>
-              <a:gd name="adj" fmla="val 13725"/>
-            </a:avLst>
-          </a:prstGeom>
-          <a:solidFill>
-            <a:srgbClr val="FFFBF8"/>
-          </a:solidFill>
-          <a:ln w="9525">
-            <a:solidFill>
-              <a:srgbClr val="E3D5CC"/>
-            </a:solidFill>
-            <a:prstDash val="solid"/>
-          </a:ln>
-        </p:spPr>
-      </p:sp>
-      <p:sp>
-        <p:nvSpPr>
-          <p:cNvPr id="28" name="Text 23"/>
-          <p:cNvSpPr txBox="1"/>
-          <p:nvPr/>
-        </p:nvSpPr>
-        <p:spPr>
-          <a:xfrm>
-            <a:off x="6309360" y="3941064"/>
-            <a:ext cx="5150815" cy="329184"/>
-          </a:xfrm>
-          <a:prstGeom prst="rect">
-            <a:avLst/>
-          </a:prstGeom>
-          <a:noFill/>
-          <a:ln/>
-        </p:spPr>
-        <p:txBody>
-          <a:bodyPr wrap="square" lIns="0" tIns="0" rIns="0" bIns="0" rtlCol="0" anchor="t"/>
-          <a:lstStyle/>
-          <a:p>
-            <a:pPr rtl="1" algn="r" indent="0" marL="0">
-              <a:buNone/>
-            </a:pPr>
-            <a:r>
-              <a:rPr lang="en-US" sz="1600" b="1" dirty="0">
-                <a:solidFill>
-                  <a:srgbClr val="21141A"/>
-                </a:solidFill>
-                <a:latin typeface="IBM Plex Sans Arabic" pitchFamily="34" charset="0"/>
-                <a:ea typeface="IBM Plex Sans Arabic" pitchFamily="34" charset="-122"/>
-                <a:cs typeface="IBM Plex Sans Arabic" pitchFamily="34" charset="-120"/>
-              </a:rPr>
-              <a:t>البنية الهجينة</a:t>
-            </a:r>
-            <a:endParaRPr lang="en-US" sz="1600" dirty="0"/>
-          </a:p>
-        </p:txBody>
-      </p:sp>
-      <p:sp>
-        <p:nvSpPr>
-          <p:cNvPr id="29" name="Text 24"/>
-          <p:cNvSpPr txBox="1"/>
-          <p:nvPr/>
-        </p:nvSpPr>
-        <p:spPr>
-          <a:xfrm>
-            <a:off x="6309360" y="4279392"/>
-            <a:ext cx="5150815" cy="411480"/>
-          </a:xfrm>
-          <a:prstGeom prst="rect">
-            <a:avLst/>
-          </a:prstGeom>
-          <a:noFill/>
-          <a:ln/>
-        </p:spPr>
-        <p:txBody>
-          <a:bodyPr wrap="square" lIns="0" tIns="0" rIns="0" bIns="0" rtlCol="0" anchor="t"/>
-          <a:lstStyle/>
-          <a:p>
-            <a:pPr rtl="1" algn="r" indent="0" marL="0">
-              <a:buNone/>
-            </a:pPr>
-            <a:r>
-              <a:rPr lang="en-US" sz="1250" dirty="0">
-                <a:solidFill>
-                  <a:srgbClr val="7F6C72"/>
-                </a:solidFill>
-                <a:latin typeface="IBM Plex Sans Arabic" pitchFamily="34" charset="0"/>
-                <a:ea typeface="IBM Plex Sans Arabic" pitchFamily="34" charset="-122"/>
-                <a:cs typeface="IBM Plex Sans Arabic" pitchFamily="34" charset="-120"/>
-              </a:rPr>
-              <a:t>ربط السيرفرات المحلية (On-Premises) مع المنصات السحابية في لوحة واحدة.</a:t>
-            </a:r>
-            <a:endParaRPr lang="en-US" sz="1250" dirty="0"/>
-          </a:p>
-        </p:txBody>
-      </p:sp>
-      <p:sp>
-        <p:nvSpPr>
-          <p:cNvPr id="30" name="Shape 25"/>
-          <p:cNvSpPr/>
-          <p:nvPr/>
-        </p:nvSpPr>
-        <p:spPr>
-          <a:xfrm>
-            <a:off x="6035040" y="4901184"/>
-            <a:ext cx="5699455" cy="932688"/>
-          </a:xfrm>
-          <a:prstGeom prst="roundRect">
-            <a:avLst>
-              <a:gd name="adj" fmla="val 13725"/>
-            </a:avLst>
-          </a:prstGeom>
-          <a:solidFill>
-            <a:srgbClr val="FFFBF8"/>
-          </a:solidFill>
-          <a:ln w="9525">
-            <a:solidFill>
-              <a:srgbClr val="E3D5CC"/>
-            </a:solidFill>
-            <a:prstDash val="solid"/>
-          </a:ln>
-        </p:spPr>
-      </p:sp>
-      <p:sp>
-        <p:nvSpPr>
-          <p:cNvPr id="31" name="Text 26"/>
-          <p:cNvSpPr txBox="1"/>
-          <p:nvPr/>
-        </p:nvSpPr>
-        <p:spPr>
-          <a:xfrm>
-            <a:off x="6309360" y="5020056"/>
-            <a:ext cx="5150815" cy="329184"/>
-          </a:xfrm>
-          <a:prstGeom prst="rect">
-            <a:avLst/>
-          </a:prstGeom>
-          <a:noFill/>
-          <a:ln/>
-        </p:spPr>
-        <p:txBody>
-          <a:bodyPr wrap="square" lIns="0" tIns="0" rIns="0" bIns="0" rtlCol="0" anchor="t"/>
-          <a:lstStyle/>
-          <a:p>
-            <a:pPr rtl="1" algn="r" indent="0" marL="0">
-              <a:buNone/>
-            </a:pPr>
-            <a:r>
-              <a:rPr lang="en-US" sz="1600" b="1" dirty="0">
-                <a:solidFill>
-                  <a:srgbClr val="21141A"/>
-                </a:solidFill>
-                <a:latin typeface="IBM Plex Sans Arabic" pitchFamily="34" charset="0"/>
-                <a:ea typeface="IBM Plex Sans Arabic" pitchFamily="34" charset="-122"/>
-                <a:cs typeface="IBM Plex Sans Arabic" pitchFamily="34" charset="-120"/>
-              </a:rPr>
-              <a:t>مراقبة وإنذار مبكر 24/7</a:t>
-            </a:r>
-            <a:endParaRPr lang="en-US" sz="1600" dirty="0"/>
-          </a:p>
-        </p:txBody>
-      </p:sp>
-      <p:sp>
-        <p:nvSpPr>
-          <p:cNvPr id="32" name="Text 27"/>
-          <p:cNvSpPr txBox="1"/>
-          <p:nvPr/>
-        </p:nvSpPr>
-        <p:spPr>
-          <a:xfrm>
-            <a:off x="6309360" y="5358384"/>
-            <a:ext cx="5150815" cy="411480"/>
-          </a:xfrm>
-          <a:prstGeom prst="rect">
-            <a:avLst/>
-          </a:prstGeom>
-          <a:noFill/>
-          <a:ln/>
-        </p:spPr>
-        <p:txBody>
-          <a:bodyPr wrap="square" lIns="0" tIns="0" rIns="0" bIns="0" rtlCol="0" anchor="t"/>
-          <a:lstStyle/>
-          <a:p>
-            <a:pPr rtl="1" algn="r" indent="0" marL="0">
-              <a:buNone/>
-            </a:pPr>
-            <a:r>
-              <a:rPr lang="en-US" sz="1250" dirty="0">
-                <a:solidFill>
-                  <a:srgbClr val="7F6C72"/>
-                </a:solidFill>
-                <a:latin typeface="IBM Plex Sans Arabic" pitchFamily="34" charset="0"/>
-                <a:ea typeface="IBM Plex Sans Arabic" pitchFamily="34" charset="-122"/>
-                <a:cs typeface="IBM Plex Sans Arabic" pitchFamily="34" charset="-120"/>
-              </a:rPr>
-              <a:t>تنبيه واتساب فوري عند أي ارتفاع مفاجئ في الاستهلاك (Cost Spike).</a:t>
-            </a:r>
-            <a:endParaRPr lang="en-US" sz="1250" dirty="0"/>
-          </a:p>
-        </p:txBody>
-      </p:sp>
-      <p:sp>
-        <p:nvSpPr>
-          <p:cNvPr id="33" name="Shape 28"/>
-          <p:cNvSpPr/>
-          <p:nvPr/>
-        </p:nvSpPr>
-        <p:spPr>
-          <a:xfrm>
-            <a:off x="457200" y="2286000"/>
-            <a:ext cx="5303520" cy="3712464"/>
-          </a:xfrm>
-          <a:prstGeom prst="roundRect">
-            <a:avLst>
-              <a:gd name="adj" fmla="val 4433"/>
-            </a:avLst>
-          </a:prstGeom>
-          <a:solidFill>
-            <a:srgbClr val="8E2F3C"/>
-          </a:solidFill>
-          <a:ln/>
-        </p:spPr>
-      </p:sp>
-      <p:sp>
-        <p:nvSpPr>
-          <p:cNvPr id="34" name="Text 29"/>
-          <p:cNvSpPr txBox="1"/>
-          <p:nvPr/>
-        </p:nvSpPr>
-        <p:spPr>
-          <a:xfrm>
-            <a:off x="777240" y="2514600"/>
-            <a:ext cx="4663440" cy="384048"/>
-          </a:xfrm>
-          <a:prstGeom prst="rect">
-            <a:avLst/>
-          </a:prstGeom>
-          <a:noFill/>
-          <a:ln/>
-        </p:spPr>
-        <p:txBody>
-          <a:bodyPr wrap="square" lIns="0" tIns="0" rIns="0" bIns="0" rtlCol="0" anchor="t"/>
-          <a:lstStyle/>
-          <a:p>
-            <a:pPr rtl="1" algn="r" indent="0" marL="0">
-              <a:buNone/>
-            </a:pPr>
-            <a:r>
-              <a:rPr lang="en-US" sz="1800" b="1" dirty="0">
-                <a:solidFill>
-                  <a:srgbClr val="FBF6EE"/>
-                </a:solidFill>
-                <a:latin typeface="IBM Plex Sans Arabic" pitchFamily="34" charset="0"/>
-                <a:ea typeface="IBM Plex Sans Arabic" pitchFamily="34" charset="-122"/>
-                <a:cs typeface="IBM Plex Sans Arabic" pitchFamily="34" charset="-120"/>
-              </a:rPr>
-              <a:t>التوجيه والدعم</a:t>
+              <a:t>نحتاج: توجيه خبراء · شريك سحابي محلي · 10 شركات للتجربة</a:t>
             </a:r>
             <a:endParaRPr lang="en-US" sz="1800" dirty="0"/>
-          </a:p>
-        </p:txBody>
-      </p:sp>
-      <p:sp>
-        <p:nvSpPr>
-          <p:cNvPr id="35" name="Shape 30"/>
-          <p:cNvSpPr/>
-          <p:nvPr/>
-        </p:nvSpPr>
-        <p:spPr>
-          <a:xfrm>
-            <a:off x="5321808" y="3154680"/>
-            <a:ext cx="118872" cy="118872"/>
-          </a:xfrm>
-          <a:prstGeom prst="rect">
-            <a:avLst/>
-          </a:prstGeom>
-          <a:solidFill>
-            <a:srgbClr val="C9A46E"/>
-          </a:solidFill>
-          <a:ln/>
-        </p:spPr>
-      </p:sp>
-      <p:sp>
-        <p:nvSpPr>
-          <p:cNvPr id="36" name="Text 31"/>
-          <p:cNvSpPr txBox="1"/>
-          <p:nvPr/>
-        </p:nvSpPr>
-        <p:spPr>
-          <a:xfrm>
-            <a:off x="777240" y="3063240"/>
-            <a:ext cx="4434840" cy="822960"/>
-          </a:xfrm>
-          <a:prstGeom prst="rect">
-            <a:avLst/>
-          </a:prstGeom>
-          <a:noFill/>
-          <a:ln/>
-        </p:spPr>
-        <p:txBody>
-          <a:bodyPr wrap="square" lIns="0" tIns="0" rIns="0" bIns="0" rtlCol="0" anchor="t"/>
-          <a:lstStyle/>
-          <a:p>
-            <a:pPr rtl="1" algn="r" indent="0" marL="0">
-              <a:lnSpc>
-                <a:spcPct val="110000"/>
-              </a:lnSpc>
-              <a:buNone/>
-            </a:pPr>
-            <a:r>
-              <a:rPr lang="en-US" sz="1350" dirty="0">
-                <a:solidFill>
-                  <a:srgbClr val="FBF6EE"/>
-                </a:solidFill>
-                <a:latin typeface="IBM Plex Sans Arabic" pitchFamily="34" charset="0"/>
-                <a:ea typeface="IBM Plex Sans Arabic" pitchFamily="34" charset="-122"/>
-                <a:cs typeface="IBM Plex Sans Arabic" pitchFamily="34" charset="-120"/>
-              </a:rPr>
-              <a:t>توجيه من خبراء السحابة وأمن المعلومات لتطوير نموذج الذكاء الاصطناعي ورفع كفاءة الأمان وتوطين البيانات.</a:t>
-            </a:r>
-            <a:endParaRPr lang="en-US" sz="1350" dirty="0"/>
-          </a:p>
-        </p:txBody>
-      </p:sp>
-      <p:sp>
-        <p:nvSpPr>
-          <p:cNvPr id="37" name="Shape 32"/>
-          <p:cNvSpPr/>
-          <p:nvPr/>
-        </p:nvSpPr>
-        <p:spPr>
-          <a:xfrm>
-            <a:off x="5321808" y="4069080"/>
-            <a:ext cx="118872" cy="118872"/>
-          </a:xfrm>
-          <a:prstGeom prst="rect">
-            <a:avLst/>
-          </a:prstGeom>
-          <a:solidFill>
-            <a:srgbClr val="C9A46E"/>
-          </a:solidFill>
-          <a:ln/>
-        </p:spPr>
-      </p:sp>
-      <p:sp>
-        <p:nvSpPr>
-          <p:cNvPr id="38" name="Text 33"/>
-          <p:cNvSpPr txBox="1"/>
-          <p:nvPr/>
-        </p:nvSpPr>
-        <p:spPr>
-          <a:xfrm>
-            <a:off x="777240" y="3977640"/>
-            <a:ext cx="4434840" cy="822960"/>
-          </a:xfrm>
-          <a:prstGeom prst="rect">
-            <a:avLst/>
-          </a:prstGeom>
-          <a:noFill/>
-          <a:ln/>
-        </p:spPr>
-        <p:txBody>
-          <a:bodyPr wrap="square" lIns="0" tIns="0" rIns="0" bIns="0" rtlCol="0" anchor="t"/>
-          <a:lstStyle/>
-          <a:p>
-            <a:pPr rtl="1" algn="r" indent="0" marL="0">
-              <a:lnSpc>
-                <a:spcPct val="110000"/>
-              </a:lnSpc>
-              <a:buNone/>
-            </a:pPr>
-            <a:r>
-              <a:rPr lang="en-US" sz="1350" dirty="0">
-                <a:solidFill>
-                  <a:srgbClr val="FBF6EE"/>
-                </a:solidFill>
-                <a:latin typeface="IBM Plex Sans Arabic" pitchFamily="34" charset="0"/>
-                <a:ea typeface="IBM Plex Sans Arabic" pitchFamily="34" charset="-122"/>
-                <a:cs typeface="IBM Plex Sans Arabic" pitchFamily="34" charset="-120"/>
-              </a:rPr>
-              <a:t>شراكة مع مزود سحابة محلي لاختبار الربط مع STC Cloud أو SCCC أو CNTXT.</a:t>
-            </a:r>
-            <a:endParaRPr lang="en-US" sz="1350" dirty="0"/>
-          </a:p>
-        </p:txBody>
-      </p:sp>
-      <p:sp>
-        <p:nvSpPr>
-          <p:cNvPr id="39" name="Shape 34"/>
-          <p:cNvSpPr/>
-          <p:nvPr/>
-        </p:nvSpPr>
-        <p:spPr>
-          <a:xfrm>
-            <a:off x="5321808" y="4983480"/>
-            <a:ext cx="118872" cy="118872"/>
-          </a:xfrm>
-          <a:prstGeom prst="rect">
-            <a:avLst/>
-          </a:prstGeom>
-          <a:solidFill>
-            <a:srgbClr val="C9A46E"/>
-          </a:solidFill>
-          <a:ln/>
-        </p:spPr>
-      </p:sp>
-      <p:sp>
-        <p:nvSpPr>
-          <p:cNvPr id="40" name="Text 35"/>
-          <p:cNvSpPr txBox="1"/>
-          <p:nvPr/>
-        </p:nvSpPr>
-        <p:spPr>
-          <a:xfrm>
-            <a:off x="777240" y="4892040"/>
-            <a:ext cx="4434840" cy="822960"/>
-          </a:xfrm>
-          <a:prstGeom prst="rect">
-            <a:avLst/>
-          </a:prstGeom>
-          <a:noFill/>
-          <a:ln/>
-        </p:spPr>
-        <p:txBody>
-          <a:bodyPr wrap="square" lIns="0" tIns="0" rIns="0" bIns="0" rtlCol="0" anchor="t"/>
-          <a:lstStyle/>
-          <a:p>
-            <a:pPr rtl="1" algn="r" indent="0" marL="0">
-              <a:lnSpc>
-                <a:spcPct val="110000"/>
-              </a:lnSpc>
-              <a:buNone/>
-            </a:pPr>
-            <a:r>
-              <a:rPr lang="en-US" sz="1350" dirty="0">
-                <a:solidFill>
-                  <a:srgbClr val="FBF6EE"/>
-                </a:solidFill>
-                <a:latin typeface="IBM Plex Sans Arabic" pitchFamily="34" charset="0"/>
-                <a:ea typeface="IBM Plex Sans Arabic" pitchFamily="34" charset="-122"/>
-                <a:cs typeface="IBM Plex Sans Arabic" pitchFamily="34" charset="-120"/>
-              </a:rPr>
-              <a:t>تجربة الفحص المجاني مع 10 شركات حقيقية للتحقق من حجم الهدر.</a:t>
-            </a:r>
-            <a:endParaRPr lang="en-US" sz="1350" dirty="0"/>
           </a:p>
         </p:txBody>
       </p:sp>

--- a/pitch/SSB_VentureX.pptx
+++ b/pitch/SSB_VentureX.pptx
@@ -15,9 +15,10 @@
     <p:sldId id="263" r:id="rId9"/>
     <p:sldId id="264" r:id="rId10"/>
     <p:sldId id="265" r:id="rId11"/>
+    <p:sldId id="266" r:id="rId12"/>
   </p:sldIdLst>
   <p:notesMasterIdLst>
-    <p:notesMasterId r:id="rId12"/>
+    <p:notesMasterId r:id="rId13"/>
   </p:notesMasterIdLst>
   <p:sldSz cx="12192000" cy="6858000"/>
   <p:notesSz cx="6858000" cy="12192000"/>
@@ -641,6 +642,94 @@
 </p:notes>
 </file>
 
+<file path=ppt/notesSlides/notesSlide11.xml><?xml version="1.0" encoding="utf-8"?>
+<p:notes xmlns:a="http://schemas.openxmlformats.org/drawingml/2006/main" xmlns:r="http://schemas.openxmlformats.org/officeDocument/2006/relationships" xmlns:p="http://schemas.openxmlformats.org/presentationml/2006/main">
+  <p:cSld>
+    <p:spTree>
+      <p:nvGrpSpPr>
+        <p:cNvPr id="1" name=""/>
+        <p:cNvGrpSpPr/>
+        <p:nvPr/>
+      </p:nvGrpSpPr>
+      <p:grpSpPr>
+        <a:xfrm>
+          <a:off x="0" y="0"/>
+          <a:ext cx="0" cy="0"/>
+          <a:chOff x="0" y="0"/>
+          <a:chExt cx="0" cy="0"/>
+        </a:xfrm>
+      </p:grpSpPr>
+      <p:sp>
+        <p:nvSpPr>
+          <p:cNvPr id="2" name="Slide Image Placeholder 1"/>
+          <p:cNvSpPr>
+            <a:spLocks noGrp="1" noRot="1" noChangeAspect="1"/>
+          </p:cNvSpPr>
+          <p:nvPr>
+            <p:ph type="sldImg"/>
+          </p:nvPr>
+        </p:nvSpPr>
+        <p:spPr/>
+      </p:sp>
+      <p:sp>
+        <p:nvSpPr>
+          <p:cNvPr id="3" name="Notes Placeholder 2"/>
+          <p:cNvSpPr>
+            <a:spLocks noGrp="1"/>
+          </p:cNvSpPr>
+          <p:nvPr>
+            <p:ph type="body" idx="1"/>
+          </p:nvPr>
+        </p:nvSpPr>
+        <p:spPr/>
+        <p:txBody>
+          <a:bodyPr/>
+          <a:lstStyle/>
+          <a:p>
+            <a:r>
+              <a:rPr lang="en-US" dirty="0"/>
+              <a:t/>
+            </a:r>
+            <a:endParaRPr lang="en-US" dirty="0"/>
+          </a:p>
+        </p:txBody>
+      </p:sp>
+      <p:sp>
+        <p:nvSpPr>
+          <p:cNvPr id="4" name="Slide Number Placeholder 3"/>
+          <p:cNvSpPr>
+            <a:spLocks noGrp="1"/>
+          </p:cNvSpPr>
+          <p:nvPr>
+            <p:ph type="sldNum" sz="quarter" idx="10"/>
+          </p:nvPr>
+        </p:nvSpPr>
+        <p:spPr/>
+        <p:txBody>
+          <a:bodyPr/>
+          <a:lstStyle/>
+          <a:p>
+            <a:fld id="{F7021451-1387-4CA6-816F-3879F97B5CBC}" type="slidenum">
+              <a:rPr lang="en-US"/>
+              <a:t>11</a:t>
+            </a:fld>
+            <a:endParaRPr lang="en-US"/>
+          </a:p>
+        </p:txBody>
+      </p:sp>
+    </p:spTree>
+    <p:extLst>
+      <p:ext uri="{BB962C8B-B14F-4D97-AF65-F5344CB8AC3E}">
+        <p14:creationId xmlns:p14="http://schemas.microsoft.com/office/powerpoint/2010/main" val="1024086991"/>
+      </p:ext>
+    </p:extLst>
+  </p:cSld>
+  <p:clrMapOvr>
+    <a:masterClrMapping/>
+  </p:clrMapOvr>
+</p:notes>
+</file>
+
 <file path=ppt/notesSlides/notesSlide2.xml><?xml version="1.0" encoding="utf-8"?>
 <p:notes xmlns:a="http://schemas.openxmlformats.org/drawingml/2006/main" xmlns:r="http://schemas.openxmlformats.org/officeDocument/2006/relationships" xmlns:p="http://schemas.openxmlformats.org/presentationml/2006/main">
   <p:cSld>
@@ -2992,8 +3081,8 @@
         </p:nvSpPr>
         <p:spPr>
           <a:xfrm>
-            <a:off x="10600639" y="987552"/>
-            <a:ext cx="1133856" cy="384048"/>
+            <a:off x="9759391" y="987552"/>
+            <a:ext cx="1975104" cy="384048"/>
           </a:xfrm>
           <a:prstGeom prst="roundRect">
             <a:avLst>
@@ -3014,8 +3103,8 @@
         </p:nvSpPr>
         <p:spPr>
           <a:xfrm>
-            <a:off x="10600639" y="987552"/>
-            <a:ext cx="1133856" cy="384048"/>
+            <a:off x="9759391" y="987552"/>
+            <a:ext cx="1975104" cy="384048"/>
           </a:xfrm>
           <a:prstGeom prst="rect">
             <a:avLst/>
@@ -3039,7 +3128,7 @@
                 <a:ea typeface="IBM Plex Sans Arabic" pitchFamily="34" charset="-122"/>
                 <a:cs typeface="IBM Plex Sans Arabic" pitchFamily="34" charset="-120"/>
               </a:rPr>
-              <a:t>الختام</a:t>
+              <a:t>الخطوة التالية</a:t>
             </a:r>
             <a:endParaRPr lang="en-US" sz="1300" dirty="0"/>
           </a:p>
@@ -3142,6 +3231,861 @@
                 <a:cs typeface="IBM Plex Sans Arabic" pitchFamily="34" charset="-120"/>
               </a:rPr>
               <a:t>10</a:t>
+            </a:r>
+            <a:endParaRPr lang="en-US" sz="1100" dirty="0"/>
+          </a:p>
+        </p:txBody>
+      </p:sp>
+      <p:sp>
+        <p:nvSpPr>
+          <p:cNvPr id="22" name="Text 17"/>
+          <p:cNvSpPr txBox="1"/>
+          <p:nvPr/>
+        </p:nvSpPr>
+        <p:spPr>
+          <a:xfrm>
+            <a:off x="457200" y="1600200"/>
+            <a:ext cx="11277295" cy="731520"/>
+          </a:xfrm>
+          <a:prstGeom prst="rect">
+            <a:avLst/>
+          </a:prstGeom>
+          <a:noFill/>
+          <a:ln/>
+        </p:spPr>
+        <p:txBody>
+          <a:bodyPr wrap="square" lIns="0" tIns="0" rIns="0" bIns="0" rtlCol="0" anchor="ctr"/>
+          <a:lstStyle/>
+          <a:p>
+            <a:pPr rtl="1" algn="r" indent="0" marL="0">
+              <a:buNone/>
+            </a:pPr>
+            <a:r>
+              <a:rPr lang="en-US" sz="3400" b="1" dirty="0">
+                <a:solidFill>
+                  <a:srgbClr val="21141A"/>
+                </a:solidFill>
+                <a:latin typeface="IBM Plex Sans Arabic" pitchFamily="34" charset="0"/>
+                <a:ea typeface="IBM Plex Sans Arabic" pitchFamily="34" charset="-122"/>
+                <a:cs typeface="IBM Plex Sans Arabic" pitchFamily="34" charset="-120"/>
+              </a:rPr>
+              <a:t>ما بعد التحدي</a:t>
+            </a:r>
+            <a:endParaRPr lang="en-US" sz="3400" dirty="0"/>
+          </a:p>
+        </p:txBody>
+      </p:sp>
+      <p:sp>
+        <p:nvSpPr>
+          <p:cNvPr id="23" name="Shape 18"/>
+          <p:cNvSpPr/>
+          <p:nvPr/>
+        </p:nvSpPr>
+        <p:spPr>
+          <a:xfrm>
+            <a:off x="8188757" y="2697480"/>
+            <a:ext cx="3545738" cy="1920240"/>
+          </a:xfrm>
+          <a:prstGeom prst="roundRect">
+            <a:avLst>
+              <a:gd name="adj" fmla="val 9524"/>
+            </a:avLst>
+          </a:prstGeom>
+          <a:solidFill>
+            <a:srgbClr val="8E2F3C"/>
+          </a:solidFill>
+          <a:ln/>
+        </p:spPr>
+      </p:sp>
+      <p:pic>
+        <p:nvPicPr>
+          <p:cNvPr id="24" name="Image 3" descr="/tmp/claude-0/-home-claude/750ff410-f4aa-5276-9360-1e19d018b112/scratchpad/c/assets/i-scale-cr.png">    </p:cNvPr>
+          <p:cNvPicPr>
+            <a:picLocks noChangeAspect="1"/>
+          </p:cNvPicPr>
+          <p:nvPr/>
+        </p:nvPicPr>
+        <p:blipFill>
+          <a:blip r:embed="rId4"/>
+          <a:stretch>
+            <a:fillRect/>
+          </a:stretch>
+        </p:blipFill>
+        <p:spPr>
+          <a:xfrm>
+            <a:off x="9618726" y="3017520"/>
+            <a:ext cx="685800" cy="685800"/>
+          </a:xfrm>
+          <a:prstGeom prst="rect">
+            <a:avLst/>
+          </a:prstGeom>
+        </p:spPr>
+      </p:pic>
+      <p:sp>
+        <p:nvSpPr>
+          <p:cNvPr id="25" name="Text 19"/>
+          <p:cNvSpPr txBox="1"/>
+          <p:nvPr/>
+        </p:nvSpPr>
+        <p:spPr>
+          <a:xfrm>
+            <a:off x="8188757" y="3886200"/>
+            <a:ext cx="3545738" cy="457200"/>
+          </a:xfrm>
+          <a:prstGeom prst="rect">
+            <a:avLst/>
+          </a:prstGeom>
+          <a:noFill/>
+          <a:ln/>
+        </p:spPr>
+        <p:txBody>
+          <a:bodyPr wrap="square" lIns="0" tIns="0" rIns="0" bIns="0" rtlCol="0" anchor="t"/>
+          <a:lstStyle/>
+          <a:p>
+            <a:pPr rtl="1" algn="ctr" indent="0" marL="0">
+              <a:buNone/>
+            </a:pPr>
+            <a:r>
+              <a:rPr lang="en-US" sz="2200" b="1" dirty="0">
+                <a:solidFill>
+                  <a:srgbClr val="FBF6EE"/>
+                </a:solidFill>
+                <a:latin typeface="IBM Plex Sans Arabic" pitchFamily="34" charset="0"/>
+                <a:ea typeface="IBM Plex Sans Arabic" pitchFamily="34" charset="-122"/>
+                <a:cs typeface="IBM Plex Sans Arabic" pitchFamily="34" charset="-120"/>
+              </a:rPr>
+              <a:t>مقارنة السحابات</a:t>
+            </a:r>
+            <a:endParaRPr lang="en-US" sz="2200" dirty="0"/>
+          </a:p>
+        </p:txBody>
+      </p:sp>
+      <p:sp>
+        <p:nvSpPr>
+          <p:cNvPr id="26" name="Shape 20"/>
+          <p:cNvSpPr/>
+          <p:nvPr/>
+        </p:nvSpPr>
+        <p:spPr>
+          <a:xfrm>
+            <a:off x="4322978" y="2697480"/>
+            <a:ext cx="3545738" cy="1920240"/>
+          </a:xfrm>
+          <a:prstGeom prst="roundRect">
+            <a:avLst>
+              <a:gd name="adj" fmla="val 9524"/>
+            </a:avLst>
+          </a:prstGeom>
+          <a:solidFill>
+            <a:srgbClr val="8E2F3C"/>
+          </a:solidFill>
+          <a:ln/>
+        </p:spPr>
+      </p:sp>
+      <p:pic>
+        <p:nvPicPr>
+          <p:cNvPr id="27" name="Image 4" descr="/tmp/claude-0/-home-claude/750ff410-f4aa-5276-9360-1e19d018b112/scratchpad/c/assets/i-server-cr.png">    </p:cNvPr>
+          <p:cNvPicPr>
+            <a:picLocks noChangeAspect="1"/>
+          </p:cNvPicPr>
+          <p:nvPr/>
+        </p:nvPicPr>
+        <p:blipFill>
+          <a:blip r:embed="rId5"/>
+          <a:stretch>
+            <a:fillRect/>
+          </a:stretch>
+        </p:blipFill>
+        <p:spPr>
+          <a:xfrm>
+            <a:off x="5752948" y="3017520"/>
+            <a:ext cx="685800" cy="685800"/>
+          </a:xfrm>
+          <a:prstGeom prst="rect">
+            <a:avLst/>
+          </a:prstGeom>
+        </p:spPr>
+      </p:pic>
+      <p:sp>
+        <p:nvSpPr>
+          <p:cNvPr id="28" name="Text 21"/>
+          <p:cNvSpPr txBox="1"/>
+          <p:nvPr/>
+        </p:nvSpPr>
+        <p:spPr>
+          <a:xfrm>
+            <a:off x="4322978" y="3886200"/>
+            <a:ext cx="3545738" cy="457200"/>
+          </a:xfrm>
+          <a:prstGeom prst="rect">
+            <a:avLst/>
+          </a:prstGeom>
+          <a:noFill/>
+          <a:ln/>
+        </p:spPr>
+        <p:txBody>
+          <a:bodyPr wrap="square" lIns="0" tIns="0" rIns="0" bIns="0" rtlCol="0" anchor="t"/>
+          <a:lstStyle/>
+          <a:p>
+            <a:pPr rtl="1" algn="ctr" indent="0" marL="0">
+              <a:buNone/>
+            </a:pPr>
+            <a:r>
+              <a:rPr lang="en-US" sz="2200" b="1" dirty="0">
+                <a:solidFill>
+                  <a:srgbClr val="FBF6EE"/>
+                </a:solidFill>
+                <a:latin typeface="IBM Plex Sans Arabic" pitchFamily="34" charset="0"/>
+                <a:ea typeface="IBM Plex Sans Arabic" pitchFamily="34" charset="-122"/>
+                <a:cs typeface="IBM Plex Sans Arabic" pitchFamily="34" charset="-120"/>
+              </a:rPr>
+              <a:t>البنية الهجينة</a:t>
+            </a:r>
+            <a:endParaRPr lang="en-US" sz="2200" dirty="0"/>
+          </a:p>
+        </p:txBody>
+      </p:sp>
+      <p:sp>
+        <p:nvSpPr>
+          <p:cNvPr id="29" name="Shape 22"/>
+          <p:cNvSpPr/>
+          <p:nvPr/>
+        </p:nvSpPr>
+        <p:spPr>
+          <a:xfrm>
+            <a:off x="457200" y="2697480"/>
+            <a:ext cx="3545738" cy="1920240"/>
+          </a:xfrm>
+          <a:prstGeom prst="roundRect">
+            <a:avLst>
+              <a:gd name="adj" fmla="val 9524"/>
+            </a:avLst>
+          </a:prstGeom>
+          <a:solidFill>
+            <a:srgbClr val="8E2F3C"/>
+          </a:solidFill>
+          <a:ln/>
+        </p:spPr>
+      </p:sp>
+      <p:pic>
+        <p:nvPicPr>
+          <p:cNvPr id="30" name="Image 5" descr="/tmp/claude-0/-home-claude/750ff410-f4aa-5276-9360-1e19d018b112/scratchpad/c/assets/i-bell-cr.png">    </p:cNvPr>
+          <p:cNvPicPr>
+            <a:picLocks noChangeAspect="1"/>
+          </p:cNvPicPr>
+          <p:nvPr/>
+        </p:nvPicPr>
+        <p:blipFill>
+          <a:blip r:embed="rId6"/>
+          <a:stretch>
+            <a:fillRect/>
+          </a:stretch>
+        </p:blipFill>
+        <p:spPr>
+          <a:xfrm>
+            <a:off x="1887169" y="3017520"/>
+            <a:ext cx="685800" cy="685800"/>
+          </a:xfrm>
+          <a:prstGeom prst="rect">
+            <a:avLst/>
+          </a:prstGeom>
+        </p:spPr>
+      </p:pic>
+      <p:sp>
+        <p:nvSpPr>
+          <p:cNvPr id="31" name="Text 23"/>
+          <p:cNvSpPr txBox="1"/>
+          <p:nvPr/>
+        </p:nvSpPr>
+        <p:spPr>
+          <a:xfrm>
+            <a:off x="457200" y="3886200"/>
+            <a:ext cx="3545738" cy="457200"/>
+          </a:xfrm>
+          <a:prstGeom prst="rect">
+            <a:avLst/>
+          </a:prstGeom>
+          <a:noFill/>
+          <a:ln/>
+        </p:spPr>
+        <p:txBody>
+          <a:bodyPr wrap="square" lIns="0" tIns="0" rIns="0" bIns="0" rtlCol="0" anchor="t"/>
+          <a:lstStyle/>
+          <a:p>
+            <a:pPr rtl="1" algn="ctr" indent="0" marL="0">
+              <a:buNone/>
+            </a:pPr>
+            <a:r>
+              <a:rPr lang="en-US" sz="2200" b="1" dirty="0">
+                <a:solidFill>
+                  <a:srgbClr val="FBF6EE"/>
+                </a:solidFill>
+                <a:latin typeface="IBM Plex Sans Arabic" pitchFamily="34" charset="0"/>
+                <a:ea typeface="IBM Plex Sans Arabic" pitchFamily="34" charset="-122"/>
+                <a:cs typeface="IBM Plex Sans Arabic" pitchFamily="34" charset="-120"/>
+              </a:rPr>
+              <a:t>إنذار مبكر 24/7</a:t>
+            </a:r>
+            <a:endParaRPr lang="en-US" sz="2200" dirty="0"/>
+          </a:p>
+        </p:txBody>
+      </p:sp>
+      <p:sp>
+        <p:nvSpPr>
+          <p:cNvPr id="32" name="Text 24"/>
+          <p:cNvSpPr txBox="1"/>
+          <p:nvPr/>
+        </p:nvSpPr>
+        <p:spPr>
+          <a:xfrm>
+            <a:off x="457200" y="5029200"/>
+            <a:ext cx="11277295" cy="457200"/>
+          </a:xfrm>
+          <a:prstGeom prst="rect">
+            <a:avLst/>
+          </a:prstGeom>
+          <a:noFill/>
+          <a:ln/>
+        </p:spPr>
+        <p:txBody>
+          <a:bodyPr wrap="square" lIns="0" tIns="0" rIns="0" bIns="0" rtlCol="0" anchor="ctr"/>
+          <a:lstStyle/>
+          <a:p>
+            <a:pPr rtl="1" algn="ctr" indent="0" marL="0">
+              <a:buNone/>
+            </a:pPr>
+            <a:r>
+              <a:rPr lang="en-US" sz="1800" b="1" dirty="0">
+                <a:solidFill>
+                  <a:srgbClr val="21141A"/>
+                </a:solidFill>
+                <a:latin typeface="IBM Plex Sans Arabic" pitchFamily="34" charset="0"/>
+                <a:ea typeface="IBM Plex Sans Arabic" pitchFamily="34" charset="-122"/>
+                <a:cs typeface="IBM Plex Sans Arabic" pitchFamily="34" charset="-120"/>
+              </a:rPr>
+              <a:t>نحتاج: توجيه خبراء · شريك سحابي محلي · 10 شركات للتجربة</a:t>
+            </a:r>
+            <a:endParaRPr lang="en-US" sz="1800" dirty="0"/>
+          </a:p>
+        </p:txBody>
+      </p:sp>
+    </p:spTree>
+  </p:cSld>
+  <p:clrMapOvr>
+    <a:masterClrMapping/>
+  </p:clrMapOvr>
+</p:sld>
+</file>
+
+<file path=ppt/slides/slide11.xml><?xml version="1.0" encoding="utf-8"?>
+<p:sld xmlns:a="http://schemas.openxmlformats.org/drawingml/2006/main" xmlns:r="http://schemas.openxmlformats.org/officeDocument/2006/relationships" xmlns:p="http://schemas.openxmlformats.org/presentationml/2006/main">
+  <p:cSld name="Slide 11">
+    <p:bg>
+      <p:bgPr>
+        <a:solidFill>
+          <a:srgbClr val="F8F3EF"/>
+        </a:solidFill>
+      </p:bgPr>
+    </p:bg>
+    <p:spTree>
+      <p:nvGrpSpPr>
+        <p:cNvPr id="1" name=""/>
+        <p:cNvGrpSpPr/>
+        <p:nvPr/>
+      </p:nvGrpSpPr>
+      <p:grpSpPr>
+        <a:xfrm>
+          <a:off x="0" y="0"/>
+          <a:ext cx="0" cy="0"/>
+          <a:chOff x="0" y="0"/>
+          <a:chExt cx="0" cy="0"/>
+        </a:xfrm>
+      </p:grpSpPr>
+      <p:sp>
+        <p:nvSpPr>
+          <p:cNvPr id="2" name="Shape 0"/>
+          <p:cNvSpPr/>
+          <p:nvPr/>
+        </p:nvSpPr>
+        <p:spPr>
+          <a:xfrm>
+            <a:off x="3017520" y="384048"/>
+            <a:ext cx="100584" cy="100584"/>
+          </a:xfrm>
+          <a:prstGeom prst="rect">
+            <a:avLst/>
+          </a:prstGeom>
+          <a:solidFill>
+            <a:srgbClr val="D48A93"/>
+          </a:solidFill>
+          <a:ln/>
+        </p:spPr>
+      </p:sp>
+      <p:sp>
+        <p:nvSpPr>
+          <p:cNvPr id="3" name="Shape 1"/>
+          <p:cNvSpPr/>
+          <p:nvPr/>
+        </p:nvSpPr>
+        <p:spPr>
+          <a:xfrm>
+            <a:off x="3429000" y="658368"/>
+            <a:ext cx="64008" cy="64008"/>
+          </a:xfrm>
+          <a:prstGeom prst="rect">
+            <a:avLst/>
+          </a:prstGeom>
+          <a:solidFill>
+            <a:srgbClr val="C9A46E"/>
+          </a:solidFill>
+          <a:ln/>
+        </p:spPr>
+      </p:sp>
+      <p:sp>
+        <p:nvSpPr>
+          <p:cNvPr id="4" name="Shape 2"/>
+          <p:cNvSpPr/>
+          <p:nvPr/>
+        </p:nvSpPr>
+        <p:spPr>
+          <a:xfrm>
+            <a:off x="4206240" y="329184"/>
+            <a:ext cx="82296" cy="82296"/>
+          </a:xfrm>
+          <a:prstGeom prst="rect">
+            <a:avLst/>
+          </a:prstGeom>
+          <a:solidFill>
+            <a:srgbClr val="7FB27A"/>
+          </a:solidFill>
+          <a:ln/>
+        </p:spPr>
+      </p:sp>
+      <p:sp>
+        <p:nvSpPr>
+          <p:cNvPr id="5" name="Shape 3"/>
+          <p:cNvSpPr/>
+          <p:nvPr/>
+        </p:nvSpPr>
+        <p:spPr>
+          <a:xfrm>
+            <a:off x="4937760" y="603504"/>
+            <a:ext cx="54864" cy="54864"/>
+          </a:xfrm>
+          <a:prstGeom prst="rect">
+            <a:avLst/>
+          </a:prstGeom>
+          <a:solidFill>
+            <a:srgbClr val="D48A93"/>
+          </a:solidFill>
+          <a:ln/>
+        </p:spPr>
+      </p:sp>
+      <p:sp>
+        <p:nvSpPr>
+          <p:cNvPr id="6" name="Shape 4"/>
+          <p:cNvSpPr/>
+          <p:nvPr/>
+        </p:nvSpPr>
+        <p:spPr>
+          <a:xfrm>
+            <a:off x="7223760" y="365760"/>
+            <a:ext cx="73152" cy="73152"/>
+          </a:xfrm>
+          <a:prstGeom prst="rect">
+            <a:avLst/>
+          </a:prstGeom>
+          <a:solidFill>
+            <a:srgbClr val="C9A46E"/>
+          </a:solidFill>
+          <a:ln/>
+        </p:spPr>
+      </p:sp>
+      <p:sp>
+        <p:nvSpPr>
+          <p:cNvPr id="7" name="Shape 5"/>
+          <p:cNvSpPr/>
+          <p:nvPr/>
+        </p:nvSpPr>
+        <p:spPr>
+          <a:xfrm>
+            <a:off x="7955280" y="640080"/>
+            <a:ext cx="100584" cy="100584"/>
+          </a:xfrm>
+          <a:prstGeom prst="rect">
+            <a:avLst/>
+          </a:prstGeom>
+          <a:solidFill>
+            <a:srgbClr val="D48A93"/>
+          </a:solidFill>
+          <a:ln/>
+        </p:spPr>
+      </p:sp>
+      <p:sp>
+        <p:nvSpPr>
+          <p:cNvPr id="8" name="Shape 6"/>
+          <p:cNvSpPr/>
+          <p:nvPr/>
+        </p:nvSpPr>
+        <p:spPr>
+          <a:xfrm>
+            <a:off x="8686800" y="329184"/>
+            <a:ext cx="54864" cy="54864"/>
+          </a:xfrm>
+          <a:prstGeom prst="rect">
+            <a:avLst/>
+          </a:prstGeom>
+          <a:solidFill>
+            <a:srgbClr val="7FB27A"/>
+          </a:solidFill>
+          <a:ln/>
+        </p:spPr>
+      </p:sp>
+      <p:sp>
+        <p:nvSpPr>
+          <p:cNvPr id="9" name="Shape 7"/>
+          <p:cNvSpPr/>
+          <p:nvPr/>
+        </p:nvSpPr>
+        <p:spPr>
+          <a:xfrm>
+            <a:off x="9372600" y="566928"/>
+            <a:ext cx="73152" cy="73152"/>
+          </a:xfrm>
+          <a:prstGeom prst="rect">
+            <a:avLst/>
+          </a:prstGeom>
+          <a:solidFill>
+            <a:srgbClr val="E3D5CC"/>
+          </a:solidFill>
+          <a:ln/>
+        </p:spPr>
+      </p:sp>
+      <p:sp>
+        <p:nvSpPr>
+          <p:cNvPr id="10" name="Shape 8"/>
+          <p:cNvSpPr/>
+          <p:nvPr/>
+        </p:nvSpPr>
+        <p:spPr>
+          <a:xfrm>
+            <a:off x="2194560" y="6473952"/>
+            <a:ext cx="64008" cy="64008"/>
+          </a:xfrm>
+          <a:prstGeom prst="rect">
+            <a:avLst/>
+          </a:prstGeom>
+          <a:solidFill>
+            <a:srgbClr val="C9A46E"/>
+          </a:solidFill>
+          <a:ln/>
+        </p:spPr>
+      </p:sp>
+      <p:sp>
+        <p:nvSpPr>
+          <p:cNvPr id="11" name="Shape 9"/>
+          <p:cNvSpPr/>
+          <p:nvPr/>
+        </p:nvSpPr>
+        <p:spPr>
+          <a:xfrm>
+            <a:off x="4480560" y="6547104"/>
+            <a:ext cx="45720" cy="45720"/>
+          </a:xfrm>
+          <a:prstGeom prst="rect">
+            <a:avLst/>
+          </a:prstGeom>
+          <a:solidFill>
+            <a:srgbClr val="D48A93"/>
+          </a:solidFill>
+          <a:ln/>
+        </p:spPr>
+      </p:sp>
+      <p:sp>
+        <p:nvSpPr>
+          <p:cNvPr id="12" name="Shape 10"/>
+          <p:cNvSpPr/>
+          <p:nvPr/>
+        </p:nvSpPr>
+        <p:spPr>
+          <a:xfrm>
+            <a:off x="7589520" y="6492240"/>
+            <a:ext cx="54864" cy="54864"/>
+          </a:xfrm>
+          <a:prstGeom prst="rect">
+            <a:avLst/>
+          </a:prstGeom>
+          <a:solidFill>
+            <a:srgbClr val="7FB27A"/>
+          </a:solidFill>
+          <a:ln/>
+        </p:spPr>
+      </p:sp>
+      <p:sp>
+        <p:nvSpPr>
+          <p:cNvPr id="13" name="Shape 11"/>
+          <p:cNvSpPr/>
+          <p:nvPr/>
+        </p:nvSpPr>
+        <p:spPr>
+          <a:xfrm>
+            <a:off x="9692640" y="6528816"/>
+            <a:ext cx="73152" cy="73152"/>
+          </a:xfrm>
+          <a:prstGeom prst="rect">
+            <a:avLst/>
+          </a:prstGeom>
+          <a:solidFill>
+            <a:srgbClr val="D48A93"/>
+          </a:solidFill>
+          <a:ln/>
+        </p:spPr>
+      </p:sp>
+      <p:pic>
+        <p:nvPicPr>
+          <p:cNvPr id="14" name="Image 0" descr="/tmp/claude-0/-home-claude/750ff410-f4aa-5276-9360-1e19d018b112/scratchpad/c/assets/ct-icon.png">    </p:cNvPr>
+          <p:cNvPicPr>
+            <a:picLocks noChangeAspect="1"/>
+          </p:cNvPicPr>
+          <p:nvPr/>
+        </p:nvPicPr>
+        <p:blipFill>
+          <a:blip r:embed="rId1"/>
+          <a:stretch>
+            <a:fillRect/>
+          </a:stretch>
+        </p:blipFill>
+        <p:spPr>
+          <a:xfrm>
+            <a:off x="457200" y="329184"/>
+            <a:ext cx="384048" cy="384048"/>
+          </a:xfrm>
+          <a:prstGeom prst="rect">
+            <a:avLst/>
+          </a:prstGeom>
+        </p:spPr>
+      </p:pic>
+      <p:sp>
+        <p:nvSpPr>
+          <p:cNvPr id="15" name="Text 12"/>
+          <p:cNvSpPr txBox="1"/>
+          <p:nvPr/>
+        </p:nvSpPr>
+        <p:spPr>
+          <a:xfrm>
+            <a:off x="932688" y="320040"/>
+            <a:ext cx="1828800" cy="402336"/>
+          </a:xfrm>
+          <a:prstGeom prst="rect">
+            <a:avLst/>
+          </a:prstGeom>
+          <a:noFill/>
+          <a:ln/>
+        </p:spPr>
+        <p:txBody>
+          <a:bodyPr wrap="square" lIns="0" tIns="0" rIns="0" bIns="0" rtlCol="0" anchor="ctr"/>
+          <a:lstStyle/>
+          <a:p>
+            <a:pPr algn="l" indent="0" marL="0">
+              <a:buNone/>
+            </a:pPr>
+            <a:r>
+              <a:rPr lang="en-US" sz="1800" b="1" dirty="0">
+                <a:solidFill>
+                  <a:srgbClr val="21141A"/>
+                </a:solidFill>
+                <a:latin typeface="IBM Plex Sans Arabic" pitchFamily="34" charset="0"/>
+                <a:ea typeface="IBM Plex Sans Arabic" pitchFamily="34" charset="-122"/>
+                <a:cs typeface="IBM Plex Sans Arabic" pitchFamily="34" charset="-120"/>
+              </a:rPr>
+              <a:t>CloudTrim</a:t>
+            </a:r>
+            <a:endParaRPr lang="en-US" sz="1800" dirty="0"/>
+          </a:p>
+        </p:txBody>
+      </p:sp>
+      <p:pic>
+        <p:nvPicPr>
+          <p:cNvPr id="16" name="Image 1" descr="/tmp/claude-0/-home-claude/750ff410-f4aa-5276-9360-1e19d018b112/scratchpad/c/assets/venturex-ink.png">    </p:cNvPr>
+          <p:cNvPicPr>
+            <a:picLocks noChangeAspect="1"/>
+          </p:cNvPicPr>
+          <p:nvPr/>
+        </p:nvPicPr>
+        <p:blipFill>
+          <a:blip r:embed="rId2"/>
+          <a:stretch>
+            <a:fillRect/>
+          </a:stretch>
+        </p:blipFill>
+        <p:spPr>
+          <a:xfrm>
+            <a:off x="10490566" y="256032"/>
+            <a:ext cx="1243929" cy="548640"/>
+          </a:xfrm>
+          <a:prstGeom prst="rect">
+            <a:avLst/>
+          </a:prstGeom>
+        </p:spPr>
+      </p:pic>
+      <p:sp>
+        <p:nvSpPr>
+          <p:cNvPr id="17" name="Shape 13"/>
+          <p:cNvSpPr/>
+          <p:nvPr/>
+        </p:nvSpPr>
+        <p:spPr>
+          <a:xfrm>
+            <a:off x="10600639" y="987552"/>
+            <a:ext cx="1133856" cy="384048"/>
+          </a:xfrm>
+          <a:prstGeom prst="roundRect">
+            <a:avLst>
+              <a:gd name="adj" fmla="val 50000"/>
+            </a:avLst>
+          </a:prstGeom>
+          <a:solidFill>
+            <a:srgbClr val="8E2F3C"/>
+          </a:solidFill>
+          <a:ln/>
+        </p:spPr>
+      </p:sp>
+      <p:sp>
+        <p:nvSpPr>
+          <p:cNvPr id="18" name="Text 14"/>
+          <p:cNvSpPr txBox="1"/>
+          <p:nvPr/>
+        </p:nvSpPr>
+        <p:spPr>
+          <a:xfrm>
+            <a:off x="10600639" y="987552"/>
+            <a:ext cx="1133856" cy="384048"/>
+          </a:xfrm>
+          <a:prstGeom prst="rect">
+            <a:avLst/>
+          </a:prstGeom>
+          <a:noFill/>
+          <a:ln/>
+        </p:spPr>
+        <p:txBody>
+          <a:bodyPr wrap="square" lIns="0" tIns="0" rIns="0" bIns="0" rtlCol="0" anchor="ctr"/>
+          <a:lstStyle/>
+          <a:p>
+            <a:pPr rtl="1" algn="ctr" indent="0" marL="0">
+              <a:buNone/>
+            </a:pPr>
+            <a:r>
+              <a:rPr lang="en-US" sz="1300" b="1" dirty="0">
+                <a:solidFill>
+                  <a:srgbClr val="FBF6EE"/>
+                </a:solidFill>
+                <a:latin typeface="IBM Plex Sans Arabic" pitchFamily="34" charset="0"/>
+                <a:ea typeface="IBM Plex Sans Arabic" pitchFamily="34" charset="-122"/>
+                <a:cs typeface="IBM Plex Sans Arabic" pitchFamily="34" charset="-120"/>
+              </a:rPr>
+              <a:t>الختام</a:t>
+            </a:r>
+            <a:endParaRPr lang="en-US" sz="1300" dirty="0"/>
+          </a:p>
+        </p:txBody>
+      </p:sp>
+      <p:pic>
+        <p:nvPicPr>
+          <p:cNvPr id="19" name="Image 2" descr="/tmp/claude-0/-home-claude/750ff410-f4aa-5276-9360-1e19d018b112/scratchpad/c/assets/organizers-ink.png">    </p:cNvPr>
+          <p:cNvPicPr>
+            <a:picLocks noChangeAspect="1"/>
+          </p:cNvPicPr>
+          <p:nvPr/>
+        </p:nvPicPr>
+        <p:blipFill>
+          <a:blip r:embed="rId3"/>
+          <a:stretch>
+            <a:fillRect/>
+          </a:stretch>
+        </p:blipFill>
+        <p:spPr>
+          <a:xfrm>
+            <a:off x="457200" y="6309360"/>
+            <a:ext cx="848839" cy="365760"/>
+          </a:xfrm>
+          <a:prstGeom prst="rect">
+            <a:avLst/>
+          </a:prstGeom>
+        </p:spPr>
+      </p:pic>
+      <p:sp>
+        <p:nvSpPr>
+          <p:cNvPr id="20" name="Text 15"/>
+          <p:cNvSpPr txBox="1"/>
+          <p:nvPr/>
+        </p:nvSpPr>
+        <p:spPr>
+          <a:xfrm>
+            <a:off x="4270248" y="6382512"/>
+            <a:ext cx="3657600" cy="274320"/>
+          </a:xfrm>
+          <a:prstGeom prst="rect">
+            <a:avLst/>
+          </a:prstGeom>
+          <a:noFill/>
+          <a:ln/>
+        </p:spPr>
+        <p:txBody>
+          <a:bodyPr wrap="square" lIns="0" tIns="0" rIns="0" bIns="0" rtlCol="0" anchor="t"/>
+          <a:lstStyle/>
+          <a:p>
+            <a:pPr rtl="1" algn="ctr" indent="0" marL="0">
+              <a:buNone/>
+            </a:pPr>
+            <a:r>
+              <a:rPr lang="en-US" sz="1000" dirty="0">
+                <a:solidFill>
+                  <a:srgbClr val="7F6C72"/>
+                </a:solidFill>
+                <a:latin typeface="IBM Plex Sans Arabic" pitchFamily="34" charset="0"/>
+                <a:ea typeface="IBM Plex Sans Arabic" pitchFamily="34" charset="-122"/>
+                <a:cs typeface="IBM Plex Sans Arabic" pitchFamily="34" charset="-120"/>
+              </a:rPr>
+              <a:t>VentureX 2026 · فريق SSB</a:t>
+            </a:r>
+            <a:endParaRPr lang="en-US" sz="1000" dirty="0"/>
+          </a:p>
+        </p:txBody>
+      </p:sp>
+      <p:sp>
+        <p:nvSpPr>
+          <p:cNvPr id="21" name="Text 16"/>
+          <p:cNvSpPr txBox="1"/>
+          <p:nvPr/>
+        </p:nvSpPr>
+        <p:spPr>
+          <a:xfrm>
+            <a:off x="11185855" y="6382512"/>
+            <a:ext cx="548640" cy="274320"/>
+          </a:xfrm>
+          <a:prstGeom prst="rect">
+            <a:avLst/>
+          </a:prstGeom>
+          <a:noFill/>
+          <a:ln/>
+        </p:spPr>
+        <p:txBody>
+          <a:bodyPr wrap="square" lIns="0" tIns="0" rIns="0" bIns="0" rtlCol="0" anchor="t"/>
+          <a:lstStyle/>
+          <a:p>
+            <a:pPr algn="r" indent="0" marL="0">
+              <a:buNone/>
+            </a:pPr>
+            <a:r>
+              <a:rPr lang="en-US" sz="1100" b="1" dirty="0">
+                <a:solidFill>
+                  <a:srgbClr val="7F6C72"/>
+                </a:solidFill>
+                <a:latin typeface="IBM Plex Sans Arabic" pitchFamily="34" charset="0"/>
+                <a:ea typeface="IBM Plex Sans Arabic" pitchFamily="34" charset="-122"/>
+                <a:cs typeface="IBM Plex Sans Arabic" pitchFamily="34" charset="-120"/>
+              </a:rPr>
+              <a:t>11</a:t>
             </a:r>
             <a:endParaRPr lang="en-US" sz="1100" dirty="0"/>
           </a:p>
@@ -6751,8 +7695,8 @@
         </p:nvSpPr>
         <p:spPr>
           <a:xfrm>
-            <a:off x="9654235" y="987552"/>
-            <a:ext cx="2080260" cy="384048"/>
+            <a:off x="10285171" y="987552"/>
+            <a:ext cx="1449324" cy="384048"/>
           </a:xfrm>
           <a:prstGeom prst="roundRect">
             <a:avLst>
@@ -6773,8 +7717,8 @@
         </p:nvSpPr>
         <p:spPr>
           <a:xfrm>
-            <a:off x="9654235" y="987552"/>
-            <a:ext cx="2080260" cy="384048"/>
+            <a:off x="10285171" y="987552"/>
+            <a:ext cx="1449324" cy="384048"/>
           </a:xfrm>
           <a:prstGeom prst="rect">
             <a:avLst/>
@@ -6798,7 +7742,7 @@
                 <a:ea typeface="IBM Plex Sans Arabic" pitchFamily="34" charset="-122"/>
                 <a:cs typeface="IBM Plex Sans Arabic" pitchFamily="34" charset="-120"/>
               </a:rPr>
-              <a:t>الفئة المستهدفة</a:t>
+              <a:t>المنافسون</a:t>
             </a:r>
             <a:endParaRPr lang="en-US" sz="1300" dirty="0"/>
           </a:p>
@@ -6939,7 +7883,7 @@
                 <a:ea typeface="IBM Plex Sans Arabic" pitchFamily="34" charset="-122"/>
                 <a:cs typeface="IBM Plex Sans Arabic" pitchFamily="34" charset="-120"/>
               </a:rPr>
-              <a:t>شركات سعودية من 50 إلى 250 موظفاً</a:t>
+              <a:t>CloudTrim مقابل أدوات المزودين</a:t>
             </a:r>
             <a:endParaRPr lang="en-US" sz="3400" dirty="0"/>
           </a:p>
@@ -6947,62 +7891,431 @@
       </p:sp>
       <p:sp>
         <p:nvSpPr>
-          <p:cNvPr id="23" name="Text 18"/>
-          <p:cNvSpPr txBox="1"/>
-          <p:nvPr/>
-        </p:nvSpPr>
-        <p:spPr>
-          <a:xfrm>
-            <a:off x="457200" y="2331720"/>
-            <a:ext cx="11277295" cy="411480"/>
-          </a:xfrm>
-          <a:prstGeom prst="rect">
-            <a:avLst/>
-          </a:prstGeom>
-          <a:noFill/>
-          <a:ln/>
-        </p:spPr>
-        <p:txBody>
-          <a:bodyPr wrap="square" lIns="0" tIns="0" rIns="0" bIns="0" rtlCol="0" anchor="t"/>
-          <a:lstStyle/>
-          <a:p>
-            <a:pPr rtl="1" algn="r" indent="0" marL="0">
-              <a:buNone/>
-            </a:pPr>
-            <a:r>
-              <a:rPr lang="en-US" sz="1800" dirty="0">
-                <a:solidFill>
-                  <a:srgbClr val="7F6C72"/>
-                </a:solidFill>
-                <a:latin typeface="IBM Plex Sans Arabic" pitchFamily="34" charset="0"/>
-                <a:ea typeface="IBM Plex Sans Arabic" pitchFamily="34" charset="-122"/>
-                <a:cs typeface="IBM Plex Sans Arabic" pitchFamily="34" charset="-120"/>
-              </a:rPr>
-              <a:t>بلا فريق FinOps، وفاتورتها عشرات الآلاف شهرياً</a:t>
-            </a:r>
-            <a:endParaRPr lang="en-US" sz="1800" dirty="0"/>
-          </a:p>
-        </p:txBody>
-      </p:sp>
-      <p:sp>
-        <p:nvSpPr>
-          <p:cNvPr id="24" name="Shape 19"/>
-          <p:cNvSpPr/>
-          <p:nvPr/>
-        </p:nvSpPr>
-        <p:spPr>
-          <a:xfrm>
-            <a:off x="8188757" y="3063240"/>
-            <a:ext cx="3545738" cy="2377440"/>
+          <p:cNvPr id="23" name="Shape 18"/>
+          <p:cNvSpPr/>
+          <p:nvPr/>
+        </p:nvSpPr>
+        <p:spPr>
+          <a:xfrm>
+            <a:off x="6601968" y="2468880"/>
+            <a:ext cx="1371600" cy="3337560"/>
           </a:xfrm>
           <a:prstGeom prst="roundRect">
             <a:avLst>
-              <a:gd name="adj" fmla="val 7692"/>
+              <a:gd name="adj" fmla="val 9333"/>
             </a:avLst>
           </a:prstGeom>
           <a:solidFill>
-            <a:srgbClr val="FFFBF8"/>
-          </a:solidFill>
+            <a:srgbClr val="F1E4DF"/>
+          </a:solidFill>
+          <a:ln/>
+        </p:spPr>
+      </p:sp>
+      <p:sp>
+        <p:nvSpPr>
+          <p:cNvPr id="24" name="Text 19"/>
+          <p:cNvSpPr txBox="1"/>
+          <p:nvPr/>
+        </p:nvSpPr>
+        <p:spPr>
+          <a:xfrm>
+            <a:off x="6528816" y="2514600"/>
+            <a:ext cx="1517904" cy="594360"/>
+          </a:xfrm>
+          <a:prstGeom prst="rect">
+            <a:avLst/>
+          </a:prstGeom>
+          <a:noFill/>
+          <a:ln/>
+        </p:spPr>
+        <p:txBody>
+          <a:bodyPr wrap="square" lIns="0" tIns="0" rIns="0" bIns="0" rtlCol="0" anchor="ctr"/>
+          <a:lstStyle/>
+          <a:p>
+            <a:pPr algn="ctr" indent="0" marL="0">
+              <a:buNone/>
+            </a:pPr>
+            <a:r>
+              <a:rPr lang="en-US" sz="1600" b="1" dirty="0">
+                <a:solidFill>
+                  <a:srgbClr val="8E2F3C"/>
+                </a:solidFill>
+                <a:latin typeface="IBM Plex Sans Arabic" pitchFamily="34" charset="0"/>
+                <a:ea typeface="IBM Plex Sans Arabic" pitchFamily="34" charset="-122"/>
+                <a:cs typeface="IBM Plex Sans Arabic" pitchFamily="34" charset="-120"/>
+              </a:rPr>
+              <a:t>CloudTrim</a:t>
+            </a:r>
+            <a:endParaRPr lang="en-US" sz="1600" dirty="0"/>
+          </a:p>
+        </p:txBody>
+      </p:sp>
+      <p:sp>
+        <p:nvSpPr>
+          <p:cNvPr id="25" name="Text 20"/>
+          <p:cNvSpPr txBox="1"/>
+          <p:nvPr/>
+        </p:nvSpPr>
+        <p:spPr>
+          <a:xfrm>
+            <a:off x="5010912" y="2532888"/>
+            <a:ext cx="1517904" cy="292608"/>
+          </a:xfrm>
+          <a:prstGeom prst="rect">
+            <a:avLst/>
+          </a:prstGeom>
+          <a:noFill/>
+          <a:ln/>
+        </p:spPr>
+        <p:txBody>
+          <a:bodyPr wrap="square" lIns="0" tIns="0" rIns="0" bIns="0" rtlCol="0" anchor="ctr"/>
+          <a:lstStyle/>
+          <a:p>
+            <a:pPr algn="ctr" indent="0" marL="0">
+              <a:buNone/>
+            </a:pPr>
+            <a:r>
+              <a:rPr lang="en-US" sz="1300" b="1" dirty="0">
+                <a:solidFill>
+                  <a:srgbClr val="21141A"/>
+                </a:solidFill>
+                <a:latin typeface="IBM Plex Sans Arabic" pitchFamily="34" charset="0"/>
+                <a:ea typeface="IBM Plex Sans Arabic" pitchFamily="34" charset="-122"/>
+                <a:cs typeface="IBM Plex Sans Arabic" pitchFamily="34" charset="-120"/>
+              </a:rPr>
+              <a:t>AWS</a:t>
+            </a:r>
+            <a:endParaRPr lang="en-US" sz="1300" dirty="0"/>
+          </a:p>
+        </p:txBody>
+      </p:sp>
+      <p:sp>
+        <p:nvSpPr>
+          <p:cNvPr id="26" name="Text 21"/>
+          <p:cNvSpPr txBox="1"/>
+          <p:nvPr/>
+        </p:nvSpPr>
+        <p:spPr>
+          <a:xfrm>
+            <a:off x="5010912" y="2825496"/>
+            <a:ext cx="1517904" cy="256032"/>
+          </a:xfrm>
+          <a:prstGeom prst="rect">
+            <a:avLst/>
+          </a:prstGeom>
+          <a:noFill/>
+          <a:ln/>
+        </p:spPr>
+        <p:txBody>
+          <a:bodyPr wrap="square" lIns="0" tIns="0" rIns="0" bIns="0" rtlCol="0" anchor="ctr"/>
+          <a:lstStyle/>
+          <a:p>
+            <a:pPr algn="ctr" indent="0" marL="0">
+              <a:buNone/>
+            </a:pPr>
+            <a:r>
+              <a:rPr lang="en-US" sz="1050" dirty="0">
+                <a:solidFill>
+                  <a:srgbClr val="7F6C72"/>
+                </a:solidFill>
+                <a:latin typeface="IBM Plex Sans Arabic" pitchFamily="34" charset="0"/>
+                <a:ea typeface="IBM Plex Sans Arabic" pitchFamily="34" charset="-122"/>
+                <a:cs typeface="IBM Plex Sans Arabic" pitchFamily="34" charset="-120"/>
+              </a:rPr>
+              <a:t>Cost Management</a:t>
+            </a:r>
+            <a:endParaRPr lang="en-US" sz="1050" dirty="0"/>
+          </a:p>
+        </p:txBody>
+      </p:sp>
+      <p:sp>
+        <p:nvSpPr>
+          <p:cNvPr id="27" name="Text 22"/>
+          <p:cNvSpPr txBox="1"/>
+          <p:nvPr/>
+        </p:nvSpPr>
+        <p:spPr>
+          <a:xfrm>
+            <a:off x="3493008" y="2532888"/>
+            <a:ext cx="1517904" cy="292608"/>
+          </a:xfrm>
+          <a:prstGeom prst="rect">
+            <a:avLst/>
+          </a:prstGeom>
+          <a:noFill/>
+          <a:ln/>
+        </p:spPr>
+        <p:txBody>
+          <a:bodyPr wrap="square" lIns="0" tIns="0" rIns="0" bIns="0" rtlCol="0" anchor="ctr"/>
+          <a:lstStyle/>
+          <a:p>
+            <a:pPr algn="ctr" indent="0" marL="0">
+              <a:buNone/>
+            </a:pPr>
+            <a:r>
+              <a:rPr lang="en-US" sz="1300" b="1" dirty="0">
+                <a:solidFill>
+                  <a:srgbClr val="21141A"/>
+                </a:solidFill>
+                <a:latin typeface="IBM Plex Sans Arabic" pitchFamily="34" charset="0"/>
+                <a:ea typeface="IBM Plex Sans Arabic" pitchFamily="34" charset="-122"/>
+                <a:cs typeface="IBM Plex Sans Arabic" pitchFamily="34" charset="-120"/>
+              </a:rPr>
+              <a:t>Google Cloud</a:t>
+            </a:r>
+            <a:endParaRPr lang="en-US" sz="1300" dirty="0"/>
+          </a:p>
+        </p:txBody>
+      </p:sp>
+      <p:sp>
+        <p:nvSpPr>
+          <p:cNvPr id="28" name="Text 23"/>
+          <p:cNvSpPr txBox="1"/>
+          <p:nvPr/>
+        </p:nvSpPr>
+        <p:spPr>
+          <a:xfrm>
+            <a:off x="3493008" y="2825496"/>
+            <a:ext cx="1517904" cy="256032"/>
+          </a:xfrm>
+          <a:prstGeom prst="rect">
+            <a:avLst/>
+          </a:prstGeom>
+          <a:noFill/>
+          <a:ln/>
+        </p:spPr>
+        <p:txBody>
+          <a:bodyPr wrap="square" lIns="0" tIns="0" rIns="0" bIns="0" rtlCol="0" anchor="ctr"/>
+          <a:lstStyle/>
+          <a:p>
+            <a:pPr algn="ctr" indent="0" marL="0">
+              <a:buNone/>
+            </a:pPr>
+            <a:r>
+              <a:rPr lang="en-US" sz="1050" dirty="0">
+                <a:solidFill>
+                  <a:srgbClr val="7F6C72"/>
+                </a:solidFill>
+                <a:latin typeface="IBM Plex Sans Arabic" pitchFamily="34" charset="0"/>
+                <a:ea typeface="IBM Plex Sans Arabic" pitchFamily="34" charset="-122"/>
+                <a:cs typeface="IBM Plex Sans Arabic" pitchFamily="34" charset="-120"/>
+              </a:rPr>
+              <a:t>Cost Management</a:t>
+            </a:r>
+            <a:endParaRPr lang="en-US" sz="1050" dirty="0"/>
+          </a:p>
+        </p:txBody>
+      </p:sp>
+      <p:sp>
+        <p:nvSpPr>
+          <p:cNvPr id="29" name="Text 24"/>
+          <p:cNvSpPr txBox="1"/>
+          <p:nvPr/>
+        </p:nvSpPr>
+        <p:spPr>
+          <a:xfrm>
+            <a:off x="1975104" y="2532888"/>
+            <a:ext cx="1517904" cy="292608"/>
+          </a:xfrm>
+          <a:prstGeom prst="rect">
+            <a:avLst/>
+          </a:prstGeom>
+          <a:noFill/>
+          <a:ln/>
+        </p:spPr>
+        <p:txBody>
+          <a:bodyPr wrap="square" lIns="0" tIns="0" rIns="0" bIns="0" rtlCol="0" anchor="ctr"/>
+          <a:lstStyle/>
+          <a:p>
+            <a:pPr algn="ctr" indent="0" marL="0">
+              <a:buNone/>
+            </a:pPr>
+            <a:r>
+              <a:rPr lang="en-US" sz="1300" b="1" dirty="0">
+                <a:solidFill>
+                  <a:srgbClr val="21141A"/>
+                </a:solidFill>
+                <a:latin typeface="IBM Plex Sans Arabic" pitchFamily="34" charset="0"/>
+                <a:ea typeface="IBM Plex Sans Arabic" pitchFamily="34" charset="-122"/>
+                <a:cs typeface="IBM Plex Sans Arabic" pitchFamily="34" charset="-120"/>
+              </a:rPr>
+              <a:t>Microsoft Azure</a:t>
+            </a:r>
+            <a:endParaRPr lang="en-US" sz="1300" dirty="0"/>
+          </a:p>
+        </p:txBody>
+      </p:sp>
+      <p:sp>
+        <p:nvSpPr>
+          <p:cNvPr id="30" name="Text 25"/>
+          <p:cNvSpPr txBox="1"/>
+          <p:nvPr/>
+        </p:nvSpPr>
+        <p:spPr>
+          <a:xfrm>
+            <a:off x="1975104" y="2825496"/>
+            <a:ext cx="1517904" cy="256032"/>
+          </a:xfrm>
+          <a:prstGeom prst="rect">
+            <a:avLst/>
+          </a:prstGeom>
+          <a:noFill/>
+          <a:ln/>
+        </p:spPr>
+        <p:txBody>
+          <a:bodyPr wrap="square" lIns="0" tIns="0" rIns="0" bIns="0" rtlCol="0" anchor="ctr"/>
+          <a:lstStyle/>
+          <a:p>
+            <a:pPr algn="ctr" indent="0" marL="0">
+              <a:buNone/>
+            </a:pPr>
+            <a:r>
+              <a:rPr lang="en-US" sz="1050" dirty="0">
+                <a:solidFill>
+                  <a:srgbClr val="7F6C72"/>
+                </a:solidFill>
+                <a:latin typeface="IBM Plex Sans Arabic" pitchFamily="34" charset="0"/>
+                <a:ea typeface="IBM Plex Sans Arabic" pitchFamily="34" charset="-122"/>
+                <a:cs typeface="IBM Plex Sans Arabic" pitchFamily="34" charset="-120"/>
+              </a:rPr>
+              <a:t>Cost Management</a:t>
+            </a:r>
+            <a:endParaRPr lang="en-US" sz="1050" dirty="0"/>
+          </a:p>
+        </p:txBody>
+      </p:sp>
+      <p:sp>
+        <p:nvSpPr>
+          <p:cNvPr id="31" name="Text 26"/>
+          <p:cNvSpPr txBox="1"/>
+          <p:nvPr/>
+        </p:nvSpPr>
+        <p:spPr>
+          <a:xfrm>
+            <a:off x="457200" y="2532888"/>
+            <a:ext cx="1517904" cy="292608"/>
+          </a:xfrm>
+          <a:prstGeom prst="rect">
+            <a:avLst/>
+          </a:prstGeom>
+          <a:noFill/>
+          <a:ln/>
+        </p:spPr>
+        <p:txBody>
+          <a:bodyPr wrap="square" lIns="0" tIns="0" rIns="0" bIns="0" rtlCol="0" anchor="ctr"/>
+          <a:lstStyle/>
+          <a:p>
+            <a:pPr algn="ctr" indent="0" marL="0">
+              <a:buNone/>
+            </a:pPr>
+            <a:r>
+              <a:rPr lang="en-US" sz="1300" b="1" dirty="0">
+                <a:solidFill>
+                  <a:srgbClr val="21141A"/>
+                </a:solidFill>
+                <a:latin typeface="IBM Plex Sans Arabic" pitchFamily="34" charset="0"/>
+                <a:ea typeface="IBM Plex Sans Arabic" pitchFamily="34" charset="-122"/>
+                <a:cs typeface="IBM Plex Sans Arabic" pitchFamily="34" charset="-120"/>
+              </a:rPr>
+              <a:t>Oracle Cloud</a:t>
+            </a:r>
+            <a:endParaRPr lang="en-US" sz="1300" dirty="0"/>
+          </a:p>
+        </p:txBody>
+      </p:sp>
+      <p:sp>
+        <p:nvSpPr>
+          <p:cNvPr id="32" name="Text 27"/>
+          <p:cNvSpPr txBox="1"/>
+          <p:nvPr/>
+        </p:nvSpPr>
+        <p:spPr>
+          <a:xfrm>
+            <a:off x="457200" y="2825496"/>
+            <a:ext cx="1517904" cy="256032"/>
+          </a:xfrm>
+          <a:prstGeom prst="rect">
+            <a:avLst/>
+          </a:prstGeom>
+          <a:noFill/>
+          <a:ln/>
+        </p:spPr>
+        <p:txBody>
+          <a:bodyPr wrap="square" lIns="0" tIns="0" rIns="0" bIns="0" rtlCol="0" anchor="ctr"/>
+          <a:lstStyle/>
+          <a:p>
+            <a:pPr algn="ctr" indent="0" marL="0">
+              <a:buNone/>
+            </a:pPr>
+            <a:r>
+              <a:rPr lang="en-US" sz="1050" dirty="0">
+                <a:solidFill>
+                  <a:srgbClr val="7F6C72"/>
+                </a:solidFill>
+                <a:latin typeface="IBM Plex Sans Arabic" pitchFamily="34" charset="0"/>
+                <a:ea typeface="IBM Plex Sans Arabic" pitchFamily="34" charset="-122"/>
+                <a:cs typeface="IBM Plex Sans Arabic" pitchFamily="34" charset="-120"/>
+              </a:rPr>
+              <a:t>Infrastructure</a:t>
+            </a:r>
+            <a:endParaRPr lang="en-US" sz="1050" dirty="0"/>
+          </a:p>
+        </p:txBody>
+      </p:sp>
+      <p:sp>
+        <p:nvSpPr>
+          <p:cNvPr id="33" name="Text 28"/>
+          <p:cNvSpPr txBox="1"/>
+          <p:nvPr/>
+        </p:nvSpPr>
+        <p:spPr>
+          <a:xfrm>
+            <a:off x="8229600" y="2514600"/>
+            <a:ext cx="3504895" cy="594360"/>
+          </a:xfrm>
+          <a:prstGeom prst="rect">
+            <a:avLst/>
+          </a:prstGeom>
+          <a:noFill/>
+          <a:ln/>
+        </p:spPr>
+        <p:txBody>
+          <a:bodyPr wrap="square" lIns="0" tIns="0" rIns="0" bIns="0" rtlCol="0" anchor="ctr"/>
+          <a:lstStyle/>
+          <a:p>
+            <a:pPr rtl="1" algn="r" indent="0" marL="0">
+              <a:buNone/>
+            </a:pPr>
+            <a:r>
+              <a:rPr lang="en-US" sz="1400" b="1" dirty="0">
+                <a:solidFill>
+                  <a:srgbClr val="7F6C72"/>
+                </a:solidFill>
+                <a:latin typeface="IBM Plex Sans Arabic" pitchFamily="34" charset="0"/>
+                <a:ea typeface="IBM Plex Sans Arabic" pitchFamily="34" charset="-122"/>
+                <a:cs typeface="IBM Plex Sans Arabic" pitchFamily="34" charset="-120"/>
+              </a:rPr>
+              <a:t>الميزة</a:t>
+            </a:r>
+            <a:endParaRPr lang="en-US" sz="1400" dirty="0"/>
+          </a:p>
+        </p:txBody>
+      </p:sp>
+      <p:sp>
+        <p:nvSpPr>
+          <p:cNvPr id="34" name="Shape 29"/>
+          <p:cNvSpPr/>
+          <p:nvPr/>
+        </p:nvSpPr>
+        <p:spPr>
+          <a:xfrm>
+            <a:off x="457200" y="3200400"/>
+            <a:ext cx="11277295" cy="0"/>
+          </a:xfrm>
+          <a:prstGeom prst="line">
+            <a:avLst/>
+          </a:prstGeom>
+          <a:noFill/>
           <a:ln w="9525">
             <a:solidFill>
               <a:srgbClr val="E3D5CC"/>
@@ -7011,40 +8324,16 @@
           </a:ln>
         </p:spPr>
       </p:sp>
-      <p:pic>
-        <p:nvPicPr>
-          <p:cNvPr id="25" name="Image 3" descr="/tmp/claude-0/-home-claude/750ff410-f4aa-5276-9360-1e19d018b112/scratchpad/c/assets/i-building-br.png">    </p:cNvPr>
-          <p:cNvPicPr>
-            <a:picLocks noChangeAspect="1"/>
-          </p:cNvPicPr>
-          <p:nvPr/>
-        </p:nvPicPr>
-        <p:blipFill>
-          <a:blip r:embed="rId4"/>
-          <a:stretch>
-            <a:fillRect/>
-          </a:stretch>
-        </p:blipFill>
-        <p:spPr>
-          <a:xfrm>
-            <a:off x="9687306" y="3337560"/>
-            <a:ext cx="548640" cy="548640"/>
-          </a:xfrm>
-          <a:prstGeom prst="rect">
-            <a:avLst/>
-          </a:prstGeom>
-        </p:spPr>
-      </p:pic>
-      <p:sp>
-        <p:nvSpPr>
-          <p:cNvPr id="26" name="Text 20"/>
-          <p:cNvSpPr txBox="1"/>
-          <p:nvPr/>
-        </p:nvSpPr>
-        <p:spPr>
-          <a:xfrm>
-            <a:off x="8188757" y="3931920"/>
-            <a:ext cx="3545738" cy="868680"/>
+      <p:sp>
+        <p:nvSpPr>
+          <p:cNvPr id="35" name="Text 30"/>
+          <p:cNvSpPr txBox="1"/>
+          <p:nvPr/>
+        </p:nvSpPr>
+        <p:spPr>
+          <a:xfrm>
+            <a:off x="8229600" y="3200400"/>
+            <a:ext cx="3504895" cy="512064"/>
           </a:xfrm>
           <a:prstGeom prst="rect">
             <a:avLst/>
@@ -7056,34 +8345,113 @@
           <a:bodyPr wrap="square" lIns="0" tIns="0" rIns="0" bIns="0" rtlCol="0" anchor="ctr"/>
           <a:lstStyle/>
           <a:p>
+            <a:pPr rtl="1" algn="r" indent="0" marL="0">
+              <a:buNone/>
+            </a:pPr>
+            <a:r>
+              <a:rPr lang="en-US" sz="1500" dirty="0">
+                <a:solidFill>
+                  <a:srgbClr val="21141A"/>
+                </a:solidFill>
+                <a:latin typeface="IBM Plex Sans Arabic" pitchFamily="34" charset="0"/>
+                <a:ea typeface="IBM Plex Sans Arabic" pitchFamily="34" charset="-122"/>
+                <a:cs typeface="IBM Plex Sans Arabic" pitchFamily="34" charset="-120"/>
+              </a:rPr>
+              <a:t>STC وSCCC وCNTXT</a:t>
+            </a:r>
+            <a:endParaRPr lang="en-US" sz="1500" dirty="0"/>
+          </a:p>
+        </p:txBody>
+      </p:sp>
+      <p:sp>
+        <p:nvSpPr>
+          <p:cNvPr id="36" name="Shape 31"/>
+          <p:cNvSpPr/>
+          <p:nvPr/>
+        </p:nvSpPr>
+        <p:spPr>
+          <a:xfrm>
+            <a:off x="7114032" y="3282696"/>
+            <a:ext cx="347472" cy="347472"/>
+          </a:xfrm>
+          <a:prstGeom prst="ellipse">
+            <a:avLst/>
+          </a:prstGeom>
+          <a:solidFill>
+            <a:srgbClr val="7FB27A"/>
+          </a:solidFill>
+          <a:ln/>
+        </p:spPr>
+      </p:sp>
+      <p:sp>
+        <p:nvSpPr>
+          <p:cNvPr id="37" name="Text 32"/>
+          <p:cNvSpPr txBox="1"/>
+          <p:nvPr/>
+        </p:nvSpPr>
+        <p:spPr>
+          <a:xfrm>
+            <a:off x="7114032" y="3282696"/>
+            <a:ext cx="347472" cy="347472"/>
+          </a:xfrm>
+          <a:prstGeom prst="rect">
+            <a:avLst/>
+          </a:prstGeom>
+          <a:noFill/>
+          <a:ln/>
+        </p:spPr>
+        <p:txBody>
+          <a:bodyPr wrap="square" lIns="0" tIns="0" rIns="0" bIns="0" rtlCol="0" anchor="ctr"/>
+          <a:lstStyle/>
+          <a:p>
             <a:pPr algn="ctr" indent="0" marL="0">
               <a:buNone/>
             </a:pPr>
             <a:r>
-              <a:rPr lang="en-US" sz="4600" b="1" dirty="0">
-                <a:solidFill>
-                  <a:srgbClr val="8E2F3C"/>
-                </a:solidFill>
-                <a:latin typeface="IBM Plex Sans Arabic" pitchFamily="34" charset="0"/>
-                <a:ea typeface="IBM Plex Sans Arabic" pitchFamily="34" charset="-122"/>
-                <a:cs typeface="IBM Plex Sans Arabic" pitchFamily="34" charset="-120"/>
-              </a:rPr>
-              <a:t>50-250</a:t>
-            </a:r>
-            <a:endParaRPr lang="en-US" sz="4600" dirty="0"/>
-          </a:p>
-        </p:txBody>
-      </p:sp>
-      <p:sp>
-        <p:nvSpPr>
-          <p:cNvPr id="27" name="Text 21"/>
-          <p:cNvSpPr txBox="1"/>
-          <p:nvPr/>
-        </p:nvSpPr>
-        <p:spPr>
-          <a:xfrm>
-            <a:off x="8463077" y="4846320"/>
-            <a:ext cx="2997098" cy="411480"/>
+              <a:rPr lang="en-US" sz="1300" b="1" dirty="0">
+                <a:solidFill>
+                  <a:srgbClr val="FFFFFF"/>
+                </a:solidFill>
+                <a:latin typeface="IBM Plex Sans Arabic" pitchFamily="34" charset="0"/>
+                <a:ea typeface="IBM Plex Sans Arabic" pitchFamily="34" charset="-122"/>
+                <a:cs typeface="IBM Plex Sans Arabic" pitchFamily="34" charset="-120"/>
+              </a:rPr>
+              <a:t>✓</a:t>
+            </a:r>
+            <a:endParaRPr lang="en-US" sz="1300" dirty="0"/>
+          </a:p>
+        </p:txBody>
+      </p:sp>
+      <p:sp>
+        <p:nvSpPr>
+          <p:cNvPr id="38" name="Shape 33"/>
+          <p:cNvSpPr/>
+          <p:nvPr/>
+        </p:nvSpPr>
+        <p:spPr>
+          <a:xfrm>
+            <a:off x="5596128" y="3282696"/>
+            <a:ext cx="347472" cy="347472"/>
+          </a:xfrm>
+          <a:prstGeom prst="ellipse">
+            <a:avLst/>
+          </a:prstGeom>
+          <a:solidFill>
+            <a:srgbClr val="D48A93"/>
+          </a:solidFill>
+          <a:ln/>
+        </p:spPr>
+      </p:sp>
+      <p:sp>
+        <p:nvSpPr>
+          <p:cNvPr id="39" name="Text 34"/>
+          <p:cNvSpPr txBox="1"/>
+          <p:nvPr/>
+        </p:nvSpPr>
+        <p:spPr>
+          <a:xfrm>
+            <a:off x="5596128" y="3282696"/>
+            <a:ext cx="347472" cy="347472"/>
           </a:xfrm>
           <a:prstGeom prst="rect">
             <a:avLst/>
@@ -7095,43 +8463,216 @@
           <a:bodyPr wrap="square" lIns="0" tIns="0" rIns="0" bIns="0" rtlCol="0" anchor="ctr"/>
           <a:lstStyle/>
           <a:p>
-            <a:pPr rtl="1" algn="ctr" indent="0" marL="0">
-              <a:buNone/>
-            </a:pPr>
-            <a:r>
-              <a:rPr lang="en-US" sz="1800" dirty="0">
-                <a:solidFill>
-                  <a:srgbClr val="21141A"/>
-                </a:solidFill>
-                <a:latin typeface="IBM Plex Sans Arabic" pitchFamily="34" charset="0"/>
-                <a:ea typeface="IBM Plex Sans Arabic" pitchFamily="34" charset="-122"/>
-                <a:cs typeface="IBM Plex Sans Arabic" pitchFamily="34" charset="-120"/>
-              </a:rPr>
-              <a:t>موظفاً</a:t>
-            </a:r>
-            <a:endParaRPr lang="en-US" sz="1800" dirty="0"/>
-          </a:p>
-        </p:txBody>
-      </p:sp>
-      <p:sp>
-        <p:nvSpPr>
-          <p:cNvPr id="28" name="Shape 22"/>
-          <p:cNvSpPr/>
-          <p:nvPr/>
-        </p:nvSpPr>
-        <p:spPr>
-          <a:xfrm>
-            <a:off x="4322978" y="3063240"/>
-            <a:ext cx="3545738" cy="2377440"/>
-          </a:xfrm>
-          <a:prstGeom prst="roundRect">
-            <a:avLst>
-              <a:gd name="adj" fmla="val 7692"/>
-            </a:avLst>
-          </a:prstGeom>
-          <a:solidFill>
-            <a:srgbClr val="FFFBF8"/>
-          </a:solidFill>
+            <a:pPr algn="ctr" indent="0" marL="0">
+              <a:buNone/>
+            </a:pPr>
+            <a:r>
+              <a:rPr lang="en-US" sz="1300" b="1" dirty="0">
+                <a:solidFill>
+                  <a:srgbClr val="FFFFFF"/>
+                </a:solidFill>
+                <a:latin typeface="IBM Plex Sans Arabic" pitchFamily="34" charset="0"/>
+                <a:ea typeface="IBM Plex Sans Arabic" pitchFamily="34" charset="-122"/>
+                <a:cs typeface="IBM Plex Sans Arabic" pitchFamily="34" charset="-120"/>
+              </a:rPr>
+              <a:t>✕</a:t>
+            </a:r>
+            <a:endParaRPr lang="en-US" sz="1300" dirty="0"/>
+          </a:p>
+        </p:txBody>
+      </p:sp>
+      <p:sp>
+        <p:nvSpPr>
+          <p:cNvPr id="40" name="Shape 35"/>
+          <p:cNvSpPr/>
+          <p:nvPr/>
+        </p:nvSpPr>
+        <p:spPr>
+          <a:xfrm>
+            <a:off x="4078224" y="3282696"/>
+            <a:ext cx="347472" cy="347472"/>
+          </a:xfrm>
+          <a:prstGeom prst="ellipse">
+            <a:avLst/>
+          </a:prstGeom>
+          <a:solidFill>
+            <a:srgbClr val="D48A93"/>
+          </a:solidFill>
+          <a:ln/>
+        </p:spPr>
+      </p:sp>
+      <p:sp>
+        <p:nvSpPr>
+          <p:cNvPr id="41" name="Text 36"/>
+          <p:cNvSpPr txBox="1"/>
+          <p:nvPr/>
+        </p:nvSpPr>
+        <p:spPr>
+          <a:xfrm>
+            <a:off x="4078224" y="3282696"/>
+            <a:ext cx="347472" cy="347472"/>
+          </a:xfrm>
+          <a:prstGeom prst="rect">
+            <a:avLst/>
+          </a:prstGeom>
+          <a:noFill/>
+          <a:ln/>
+        </p:spPr>
+        <p:txBody>
+          <a:bodyPr wrap="square" lIns="0" tIns="0" rIns="0" bIns="0" rtlCol="0" anchor="ctr"/>
+          <a:lstStyle/>
+          <a:p>
+            <a:pPr algn="ctr" indent="0" marL="0">
+              <a:buNone/>
+            </a:pPr>
+            <a:r>
+              <a:rPr lang="en-US" sz="1300" b="1" dirty="0">
+                <a:solidFill>
+                  <a:srgbClr val="FFFFFF"/>
+                </a:solidFill>
+                <a:latin typeface="IBM Plex Sans Arabic" pitchFamily="34" charset="0"/>
+                <a:ea typeface="IBM Plex Sans Arabic" pitchFamily="34" charset="-122"/>
+                <a:cs typeface="IBM Plex Sans Arabic" pitchFamily="34" charset="-120"/>
+              </a:rPr>
+              <a:t>✕</a:t>
+            </a:r>
+            <a:endParaRPr lang="en-US" sz="1300" dirty="0"/>
+          </a:p>
+        </p:txBody>
+      </p:sp>
+      <p:sp>
+        <p:nvSpPr>
+          <p:cNvPr id="42" name="Shape 37"/>
+          <p:cNvSpPr/>
+          <p:nvPr/>
+        </p:nvSpPr>
+        <p:spPr>
+          <a:xfrm>
+            <a:off x="2560320" y="3282696"/>
+            <a:ext cx="347472" cy="347472"/>
+          </a:xfrm>
+          <a:prstGeom prst="ellipse">
+            <a:avLst/>
+          </a:prstGeom>
+          <a:solidFill>
+            <a:srgbClr val="D48A93"/>
+          </a:solidFill>
+          <a:ln/>
+        </p:spPr>
+      </p:sp>
+      <p:sp>
+        <p:nvSpPr>
+          <p:cNvPr id="43" name="Text 38"/>
+          <p:cNvSpPr txBox="1"/>
+          <p:nvPr/>
+        </p:nvSpPr>
+        <p:spPr>
+          <a:xfrm>
+            <a:off x="2560320" y="3282696"/>
+            <a:ext cx="347472" cy="347472"/>
+          </a:xfrm>
+          <a:prstGeom prst="rect">
+            <a:avLst/>
+          </a:prstGeom>
+          <a:noFill/>
+          <a:ln/>
+        </p:spPr>
+        <p:txBody>
+          <a:bodyPr wrap="square" lIns="0" tIns="0" rIns="0" bIns="0" rtlCol="0" anchor="ctr"/>
+          <a:lstStyle/>
+          <a:p>
+            <a:pPr algn="ctr" indent="0" marL="0">
+              <a:buNone/>
+            </a:pPr>
+            <a:r>
+              <a:rPr lang="en-US" sz="1300" b="1" dirty="0">
+                <a:solidFill>
+                  <a:srgbClr val="FFFFFF"/>
+                </a:solidFill>
+                <a:latin typeface="IBM Plex Sans Arabic" pitchFamily="34" charset="0"/>
+                <a:ea typeface="IBM Plex Sans Arabic" pitchFamily="34" charset="-122"/>
+                <a:cs typeface="IBM Plex Sans Arabic" pitchFamily="34" charset="-120"/>
+              </a:rPr>
+              <a:t>✕</a:t>
+            </a:r>
+            <a:endParaRPr lang="en-US" sz="1300" dirty="0"/>
+          </a:p>
+        </p:txBody>
+      </p:sp>
+      <p:sp>
+        <p:nvSpPr>
+          <p:cNvPr id="44" name="Shape 39"/>
+          <p:cNvSpPr/>
+          <p:nvPr/>
+        </p:nvSpPr>
+        <p:spPr>
+          <a:xfrm>
+            <a:off x="1042416" y="3282696"/>
+            <a:ext cx="347472" cy="347472"/>
+          </a:xfrm>
+          <a:prstGeom prst="ellipse">
+            <a:avLst/>
+          </a:prstGeom>
+          <a:solidFill>
+            <a:srgbClr val="D48A93"/>
+          </a:solidFill>
+          <a:ln/>
+        </p:spPr>
+      </p:sp>
+      <p:sp>
+        <p:nvSpPr>
+          <p:cNvPr id="45" name="Text 40"/>
+          <p:cNvSpPr txBox="1"/>
+          <p:nvPr/>
+        </p:nvSpPr>
+        <p:spPr>
+          <a:xfrm>
+            <a:off x="1042416" y="3282696"/>
+            <a:ext cx="347472" cy="347472"/>
+          </a:xfrm>
+          <a:prstGeom prst="rect">
+            <a:avLst/>
+          </a:prstGeom>
+          <a:noFill/>
+          <a:ln/>
+        </p:spPr>
+        <p:txBody>
+          <a:bodyPr wrap="square" lIns="0" tIns="0" rIns="0" bIns="0" rtlCol="0" anchor="ctr"/>
+          <a:lstStyle/>
+          <a:p>
+            <a:pPr algn="ctr" indent="0" marL="0">
+              <a:buNone/>
+            </a:pPr>
+            <a:r>
+              <a:rPr lang="en-US" sz="1300" b="1" dirty="0">
+                <a:solidFill>
+                  <a:srgbClr val="FFFFFF"/>
+                </a:solidFill>
+                <a:latin typeface="IBM Plex Sans Arabic" pitchFamily="34" charset="0"/>
+                <a:ea typeface="IBM Plex Sans Arabic" pitchFamily="34" charset="-122"/>
+                <a:cs typeface="IBM Plex Sans Arabic" pitchFamily="34" charset="-120"/>
+              </a:rPr>
+              <a:t>✕</a:t>
+            </a:r>
+            <a:endParaRPr lang="en-US" sz="1300" dirty="0"/>
+          </a:p>
+        </p:txBody>
+      </p:sp>
+      <p:sp>
+        <p:nvSpPr>
+          <p:cNvPr id="46" name="Shape 41"/>
+          <p:cNvSpPr/>
+          <p:nvPr/>
+        </p:nvSpPr>
+        <p:spPr>
+          <a:xfrm>
+            <a:off x="457200" y="3712464"/>
+            <a:ext cx="11277295" cy="0"/>
+          </a:xfrm>
+          <a:prstGeom prst="line">
+            <a:avLst/>
+          </a:prstGeom>
+          <a:noFill/>
           <a:ln w="9525">
             <a:solidFill>
               <a:srgbClr val="E3D5CC"/>
@@ -7140,40 +8681,16 @@
           </a:ln>
         </p:spPr>
       </p:sp>
-      <p:pic>
-        <p:nvPicPr>
-          <p:cNvPr id="29" name="Image 4" descr="/tmp/claude-0/-home-claude/750ff410-f4aa-5276-9360-1e19d018b112/scratchpad/c/assets/i-cloud-br.png">    </p:cNvPr>
-          <p:cNvPicPr>
-            <a:picLocks noChangeAspect="1"/>
-          </p:cNvPicPr>
-          <p:nvPr/>
-        </p:nvPicPr>
-        <p:blipFill>
-          <a:blip r:embed="rId5"/>
-          <a:stretch>
-            <a:fillRect/>
-          </a:stretch>
-        </p:blipFill>
-        <p:spPr>
-          <a:xfrm>
-            <a:off x="5821528" y="3337560"/>
-            <a:ext cx="548640" cy="548640"/>
-          </a:xfrm>
-          <a:prstGeom prst="rect">
-            <a:avLst/>
-          </a:prstGeom>
-        </p:spPr>
-      </p:pic>
-      <p:sp>
-        <p:nvSpPr>
-          <p:cNvPr id="30" name="Text 23"/>
-          <p:cNvSpPr txBox="1"/>
-          <p:nvPr/>
-        </p:nvSpPr>
-        <p:spPr>
-          <a:xfrm>
-            <a:off x="4322978" y="3931920"/>
-            <a:ext cx="3545738" cy="868680"/>
+      <p:sp>
+        <p:nvSpPr>
+          <p:cNvPr id="47" name="Text 42"/>
+          <p:cNvSpPr txBox="1"/>
+          <p:nvPr/>
+        </p:nvSpPr>
+        <p:spPr>
+          <a:xfrm>
+            <a:off x="8229600" y="3712464"/>
+            <a:ext cx="3504895" cy="512064"/>
           </a:xfrm>
           <a:prstGeom prst="rect">
             <a:avLst/>
@@ -7185,34 +8702,113 @@
           <a:bodyPr wrap="square" lIns="0" tIns="0" rIns="0" bIns="0" rtlCol="0" anchor="ctr"/>
           <a:lstStyle/>
           <a:p>
+            <a:pPr rtl="1" algn="r" indent="0" marL="0">
+              <a:buNone/>
+            </a:pPr>
+            <a:r>
+              <a:rPr lang="en-US" sz="1500" dirty="0">
+                <a:solidFill>
+                  <a:srgbClr val="21141A"/>
+                </a:solidFill>
+                <a:latin typeface="IBM Plex Sans Arabic" pitchFamily="34" charset="0"/>
+                <a:ea typeface="IBM Plex Sans Arabic" pitchFamily="34" charset="-122"/>
+                <a:cs typeface="IBM Plex Sans Arabic" pitchFamily="34" charset="-120"/>
+              </a:rPr>
+              <a:t>كل السحابات في لوحة واحدة</a:t>
+            </a:r>
+            <a:endParaRPr lang="en-US" sz="1500" dirty="0"/>
+          </a:p>
+        </p:txBody>
+      </p:sp>
+      <p:sp>
+        <p:nvSpPr>
+          <p:cNvPr id="48" name="Shape 43"/>
+          <p:cNvSpPr/>
+          <p:nvPr/>
+        </p:nvSpPr>
+        <p:spPr>
+          <a:xfrm>
+            <a:off x="7114032" y="3794760"/>
+            <a:ext cx="347472" cy="347472"/>
+          </a:xfrm>
+          <a:prstGeom prst="ellipse">
+            <a:avLst/>
+          </a:prstGeom>
+          <a:solidFill>
+            <a:srgbClr val="7FB27A"/>
+          </a:solidFill>
+          <a:ln/>
+        </p:spPr>
+      </p:sp>
+      <p:sp>
+        <p:nvSpPr>
+          <p:cNvPr id="49" name="Text 44"/>
+          <p:cNvSpPr txBox="1"/>
+          <p:nvPr/>
+        </p:nvSpPr>
+        <p:spPr>
+          <a:xfrm>
+            <a:off x="7114032" y="3794760"/>
+            <a:ext cx="347472" cy="347472"/>
+          </a:xfrm>
+          <a:prstGeom prst="rect">
+            <a:avLst/>
+          </a:prstGeom>
+          <a:noFill/>
+          <a:ln/>
+        </p:spPr>
+        <p:txBody>
+          <a:bodyPr wrap="square" lIns="0" tIns="0" rIns="0" bIns="0" rtlCol="0" anchor="ctr"/>
+          <a:lstStyle/>
+          <a:p>
             <a:pPr algn="ctr" indent="0" marL="0">
               <a:buNone/>
             </a:pPr>
             <a:r>
-              <a:rPr lang="en-US" sz="4600" b="1" dirty="0">
-                <a:solidFill>
-                  <a:srgbClr val="8E2F3C"/>
-                </a:solidFill>
-                <a:latin typeface="IBM Plex Sans Arabic" pitchFamily="34" charset="0"/>
-                <a:ea typeface="IBM Plex Sans Arabic" pitchFamily="34" charset="-122"/>
-                <a:cs typeface="IBM Plex Sans Arabic" pitchFamily="34" charset="-120"/>
-              </a:rPr>
-              <a:t>$5.1B</a:t>
-            </a:r>
-            <a:endParaRPr lang="en-US" sz="4600" dirty="0"/>
-          </a:p>
-        </p:txBody>
-      </p:sp>
-      <p:sp>
-        <p:nvSpPr>
-          <p:cNvPr id="31" name="Text 24"/>
-          <p:cNvSpPr txBox="1"/>
-          <p:nvPr/>
-        </p:nvSpPr>
-        <p:spPr>
-          <a:xfrm>
-            <a:off x="4597298" y="4846320"/>
-            <a:ext cx="2997098" cy="411480"/>
+              <a:rPr lang="en-US" sz="1300" b="1" dirty="0">
+                <a:solidFill>
+                  <a:srgbClr val="FFFFFF"/>
+                </a:solidFill>
+                <a:latin typeface="IBM Plex Sans Arabic" pitchFamily="34" charset="0"/>
+                <a:ea typeface="IBM Plex Sans Arabic" pitchFamily="34" charset="-122"/>
+                <a:cs typeface="IBM Plex Sans Arabic" pitchFamily="34" charset="-120"/>
+              </a:rPr>
+              <a:t>✓</a:t>
+            </a:r>
+            <a:endParaRPr lang="en-US" sz="1300" dirty="0"/>
+          </a:p>
+        </p:txBody>
+      </p:sp>
+      <p:sp>
+        <p:nvSpPr>
+          <p:cNvPr id="50" name="Shape 45"/>
+          <p:cNvSpPr/>
+          <p:nvPr/>
+        </p:nvSpPr>
+        <p:spPr>
+          <a:xfrm>
+            <a:off x="5596128" y="3794760"/>
+            <a:ext cx="347472" cy="347472"/>
+          </a:xfrm>
+          <a:prstGeom prst="ellipse">
+            <a:avLst/>
+          </a:prstGeom>
+          <a:solidFill>
+            <a:srgbClr val="D48A93"/>
+          </a:solidFill>
+          <a:ln/>
+        </p:spPr>
+      </p:sp>
+      <p:sp>
+        <p:nvSpPr>
+          <p:cNvPr id="51" name="Text 46"/>
+          <p:cNvSpPr txBox="1"/>
+          <p:nvPr/>
+        </p:nvSpPr>
+        <p:spPr>
+          <a:xfrm>
+            <a:off x="5596128" y="3794760"/>
+            <a:ext cx="347472" cy="347472"/>
           </a:xfrm>
           <a:prstGeom prst="rect">
             <a:avLst/>
@@ -7224,11 +8820,250 @@
           <a:bodyPr wrap="square" lIns="0" tIns="0" rIns="0" bIns="0" rtlCol="0" anchor="ctr"/>
           <a:lstStyle/>
           <a:p>
-            <a:pPr rtl="1" algn="ctr" indent="0" marL="0">
-              <a:buNone/>
-            </a:pPr>
-            <a:r>
-              <a:rPr lang="en-US" sz="1800" dirty="0">
+            <a:pPr algn="ctr" indent="0" marL="0">
+              <a:buNone/>
+            </a:pPr>
+            <a:r>
+              <a:rPr lang="en-US" sz="1300" b="1" dirty="0">
+                <a:solidFill>
+                  <a:srgbClr val="FFFFFF"/>
+                </a:solidFill>
+                <a:latin typeface="IBM Plex Sans Arabic" pitchFamily="34" charset="0"/>
+                <a:ea typeface="IBM Plex Sans Arabic" pitchFamily="34" charset="-122"/>
+                <a:cs typeface="IBM Plex Sans Arabic" pitchFamily="34" charset="-120"/>
+              </a:rPr>
+              <a:t>✕</a:t>
+            </a:r>
+            <a:endParaRPr lang="en-US" sz="1300" dirty="0"/>
+          </a:p>
+        </p:txBody>
+      </p:sp>
+      <p:sp>
+        <p:nvSpPr>
+          <p:cNvPr id="52" name="Shape 47"/>
+          <p:cNvSpPr/>
+          <p:nvPr/>
+        </p:nvSpPr>
+        <p:spPr>
+          <a:xfrm>
+            <a:off x="4078224" y="3794760"/>
+            <a:ext cx="347472" cy="347472"/>
+          </a:xfrm>
+          <a:prstGeom prst="ellipse">
+            <a:avLst/>
+          </a:prstGeom>
+          <a:solidFill>
+            <a:srgbClr val="D48A93"/>
+          </a:solidFill>
+          <a:ln/>
+        </p:spPr>
+      </p:sp>
+      <p:sp>
+        <p:nvSpPr>
+          <p:cNvPr id="53" name="Text 48"/>
+          <p:cNvSpPr txBox="1"/>
+          <p:nvPr/>
+        </p:nvSpPr>
+        <p:spPr>
+          <a:xfrm>
+            <a:off x="4078224" y="3794760"/>
+            <a:ext cx="347472" cy="347472"/>
+          </a:xfrm>
+          <a:prstGeom prst="rect">
+            <a:avLst/>
+          </a:prstGeom>
+          <a:noFill/>
+          <a:ln/>
+        </p:spPr>
+        <p:txBody>
+          <a:bodyPr wrap="square" lIns="0" tIns="0" rIns="0" bIns="0" rtlCol="0" anchor="ctr"/>
+          <a:lstStyle/>
+          <a:p>
+            <a:pPr algn="ctr" indent="0" marL="0">
+              <a:buNone/>
+            </a:pPr>
+            <a:r>
+              <a:rPr lang="en-US" sz="1300" b="1" dirty="0">
+                <a:solidFill>
+                  <a:srgbClr val="FFFFFF"/>
+                </a:solidFill>
+                <a:latin typeface="IBM Plex Sans Arabic" pitchFamily="34" charset="0"/>
+                <a:ea typeface="IBM Plex Sans Arabic" pitchFamily="34" charset="-122"/>
+                <a:cs typeface="IBM Plex Sans Arabic" pitchFamily="34" charset="-120"/>
+              </a:rPr>
+              <a:t>✕</a:t>
+            </a:r>
+            <a:endParaRPr lang="en-US" sz="1300" dirty="0"/>
+          </a:p>
+        </p:txBody>
+      </p:sp>
+      <p:sp>
+        <p:nvSpPr>
+          <p:cNvPr id="54" name="Shape 49"/>
+          <p:cNvSpPr/>
+          <p:nvPr/>
+        </p:nvSpPr>
+        <p:spPr>
+          <a:xfrm>
+            <a:off x="2560320" y="3794760"/>
+            <a:ext cx="347472" cy="347472"/>
+          </a:xfrm>
+          <a:prstGeom prst="ellipse">
+            <a:avLst/>
+          </a:prstGeom>
+          <a:solidFill>
+            <a:srgbClr val="D48A93"/>
+          </a:solidFill>
+          <a:ln/>
+        </p:spPr>
+      </p:sp>
+      <p:sp>
+        <p:nvSpPr>
+          <p:cNvPr id="55" name="Text 50"/>
+          <p:cNvSpPr txBox="1"/>
+          <p:nvPr/>
+        </p:nvSpPr>
+        <p:spPr>
+          <a:xfrm>
+            <a:off x="2560320" y="3794760"/>
+            <a:ext cx="347472" cy="347472"/>
+          </a:xfrm>
+          <a:prstGeom prst="rect">
+            <a:avLst/>
+          </a:prstGeom>
+          <a:noFill/>
+          <a:ln/>
+        </p:spPr>
+        <p:txBody>
+          <a:bodyPr wrap="square" lIns="0" tIns="0" rIns="0" bIns="0" rtlCol="0" anchor="ctr"/>
+          <a:lstStyle/>
+          <a:p>
+            <a:pPr algn="ctr" indent="0" marL="0">
+              <a:buNone/>
+            </a:pPr>
+            <a:r>
+              <a:rPr lang="en-US" sz="1300" b="1" dirty="0">
+                <a:solidFill>
+                  <a:srgbClr val="FFFFFF"/>
+                </a:solidFill>
+                <a:latin typeface="IBM Plex Sans Arabic" pitchFamily="34" charset="0"/>
+                <a:ea typeface="IBM Plex Sans Arabic" pitchFamily="34" charset="-122"/>
+                <a:cs typeface="IBM Plex Sans Arabic" pitchFamily="34" charset="-120"/>
+              </a:rPr>
+              <a:t>✕</a:t>
+            </a:r>
+            <a:endParaRPr lang="en-US" sz="1300" dirty="0"/>
+          </a:p>
+        </p:txBody>
+      </p:sp>
+      <p:sp>
+        <p:nvSpPr>
+          <p:cNvPr id="56" name="Shape 51"/>
+          <p:cNvSpPr/>
+          <p:nvPr/>
+        </p:nvSpPr>
+        <p:spPr>
+          <a:xfrm>
+            <a:off x="1042416" y="3794760"/>
+            <a:ext cx="347472" cy="347472"/>
+          </a:xfrm>
+          <a:prstGeom prst="ellipse">
+            <a:avLst/>
+          </a:prstGeom>
+          <a:solidFill>
+            <a:srgbClr val="D48A93"/>
+          </a:solidFill>
+          <a:ln/>
+        </p:spPr>
+      </p:sp>
+      <p:sp>
+        <p:nvSpPr>
+          <p:cNvPr id="57" name="Text 52"/>
+          <p:cNvSpPr txBox="1"/>
+          <p:nvPr/>
+        </p:nvSpPr>
+        <p:spPr>
+          <a:xfrm>
+            <a:off x="1042416" y="3794760"/>
+            <a:ext cx="347472" cy="347472"/>
+          </a:xfrm>
+          <a:prstGeom prst="rect">
+            <a:avLst/>
+          </a:prstGeom>
+          <a:noFill/>
+          <a:ln/>
+        </p:spPr>
+        <p:txBody>
+          <a:bodyPr wrap="square" lIns="0" tIns="0" rIns="0" bIns="0" rtlCol="0" anchor="ctr"/>
+          <a:lstStyle/>
+          <a:p>
+            <a:pPr algn="ctr" indent="0" marL="0">
+              <a:buNone/>
+            </a:pPr>
+            <a:r>
+              <a:rPr lang="en-US" sz="1300" b="1" dirty="0">
+                <a:solidFill>
+                  <a:srgbClr val="FFFFFF"/>
+                </a:solidFill>
+                <a:latin typeface="IBM Plex Sans Arabic" pitchFamily="34" charset="0"/>
+                <a:ea typeface="IBM Plex Sans Arabic" pitchFamily="34" charset="-122"/>
+                <a:cs typeface="IBM Plex Sans Arabic" pitchFamily="34" charset="-120"/>
+              </a:rPr>
+              <a:t>✕</a:t>
+            </a:r>
+            <a:endParaRPr lang="en-US" sz="1300" dirty="0"/>
+          </a:p>
+        </p:txBody>
+      </p:sp>
+      <p:sp>
+        <p:nvSpPr>
+          <p:cNvPr id="58" name="Shape 53"/>
+          <p:cNvSpPr/>
+          <p:nvPr/>
+        </p:nvSpPr>
+        <p:spPr>
+          <a:xfrm>
+            <a:off x="457200" y="4224528"/>
+            <a:ext cx="11277295" cy="0"/>
+          </a:xfrm>
+          <a:prstGeom prst="line">
+            <a:avLst/>
+          </a:prstGeom>
+          <a:noFill/>
+          <a:ln w="9525">
+            <a:solidFill>
+              <a:srgbClr val="E3D5CC"/>
+            </a:solidFill>
+            <a:prstDash val="solid"/>
+          </a:ln>
+        </p:spPr>
+      </p:sp>
+      <p:sp>
+        <p:nvSpPr>
+          <p:cNvPr id="59" name="Text 54"/>
+          <p:cNvSpPr txBox="1"/>
+          <p:nvPr/>
+        </p:nvSpPr>
+        <p:spPr>
+          <a:xfrm>
+            <a:off x="8229600" y="4224528"/>
+            <a:ext cx="3504895" cy="512064"/>
+          </a:xfrm>
+          <a:prstGeom prst="rect">
+            <a:avLst/>
+          </a:prstGeom>
+          <a:noFill/>
+          <a:ln/>
+        </p:spPr>
+        <p:txBody>
+          <a:bodyPr wrap="square" lIns="0" tIns="0" rIns="0" bIns="0" rtlCol="0" anchor="ctr"/>
+          <a:lstStyle/>
+          <a:p>
+            <a:pPr rtl="1" algn="r" indent="0" marL="0">
+              <a:buNone/>
+            </a:pPr>
+            <a:r>
+              <a:rPr lang="en-US" sz="1500" dirty="0">
                 <a:solidFill>
                   <a:srgbClr val="21141A"/>
                 </a:solidFill>
@@ -7236,68 +9071,42 @@
                 <a:ea typeface="IBM Plex Sans Arabic" pitchFamily="34" charset="-122"/>
                 <a:cs typeface="IBM Plex Sans Arabic" pitchFamily="34" charset="-120"/>
               </a:rPr>
-              <a:t>سوق السحابة السعودي 2025</a:t>
-            </a:r>
-            <a:endParaRPr lang="en-US" sz="1800" dirty="0"/>
-          </a:p>
-        </p:txBody>
-      </p:sp>
-      <p:sp>
-        <p:nvSpPr>
-          <p:cNvPr id="32" name="Shape 25"/>
-          <p:cNvSpPr/>
-          <p:nvPr/>
-        </p:nvSpPr>
-        <p:spPr>
-          <a:xfrm>
-            <a:off x="457200" y="3063240"/>
-            <a:ext cx="3545738" cy="2377440"/>
-          </a:xfrm>
-          <a:prstGeom prst="roundRect">
-            <a:avLst>
-              <a:gd name="adj" fmla="val 7692"/>
-            </a:avLst>
-          </a:prstGeom>
-          <a:solidFill>
-            <a:srgbClr val="8E2F3C"/>
-          </a:solidFill>
-          <a:ln/>
-        </p:spPr>
-      </p:sp>
-      <p:pic>
-        <p:nvPicPr>
-          <p:cNvPr id="33" name="Image 5" descr="/tmp/claude-0/-home-claude/750ff410-f4aa-5276-9360-1e19d018b112/scratchpad/c/assets/i-trend-cr.png">    </p:cNvPr>
-          <p:cNvPicPr>
-            <a:picLocks noChangeAspect="1"/>
-          </p:cNvPicPr>
-          <p:nvPr/>
-        </p:nvPicPr>
-        <p:blipFill>
-          <a:blip r:embed="rId6"/>
-          <a:stretch>
-            <a:fillRect/>
-          </a:stretch>
-        </p:blipFill>
-        <p:spPr>
-          <a:xfrm>
-            <a:off x="1955749" y="3337560"/>
-            <a:ext cx="548640" cy="548640"/>
-          </a:xfrm>
-          <a:prstGeom prst="rect">
-            <a:avLst/>
-          </a:prstGeom>
-        </p:spPr>
-      </p:pic>
-      <p:sp>
-        <p:nvSpPr>
-          <p:cNvPr id="34" name="Text 26"/>
-          <p:cNvSpPr txBox="1"/>
-          <p:nvPr/>
-        </p:nvSpPr>
-        <p:spPr>
-          <a:xfrm>
-            <a:off x="457200" y="3931920"/>
-            <a:ext cx="3545738" cy="868680"/>
+              <a:t>تنفيذ بنقرة بعد موافقتك</a:t>
+            </a:r>
+            <a:endParaRPr lang="en-US" sz="1500" dirty="0"/>
+          </a:p>
+        </p:txBody>
+      </p:sp>
+      <p:sp>
+        <p:nvSpPr>
+          <p:cNvPr id="60" name="Shape 55"/>
+          <p:cNvSpPr/>
+          <p:nvPr/>
+        </p:nvSpPr>
+        <p:spPr>
+          <a:xfrm>
+            <a:off x="7114032" y="4306824"/>
+            <a:ext cx="347472" cy="347472"/>
+          </a:xfrm>
+          <a:prstGeom prst="ellipse">
+            <a:avLst/>
+          </a:prstGeom>
+          <a:solidFill>
+            <a:srgbClr val="7FB27A"/>
+          </a:solidFill>
+          <a:ln/>
+        </p:spPr>
+      </p:sp>
+      <p:sp>
+        <p:nvSpPr>
+          <p:cNvPr id="61" name="Text 56"/>
+          <p:cNvSpPr txBox="1"/>
+          <p:nvPr/>
+        </p:nvSpPr>
+        <p:spPr>
+          <a:xfrm>
+            <a:off x="7114032" y="4306824"/>
+            <a:ext cx="347472" cy="347472"/>
           </a:xfrm>
           <a:prstGeom prst="rect">
             <a:avLst/>
@@ -7313,30 +9122,50 @@
               <a:buNone/>
             </a:pPr>
             <a:r>
-              <a:rPr lang="en-US" sz="4600" b="1" dirty="0">
-                <a:solidFill>
-                  <a:srgbClr val="FBF6EE"/>
-                </a:solidFill>
-                <a:latin typeface="IBM Plex Sans Arabic" pitchFamily="34" charset="0"/>
-                <a:ea typeface="IBM Plex Sans Arabic" pitchFamily="34" charset="-122"/>
-                <a:cs typeface="IBM Plex Sans Arabic" pitchFamily="34" charset="-120"/>
-              </a:rPr>
-              <a:t>$14.6B</a:t>
-            </a:r>
-            <a:endParaRPr lang="en-US" sz="4600" dirty="0"/>
-          </a:p>
-        </p:txBody>
-      </p:sp>
-      <p:sp>
-        <p:nvSpPr>
-          <p:cNvPr id="35" name="Text 27"/>
-          <p:cNvSpPr txBox="1"/>
-          <p:nvPr/>
-        </p:nvSpPr>
-        <p:spPr>
-          <a:xfrm>
-            <a:off x="731520" y="4846320"/>
-            <a:ext cx="2997098" cy="411480"/>
+              <a:rPr lang="en-US" sz="1300" b="1" dirty="0">
+                <a:solidFill>
+                  <a:srgbClr val="FFFFFF"/>
+                </a:solidFill>
+                <a:latin typeface="IBM Plex Sans Arabic" pitchFamily="34" charset="0"/>
+                <a:ea typeface="IBM Plex Sans Arabic" pitchFamily="34" charset="-122"/>
+                <a:cs typeface="IBM Plex Sans Arabic" pitchFamily="34" charset="-120"/>
+              </a:rPr>
+              <a:t>✓</a:t>
+            </a:r>
+            <a:endParaRPr lang="en-US" sz="1300" dirty="0"/>
+          </a:p>
+        </p:txBody>
+      </p:sp>
+      <p:sp>
+        <p:nvSpPr>
+          <p:cNvPr id="62" name="Shape 57"/>
+          <p:cNvSpPr/>
+          <p:nvPr/>
+        </p:nvSpPr>
+        <p:spPr>
+          <a:xfrm>
+            <a:off x="5596128" y="4306824"/>
+            <a:ext cx="347472" cy="347472"/>
+          </a:xfrm>
+          <a:prstGeom prst="ellipse">
+            <a:avLst/>
+          </a:prstGeom>
+          <a:solidFill>
+            <a:srgbClr val="C9A46E"/>
+          </a:solidFill>
+          <a:ln/>
+        </p:spPr>
+      </p:sp>
+      <p:sp>
+        <p:nvSpPr>
+          <p:cNvPr id="63" name="Text 58"/>
+          <p:cNvSpPr txBox="1"/>
+          <p:nvPr/>
+        </p:nvSpPr>
+        <p:spPr>
+          <a:xfrm>
+            <a:off x="5596128" y="4306824"/>
+            <a:ext cx="347472" cy="347472"/>
           </a:xfrm>
           <a:prstGeom prst="rect">
             <a:avLst/>
@@ -7348,34 +9177,54 @@
           <a:bodyPr wrap="square" lIns="0" tIns="0" rIns="0" bIns="0" rtlCol="0" anchor="ctr"/>
           <a:lstStyle/>
           <a:p>
-            <a:pPr rtl="1" algn="ctr" indent="0" marL="0">
-              <a:buNone/>
-            </a:pPr>
-            <a:r>
-              <a:rPr lang="en-US" sz="1800" dirty="0">
-                <a:solidFill>
-                  <a:srgbClr val="FBF6EE"/>
-                </a:solidFill>
-                <a:latin typeface="IBM Plex Sans Arabic" pitchFamily="34" charset="0"/>
-                <a:ea typeface="IBM Plex Sans Arabic" pitchFamily="34" charset="-122"/>
-                <a:cs typeface="IBM Plex Sans Arabic" pitchFamily="34" charset="-120"/>
-              </a:rPr>
-              <a:t>المتوقع 2030</a:t>
-            </a:r>
-            <a:endParaRPr lang="en-US" sz="1800" dirty="0"/>
-          </a:p>
-        </p:txBody>
-      </p:sp>
-      <p:sp>
-        <p:nvSpPr>
-          <p:cNvPr id="36" name="Text 28"/>
-          <p:cNvSpPr txBox="1"/>
-          <p:nvPr/>
-        </p:nvSpPr>
-        <p:spPr>
-          <a:xfrm>
-            <a:off x="457200" y="5989320"/>
-            <a:ext cx="11277295" cy="237744"/>
+            <a:pPr algn="ctr" indent="0" marL="0">
+              <a:buNone/>
+            </a:pPr>
+            <a:r>
+              <a:rPr lang="en-US" sz="1300" b="1" dirty="0">
+                <a:solidFill>
+                  <a:srgbClr val="FFFFFF"/>
+                </a:solidFill>
+                <a:latin typeface="IBM Plex Sans Arabic" pitchFamily="34" charset="0"/>
+                <a:ea typeface="IBM Plex Sans Arabic" pitchFamily="34" charset="-122"/>
+                <a:cs typeface="IBM Plex Sans Arabic" pitchFamily="34" charset="-120"/>
+              </a:rPr>
+              <a:t>~</a:t>
+            </a:r>
+            <a:endParaRPr lang="en-US" sz="1300" dirty="0"/>
+          </a:p>
+        </p:txBody>
+      </p:sp>
+      <p:sp>
+        <p:nvSpPr>
+          <p:cNvPr id="64" name="Shape 59"/>
+          <p:cNvSpPr/>
+          <p:nvPr/>
+        </p:nvSpPr>
+        <p:spPr>
+          <a:xfrm>
+            <a:off x="4078224" y="4306824"/>
+            <a:ext cx="347472" cy="347472"/>
+          </a:xfrm>
+          <a:prstGeom prst="ellipse">
+            <a:avLst/>
+          </a:prstGeom>
+          <a:solidFill>
+            <a:srgbClr val="C9A46E"/>
+          </a:solidFill>
+          <a:ln/>
+        </p:spPr>
+      </p:sp>
+      <p:sp>
+        <p:nvSpPr>
+          <p:cNvPr id="65" name="Text 60"/>
+          <p:cNvSpPr txBox="1"/>
+          <p:nvPr/>
+        </p:nvSpPr>
+        <p:spPr>
+          <a:xfrm>
+            <a:off x="4078224" y="4306824"/>
+            <a:ext cx="347472" cy="347472"/>
           </a:xfrm>
           <a:prstGeom prst="rect">
             <a:avLst/>
@@ -7387,11 +9236,902 @@
           <a:bodyPr wrap="square" lIns="0" tIns="0" rIns="0" bIns="0" rtlCol="0" anchor="ctr"/>
           <a:lstStyle/>
           <a:p>
-            <a:pPr algn="r" indent="0" marL="0">
-              <a:buNone/>
-            </a:pPr>
-            <a:r>
-              <a:rPr lang="en-US" sz="950" dirty="0">
+            <a:pPr algn="ctr" indent="0" marL="0">
+              <a:buNone/>
+            </a:pPr>
+            <a:r>
+              <a:rPr lang="en-US" sz="1300" b="1" dirty="0">
+                <a:solidFill>
+                  <a:srgbClr val="FFFFFF"/>
+                </a:solidFill>
+                <a:latin typeface="IBM Plex Sans Arabic" pitchFamily="34" charset="0"/>
+                <a:ea typeface="IBM Plex Sans Arabic" pitchFamily="34" charset="-122"/>
+                <a:cs typeface="IBM Plex Sans Arabic" pitchFamily="34" charset="-120"/>
+              </a:rPr>
+              <a:t>~</a:t>
+            </a:r>
+            <a:endParaRPr lang="en-US" sz="1300" dirty="0"/>
+          </a:p>
+        </p:txBody>
+      </p:sp>
+      <p:sp>
+        <p:nvSpPr>
+          <p:cNvPr id="66" name="Shape 61"/>
+          <p:cNvSpPr/>
+          <p:nvPr/>
+        </p:nvSpPr>
+        <p:spPr>
+          <a:xfrm>
+            <a:off x="2560320" y="4306824"/>
+            <a:ext cx="347472" cy="347472"/>
+          </a:xfrm>
+          <a:prstGeom prst="ellipse">
+            <a:avLst/>
+          </a:prstGeom>
+          <a:solidFill>
+            <a:srgbClr val="C9A46E"/>
+          </a:solidFill>
+          <a:ln/>
+        </p:spPr>
+      </p:sp>
+      <p:sp>
+        <p:nvSpPr>
+          <p:cNvPr id="67" name="Text 62"/>
+          <p:cNvSpPr txBox="1"/>
+          <p:nvPr/>
+        </p:nvSpPr>
+        <p:spPr>
+          <a:xfrm>
+            <a:off x="2560320" y="4306824"/>
+            <a:ext cx="347472" cy="347472"/>
+          </a:xfrm>
+          <a:prstGeom prst="rect">
+            <a:avLst/>
+          </a:prstGeom>
+          <a:noFill/>
+          <a:ln/>
+        </p:spPr>
+        <p:txBody>
+          <a:bodyPr wrap="square" lIns="0" tIns="0" rIns="0" bIns="0" rtlCol="0" anchor="ctr"/>
+          <a:lstStyle/>
+          <a:p>
+            <a:pPr algn="ctr" indent="0" marL="0">
+              <a:buNone/>
+            </a:pPr>
+            <a:r>
+              <a:rPr lang="en-US" sz="1300" b="1" dirty="0">
+                <a:solidFill>
+                  <a:srgbClr val="FFFFFF"/>
+                </a:solidFill>
+                <a:latin typeface="IBM Plex Sans Arabic" pitchFamily="34" charset="0"/>
+                <a:ea typeface="IBM Plex Sans Arabic" pitchFamily="34" charset="-122"/>
+                <a:cs typeface="IBM Plex Sans Arabic" pitchFamily="34" charset="-120"/>
+              </a:rPr>
+              <a:t>~</a:t>
+            </a:r>
+            <a:endParaRPr lang="en-US" sz="1300" dirty="0"/>
+          </a:p>
+        </p:txBody>
+      </p:sp>
+      <p:sp>
+        <p:nvSpPr>
+          <p:cNvPr id="68" name="Shape 63"/>
+          <p:cNvSpPr/>
+          <p:nvPr/>
+        </p:nvSpPr>
+        <p:spPr>
+          <a:xfrm>
+            <a:off x="1042416" y="4306824"/>
+            <a:ext cx="347472" cy="347472"/>
+          </a:xfrm>
+          <a:prstGeom prst="ellipse">
+            <a:avLst/>
+          </a:prstGeom>
+          <a:solidFill>
+            <a:srgbClr val="C9A46E"/>
+          </a:solidFill>
+          <a:ln/>
+        </p:spPr>
+      </p:sp>
+      <p:sp>
+        <p:nvSpPr>
+          <p:cNvPr id="69" name="Text 64"/>
+          <p:cNvSpPr txBox="1"/>
+          <p:nvPr/>
+        </p:nvSpPr>
+        <p:spPr>
+          <a:xfrm>
+            <a:off x="1042416" y="4306824"/>
+            <a:ext cx="347472" cy="347472"/>
+          </a:xfrm>
+          <a:prstGeom prst="rect">
+            <a:avLst/>
+          </a:prstGeom>
+          <a:noFill/>
+          <a:ln/>
+        </p:spPr>
+        <p:txBody>
+          <a:bodyPr wrap="square" lIns="0" tIns="0" rIns="0" bIns="0" rtlCol="0" anchor="ctr"/>
+          <a:lstStyle/>
+          <a:p>
+            <a:pPr algn="ctr" indent="0" marL="0">
+              <a:buNone/>
+            </a:pPr>
+            <a:r>
+              <a:rPr lang="en-US" sz="1300" b="1" dirty="0">
+                <a:solidFill>
+                  <a:srgbClr val="FFFFFF"/>
+                </a:solidFill>
+                <a:latin typeface="IBM Plex Sans Arabic" pitchFamily="34" charset="0"/>
+                <a:ea typeface="IBM Plex Sans Arabic" pitchFamily="34" charset="-122"/>
+                <a:cs typeface="IBM Plex Sans Arabic" pitchFamily="34" charset="-120"/>
+              </a:rPr>
+              <a:t>~</a:t>
+            </a:r>
+            <a:endParaRPr lang="en-US" sz="1300" dirty="0"/>
+          </a:p>
+        </p:txBody>
+      </p:sp>
+      <p:sp>
+        <p:nvSpPr>
+          <p:cNvPr id="70" name="Shape 65"/>
+          <p:cNvSpPr/>
+          <p:nvPr/>
+        </p:nvSpPr>
+        <p:spPr>
+          <a:xfrm>
+            <a:off x="457200" y="4736592"/>
+            <a:ext cx="11277295" cy="0"/>
+          </a:xfrm>
+          <a:prstGeom prst="line">
+            <a:avLst/>
+          </a:prstGeom>
+          <a:noFill/>
+          <a:ln w="9525">
+            <a:solidFill>
+              <a:srgbClr val="E3D5CC"/>
+            </a:solidFill>
+            <a:prstDash val="solid"/>
+          </a:ln>
+        </p:spPr>
+      </p:sp>
+      <p:sp>
+        <p:nvSpPr>
+          <p:cNvPr id="71" name="Text 66"/>
+          <p:cNvSpPr txBox="1"/>
+          <p:nvPr/>
+        </p:nvSpPr>
+        <p:spPr>
+          <a:xfrm>
+            <a:off x="8229600" y="4736592"/>
+            <a:ext cx="3504895" cy="512064"/>
+          </a:xfrm>
+          <a:prstGeom prst="rect">
+            <a:avLst/>
+          </a:prstGeom>
+          <a:noFill/>
+          <a:ln/>
+        </p:spPr>
+        <p:txBody>
+          <a:bodyPr wrap="square" lIns="0" tIns="0" rIns="0" bIns="0" rtlCol="0" anchor="ctr"/>
+          <a:lstStyle/>
+          <a:p>
+            <a:pPr rtl="1" algn="r" indent="0" marL="0">
+              <a:buNone/>
+            </a:pPr>
+            <a:r>
+              <a:rPr lang="en-US" sz="1500" dirty="0">
+                <a:solidFill>
+                  <a:srgbClr val="21141A"/>
+                </a:solidFill>
+                <a:latin typeface="IBM Plex Sans Arabic" pitchFamily="34" charset="0"/>
+                <a:ea typeface="IBM Plex Sans Arabic" pitchFamily="34" charset="-122"/>
+                <a:cs typeface="IBM Plex Sans Arabic" pitchFamily="34" charset="-120"/>
+              </a:rPr>
+              <a:t>تنبيهات واتساب وتيليجرام</a:t>
+            </a:r>
+            <a:endParaRPr lang="en-US" sz="1500" dirty="0"/>
+          </a:p>
+        </p:txBody>
+      </p:sp>
+      <p:sp>
+        <p:nvSpPr>
+          <p:cNvPr id="72" name="Shape 67"/>
+          <p:cNvSpPr/>
+          <p:nvPr/>
+        </p:nvSpPr>
+        <p:spPr>
+          <a:xfrm>
+            <a:off x="7114032" y="4818888"/>
+            <a:ext cx="347472" cy="347472"/>
+          </a:xfrm>
+          <a:prstGeom prst="ellipse">
+            <a:avLst/>
+          </a:prstGeom>
+          <a:solidFill>
+            <a:srgbClr val="7FB27A"/>
+          </a:solidFill>
+          <a:ln/>
+        </p:spPr>
+      </p:sp>
+      <p:sp>
+        <p:nvSpPr>
+          <p:cNvPr id="73" name="Text 68"/>
+          <p:cNvSpPr txBox="1"/>
+          <p:nvPr/>
+        </p:nvSpPr>
+        <p:spPr>
+          <a:xfrm>
+            <a:off x="7114032" y="4818888"/>
+            <a:ext cx="347472" cy="347472"/>
+          </a:xfrm>
+          <a:prstGeom prst="rect">
+            <a:avLst/>
+          </a:prstGeom>
+          <a:noFill/>
+          <a:ln/>
+        </p:spPr>
+        <p:txBody>
+          <a:bodyPr wrap="square" lIns="0" tIns="0" rIns="0" bIns="0" rtlCol="0" anchor="ctr"/>
+          <a:lstStyle/>
+          <a:p>
+            <a:pPr algn="ctr" indent="0" marL="0">
+              <a:buNone/>
+            </a:pPr>
+            <a:r>
+              <a:rPr lang="en-US" sz="1300" b="1" dirty="0">
+                <a:solidFill>
+                  <a:srgbClr val="FFFFFF"/>
+                </a:solidFill>
+                <a:latin typeface="IBM Plex Sans Arabic" pitchFamily="34" charset="0"/>
+                <a:ea typeface="IBM Plex Sans Arabic" pitchFamily="34" charset="-122"/>
+                <a:cs typeface="IBM Plex Sans Arabic" pitchFamily="34" charset="-120"/>
+              </a:rPr>
+              <a:t>✓</a:t>
+            </a:r>
+            <a:endParaRPr lang="en-US" sz="1300" dirty="0"/>
+          </a:p>
+        </p:txBody>
+      </p:sp>
+      <p:sp>
+        <p:nvSpPr>
+          <p:cNvPr id="74" name="Shape 69"/>
+          <p:cNvSpPr/>
+          <p:nvPr/>
+        </p:nvSpPr>
+        <p:spPr>
+          <a:xfrm>
+            <a:off x="5596128" y="4818888"/>
+            <a:ext cx="347472" cy="347472"/>
+          </a:xfrm>
+          <a:prstGeom prst="ellipse">
+            <a:avLst/>
+          </a:prstGeom>
+          <a:solidFill>
+            <a:srgbClr val="D48A93"/>
+          </a:solidFill>
+          <a:ln/>
+        </p:spPr>
+      </p:sp>
+      <p:sp>
+        <p:nvSpPr>
+          <p:cNvPr id="75" name="Text 70"/>
+          <p:cNvSpPr txBox="1"/>
+          <p:nvPr/>
+        </p:nvSpPr>
+        <p:spPr>
+          <a:xfrm>
+            <a:off x="5596128" y="4818888"/>
+            <a:ext cx="347472" cy="347472"/>
+          </a:xfrm>
+          <a:prstGeom prst="rect">
+            <a:avLst/>
+          </a:prstGeom>
+          <a:noFill/>
+          <a:ln/>
+        </p:spPr>
+        <p:txBody>
+          <a:bodyPr wrap="square" lIns="0" tIns="0" rIns="0" bIns="0" rtlCol="0" anchor="ctr"/>
+          <a:lstStyle/>
+          <a:p>
+            <a:pPr algn="ctr" indent="0" marL="0">
+              <a:buNone/>
+            </a:pPr>
+            <a:r>
+              <a:rPr lang="en-US" sz="1300" b="1" dirty="0">
+                <a:solidFill>
+                  <a:srgbClr val="FFFFFF"/>
+                </a:solidFill>
+                <a:latin typeface="IBM Plex Sans Arabic" pitchFamily="34" charset="0"/>
+                <a:ea typeface="IBM Plex Sans Arabic" pitchFamily="34" charset="-122"/>
+                <a:cs typeface="IBM Plex Sans Arabic" pitchFamily="34" charset="-120"/>
+              </a:rPr>
+              <a:t>✕</a:t>
+            </a:r>
+            <a:endParaRPr lang="en-US" sz="1300" dirty="0"/>
+          </a:p>
+        </p:txBody>
+      </p:sp>
+      <p:sp>
+        <p:nvSpPr>
+          <p:cNvPr id="76" name="Shape 71"/>
+          <p:cNvSpPr/>
+          <p:nvPr/>
+        </p:nvSpPr>
+        <p:spPr>
+          <a:xfrm>
+            <a:off x="4078224" y="4818888"/>
+            <a:ext cx="347472" cy="347472"/>
+          </a:xfrm>
+          <a:prstGeom prst="ellipse">
+            <a:avLst/>
+          </a:prstGeom>
+          <a:solidFill>
+            <a:srgbClr val="D48A93"/>
+          </a:solidFill>
+          <a:ln/>
+        </p:spPr>
+      </p:sp>
+      <p:sp>
+        <p:nvSpPr>
+          <p:cNvPr id="77" name="Text 72"/>
+          <p:cNvSpPr txBox="1"/>
+          <p:nvPr/>
+        </p:nvSpPr>
+        <p:spPr>
+          <a:xfrm>
+            <a:off x="4078224" y="4818888"/>
+            <a:ext cx="347472" cy="347472"/>
+          </a:xfrm>
+          <a:prstGeom prst="rect">
+            <a:avLst/>
+          </a:prstGeom>
+          <a:noFill/>
+          <a:ln/>
+        </p:spPr>
+        <p:txBody>
+          <a:bodyPr wrap="square" lIns="0" tIns="0" rIns="0" bIns="0" rtlCol="0" anchor="ctr"/>
+          <a:lstStyle/>
+          <a:p>
+            <a:pPr algn="ctr" indent="0" marL="0">
+              <a:buNone/>
+            </a:pPr>
+            <a:r>
+              <a:rPr lang="en-US" sz="1300" b="1" dirty="0">
+                <a:solidFill>
+                  <a:srgbClr val="FFFFFF"/>
+                </a:solidFill>
+                <a:latin typeface="IBM Plex Sans Arabic" pitchFamily="34" charset="0"/>
+                <a:ea typeface="IBM Plex Sans Arabic" pitchFamily="34" charset="-122"/>
+                <a:cs typeface="IBM Plex Sans Arabic" pitchFamily="34" charset="-120"/>
+              </a:rPr>
+              <a:t>✕</a:t>
+            </a:r>
+            <a:endParaRPr lang="en-US" sz="1300" dirty="0"/>
+          </a:p>
+        </p:txBody>
+      </p:sp>
+      <p:sp>
+        <p:nvSpPr>
+          <p:cNvPr id="78" name="Shape 73"/>
+          <p:cNvSpPr/>
+          <p:nvPr/>
+        </p:nvSpPr>
+        <p:spPr>
+          <a:xfrm>
+            <a:off x="2560320" y="4818888"/>
+            <a:ext cx="347472" cy="347472"/>
+          </a:xfrm>
+          <a:prstGeom prst="ellipse">
+            <a:avLst/>
+          </a:prstGeom>
+          <a:solidFill>
+            <a:srgbClr val="D48A93"/>
+          </a:solidFill>
+          <a:ln/>
+        </p:spPr>
+      </p:sp>
+      <p:sp>
+        <p:nvSpPr>
+          <p:cNvPr id="79" name="Text 74"/>
+          <p:cNvSpPr txBox="1"/>
+          <p:nvPr/>
+        </p:nvSpPr>
+        <p:spPr>
+          <a:xfrm>
+            <a:off x="2560320" y="4818888"/>
+            <a:ext cx="347472" cy="347472"/>
+          </a:xfrm>
+          <a:prstGeom prst="rect">
+            <a:avLst/>
+          </a:prstGeom>
+          <a:noFill/>
+          <a:ln/>
+        </p:spPr>
+        <p:txBody>
+          <a:bodyPr wrap="square" lIns="0" tIns="0" rIns="0" bIns="0" rtlCol="0" anchor="ctr"/>
+          <a:lstStyle/>
+          <a:p>
+            <a:pPr algn="ctr" indent="0" marL="0">
+              <a:buNone/>
+            </a:pPr>
+            <a:r>
+              <a:rPr lang="en-US" sz="1300" b="1" dirty="0">
+                <a:solidFill>
+                  <a:srgbClr val="FFFFFF"/>
+                </a:solidFill>
+                <a:latin typeface="IBM Plex Sans Arabic" pitchFamily="34" charset="0"/>
+                <a:ea typeface="IBM Plex Sans Arabic" pitchFamily="34" charset="-122"/>
+                <a:cs typeface="IBM Plex Sans Arabic" pitchFamily="34" charset="-120"/>
+              </a:rPr>
+              <a:t>✕</a:t>
+            </a:r>
+            <a:endParaRPr lang="en-US" sz="1300" dirty="0"/>
+          </a:p>
+        </p:txBody>
+      </p:sp>
+      <p:sp>
+        <p:nvSpPr>
+          <p:cNvPr id="80" name="Shape 75"/>
+          <p:cNvSpPr/>
+          <p:nvPr/>
+        </p:nvSpPr>
+        <p:spPr>
+          <a:xfrm>
+            <a:off x="1042416" y="4818888"/>
+            <a:ext cx="347472" cy="347472"/>
+          </a:xfrm>
+          <a:prstGeom prst="ellipse">
+            <a:avLst/>
+          </a:prstGeom>
+          <a:solidFill>
+            <a:srgbClr val="D48A93"/>
+          </a:solidFill>
+          <a:ln/>
+        </p:spPr>
+      </p:sp>
+      <p:sp>
+        <p:nvSpPr>
+          <p:cNvPr id="81" name="Text 76"/>
+          <p:cNvSpPr txBox="1"/>
+          <p:nvPr/>
+        </p:nvSpPr>
+        <p:spPr>
+          <a:xfrm>
+            <a:off x="1042416" y="4818888"/>
+            <a:ext cx="347472" cy="347472"/>
+          </a:xfrm>
+          <a:prstGeom prst="rect">
+            <a:avLst/>
+          </a:prstGeom>
+          <a:noFill/>
+          <a:ln/>
+        </p:spPr>
+        <p:txBody>
+          <a:bodyPr wrap="square" lIns="0" tIns="0" rIns="0" bIns="0" rtlCol="0" anchor="ctr"/>
+          <a:lstStyle/>
+          <a:p>
+            <a:pPr algn="ctr" indent="0" marL="0">
+              <a:buNone/>
+            </a:pPr>
+            <a:r>
+              <a:rPr lang="en-US" sz="1300" b="1" dirty="0">
+                <a:solidFill>
+                  <a:srgbClr val="FFFFFF"/>
+                </a:solidFill>
+                <a:latin typeface="IBM Plex Sans Arabic" pitchFamily="34" charset="0"/>
+                <a:ea typeface="IBM Plex Sans Arabic" pitchFamily="34" charset="-122"/>
+                <a:cs typeface="IBM Plex Sans Arabic" pitchFamily="34" charset="-120"/>
+              </a:rPr>
+              <a:t>✕</a:t>
+            </a:r>
+            <a:endParaRPr lang="en-US" sz="1300" dirty="0"/>
+          </a:p>
+        </p:txBody>
+      </p:sp>
+      <p:sp>
+        <p:nvSpPr>
+          <p:cNvPr id="82" name="Shape 77"/>
+          <p:cNvSpPr/>
+          <p:nvPr/>
+        </p:nvSpPr>
+        <p:spPr>
+          <a:xfrm>
+            <a:off x="457200" y="5248656"/>
+            <a:ext cx="11277295" cy="0"/>
+          </a:xfrm>
+          <a:prstGeom prst="line">
+            <a:avLst/>
+          </a:prstGeom>
+          <a:noFill/>
+          <a:ln w="9525">
+            <a:solidFill>
+              <a:srgbClr val="E3D5CC"/>
+            </a:solidFill>
+            <a:prstDash val="solid"/>
+          </a:ln>
+        </p:spPr>
+      </p:sp>
+      <p:sp>
+        <p:nvSpPr>
+          <p:cNvPr id="83" name="Text 78"/>
+          <p:cNvSpPr txBox="1"/>
+          <p:nvPr/>
+        </p:nvSpPr>
+        <p:spPr>
+          <a:xfrm>
+            <a:off x="8229600" y="5248656"/>
+            <a:ext cx="3504895" cy="512064"/>
+          </a:xfrm>
+          <a:prstGeom prst="rect">
+            <a:avLst/>
+          </a:prstGeom>
+          <a:noFill/>
+          <a:ln/>
+        </p:spPr>
+        <p:txBody>
+          <a:bodyPr wrap="square" lIns="0" tIns="0" rIns="0" bIns="0" rtlCol="0" anchor="ctr"/>
+          <a:lstStyle/>
+          <a:p>
+            <a:pPr rtl="1" algn="r" indent="0" marL="0">
+              <a:buNone/>
+            </a:pPr>
+            <a:r>
+              <a:rPr lang="en-US" sz="1500" dirty="0">
+                <a:solidFill>
+                  <a:srgbClr val="21141A"/>
+                </a:solidFill>
+                <a:latin typeface="IBM Plex Sans Arabic" pitchFamily="34" charset="0"/>
+                <a:ea typeface="IBM Plex Sans Arabic" pitchFamily="34" charset="-122"/>
+                <a:cs typeface="IBM Plex Sans Arabic" pitchFamily="34" charset="-120"/>
+              </a:rPr>
+              <a:t>سعر مناسب للشركات المتوسطة</a:t>
+            </a:r>
+            <a:endParaRPr lang="en-US" sz="1500" dirty="0"/>
+          </a:p>
+        </p:txBody>
+      </p:sp>
+      <p:sp>
+        <p:nvSpPr>
+          <p:cNvPr id="84" name="Shape 79"/>
+          <p:cNvSpPr/>
+          <p:nvPr/>
+        </p:nvSpPr>
+        <p:spPr>
+          <a:xfrm>
+            <a:off x="7114032" y="5330952"/>
+            <a:ext cx="347472" cy="347472"/>
+          </a:xfrm>
+          <a:prstGeom prst="ellipse">
+            <a:avLst/>
+          </a:prstGeom>
+          <a:solidFill>
+            <a:srgbClr val="7FB27A"/>
+          </a:solidFill>
+          <a:ln/>
+        </p:spPr>
+      </p:sp>
+      <p:sp>
+        <p:nvSpPr>
+          <p:cNvPr id="85" name="Text 80"/>
+          <p:cNvSpPr txBox="1"/>
+          <p:nvPr/>
+        </p:nvSpPr>
+        <p:spPr>
+          <a:xfrm>
+            <a:off x="7114032" y="5330952"/>
+            <a:ext cx="347472" cy="347472"/>
+          </a:xfrm>
+          <a:prstGeom prst="rect">
+            <a:avLst/>
+          </a:prstGeom>
+          <a:noFill/>
+          <a:ln/>
+        </p:spPr>
+        <p:txBody>
+          <a:bodyPr wrap="square" lIns="0" tIns="0" rIns="0" bIns="0" rtlCol="0" anchor="ctr"/>
+          <a:lstStyle/>
+          <a:p>
+            <a:pPr algn="ctr" indent="0" marL="0">
+              <a:buNone/>
+            </a:pPr>
+            <a:r>
+              <a:rPr lang="en-US" sz="1300" b="1" dirty="0">
+                <a:solidFill>
+                  <a:srgbClr val="FFFFFF"/>
+                </a:solidFill>
+                <a:latin typeface="IBM Plex Sans Arabic" pitchFamily="34" charset="0"/>
+                <a:ea typeface="IBM Plex Sans Arabic" pitchFamily="34" charset="-122"/>
+                <a:cs typeface="IBM Plex Sans Arabic" pitchFamily="34" charset="-120"/>
+              </a:rPr>
+              <a:t>✓</a:t>
+            </a:r>
+            <a:endParaRPr lang="en-US" sz="1300" dirty="0"/>
+          </a:p>
+        </p:txBody>
+      </p:sp>
+      <p:sp>
+        <p:nvSpPr>
+          <p:cNvPr id="86" name="Shape 81"/>
+          <p:cNvSpPr/>
+          <p:nvPr/>
+        </p:nvSpPr>
+        <p:spPr>
+          <a:xfrm>
+            <a:off x="5596128" y="5330952"/>
+            <a:ext cx="347472" cy="347472"/>
+          </a:xfrm>
+          <a:prstGeom prst="ellipse">
+            <a:avLst/>
+          </a:prstGeom>
+          <a:solidFill>
+            <a:srgbClr val="7FB27A"/>
+          </a:solidFill>
+          <a:ln/>
+        </p:spPr>
+      </p:sp>
+      <p:sp>
+        <p:nvSpPr>
+          <p:cNvPr id="87" name="Text 82"/>
+          <p:cNvSpPr txBox="1"/>
+          <p:nvPr/>
+        </p:nvSpPr>
+        <p:spPr>
+          <a:xfrm>
+            <a:off x="5596128" y="5330952"/>
+            <a:ext cx="347472" cy="347472"/>
+          </a:xfrm>
+          <a:prstGeom prst="rect">
+            <a:avLst/>
+          </a:prstGeom>
+          <a:noFill/>
+          <a:ln/>
+        </p:spPr>
+        <p:txBody>
+          <a:bodyPr wrap="square" lIns="0" tIns="0" rIns="0" bIns="0" rtlCol="0" anchor="ctr"/>
+          <a:lstStyle/>
+          <a:p>
+            <a:pPr algn="ctr" indent="0" marL="0">
+              <a:buNone/>
+            </a:pPr>
+            <a:r>
+              <a:rPr lang="en-US" sz="1300" b="1" dirty="0">
+                <a:solidFill>
+                  <a:srgbClr val="FFFFFF"/>
+                </a:solidFill>
+                <a:latin typeface="IBM Plex Sans Arabic" pitchFamily="34" charset="0"/>
+                <a:ea typeface="IBM Plex Sans Arabic" pitchFamily="34" charset="-122"/>
+                <a:cs typeface="IBM Plex Sans Arabic" pitchFamily="34" charset="-120"/>
+              </a:rPr>
+              <a:t>✓</a:t>
+            </a:r>
+            <a:endParaRPr lang="en-US" sz="1300" dirty="0"/>
+          </a:p>
+        </p:txBody>
+      </p:sp>
+      <p:sp>
+        <p:nvSpPr>
+          <p:cNvPr id="88" name="Shape 83"/>
+          <p:cNvSpPr/>
+          <p:nvPr/>
+        </p:nvSpPr>
+        <p:spPr>
+          <a:xfrm>
+            <a:off x="4078224" y="5330952"/>
+            <a:ext cx="347472" cy="347472"/>
+          </a:xfrm>
+          <a:prstGeom prst="ellipse">
+            <a:avLst/>
+          </a:prstGeom>
+          <a:solidFill>
+            <a:srgbClr val="7FB27A"/>
+          </a:solidFill>
+          <a:ln/>
+        </p:spPr>
+      </p:sp>
+      <p:sp>
+        <p:nvSpPr>
+          <p:cNvPr id="89" name="Text 84"/>
+          <p:cNvSpPr txBox="1"/>
+          <p:nvPr/>
+        </p:nvSpPr>
+        <p:spPr>
+          <a:xfrm>
+            <a:off x="4078224" y="5330952"/>
+            <a:ext cx="347472" cy="347472"/>
+          </a:xfrm>
+          <a:prstGeom prst="rect">
+            <a:avLst/>
+          </a:prstGeom>
+          <a:noFill/>
+          <a:ln/>
+        </p:spPr>
+        <p:txBody>
+          <a:bodyPr wrap="square" lIns="0" tIns="0" rIns="0" bIns="0" rtlCol="0" anchor="ctr"/>
+          <a:lstStyle/>
+          <a:p>
+            <a:pPr algn="ctr" indent="0" marL="0">
+              <a:buNone/>
+            </a:pPr>
+            <a:r>
+              <a:rPr lang="en-US" sz="1300" b="1" dirty="0">
+                <a:solidFill>
+                  <a:srgbClr val="FFFFFF"/>
+                </a:solidFill>
+                <a:latin typeface="IBM Plex Sans Arabic" pitchFamily="34" charset="0"/>
+                <a:ea typeface="IBM Plex Sans Arabic" pitchFamily="34" charset="-122"/>
+                <a:cs typeface="IBM Plex Sans Arabic" pitchFamily="34" charset="-120"/>
+              </a:rPr>
+              <a:t>✓</a:t>
+            </a:r>
+            <a:endParaRPr lang="en-US" sz="1300" dirty="0"/>
+          </a:p>
+        </p:txBody>
+      </p:sp>
+      <p:sp>
+        <p:nvSpPr>
+          <p:cNvPr id="90" name="Shape 85"/>
+          <p:cNvSpPr/>
+          <p:nvPr/>
+        </p:nvSpPr>
+        <p:spPr>
+          <a:xfrm>
+            <a:off x="2560320" y="5330952"/>
+            <a:ext cx="347472" cy="347472"/>
+          </a:xfrm>
+          <a:prstGeom prst="ellipse">
+            <a:avLst/>
+          </a:prstGeom>
+          <a:solidFill>
+            <a:srgbClr val="7FB27A"/>
+          </a:solidFill>
+          <a:ln/>
+        </p:spPr>
+      </p:sp>
+      <p:sp>
+        <p:nvSpPr>
+          <p:cNvPr id="91" name="Text 86"/>
+          <p:cNvSpPr txBox="1"/>
+          <p:nvPr/>
+        </p:nvSpPr>
+        <p:spPr>
+          <a:xfrm>
+            <a:off x="2560320" y="5330952"/>
+            <a:ext cx="347472" cy="347472"/>
+          </a:xfrm>
+          <a:prstGeom prst="rect">
+            <a:avLst/>
+          </a:prstGeom>
+          <a:noFill/>
+          <a:ln/>
+        </p:spPr>
+        <p:txBody>
+          <a:bodyPr wrap="square" lIns="0" tIns="0" rIns="0" bIns="0" rtlCol="0" anchor="ctr"/>
+          <a:lstStyle/>
+          <a:p>
+            <a:pPr algn="ctr" indent="0" marL="0">
+              <a:buNone/>
+            </a:pPr>
+            <a:r>
+              <a:rPr lang="en-US" sz="1300" b="1" dirty="0">
+                <a:solidFill>
+                  <a:srgbClr val="FFFFFF"/>
+                </a:solidFill>
+                <a:latin typeface="IBM Plex Sans Arabic" pitchFamily="34" charset="0"/>
+                <a:ea typeface="IBM Plex Sans Arabic" pitchFamily="34" charset="-122"/>
+                <a:cs typeface="IBM Plex Sans Arabic" pitchFamily="34" charset="-120"/>
+              </a:rPr>
+              <a:t>✓</a:t>
+            </a:r>
+            <a:endParaRPr lang="en-US" sz="1300" dirty="0"/>
+          </a:p>
+        </p:txBody>
+      </p:sp>
+      <p:sp>
+        <p:nvSpPr>
+          <p:cNvPr id="92" name="Shape 87"/>
+          <p:cNvSpPr/>
+          <p:nvPr/>
+        </p:nvSpPr>
+        <p:spPr>
+          <a:xfrm>
+            <a:off x="1042416" y="5330952"/>
+            <a:ext cx="347472" cy="347472"/>
+          </a:xfrm>
+          <a:prstGeom prst="ellipse">
+            <a:avLst/>
+          </a:prstGeom>
+          <a:solidFill>
+            <a:srgbClr val="7FB27A"/>
+          </a:solidFill>
+          <a:ln/>
+        </p:spPr>
+      </p:sp>
+      <p:sp>
+        <p:nvSpPr>
+          <p:cNvPr id="93" name="Text 88"/>
+          <p:cNvSpPr txBox="1"/>
+          <p:nvPr/>
+        </p:nvSpPr>
+        <p:spPr>
+          <a:xfrm>
+            <a:off x="1042416" y="5330952"/>
+            <a:ext cx="347472" cy="347472"/>
+          </a:xfrm>
+          <a:prstGeom prst="rect">
+            <a:avLst/>
+          </a:prstGeom>
+          <a:noFill/>
+          <a:ln/>
+        </p:spPr>
+        <p:txBody>
+          <a:bodyPr wrap="square" lIns="0" tIns="0" rIns="0" bIns="0" rtlCol="0" anchor="ctr"/>
+          <a:lstStyle/>
+          <a:p>
+            <a:pPr algn="ctr" indent="0" marL="0">
+              <a:buNone/>
+            </a:pPr>
+            <a:r>
+              <a:rPr lang="en-US" sz="1300" b="1" dirty="0">
+                <a:solidFill>
+                  <a:srgbClr val="FFFFFF"/>
+                </a:solidFill>
+                <a:latin typeface="IBM Plex Sans Arabic" pitchFamily="34" charset="0"/>
+                <a:ea typeface="IBM Plex Sans Arabic" pitchFamily="34" charset="-122"/>
+                <a:cs typeface="IBM Plex Sans Arabic" pitchFamily="34" charset="-120"/>
+              </a:rPr>
+              <a:t>✓</a:t>
+            </a:r>
+            <a:endParaRPr lang="en-US" sz="1300" dirty="0"/>
+          </a:p>
+        </p:txBody>
+      </p:sp>
+      <p:sp>
+        <p:nvSpPr>
+          <p:cNvPr id="94" name="Shape 89"/>
+          <p:cNvSpPr/>
+          <p:nvPr/>
+        </p:nvSpPr>
+        <p:spPr>
+          <a:xfrm>
+            <a:off x="11551615" y="5943600"/>
+            <a:ext cx="182880" cy="182880"/>
+          </a:xfrm>
+          <a:prstGeom prst="ellipse">
+            <a:avLst/>
+          </a:prstGeom>
+          <a:solidFill>
+            <a:srgbClr val="7FB27A"/>
+          </a:solidFill>
+          <a:ln/>
+        </p:spPr>
+      </p:sp>
+      <p:sp>
+        <p:nvSpPr>
+          <p:cNvPr id="95" name="Text 90"/>
+          <p:cNvSpPr txBox="1"/>
+          <p:nvPr/>
+        </p:nvSpPr>
+        <p:spPr>
+          <a:xfrm>
+            <a:off x="10865815" y="5879592"/>
+            <a:ext cx="612648" cy="310896"/>
+          </a:xfrm>
+          <a:prstGeom prst="rect">
+            <a:avLst/>
+          </a:prstGeom>
+          <a:noFill/>
+          <a:ln/>
+        </p:spPr>
+        <p:txBody>
+          <a:bodyPr wrap="square" lIns="0" tIns="0" rIns="0" bIns="0" rtlCol="0" anchor="t"/>
+          <a:lstStyle/>
+          <a:p>
+            <a:pPr rtl="1" algn="r" indent="0" marL="0">
+              <a:buNone/>
+            </a:pPr>
+            <a:r>
+              <a:rPr lang="en-US" sz="1200" dirty="0">
                 <a:solidFill>
                   <a:srgbClr val="7F6C72"/>
                 </a:solidFill>
@@ -7399,9 +10139,127 @@
                 <a:ea typeface="IBM Plex Sans Arabic" pitchFamily="34" charset="-122"/>
                 <a:cs typeface="IBM Plex Sans Arabic" pitchFamily="34" charset="-120"/>
               </a:rPr>
-              <a:t>MarketsandMarkets</a:t>
-            </a:r>
-            <a:endParaRPr lang="en-US" sz="950" dirty="0"/>
+              <a:t>نعم</a:t>
+            </a:r>
+            <a:endParaRPr lang="en-US" sz="1200" dirty="0"/>
+          </a:p>
+        </p:txBody>
+      </p:sp>
+      <p:sp>
+        <p:nvSpPr>
+          <p:cNvPr id="96" name="Shape 91"/>
+          <p:cNvSpPr/>
+          <p:nvPr/>
+        </p:nvSpPr>
+        <p:spPr>
+          <a:xfrm>
+            <a:off x="10591495" y="5943600"/>
+            <a:ext cx="182880" cy="182880"/>
+          </a:xfrm>
+          <a:prstGeom prst="ellipse">
+            <a:avLst/>
+          </a:prstGeom>
+          <a:solidFill>
+            <a:srgbClr val="C9A46E"/>
+          </a:solidFill>
+          <a:ln/>
+        </p:spPr>
+      </p:sp>
+      <p:sp>
+        <p:nvSpPr>
+          <p:cNvPr id="97" name="Text 92"/>
+          <p:cNvSpPr txBox="1"/>
+          <p:nvPr/>
+        </p:nvSpPr>
+        <p:spPr>
+          <a:xfrm>
+            <a:off x="9905695" y="5879592"/>
+            <a:ext cx="612648" cy="310896"/>
+          </a:xfrm>
+          <a:prstGeom prst="rect">
+            <a:avLst/>
+          </a:prstGeom>
+          <a:noFill/>
+          <a:ln/>
+        </p:spPr>
+        <p:txBody>
+          <a:bodyPr wrap="square" lIns="0" tIns="0" rIns="0" bIns="0" rtlCol="0" anchor="t"/>
+          <a:lstStyle/>
+          <a:p>
+            <a:pPr rtl="1" algn="r" indent="0" marL="0">
+              <a:buNone/>
+            </a:pPr>
+            <a:r>
+              <a:rPr lang="en-US" sz="1200" dirty="0">
+                <a:solidFill>
+                  <a:srgbClr val="7F6C72"/>
+                </a:solidFill>
+                <a:latin typeface="IBM Plex Sans Arabic" pitchFamily="34" charset="0"/>
+                <a:ea typeface="IBM Plex Sans Arabic" pitchFamily="34" charset="-122"/>
+                <a:cs typeface="IBM Plex Sans Arabic" pitchFamily="34" charset="-120"/>
+              </a:rPr>
+              <a:t>جزئياً</a:t>
+            </a:r>
+            <a:endParaRPr lang="en-US" sz="1200" dirty="0"/>
+          </a:p>
+        </p:txBody>
+      </p:sp>
+      <p:sp>
+        <p:nvSpPr>
+          <p:cNvPr id="98" name="Shape 93"/>
+          <p:cNvSpPr/>
+          <p:nvPr/>
+        </p:nvSpPr>
+        <p:spPr>
+          <a:xfrm>
+            <a:off x="9631375" y="5943600"/>
+            <a:ext cx="182880" cy="182880"/>
+          </a:xfrm>
+          <a:prstGeom prst="ellipse">
+            <a:avLst/>
+          </a:prstGeom>
+          <a:solidFill>
+            <a:srgbClr val="D48A93"/>
+          </a:solidFill>
+          <a:ln/>
+        </p:spPr>
+      </p:sp>
+      <p:sp>
+        <p:nvSpPr>
+          <p:cNvPr id="99" name="Text 94"/>
+          <p:cNvSpPr txBox="1"/>
+          <p:nvPr/>
+        </p:nvSpPr>
+        <p:spPr>
+          <a:xfrm>
+            <a:off x="8945575" y="5879592"/>
+            <a:ext cx="612648" cy="310896"/>
+          </a:xfrm>
+          <a:prstGeom prst="rect">
+            <a:avLst/>
+          </a:prstGeom>
+          <a:noFill/>
+          <a:ln/>
+        </p:spPr>
+        <p:txBody>
+          <a:bodyPr wrap="square" lIns="0" tIns="0" rIns="0" bIns="0" rtlCol="0" anchor="t"/>
+          <a:lstStyle/>
+          <a:p>
+            <a:pPr rtl="1" algn="r" indent="0" marL="0">
+              <a:buNone/>
+            </a:pPr>
+            <a:r>
+              <a:rPr lang="en-US" sz="1200" dirty="0">
+                <a:solidFill>
+                  <a:srgbClr val="7F6C72"/>
+                </a:solidFill>
+                <a:latin typeface="IBM Plex Sans Arabic" pitchFamily="34" charset="0"/>
+                <a:ea typeface="IBM Plex Sans Arabic" pitchFamily="34" charset="-122"/>
+                <a:cs typeface="IBM Plex Sans Arabic" pitchFamily="34" charset="-120"/>
+              </a:rPr>
+              <a:t>لا</a:t>
+            </a:r>
+            <a:endParaRPr lang="en-US" sz="1200" dirty="0"/>
           </a:p>
         </p:txBody>
       </p:sp>
@@ -7772,8 +10630,8 @@
         </p:nvSpPr>
         <p:spPr>
           <a:xfrm>
-            <a:off x="9759391" y="987552"/>
-            <a:ext cx="1975104" cy="384048"/>
+            <a:off x="9654235" y="987552"/>
+            <a:ext cx="2080260" cy="384048"/>
           </a:xfrm>
           <a:prstGeom prst="roundRect">
             <a:avLst>
@@ -7794,8 +10652,8 @@
         </p:nvSpPr>
         <p:spPr>
           <a:xfrm>
-            <a:off x="9759391" y="987552"/>
-            <a:ext cx="1975104" cy="384048"/>
+            <a:off x="9654235" y="987552"/>
+            <a:ext cx="2080260" cy="384048"/>
           </a:xfrm>
           <a:prstGeom prst="rect">
             <a:avLst/>
@@ -7819,7 +10677,7 @@
                 <a:ea typeface="IBM Plex Sans Arabic" pitchFamily="34" charset="-122"/>
                 <a:cs typeface="IBM Plex Sans Arabic" pitchFamily="34" charset="-120"/>
               </a:rPr>
-              <a:t>قابلية التنفيذ</a:t>
+              <a:t>الفئة المستهدفة</a:t>
             </a:r>
             <a:endParaRPr lang="en-US" sz="1300" dirty="0"/>
           </a:p>
@@ -7960,7 +10818,7 @@
                 <a:ea typeface="IBM Plex Sans Arabic" pitchFamily="34" charset="-122"/>
                 <a:cs typeface="IBM Plex Sans Arabic" pitchFamily="34" charset="-120"/>
               </a:rPr>
-              <a:t>AWS اليوم، والسحب المحلية تالياً</a:t>
+              <a:t>شركات سعودية من 50 إلى 250 موظفاً</a:t>
             </a:r>
             <a:endParaRPr lang="en-US" sz="3400" dirty="0"/>
           </a:p>
@@ -7968,29 +10826,73 @@
       </p:sp>
       <p:sp>
         <p:nvSpPr>
-          <p:cNvPr id="23" name="Shape 18"/>
-          <p:cNvSpPr/>
-          <p:nvPr/>
-        </p:nvSpPr>
-        <p:spPr>
-          <a:xfrm>
-            <a:off x="8188757" y="2697480"/>
-            <a:ext cx="3545738" cy="2103120"/>
+          <p:cNvPr id="23" name="Text 18"/>
+          <p:cNvSpPr txBox="1"/>
+          <p:nvPr/>
+        </p:nvSpPr>
+        <p:spPr>
+          <a:xfrm>
+            <a:off x="457200" y="2331720"/>
+            <a:ext cx="11277295" cy="411480"/>
+          </a:xfrm>
+          <a:prstGeom prst="rect">
+            <a:avLst/>
+          </a:prstGeom>
+          <a:noFill/>
+          <a:ln/>
+        </p:spPr>
+        <p:txBody>
+          <a:bodyPr wrap="square" lIns="0" tIns="0" rIns="0" bIns="0" rtlCol="0" anchor="t"/>
+          <a:lstStyle/>
+          <a:p>
+            <a:pPr rtl="1" algn="r" indent="0" marL="0">
+              <a:buNone/>
+            </a:pPr>
+            <a:r>
+              <a:rPr lang="en-US" sz="1800" dirty="0">
+                <a:solidFill>
+                  <a:srgbClr val="7F6C72"/>
+                </a:solidFill>
+                <a:latin typeface="IBM Plex Sans Arabic" pitchFamily="34" charset="0"/>
+                <a:ea typeface="IBM Plex Sans Arabic" pitchFamily="34" charset="-122"/>
+                <a:cs typeface="IBM Plex Sans Arabic" pitchFamily="34" charset="-120"/>
+              </a:rPr>
+              <a:t>بلا فريق FinOps، وفاتورتها عشرات الآلاف شهرياً</a:t>
+            </a:r>
+            <a:endParaRPr lang="en-US" sz="1800" dirty="0"/>
+          </a:p>
+        </p:txBody>
+      </p:sp>
+      <p:sp>
+        <p:nvSpPr>
+          <p:cNvPr id="24" name="Shape 19"/>
+          <p:cNvSpPr/>
+          <p:nvPr/>
+        </p:nvSpPr>
+        <p:spPr>
+          <a:xfrm>
+            <a:off x="8188757" y="3063240"/>
+            <a:ext cx="3545738" cy="2377440"/>
           </a:xfrm>
           <a:prstGeom prst="roundRect">
             <a:avLst>
-              <a:gd name="adj" fmla="val 8696"/>
+              <a:gd name="adj" fmla="val 7692"/>
             </a:avLst>
           </a:prstGeom>
           <a:solidFill>
-            <a:srgbClr val="8E2F3C"/>
-          </a:solidFill>
-          <a:ln/>
+            <a:srgbClr val="FFFBF8"/>
+          </a:solidFill>
+          <a:ln w="9525">
+            <a:solidFill>
+              <a:srgbClr val="E3D5CC"/>
+            </a:solidFill>
+            <a:prstDash val="solid"/>
+          </a:ln>
         </p:spPr>
       </p:sp>
       <p:pic>
         <p:nvPicPr>
-          <p:cNvPr id="24" name="Image 3" descr="/tmp/claude-0/-home-claude/750ff410-f4aa-5276-9360-1e19d018b112/scratchpad/c/assets/i-cloud-cr.png">    </p:cNvPr>
+          <p:cNvPr id="25" name="Image 3" descr="/tmp/claude-0/-home-claude/750ff410-f4aa-5276-9360-1e19d018b112/scratchpad/c/assets/i-building-br.png">    </p:cNvPr>
           <p:cNvPicPr>
             <a:picLocks noChangeAspect="1"/>
           </p:cNvPicPr>
@@ -8004,8 +10906,8 @@
         </p:blipFill>
         <p:spPr>
           <a:xfrm>
-            <a:off x="9641586" y="2971800"/>
-            <a:ext cx="640080" cy="640080"/>
+            <a:off x="9687306" y="3337560"/>
+            <a:ext cx="548640" cy="548640"/>
           </a:xfrm>
           <a:prstGeom prst="rect">
             <a:avLst/>
@@ -8014,96 +10916,96 @@
       </p:pic>
       <p:sp>
         <p:nvSpPr>
-          <p:cNvPr id="25" name="Text 19"/>
-          <p:cNvSpPr txBox="1"/>
-          <p:nvPr/>
-        </p:nvSpPr>
-        <p:spPr>
-          <a:xfrm>
-            <a:off x="8188757" y="3703320"/>
-            <a:ext cx="3545738" cy="365760"/>
-          </a:xfrm>
-          <a:prstGeom prst="rect">
-            <a:avLst/>
-          </a:prstGeom>
-          <a:noFill/>
-          <a:ln/>
-        </p:spPr>
-        <p:txBody>
-          <a:bodyPr wrap="square" lIns="0" tIns="0" rIns="0" bIns="0" rtlCol="0" anchor="t"/>
+          <p:cNvPr id="26" name="Text 20"/>
+          <p:cNvSpPr txBox="1"/>
+          <p:nvPr/>
+        </p:nvSpPr>
+        <p:spPr>
+          <a:xfrm>
+            <a:off x="8188757" y="3931920"/>
+            <a:ext cx="3545738" cy="868680"/>
+          </a:xfrm>
+          <a:prstGeom prst="rect">
+            <a:avLst/>
+          </a:prstGeom>
+          <a:noFill/>
+          <a:ln/>
+        </p:spPr>
+        <p:txBody>
+          <a:bodyPr wrap="square" lIns="0" tIns="0" rIns="0" bIns="0" rtlCol="0" anchor="ctr"/>
+          <a:lstStyle/>
+          <a:p>
+            <a:pPr algn="ctr" indent="0" marL="0">
+              <a:buNone/>
+            </a:pPr>
+            <a:r>
+              <a:rPr lang="en-US" sz="4600" b="1" dirty="0">
+                <a:solidFill>
+                  <a:srgbClr val="8E2F3C"/>
+                </a:solidFill>
+                <a:latin typeface="IBM Plex Sans Arabic" pitchFamily="34" charset="0"/>
+                <a:ea typeface="IBM Plex Sans Arabic" pitchFamily="34" charset="-122"/>
+                <a:cs typeface="IBM Plex Sans Arabic" pitchFamily="34" charset="-120"/>
+              </a:rPr>
+              <a:t>50-250</a:t>
+            </a:r>
+            <a:endParaRPr lang="en-US" sz="4600" dirty="0"/>
+          </a:p>
+        </p:txBody>
+      </p:sp>
+      <p:sp>
+        <p:nvSpPr>
+          <p:cNvPr id="27" name="Text 21"/>
+          <p:cNvSpPr txBox="1"/>
+          <p:nvPr/>
+        </p:nvSpPr>
+        <p:spPr>
+          <a:xfrm>
+            <a:off x="8463077" y="4846320"/>
+            <a:ext cx="2997098" cy="411480"/>
+          </a:xfrm>
+          <a:prstGeom prst="rect">
+            <a:avLst/>
+          </a:prstGeom>
+          <a:noFill/>
+          <a:ln/>
+        </p:spPr>
+        <p:txBody>
+          <a:bodyPr wrap="square" lIns="0" tIns="0" rIns="0" bIns="0" rtlCol="0" anchor="ctr"/>
           <a:lstStyle/>
           <a:p>
             <a:pPr rtl="1" algn="ctr" indent="0" marL="0">
               <a:buNone/>
             </a:pPr>
             <a:r>
-              <a:rPr lang="en-US" sz="1600" dirty="0">
-                <a:solidFill>
-                  <a:srgbClr val="F1E4DF"/>
-                </a:solidFill>
-                <a:latin typeface="IBM Plex Sans Arabic" pitchFamily="34" charset="0"/>
-                <a:ea typeface="IBM Plex Sans Arabic" pitchFamily="34" charset="-122"/>
-                <a:cs typeface="IBM Plex Sans Arabic" pitchFamily="34" charset="-120"/>
-              </a:rPr>
-              <a:t>الآن</a:t>
-            </a:r>
-            <a:endParaRPr lang="en-US" sz="1600" dirty="0"/>
-          </a:p>
-        </p:txBody>
-      </p:sp>
-      <p:sp>
-        <p:nvSpPr>
-          <p:cNvPr id="26" name="Text 20"/>
-          <p:cNvSpPr txBox="1"/>
-          <p:nvPr/>
-        </p:nvSpPr>
-        <p:spPr>
-          <a:xfrm>
-            <a:off x="8188757" y="4069080"/>
-            <a:ext cx="3545738" cy="502920"/>
-          </a:xfrm>
-          <a:prstGeom prst="rect">
-            <a:avLst/>
-          </a:prstGeom>
-          <a:noFill/>
-          <a:ln/>
-        </p:spPr>
-        <p:txBody>
-          <a:bodyPr wrap="square" lIns="0" tIns="0" rIns="0" bIns="0" rtlCol="0" anchor="t"/>
-          <a:lstStyle/>
-          <a:p>
-            <a:pPr rtl="1" algn="ctr" indent="0" marL="0">
-              <a:buNone/>
-            </a:pPr>
-            <a:r>
-              <a:rPr lang="en-US" sz="2400" b="1" dirty="0">
-                <a:solidFill>
-                  <a:srgbClr val="FBF6EE"/>
-                </a:solidFill>
-                <a:latin typeface="IBM Plex Sans Arabic" pitchFamily="34" charset="0"/>
-                <a:ea typeface="IBM Plex Sans Arabic" pitchFamily="34" charset="-122"/>
-                <a:cs typeface="IBM Plex Sans Arabic" pitchFamily="34" charset="-120"/>
-              </a:rPr>
-              <a:t>AWS</a:t>
-            </a:r>
-            <a:endParaRPr lang="en-US" sz="2400" dirty="0"/>
-          </a:p>
-        </p:txBody>
-      </p:sp>
-      <p:sp>
-        <p:nvSpPr>
-          <p:cNvPr id="27" name="Shape 21"/>
-          <p:cNvSpPr/>
-          <p:nvPr/>
-        </p:nvSpPr>
-        <p:spPr>
-          <a:xfrm>
-            <a:off x="4322978" y="2697480"/>
-            <a:ext cx="3545738" cy="2103120"/>
+              <a:rPr lang="en-US" sz="1800" dirty="0">
+                <a:solidFill>
+                  <a:srgbClr val="21141A"/>
+                </a:solidFill>
+                <a:latin typeface="IBM Plex Sans Arabic" pitchFamily="34" charset="0"/>
+                <a:ea typeface="IBM Plex Sans Arabic" pitchFamily="34" charset="-122"/>
+                <a:cs typeface="IBM Plex Sans Arabic" pitchFamily="34" charset="-120"/>
+              </a:rPr>
+              <a:t>موظفاً</a:t>
+            </a:r>
+            <a:endParaRPr lang="en-US" sz="1800" dirty="0"/>
+          </a:p>
+        </p:txBody>
+      </p:sp>
+      <p:sp>
+        <p:nvSpPr>
+          <p:cNvPr id="28" name="Shape 22"/>
+          <p:cNvSpPr/>
+          <p:nvPr/>
+        </p:nvSpPr>
+        <p:spPr>
+          <a:xfrm>
+            <a:off x="4322978" y="3063240"/>
+            <a:ext cx="3545738" cy="2377440"/>
           </a:xfrm>
           <a:prstGeom prst="roundRect">
             <a:avLst>
-              <a:gd name="adj" fmla="val 8696"/>
+              <a:gd name="adj" fmla="val 7692"/>
             </a:avLst>
           </a:prstGeom>
           <a:solidFill>
@@ -8119,7 +11021,7 @@
       </p:sp>
       <p:pic>
         <p:nvPicPr>
-          <p:cNvPr id="28" name="Image 4" descr="/tmp/claude-0/-home-claude/750ff410-f4aa-5276-9360-1e19d018b112/scratchpad/c/assets/i-layers-br.png">    </p:cNvPr>
+          <p:cNvPr id="29" name="Image 4" descr="/tmp/claude-0/-home-claude/750ff410-f4aa-5276-9360-1e19d018b112/scratchpad/c/assets/i-cloud-br.png">    </p:cNvPr>
           <p:cNvPicPr>
             <a:picLocks noChangeAspect="1"/>
           </p:cNvPicPr>
@@ -8133,8 +11035,8 @@
         </p:blipFill>
         <p:spPr>
           <a:xfrm>
-            <a:off x="5775808" y="2971800"/>
-            <a:ext cx="640080" cy="640080"/>
+            <a:off x="5821528" y="3337560"/>
+            <a:ext cx="548640" cy="548640"/>
           </a:xfrm>
           <a:prstGeom prst="rect">
             <a:avLst/>
@@ -8143,112 +11045,107 @@
       </p:pic>
       <p:sp>
         <p:nvSpPr>
-          <p:cNvPr id="29" name="Text 22"/>
-          <p:cNvSpPr txBox="1"/>
-          <p:nvPr/>
-        </p:nvSpPr>
-        <p:spPr>
-          <a:xfrm>
-            <a:off x="4322978" y="3703320"/>
-            <a:ext cx="3545738" cy="365760"/>
-          </a:xfrm>
-          <a:prstGeom prst="rect">
-            <a:avLst/>
-          </a:prstGeom>
-          <a:noFill/>
-          <a:ln/>
-        </p:spPr>
-        <p:txBody>
-          <a:bodyPr wrap="square" lIns="0" tIns="0" rIns="0" bIns="0" rtlCol="0" anchor="t"/>
+          <p:cNvPr id="30" name="Text 23"/>
+          <p:cNvSpPr txBox="1"/>
+          <p:nvPr/>
+        </p:nvSpPr>
+        <p:spPr>
+          <a:xfrm>
+            <a:off x="4322978" y="3931920"/>
+            <a:ext cx="3545738" cy="868680"/>
+          </a:xfrm>
+          <a:prstGeom prst="rect">
+            <a:avLst/>
+          </a:prstGeom>
+          <a:noFill/>
+          <a:ln/>
+        </p:spPr>
+        <p:txBody>
+          <a:bodyPr wrap="square" lIns="0" tIns="0" rIns="0" bIns="0" rtlCol="0" anchor="ctr"/>
+          <a:lstStyle/>
+          <a:p>
+            <a:pPr algn="ctr" indent="0" marL="0">
+              <a:buNone/>
+            </a:pPr>
+            <a:r>
+              <a:rPr lang="en-US" sz="4600" b="1" dirty="0">
+                <a:solidFill>
+                  <a:srgbClr val="8E2F3C"/>
+                </a:solidFill>
+                <a:latin typeface="IBM Plex Sans Arabic" pitchFamily="34" charset="0"/>
+                <a:ea typeface="IBM Plex Sans Arabic" pitchFamily="34" charset="-122"/>
+                <a:cs typeface="IBM Plex Sans Arabic" pitchFamily="34" charset="-120"/>
+              </a:rPr>
+              <a:t>$5.1B</a:t>
+            </a:r>
+            <a:endParaRPr lang="en-US" sz="4600" dirty="0"/>
+          </a:p>
+        </p:txBody>
+      </p:sp>
+      <p:sp>
+        <p:nvSpPr>
+          <p:cNvPr id="31" name="Text 24"/>
+          <p:cNvSpPr txBox="1"/>
+          <p:nvPr/>
+        </p:nvSpPr>
+        <p:spPr>
+          <a:xfrm>
+            <a:off x="4597298" y="4846320"/>
+            <a:ext cx="2997098" cy="411480"/>
+          </a:xfrm>
+          <a:prstGeom prst="rect">
+            <a:avLst/>
+          </a:prstGeom>
+          <a:noFill/>
+          <a:ln/>
+        </p:spPr>
+        <p:txBody>
+          <a:bodyPr wrap="square" lIns="0" tIns="0" rIns="0" bIns="0" rtlCol="0" anchor="ctr"/>
           <a:lstStyle/>
           <a:p>
             <a:pPr rtl="1" algn="ctr" indent="0" marL="0">
               <a:buNone/>
             </a:pPr>
             <a:r>
-              <a:rPr lang="en-US" sz="1600" dirty="0">
-                <a:solidFill>
-                  <a:srgbClr val="7F6C72"/>
-                </a:solidFill>
-                <a:latin typeface="IBM Plex Sans Arabic" pitchFamily="34" charset="0"/>
-                <a:ea typeface="IBM Plex Sans Arabic" pitchFamily="34" charset="-122"/>
-                <a:cs typeface="IBM Plex Sans Arabic" pitchFamily="34" charset="-120"/>
-              </a:rPr>
-              <a:t>التالي</a:t>
-            </a:r>
-            <a:endParaRPr lang="en-US" sz="1600" dirty="0"/>
-          </a:p>
-        </p:txBody>
-      </p:sp>
-      <p:sp>
-        <p:nvSpPr>
-          <p:cNvPr id="30" name="Text 23"/>
-          <p:cNvSpPr txBox="1"/>
-          <p:nvPr/>
-        </p:nvSpPr>
-        <p:spPr>
-          <a:xfrm>
-            <a:off x="4322978" y="4069080"/>
-            <a:ext cx="3545738" cy="502920"/>
-          </a:xfrm>
-          <a:prstGeom prst="rect">
-            <a:avLst/>
-          </a:prstGeom>
-          <a:noFill/>
-          <a:ln/>
-        </p:spPr>
-        <p:txBody>
-          <a:bodyPr wrap="square" lIns="0" tIns="0" rIns="0" bIns="0" rtlCol="0" anchor="t"/>
-          <a:lstStyle/>
-          <a:p>
-            <a:pPr rtl="1" algn="ctr" indent="0" marL="0">
-              <a:buNone/>
-            </a:pPr>
-            <a:r>
-              <a:rPr lang="en-US" sz="2400" b="1" dirty="0">
-                <a:solidFill>
-                  <a:srgbClr val="8E2F3C"/>
-                </a:solidFill>
-                <a:latin typeface="IBM Plex Sans Arabic" pitchFamily="34" charset="0"/>
-                <a:ea typeface="IBM Plex Sans Arabic" pitchFamily="34" charset="-122"/>
-                <a:cs typeface="IBM Plex Sans Arabic" pitchFamily="34" charset="-120"/>
-              </a:rPr>
-              <a:t>Azure وGCP</a:t>
-            </a:r>
-            <a:endParaRPr lang="en-US" sz="2400" dirty="0"/>
-          </a:p>
-        </p:txBody>
-      </p:sp>
-      <p:sp>
-        <p:nvSpPr>
-          <p:cNvPr id="31" name="Shape 24"/>
-          <p:cNvSpPr/>
-          <p:nvPr/>
-        </p:nvSpPr>
-        <p:spPr>
-          <a:xfrm>
-            <a:off x="457200" y="2697480"/>
-            <a:ext cx="3545738" cy="2103120"/>
+              <a:rPr lang="en-US" sz="1800" dirty="0">
+                <a:solidFill>
+                  <a:srgbClr val="21141A"/>
+                </a:solidFill>
+                <a:latin typeface="IBM Plex Sans Arabic" pitchFamily="34" charset="0"/>
+                <a:ea typeface="IBM Plex Sans Arabic" pitchFamily="34" charset="-122"/>
+                <a:cs typeface="IBM Plex Sans Arabic" pitchFamily="34" charset="-120"/>
+              </a:rPr>
+              <a:t>سوق السحابة السعودي 2025</a:t>
+            </a:r>
+            <a:endParaRPr lang="en-US" sz="1800" dirty="0"/>
+          </a:p>
+        </p:txBody>
+      </p:sp>
+      <p:sp>
+        <p:nvSpPr>
+          <p:cNvPr id="32" name="Shape 25"/>
+          <p:cNvSpPr/>
+          <p:nvPr/>
+        </p:nvSpPr>
+        <p:spPr>
+          <a:xfrm>
+            <a:off x="457200" y="3063240"/>
+            <a:ext cx="3545738" cy="2377440"/>
           </a:xfrm>
           <a:prstGeom prst="roundRect">
             <a:avLst>
-              <a:gd name="adj" fmla="val 8696"/>
+              <a:gd name="adj" fmla="val 7692"/>
             </a:avLst>
           </a:prstGeom>
           <a:solidFill>
-            <a:srgbClr val="FFFBF8"/>
-          </a:solidFill>
-          <a:ln w="9525">
-            <a:solidFill>
-              <a:srgbClr val="E3D5CC"/>
-            </a:solidFill>
-            <a:prstDash val="solid"/>
-          </a:ln>
+            <a:srgbClr val="8E2F3C"/>
+          </a:solidFill>
+          <a:ln/>
         </p:spPr>
       </p:sp>
       <p:pic>
         <p:nvPicPr>
-          <p:cNvPr id="32" name="Image 5" descr="/tmp/claude-0/-home-claude/750ff410-f4aa-5276-9360-1e19d018b112/scratchpad/c/assets/i-map-br.png">    </p:cNvPr>
+          <p:cNvPr id="33" name="Image 5" descr="/tmp/claude-0/-home-claude/750ff410-f4aa-5276-9360-1e19d018b112/scratchpad/c/assets/i-trend-cr.png">    </p:cNvPr>
           <p:cNvPicPr>
             <a:picLocks noChangeAspect="1"/>
           </p:cNvPicPr>
@@ -8262,8 +11159,8 @@
         </p:blipFill>
         <p:spPr>
           <a:xfrm>
-            <a:off x="1910029" y="2971800"/>
-            <a:ext cx="640080" cy="640080"/>
+            <a:off x="1955749" y="3337560"/>
+            <a:ext cx="548640" cy="548640"/>
           </a:xfrm>
           <a:prstGeom prst="rect">
             <a:avLst/>
@@ -8272,30 +11169,108 @@
       </p:pic>
       <p:sp>
         <p:nvSpPr>
-          <p:cNvPr id="33" name="Text 25"/>
-          <p:cNvSpPr txBox="1"/>
-          <p:nvPr/>
-        </p:nvSpPr>
-        <p:spPr>
-          <a:xfrm>
-            <a:off x="457200" y="3703320"/>
-            <a:ext cx="3545738" cy="365760"/>
-          </a:xfrm>
-          <a:prstGeom prst="rect">
-            <a:avLst/>
-          </a:prstGeom>
-          <a:noFill/>
-          <a:ln/>
-        </p:spPr>
-        <p:txBody>
-          <a:bodyPr wrap="square" lIns="0" tIns="0" rIns="0" bIns="0" rtlCol="0" anchor="t"/>
+          <p:cNvPr id="34" name="Text 26"/>
+          <p:cNvSpPr txBox="1"/>
+          <p:nvPr/>
+        </p:nvSpPr>
+        <p:spPr>
+          <a:xfrm>
+            <a:off x="457200" y="3931920"/>
+            <a:ext cx="3545738" cy="868680"/>
+          </a:xfrm>
+          <a:prstGeom prst="rect">
+            <a:avLst/>
+          </a:prstGeom>
+          <a:noFill/>
+          <a:ln/>
+        </p:spPr>
+        <p:txBody>
+          <a:bodyPr wrap="square" lIns="0" tIns="0" rIns="0" bIns="0" rtlCol="0" anchor="ctr"/>
+          <a:lstStyle/>
+          <a:p>
+            <a:pPr algn="ctr" indent="0" marL="0">
+              <a:buNone/>
+            </a:pPr>
+            <a:r>
+              <a:rPr lang="en-US" sz="4600" b="1" dirty="0">
+                <a:solidFill>
+                  <a:srgbClr val="FBF6EE"/>
+                </a:solidFill>
+                <a:latin typeface="IBM Plex Sans Arabic" pitchFamily="34" charset="0"/>
+                <a:ea typeface="IBM Plex Sans Arabic" pitchFamily="34" charset="-122"/>
+                <a:cs typeface="IBM Plex Sans Arabic" pitchFamily="34" charset="-120"/>
+              </a:rPr>
+              <a:t>$14.6B</a:t>
+            </a:r>
+            <a:endParaRPr lang="en-US" sz="4600" dirty="0"/>
+          </a:p>
+        </p:txBody>
+      </p:sp>
+      <p:sp>
+        <p:nvSpPr>
+          <p:cNvPr id="35" name="Text 27"/>
+          <p:cNvSpPr txBox="1"/>
+          <p:nvPr/>
+        </p:nvSpPr>
+        <p:spPr>
+          <a:xfrm>
+            <a:off x="731520" y="4846320"/>
+            <a:ext cx="2997098" cy="411480"/>
+          </a:xfrm>
+          <a:prstGeom prst="rect">
+            <a:avLst/>
+          </a:prstGeom>
+          <a:noFill/>
+          <a:ln/>
+        </p:spPr>
+        <p:txBody>
+          <a:bodyPr wrap="square" lIns="0" tIns="0" rIns="0" bIns="0" rtlCol="0" anchor="ctr"/>
           <a:lstStyle/>
           <a:p>
             <a:pPr rtl="1" algn="ctr" indent="0" marL="0">
               <a:buNone/>
             </a:pPr>
             <a:r>
-              <a:rPr lang="en-US" sz="1600" dirty="0">
+              <a:rPr lang="en-US" sz="1800" dirty="0">
+                <a:solidFill>
+                  <a:srgbClr val="FBF6EE"/>
+                </a:solidFill>
+                <a:latin typeface="IBM Plex Sans Arabic" pitchFamily="34" charset="0"/>
+                <a:ea typeface="IBM Plex Sans Arabic" pitchFamily="34" charset="-122"/>
+                <a:cs typeface="IBM Plex Sans Arabic" pitchFamily="34" charset="-120"/>
+              </a:rPr>
+              <a:t>المتوقع 2030</a:t>
+            </a:r>
+            <a:endParaRPr lang="en-US" sz="1800" dirty="0"/>
+          </a:p>
+        </p:txBody>
+      </p:sp>
+      <p:sp>
+        <p:nvSpPr>
+          <p:cNvPr id="36" name="Text 28"/>
+          <p:cNvSpPr txBox="1"/>
+          <p:nvPr/>
+        </p:nvSpPr>
+        <p:spPr>
+          <a:xfrm>
+            <a:off x="457200" y="5989320"/>
+            <a:ext cx="11277295" cy="237744"/>
+          </a:xfrm>
+          <a:prstGeom prst="rect">
+            <a:avLst/>
+          </a:prstGeom>
+          <a:noFill/>
+          <a:ln/>
+        </p:spPr>
+        <p:txBody>
+          <a:bodyPr wrap="square" lIns="0" tIns="0" rIns="0" bIns="0" rtlCol="0" anchor="ctr"/>
+          <a:lstStyle/>
+          <a:p>
+            <a:pPr algn="r" indent="0" marL="0">
+              <a:buNone/>
+            </a:pPr>
+            <a:r>
+              <a:rPr lang="en-US" sz="950" dirty="0">
                 <a:solidFill>
                   <a:srgbClr val="7F6C72"/>
                 </a:solidFill>
@@ -8303,312 +11278,9 @@
                 <a:ea typeface="IBM Plex Sans Arabic" pitchFamily="34" charset="-122"/>
                 <a:cs typeface="IBM Plex Sans Arabic" pitchFamily="34" charset="-120"/>
               </a:rPr>
-              <a:t>ثم</a:t>
-            </a:r>
-            <a:endParaRPr lang="en-US" sz="1600" dirty="0"/>
-          </a:p>
-        </p:txBody>
-      </p:sp>
-      <p:sp>
-        <p:nvSpPr>
-          <p:cNvPr id="34" name="Text 26"/>
-          <p:cNvSpPr txBox="1"/>
-          <p:nvPr/>
-        </p:nvSpPr>
-        <p:spPr>
-          <a:xfrm>
-            <a:off x="457200" y="4069080"/>
-            <a:ext cx="3545738" cy="502920"/>
-          </a:xfrm>
-          <a:prstGeom prst="rect">
-            <a:avLst/>
-          </a:prstGeom>
-          <a:noFill/>
-          <a:ln/>
-        </p:spPr>
-        <p:txBody>
-          <a:bodyPr wrap="square" lIns="0" tIns="0" rIns="0" bIns="0" rtlCol="0" anchor="t"/>
-          <a:lstStyle/>
-          <a:p>
-            <a:pPr rtl="1" algn="ctr" indent="0" marL="0">
-              <a:buNone/>
-            </a:pPr>
-            <a:r>
-              <a:rPr lang="en-US" sz="2400" b="1" dirty="0">
-                <a:solidFill>
-                  <a:srgbClr val="8E2F3C"/>
-                </a:solidFill>
-                <a:latin typeface="IBM Plex Sans Arabic" pitchFamily="34" charset="0"/>
-                <a:ea typeface="IBM Plex Sans Arabic" pitchFamily="34" charset="-122"/>
-                <a:cs typeface="IBM Plex Sans Arabic" pitchFamily="34" charset="-120"/>
-              </a:rPr>
-              <a:t>STC وSCCC وCNTXT</a:t>
-            </a:r>
-            <a:endParaRPr lang="en-US" sz="2400" dirty="0"/>
-          </a:p>
-        </p:txBody>
-      </p:sp>
-      <p:sp>
-        <p:nvSpPr>
-          <p:cNvPr id="35" name="Shape 27"/>
-          <p:cNvSpPr/>
-          <p:nvPr/>
-        </p:nvSpPr>
-        <p:spPr>
-          <a:xfrm>
-            <a:off x="7353148" y="5257800"/>
-            <a:ext cx="1097280" cy="384048"/>
-          </a:xfrm>
-          <a:prstGeom prst="roundRect">
-            <a:avLst>
-              <a:gd name="adj" fmla="val 50000"/>
-            </a:avLst>
-          </a:prstGeom>
-          <a:solidFill>
-            <a:srgbClr val="FFFBF8"/>
-          </a:solidFill>
-          <a:ln w="9525">
-            <a:solidFill>
-              <a:srgbClr val="E3D5CC"/>
-            </a:solidFill>
-            <a:prstDash val="solid"/>
-          </a:ln>
-        </p:spPr>
-      </p:sp>
-      <p:sp>
-        <p:nvSpPr>
-          <p:cNvPr id="36" name="Text 28"/>
-          <p:cNvSpPr txBox="1"/>
-          <p:nvPr/>
-        </p:nvSpPr>
-        <p:spPr>
-          <a:xfrm>
-            <a:off x="7353148" y="5257800"/>
-            <a:ext cx="1097280" cy="384048"/>
-          </a:xfrm>
-          <a:prstGeom prst="rect">
-            <a:avLst/>
-          </a:prstGeom>
-          <a:noFill/>
-          <a:ln/>
-        </p:spPr>
-        <p:txBody>
-          <a:bodyPr wrap="square" lIns="0" tIns="0" rIns="0" bIns="0" rtlCol="0" anchor="ctr"/>
-          <a:lstStyle/>
-          <a:p>
-            <a:pPr rtl="1" algn="ctr" indent="0" marL="0">
-              <a:buNone/>
-            </a:pPr>
-            <a:r>
-              <a:rPr lang="en-US" sz="1300" b="1" dirty="0">
-                <a:solidFill>
-                  <a:srgbClr val="21141A"/>
-                </a:solidFill>
-                <a:latin typeface="IBM Plex Sans Arabic" pitchFamily="34" charset="0"/>
-                <a:ea typeface="IBM Plex Sans Arabic" pitchFamily="34" charset="-122"/>
-                <a:cs typeface="IBM Plex Sans Arabic" pitchFamily="34" charset="-120"/>
-              </a:rPr>
-              <a:t>Next.js</a:t>
-            </a:r>
-            <a:endParaRPr lang="en-US" sz="1300" dirty="0"/>
-          </a:p>
-        </p:txBody>
-      </p:sp>
-      <p:sp>
-        <p:nvSpPr>
-          <p:cNvPr id="37" name="Shape 29"/>
-          <p:cNvSpPr/>
-          <p:nvPr/>
-        </p:nvSpPr>
-        <p:spPr>
-          <a:xfrm>
-            <a:off x="5844388" y="5257800"/>
-            <a:ext cx="1371600" cy="384048"/>
-          </a:xfrm>
-          <a:prstGeom prst="roundRect">
-            <a:avLst>
-              <a:gd name="adj" fmla="val 50000"/>
-            </a:avLst>
-          </a:prstGeom>
-          <a:solidFill>
-            <a:srgbClr val="FFFBF8"/>
-          </a:solidFill>
-          <a:ln w="9525">
-            <a:solidFill>
-              <a:srgbClr val="E3D5CC"/>
-            </a:solidFill>
-            <a:prstDash val="solid"/>
-          </a:ln>
-        </p:spPr>
-      </p:sp>
-      <p:sp>
-        <p:nvSpPr>
-          <p:cNvPr id="38" name="Text 30"/>
-          <p:cNvSpPr txBox="1"/>
-          <p:nvPr/>
-        </p:nvSpPr>
-        <p:spPr>
-          <a:xfrm>
-            <a:off x="5844388" y="5257800"/>
-            <a:ext cx="1371600" cy="384048"/>
-          </a:xfrm>
-          <a:prstGeom prst="rect">
-            <a:avLst/>
-          </a:prstGeom>
-          <a:noFill/>
-          <a:ln/>
-        </p:spPr>
-        <p:txBody>
-          <a:bodyPr wrap="square" lIns="0" tIns="0" rIns="0" bIns="0" rtlCol="0" anchor="ctr"/>
-          <a:lstStyle/>
-          <a:p>
-            <a:pPr rtl="1" algn="ctr" indent="0" marL="0">
-              <a:buNone/>
-            </a:pPr>
-            <a:r>
-              <a:rPr lang="en-US" sz="1300" b="1" dirty="0">
-                <a:solidFill>
-                  <a:srgbClr val="21141A"/>
-                </a:solidFill>
-                <a:latin typeface="IBM Plex Sans Arabic" pitchFamily="34" charset="0"/>
-                <a:ea typeface="IBM Plex Sans Arabic" pitchFamily="34" charset="-122"/>
-                <a:cs typeface="IBM Plex Sans Arabic" pitchFamily="34" charset="-120"/>
-              </a:rPr>
-              <a:t>Cloud APIs</a:t>
-            </a:r>
-            <a:endParaRPr lang="en-US" sz="1300" dirty="0"/>
-          </a:p>
-        </p:txBody>
-      </p:sp>
-      <p:sp>
-        <p:nvSpPr>
-          <p:cNvPr id="39" name="Shape 31"/>
-          <p:cNvSpPr/>
-          <p:nvPr/>
-        </p:nvSpPr>
-        <p:spPr>
-          <a:xfrm>
-            <a:off x="5067148" y="5257800"/>
-            <a:ext cx="640080" cy="384048"/>
-          </a:xfrm>
-          <a:prstGeom prst="roundRect">
-            <a:avLst>
-              <a:gd name="adj" fmla="val 50000"/>
-            </a:avLst>
-          </a:prstGeom>
-          <a:solidFill>
-            <a:srgbClr val="FFFBF8"/>
-          </a:solidFill>
-          <a:ln w="9525">
-            <a:solidFill>
-              <a:srgbClr val="E3D5CC"/>
-            </a:solidFill>
-            <a:prstDash val="solid"/>
-          </a:ln>
-        </p:spPr>
-      </p:sp>
-      <p:sp>
-        <p:nvSpPr>
-          <p:cNvPr id="40" name="Text 32"/>
-          <p:cNvSpPr txBox="1"/>
-          <p:nvPr/>
-        </p:nvSpPr>
-        <p:spPr>
-          <a:xfrm>
-            <a:off x="5067148" y="5257800"/>
-            <a:ext cx="640080" cy="384048"/>
-          </a:xfrm>
-          <a:prstGeom prst="rect">
-            <a:avLst/>
-          </a:prstGeom>
-          <a:noFill/>
-          <a:ln/>
-        </p:spPr>
-        <p:txBody>
-          <a:bodyPr wrap="square" lIns="0" tIns="0" rIns="0" bIns="0" rtlCol="0" anchor="ctr"/>
-          <a:lstStyle/>
-          <a:p>
-            <a:pPr rtl="1" algn="ctr" indent="0" marL="0">
-              <a:buNone/>
-            </a:pPr>
-            <a:r>
-              <a:rPr lang="en-US" sz="1300" b="1" dirty="0">
-                <a:solidFill>
-                  <a:srgbClr val="21141A"/>
-                </a:solidFill>
-                <a:latin typeface="IBM Plex Sans Arabic" pitchFamily="34" charset="0"/>
-                <a:ea typeface="IBM Plex Sans Arabic" pitchFamily="34" charset="-122"/>
-                <a:cs typeface="IBM Plex Sans Arabic" pitchFamily="34" charset="-120"/>
-              </a:rPr>
-              <a:t>AI</a:t>
-            </a:r>
-            <a:endParaRPr lang="en-US" sz="1300" dirty="0"/>
-          </a:p>
-        </p:txBody>
-      </p:sp>
-      <p:sp>
-        <p:nvSpPr>
-          <p:cNvPr id="41" name="Shape 33"/>
-          <p:cNvSpPr/>
-          <p:nvPr/>
-        </p:nvSpPr>
-        <p:spPr>
-          <a:xfrm>
-            <a:off x="3741268" y="5257800"/>
-            <a:ext cx="1188720" cy="384048"/>
-          </a:xfrm>
-          <a:prstGeom prst="roundRect">
-            <a:avLst>
-              <a:gd name="adj" fmla="val 50000"/>
-            </a:avLst>
-          </a:prstGeom>
-          <a:solidFill>
-            <a:srgbClr val="FFFBF8"/>
-          </a:solidFill>
-          <a:ln w="9525">
-            <a:solidFill>
-              <a:srgbClr val="E3D5CC"/>
-            </a:solidFill>
-            <a:prstDash val="solid"/>
-          </a:ln>
-        </p:spPr>
-      </p:sp>
-      <p:sp>
-        <p:nvSpPr>
-          <p:cNvPr id="42" name="Text 34"/>
-          <p:cNvSpPr txBox="1"/>
-          <p:nvPr/>
-        </p:nvSpPr>
-        <p:spPr>
-          <a:xfrm>
-            <a:off x="3741268" y="5257800"/>
-            <a:ext cx="1188720" cy="384048"/>
-          </a:xfrm>
-          <a:prstGeom prst="rect">
-            <a:avLst/>
-          </a:prstGeom>
-          <a:noFill/>
-          <a:ln/>
-        </p:spPr>
-        <p:txBody>
-          <a:bodyPr wrap="square" lIns="0" tIns="0" rIns="0" bIns="0" rtlCol="0" anchor="ctr"/>
-          <a:lstStyle/>
-          <a:p>
-            <a:pPr rtl="1" algn="ctr" indent="0" marL="0">
-              <a:buNone/>
-            </a:pPr>
-            <a:r>
-              <a:rPr lang="en-US" sz="1300" b="1" dirty="0">
-                <a:solidFill>
-                  <a:srgbClr val="21141A"/>
-                </a:solidFill>
-                <a:latin typeface="IBM Plex Sans Arabic" pitchFamily="34" charset="0"/>
-                <a:ea typeface="IBM Plex Sans Arabic" pitchFamily="34" charset="-122"/>
-                <a:cs typeface="IBM Plex Sans Arabic" pitchFamily="34" charset="-120"/>
-              </a:rPr>
-              <a:t>Telegram</a:t>
-            </a:r>
-            <a:endParaRPr lang="en-US" sz="1300" dirty="0"/>
+              <a:t>MarketsandMarkets</a:t>
+            </a:r>
+            <a:endParaRPr lang="en-US" sz="950" dirty="0"/>
           </a:p>
         </p:txBody>
       </p:sp>
@@ -9026,7 +11698,7 @@
                 <a:ea typeface="IBM Plex Sans Arabic" pitchFamily="34" charset="-122"/>
                 <a:cs typeface="IBM Plex Sans Arabic" pitchFamily="34" charset="-120"/>
               </a:rPr>
-              <a:t>النموذج الأولي</a:t>
+              <a:t>قابلية التنفيذ</a:t>
             </a:r>
             <a:endParaRPr lang="en-US" sz="1300" dirty="0"/>
           </a:p>
@@ -9167,7 +11839,7 @@
                 <a:ea typeface="IBM Plex Sans Arabic" pitchFamily="34" charset="-122"/>
                 <a:cs typeface="IBM Plex Sans Arabic" pitchFamily="34" charset="-120"/>
               </a:rPr>
-              <a:t>يعمل الآن، جرّبه بنفسك</a:t>
+              <a:t>AWS اليوم، والسحب المحلية تالياً</a:t>
             </a:r>
             <a:endParaRPr lang="en-US" sz="3400" dirty="0"/>
           </a:p>
@@ -9181,28 +11853,23 @@
         </p:nvSpPr>
         <p:spPr>
           <a:xfrm>
-            <a:off x="5699455" y="2606040"/>
-            <a:ext cx="6035040" cy="3278124"/>
+            <a:off x="8188757" y="2697480"/>
+            <a:ext cx="3545738" cy="2103120"/>
           </a:xfrm>
           <a:prstGeom prst="roundRect">
             <a:avLst>
-              <a:gd name="adj" fmla="val 3347"/>
+              <a:gd name="adj" fmla="val 8696"/>
             </a:avLst>
           </a:prstGeom>
           <a:solidFill>
-            <a:srgbClr val="FFFBF8"/>
-          </a:solidFill>
-          <a:ln w="9525">
-            <a:solidFill>
-              <a:srgbClr val="E3D5CC"/>
-            </a:solidFill>
-            <a:prstDash val="solid"/>
-          </a:ln>
+            <a:srgbClr val="8E2F3C"/>
+          </a:solidFill>
+          <a:ln/>
         </p:spPr>
       </p:sp>
       <p:pic>
         <p:nvPicPr>
-          <p:cNvPr id="24" name="Image 3" descr="/tmp/claude-0/-home-claude/750ff410-f4aa-5276-9360-1e19d018b112/scratchpad/c/assets/s-overview.png">    </p:cNvPr>
+          <p:cNvPr id="24" name="Image 3" descr="/tmp/claude-0/-home-claude/750ff410-f4aa-5276-9360-1e19d018b112/scratchpad/c/assets/i-cloud-cr.png">    </p:cNvPr>
           <p:cNvPicPr>
             <a:picLocks noChangeAspect="1"/>
           </p:cNvPicPr>
@@ -9216,8 +11883,8 @@
         </p:blipFill>
         <p:spPr>
           <a:xfrm>
-            <a:off x="5772607" y="2679192"/>
-            <a:ext cx="5888736" cy="3131820"/>
+            <a:off x="9641586" y="2971800"/>
+            <a:ext cx="640080" cy="640080"/>
           </a:xfrm>
           <a:prstGeom prst="rect">
             <a:avLst/>
@@ -9226,18 +11893,96 @@
       </p:pic>
       <p:sp>
         <p:nvSpPr>
-          <p:cNvPr id="25" name="Shape 19"/>
-          <p:cNvSpPr/>
-          <p:nvPr/>
-        </p:nvSpPr>
-        <p:spPr>
-          <a:xfrm>
-            <a:off x="2773375" y="2606040"/>
-            <a:ext cx="2651760" cy="2907317"/>
+          <p:cNvPr id="25" name="Text 19"/>
+          <p:cNvSpPr txBox="1"/>
+          <p:nvPr/>
+        </p:nvSpPr>
+        <p:spPr>
+          <a:xfrm>
+            <a:off x="8188757" y="3703320"/>
+            <a:ext cx="3545738" cy="365760"/>
+          </a:xfrm>
+          <a:prstGeom prst="rect">
+            <a:avLst/>
+          </a:prstGeom>
+          <a:noFill/>
+          <a:ln/>
+        </p:spPr>
+        <p:txBody>
+          <a:bodyPr wrap="square" lIns="0" tIns="0" rIns="0" bIns="0" rtlCol="0" anchor="t"/>
+          <a:lstStyle/>
+          <a:p>
+            <a:pPr rtl="1" algn="ctr" indent="0" marL="0">
+              <a:buNone/>
+            </a:pPr>
+            <a:r>
+              <a:rPr lang="en-US" sz="1600" dirty="0">
+                <a:solidFill>
+                  <a:srgbClr val="F1E4DF"/>
+                </a:solidFill>
+                <a:latin typeface="IBM Plex Sans Arabic" pitchFamily="34" charset="0"/>
+                <a:ea typeface="IBM Plex Sans Arabic" pitchFamily="34" charset="-122"/>
+                <a:cs typeface="IBM Plex Sans Arabic" pitchFamily="34" charset="-120"/>
+              </a:rPr>
+              <a:t>الآن</a:t>
+            </a:r>
+            <a:endParaRPr lang="en-US" sz="1600" dirty="0"/>
+          </a:p>
+        </p:txBody>
+      </p:sp>
+      <p:sp>
+        <p:nvSpPr>
+          <p:cNvPr id="26" name="Text 20"/>
+          <p:cNvSpPr txBox="1"/>
+          <p:nvPr/>
+        </p:nvSpPr>
+        <p:spPr>
+          <a:xfrm>
+            <a:off x="8188757" y="4069080"/>
+            <a:ext cx="3545738" cy="502920"/>
+          </a:xfrm>
+          <a:prstGeom prst="rect">
+            <a:avLst/>
+          </a:prstGeom>
+          <a:noFill/>
+          <a:ln/>
+        </p:spPr>
+        <p:txBody>
+          <a:bodyPr wrap="square" lIns="0" tIns="0" rIns="0" bIns="0" rtlCol="0" anchor="t"/>
+          <a:lstStyle/>
+          <a:p>
+            <a:pPr rtl="1" algn="ctr" indent="0" marL="0">
+              <a:buNone/>
+            </a:pPr>
+            <a:r>
+              <a:rPr lang="en-US" sz="2400" b="1" dirty="0">
+                <a:solidFill>
+                  <a:srgbClr val="FBF6EE"/>
+                </a:solidFill>
+                <a:latin typeface="IBM Plex Sans Arabic" pitchFamily="34" charset="0"/>
+                <a:ea typeface="IBM Plex Sans Arabic" pitchFamily="34" charset="-122"/>
+                <a:cs typeface="IBM Plex Sans Arabic" pitchFamily="34" charset="-120"/>
+              </a:rPr>
+              <a:t>AWS</a:t>
+            </a:r>
+            <a:endParaRPr lang="en-US" sz="2400" dirty="0"/>
+          </a:p>
+        </p:txBody>
+      </p:sp>
+      <p:sp>
+        <p:nvSpPr>
+          <p:cNvPr id="27" name="Shape 21"/>
+          <p:cNvSpPr/>
+          <p:nvPr/>
+        </p:nvSpPr>
+        <p:spPr>
+          <a:xfrm>
+            <a:off x="4322978" y="2697480"/>
+            <a:ext cx="3545738" cy="2103120"/>
           </a:xfrm>
           <a:prstGeom prst="roundRect">
             <a:avLst>
-              <a:gd name="adj" fmla="val 4138"/>
+              <a:gd name="adj" fmla="val 8696"/>
             </a:avLst>
           </a:prstGeom>
           <a:solidFill>
@@ -9253,7 +11998,7 @@
       </p:sp>
       <p:pic>
         <p:nvPicPr>
-          <p:cNvPr id="26" name="Image 4" descr="/tmp/claude-0/-home-claude/750ff410-f4aa-5276-9360-1e19d018b112/scratchpad/c/assets/s-approve.png">    </p:cNvPr>
+          <p:cNvPr id="28" name="Image 4" descr="/tmp/claude-0/-home-claude/750ff410-f4aa-5276-9360-1e19d018b112/scratchpad/c/assets/i-layers-br.png">    </p:cNvPr>
           <p:cNvPicPr>
             <a:picLocks noChangeAspect="1"/>
           </p:cNvPicPr>
@@ -9267,8 +12012,8 @@
         </p:blipFill>
         <p:spPr>
           <a:xfrm>
-            <a:off x="2846527" y="2679192"/>
-            <a:ext cx="2505456" cy="2761013"/>
+            <a:off x="5775808" y="2971800"/>
+            <a:ext cx="640080" cy="640080"/>
           </a:xfrm>
           <a:prstGeom prst="rect">
             <a:avLst/>
@@ -9277,51 +12022,112 @@
       </p:pic>
       <p:sp>
         <p:nvSpPr>
-          <p:cNvPr id="27" name="Shape 20"/>
-          <p:cNvSpPr/>
-          <p:nvPr/>
-        </p:nvSpPr>
-        <p:spPr>
-          <a:xfrm>
-            <a:off x="457200" y="2606040"/>
-            <a:ext cx="2041855" cy="3154680"/>
+          <p:cNvPr id="29" name="Text 22"/>
+          <p:cNvSpPr txBox="1"/>
+          <p:nvPr/>
+        </p:nvSpPr>
+        <p:spPr>
+          <a:xfrm>
+            <a:off x="4322978" y="3703320"/>
+            <a:ext cx="3545738" cy="365760"/>
+          </a:xfrm>
+          <a:prstGeom prst="rect">
+            <a:avLst/>
+          </a:prstGeom>
+          <a:noFill/>
+          <a:ln/>
+        </p:spPr>
+        <p:txBody>
+          <a:bodyPr wrap="square" lIns="0" tIns="0" rIns="0" bIns="0" rtlCol="0" anchor="t"/>
+          <a:lstStyle/>
+          <a:p>
+            <a:pPr rtl="1" algn="ctr" indent="0" marL="0">
+              <a:buNone/>
+            </a:pPr>
+            <a:r>
+              <a:rPr lang="en-US" sz="1600" dirty="0">
+                <a:solidFill>
+                  <a:srgbClr val="7F6C72"/>
+                </a:solidFill>
+                <a:latin typeface="IBM Plex Sans Arabic" pitchFamily="34" charset="0"/>
+                <a:ea typeface="IBM Plex Sans Arabic" pitchFamily="34" charset="-122"/>
+                <a:cs typeface="IBM Plex Sans Arabic" pitchFamily="34" charset="-120"/>
+              </a:rPr>
+              <a:t>التالي</a:t>
+            </a:r>
+            <a:endParaRPr lang="en-US" sz="1600" dirty="0"/>
+          </a:p>
+        </p:txBody>
+      </p:sp>
+      <p:sp>
+        <p:nvSpPr>
+          <p:cNvPr id="30" name="Text 23"/>
+          <p:cNvSpPr txBox="1"/>
+          <p:nvPr/>
+        </p:nvSpPr>
+        <p:spPr>
+          <a:xfrm>
+            <a:off x="4322978" y="4069080"/>
+            <a:ext cx="3545738" cy="502920"/>
+          </a:xfrm>
+          <a:prstGeom prst="rect">
+            <a:avLst/>
+          </a:prstGeom>
+          <a:noFill/>
+          <a:ln/>
+        </p:spPr>
+        <p:txBody>
+          <a:bodyPr wrap="square" lIns="0" tIns="0" rIns="0" bIns="0" rtlCol="0" anchor="t"/>
+          <a:lstStyle/>
+          <a:p>
+            <a:pPr rtl="1" algn="ctr" indent="0" marL="0">
+              <a:buNone/>
+            </a:pPr>
+            <a:r>
+              <a:rPr lang="en-US" sz="2400" b="1" dirty="0">
+                <a:solidFill>
+                  <a:srgbClr val="8E2F3C"/>
+                </a:solidFill>
+                <a:latin typeface="IBM Plex Sans Arabic" pitchFamily="34" charset="0"/>
+                <a:ea typeface="IBM Plex Sans Arabic" pitchFamily="34" charset="-122"/>
+                <a:cs typeface="IBM Plex Sans Arabic" pitchFamily="34" charset="-120"/>
+              </a:rPr>
+              <a:t>Azure وGCP</a:t>
+            </a:r>
+            <a:endParaRPr lang="en-US" sz="2400" dirty="0"/>
+          </a:p>
+        </p:txBody>
+      </p:sp>
+      <p:sp>
+        <p:nvSpPr>
+          <p:cNvPr id="31" name="Shape 24"/>
+          <p:cNvSpPr/>
+          <p:nvPr/>
+        </p:nvSpPr>
+        <p:spPr>
+          <a:xfrm>
+            <a:off x="457200" y="2697480"/>
+            <a:ext cx="3545738" cy="2103120"/>
           </a:xfrm>
           <a:prstGeom prst="roundRect">
             <a:avLst>
-              <a:gd name="adj" fmla="val 8061"/>
+              <a:gd name="adj" fmla="val 8696"/>
             </a:avLst>
           </a:prstGeom>
           <a:solidFill>
-            <a:srgbClr val="8E2F3C"/>
-          </a:solidFill>
-          <a:ln/>
-        </p:spPr>
-      </p:sp>
-      <p:sp>
-        <p:nvSpPr>
-          <p:cNvPr id="28" name="Shape 21"/>
-          <p:cNvSpPr/>
-          <p:nvPr/>
-        </p:nvSpPr>
-        <p:spPr>
-          <a:xfrm>
-            <a:off x="640080" y="2788920"/>
-            <a:ext cx="1676095" cy="1676095"/>
-          </a:xfrm>
-          <a:prstGeom prst="roundRect">
-            <a:avLst>
-              <a:gd name="adj" fmla="val 6547"/>
-            </a:avLst>
-          </a:prstGeom>
-          <a:solidFill>
             <a:srgbClr val="FFFBF8"/>
           </a:solidFill>
-          <a:ln/>
+          <a:ln w="9525">
+            <a:solidFill>
+              <a:srgbClr val="E3D5CC"/>
+            </a:solidFill>
+            <a:prstDash val="solid"/>
+          </a:ln>
         </p:spPr>
       </p:sp>
       <p:pic>
         <p:nvPicPr>
-          <p:cNvPr id="29" name="Image 5" descr="/tmp/claude-0/-home-claude/750ff410-f4aa-5276-9360-1e19d018b112/scratchpad/c/assets/qr.png">    </p:cNvPr>
+          <p:cNvPr id="32" name="Image 5" descr="/tmp/claude-0/-home-claude/750ff410-f4aa-5276-9360-1e19d018b112/scratchpad/c/assets/i-map-br.png">    </p:cNvPr>
           <p:cNvPicPr>
             <a:picLocks noChangeAspect="1"/>
           </p:cNvPicPr>
@@ -9335,8 +12141,8 @@
         </p:blipFill>
         <p:spPr>
           <a:xfrm>
-            <a:off x="731520" y="2880360"/>
-            <a:ext cx="1493215" cy="1493215"/>
+            <a:off x="1910029" y="2971800"/>
+            <a:ext cx="640080" cy="640080"/>
           </a:xfrm>
           <a:prstGeom prst="rect">
             <a:avLst/>
@@ -9345,14 +12151,14 @@
       </p:pic>
       <p:sp>
         <p:nvSpPr>
-          <p:cNvPr id="30" name="Text 22"/>
-          <p:cNvSpPr txBox="1"/>
-          <p:nvPr/>
-        </p:nvSpPr>
-        <p:spPr>
-          <a:xfrm>
-            <a:off x="457200" y="4556455"/>
-            <a:ext cx="2041855" cy="365760"/>
+          <p:cNvPr id="33" name="Text 25"/>
+          <p:cNvSpPr txBox="1"/>
+          <p:nvPr/>
+        </p:nvSpPr>
+        <p:spPr>
+          <a:xfrm>
+            <a:off x="457200" y="3703320"/>
+            <a:ext cx="3545738" cy="365760"/>
           </a:xfrm>
           <a:prstGeom prst="rect">
             <a:avLst/>
@@ -9368,17 +12174,320 @@
               <a:buNone/>
             </a:pPr>
             <a:r>
-              <a:rPr lang="en-US" sz="1600" b="1" dirty="0">
-                <a:solidFill>
-                  <a:srgbClr val="FBF6EE"/>
-                </a:solidFill>
-                <a:latin typeface="IBM Plex Sans Arabic" pitchFamily="34" charset="0"/>
-                <a:ea typeface="IBM Plex Sans Arabic" pitchFamily="34" charset="-122"/>
-                <a:cs typeface="IBM Plex Sans Arabic" pitchFamily="34" charset="-120"/>
-              </a:rPr>
-              <a:t>امسح وجرّب</a:t>
+              <a:rPr lang="en-US" sz="1600" dirty="0">
+                <a:solidFill>
+                  <a:srgbClr val="7F6C72"/>
+                </a:solidFill>
+                <a:latin typeface="IBM Plex Sans Arabic" pitchFamily="34" charset="0"/>
+                <a:ea typeface="IBM Plex Sans Arabic" pitchFamily="34" charset="-122"/>
+                <a:cs typeface="IBM Plex Sans Arabic" pitchFamily="34" charset="-120"/>
+              </a:rPr>
+              <a:t>ثم</a:t>
             </a:r>
             <a:endParaRPr lang="en-US" sz="1600" dirty="0"/>
+          </a:p>
+        </p:txBody>
+      </p:sp>
+      <p:sp>
+        <p:nvSpPr>
+          <p:cNvPr id="34" name="Text 26"/>
+          <p:cNvSpPr txBox="1"/>
+          <p:nvPr/>
+        </p:nvSpPr>
+        <p:spPr>
+          <a:xfrm>
+            <a:off x="457200" y="4069080"/>
+            <a:ext cx="3545738" cy="502920"/>
+          </a:xfrm>
+          <a:prstGeom prst="rect">
+            <a:avLst/>
+          </a:prstGeom>
+          <a:noFill/>
+          <a:ln/>
+        </p:spPr>
+        <p:txBody>
+          <a:bodyPr wrap="square" lIns="0" tIns="0" rIns="0" bIns="0" rtlCol="0" anchor="t"/>
+          <a:lstStyle/>
+          <a:p>
+            <a:pPr rtl="1" algn="ctr" indent="0" marL="0">
+              <a:buNone/>
+            </a:pPr>
+            <a:r>
+              <a:rPr lang="en-US" sz="2400" b="1" dirty="0">
+                <a:solidFill>
+                  <a:srgbClr val="8E2F3C"/>
+                </a:solidFill>
+                <a:latin typeface="IBM Plex Sans Arabic" pitchFamily="34" charset="0"/>
+                <a:ea typeface="IBM Plex Sans Arabic" pitchFamily="34" charset="-122"/>
+                <a:cs typeface="IBM Plex Sans Arabic" pitchFamily="34" charset="-120"/>
+              </a:rPr>
+              <a:t>STC وSCCC وCNTXT</a:t>
+            </a:r>
+            <a:endParaRPr lang="en-US" sz="2400" dirty="0"/>
+          </a:p>
+        </p:txBody>
+      </p:sp>
+      <p:sp>
+        <p:nvSpPr>
+          <p:cNvPr id="35" name="Shape 27"/>
+          <p:cNvSpPr/>
+          <p:nvPr/>
+        </p:nvSpPr>
+        <p:spPr>
+          <a:xfrm>
+            <a:off x="7353148" y="5257800"/>
+            <a:ext cx="1097280" cy="384048"/>
+          </a:xfrm>
+          <a:prstGeom prst="roundRect">
+            <a:avLst>
+              <a:gd name="adj" fmla="val 50000"/>
+            </a:avLst>
+          </a:prstGeom>
+          <a:solidFill>
+            <a:srgbClr val="FFFBF8"/>
+          </a:solidFill>
+          <a:ln w="9525">
+            <a:solidFill>
+              <a:srgbClr val="E3D5CC"/>
+            </a:solidFill>
+            <a:prstDash val="solid"/>
+          </a:ln>
+        </p:spPr>
+      </p:sp>
+      <p:sp>
+        <p:nvSpPr>
+          <p:cNvPr id="36" name="Text 28"/>
+          <p:cNvSpPr txBox="1"/>
+          <p:nvPr/>
+        </p:nvSpPr>
+        <p:spPr>
+          <a:xfrm>
+            <a:off x="7353148" y="5257800"/>
+            <a:ext cx="1097280" cy="384048"/>
+          </a:xfrm>
+          <a:prstGeom prst="rect">
+            <a:avLst/>
+          </a:prstGeom>
+          <a:noFill/>
+          <a:ln/>
+        </p:spPr>
+        <p:txBody>
+          <a:bodyPr wrap="square" lIns="0" tIns="0" rIns="0" bIns="0" rtlCol="0" anchor="ctr"/>
+          <a:lstStyle/>
+          <a:p>
+            <a:pPr rtl="1" algn="ctr" indent="0" marL="0">
+              <a:buNone/>
+            </a:pPr>
+            <a:r>
+              <a:rPr lang="en-US" sz="1300" b="1" dirty="0">
+                <a:solidFill>
+                  <a:srgbClr val="21141A"/>
+                </a:solidFill>
+                <a:latin typeface="IBM Plex Sans Arabic" pitchFamily="34" charset="0"/>
+                <a:ea typeface="IBM Plex Sans Arabic" pitchFamily="34" charset="-122"/>
+                <a:cs typeface="IBM Plex Sans Arabic" pitchFamily="34" charset="-120"/>
+              </a:rPr>
+              <a:t>Next.js</a:t>
+            </a:r>
+            <a:endParaRPr lang="en-US" sz="1300" dirty="0"/>
+          </a:p>
+        </p:txBody>
+      </p:sp>
+      <p:sp>
+        <p:nvSpPr>
+          <p:cNvPr id="37" name="Shape 29"/>
+          <p:cNvSpPr/>
+          <p:nvPr/>
+        </p:nvSpPr>
+        <p:spPr>
+          <a:xfrm>
+            <a:off x="5844388" y="5257800"/>
+            <a:ext cx="1371600" cy="384048"/>
+          </a:xfrm>
+          <a:prstGeom prst="roundRect">
+            <a:avLst>
+              <a:gd name="adj" fmla="val 50000"/>
+            </a:avLst>
+          </a:prstGeom>
+          <a:solidFill>
+            <a:srgbClr val="FFFBF8"/>
+          </a:solidFill>
+          <a:ln w="9525">
+            <a:solidFill>
+              <a:srgbClr val="E3D5CC"/>
+            </a:solidFill>
+            <a:prstDash val="solid"/>
+          </a:ln>
+        </p:spPr>
+      </p:sp>
+      <p:sp>
+        <p:nvSpPr>
+          <p:cNvPr id="38" name="Text 30"/>
+          <p:cNvSpPr txBox="1"/>
+          <p:nvPr/>
+        </p:nvSpPr>
+        <p:spPr>
+          <a:xfrm>
+            <a:off x="5844388" y="5257800"/>
+            <a:ext cx="1371600" cy="384048"/>
+          </a:xfrm>
+          <a:prstGeom prst="rect">
+            <a:avLst/>
+          </a:prstGeom>
+          <a:noFill/>
+          <a:ln/>
+        </p:spPr>
+        <p:txBody>
+          <a:bodyPr wrap="square" lIns="0" tIns="0" rIns="0" bIns="0" rtlCol="0" anchor="ctr"/>
+          <a:lstStyle/>
+          <a:p>
+            <a:pPr rtl="1" algn="ctr" indent="0" marL="0">
+              <a:buNone/>
+            </a:pPr>
+            <a:r>
+              <a:rPr lang="en-US" sz="1300" b="1" dirty="0">
+                <a:solidFill>
+                  <a:srgbClr val="21141A"/>
+                </a:solidFill>
+                <a:latin typeface="IBM Plex Sans Arabic" pitchFamily="34" charset="0"/>
+                <a:ea typeface="IBM Plex Sans Arabic" pitchFamily="34" charset="-122"/>
+                <a:cs typeface="IBM Plex Sans Arabic" pitchFamily="34" charset="-120"/>
+              </a:rPr>
+              <a:t>Cloud APIs</a:t>
+            </a:r>
+            <a:endParaRPr lang="en-US" sz="1300" dirty="0"/>
+          </a:p>
+        </p:txBody>
+      </p:sp>
+      <p:sp>
+        <p:nvSpPr>
+          <p:cNvPr id="39" name="Shape 31"/>
+          <p:cNvSpPr/>
+          <p:nvPr/>
+        </p:nvSpPr>
+        <p:spPr>
+          <a:xfrm>
+            <a:off x="5067148" y="5257800"/>
+            <a:ext cx="640080" cy="384048"/>
+          </a:xfrm>
+          <a:prstGeom prst="roundRect">
+            <a:avLst>
+              <a:gd name="adj" fmla="val 50000"/>
+            </a:avLst>
+          </a:prstGeom>
+          <a:solidFill>
+            <a:srgbClr val="FFFBF8"/>
+          </a:solidFill>
+          <a:ln w="9525">
+            <a:solidFill>
+              <a:srgbClr val="E3D5CC"/>
+            </a:solidFill>
+            <a:prstDash val="solid"/>
+          </a:ln>
+        </p:spPr>
+      </p:sp>
+      <p:sp>
+        <p:nvSpPr>
+          <p:cNvPr id="40" name="Text 32"/>
+          <p:cNvSpPr txBox="1"/>
+          <p:nvPr/>
+        </p:nvSpPr>
+        <p:spPr>
+          <a:xfrm>
+            <a:off x="5067148" y="5257800"/>
+            <a:ext cx="640080" cy="384048"/>
+          </a:xfrm>
+          <a:prstGeom prst="rect">
+            <a:avLst/>
+          </a:prstGeom>
+          <a:noFill/>
+          <a:ln/>
+        </p:spPr>
+        <p:txBody>
+          <a:bodyPr wrap="square" lIns="0" tIns="0" rIns="0" bIns="0" rtlCol="0" anchor="ctr"/>
+          <a:lstStyle/>
+          <a:p>
+            <a:pPr rtl="1" algn="ctr" indent="0" marL="0">
+              <a:buNone/>
+            </a:pPr>
+            <a:r>
+              <a:rPr lang="en-US" sz="1300" b="1" dirty="0">
+                <a:solidFill>
+                  <a:srgbClr val="21141A"/>
+                </a:solidFill>
+                <a:latin typeface="IBM Plex Sans Arabic" pitchFamily="34" charset="0"/>
+                <a:ea typeface="IBM Plex Sans Arabic" pitchFamily="34" charset="-122"/>
+                <a:cs typeface="IBM Plex Sans Arabic" pitchFamily="34" charset="-120"/>
+              </a:rPr>
+              <a:t>AI</a:t>
+            </a:r>
+            <a:endParaRPr lang="en-US" sz="1300" dirty="0"/>
+          </a:p>
+        </p:txBody>
+      </p:sp>
+      <p:sp>
+        <p:nvSpPr>
+          <p:cNvPr id="41" name="Shape 33"/>
+          <p:cNvSpPr/>
+          <p:nvPr/>
+        </p:nvSpPr>
+        <p:spPr>
+          <a:xfrm>
+            <a:off x="3741268" y="5257800"/>
+            <a:ext cx="1188720" cy="384048"/>
+          </a:xfrm>
+          <a:prstGeom prst="roundRect">
+            <a:avLst>
+              <a:gd name="adj" fmla="val 50000"/>
+            </a:avLst>
+          </a:prstGeom>
+          <a:solidFill>
+            <a:srgbClr val="FFFBF8"/>
+          </a:solidFill>
+          <a:ln w="9525">
+            <a:solidFill>
+              <a:srgbClr val="E3D5CC"/>
+            </a:solidFill>
+            <a:prstDash val="solid"/>
+          </a:ln>
+        </p:spPr>
+      </p:sp>
+      <p:sp>
+        <p:nvSpPr>
+          <p:cNvPr id="42" name="Text 34"/>
+          <p:cNvSpPr txBox="1"/>
+          <p:nvPr/>
+        </p:nvSpPr>
+        <p:spPr>
+          <a:xfrm>
+            <a:off x="3741268" y="5257800"/>
+            <a:ext cx="1188720" cy="384048"/>
+          </a:xfrm>
+          <a:prstGeom prst="rect">
+            <a:avLst/>
+          </a:prstGeom>
+          <a:noFill/>
+          <a:ln/>
+        </p:spPr>
+        <p:txBody>
+          <a:bodyPr wrap="square" lIns="0" tIns="0" rIns="0" bIns="0" rtlCol="0" anchor="ctr"/>
+          <a:lstStyle/>
+          <a:p>
+            <a:pPr rtl="1" algn="ctr" indent="0" marL="0">
+              <a:buNone/>
+            </a:pPr>
+            <a:r>
+              <a:rPr lang="en-US" sz="1300" b="1" dirty="0">
+                <a:solidFill>
+                  <a:srgbClr val="21141A"/>
+                </a:solidFill>
+                <a:latin typeface="IBM Plex Sans Arabic" pitchFamily="34" charset="0"/>
+                <a:ea typeface="IBM Plex Sans Arabic" pitchFamily="34" charset="-122"/>
+                <a:cs typeface="IBM Plex Sans Arabic" pitchFamily="34" charset="-120"/>
+              </a:rPr>
+              <a:t>Telegram</a:t>
+            </a:r>
+            <a:endParaRPr lang="en-US" sz="1300" dirty="0"/>
           </a:p>
         </p:txBody>
       </p:sp>
@@ -9749,8 +12858,8 @@
         </p:nvSpPr>
         <p:spPr>
           <a:xfrm>
-            <a:off x="8918143" y="987552"/>
-            <a:ext cx="2816352" cy="384048"/>
+            <a:off x="9759391" y="987552"/>
+            <a:ext cx="1975104" cy="384048"/>
           </a:xfrm>
           <a:prstGeom prst="roundRect">
             <a:avLst>
@@ -9771,8 +12880,8 @@
         </p:nvSpPr>
         <p:spPr>
           <a:xfrm>
-            <a:off x="8918143" y="987552"/>
-            <a:ext cx="2816352" cy="384048"/>
+            <a:off x="9759391" y="987552"/>
+            <a:ext cx="1975104" cy="384048"/>
           </a:xfrm>
           <a:prstGeom prst="rect">
             <a:avLst/>
@@ -9796,7 +12905,7 @@
                 <a:ea typeface="IBM Plex Sans Arabic" pitchFamily="34" charset="-122"/>
                 <a:cs typeface="IBM Plex Sans Arabic" pitchFamily="34" charset="-120"/>
               </a:rPr>
-              <a:t>الأثر والقيمة المتوقعة</a:t>
+              <a:t>النموذج الأولي</a:t>
             </a:r>
             <a:endParaRPr lang="en-US" sz="1300" dirty="0"/>
           </a:p>
@@ -9937,7 +13046,7 @@
                 <a:ea typeface="IBM Plex Sans Arabic" pitchFamily="34" charset="-122"/>
                 <a:cs typeface="IBM Plex Sans Arabic" pitchFamily="34" charset="-120"/>
               </a:rPr>
-              <a:t>أثر بالأرقام</a:t>
+              <a:t>يعمل الآن، جرّبه بنفسك</a:t>
             </a:r>
             <a:endParaRPr lang="en-US" sz="3400" dirty="0"/>
           </a:p>
@@ -9951,12 +13060,12 @@
         </p:nvSpPr>
         <p:spPr>
           <a:xfrm>
-            <a:off x="8188757" y="2697480"/>
-            <a:ext cx="3545738" cy="2377440"/>
+            <a:off x="5699455" y="2606040"/>
+            <a:ext cx="6035040" cy="3278124"/>
           </a:xfrm>
           <a:prstGeom prst="roundRect">
             <a:avLst>
-              <a:gd name="adj" fmla="val 7692"/>
+              <a:gd name="adj" fmla="val 3347"/>
             </a:avLst>
           </a:prstGeom>
           <a:solidFill>
@@ -9972,7 +13081,7 @@
       </p:sp>
       <p:pic>
         <p:nvPicPr>
-          <p:cNvPr id="24" name="Image 3" descr="/tmp/claude-0/-home-claude/750ff410-f4aa-5276-9360-1e19d018b112/scratchpad/c/assets/i-wallet-br.png">    </p:cNvPr>
+          <p:cNvPr id="24" name="Image 3" descr="/tmp/claude-0/-home-claude/750ff410-f4aa-5276-9360-1e19d018b112/scratchpad/c/assets/s-overview.png">    </p:cNvPr>
           <p:cNvPicPr>
             <a:picLocks noChangeAspect="1"/>
           </p:cNvPicPr>
@@ -9986,8 +13095,8 @@
         </p:blipFill>
         <p:spPr>
           <a:xfrm>
-            <a:off x="9687306" y="2971800"/>
-            <a:ext cx="548640" cy="548640"/>
+            <a:off x="5772607" y="2679192"/>
+            <a:ext cx="5888736" cy="3131820"/>
           </a:xfrm>
           <a:prstGeom prst="rect">
             <a:avLst/>
@@ -9996,107 +13105,34 @@
       </p:pic>
       <p:sp>
         <p:nvSpPr>
-          <p:cNvPr id="25" name="Text 19"/>
-          <p:cNvSpPr txBox="1"/>
-          <p:nvPr/>
-        </p:nvSpPr>
-        <p:spPr>
-          <a:xfrm>
-            <a:off x="8188757" y="3566160"/>
-            <a:ext cx="3545738" cy="868680"/>
-          </a:xfrm>
-          <a:prstGeom prst="rect">
-            <a:avLst/>
-          </a:prstGeom>
-          <a:noFill/>
-          <a:ln/>
-        </p:spPr>
-        <p:txBody>
-          <a:bodyPr wrap="square" lIns="0" tIns="0" rIns="0" bIns="0" rtlCol="0" anchor="ctr"/>
-          <a:lstStyle/>
-          <a:p>
-            <a:pPr algn="ctr" indent="0" marL="0">
-              <a:buNone/>
-            </a:pPr>
-            <a:r>
-              <a:rPr lang="en-US" sz="5400" b="1" dirty="0">
-                <a:solidFill>
-                  <a:srgbClr val="8E2F3C"/>
-                </a:solidFill>
-                <a:latin typeface="IBM Plex Sans Arabic" pitchFamily="34" charset="0"/>
-                <a:ea typeface="IBM Plex Sans Arabic" pitchFamily="34" charset="-122"/>
-                <a:cs typeface="IBM Plex Sans Arabic" pitchFamily="34" charset="-120"/>
-              </a:rPr>
-              <a:t>10.8%</a:t>
-            </a:r>
-            <a:endParaRPr lang="en-US" sz="5400" dirty="0"/>
-          </a:p>
-        </p:txBody>
-      </p:sp>
-      <p:sp>
-        <p:nvSpPr>
-          <p:cNvPr id="26" name="Text 20"/>
-          <p:cNvSpPr txBox="1"/>
-          <p:nvPr/>
-        </p:nvSpPr>
-        <p:spPr>
-          <a:xfrm>
-            <a:off x="8463077" y="4480560"/>
-            <a:ext cx="2997098" cy="411480"/>
-          </a:xfrm>
-          <a:prstGeom prst="rect">
-            <a:avLst/>
-          </a:prstGeom>
-          <a:noFill/>
-          <a:ln/>
-        </p:spPr>
-        <p:txBody>
-          <a:bodyPr wrap="square" lIns="0" tIns="0" rIns="0" bIns="0" rtlCol="0" anchor="ctr"/>
-          <a:lstStyle/>
-          <a:p>
-            <a:pPr rtl="1" algn="ctr" indent="0" marL="0">
-              <a:buNone/>
-            </a:pPr>
-            <a:r>
-              <a:rPr lang="en-US" sz="1800" dirty="0">
-                <a:solidFill>
-                  <a:srgbClr val="21141A"/>
-                </a:solidFill>
-                <a:latin typeface="IBM Plex Sans Arabic" pitchFamily="34" charset="0"/>
-                <a:ea typeface="IBM Plex Sans Arabic" pitchFamily="34" charset="-122"/>
-                <a:cs typeface="IBM Plex Sans Arabic" pitchFamily="34" charset="-120"/>
-              </a:rPr>
-              <a:t>توفير من الفاتورة</a:t>
-            </a:r>
-            <a:endParaRPr lang="en-US" sz="1800" dirty="0"/>
-          </a:p>
-        </p:txBody>
-      </p:sp>
-      <p:sp>
-        <p:nvSpPr>
-          <p:cNvPr id="27" name="Shape 21"/>
-          <p:cNvSpPr/>
-          <p:nvPr/>
-        </p:nvSpPr>
-        <p:spPr>
-          <a:xfrm>
-            <a:off x="4322978" y="2697480"/>
-            <a:ext cx="3545738" cy="2377440"/>
+          <p:cNvPr id="25" name="Shape 19"/>
+          <p:cNvSpPr/>
+          <p:nvPr/>
+        </p:nvSpPr>
+        <p:spPr>
+          <a:xfrm>
+            <a:off x="2773375" y="2606040"/>
+            <a:ext cx="2651760" cy="2907317"/>
           </a:xfrm>
           <a:prstGeom prst="roundRect">
             <a:avLst>
-              <a:gd name="adj" fmla="val 7692"/>
+              <a:gd name="adj" fmla="val 4138"/>
             </a:avLst>
           </a:prstGeom>
           <a:solidFill>
-            <a:srgbClr val="8E2F3C"/>
-          </a:solidFill>
-          <a:ln/>
+            <a:srgbClr val="FFFBF8"/>
+          </a:solidFill>
+          <a:ln w="9525">
+            <a:solidFill>
+              <a:srgbClr val="E3D5CC"/>
+            </a:solidFill>
+            <a:prstDash val="solid"/>
+          </a:ln>
         </p:spPr>
       </p:sp>
       <p:pic>
         <p:nvPicPr>
-          <p:cNvPr id="28" name="Image 4" descr="/tmp/claude-0/-home-claude/750ff410-f4aa-5276-9360-1e19d018b112/scratchpad/c/assets/i-trend-cr.png">    </p:cNvPr>
+          <p:cNvPr id="26" name="Image 4" descr="/tmp/claude-0/-home-claude/750ff410-f4aa-5276-9360-1e19d018b112/scratchpad/c/assets/s-approve.png">    </p:cNvPr>
           <p:cNvPicPr>
             <a:picLocks noChangeAspect="1"/>
           </p:cNvPicPr>
@@ -10110,8 +13146,8 @@
         </p:blipFill>
         <p:spPr>
           <a:xfrm>
-            <a:off x="5821528" y="2971800"/>
-            <a:ext cx="548640" cy="548640"/>
+            <a:off x="2846527" y="2679192"/>
+            <a:ext cx="2505456" cy="2761013"/>
           </a:xfrm>
           <a:prstGeom prst="rect">
             <a:avLst/>
@@ -10120,112 +13156,51 @@
       </p:pic>
       <p:sp>
         <p:nvSpPr>
-          <p:cNvPr id="29" name="Text 22"/>
-          <p:cNvSpPr txBox="1"/>
-          <p:nvPr/>
-        </p:nvSpPr>
-        <p:spPr>
-          <a:xfrm>
-            <a:off x="4322978" y="3566160"/>
-            <a:ext cx="3545738" cy="868680"/>
-          </a:xfrm>
-          <a:prstGeom prst="rect">
-            <a:avLst/>
-          </a:prstGeom>
-          <a:noFill/>
-          <a:ln/>
-        </p:spPr>
-        <p:txBody>
-          <a:bodyPr wrap="square" lIns="0" tIns="0" rIns="0" bIns="0" rtlCol="0" anchor="ctr"/>
-          <a:lstStyle/>
-          <a:p>
-            <a:pPr algn="ctr" indent="0" marL="0">
-              <a:buNone/>
-            </a:pPr>
-            <a:r>
-              <a:rPr lang="en-US" sz="5400" b="1" dirty="0">
-                <a:solidFill>
-                  <a:srgbClr val="FBF6EE"/>
-                </a:solidFill>
-                <a:latin typeface="IBM Plex Sans Arabic" pitchFamily="34" charset="0"/>
-                <a:ea typeface="IBM Plex Sans Arabic" pitchFamily="34" charset="-122"/>
-                <a:cs typeface="IBM Plex Sans Arabic" pitchFamily="34" charset="-120"/>
-              </a:rPr>
-              <a:t>110K</a:t>
-            </a:r>
-            <a:endParaRPr lang="en-US" sz="5400" dirty="0"/>
-          </a:p>
-        </p:txBody>
-      </p:sp>
-      <p:sp>
-        <p:nvSpPr>
-          <p:cNvPr id="30" name="Text 23"/>
-          <p:cNvSpPr txBox="1"/>
-          <p:nvPr/>
-        </p:nvSpPr>
-        <p:spPr>
-          <a:xfrm>
-            <a:off x="4597298" y="4480560"/>
-            <a:ext cx="2997098" cy="411480"/>
-          </a:xfrm>
-          <a:prstGeom prst="rect">
-            <a:avLst/>
-          </a:prstGeom>
-          <a:noFill/>
-          <a:ln/>
-        </p:spPr>
-        <p:txBody>
-          <a:bodyPr wrap="square" lIns="0" tIns="0" rIns="0" bIns="0" rtlCol="0" anchor="ctr"/>
-          <a:lstStyle/>
-          <a:p>
-            <a:pPr rtl="1" algn="ctr" indent="0" marL="0">
-              <a:buNone/>
-            </a:pPr>
-            <a:r>
-              <a:rPr lang="en-US" sz="1800" dirty="0">
-                <a:solidFill>
-                  <a:srgbClr val="FBF6EE"/>
-                </a:solidFill>
-                <a:latin typeface="IBM Plex Sans Arabic" pitchFamily="34" charset="0"/>
-                <a:ea typeface="IBM Plex Sans Arabic" pitchFamily="34" charset="-122"/>
-                <a:cs typeface="IBM Plex Sans Arabic" pitchFamily="34" charset="-120"/>
-              </a:rPr>
-              <a:t>ريال سنوياً</a:t>
-            </a:r>
-            <a:endParaRPr lang="en-US" sz="1800" dirty="0"/>
-          </a:p>
-        </p:txBody>
-      </p:sp>
-      <p:sp>
-        <p:nvSpPr>
-          <p:cNvPr id="31" name="Shape 24"/>
-          <p:cNvSpPr/>
-          <p:nvPr/>
-        </p:nvSpPr>
-        <p:spPr>
-          <a:xfrm>
-            <a:off x="457200" y="2697480"/>
-            <a:ext cx="3545738" cy="2377440"/>
+          <p:cNvPr id="27" name="Shape 20"/>
+          <p:cNvSpPr/>
+          <p:nvPr/>
+        </p:nvSpPr>
+        <p:spPr>
+          <a:xfrm>
+            <a:off x="457200" y="2606040"/>
+            <a:ext cx="2041855" cy="3154680"/>
           </a:xfrm>
           <a:prstGeom prst="roundRect">
             <a:avLst>
-              <a:gd name="adj" fmla="val 7692"/>
+              <a:gd name="adj" fmla="val 8061"/>
             </a:avLst>
           </a:prstGeom>
           <a:solidFill>
+            <a:srgbClr val="8E2F3C"/>
+          </a:solidFill>
+          <a:ln/>
+        </p:spPr>
+      </p:sp>
+      <p:sp>
+        <p:nvSpPr>
+          <p:cNvPr id="28" name="Shape 21"/>
+          <p:cNvSpPr/>
+          <p:nvPr/>
+        </p:nvSpPr>
+        <p:spPr>
+          <a:xfrm>
+            <a:off x="640080" y="2788920"/>
+            <a:ext cx="1676095" cy="1676095"/>
+          </a:xfrm>
+          <a:prstGeom prst="roundRect">
+            <a:avLst>
+              <a:gd name="adj" fmla="val 6547"/>
+            </a:avLst>
+          </a:prstGeom>
+          <a:solidFill>
             <a:srgbClr val="FFFBF8"/>
           </a:solidFill>
-          <a:ln w="9525">
-            <a:solidFill>
-              <a:srgbClr val="E3D5CC"/>
-            </a:solidFill>
-            <a:prstDash val="solid"/>
-          </a:ln>
+          <a:ln/>
         </p:spPr>
       </p:sp>
       <p:pic>
         <p:nvPicPr>
-          <p:cNvPr id="32" name="Image 5" descr="/tmp/claude-0/-home-claude/750ff410-f4aa-5276-9360-1e19d018b112/scratchpad/c/assets/i-clock-br.png">    </p:cNvPr>
+          <p:cNvPr id="29" name="Image 5" descr="/tmp/claude-0/-home-claude/750ff410-f4aa-5276-9360-1e19d018b112/scratchpad/c/assets/qr.png">    </p:cNvPr>
           <p:cNvPicPr>
             <a:picLocks noChangeAspect="1"/>
           </p:cNvPicPr>
@@ -10239,8 +13214,8 @@
         </p:blipFill>
         <p:spPr>
           <a:xfrm>
-            <a:off x="1955749" y="2971800"/>
-            <a:ext cx="548640" cy="548640"/>
+            <a:off x="731520" y="2880360"/>
+            <a:ext cx="1493215" cy="1493215"/>
           </a:xfrm>
           <a:prstGeom prst="rect">
             <a:avLst/>
@@ -10249,118 +13224,40 @@
       </p:pic>
       <p:sp>
         <p:nvSpPr>
-          <p:cNvPr id="33" name="Text 25"/>
-          <p:cNvSpPr txBox="1"/>
-          <p:nvPr/>
-        </p:nvSpPr>
-        <p:spPr>
-          <a:xfrm>
-            <a:off x="457200" y="3566160"/>
-            <a:ext cx="3545738" cy="868680"/>
-          </a:xfrm>
-          <a:prstGeom prst="rect">
-            <a:avLst/>
-          </a:prstGeom>
-          <a:noFill/>
-          <a:ln/>
-        </p:spPr>
-        <p:txBody>
-          <a:bodyPr wrap="square" lIns="0" tIns="0" rIns="0" bIns="0" rtlCol="0" anchor="ctr"/>
-          <a:lstStyle/>
-          <a:p>
-            <a:pPr algn="ctr" indent="0" marL="0">
-              <a:buNone/>
-            </a:pPr>
-            <a:r>
-              <a:rPr lang="en-US" sz="5400" b="1" dirty="0">
-                <a:solidFill>
-                  <a:srgbClr val="8E2F3C"/>
-                </a:solidFill>
-                <a:latin typeface="IBM Plex Sans Arabic" pitchFamily="34" charset="0"/>
-                <a:ea typeface="IBM Plex Sans Arabic" pitchFamily="34" charset="-122"/>
-                <a:cs typeface="IBM Plex Sans Arabic" pitchFamily="34" charset="-120"/>
-              </a:rPr>
-              <a:t>دقائق</a:t>
-            </a:r>
-            <a:endParaRPr lang="en-US" sz="5400" dirty="0"/>
-          </a:p>
-        </p:txBody>
-      </p:sp>
-      <p:sp>
-        <p:nvSpPr>
-          <p:cNvPr id="34" name="Text 26"/>
-          <p:cNvSpPr txBox="1"/>
-          <p:nvPr/>
-        </p:nvSpPr>
-        <p:spPr>
-          <a:xfrm>
-            <a:off x="731520" y="4480560"/>
-            <a:ext cx="2997098" cy="411480"/>
-          </a:xfrm>
-          <a:prstGeom prst="rect">
-            <a:avLst/>
-          </a:prstGeom>
-          <a:noFill/>
-          <a:ln/>
-        </p:spPr>
-        <p:txBody>
-          <a:bodyPr wrap="square" lIns="0" tIns="0" rIns="0" bIns="0" rtlCol="0" anchor="ctr"/>
+          <p:cNvPr id="30" name="Text 22"/>
+          <p:cNvSpPr txBox="1"/>
+          <p:nvPr/>
+        </p:nvSpPr>
+        <p:spPr>
+          <a:xfrm>
+            <a:off x="457200" y="4556455"/>
+            <a:ext cx="2041855" cy="365760"/>
+          </a:xfrm>
+          <a:prstGeom prst="rect">
+            <a:avLst/>
+          </a:prstGeom>
+          <a:noFill/>
+          <a:ln/>
+        </p:spPr>
+        <p:txBody>
+          <a:bodyPr wrap="square" lIns="0" tIns="0" rIns="0" bIns="0" rtlCol="0" anchor="t"/>
           <a:lstStyle/>
           <a:p>
             <a:pPr rtl="1" algn="ctr" indent="0" marL="0">
               <a:buNone/>
             </a:pPr>
             <a:r>
-              <a:rPr lang="en-US" sz="1800" dirty="0">
-                <a:solidFill>
-                  <a:srgbClr val="21141A"/>
-                </a:solidFill>
-                <a:latin typeface="IBM Plex Sans Arabic" pitchFamily="34" charset="0"/>
-                <a:ea typeface="IBM Plex Sans Arabic" pitchFamily="34" charset="-122"/>
-                <a:cs typeface="IBM Plex Sans Arabic" pitchFamily="34" charset="-120"/>
-              </a:rPr>
-              <a:t>بدل أسابيع</a:t>
-            </a:r>
-            <a:endParaRPr lang="en-US" sz="1800" dirty="0"/>
-          </a:p>
-        </p:txBody>
-      </p:sp>
-      <p:sp>
-        <p:nvSpPr>
-          <p:cNvPr id="35" name="Text 27"/>
-          <p:cNvSpPr txBox="1"/>
-          <p:nvPr/>
-        </p:nvSpPr>
-        <p:spPr>
-          <a:xfrm>
-            <a:off x="457200" y="5349240"/>
-            <a:ext cx="11277295" cy="365760"/>
-          </a:xfrm>
-          <a:prstGeom prst="rect">
-            <a:avLst/>
-          </a:prstGeom>
-          <a:noFill/>
-          <a:ln/>
-        </p:spPr>
-        <p:txBody>
-          <a:bodyPr wrap="square" lIns="0" tIns="0" rIns="0" bIns="0" rtlCol="0" anchor="t"/>
-          <a:lstStyle/>
-          <a:p>
-            <a:pPr rtl="1" algn="ctr" indent="0" marL="0">
-              <a:buNone/>
-            </a:pPr>
-            <a:r>
-              <a:rPr lang="en-US" sz="1500" dirty="0">
-                <a:solidFill>
-                  <a:srgbClr val="7F6C72"/>
-                </a:solidFill>
-                <a:latin typeface="IBM Plex Sans Arabic" pitchFamily="34" charset="0"/>
-                <a:ea typeface="IBM Plex Sans Arabic" pitchFamily="34" charset="-122"/>
-                <a:cs typeface="IBM Plex Sans Arabic" pitchFamily="34" charset="-120"/>
-              </a:rPr>
-              <a:t>مثال: شركة افتراضية من 120 موظفاً</a:t>
-            </a:r>
-            <a:endParaRPr lang="en-US" sz="1500" dirty="0"/>
+              <a:rPr lang="en-US" sz="1600" b="1" dirty="0">
+                <a:solidFill>
+                  <a:srgbClr val="FBF6EE"/>
+                </a:solidFill>
+                <a:latin typeface="IBM Plex Sans Arabic" pitchFamily="34" charset="0"/>
+                <a:ea typeface="IBM Plex Sans Arabic" pitchFamily="34" charset="-122"/>
+                <a:cs typeface="IBM Plex Sans Arabic" pitchFamily="34" charset="-120"/>
+              </a:rPr>
+              <a:t>امسح وجرّب</a:t>
+            </a:r>
+            <a:endParaRPr lang="en-US" sz="1600" dirty="0"/>
           </a:p>
         </p:txBody>
       </p:sp>
@@ -10731,8 +13628,8 @@
         </p:nvSpPr>
         <p:spPr>
           <a:xfrm>
-            <a:off x="9759391" y="987552"/>
-            <a:ext cx="1975104" cy="384048"/>
+            <a:off x="8918143" y="987552"/>
+            <a:ext cx="2816352" cy="384048"/>
           </a:xfrm>
           <a:prstGeom prst="roundRect">
             <a:avLst>
@@ -10753,8 +13650,8 @@
         </p:nvSpPr>
         <p:spPr>
           <a:xfrm>
-            <a:off x="9759391" y="987552"/>
-            <a:ext cx="1975104" cy="384048"/>
+            <a:off x="8918143" y="987552"/>
+            <a:ext cx="2816352" cy="384048"/>
           </a:xfrm>
           <a:prstGeom prst="rect">
             <a:avLst/>
@@ -10778,7 +13675,7 @@
                 <a:ea typeface="IBM Plex Sans Arabic" pitchFamily="34" charset="-122"/>
                 <a:cs typeface="IBM Plex Sans Arabic" pitchFamily="34" charset="-120"/>
               </a:rPr>
-              <a:t>الخطوة التالية</a:t>
+              <a:t>الأثر والقيمة المتوقعة</a:t>
             </a:r>
             <a:endParaRPr lang="en-US" sz="1300" dirty="0"/>
           </a:p>
@@ -10919,7 +13816,7 @@
                 <a:ea typeface="IBM Plex Sans Arabic" pitchFamily="34" charset="-122"/>
                 <a:cs typeface="IBM Plex Sans Arabic" pitchFamily="34" charset="-120"/>
               </a:rPr>
-              <a:t>ما بعد التحدي</a:t>
+              <a:t>أثر بالأرقام</a:t>
             </a:r>
             <a:endParaRPr lang="en-US" sz="3400" dirty="0"/>
           </a:p>
@@ -10934,22 +13831,27 @@
         <p:spPr>
           <a:xfrm>
             <a:off x="8188757" y="2697480"/>
-            <a:ext cx="3545738" cy="1920240"/>
+            <a:ext cx="3545738" cy="2377440"/>
           </a:xfrm>
           <a:prstGeom prst="roundRect">
             <a:avLst>
-              <a:gd name="adj" fmla="val 9524"/>
+              <a:gd name="adj" fmla="val 7692"/>
             </a:avLst>
           </a:prstGeom>
           <a:solidFill>
-            <a:srgbClr val="8E2F3C"/>
-          </a:solidFill>
-          <a:ln/>
+            <a:srgbClr val="FFFBF8"/>
+          </a:solidFill>
+          <a:ln w="9525">
+            <a:solidFill>
+              <a:srgbClr val="E3D5CC"/>
+            </a:solidFill>
+            <a:prstDash val="solid"/>
+          </a:ln>
         </p:spPr>
       </p:sp>
       <p:pic>
         <p:nvPicPr>
-          <p:cNvPr id="24" name="Image 3" descr="/tmp/claude-0/-home-claude/750ff410-f4aa-5276-9360-1e19d018b112/scratchpad/c/assets/i-scale-cr.png">    </p:cNvPr>
+          <p:cNvPr id="24" name="Image 3" descr="/tmp/claude-0/-home-claude/750ff410-f4aa-5276-9360-1e19d018b112/scratchpad/c/assets/i-wallet-br.png">    </p:cNvPr>
           <p:cNvPicPr>
             <a:picLocks noChangeAspect="1"/>
           </p:cNvPicPr>
@@ -10963,8 +13865,8 @@
         </p:blipFill>
         <p:spPr>
           <a:xfrm>
-            <a:off x="9618726" y="3017520"/>
-            <a:ext cx="685800" cy="685800"/>
+            <a:off x="9687306" y="2971800"/>
+            <a:ext cx="548640" cy="548640"/>
           </a:xfrm>
           <a:prstGeom prst="rect">
             <a:avLst/>
@@ -10979,51 +13881,90 @@
         </p:nvSpPr>
         <p:spPr>
           <a:xfrm>
-            <a:off x="8188757" y="3886200"/>
-            <a:ext cx="3545738" cy="457200"/>
-          </a:xfrm>
-          <a:prstGeom prst="rect">
-            <a:avLst/>
-          </a:prstGeom>
-          <a:noFill/>
-          <a:ln/>
-        </p:spPr>
-        <p:txBody>
-          <a:bodyPr wrap="square" lIns="0" tIns="0" rIns="0" bIns="0" rtlCol="0" anchor="t"/>
+            <a:off x="8188757" y="3566160"/>
+            <a:ext cx="3545738" cy="868680"/>
+          </a:xfrm>
+          <a:prstGeom prst="rect">
+            <a:avLst/>
+          </a:prstGeom>
+          <a:noFill/>
+          <a:ln/>
+        </p:spPr>
+        <p:txBody>
+          <a:bodyPr wrap="square" lIns="0" tIns="0" rIns="0" bIns="0" rtlCol="0" anchor="ctr"/>
+          <a:lstStyle/>
+          <a:p>
+            <a:pPr algn="ctr" indent="0" marL="0">
+              <a:buNone/>
+            </a:pPr>
+            <a:r>
+              <a:rPr lang="en-US" sz="5400" b="1" dirty="0">
+                <a:solidFill>
+                  <a:srgbClr val="8E2F3C"/>
+                </a:solidFill>
+                <a:latin typeface="IBM Plex Sans Arabic" pitchFamily="34" charset="0"/>
+                <a:ea typeface="IBM Plex Sans Arabic" pitchFamily="34" charset="-122"/>
+                <a:cs typeface="IBM Plex Sans Arabic" pitchFamily="34" charset="-120"/>
+              </a:rPr>
+              <a:t>10.8%</a:t>
+            </a:r>
+            <a:endParaRPr lang="en-US" sz="5400" dirty="0"/>
+          </a:p>
+        </p:txBody>
+      </p:sp>
+      <p:sp>
+        <p:nvSpPr>
+          <p:cNvPr id="26" name="Text 20"/>
+          <p:cNvSpPr txBox="1"/>
+          <p:nvPr/>
+        </p:nvSpPr>
+        <p:spPr>
+          <a:xfrm>
+            <a:off x="8463077" y="4480560"/>
+            <a:ext cx="2997098" cy="411480"/>
+          </a:xfrm>
+          <a:prstGeom prst="rect">
+            <a:avLst/>
+          </a:prstGeom>
+          <a:noFill/>
+          <a:ln/>
+        </p:spPr>
+        <p:txBody>
+          <a:bodyPr wrap="square" lIns="0" tIns="0" rIns="0" bIns="0" rtlCol="0" anchor="ctr"/>
           <a:lstStyle/>
           <a:p>
             <a:pPr rtl="1" algn="ctr" indent="0" marL="0">
               <a:buNone/>
             </a:pPr>
             <a:r>
-              <a:rPr lang="en-US" sz="2200" b="1" dirty="0">
-                <a:solidFill>
-                  <a:srgbClr val="FBF6EE"/>
-                </a:solidFill>
-                <a:latin typeface="IBM Plex Sans Arabic" pitchFamily="34" charset="0"/>
-                <a:ea typeface="IBM Plex Sans Arabic" pitchFamily="34" charset="-122"/>
-                <a:cs typeface="IBM Plex Sans Arabic" pitchFamily="34" charset="-120"/>
-              </a:rPr>
-              <a:t>مقارنة السحابات</a:t>
-            </a:r>
-            <a:endParaRPr lang="en-US" sz="2200" dirty="0"/>
-          </a:p>
-        </p:txBody>
-      </p:sp>
-      <p:sp>
-        <p:nvSpPr>
-          <p:cNvPr id="26" name="Shape 20"/>
+              <a:rPr lang="en-US" sz="1800" dirty="0">
+                <a:solidFill>
+                  <a:srgbClr val="21141A"/>
+                </a:solidFill>
+                <a:latin typeface="IBM Plex Sans Arabic" pitchFamily="34" charset="0"/>
+                <a:ea typeface="IBM Plex Sans Arabic" pitchFamily="34" charset="-122"/>
+                <a:cs typeface="IBM Plex Sans Arabic" pitchFamily="34" charset="-120"/>
+              </a:rPr>
+              <a:t>توفير من الفاتورة</a:t>
+            </a:r>
+            <a:endParaRPr lang="en-US" sz="1800" dirty="0"/>
+          </a:p>
+        </p:txBody>
+      </p:sp>
+      <p:sp>
+        <p:nvSpPr>
+          <p:cNvPr id="27" name="Shape 21"/>
           <p:cNvSpPr/>
           <p:nvPr/>
         </p:nvSpPr>
         <p:spPr>
           <a:xfrm>
             <a:off x="4322978" y="2697480"/>
-            <a:ext cx="3545738" cy="1920240"/>
+            <a:ext cx="3545738" cy="2377440"/>
           </a:xfrm>
           <a:prstGeom prst="roundRect">
             <a:avLst>
-              <a:gd name="adj" fmla="val 9524"/>
+              <a:gd name="adj" fmla="val 7692"/>
             </a:avLst>
           </a:prstGeom>
           <a:solidFill>
@@ -11034,7 +13975,7 @@
       </p:sp>
       <p:pic>
         <p:nvPicPr>
-          <p:cNvPr id="27" name="Image 4" descr="/tmp/claude-0/-home-claude/750ff410-f4aa-5276-9360-1e19d018b112/scratchpad/c/assets/i-server-cr.png">    </p:cNvPr>
+          <p:cNvPr id="28" name="Image 4" descr="/tmp/claude-0/-home-claude/750ff410-f4aa-5276-9360-1e19d018b112/scratchpad/c/assets/i-trend-cr.png">    </p:cNvPr>
           <p:cNvPicPr>
             <a:picLocks noChangeAspect="1"/>
           </p:cNvPicPr>
@@ -11048,8 +13989,8 @@
         </p:blipFill>
         <p:spPr>
           <a:xfrm>
-            <a:off x="5752948" y="3017520"/>
-            <a:ext cx="685800" cy="685800"/>
+            <a:off x="5821528" y="2971800"/>
+            <a:ext cx="548640" cy="548640"/>
           </a:xfrm>
           <a:prstGeom prst="rect">
             <a:avLst/>
@@ -11058,30 +13999,69 @@
       </p:pic>
       <p:sp>
         <p:nvSpPr>
-          <p:cNvPr id="28" name="Text 21"/>
-          <p:cNvSpPr txBox="1"/>
-          <p:nvPr/>
-        </p:nvSpPr>
-        <p:spPr>
-          <a:xfrm>
-            <a:off x="4322978" y="3886200"/>
-            <a:ext cx="3545738" cy="457200"/>
-          </a:xfrm>
-          <a:prstGeom prst="rect">
-            <a:avLst/>
-          </a:prstGeom>
-          <a:noFill/>
-          <a:ln/>
-        </p:spPr>
-        <p:txBody>
-          <a:bodyPr wrap="square" lIns="0" tIns="0" rIns="0" bIns="0" rtlCol="0" anchor="t"/>
+          <p:cNvPr id="29" name="Text 22"/>
+          <p:cNvSpPr txBox="1"/>
+          <p:nvPr/>
+        </p:nvSpPr>
+        <p:spPr>
+          <a:xfrm>
+            <a:off x="4322978" y="3566160"/>
+            <a:ext cx="3545738" cy="868680"/>
+          </a:xfrm>
+          <a:prstGeom prst="rect">
+            <a:avLst/>
+          </a:prstGeom>
+          <a:noFill/>
+          <a:ln/>
+        </p:spPr>
+        <p:txBody>
+          <a:bodyPr wrap="square" lIns="0" tIns="0" rIns="0" bIns="0" rtlCol="0" anchor="ctr"/>
+          <a:lstStyle/>
+          <a:p>
+            <a:pPr algn="ctr" indent="0" marL="0">
+              <a:buNone/>
+            </a:pPr>
+            <a:r>
+              <a:rPr lang="en-US" sz="5400" b="1" dirty="0">
+                <a:solidFill>
+                  <a:srgbClr val="FBF6EE"/>
+                </a:solidFill>
+                <a:latin typeface="IBM Plex Sans Arabic" pitchFamily="34" charset="0"/>
+                <a:ea typeface="IBM Plex Sans Arabic" pitchFamily="34" charset="-122"/>
+                <a:cs typeface="IBM Plex Sans Arabic" pitchFamily="34" charset="-120"/>
+              </a:rPr>
+              <a:t>110K</a:t>
+            </a:r>
+            <a:endParaRPr lang="en-US" sz="5400" dirty="0"/>
+          </a:p>
+        </p:txBody>
+      </p:sp>
+      <p:sp>
+        <p:nvSpPr>
+          <p:cNvPr id="30" name="Text 23"/>
+          <p:cNvSpPr txBox="1"/>
+          <p:nvPr/>
+        </p:nvSpPr>
+        <p:spPr>
+          <a:xfrm>
+            <a:off x="4597298" y="4480560"/>
+            <a:ext cx="2997098" cy="411480"/>
+          </a:xfrm>
+          <a:prstGeom prst="rect">
+            <a:avLst/>
+          </a:prstGeom>
+          <a:noFill/>
+          <a:ln/>
+        </p:spPr>
+        <p:txBody>
+          <a:bodyPr wrap="square" lIns="0" tIns="0" rIns="0" bIns="0" rtlCol="0" anchor="ctr"/>
           <a:lstStyle/>
           <a:p>
             <a:pPr rtl="1" algn="ctr" indent="0" marL="0">
               <a:buNone/>
             </a:pPr>
             <a:r>
-              <a:rPr lang="en-US" sz="2200" b="1" dirty="0">
+              <a:rPr lang="en-US" sz="1800" dirty="0">
                 <a:solidFill>
                   <a:srgbClr val="FBF6EE"/>
                 </a:solidFill>
@@ -11089,37 +14069,42 @@
                 <a:ea typeface="IBM Plex Sans Arabic" pitchFamily="34" charset="-122"/>
                 <a:cs typeface="IBM Plex Sans Arabic" pitchFamily="34" charset="-120"/>
               </a:rPr>
-              <a:t>البنية الهجينة</a:t>
-            </a:r>
-            <a:endParaRPr lang="en-US" sz="2200" dirty="0"/>
-          </a:p>
-        </p:txBody>
-      </p:sp>
-      <p:sp>
-        <p:nvSpPr>
-          <p:cNvPr id="29" name="Shape 22"/>
+              <a:t>ريال سنوياً</a:t>
+            </a:r>
+            <a:endParaRPr lang="en-US" sz="1800" dirty="0"/>
+          </a:p>
+        </p:txBody>
+      </p:sp>
+      <p:sp>
+        <p:nvSpPr>
+          <p:cNvPr id="31" name="Shape 24"/>
           <p:cNvSpPr/>
           <p:nvPr/>
         </p:nvSpPr>
         <p:spPr>
           <a:xfrm>
             <a:off x="457200" y="2697480"/>
-            <a:ext cx="3545738" cy="1920240"/>
+            <a:ext cx="3545738" cy="2377440"/>
           </a:xfrm>
           <a:prstGeom prst="roundRect">
             <a:avLst>
-              <a:gd name="adj" fmla="val 9524"/>
+              <a:gd name="adj" fmla="val 7692"/>
             </a:avLst>
           </a:prstGeom>
           <a:solidFill>
-            <a:srgbClr val="8E2F3C"/>
-          </a:solidFill>
-          <a:ln/>
+            <a:srgbClr val="FFFBF8"/>
+          </a:solidFill>
+          <a:ln w="9525">
+            <a:solidFill>
+              <a:srgbClr val="E3D5CC"/>
+            </a:solidFill>
+            <a:prstDash val="solid"/>
+          </a:ln>
         </p:spPr>
       </p:sp>
       <p:pic>
         <p:nvPicPr>
-          <p:cNvPr id="30" name="Image 5" descr="/tmp/claude-0/-home-claude/750ff410-f4aa-5276-9360-1e19d018b112/scratchpad/c/assets/i-bell-cr.png">    </p:cNvPr>
+          <p:cNvPr id="32" name="Image 5" descr="/tmp/claude-0/-home-claude/750ff410-f4aa-5276-9360-1e19d018b112/scratchpad/c/assets/i-clock-br.png">    </p:cNvPr>
           <p:cNvPicPr>
             <a:picLocks noChangeAspect="1"/>
           </p:cNvPicPr>
@@ -11133,8 +14118,8 @@
         </p:blipFill>
         <p:spPr>
           <a:xfrm>
-            <a:off x="1887169" y="3017520"/>
-            <a:ext cx="685800" cy="685800"/>
+            <a:off x="1955749" y="2971800"/>
+            <a:ext cx="548640" cy="548640"/>
           </a:xfrm>
           <a:prstGeom prst="rect">
             <a:avLst/>
@@ -11143,14 +14128,92 @@
       </p:pic>
       <p:sp>
         <p:nvSpPr>
-          <p:cNvPr id="31" name="Text 23"/>
-          <p:cNvSpPr txBox="1"/>
-          <p:nvPr/>
-        </p:nvSpPr>
-        <p:spPr>
-          <a:xfrm>
-            <a:off x="457200" y="3886200"/>
-            <a:ext cx="3545738" cy="457200"/>
+          <p:cNvPr id="33" name="Text 25"/>
+          <p:cNvSpPr txBox="1"/>
+          <p:nvPr/>
+        </p:nvSpPr>
+        <p:spPr>
+          <a:xfrm>
+            <a:off x="457200" y="3566160"/>
+            <a:ext cx="3545738" cy="868680"/>
+          </a:xfrm>
+          <a:prstGeom prst="rect">
+            <a:avLst/>
+          </a:prstGeom>
+          <a:noFill/>
+          <a:ln/>
+        </p:spPr>
+        <p:txBody>
+          <a:bodyPr wrap="square" lIns="0" tIns="0" rIns="0" bIns="0" rtlCol="0" anchor="ctr"/>
+          <a:lstStyle/>
+          <a:p>
+            <a:pPr algn="ctr" indent="0" marL="0">
+              <a:buNone/>
+            </a:pPr>
+            <a:r>
+              <a:rPr lang="en-US" sz="5400" b="1" dirty="0">
+                <a:solidFill>
+                  <a:srgbClr val="8E2F3C"/>
+                </a:solidFill>
+                <a:latin typeface="IBM Plex Sans Arabic" pitchFamily="34" charset="0"/>
+                <a:ea typeface="IBM Plex Sans Arabic" pitchFamily="34" charset="-122"/>
+                <a:cs typeface="IBM Plex Sans Arabic" pitchFamily="34" charset="-120"/>
+              </a:rPr>
+              <a:t>دقائق</a:t>
+            </a:r>
+            <a:endParaRPr lang="en-US" sz="5400" dirty="0"/>
+          </a:p>
+        </p:txBody>
+      </p:sp>
+      <p:sp>
+        <p:nvSpPr>
+          <p:cNvPr id="34" name="Text 26"/>
+          <p:cNvSpPr txBox="1"/>
+          <p:nvPr/>
+        </p:nvSpPr>
+        <p:spPr>
+          <a:xfrm>
+            <a:off x="731520" y="4480560"/>
+            <a:ext cx="2997098" cy="411480"/>
+          </a:xfrm>
+          <a:prstGeom prst="rect">
+            <a:avLst/>
+          </a:prstGeom>
+          <a:noFill/>
+          <a:ln/>
+        </p:spPr>
+        <p:txBody>
+          <a:bodyPr wrap="square" lIns="0" tIns="0" rIns="0" bIns="0" rtlCol="0" anchor="ctr"/>
+          <a:lstStyle/>
+          <a:p>
+            <a:pPr rtl="1" algn="ctr" indent="0" marL="0">
+              <a:buNone/>
+            </a:pPr>
+            <a:r>
+              <a:rPr lang="en-US" sz="1800" dirty="0">
+                <a:solidFill>
+                  <a:srgbClr val="21141A"/>
+                </a:solidFill>
+                <a:latin typeface="IBM Plex Sans Arabic" pitchFamily="34" charset="0"/>
+                <a:ea typeface="IBM Plex Sans Arabic" pitchFamily="34" charset="-122"/>
+                <a:cs typeface="IBM Plex Sans Arabic" pitchFamily="34" charset="-120"/>
+              </a:rPr>
+              <a:t>بدل أسابيع</a:t>
+            </a:r>
+            <a:endParaRPr lang="en-US" sz="1800" dirty="0"/>
+          </a:p>
+        </p:txBody>
+      </p:sp>
+      <p:sp>
+        <p:nvSpPr>
+          <p:cNvPr id="35" name="Text 27"/>
+          <p:cNvSpPr txBox="1"/>
+          <p:nvPr/>
+        </p:nvSpPr>
+        <p:spPr>
+          <a:xfrm>
+            <a:off x="457200" y="5349240"/>
+            <a:ext cx="11277295" cy="365760"/>
           </a:xfrm>
           <a:prstGeom prst="rect">
             <a:avLst/>
@@ -11166,56 +14229,17 @@
               <a:buNone/>
             </a:pPr>
             <a:r>
-              <a:rPr lang="en-US" sz="2200" b="1" dirty="0">
-                <a:solidFill>
-                  <a:srgbClr val="FBF6EE"/>
-                </a:solidFill>
-                <a:latin typeface="IBM Plex Sans Arabic" pitchFamily="34" charset="0"/>
-                <a:ea typeface="IBM Plex Sans Arabic" pitchFamily="34" charset="-122"/>
-                <a:cs typeface="IBM Plex Sans Arabic" pitchFamily="34" charset="-120"/>
-              </a:rPr>
-              <a:t>إنذار مبكر 24/7</a:t>
-            </a:r>
-            <a:endParaRPr lang="en-US" sz="2200" dirty="0"/>
-          </a:p>
-        </p:txBody>
-      </p:sp>
-      <p:sp>
-        <p:nvSpPr>
-          <p:cNvPr id="32" name="Text 24"/>
-          <p:cNvSpPr txBox="1"/>
-          <p:nvPr/>
-        </p:nvSpPr>
-        <p:spPr>
-          <a:xfrm>
-            <a:off x="457200" y="5029200"/>
-            <a:ext cx="11277295" cy="457200"/>
-          </a:xfrm>
-          <a:prstGeom prst="rect">
-            <a:avLst/>
-          </a:prstGeom>
-          <a:noFill/>
-          <a:ln/>
-        </p:spPr>
-        <p:txBody>
-          <a:bodyPr wrap="square" lIns="0" tIns="0" rIns="0" bIns="0" rtlCol="0" anchor="ctr"/>
-          <a:lstStyle/>
-          <a:p>
-            <a:pPr rtl="1" algn="ctr" indent="0" marL="0">
-              <a:buNone/>
-            </a:pPr>
-            <a:r>
-              <a:rPr lang="en-US" sz="1800" b="1" dirty="0">
-                <a:solidFill>
-                  <a:srgbClr val="21141A"/>
-                </a:solidFill>
-                <a:latin typeface="IBM Plex Sans Arabic" pitchFamily="34" charset="0"/>
-                <a:ea typeface="IBM Plex Sans Arabic" pitchFamily="34" charset="-122"/>
-                <a:cs typeface="IBM Plex Sans Arabic" pitchFamily="34" charset="-120"/>
-              </a:rPr>
-              <a:t>نحتاج: توجيه خبراء · شريك سحابي محلي · 10 شركات للتجربة</a:t>
-            </a:r>
-            <a:endParaRPr lang="en-US" sz="1800" dirty="0"/>
+              <a:rPr lang="en-US" sz="1500" dirty="0">
+                <a:solidFill>
+                  <a:srgbClr val="7F6C72"/>
+                </a:solidFill>
+                <a:latin typeface="IBM Plex Sans Arabic" pitchFamily="34" charset="0"/>
+                <a:ea typeface="IBM Plex Sans Arabic" pitchFamily="34" charset="-122"/>
+                <a:cs typeface="IBM Plex Sans Arabic" pitchFamily="34" charset="-120"/>
+              </a:rPr>
+              <a:t>مثال: شركة افتراضية من 120 موظفاً</a:t>
+            </a:r>
+            <a:endParaRPr lang="en-US" sz="1500" dirty="0"/>
           </a:p>
         </p:txBody>
       </p:sp>

--- a/pitch/SSB_VentureX.pptx
+++ b/pitch/SSB_VentureX.pptx
@@ -11814,8 +11814,8 @@
         </p:nvSpPr>
         <p:spPr>
           <a:xfrm>
-            <a:off x="457200" y="1600200"/>
-            <a:ext cx="11277295" cy="731520"/>
+            <a:off x="6172200" y="1691640"/>
+            <a:ext cx="5562295" cy="502920"/>
           </a:xfrm>
           <a:prstGeom prst="rect">
             <a:avLst/>
@@ -11831,17 +11831,17 @@
               <a:buNone/>
             </a:pPr>
             <a:r>
-              <a:rPr lang="en-US" sz="3400" b="1" dirty="0">
-                <a:solidFill>
-                  <a:srgbClr val="21141A"/>
-                </a:solidFill>
-                <a:latin typeface="IBM Plex Sans Arabic" pitchFamily="34" charset="0"/>
-                <a:ea typeface="IBM Plex Sans Arabic" pitchFamily="34" charset="-122"/>
-                <a:cs typeface="IBM Plex Sans Arabic" pitchFamily="34" charset="-120"/>
-              </a:rPr>
-              <a:t>AWS اليوم، والسحب المحلية تالياً</a:t>
-            </a:r>
-            <a:endParaRPr lang="en-US" sz="3400" dirty="0"/>
+              <a:rPr lang="en-US" sz="2100" b="1" dirty="0">
+                <a:solidFill>
+                  <a:srgbClr val="8E2F3C"/>
+                </a:solidFill>
+                <a:latin typeface="IBM Plex Sans Arabic" pitchFamily="34" charset="0"/>
+                <a:ea typeface="IBM Plex Sans Arabic" pitchFamily="34" charset="-122"/>
+                <a:cs typeface="IBM Plex Sans Arabic" pitchFamily="34" charset="-120"/>
+              </a:rPr>
+              <a:t>كيف يمكن تنفيذ الحل في الوقت الحالي؟</a:t>
+            </a:r>
+            <a:endParaRPr lang="en-US" sz="2100" dirty="0"/>
           </a:p>
         </p:txBody>
       </p:sp>
@@ -11853,23 +11853,50 @@
         </p:nvSpPr>
         <p:spPr>
           <a:xfrm>
-            <a:off x="8188757" y="2697480"/>
-            <a:ext cx="3545738" cy="2103120"/>
+            <a:off x="6172200" y="2423160"/>
+            <a:ext cx="5562295" cy="1005840"/>
           </a:xfrm>
           <a:prstGeom prst="roundRect">
             <a:avLst>
-              <a:gd name="adj" fmla="val 8696"/>
+              <a:gd name="adj" fmla="val 14545"/>
             </a:avLst>
           </a:prstGeom>
           <a:solidFill>
-            <a:srgbClr val="8E2F3C"/>
+            <a:srgbClr val="FFFBF8"/>
+          </a:solidFill>
+          <a:ln w="9525">
+            <a:solidFill>
+              <a:srgbClr val="E3D5CC"/>
+            </a:solidFill>
+            <a:prstDash val="solid"/>
+          </a:ln>
+        </p:spPr>
+      </p:sp>
+      <p:sp>
+        <p:nvSpPr>
+          <p:cNvPr id="24" name="Shape 19"/>
+          <p:cNvSpPr/>
+          <p:nvPr/>
+        </p:nvSpPr>
+        <p:spPr>
+          <a:xfrm>
+            <a:off x="10865815" y="2606040"/>
+            <a:ext cx="640080" cy="640080"/>
+          </a:xfrm>
+          <a:prstGeom prst="roundRect">
+            <a:avLst>
+              <a:gd name="adj" fmla="val 20000"/>
+            </a:avLst>
+          </a:prstGeom>
+          <a:solidFill>
+            <a:srgbClr val="F1E4DF"/>
           </a:solidFill>
           <a:ln/>
         </p:spPr>
       </p:sp>
       <p:pic>
         <p:nvPicPr>
-          <p:cNvPr id="24" name="Image 3" descr="/tmp/claude-0/-home-claude/750ff410-f4aa-5276-9360-1e19d018b112/scratchpad/c/assets/i-cloud-cr.png">    </p:cNvPr>
+          <p:cNvPr id="25" name="Image 3" descr="/tmp/claude-0/-home-claude/750ff410-f4aa-5276-9360-1e19d018b112/scratchpad/c/assets/i-plug-br.png">    </p:cNvPr>
           <p:cNvPicPr>
             <a:picLocks noChangeAspect="1"/>
           </p:cNvPicPr>
@@ -11883,8 +11910,8 @@
         </p:blipFill>
         <p:spPr>
           <a:xfrm>
-            <a:off x="9641586" y="2971800"/>
-            <a:ext cx="640080" cy="640080"/>
+            <a:off x="10957255" y="2697480"/>
+            <a:ext cx="457200" cy="457200"/>
           </a:xfrm>
           <a:prstGeom prst="rect">
             <a:avLst/>
@@ -11893,38 +11920,41 @@
       </p:pic>
       <p:sp>
         <p:nvSpPr>
-          <p:cNvPr id="25" name="Text 19"/>
-          <p:cNvSpPr txBox="1"/>
-          <p:nvPr/>
-        </p:nvSpPr>
-        <p:spPr>
-          <a:xfrm>
-            <a:off x="8188757" y="3703320"/>
-            <a:ext cx="3545738" cy="365760"/>
-          </a:xfrm>
-          <a:prstGeom prst="rect">
-            <a:avLst/>
-          </a:prstGeom>
-          <a:noFill/>
-          <a:ln/>
-        </p:spPr>
-        <p:txBody>
-          <a:bodyPr wrap="square" lIns="0" tIns="0" rIns="0" bIns="0" rtlCol="0" anchor="t"/>
-          <a:lstStyle/>
-          <a:p>
-            <a:pPr rtl="1" algn="ctr" indent="0" marL="0">
+          <p:cNvPr id="26" name="Text 20"/>
+          <p:cNvSpPr txBox="1"/>
+          <p:nvPr/>
+        </p:nvSpPr>
+        <p:spPr>
+          <a:xfrm>
+            <a:off x="6446520" y="2423160"/>
+            <a:ext cx="4236415" cy="1005840"/>
+          </a:xfrm>
+          <a:prstGeom prst="rect">
+            <a:avLst/>
+          </a:prstGeom>
+          <a:noFill/>
+          <a:ln/>
+        </p:spPr>
+        <p:txBody>
+          <a:bodyPr wrap="square" lIns="0" tIns="0" rIns="0" bIns="0" rtlCol="0" anchor="ctr"/>
+          <a:lstStyle/>
+          <a:p>
+            <a:pPr rtl="1" algn="r" indent="0" marL="0">
+              <a:lnSpc>
+                <a:spcPct val="110000"/>
+              </a:lnSpc>
               <a:buNone/>
             </a:pPr>
             <a:r>
               <a:rPr lang="en-US" sz="1600" dirty="0">
                 <a:solidFill>
-                  <a:srgbClr val="F1E4DF"/>
-                </a:solidFill>
-                <a:latin typeface="IBM Plex Sans Arabic" pitchFamily="34" charset="0"/>
-                <a:ea typeface="IBM Plex Sans Arabic" pitchFamily="34" charset="-122"/>
-                <a:cs typeface="IBM Plex Sans Arabic" pitchFamily="34" charset="-120"/>
-              </a:rPr>
-              <a:t>الآن</a:t>
+                  <a:srgbClr val="21141A"/>
+                </a:solidFill>
+                <a:latin typeface="IBM Plex Sans Arabic" pitchFamily="34" charset="0"/>
+                <a:ea typeface="IBM Plex Sans Arabic" pitchFamily="34" charset="-122"/>
+                <a:cs typeface="IBM Plex Sans Arabic" pitchFamily="34" charset="-120"/>
+              </a:rPr>
+              <a:t>ربط المنصة بحساب الشركة السحابي عبر API</a:t>
             </a:r>
             <a:endParaRPr lang="en-US" sz="1600" dirty="0"/>
           </a:p>
@@ -11932,57 +11962,18 @@
       </p:sp>
       <p:sp>
         <p:nvSpPr>
-          <p:cNvPr id="26" name="Text 20"/>
-          <p:cNvSpPr txBox="1"/>
-          <p:nvPr/>
-        </p:nvSpPr>
-        <p:spPr>
-          <a:xfrm>
-            <a:off x="8188757" y="4069080"/>
-            <a:ext cx="3545738" cy="502920"/>
-          </a:xfrm>
-          <a:prstGeom prst="rect">
-            <a:avLst/>
-          </a:prstGeom>
-          <a:noFill/>
-          <a:ln/>
-        </p:spPr>
-        <p:txBody>
-          <a:bodyPr wrap="square" lIns="0" tIns="0" rIns="0" bIns="0" rtlCol="0" anchor="t"/>
-          <a:lstStyle/>
-          <a:p>
-            <a:pPr rtl="1" algn="ctr" indent="0" marL="0">
-              <a:buNone/>
-            </a:pPr>
-            <a:r>
-              <a:rPr lang="en-US" sz="2400" b="1" dirty="0">
-                <a:solidFill>
-                  <a:srgbClr val="FBF6EE"/>
-                </a:solidFill>
-                <a:latin typeface="IBM Plex Sans Arabic" pitchFamily="34" charset="0"/>
-                <a:ea typeface="IBM Plex Sans Arabic" pitchFamily="34" charset="-122"/>
-                <a:cs typeface="IBM Plex Sans Arabic" pitchFamily="34" charset="-120"/>
-              </a:rPr>
-              <a:t>AWS</a:t>
-            </a:r>
-            <a:endParaRPr lang="en-US" sz="2400" dirty="0"/>
-          </a:p>
-        </p:txBody>
-      </p:sp>
-      <p:sp>
-        <p:nvSpPr>
           <p:cNvPr id="27" name="Shape 21"/>
           <p:cNvSpPr/>
           <p:nvPr/>
         </p:nvSpPr>
         <p:spPr>
           <a:xfrm>
-            <a:off x="4322978" y="2697480"/>
-            <a:ext cx="3545738" cy="2103120"/>
+            <a:off x="6172200" y="3611880"/>
+            <a:ext cx="5562295" cy="1005840"/>
           </a:xfrm>
           <a:prstGeom prst="roundRect">
             <a:avLst>
-              <a:gd name="adj" fmla="val 8696"/>
+              <a:gd name="adj" fmla="val 14545"/>
             </a:avLst>
           </a:prstGeom>
           <a:solidFill>
@@ -11996,9 +11987,31 @@
           </a:ln>
         </p:spPr>
       </p:sp>
+      <p:sp>
+        <p:nvSpPr>
+          <p:cNvPr id="28" name="Shape 22"/>
+          <p:cNvSpPr/>
+          <p:nvPr/>
+        </p:nvSpPr>
+        <p:spPr>
+          <a:xfrm>
+            <a:off x="10865815" y="3794760"/>
+            <a:ext cx="640080" cy="640080"/>
+          </a:xfrm>
+          <a:prstGeom prst="roundRect">
+            <a:avLst>
+              <a:gd name="adj" fmla="val 20000"/>
+            </a:avLst>
+          </a:prstGeom>
+          <a:solidFill>
+            <a:srgbClr val="F1E4DF"/>
+          </a:solidFill>
+          <a:ln/>
+        </p:spPr>
+      </p:sp>
       <p:pic>
         <p:nvPicPr>
-          <p:cNvPr id="28" name="Image 4" descr="/tmp/claude-0/-home-claude/750ff410-f4aa-5276-9360-1e19d018b112/scratchpad/c/assets/i-layers-br.png">    </p:cNvPr>
+          <p:cNvPr id="29" name="Image 4" descr="/tmp/claude-0/-home-claude/750ff410-f4aa-5276-9360-1e19d018b112/scratchpad/c/assets/i-bot-br.png">    </p:cNvPr>
           <p:cNvPicPr>
             <a:picLocks noChangeAspect="1"/>
           </p:cNvPicPr>
@@ -12012,8 +12025,8 @@
         </p:blipFill>
         <p:spPr>
           <a:xfrm>
-            <a:off x="5775808" y="2971800"/>
-            <a:ext cx="640080" cy="640080"/>
+            <a:off x="10957255" y="3886200"/>
+            <a:ext cx="457200" cy="457200"/>
           </a:xfrm>
           <a:prstGeom prst="rect">
             <a:avLst/>
@@ -12022,38 +12035,41 @@
       </p:pic>
       <p:sp>
         <p:nvSpPr>
-          <p:cNvPr id="29" name="Text 22"/>
-          <p:cNvSpPr txBox="1"/>
-          <p:nvPr/>
-        </p:nvSpPr>
-        <p:spPr>
-          <a:xfrm>
-            <a:off x="4322978" y="3703320"/>
-            <a:ext cx="3545738" cy="365760"/>
-          </a:xfrm>
-          <a:prstGeom prst="rect">
-            <a:avLst/>
-          </a:prstGeom>
-          <a:noFill/>
-          <a:ln/>
-        </p:spPr>
-        <p:txBody>
-          <a:bodyPr wrap="square" lIns="0" tIns="0" rIns="0" bIns="0" rtlCol="0" anchor="t"/>
-          <a:lstStyle/>
-          <a:p>
-            <a:pPr rtl="1" algn="ctr" indent="0" marL="0">
+          <p:cNvPr id="30" name="Text 23"/>
+          <p:cNvSpPr txBox="1"/>
+          <p:nvPr/>
+        </p:nvSpPr>
+        <p:spPr>
+          <a:xfrm>
+            <a:off x="6446520" y="3611880"/>
+            <a:ext cx="4236415" cy="1005840"/>
+          </a:xfrm>
+          <a:prstGeom prst="rect">
+            <a:avLst/>
+          </a:prstGeom>
+          <a:noFill/>
+          <a:ln/>
+        </p:spPr>
+        <p:txBody>
+          <a:bodyPr wrap="square" lIns="0" tIns="0" rIns="0" bIns="0" rtlCol="0" anchor="ctr"/>
+          <a:lstStyle/>
+          <a:p>
+            <a:pPr rtl="1" algn="r" indent="0" marL="0">
+              <a:lnSpc>
+                <a:spcPct val="110000"/>
+              </a:lnSpc>
               <a:buNone/>
             </a:pPr>
             <a:r>
               <a:rPr lang="en-US" sz="1600" dirty="0">
                 <a:solidFill>
-                  <a:srgbClr val="7F6C72"/>
-                </a:solidFill>
-                <a:latin typeface="IBM Plex Sans Arabic" pitchFamily="34" charset="0"/>
-                <a:ea typeface="IBM Plex Sans Arabic" pitchFamily="34" charset="-122"/>
-                <a:cs typeface="IBM Plex Sans Arabic" pitchFamily="34" charset="-120"/>
-              </a:rPr>
-              <a:t>التالي</a:t>
+                  <a:srgbClr val="21141A"/>
+                </a:solidFill>
+                <a:latin typeface="IBM Plex Sans Arabic" pitchFamily="34" charset="0"/>
+                <a:ea typeface="IBM Plex Sans Arabic" pitchFamily="34" charset="-122"/>
+                <a:cs typeface="IBM Plex Sans Arabic" pitchFamily="34" charset="-120"/>
+              </a:rPr>
+              <a:t>نموذج ذكاء اصطناعي يمسح البنية فوراً ويطابقها مع أفضل الممارسات ويحلل الأحمال</a:t>
             </a:r>
             <a:endParaRPr lang="en-US" sz="1600" dirty="0"/>
           </a:p>
@@ -12061,57 +12077,18 @@
       </p:sp>
       <p:sp>
         <p:nvSpPr>
-          <p:cNvPr id="30" name="Text 23"/>
-          <p:cNvSpPr txBox="1"/>
-          <p:nvPr/>
-        </p:nvSpPr>
-        <p:spPr>
-          <a:xfrm>
-            <a:off x="4322978" y="4069080"/>
-            <a:ext cx="3545738" cy="502920"/>
-          </a:xfrm>
-          <a:prstGeom prst="rect">
-            <a:avLst/>
-          </a:prstGeom>
-          <a:noFill/>
-          <a:ln/>
-        </p:spPr>
-        <p:txBody>
-          <a:bodyPr wrap="square" lIns="0" tIns="0" rIns="0" bIns="0" rtlCol="0" anchor="t"/>
-          <a:lstStyle/>
-          <a:p>
-            <a:pPr rtl="1" algn="ctr" indent="0" marL="0">
-              <a:buNone/>
-            </a:pPr>
-            <a:r>
-              <a:rPr lang="en-US" sz="2400" b="1" dirty="0">
-                <a:solidFill>
-                  <a:srgbClr val="8E2F3C"/>
-                </a:solidFill>
-                <a:latin typeface="IBM Plex Sans Arabic" pitchFamily="34" charset="0"/>
-                <a:ea typeface="IBM Plex Sans Arabic" pitchFamily="34" charset="-122"/>
-                <a:cs typeface="IBM Plex Sans Arabic" pitchFamily="34" charset="-120"/>
-              </a:rPr>
-              <a:t>Azure وGCP</a:t>
-            </a:r>
-            <a:endParaRPr lang="en-US" sz="2400" dirty="0"/>
-          </a:p>
-        </p:txBody>
-      </p:sp>
-      <p:sp>
-        <p:nvSpPr>
           <p:cNvPr id="31" name="Shape 24"/>
           <p:cNvSpPr/>
           <p:nvPr/>
         </p:nvSpPr>
         <p:spPr>
           <a:xfrm>
-            <a:off x="457200" y="2697480"/>
-            <a:ext cx="3545738" cy="2103120"/>
+            <a:off x="6172200" y="4800600"/>
+            <a:ext cx="5562295" cy="1005840"/>
           </a:xfrm>
           <a:prstGeom prst="roundRect">
             <a:avLst>
-              <a:gd name="adj" fmla="val 8696"/>
+              <a:gd name="adj" fmla="val 14545"/>
             </a:avLst>
           </a:prstGeom>
           <a:solidFill>
@@ -12125,9 +12102,31 @@
           </a:ln>
         </p:spPr>
       </p:sp>
+      <p:sp>
+        <p:nvSpPr>
+          <p:cNvPr id="32" name="Shape 25"/>
+          <p:cNvSpPr/>
+          <p:nvPr/>
+        </p:nvSpPr>
+        <p:spPr>
+          <a:xfrm>
+            <a:off x="10865815" y="4983480"/>
+            <a:ext cx="640080" cy="640080"/>
+          </a:xfrm>
+          <a:prstGeom prst="roundRect">
+            <a:avLst>
+              <a:gd name="adj" fmla="val 20000"/>
+            </a:avLst>
+          </a:prstGeom>
+          <a:solidFill>
+            <a:srgbClr val="F1E4DF"/>
+          </a:solidFill>
+          <a:ln/>
+        </p:spPr>
+      </p:sp>
       <p:pic>
         <p:nvPicPr>
-          <p:cNvPr id="32" name="Image 5" descr="/tmp/claude-0/-home-claude/750ff410-f4aa-5276-9360-1e19d018b112/scratchpad/c/assets/i-map-br.png">    </p:cNvPr>
+          <p:cNvPr id="33" name="Image 5" descr="/tmp/claude-0/-home-claude/750ff410-f4aa-5276-9360-1e19d018b112/scratchpad/c/assets/i-check-br.png">    </p:cNvPr>
           <p:cNvPicPr>
             <a:picLocks noChangeAspect="1"/>
           </p:cNvPicPr>
@@ -12141,8 +12140,8 @@
         </p:blipFill>
         <p:spPr>
           <a:xfrm>
-            <a:off x="1910029" y="2971800"/>
-            <a:ext cx="640080" cy="640080"/>
+            <a:off x="10957255" y="5074920"/>
+            <a:ext cx="457200" cy="457200"/>
           </a:xfrm>
           <a:prstGeom prst="rect">
             <a:avLst/>
@@ -12151,38 +12150,41 @@
       </p:pic>
       <p:sp>
         <p:nvSpPr>
-          <p:cNvPr id="33" name="Text 25"/>
-          <p:cNvSpPr txBox="1"/>
-          <p:nvPr/>
-        </p:nvSpPr>
-        <p:spPr>
-          <a:xfrm>
-            <a:off x="457200" y="3703320"/>
-            <a:ext cx="3545738" cy="365760"/>
-          </a:xfrm>
-          <a:prstGeom prst="rect">
-            <a:avLst/>
-          </a:prstGeom>
-          <a:noFill/>
-          <a:ln/>
-        </p:spPr>
-        <p:txBody>
-          <a:bodyPr wrap="square" lIns="0" tIns="0" rIns="0" bIns="0" rtlCol="0" anchor="t"/>
-          <a:lstStyle/>
-          <a:p>
-            <a:pPr rtl="1" algn="ctr" indent="0" marL="0">
+          <p:cNvPr id="34" name="Text 26"/>
+          <p:cNvSpPr txBox="1"/>
+          <p:nvPr/>
+        </p:nvSpPr>
+        <p:spPr>
+          <a:xfrm>
+            <a:off x="6446520" y="4800600"/>
+            <a:ext cx="4236415" cy="1005840"/>
+          </a:xfrm>
+          <a:prstGeom prst="rect">
+            <a:avLst/>
+          </a:prstGeom>
+          <a:noFill/>
+          <a:ln/>
+        </p:spPr>
+        <p:txBody>
+          <a:bodyPr wrap="square" lIns="0" tIns="0" rIns="0" bIns="0" rtlCol="0" anchor="ctr"/>
+          <a:lstStyle/>
+          <a:p>
+            <a:pPr rtl="1" algn="r" indent="0" marL="0">
+              <a:lnSpc>
+                <a:spcPct val="110000"/>
+              </a:lnSpc>
               <a:buNone/>
             </a:pPr>
             <a:r>
               <a:rPr lang="en-US" sz="1600" dirty="0">
                 <a:solidFill>
-                  <a:srgbClr val="7F6C72"/>
-                </a:solidFill>
-                <a:latin typeface="IBM Plex Sans Arabic" pitchFamily="34" charset="0"/>
-                <a:ea typeface="IBM Plex Sans Arabic" pitchFamily="34" charset="-122"/>
-                <a:cs typeface="IBM Plex Sans Arabic" pitchFamily="34" charset="-120"/>
-              </a:rPr>
-              <a:t>ثم</a:t>
+                  <a:srgbClr val="21141A"/>
+                </a:solidFill>
+                <a:latin typeface="IBM Plex Sans Arabic" pitchFamily="34" charset="0"/>
+                <a:ea typeface="IBM Plex Sans Arabic" pitchFamily="34" charset="-122"/>
+                <a:cs typeface="IBM Plex Sans Arabic" pitchFamily="34" charset="-120"/>
+              </a:rPr>
+              <a:t>زر تفاعلي بضغطة واحدة لإيقاف المورد أو تقليصه عبر API</a:t>
             </a:r>
             <a:endParaRPr lang="en-US" sz="1600" dirty="0"/>
           </a:p>
@@ -12190,68 +12192,24 @@
       </p:sp>
       <p:sp>
         <p:nvSpPr>
-          <p:cNvPr id="34" name="Text 26"/>
-          <p:cNvSpPr txBox="1"/>
-          <p:nvPr/>
-        </p:nvSpPr>
-        <p:spPr>
-          <a:xfrm>
-            <a:off x="457200" y="4069080"/>
-            <a:ext cx="3545738" cy="502920"/>
-          </a:xfrm>
-          <a:prstGeom prst="rect">
-            <a:avLst/>
-          </a:prstGeom>
-          <a:noFill/>
-          <a:ln/>
-        </p:spPr>
-        <p:txBody>
-          <a:bodyPr wrap="square" lIns="0" tIns="0" rIns="0" bIns="0" rtlCol="0" anchor="t"/>
-          <a:lstStyle/>
-          <a:p>
-            <a:pPr rtl="1" algn="ctr" indent="0" marL="0">
-              <a:buNone/>
-            </a:pPr>
-            <a:r>
-              <a:rPr lang="en-US" sz="2400" b="1" dirty="0">
-                <a:solidFill>
-                  <a:srgbClr val="8E2F3C"/>
-                </a:solidFill>
-                <a:latin typeface="IBM Plex Sans Arabic" pitchFamily="34" charset="0"/>
-                <a:ea typeface="IBM Plex Sans Arabic" pitchFamily="34" charset="-122"/>
-                <a:cs typeface="IBM Plex Sans Arabic" pitchFamily="34" charset="-120"/>
-              </a:rPr>
-              <a:t>STC وSCCC وCNTXT</a:t>
-            </a:r>
-            <a:endParaRPr lang="en-US" sz="2400" dirty="0"/>
-          </a:p>
-        </p:txBody>
-      </p:sp>
-      <p:sp>
-        <p:nvSpPr>
           <p:cNvPr id="35" name="Shape 27"/>
           <p:cNvSpPr/>
           <p:nvPr/>
         </p:nvSpPr>
         <p:spPr>
           <a:xfrm>
-            <a:off x="7353148" y="5257800"/>
-            <a:ext cx="1097280" cy="384048"/>
+            <a:off x="457200" y="1691640"/>
+            <a:ext cx="5257800" cy="4114800"/>
           </a:xfrm>
           <a:prstGeom prst="roundRect">
             <a:avLst>
-              <a:gd name="adj" fmla="val 50000"/>
+              <a:gd name="adj" fmla="val 4444"/>
             </a:avLst>
           </a:prstGeom>
           <a:solidFill>
-            <a:srgbClr val="FFFBF8"/>
-          </a:solidFill>
-          <a:ln w="9525">
-            <a:solidFill>
-              <a:srgbClr val="E3D5CC"/>
-            </a:solidFill>
-            <a:prstDash val="solid"/>
-          </a:ln>
+            <a:srgbClr val="8E2F3C"/>
+          </a:solidFill>
+          <a:ln/>
         </p:spPr>
       </p:sp>
       <p:sp>
@@ -12262,8 +12220,8 @@
         </p:nvSpPr>
         <p:spPr>
           <a:xfrm>
-            <a:off x="7353148" y="5257800"/>
-            <a:ext cx="1097280" cy="384048"/>
+            <a:off x="777240" y="1920240"/>
+            <a:ext cx="4617720" cy="502920"/>
           </a:xfrm>
           <a:prstGeom prst="rect">
             <a:avLst/>
@@ -12275,21 +12233,21 @@
           <a:bodyPr wrap="square" lIns="0" tIns="0" rIns="0" bIns="0" rtlCol="0" anchor="ctr"/>
           <a:lstStyle/>
           <a:p>
-            <a:pPr rtl="1" algn="ctr" indent="0" marL="0">
-              <a:buNone/>
-            </a:pPr>
-            <a:r>
-              <a:rPr lang="en-US" sz="1300" b="1" dirty="0">
-                <a:solidFill>
-                  <a:srgbClr val="21141A"/>
-                </a:solidFill>
-                <a:latin typeface="IBM Plex Sans Arabic" pitchFamily="34" charset="0"/>
-                <a:ea typeface="IBM Plex Sans Arabic" pitchFamily="34" charset="-122"/>
-                <a:cs typeface="IBM Plex Sans Arabic" pitchFamily="34" charset="-120"/>
-              </a:rPr>
-              <a:t>Next.js</a:t>
-            </a:r>
-            <a:endParaRPr lang="en-US" sz="1300" dirty="0"/>
+            <a:pPr rtl="1" algn="r" indent="0" marL="0">
+              <a:buNone/>
+            </a:pPr>
+            <a:r>
+              <a:rPr lang="en-US" sz="2100" b="1" dirty="0">
+                <a:solidFill>
+                  <a:srgbClr val="FBF6EE"/>
+                </a:solidFill>
+                <a:latin typeface="IBM Plex Sans Arabic" pitchFamily="34" charset="0"/>
+                <a:ea typeface="IBM Plex Sans Arabic" pitchFamily="34" charset="-122"/>
+                <a:cs typeface="IBM Plex Sans Arabic" pitchFamily="34" charset="-120"/>
+              </a:rPr>
+              <a:t>ما التقنيات المتوفرة لتنفيذه؟</a:t>
+            </a:r>
+            <a:endParaRPr lang="en-US" sz="2100" dirty="0"/>
           </a:p>
         </p:txBody>
       </p:sp>
@@ -12301,35 +12259,54 @@
         </p:nvSpPr>
         <p:spPr>
           <a:xfrm>
-            <a:off x="5844388" y="5257800"/>
-            <a:ext cx="1371600" cy="384048"/>
+            <a:off x="777240" y="2651760"/>
+            <a:ext cx="4617720" cy="804672"/>
           </a:xfrm>
           <a:prstGeom prst="roundRect">
             <a:avLst>
-              <a:gd name="adj" fmla="val 50000"/>
+              <a:gd name="adj" fmla="val 15909"/>
             </a:avLst>
           </a:prstGeom>
           <a:solidFill>
-            <a:srgbClr val="FFFBF8"/>
-          </a:solidFill>
-          <a:ln w="9525">
-            <a:solidFill>
-              <a:srgbClr val="E3D5CC"/>
-            </a:solidFill>
-            <a:prstDash val="solid"/>
-          </a:ln>
-        </p:spPr>
-      </p:sp>
-      <p:sp>
-        <p:nvSpPr>
-          <p:cNvPr id="38" name="Text 30"/>
-          <p:cNvSpPr txBox="1"/>
-          <p:nvPr/>
-        </p:nvSpPr>
-        <p:spPr>
-          <a:xfrm>
-            <a:off x="5844388" y="5257800"/>
-            <a:ext cx="1371600" cy="384048"/>
+            <a:srgbClr val="FBF6EE"/>
+          </a:solidFill>
+          <a:ln/>
+        </p:spPr>
+      </p:sp>
+      <p:pic>
+        <p:nvPicPr>
+          <p:cNvPr id="38" name="Image 6" descr="/tmp/claude-0/-home-claude/750ff410-f4aa-5276-9360-1e19d018b112/scratchpad/c/assets/i-cloud-br.png">    </p:cNvPr>
+          <p:cNvPicPr>
+            <a:picLocks noChangeAspect="1"/>
+          </p:cNvPicPr>
+          <p:nvPr/>
+        </p:nvPicPr>
+        <p:blipFill>
+          <a:blip r:embed="rId7"/>
+          <a:stretch>
+            <a:fillRect/>
+          </a:stretch>
+        </p:blipFill>
+        <p:spPr>
+          <a:xfrm>
+            <a:off x="4754880" y="2825496"/>
+            <a:ext cx="457200" cy="457200"/>
+          </a:xfrm>
+          <a:prstGeom prst="rect">
+            <a:avLst/>
+          </a:prstGeom>
+        </p:spPr>
+      </p:pic>
+      <p:sp>
+        <p:nvSpPr>
+          <p:cNvPr id="39" name="Text 30"/>
+          <p:cNvSpPr txBox="1"/>
+          <p:nvPr/>
+        </p:nvSpPr>
+        <p:spPr>
+          <a:xfrm>
+            <a:off x="1005840" y="2651760"/>
+            <a:ext cx="3657600" cy="804672"/>
           </a:xfrm>
           <a:prstGeom prst="rect">
             <a:avLst/>
@@ -12341,11 +12318,11 @@
           <a:bodyPr wrap="square" lIns="0" tIns="0" rIns="0" bIns="0" rtlCol="0" anchor="ctr"/>
           <a:lstStyle/>
           <a:p>
-            <a:pPr rtl="1" algn="ctr" indent="0" marL="0">
-              <a:buNone/>
-            </a:pPr>
-            <a:r>
-              <a:rPr lang="en-US" sz="1300" b="1" dirty="0">
+            <a:pPr rtl="1" algn="r" indent="0" marL="0">
+              <a:buNone/>
+            </a:pPr>
+            <a:r>
+              <a:rPr lang="en-US" sz="1800" b="1" dirty="0">
                 <a:solidFill>
                   <a:srgbClr val="21141A"/>
                 </a:solidFill>
@@ -12355,47 +12332,66 @@
               </a:rPr>
               <a:t>Cloud APIs</a:t>
             </a:r>
-            <a:endParaRPr lang="en-US" sz="1300" dirty="0"/>
-          </a:p>
-        </p:txBody>
-      </p:sp>
-      <p:sp>
-        <p:nvSpPr>
-          <p:cNvPr id="39" name="Shape 31"/>
-          <p:cNvSpPr/>
-          <p:nvPr/>
-        </p:nvSpPr>
-        <p:spPr>
-          <a:xfrm>
-            <a:off x="5067148" y="5257800"/>
-            <a:ext cx="640080" cy="384048"/>
+            <a:endParaRPr lang="en-US" sz="1800" dirty="0"/>
+          </a:p>
+        </p:txBody>
+      </p:sp>
+      <p:sp>
+        <p:nvSpPr>
+          <p:cNvPr id="40" name="Shape 31"/>
+          <p:cNvSpPr/>
+          <p:nvPr/>
+        </p:nvSpPr>
+        <p:spPr>
+          <a:xfrm>
+            <a:off x="777240" y="3639312"/>
+            <a:ext cx="4617720" cy="804672"/>
           </a:xfrm>
           <a:prstGeom prst="roundRect">
             <a:avLst>
-              <a:gd name="adj" fmla="val 50000"/>
+              <a:gd name="adj" fmla="val 15909"/>
             </a:avLst>
           </a:prstGeom>
           <a:solidFill>
-            <a:srgbClr val="FFFBF8"/>
-          </a:solidFill>
-          <a:ln w="9525">
-            <a:solidFill>
-              <a:srgbClr val="E3D5CC"/>
-            </a:solidFill>
-            <a:prstDash val="solid"/>
-          </a:ln>
-        </p:spPr>
-      </p:sp>
-      <p:sp>
-        <p:nvSpPr>
-          <p:cNvPr id="40" name="Text 32"/>
-          <p:cNvSpPr txBox="1"/>
-          <p:nvPr/>
-        </p:nvSpPr>
-        <p:spPr>
-          <a:xfrm>
-            <a:off x="5067148" y="5257800"/>
-            <a:ext cx="640080" cy="384048"/>
+            <a:srgbClr val="FBF6EE"/>
+          </a:solidFill>
+          <a:ln/>
+        </p:spPr>
+      </p:sp>
+      <p:pic>
+        <p:nvPicPr>
+          <p:cNvPr id="41" name="Image 7" descr="/tmp/claude-0/-home-claude/750ff410-f4aa-5276-9360-1e19d018b112/scratchpad/c/assets/i-brain-br.png">    </p:cNvPr>
+          <p:cNvPicPr>
+            <a:picLocks noChangeAspect="1"/>
+          </p:cNvPicPr>
+          <p:nvPr/>
+        </p:nvPicPr>
+        <p:blipFill>
+          <a:blip r:embed="rId8"/>
+          <a:stretch>
+            <a:fillRect/>
+          </a:stretch>
+        </p:blipFill>
+        <p:spPr>
+          <a:xfrm>
+            <a:off x="4754880" y="3813048"/>
+            <a:ext cx="457200" cy="457200"/>
+          </a:xfrm>
+          <a:prstGeom prst="rect">
+            <a:avLst/>
+          </a:prstGeom>
+        </p:spPr>
+      </p:pic>
+      <p:sp>
+        <p:nvSpPr>
+          <p:cNvPr id="42" name="Text 32"/>
+          <p:cNvSpPr txBox="1"/>
+          <p:nvPr/>
+        </p:nvSpPr>
+        <p:spPr>
+          <a:xfrm>
+            <a:off x="1005840" y="3639312"/>
+            <a:ext cx="3657600" cy="804672"/>
           </a:xfrm>
           <a:prstGeom prst="rect">
             <a:avLst/>
@@ -12407,11 +12403,11 @@
           <a:bodyPr wrap="square" lIns="0" tIns="0" rIns="0" bIns="0" rtlCol="0" anchor="ctr"/>
           <a:lstStyle/>
           <a:p>
-            <a:pPr rtl="1" algn="ctr" indent="0" marL="0">
-              <a:buNone/>
-            </a:pPr>
-            <a:r>
-              <a:rPr lang="en-US" sz="1300" b="1" dirty="0">
+            <a:pPr rtl="1" algn="r" indent="0" marL="0">
+              <a:buNone/>
+            </a:pPr>
+            <a:r>
+              <a:rPr lang="en-US" sz="1800" b="1" dirty="0">
                 <a:solidFill>
                   <a:srgbClr val="21141A"/>
                 </a:solidFill>
@@ -12419,49 +12415,68 @@
                 <a:ea typeface="IBM Plex Sans Arabic" pitchFamily="34" charset="-122"/>
                 <a:cs typeface="IBM Plex Sans Arabic" pitchFamily="34" charset="-120"/>
               </a:rPr>
-              <a:t>AI</a:t>
-            </a:r>
-            <a:endParaRPr lang="en-US" sz="1300" dirty="0"/>
-          </a:p>
-        </p:txBody>
-      </p:sp>
-      <p:sp>
-        <p:nvSpPr>
-          <p:cNvPr id="41" name="Shape 33"/>
-          <p:cNvSpPr/>
-          <p:nvPr/>
-        </p:nvSpPr>
-        <p:spPr>
-          <a:xfrm>
-            <a:off x="3741268" y="5257800"/>
-            <a:ext cx="1188720" cy="384048"/>
+              <a:t>AI Models</a:t>
+            </a:r>
+            <a:endParaRPr lang="en-US" sz="1800" dirty="0"/>
+          </a:p>
+        </p:txBody>
+      </p:sp>
+      <p:sp>
+        <p:nvSpPr>
+          <p:cNvPr id="43" name="Shape 33"/>
+          <p:cNvSpPr/>
+          <p:nvPr/>
+        </p:nvSpPr>
+        <p:spPr>
+          <a:xfrm>
+            <a:off x="777240" y="4626864"/>
+            <a:ext cx="4617720" cy="804672"/>
           </a:xfrm>
           <a:prstGeom prst="roundRect">
             <a:avLst>
-              <a:gd name="adj" fmla="val 50000"/>
+              <a:gd name="adj" fmla="val 15909"/>
             </a:avLst>
           </a:prstGeom>
           <a:solidFill>
-            <a:srgbClr val="FFFBF8"/>
-          </a:solidFill>
-          <a:ln w="9525">
-            <a:solidFill>
-              <a:srgbClr val="E3D5CC"/>
-            </a:solidFill>
-            <a:prstDash val="solid"/>
-          </a:ln>
-        </p:spPr>
-      </p:sp>
-      <p:sp>
-        <p:nvSpPr>
-          <p:cNvPr id="42" name="Text 34"/>
-          <p:cNvSpPr txBox="1"/>
-          <p:nvPr/>
-        </p:nvSpPr>
-        <p:spPr>
-          <a:xfrm>
-            <a:off x="3741268" y="5257800"/>
-            <a:ext cx="1188720" cy="384048"/>
+            <a:srgbClr val="FBF6EE"/>
+          </a:solidFill>
+          <a:ln/>
+        </p:spPr>
+      </p:sp>
+      <p:pic>
+        <p:nvPicPr>
+          <p:cNvPr id="44" name="Image 8" descr="/tmp/claude-0/-home-claude/750ff410-f4aa-5276-9360-1e19d018b112/scratchpad/c/assets/i-code-br.png">    </p:cNvPr>
+          <p:cNvPicPr>
+            <a:picLocks noChangeAspect="1"/>
+          </p:cNvPicPr>
+          <p:nvPr/>
+        </p:nvPicPr>
+        <p:blipFill>
+          <a:blip r:embed="rId9"/>
+          <a:stretch>
+            <a:fillRect/>
+          </a:stretch>
+        </p:blipFill>
+        <p:spPr>
+          <a:xfrm>
+            <a:off x="4754880" y="4800600"/>
+            <a:ext cx="457200" cy="457200"/>
+          </a:xfrm>
+          <a:prstGeom prst="rect">
+            <a:avLst/>
+          </a:prstGeom>
+        </p:spPr>
+      </p:pic>
+      <p:sp>
+        <p:nvSpPr>
+          <p:cNvPr id="45" name="Text 34"/>
+          <p:cNvSpPr txBox="1"/>
+          <p:nvPr/>
+        </p:nvSpPr>
+        <p:spPr>
+          <a:xfrm>
+            <a:off x="1005840" y="4626864"/>
+            <a:ext cx="3657600" cy="804672"/>
           </a:xfrm>
           <a:prstGeom prst="rect">
             <a:avLst/>
@@ -12473,11 +12488,11 @@
           <a:bodyPr wrap="square" lIns="0" tIns="0" rIns="0" bIns="0" rtlCol="0" anchor="ctr"/>
           <a:lstStyle/>
           <a:p>
-            <a:pPr rtl="1" algn="ctr" indent="0" marL="0">
-              <a:buNone/>
-            </a:pPr>
-            <a:r>
-              <a:rPr lang="en-US" sz="1300" b="1" dirty="0">
+            <a:pPr rtl="1" algn="r" indent="0" marL="0">
+              <a:buNone/>
+            </a:pPr>
+            <a:r>
+              <a:rPr lang="en-US" sz="1800" b="1" dirty="0">
                 <a:solidFill>
                   <a:srgbClr val="21141A"/>
                 </a:solidFill>
@@ -12485,9 +12500,9 @@
                 <a:ea typeface="IBM Plex Sans Arabic" pitchFamily="34" charset="-122"/>
                 <a:cs typeface="IBM Plex Sans Arabic" pitchFamily="34" charset="-120"/>
               </a:rPr>
-              <a:t>Telegram</a:t>
-            </a:r>
-            <a:endParaRPr lang="en-US" sz="1300" dirty="0"/>
+              <a:t>أدوات تطوير الواجهات والمواقع</a:t>
+            </a:r>
+            <a:endParaRPr lang="en-US" sz="1800" dirty="0"/>
           </a:p>
         </p:txBody>
       </p:sp>

--- a/pitch/SSB_VentureX.pptx
+++ b/pitch/SSB_VentureX.pptx
@@ -7277,36 +7277,9 @@
           </a:p>
         </p:txBody>
       </p:sp>
-      <p:sp>
-        <p:nvSpPr>
-          <p:cNvPr id="35" name="Shape 26"/>
-          <p:cNvSpPr/>
-          <p:nvPr/>
-        </p:nvSpPr>
-        <p:spPr>
-          <a:xfrm>
-            <a:off x="1005840" y="1600200"/>
-            <a:ext cx="3840480" cy="4217286"/>
-          </a:xfrm>
-          <a:prstGeom prst="roundRect">
-            <a:avLst>
-              <a:gd name="adj" fmla="val 2857"/>
-            </a:avLst>
-          </a:prstGeom>
-          <a:solidFill>
-            <a:srgbClr val="FFFBF8"/>
-          </a:solidFill>
-          <a:ln w="9525">
-            <a:solidFill>
-              <a:srgbClr val="E3D5CC"/>
-            </a:solidFill>
-            <a:prstDash val="solid"/>
-          </a:ln>
-        </p:spPr>
-      </p:sp>
       <p:pic>
         <p:nvPicPr>
-          <p:cNvPr id="36" name="Image 7" descr="/tmp/claude-0/-home-claude/750ff410-f4aa-5276-9360-1e19d018b112/scratchpad/c/assets/s-approve.png">    </p:cNvPr>
+          <p:cNvPr id="35" name="Image 7" descr="/tmp/claude-0/-home-claude/750ff410-f4aa-5276-9360-1e19d018b112/scratchpad/c/assets/m-lap-demo.png">    </p:cNvPr>
           <p:cNvPicPr>
             <a:picLocks noChangeAspect="1"/>
           </p:cNvPicPr>
@@ -7320,8 +7293,32 @@
         </p:blipFill>
         <p:spPr>
           <a:xfrm>
-            <a:off x="1078992" y="1673352"/>
-            <a:ext cx="3694176" cy="4070982"/>
+            <a:off x="914400" y="1828800"/>
+            <a:ext cx="4846320" cy="2971646"/>
+          </a:xfrm>
+          <a:prstGeom prst="rect">
+            <a:avLst/>
+          </a:prstGeom>
+        </p:spPr>
+      </p:pic>
+      <p:pic>
+        <p:nvPicPr>
+          <p:cNvPr id="36" name="Image 8" descr="/tmp/claude-0/-home-claude/750ff410-f4aa-5276-9360-1e19d018b112/scratchpad/c/assets/m-ph-demo.png">    </p:cNvPr>
+          <p:cNvPicPr>
+            <a:picLocks noChangeAspect="1"/>
+          </p:cNvPicPr>
+          <p:nvPr/>
+        </p:nvPicPr>
+        <p:blipFill>
+          <a:blip r:embed="rId9"/>
+          <a:stretch>
+            <a:fillRect/>
+          </a:stretch>
+        </p:blipFill>
+        <p:spPr>
+          <a:xfrm>
+            <a:off x="457200" y="2697480"/>
+            <a:ext cx="1547307" cy="3200400"/>
           </a:xfrm>
           <a:prstGeom prst="rect">
             <a:avLst/>
@@ -13067,36 +13064,9 @@
           </a:p>
         </p:txBody>
       </p:sp>
-      <p:sp>
-        <p:nvSpPr>
-          <p:cNvPr id="23" name="Shape 18"/>
-          <p:cNvSpPr/>
-          <p:nvPr/>
-        </p:nvSpPr>
-        <p:spPr>
-          <a:xfrm>
-            <a:off x="5699455" y="2606040"/>
-            <a:ext cx="6035040" cy="3278124"/>
-          </a:xfrm>
-          <a:prstGeom prst="roundRect">
-            <a:avLst>
-              <a:gd name="adj" fmla="val 3347"/>
-            </a:avLst>
-          </a:prstGeom>
-          <a:solidFill>
-            <a:srgbClr val="FFFBF8"/>
-          </a:solidFill>
-          <a:ln w="9525">
-            <a:solidFill>
-              <a:srgbClr val="E3D5CC"/>
-            </a:solidFill>
-            <a:prstDash val="solid"/>
-          </a:ln>
-        </p:spPr>
-      </p:sp>
       <p:pic>
         <p:nvPicPr>
-          <p:cNvPr id="24" name="Image 3" descr="/tmp/claude-0/-home-claude/750ff410-f4aa-5276-9360-1e19d018b112/scratchpad/c/assets/s-overview.png">    </p:cNvPr>
+          <p:cNvPr id="23" name="Image 3" descr="/tmp/claude-0/-home-claude/750ff410-f4aa-5276-9360-1e19d018b112/scratchpad/c/assets/m-lap-ar.png">    </p:cNvPr>
           <p:cNvPicPr>
             <a:picLocks noChangeAspect="1"/>
           </p:cNvPicPr>
@@ -13110,44 +13080,17 @@
         </p:blipFill>
         <p:spPr>
           <a:xfrm>
-            <a:off x="5772607" y="2679192"/>
-            <a:ext cx="5888736" cy="3131820"/>
+            <a:off x="6156655" y="2514600"/>
+            <a:ext cx="5577840" cy="3420196"/>
           </a:xfrm>
           <a:prstGeom prst="rect">
             <a:avLst/>
           </a:prstGeom>
         </p:spPr>
       </p:pic>
-      <p:sp>
-        <p:nvSpPr>
-          <p:cNvPr id="25" name="Shape 19"/>
-          <p:cNvSpPr/>
-          <p:nvPr/>
-        </p:nvSpPr>
-        <p:spPr>
-          <a:xfrm>
-            <a:off x="2773375" y="2606040"/>
-            <a:ext cx="2651760" cy="2907317"/>
-          </a:xfrm>
-          <a:prstGeom prst="roundRect">
-            <a:avLst>
-              <a:gd name="adj" fmla="val 4138"/>
-            </a:avLst>
-          </a:prstGeom>
-          <a:solidFill>
-            <a:srgbClr val="FFFBF8"/>
-          </a:solidFill>
-          <a:ln w="9525">
-            <a:solidFill>
-              <a:srgbClr val="E3D5CC"/>
-            </a:solidFill>
-            <a:prstDash val="solid"/>
-          </a:ln>
-        </p:spPr>
-      </p:sp>
       <p:pic>
         <p:nvPicPr>
-          <p:cNvPr id="26" name="Image 4" descr="/tmp/claude-0/-home-claude/750ff410-f4aa-5276-9360-1e19d018b112/scratchpad/c/assets/s-approve.png">    </p:cNvPr>
+          <p:cNvPr id="24" name="Image 4" descr="/tmp/claude-0/-home-claude/750ff410-f4aa-5276-9360-1e19d018b112/scratchpad/c/assets/m-ph-start.png">    </p:cNvPr>
           <p:cNvPicPr>
             <a:picLocks noChangeAspect="1"/>
           </p:cNvPicPr>
@@ -13161,8 +13104,8 @@
         </p:blipFill>
         <p:spPr>
           <a:xfrm>
-            <a:off x="2846527" y="2679192"/>
-            <a:ext cx="2505456" cy="2761013"/>
+            <a:off x="5090163" y="2697480"/>
+            <a:ext cx="1569412" cy="3246120"/>
           </a:xfrm>
           <a:prstGeom prst="rect">
             <a:avLst/>
@@ -13171,18 +13114,18 @@
       </p:pic>
       <p:sp>
         <p:nvSpPr>
-          <p:cNvPr id="27" name="Shape 20"/>
-          <p:cNvSpPr/>
-          <p:nvPr/>
-        </p:nvSpPr>
-        <p:spPr>
-          <a:xfrm>
-            <a:off x="457200" y="2606040"/>
-            <a:ext cx="2041855" cy="3154680"/>
+          <p:cNvPr id="25" name="Shape 18"/>
+          <p:cNvSpPr/>
+          <p:nvPr/>
+        </p:nvSpPr>
+        <p:spPr>
+          <a:xfrm>
+            <a:off x="640080" y="2606040"/>
+            <a:ext cx="2651760" cy="3246120"/>
           </a:xfrm>
           <a:prstGeom prst="roundRect">
             <a:avLst>
-              <a:gd name="adj" fmla="val 8061"/>
+              <a:gd name="adj" fmla="val 6207"/>
             </a:avLst>
           </a:prstGeom>
           <a:solidFill>
@@ -13193,18 +13136,18 @@
       </p:sp>
       <p:sp>
         <p:nvSpPr>
-          <p:cNvPr id="28" name="Shape 21"/>
-          <p:cNvSpPr/>
-          <p:nvPr/>
-        </p:nvSpPr>
-        <p:spPr>
-          <a:xfrm>
-            <a:off x="640080" y="2788920"/>
-            <a:ext cx="1676095" cy="1676095"/>
+          <p:cNvPr id="26" name="Shape 19"/>
+          <p:cNvSpPr/>
+          <p:nvPr/>
+        </p:nvSpPr>
+        <p:spPr>
+          <a:xfrm>
+            <a:off x="822960" y="2788920"/>
+            <a:ext cx="2286000" cy="2286000"/>
           </a:xfrm>
           <a:prstGeom prst="roundRect">
             <a:avLst>
-              <a:gd name="adj" fmla="val 6547"/>
+              <a:gd name="adj" fmla="val 4800"/>
             </a:avLst>
           </a:prstGeom>
           <a:solidFill>
@@ -13215,7 +13158,7 @@
       </p:sp>
       <p:pic>
         <p:nvPicPr>
-          <p:cNvPr id="29" name="Image 5" descr="/tmp/claude-0/-home-claude/750ff410-f4aa-5276-9360-1e19d018b112/scratchpad/c/assets/qr.png">    </p:cNvPr>
+          <p:cNvPr id="27" name="Image 5" descr="/tmp/claude-0/-home-claude/750ff410-f4aa-5276-9360-1e19d018b112/scratchpad/c/assets/qr.png">    </p:cNvPr>
           <p:cNvPicPr>
             <a:picLocks noChangeAspect="1"/>
           </p:cNvPicPr>
@@ -13229,8 +13172,8 @@
         </p:blipFill>
         <p:spPr>
           <a:xfrm>
-            <a:off x="731520" y="2880360"/>
-            <a:ext cx="1493215" cy="1493215"/>
+            <a:off x="914400" y="2880360"/>
+            <a:ext cx="2103120" cy="2103120"/>
           </a:xfrm>
           <a:prstGeom prst="rect">
             <a:avLst/>
@@ -13239,14 +13182,14 @@
       </p:pic>
       <p:sp>
         <p:nvSpPr>
-          <p:cNvPr id="30" name="Text 22"/>
-          <p:cNvSpPr txBox="1"/>
-          <p:nvPr/>
-        </p:nvSpPr>
-        <p:spPr>
-          <a:xfrm>
-            <a:off x="457200" y="4556455"/>
-            <a:ext cx="2041855" cy="365760"/>
+          <p:cNvPr id="28" name="Text 20"/>
+          <p:cNvSpPr txBox="1"/>
+          <p:nvPr/>
+        </p:nvSpPr>
+        <p:spPr>
+          <a:xfrm>
+            <a:off x="640080" y="5212080"/>
+            <a:ext cx="2651760" cy="365760"/>
           </a:xfrm>
           <a:prstGeom prst="rect">
             <a:avLst/>

--- a/pitch/SSB_VentureX.pptx
+++ b/pitch/SSB_VentureX.pptx
@@ -6878,9 +6878,342 @@
           </a:p>
         </p:txBody>
       </p:sp>
+      <p:sp>
+        <p:nvSpPr>
+          <p:cNvPr id="22" name="Text 17"/>
+          <p:cNvSpPr txBox="1"/>
+          <p:nvPr/>
+        </p:nvSpPr>
+        <p:spPr>
+          <a:xfrm>
+            <a:off x="457200" y="1600200"/>
+            <a:ext cx="11277295" cy="731520"/>
+          </a:xfrm>
+          <a:prstGeom prst="rect">
+            <a:avLst/>
+          </a:prstGeom>
+          <a:noFill/>
+          <a:ln/>
+        </p:spPr>
+        <p:txBody>
+          <a:bodyPr wrap="square" lIns="0" tIns="0" rIns="0" bIns="0" rtlCol="0" anchor="ctr"/>
+          <a:lstStyle/>
+          <a:p>
+            <a:pPr rtl="1" algn="r" indent="0" marL="0">
+              <a:buNone/>
+            </a:pPr>
+            <a:r>
+              <a:rPr lang="en-US" sz="3400" b="1" dirty="0">
+                <a:solidFill>
+                  <a:srgbClr val="21141A"/>
+                </a:solidFill>
+                <a:latin typeface="IBM Plex Sans Arabic" pitchFamily="34" charset="0"/>
+                <a:ea typeface="IBM Plex Sans Arabic" pitchFamily="34" charset="-122"/>
+                <a:cs typeface="IBM Plex Sans Arabic" pitchFamily="34" charset="-120"/>
+              </a:rPr>
+              <a:t>CloudTrim يكتشف الهدر… وأنت تقرّر</a:t>
+            </a:r>
+            <a:endParaRPr lang="en-US" sz="3400" dirty="0"/>
+          </a:p>
+        </p:txBody>
+      </p:sp>
+      <p:sp>
+        <p:nvSpPr>
+          <p:cNvPr id="23" name="Shape 18"/>
+          <p:cNvSpPr/>
+          <p:nvPr/>
+        </p:nvSpPr>
+        <p:spPr>
+          <a:xfrm>
+            <a:off x="11167567" y="2743200"/>
+            <a:ext cx="566928" cy="566928"/>
+          </a:xfrm>
+          <a:prstGeom prst="ellipse">
+            <a:avLst/>
+          </a:prstGeom>
+          <a:solidFill>
+            <a:srgbClr val="8E2F3C"/>
+          </a:solidFill>
+          <a:ln/>
+        </p:spPr>
+      </p:sp>
+      <p:sp>
+        <p:nvSpPr>
+          <p:cNvPr id="24" name="Text 19"/>
+          <p:cNvSpPr txBox="1"/>
+          <p:nvPr/>
+        </p:nvSpPr>
+        <p:spPr>
+          <a:xfrm>
+            <a:off x="11167567" y="2743200"/>
+            <a:ext cx="566928" cy="566928"/>
+          </a:xfrm>
+          <a:prstGeom prst="rect">
+            <a:avLst/>
+          </a:prstGeom>
+          <a:noFill/>
+          <a:ln/>
+        </p:spPr>
+        <p:txBody>
+          <a:bodyPr wrap="square" lIns="0" tIns="0" rIns="0" bIns="0" rtlCol="0" anchor="ctr"/>
+          <a:lstStyle/>
+          <a:p>
+            <a:pPr algn="ctr" indent="0" marL="0">
+              <a:buNone/>
+            </a:pPr>
+            <a:r>
+              <a:rPr lang="en-US" sz="2000" b="1" dirty="0">
+                <a:solidFill>
+                  <a:srgbClr val="FBF6EE"/>
+                </a:solidFill>
+                <a:latin typeface="IBM Plex Sans Arabic" pitchFamily="34" charset="0"/>
+                <a:ea typeface="IBM Plex Sans Arabic" pitchFamily="34" charset="-122"/>
+                <a:cs typeface="IBM Plex Sans Arabic" pitchFamily="34" charset="-120"/>
+              </a:rPr>
+              <a:t>1</a:t>
+            </a:r>
+            <a:endParaRPr lang="en-US" sz="2000" dirty="0"/>
+          </a:p>
+        </p:txBody>
+      </p:sp>
+      <p:sp>
+        <p:nvSpPr>
+          <p:cNvPr id="25" name="Text 20"/>
+          <p:cNvSpPr txBox="1"/>
+          <p:nvPr/>
+        </p:nvSpPr>
+        <p:spPr>
+          <a:xfrm>
+            <a:off x="6766560" y="2651760"/>
+            <a:ext cx="4190695" cy="749808"/>
+          </a:xfrm>
+          <a:prstGeom prst="rect">
+            <a:avLst/>
+          </a:prstGeom>
+          <a:noFill/>
+          <a:ln/>
+        </p:spPr>
+        <p:txBody>
+          <a:bodyPr wrap="square" lIns="0" tIns="0" rIns="0" bIns="0" rtlCol="0" anchor="ctr"/>
+          <a:lstStyle/>
+          <a:p>
+            <a:pPr rtl="1" algn="r" indent="0" marL="0">
+              <a:buNone/>
+            </a:pPr>
+            <a:r>
+              <a:rPr lang="en-US" sz="2000" b="1" dirty="0">
+                <a:solidFill>
+                  <a:srgbClr val="21141A"/>
+                </a:solidFill>
+                <a:latin typeface="IBM Plex Sans Arabic" pitchFamily="34" charset="0"/>
+                <a:ea typeface="IBM Plex Sans Arabic" pitchFamily="34" charset="-122"/>
+                <a:cs typeface="IBM Plex Sans Arabic" pitchFamily="34" charset="-120"/>
+              </a:rPr>
+              <a:t>نربط حسابك السحابي بصلاحية قراءة فقط</a:t>
+            </a:r>
+            <a:endParaRPr lang="en-US" sz="2000" dirty="0"/>
+          </a:p>
+        </p:txBody>
+      </p:sp>
+      <p:sp>
+        <p:nvSpPr>
+          <p:cNvPr id="26" name="Shape 21"/>
+          <p:cNvSpPr/>
+          <p:nvPr/>
+        </p:nvSpPr>
+        <p:spPr>
+          <a:xfrm>
+            <a:off x="11167567" y="3749040"/>
+            <a:ext cx="566928" cy="566928"/>
+          </a:xfrm>
+          <a:prstGeom prst="ellipse">
+            <a:avLst/>
+          </a:prstGeom>
+          <a:solidFill>
+            <a:srgbClr val="8E2F3C"/>
+          </a:solidFill>
+          <a:ln/>
+        </p:spPr>
+      </p:sp>
+      <p:sp>
+        <p:nvSpPr>
+          <p:cNvPr id="27" name="Text 22"/>
+          <p:cNvSpPr txBox="1"/>
+          <p:nvPr/>
+        </p:nvSpPr>
+        <p:spPr>
+          <a:xfrm>
+            <a:off x="11167567" y="3749040"/>
+            <a:ext cx="566928" cy="566928"/>
+          </a:xfrm>
+          <a:prstGeom prst="rect">
+            <a:avLst/>
+          </a:prstGeom>
+          <a:noFill/>
+          <a:ln/>
+        </p:spPr>
+        <p:txBody>
+          <a:bodyPr wrap="square" lIns="0" tIns="0" rIns="0" bIns="0" rtlCol="0" anchor="ctr"/>
+          <a:lstStyle/>
+          <a:p>
+            <a:pPr algn="ctr" indent="0" marL="0">
+              <a:buNone/>
+            </a:pPr>
+            <a:r>
+              <a:rPr lang="en-US" sz="2000" b="1" dirty="0">
+                <a:solidFill>
+                  <a:srgbClr val="FBF6EE"/>
+                </a:solidFill>
+                <a:latin typeface="IBM Plex Sans Arabic" pitchFamily="34" charset="0"/>
+                <a:ea typeface="IBM Plex Sans Arabic" pitchFamily="34" charset="-122"/>
+                <a:cs typeface="IBM Plex Sans Arabic" pitchFamily="34" charset="-120"/>
+              </a:rPr>
+              <a:t>2</a:t>
+            </a:r>
+            <a:endParaRPr lang="en-US" sz="2000" dirty="0"/>
+          </a:p>
+        </p:txBody>
+      </p:sp>
+      <p:sp>
+        <p:nvSpPr>
+          <p:cNvPr id="28" name="Text 23"/>
+          <p:cNvSpPr txBox="1"/>
+          <p:nvPr/>
+        </p:nvSpPr>
+        <p:spPr>
+          <a:xfrm>
+            <a:off x="6766560" y="3657600"/>
+            <a:ext cx="4190695" cy="749808"/>
+          </a:xfrm>
+          <a:prstGeom prst="rect">
+            <a:avLst/>
+          </a:prstGeom>
+          <a:noFill/>
+          <a:ln/>
+        </p:spPr>
+        <p:txBody>
+          <a:bodyPr wrap="square" lIns="0" tIns="0" rIns="0" bIns="0" rtlCol="0" anchor="ctr"/>
+          <a:lstStyle/>
+          <a:p>
+            <a:pPr rtl="1" algn="r" indent="0" marL="0">
+              <a:buNone/>
+            </a:pPr>
+            <a:r>
+              <a:rPr lang="en-US" sz="2000" b="1" dirty="0">
+                <a:solidFill>
+                  <a:srgbClr val="21141A"/>
+                </a:solidFill>
+                <a:latin typeface="IBM Plex Sans Arabic" pitchFamily="34" charset="0"/>
+                <a:ea typeface="IBM Plex Sans Arabic" pitchFamily="34" charset="-122"/>
+                <a:cs typeface="IBM Plex Sans Arabic" pitchFamily="34" charset="-120"/>
+              </a:rPr>
+              <a:t>الذكاء الاصطناعي يكتشف الهدر</a:t>
+            </a:r>
+            <a:endParaRPr lang="en-US" sz="2000" dirty="0"/>
+          </a:p>
+        </p:txBody>
+      </p:sp>
+      <p:sp>
+        <p:nvSpPr>
+          <p:cNvPr id="29" name="Shape 24"/>
+          <p:cNvSpPr/>
+          <p:nvPr/>
+        </p:nvSpPr>
+        <p:spPr>
+          <a:xfrm>
+            <a:off x="11167567" y="4754880"/>
+            <a:ext cx="566928" cy="566928"/>
+          </a:xfrm>
+          <a:prstGeom prst="ellipse">
+            <a:avLst/>
+          </a:prstGeom>
+          <a:solidFill>
+            <a:srgbClr val="8E2F3C"/>
+          </a:solidFill>
+          <a:ln/>
+        </p:spPr>
+      </p:sp>
+      <p:sp>
+        <p:nvSpPr>
+          <p:cNvPr id="30" name="Text 25"/>
+          <p:cNvSpPr txBox="1"/>
+          <p:nvPr/>
+        </p:nvSpPr>
+        <p:spPr>
+          <a:xfrm>
+            <a:off x="11167567" y="4754880"/>
+            <a:ext cx="566928" cy="566928"/>
+          </a:xfrm>
+          <a:prstGeom prst="rect">
+            <a:avLst/>
+          </a:prstGeom>
+          <a:noFill/>
+          <a:ln/>
+        </p:spPr>
+        <p:txBody>
+          <a:bodyPr wrap="square" lIns="0" tIns="0" rIns="0" bIns="0" rtlCol="0" anchor="ctr"/>
+          <a:lstStyle/>
+          <a:p>
+            <a:pPr algn="ctr" indent="0" marL="0">
+              <a:buNone/>
+            </a:pPr>
+            <a:r>
+              <a:rPr lang="en-US" sz="2000" b="1" dirty="0">
+                <a:solidFill>
+                  <a:srgbClr val="FBF6EE"/>
+                </a:solidFill>
+                <a:latin typeface="IBM Plex Sans Arabic" pitchFamily="34" charset="0"/>
+                <a:ea typeface="IBM Plex Sans Arabic" pitchFamily="34" charset="-122"/>
+                <a:cs typeface="IBM Plex Sans Arabic" pitchFamily="34" charset="-120"/>
+              </a:rPr>
+              <a:t>3</a:t>
+            </a:r>
+            <a:endParaRPr lang="en-US" sz="2000" dirty="0"/>
+          </a:p>
+        </p:txBody>
+      </p:sp>
+      <p:sp>
+        <p:nvSpPr>
+          <p:cNvPr id="31" name="Text 26"/>
+          <p:cNvSpPr txBox="1"/>
+          <p:nvPr/>
+        </p:nvSpPr>
+        <p:spPr>
+          <a:xfrm>
+            <a:off x="6766560" y="4663440"/>
+            <a:ext cx="4190695" cy="749808"/>
+          </a:xfrm>
+          <a:prstGeom prst="rect">
+            <a:avLst/>
+          </a:prstGeom>
+          <a:noFill/>
+          <a:ln/>
+        </p:spPr>
+        <p:txBody>
+          <a:bodyPr wrap="square" lIns="0" tIns="0" rIns="0" bIns="0" rtlCol="0" anchor="ctr"/>
+          <a:lstStyle/>
+          <a:p>
+            <a:pPr rtl="1" algn="r" indent="0" marL="0">
+              <a:buNone/>
+            </a:pPr>
+            <a:r>
+              <a:rPr lang="en-US" sz="2000" b="1" dirty="0">
+                <a:solidFill>
+                  <a:srgbClr val="21141A"/>
+                </a:solidFill>
+                <a:latin typeface="IBM Plex Sans Arabic" pitchFamily="34" charset="0"/>
+                <a:ea typeface="IBM Plex Sans Arabic" pitchFamily="34" charset="-122"/>
+                <a:cs typeface="IBM Plex Sans Arabic" pitchFamily="34" charset="-120"/>
+              </a:rPr>
+              <a:t>توافق بنقرة واحدة… وتوفّر</a:t>
+            </a:r>
+            <a:endParaRPr lang="en-US" sz="2000" dirty="0"/>
+          </a:p>
+        </p:txBody>
+      </p:sp>
       <p:pic>
         <p:nvPicPr>
-          <p:cNvPr id="22" name="Image 3" descr="/tmp/claude-0/-home-claude/750ff410-f4aa-5276-9360-1e19d018b112/scratchpad/c/assets/ct-icon.png">    </p:cNvPr>
+          <p:cNvPr id="32" name="Image 3" descr="/tmp/claude-0/-home-claude/750ff410-f4aa-5276-9360-1e19d018b112/scratchpad/c/assets/m-lap-demo.png">    </p:cNvPr>
           <p:cNvPicPr>
             <a:picLocks noChangeAspect="1"/>
           </p:cNvPicPr>
@@ -6894,431 +7227,8 @@
         </p:blipFill>
         <p:spPr>
           <a:xfrm>
-            <a:off x="11002975" y="1691640"/>
-            <a:ext cx="731520" cy="731520"/>
-          </a:xfrm>
-          <a:prstGeom prst="rect">
-            <a:avLst/>
-          </a:prstGeom>
-        </p:spPr>
-      </p:pic>
-      <p:sp>
-        <p:nvSpPr>
-          <p:cNvPr id="23" name="Text 17"/>
-          <p:cNvSpPr txBox="1"/>
-          <p:nvPr/>
-        </p:nvSpPr>
-        <p:spPr>
-          <a:xfrm>
-            <a:off x="5852160" y="1645920"/>
-            <a:ext cx="4967935" cy="822960"/>
-          </a:xfrm>
-          <a:prstGeom prst="rect">
-            <a:avLst/>
-          </a:prstGeom>
-          <a:noFill/>
-          <a:ln/>
-        </p:spPr>
-        <p:txBody>
-          <a:bodyPr wrap="square" lIns="0" tIns="0" rIns="0" bIns="0" rtlCol="0" anchor="ctr"/>
-          <a:lstStyle/>
-          <a:p>
-            <a:pPr algn="r" indent="0" marL="0">
-              <a:buNone/>
-            </a:pPr>
-            <a:r>
-              <a:rPr lang="en-US" sz="4400" b="1" dirty="0">
-                <a:solidFill>
-                  <a:srgbClr val="8E2F3C"/>
-                </a:solidFill>
-                <a:latin typeface="IBM Plex Sans Arabic" pitchFamily="34" charset="0"/>
-                <a:ea typeface="IBM Plex Sans Arabic" pitchFamily="34" charset="-122"/>
-                <a:cs typeface="IBM Plex Sans Arabic" pitchFamily="34" charset="-120"/>
-              </a:rPr>
-              <a:t>CloudTrim</a:t>
-            </a:r>
-            <a:endParaRPr lang="en-US" sz="4400" dirty="0"/>
-          </a:p>
-        </p:txBody>
-      </p:sp>
-      <p:sp>
-        <p:nvSpPr>
-          <p:cNvPr id="24" name="Text 18"/>
-          <p:cNvSpPr txBox="1"/>
-          <p:nvPr/>
-        </p:nvSpPr>
-        <p:spPr>
-          <a:xfrm>
-            <a:off x="5852160" y="2606040"/>
-            <a:ext cx="5882335" cy="822960"/>
-          </a:xfrm>
-          <a:prstGeom prst="rect">
-            <a:avLst/>
-          </a:prstGeom>
-          <a:noFill/>
-          <a:ln/>
-        </p:spPr>
-        <p:txBody>
-          <a:bodyPr wrap="square" lIns="0" tIns="0" rIns="0" bIns="0" rtlCol="0" anchor="t"/>
-          <a:lstStyle/>
-          <a:p>
-            <a:pPr rtl="1" algn="r" indent="0" marL="0">
-              <a:lnSpc>
-                <a:spcPct val="110000"/>
-              </a:lnSpc>
-              <a:buNone/>
-            </a:pPr>
-            <a:r>
-              <a:rPr lang="en-US" sz="2000" dirty="0">
-                <a:solidFill>
-                  <a:srgbClr val="21141A"/>
-                </a:solidFill>
-                <a:latin typeface="IBM Plex Sans Arabic" pitchFamily="34" charset="0"/>
-                <a:ea typeface="IBM Plex Sans Arabic" pitchFamily="34" charset="-122"/>
-                <a:cs typeface="IBM Plex Sans Arabic" pitchFamily="34" charset="-120"/>
-              </a:rPr>
-              <a:t>يكتشف الهدر في فاتورة السحابة ويوفّره بموافقتك بنقرة واحدة</a:t>
-            </a:r>
-            <a:endParaRPr lang="en-US" sz="2000" dirty="0"/>
-          </a:p>
-        </p:txBody>
-      </p:sp>
-      <p:sp>
-        <p:nvSpPr>
-          <p:cNvPr id="25" name="Shape 19"/>
-          <p:cNvSpPr/>
-          <p:nvPr/>
-        </p:nvSpPr>
-        <p:spPr>
-          <a:xfrm>
-            <a:off x="11222431" y="3657600"/>
-            <a:ext cx="512064" cy="512064"/>
-          </a:xfrm>
-          <a:prstGeom prst="roundRect">
-            <a:avLst>
-              <a:gd name="adj" fmla="val 21429"/>
-            </a:avLst>
-          </a:prstGeom>
-          <a:solidFill>
-            <a:srgbClr val="F1E4DF"/>
-          </a:solidFill>
-          <a:ln/>
-        </p:spPr>
-      </p:sp>
-      <p:pic>
-        <p:nvPicPr>
-          <p:cNvPr id="26" name="Image 4" descr="/tmp/claude-0/-home-claude/750ff410-f4aa-5276-9360-1e19d018b112/scratchpad/c/assets/i-eye-br.png">    </p:cNvPr>
-          <p:cNvPicPr>
-            <a:picLocks noChangeAspect="1"/>
-          </p:cNvPicPr>
-          <p:nvPr/>
-        </p:nvPicPr>
-        <p:blipFill>
-          <a:blip r:embed="rId5"/>
-          <a:stretch>
-            <a:fillRect/>
-          </a:stretch>
-        </p:blipFill>
-        <p:spPr>
-          <a:xfrm>
-            <a:off x="11295583" y="3730752"/>
-            <a:ext cx="365760" cy="365760"/>
-          </a:xfrm>
-          <a:prstGeom prst="rect">
-            <a:avLst/>
-          </a:prstGeom>
-        </p:spPr>
-      </p:pic>
-      <p:sp>
-        <p:nvSpPr>
-          <p:cNvPr id="27" name="Text 20"/>
-          <p:cNvSpPr txBox="1"/>
-          <p:nvPr/>
-        </p:nvSpPr>
-        <p:spPr>
-          <a:xfrm>
-            <a:off x="5852160" y="3657600"/>
-            <a:ext cx="5196535" cy="512064"/>
-          </a:xfrm>
-          <a:prstGeom prst="rect">
-            <a:avLst/>
-          </a:prstGeom>
-          <a:noFill/>
-          <a:ln/>
-        </p:spPr>
-        <p:txBody>
-          <a:bodyPr wrap="square" lIns="0" tIns="0" rIns="0" bIns="0" rtlCol="0" anchor="ctr"/>
-          <a:lstStyle/>
-          <a:p>
-            <a:pPr rtl="1" algn="r" indent="0" marL="0">
-              <a:buNone/>
-            </a:pPr>
-            <a:r>
-              <a:rPr lang="en-US" sz="1800" b="1" dirty="0">
-                <a:solidFill>
-                  <a:srgbClr val="21141A"/>
-                </a:solidFill>
-                <a:latin typeface="IBM Plex Sans Arabic" pitchFamily="34" charset="0"/>
-                <a:ea typeface="IBM Plex Sans Arabic" pitchFamily="34" charset="-122"/>
-                <a:cs typeface="IBM Plex Sans Arabic" pitchFamily="34" charset="-120"/>
-              </a:rPr>
-              <a:t>قراءة فقط</a:t>
-            </a:r>
-            <a:endParaRPr lang="en-US" sz="1800" dirty="0"/>
-          </a:p>
-        </p:txBody>
-      </p:sp>
-      <p:sp>
-        <p:nvSpPr>
-          <p:cNvPr id="28" name="Shape 21"/>
-          <p:cNvSpPr/>
-          <p:nvPr/>
-        </p:nvSpPr>
-        <p:spPr>
-          <a:xfrm>
-            <a:off x="11222431" y="4279392"/>
-            <a:ext cx="512064" cy="512064"/>
-          </a:xfrm>
-          <a:prstGeom prst="roundRect">
-            <a:avLst>
-              <a:gd name="adj" fmla="val 21429"/>
-            </a:avLst>
-          </a:prstGeom>
-          <a:solidFill>
-            <a:srgbClr val="F1E4DF"/>
-          </a:solidFill>
-          <a:ln/>
-        </p:spPr>
-      </p:sp>
-      <p:pic>
-        <p:nvPicPr>
-          <p:cNvPr id="29" name="Image 5" descr="/tmp/claude-0/-home-claude/750ff410-f4aa-5276-9360-1e19d018b112/scratchpad/c/assets/i-bot-br.png">    </p:cNvPr>
-          <p:cNvPicPr>
-            <a:picLocks noChangeAspect="1"/>
-          </p:cNvPicPr>
-          <p:nvPr/>
-        </p:nvPicPr>
-        <p:blipFill>
-          <a:blip r:embed="rId6"/>
-          <a:stretch>
-            <a:fillRect/>
-          </a:stretch>
-        </p:blipFill>
-        <p:spPr>
-          <a:xfrm>
-            <a:off x="11295583" y="4352544"/>
-            <a:ext cx="365760" cy="365760"/>
-          </a:xfrm>
-          <a:prstGeom prst="rect">
-            <a:avLst/>
-          </a:prstGeom>
-        </p:spPr>
-      </p:pic>
-      <p:sp>
-        <p:nvSpPr>
-          <p:cNvPr id="30" name="Text 22"/>
-          <p:cNvSpPr txBox="1"/>
-          <p:nvPr/>
-        </p:nvSpPr>
-        <p:spPr>
-          <a:xfrm>
-            <a:off x="5852160" y="4279392"/>
-            <a:ext cx="5196535" cy="512064"/>
-          </a:xfrm>
-          <a:prstGeom prst="rect">
-            <a:avLst/>
-          </a:prstGeom>
-          <a:noFill/>
-          <a:ln/>
-        </p:spPr>
-        <p:txBody>
-          <a:bodyPr wrap="square" lIns="0" tIns="0" rIns="0" bIns="0" rtlCol="0" anchor="ctr"/>
-          <a:lstStyle/>
-          <a:p>
-            <a:pPr rtl="1" algn="r" indent="0" marL="0">
-              <a:buNone/>
-            </a:pPr>
-            <a:r>
-              <a:rPr lang="en-US" sz="1800" b="1" dirty="0">
-                <a:solidFill>
-                  <a:srgbClr val="21141A"/>
-                </a:solidFill>
-                <a:latin typeface="IBM Plex Sans Arabic" pitchFamily="34" charset="0"/>
-                <a:ea typeface="IBM Plex Sans Arabic" pitchFamily="34" charset="-122"/>
-                <a:cs typeface="IBM Plex Sans Arabic" pitchFamily="34" charset="-120"/>
-              </a:rPr>
-              <a:t>الذكاء الاصطناعي يقترح</a:t>
-            </a:r>
-            <a:endParaRPr lang="en-US" sz="1800" dirty="0"/>
-          </a:p>
-        </p:txBody>
-      </p:sp>
-      <p:sp>
-        <p:nvSpPr>
-          <p:cNvPr id="31" name="Shape 23"/>
-          <p:cNvSpPr/>
-          <p:nvPr/>
-        </p:nvSpPr>
-        <p:spPr>
-          <a:xfrm>
-            <a:off x="11222431" y="4901184"/>
-            <a:ext cx="512064" cy="512064"/>
-          </a:xfrm>
-          <a:prstGeom prst="roundRect">
-            <a:avLst>
-              <a:gd name="adj" fmla="val 21429"/>
-            </a:avLst>
-          </a:prstGeom>
-          <a:solidFill>
-            <a:srgbClr val="F1E4DF"/>
-          </a:solidFill>
-          <a:ln/>
-        </p:spPr>
-      </p:sp>
-      <p:pic>
-        <p:nvPicPr>
-          <p:cNvPr id="32" name="Image 6" descr="/tmp/claude-0/-home-claude/750ff410-f4aa-5276-9360-1e19d018b112/scratchpad/c/assets/i-check-br.png">    </p:cNvPr>
-          <p:cNvPicPr>
-            <a:picLocks noChangeAspect="1"/>
-          </p:cNvPicPr>
-          <p:nvPr/>
-        </p:nvPicPr>
-        <p:blipFill>
-          <a:blip r:embed="rId7"/>
-          <a:stretch>
-            <a:fillRect/>
-          </a:stretch>
-        </p:blipFill>
-        <p:spPr>
-          <a:xfrm>
-            <a:off x="11295583" y="4974336"/>
-            <a:ext cx="365760" cy="365760"/>
-          </a:xfrm>
-          <a:prstGeom prst="rect">
-            <a:avLst/>
-          </a:prstGeom>
-        </p:spPr>
-      </p:pic>
-      <p:sp>
-        <p:nvSpPr>
-          <p:cNvPr id="33" name="Text 24"/>
-          <p:cNvSpPr txBox="1"/>
-          <p:nvPr/>
-        </p:nvSpPr>
-        <p:spPr>
-          <a:xfrm>
-            <a:off x="5852160" y="4901184"/>
-            <a:ext cx="5196535" cy="512064"/>
-          </a:xfrm>
-          <a:prstGeom prst="rect">
-            <a:avLst/>
-          </a:prstGeom>
-          <a:noFill/>
-          <a:ln/>
-        </p:spPr>
-        <p:txBody>
-          <a:bodyPr wrap="square" lIns="0" tIns="0" rIns="0" bIns="0" rtlCol="0" anchor="ctr"/>
-          <a:lstStyle/>
-          <a:p>
-            <a:pPr rtl="1" algn="r" indent="0" marL="0">
-              <a:buNone/>
-            </a:pPr>
-            <a:r>
-              <a:rPr lang="en-US" sz="1800" b="1" dirty="0">
-                <a:solidFill>
-                  <a:srgbClr val="21141A"/>
-                </a:solidFill>
-                <a:latin typeface="IBM Plex Sans Arabic" pitchFamily="34" charset="0"/>
-                <a:ea typeface="IBM Plex Sans Arabic" pitchFamily="34" charset="-122"/>
-                <a:cs typeface="IBM Plex Sans Arabic" pitchFamily="34" charset="-120"/>
-              </a:rPr>
-              <a:t>أنت توافق بنقرة</a:t>
-            </a:r>
-            <a:endParaRPr lang="en-US" sz="1800" dirty="0"/>
-          </a:p>
-        </p:txBody>
-      </p:sp>
-      <p:sp>
-        <p:nvSpPr>
-          <p:cNvPr id="34" name="Text 25"/>
-          <p:cNvSpPr txBox="1"/>
-          <p:nvPr/>
-        </p:nvSpPr>
-        <p:spPr>
-          <a:xfrm>
-            <a:off x="5852160" y="5623560"/>
-            <a:ext cx="5882335" cy="320040"/>
-          </a:xfrm>
-          <a:prstGeom prst="rect">
-            <a:avLst/>
-          </a:prstGeom>
-          <a:noFill/>
-          <a:ln/>
-        </p:spPr>
-        <p:txBody>
-          <a:bodyPr wrap="square" lIns="0" tIns="0" rIns="0" bIns="0" rtlCol="0" anchor="ctr"/>
-          <a:lstStyle/>
-          <a:p>
-            <a:pPr rtl="1" algn="r" indent="0" marL="0">
-              <a:buNone/>
-            </a:pPr>
-            <a:r>
-              <a:rPr lang="en-US" sz="1200" dirty="0">
-                <a:solidFill>
-                  <a:srgbClr val="7F6C72"/>
-                </a:solidFill>
-                <a:latin typeface="IBM Plex Sans Arabic" pitchFamily="34" charset="0"/>
-                <a:ea typeface="IBM Plex Sans Arabic" pitchFamily="34" charset="-122"/>
-                <a:cs typeface="IBM Plex Sans Arabic" pitchFamily="34" charset="-120"/>
-              </a:rPr>
-              <a:t>متوافق مع NCA وPDPL وISO 27001</a:t>
-            </a:r>
-            <a:endParaRPr lang="en-US" sz="1200" dirty="0"/>
-          </a:p>
-        </p:txBody>
-      </p:sp>
-      <p:pic>
-        <p:nvPicPr>
-          <p:cNvPr id="35" name="Image 7" descr="/tmp/claude-0/-home-claude/750ff410-f4aa-5276-9360-1e19d018b112/scratchpad/c/assets/m-lap-demo.png">    </p:cNvPr>
-          <p:cNvPicPr>
-            <a:picLocks noChangeAspect="1"/>
-          </p:cNvPicPr>
-          <p:nvPr/>
-        </p:nvPicPr>
-        <p:blipFill>
-          <a:blip r:embed="rId8"/>
-          <a:stretch>
-            <a:fillRect/>
-          </a:stretch>
-        </p:blipFill>
-        <p:spPr>
-          <a:xfrm>
-            <a:off x="914400" y="1828800"/>
-            <a:ext cx="4846320" cy="2971646"/>
-          </a:xfrm>
-          <a:prstGeom prst="rect">
-            <a:avLst/>
-          </a:prstGeom>
-        </p:spPr>
-      </p:pic>
-      <p:pic>
-        <p:nvPicPr>
-          <p:cNvPr id="36" name="Image 8" descr="/tmp/claude-0/-home-claude/750ff410-f4aa-5276-9360-1e19d018b112/scratchpad/c/assets/m-ph-demo.png">    </p:cNvPr>
-          <p:cNvPicPr>
-            <a:picLocks noChangeAspect="1"/>
-          </p:cNvPicPr>
-          <p:nvPr/>
-        </p:nvPicPr>
-        <p:blipFill>
-          <a:blip r:embed="rId9"/>
-          <a:stretch>
-            <a:fillRect/>
-          </a:stretch>
-        </p:blipFill>
-        <p:spPr>
-          <a:xfrm>
-            <a:off x="457200" y="2697480"/>
-            <a:ext cx="1547307" cy="3200400"/>
+            <a:off x="457200" y="2514600"/>
+            <a:ext cx="5852160" cy="3588402"/>
           </a:xfrm>
           <a:prstGeom prst="rect">
             <a:avLst/>

--- a/pitch/SSB_VentureX.pptx
+++ b/pitch/SSB_VentureX.pptx
@@ -12976,7 +12976,7 @@
       </p:sp>
       <p:pic>
         <p:nvPicPr>
-          <p:cNvPr id="23" name="Image 3" descr="/tmp/claude-0/-home-claude/750ff410-f4aa-5276-9360-1e19d018b112/scratchpad/c/assets/m-lap-ar.png">    </p:cNvPr>
+          <p:cNvPr id="23" name="Image 3" descr="/tmp/claude-0/-home-claude/750ff410-f4aa-5276-9360-1e19d018b112/scratchpad/c/assets/m-lap-hero.png">    </p:cNvPr>
           <p:cNvPicPr>
             <a:picLocks noChangeAspect="1"/>
           </p:cNvPicPr>

--- a/pitch/SSB_VentureX.pptx
+++ b/pitch/SSB_VentureX.pptx
@@ -16,9 +16,10 @@
     <p:sldId id="264" r:id="rId10"/>
     <p:sldId id="265" r:id="rId11"/>
     <p:sldId id="266" r:id="rId12"/>
+    <p:sldId id="267" r:id="rId13"/>
   </p:sldIdLst>
   <p:notesMasterIdLst>
-    <p:notesMasterId r:id="rId13"/>
+    <p:notesMasterId r:id="rId14"/>
   </p:notesMasterIdLst>
   <p:sldSz cx="12192000" cy="6858000"/>
   <p:notesSz cx="6858000" cy="12192000"/>
@@ -730,6 +731,94 @@
 </p:notes>
 </file>
 
+<file path=ppt/notesSlides/notesSlide12.xml><?xml version="1.0" encoding="utf-8"?>
+<p:notes xmlns:a="http://schemas.openxmlformats.org/drawingml/2006/main" xmlns:r="http://schemas.openxmlformats.org/officeDocument/2006/relationships" xmlns:p="http://schemas.openxmlformats.org/presentationml/2006/main">
+  <p:cSld>
+    <p:spTree>
+      <p:nvGrpSpPr>
+        <p:cNvPr id="1" name=""/>
+        <p:cNvGrpSpPr/>
+        <p:nvPr/>
+      </p:nvGrpSpPr>
+      <p:grpSpPr>
+        <a:xfrm>
+          <a:off x="0" y="0"/>
+          <a:ext cx="0" cy="0"/>
+          <a:chOff x="0" y="0"/>
+          <a:chExt cx="0" cy="0"/>
+        </a:xfrm>
+      </p:grpSpPr>
+      <p:sp>
+        <p:nvSpPr>
+          <p:cNvPr id="2" name="Slide Image Placeholder 1"/>
+          <p:cNvSpPr>
+            <a:spLocks noGrp="1" noRot="1" noChangeAspect="1"/>
+          </p:cNvSpPr>
+          <p:nvPr>
+            <p:ph type="sldImg"/>
+          </p:nvPr>
+        </p:nvSpPr>
+        <p:spPr/>
+      </p:sp>
+      <p:sp>
+        <p:nvSpPr>
+          <p:cNvPr id="3" name="Notes Placeholder 2"/>
+          <p:cNvSpPr>
+            <a:spLocks noGrp="1"/>
+          </p:cNvSpPr>
+          <p:nvPr>
+            <p:ph type="body" idx="1"/>
+          </p:nvPr>
+        </p:nvSpPr>
+        <p:spPr/>
+        <p:txBody>
+          <a:bodyPr/>
+          <a:lstStyle/>
+          <a:p>
+            <a:r>
+              <a:rPr lang="en-US" dirty="0"/>
+              <a:t/>
+            </a:r>
+            <a:endParaRPr lang="en-US" dirty="0"/>
+          </a:p>
+        </p:txBody>
+      </p:sp>
+      <p:sp>
+        <p:nvSpPr>
+          <p:cNvPr id="4" name="Slide Number Placeholder 3"/>
+          <p:cNvSpPr>
+            <a:spLocks noGrp="1"/>
+          </p:cNvSpPr>
+          <p:nvPr>
+            <p:ph type="sldNum" sz="quarter" idx="10"/>
+          </p:nvPr>
+        </p:nvSpPr>
+        <p:spPr/>
+        <p:txBody>
+          <a:bodyPr/>
+          <a:lstStyle/>
+          <a:p>
+            <a:fld id="{F7021451-1387-4CA6-816F-3879F97B5CBC}" type="slidenum">
+              <a:rPr lang="en-US"/>
+              <a:t>12</a:t>
+            </a:fld>
+            <a:endParaRPr lang="en-US"/>
+          </a:p>
+        </p:txBody>
+      </p:sp>
+    </p:spTree>
+    <p:extLst>
+      <p:ext uri="{BB962C8B-B14F-4D97-AF65-F5344CB8AC3E}">
+        <p14:creationId xmlns:p14="http://schemas.microsoft.com/office/powerpoint/2010/main" val="1024086991"/>
+      </p:ext>
+    </p:extLst>
+  </p:cSld>
+  <p:clrMapOvr>
+    <a:masterClrMapping/>
+  </p:clrMapOvr>
+</p:notes>
+</file>
+
 <file path=ppt/notesSlides/notesSlide2.xml><?xml version="1.0" encoding="utf-8"?>
 <p:notes xmlns:a="http://schemas.openxmlformats.org/drawingml/2006/main" xmlns:r="http://schemas.openxmlformats.org/officeDocument/2006/relationships" xmlns:p="http://schemas.openxmlformats.org/presentationml/2006/main">
   <p:cSld>
@@ -3081,8 +3170,8 @@
         </p:nvSpPr>
         <p:spPr>
           <a:xfrm>
-            <a:off x="9759391" y="987552"/>
-            <a:ext cx="1975104" cy="384048"/>
+            <a:off x="8918143" y="987552"/>
+            <a:ext cx="2816352" cy="384048"/>
           </a:xfrm>
           <a:prstGeom prst="roundRect">
             <a:avLst>
@@ -3103,8 +3192,8 @@
         </p:nvSpPr>
         <p:spPr>
           <a:xfrm>
-            <a:off x="9759391" y="987552"/>
-            <a:ext cx="1975104" cy="384048"/>
+            <a:off x="8918143" y="987552"/>
+            <a:ext cx="2816352" cy="384048"/>
           </a:xfrm>
           <a:prstGeom prst="rect">
             <a:avLst/>
@@ -3128,7 +3217,7 @@
                 <a:ea typeface="IBM Plex Sans Arabic" pitchFamily="34" charset="-122"/>
                 <a:cs typeface="IBM Plex Sans Arabic" pitchFamily="34" charset="-120"/>
               </a:rPr>
-              <a:t>الخطوة التالية</a:t>
+              <a:t>الأثر والقيمة المتوقعة</a:t>
             </a:r>
             <a:endParaRPr lang="en-US" sz="1300" dirty="0"/>
           </a:p>
@@ -3269,7 +3358,7 @@
                 <a:ea typeface="IBM Plex Sans Arabic" pitchFamily="34" charset="-122"/>
                 <a:cs typeface="IBM Plex Sans Arabic" pitchFamily="34" charset="-120"/>
               </a:rPr>
-              <a:t>ما بعد التحدي</a:t>
+              <a:t>أثر بالأرقام</a:t>
             </a:r>
             <a:endParaRPr lang="en-US" sz="3400" dirty="0"/>
           </a:p>
@@ -3284,22 +3373,27 @@
         <p:spPr>
           <a:xfrm>
             <a:off x="8188757" y="2697480"/>
-            <a:ext cx="3545738" cy="1920240"/>
+            <a:ext cx="3545738" cy="2377440"/>
           </a:xfrm>
           <a:prstGeom prst="roundRect">
             <a:avLst>
-              <a:gd name="adj" fmla="val 9524"/>
+              <a:gd name="adj" fmla="val 7692"/>
             </a:avLst>
           </a:prstGeom>
           <a:solidFill>
-            <a:srgbClr val="8E2F3C"/>
-          </a:solidFill>
-          <a:ln/>
+            <a:srgbClr val="FFFBF8"/>
+          </a:solidFill>
+          <a:ln w="9525">
+            <a:solidFill>
+              <a:srgbClr val="E3D5CC"/>
+            </a:solidFill>
+            <a:prstDash val="solid"/>
+          </a:ln>
         </p:spPr>
       </p:sp>
       <p:pic>
         <p:nvPicPr>
-          <p:cNvPr id="24" name="Image 3" descr="/tmp/claude-0/-home-claude/750ff410-f4aa-5276-9360-1e19d018b112/scratchpad/c/assets/i-scale-cr.png">    </p:cNvPr>
+          <p:cNvPr id="24" name="Image 3" descr="/tmp/claude-0/-home-claude/750ff410-f4aa-5276-9360-1e19d018b112/scratchpad/c/assets/i-wallet-br.png">    </p:cNvPr>
           <p:cNvPicPr>
             <a:picLocks noChangeAspect="1"/>
           </p:cNvPicPr>
@@ -3313,8 +3407,8 @@
         </p:blipFill>
         <p:spPr>
           <a:xfrm>
-            <a:off x="9618726" y="3017520"/>
-            <a:ext cx="685800" cy="685800"/>
+            <a:off x="9687306" y="2971800"/>
+            <a:ext cx="548640" cy="548640"/>
           </a:xfrm>
           <a:prstGeom prst="rect">
             <a:avLst/>
@@ -3329,51 +3423,90 @@
         </p:nvSpPr>
         <p:spPr>
           <a:xfrm>
-            <a:off x="8188757" y="3886200"/>
-            <a:ext cx="3545738" cy="457200"/>
-          </a:xfrm>
-          <a:prstGeom prst="rect">
-            <a:avLst/>
-          </a:prstGeom>
-          <a:noFill/>
-          <a:ln/>
-        </p:spPr>
-        <p:txBody>
-          <a:bodyPr wrap="square" lIns="0" tIns="0" rIns="0" bIns="0" rtlCol="0" anchor="t"/>
+            <a:off x="8188757" y="3566160"/>
+            <a:ext cx="3545738" cy="868680"/>
+          </a:xfrm>
+          <a:prstGeom prst="rect">
+            <a:avLst/>
+          </a:prstGeom>
+          <a:noFill/>
+          <a:ln/>
+        </p:spPr>
+        <p:txBody>
+          <a:bodyPr wrap="square" lIns="0" tIns="0" rIns="0" bIns="0" rtlCol="0" anchor="ctr"/>
+          <a:lstStyle/>
+          <a:p>
+            <a:pPr algn="ctr" indent="0" marL="0">
+              <a:buNone/>
+            </a:pPr>
+            <a:r>
+              <a:rPr lang="en-US" sz="5400" b="1" dirty="0">
+                <a:solidFill>
+                  <a:srgbClr val="8E2F3C"/>
+                </a:solidFill>
+                <a:latin typeface="IBM Plex Sans Arabic" pitchFamily="34" charset="0"/>
+                <a:ea typeface="IBM Plex Sans Arabic" pitchFamily="34" charset="-122"/>
+                <a:cs typeface="IBM Plex Sans Arabic" pitchFamily="34" charset="-120"/>
+              </a:rPr>
+              <a:t>10.8%</a:t>
+            </a:r>
+            <a:endParaRPr lang="en-US" sz="5400" dirty="0"/>
+          </a:p>
+        </p:txBody>
+      </p:sp>
+      <p:sp>
+        <p:nvSpPr>
+          <p:cNvPr id="26" name="Text 20"/>
+          <p:cNvSpPr txBox="1"/>
+          <p:nvPr/>
+        </p:nvSpPr>
+        <p:spPr>
+          <a:xfrm>
+            <a:off x="8463077" y="4480560"/>
+            <a:ext cx="2997098" cy="411480"/>
+          </a:xfrm>
+          <a:prstGeom prst="rect">
+            <a:avLst/>
+          </a:prstGeom>
+          <a:noFill/>
+          <a:ln/>
+        </p:spPr>
+        <p:txBody>
+          <a:bodyPr wrap="square" lIns="0" tIns="0" rIns="0" bIns="0" rtlCol="0" anchor="ctr"/>
           <a:lstStyle/>
           <a:p>
             <a:pPr rtl="1" algn="ctr" indent="0" marL="0">
               <a:buNone/>
             </a:pPr>
             <a:r>
-              <a:rPr lang="en-US" sz="2200" b="1" dirty="0">
-                <a:solidFill>
-                  <a:srgbClr val="FBF6EE"/>
-                </a:solidFill>
-                <a:latin typeface="IBM Plex Sans Arabic" pitchFamily="34" charset="0"/>
-                <a:ea typeface="IBM Plex Sans Arabic" pitchFamily="34" charset="-122"/>
-                <a:cs typeface="IBM Plex Sans Arabic" pitchFamily="34" charset="-120"/>
-              </a:rPr>
-              <a:t>مقارنة السحابات</a:t>
-            </a:r>
-            <a:endParaRPr lang="en-US" sz="2200" dirty="0"/>
-          </a:p>
-        </p:txBody>
-      </p:sp>
-      <p:sp>
-        <p:nvSpPr>
-          <p:cNvPr id="26" name="Shape 20"/>
+              <a:rPr lang="en-US" sz="1800" dirty="0">
+                <a:solidFill>
+                  <a:srgbClr val="21141A"/>
+                </a:solidFill>
+                <a:latin typeface="IBM Plex Sans Arabic" pitchFamily="34" charset="0"/>
+                <a:ea typeface="IBM Plex Sans Arabic" pitchFamily="34" charset="-122"/>
+                <a:cs typeface="IBM Plex Sans Arabic" pitchFamily="34" charset="-120"/>
+              </a:rPr>
+              <a:t>توفير من الفاتورة</a:t>
+            </a:r>
+            <a:endParaRPr lang="en-US" sz="1800" dirty="0"/>
+          </a:p>
+        </p:txBody>
+      </p:sp>
+      <p:sp>
+        <p:nvSpPr>
+          <p:cNvPr id="27" name="Shape 21"/>
           <p:cNvSpPr/>
           <p:nvPr/>
         </p:nvSpPr>
         <p:spPr>
           <a:xfrm>
             <a:off x="4322978" y="2697480"/>
-            <a:ext cx="3545738" cy="1920240"/>
+            <a:ext cx="3545738" cy="2377440"/>
           </a:xfrm>
           <a:prstGeom prst="roundRect">
             <a:avLst>
-              <a:gd name="adj" fmla="val 9524"/>
+              <a:gd name="adj" fmla="val 7692"/>
             </a:avLst>
           </a:prstGeom>
           <a:solidFill>
@@ -3384,7 +3517,7 @@
       </p:sp>
       <p:pic>
         <p:nvPicPr>
-          <p:cNvPr id="27" name="Image 4" descr="/tmp/claude-0/-home-claude/750ff410-f4aa-5276-9360-1e19d018b112/scratchpad/c/assets/i-server-cr.png">    </p:cNvPr>
+          <p:cNvPr id="28" name="Image 4" descr="/tmp/claude-0/-home-claude/750ff410-f4aa-5276-9360-1e19d018b112/scratchpad/c/assets/i-trend-cr.png">    </p:cNvPr>
           <p:cNvPicPr>
             <a:picLocks noChangeAspect="1"/>
           </p:cNvPicPr>
@@ -3398,8 +3531,8 @@
         </p:blipFill>
         <p:spPr>
           <a:xfrm>
-            <a:off x="5752948" y="3017520"/>
-            <a:ext cx="685800" cy="685800"/>
+            <a:off x="5821528" y="2971800"/>
+            <a:ext cx="548640" cy="548640"/>
           </a:xfrm>
           <a:prstGeom prst="rect">
             <a:avLst/>
@@ -3408,30 +3541,69 @@
       </p:pic>
       <p:sp>
         <p:nvSpPr>
-          <p:cNvPr id="28" name="Text 21"/>
-          <p:cNvSpPr txBox="1"/>
-          <p:nvPr/>
-        </p:nvSpPr>
-        <p:spPr>
-          <a:xfrm>
-            <a:off x="4322978" y="3886200"/>
-            <a:ext cx="3545738" cy="457200"/>
-          </a:xfrm>
-          <a:prstGeom prst="rect">
-            <a:avLst/>
-          </a:prstGeom>
-          <a:noFill/>
-          <a:ln/>
-        </p:spPr>
-        <p:txBody>
-          <a:bodyPr wrap="square" lIns="0" tIns="0" rIns="0" bIns="0" rtlCol="0" anchor="t"/>
+          <p:cNvPr id="29" name="Text 22"/>
+          <p:cNvSpPr txBox="1"/>
+          <p:nvPr/>
+        </p:nvSpPr>
+        <p:spPr>
+          <a:xfrm>
+            <a:off x="4322978" y="3566160"/>
+            <a:ext cx="3545738" cy="868680"/>
+          </a:xfrm>
+          <a:prstGeom prst="rect">
+            <a:avLst/>
+          </a:prstGeom>
+          <a:noFill/>
+          <a:ln/>
+        </p:spPr>
+        <p:txBody>
+          <a:bodyPr wrap="square" lIns="0" tIns="0" rIns="0" bIns="0" rtlCol="0" anchor="ctr"/>
+          <a:lstStyle/>
+          <a:p>
+            <a:pPr algn="ctr" indent="0" marL="0">
+              <a:buNone/>
+            </a:pPr>
+            <a:r>
+              <a:rPr lang="en-US" sz="5400" b="1" dirty="0">
+                <a:solidFill>
+                  <a:srgbClr val="FBF6EE"/>
+                </a:solidFill>
+                <a:latin typeface="IBM Plex Sans Arabic" pitchFamily="34" charset="0"/>
+                <a:ea typeface="IBM Plex Sans Arabic" pitchFamily="34" charset="-122"/>
+                <a:cs typeface="IBM Plex Sans Arabic" pitchFamily="34" charset="-120"/>
+              </a:rPr>
+              <a:t>110K</a:t>
+            </a:r>
+            <a:endParaRPr lang="en-US" sz="5400" dirty="0"/>
+          </a:p>
+        </p:txBody>
+      </p:sp>
+      <p:sp>
+        <p:nvSpPr>
+          <p:cNvPr id="30" name="Text 23"/>
+          <p:cNvSpPr txBox="1"/>
+          <p:nvPr/>
+        </p:nvSpPr>
+        <p:spPr>
+          <a:xfrm>
+            <a:off x="4597298" y="4480560"/>
+            <a:ext cx="2997098" cy="411480"/>
+          </a:xfrm>
+          <a:prstGeom prst="rect">
+            <a:avLst/>
+          </a:prstGeom>
+          <a:noFill/>
+          <a:ln/>
+        </p:spPr>
+        <p:txBody>
+          <a:bodyPr wrap="square" lIns="0" tIns="0" rIns="0" bIns="0" rtlCol="0" anchor="ctr"/>
           <a:lstStyle/>
           <a:p>
             <a:pPr rtl="1" algn="ctr" indent="0" marL="0">
               <a:buNone/>
             </a:pPr>
             <a:r>
-              <a:rPr lang="en-US" sz="2200" b="1" dirty="0">
+              <a:rPr lang="en-US" sz="1800" dirty="0">
                 <a:solidFill>
                   <a:srgbClr val="FBF6EE"/>
                 </a:solidFill>
@@ -3439,37 +3611,42 @@
                 <a:ea typeface="IBM Plex Sans Arabic" pitchFamily="34" charset="-122"/>
                 <a:cs typeface="IBM Plex Sans Arabic" pitchFamily="34" charset="-120"/>
               </a:rPr>
-              <a:t>البنية الهجينة</a:t>
-            </a:r>
-            <a:endParaRPr lang="en-US" sz="2200" dirty="0"/>
-          </a:p>
-        </p:txBody>
-      </p:sp>
-      <p:sp>
-        <p:nvSpPr>
-          <p:cNvPr id="29" name="Shape 22"/>
+              <a:t>ريال سنوياً</a:t>
+            </a:r>
+            <a:endParaRPr lang="en-US" sz="1800" dirty="0"/>
+          </a:p>
+        </p:txBody>
+      </p:sp>
+      <p:sp>
+        <p:nvSpPr>
+          <p:cNvPr id="31" name="Shape 24"/>
           <p:cNvSpPr/>
           <p:nvPr/>
         </p:nvSpPr>
         <p:spPr>
           <a:xfrm>
             <a:off x="457200" y="2697480"/>
-            <a:ext cx="3545738" cy="1920240"/>
+            <a:ext cx="3545738" cy="2377440"/>
           </a:xfrm>
           <a:prstGeom prst="roundRect">
             <a:avLst>
-              <a:gd name="adj" fmla="val 9524"/>
+              <a:gd name="adj" fmla="val 7692"/>
             </a:avLst>
           </a:prstGeom>
           <a:solidFill>
-            <a:srgbClr val="8E2F3C"/>
-          </a:solidFill>
-          <a:ln/>
+            <a:srgbClr val="FFFBF8"/>
+          </a:solidFill>
+          <a:ln w="9525">
+            <a:solidFill>
+              <a:srgbClr val="E3D5CC"/>
+            </a:solidFill>
+            <a:prstDash val="solid"/>
+          </a:ln>
         </p:spPr>
       </p:sp>
       <p:pic>
         <p:nvPicPr>
-          <p:cNvPr id="30" name="Image 5" descr="/tmp/claude-0/-home-claude/750ff410-f4aa-5276-9360-1e19d018b112/scratchpad/c/assets/i-bell-cr.png">    </p:cNvPr>
+          <p:cNvPr id="32" name="Image 5" descr="/tmp/claude-0/-home-claude/750ff410-f4aa-5276-9360-1e19d018b112/scratchpad/c/assets/i-clock-br.png">    </p:cNvPr>
           <p:cNvPicPr>
             <a:picLocks noChangeAspect="1"/>
           </p:cNvPicPr>
@@ -3483,8 +3660,8 @@
         </p:blipFill>
         <p:spPr>
           <a:xfrm>
-            <a:off x="1887169" y="3017520"/>
-            <a:ext cx="685800" cy="685800"/>
+            <a:off x="1955749" y="2971800"/>
+            <a:ext cx="548640" cy="548640"/>
           </a:xfrm>
           <a:prstGeom prst="rect">
             <a:avLst/>
@@ -3493,14 +3670,92 @@
       </p:pic>
       <p:sp>
         <p:nvSpPr>
-          <p:cNvPr id="31" name="Text 23"/>
-          <p:cNvSpPr txBox="1"/>
-          <p:nvPr/>
-        </p:nvSpPr>
-        <p:spPr>
-          <a:xfrm>
-            <a:off x="457200" y="3886200"/>
-            <a:ext cx="3545738" cy="457200"/>
+          <p:cNvPr id="33" name="Text 25"/>
+          <p:cNvSpPr txBox="1"/>
+          <p:nvPr/>
+        </p:nvSpPr>
+        <p:spPr>
+          <a:xfrm>
+            <a:off x="457200" y="3566160"/>
+            <a:ext cx="3545738" cy="868680"/>
+          </a:xfrm>
+          <a:prstGeom prst="rect">
+            <a:avLst/>
+          </a:prstGeom>
+          <a:noFill/>
+          <a:ln/>
+        </p:spPr>
+        <p:txBody>
+          <a:bodyPr wrap="square" lIns="0" tIns="0" rIns="0" bIns="0" rtlCol="0" anchor="ctr"/>
+          <a:lstStyle/>
+          <a:p>
+            <a:pPr algn="ctr" indent="0" marL="0">
+              <a:buNone/>
+            </a:pPr>
+            <a:r>
+              <a:rPr lang="en-US" sz="5400" b="1" dirty="0">
+                <a:solidFill>
+                  <a:srgbClr val="8E2F3C"/>
+                </a:solidFill>
+                <a:latin typeface="IBM Plex Sans Arabic" pitchFamily="34" charset="0"/>
+                <a:ea typeface="IBM Plex Sans Arabic" pitchFamily="34" charset="-122"/>
+                <a:cs typeface="IBM Plex Sans Arabic" pitchFamily="34" charset="-120"/>
+              </a:rPr>
+              <a:t>دقائق</a:t>
+            </a:r>
+            <a:endParaRPr lang="en-US" sz="5400" dirty="0"/>
+          </a:p>
+        </p:txBody>
+      </p:sp>
+      <p:sp>
+        <p:nvSpPr>
+          <p:cNvPr id="34" name="Text 26"/>
+          <p:cNvSpPr txBox="1"/>
+          <p:nvPr/>
+        </p:nvSpPr>
+        <p:spPr>
+          <a:xfrm>
+            <a:off x="731520" y="4480560"/>
+            <a:ext cx="2997098" cy="411480"/>
+          </a:xfrm>
+          <a:prstGeom prst="rect">
+            <a:avLst/>
+          </a:prstGeom>
+          <a:noFill/>
+          <a:ln/>
+        </p:spPr>
+        <p:txBody>
+          <a:bodyPr wrap="square" lIns="0" tIns="0" rIns="0" bIns="0" rtlCol="0" anchor="ctr"/>
+          <a:lstStyle/>
+          <a:p>
+            <a:pPr rtl="1" algn="ctr" indent="0" marL="0">
+              <a:buNone/>
+            </a:pPr>
+            <a:r>
+              <a:rPr lang="en-US" sz="1800" dirty="0">
+                <a:solidFill>
+                  <a:srgbClr val="21141A"/>
+                </a:solidFill>
+                <a:latin typeface="IBM Plex Sans Arabic" pitchFamily="34" charset="0"/>
+                <a:ea typeface="IBM Plex Sans Arabic" pitchFamily="34" charset="-122"/>
+                <a:cs typeface="IBM Plex Sans Arabic" pitchFamily="34" charset="-120"/>
+              </a:rPr>
+              <a:t>بدل أسابيع</a:t>
+            </a:r>
+            <a:endParaRPr lang="en-US" sz="1800" dirty="0"/>
+          </a:p>
+        </p:txBody>
+      </p:sp>
+      <p:sp>
+        <p:nvSpPr>
+          <p:cNvPr id="35" name="Text 27"/>
+          <p:cNvSpPr txBox="1"/>
+          <p:nvPr/>
+        </p:nvSpPr>
+        <p:spPr>
+          <a:xfrm>
+            <a:off x="457200" y="5349240"/>
+            <a:ext cx="11277295" cy="365760"/>
           </a:xfrm>
           <a:prstGeom prst="rect">
             <a:avLst/>
@@ -3516,56 +3771,17 @@
               <a:buNone/>
             </a:pPr>
             <a:r>
-              <a:rPr lang="en-US" sz="2200" b="1" dirty="0">
-                <a:solidFill>
-                  <a:srgbClr val="FBF6EE"/>
-                </a:solidFill>
-                <a:latin typeface="IBM Plex Sans Arabic" pitchFamily="34" charset="0"/>
-                <a:ea typeface="IBM Plex Sans Arabic" pitchFamily="34" charset="-122"/>
-                <a:cs typeface="IBM Plex Sans Arabic" pitchFamily="34" charset="-120"/>
-              </a:rPr>
-              <a:t>إنذار مبكر 24/7</a:t>
-            </a:r>
-            <a:endParaRPr lang="en-US" sz="2200" dirty="0"/>
-          </a:p>
-        </p:txBody>
-      </p:sp>
-      <p:sp>
-        <p:nvSpPr>
-          <p:cNvPr id="32" name="Text 24"/>
-          <p:cNvSpPr txBox="1"/>
-          <p:nvPr/>
-        </p:nvSpPr>
-        <p:spPr>
-          <a:xfrm>
-            <a:off x="457200" y="5029200"/>
-            <a:ext cx="11277295" cy="457200"/>
-          </a:xfrm>
-          <a:prstGeom prst="rect">
-            <a:avLst/>
-          </a:prstGeom>
-          <a:noFill/>
-          <a:ln/>
-        </p:spPr>
-        <p:txBody>
-          <a:bodyPr wrap="square" lIns="0" tIns="0" rIns="0" bIns="0" rtlCol="0" anchor="ctr"/>
-          <a:lstStyle/>
-          <a:p>
-            <a:pPr rtl="1" algn="ctr" indent="0" marL="0">
-              <a:buNone/>
-            </a:pPr>
-            <a:r>
-              <a:rPr lang="en-US" sz="1800" b="1" dirty="0">
-                <a:solidFill>
-                  <a:srgbClr val="21141A"/>
-                </a:solidFill>
-                <a:latin typeface="IBM Plex Sans Arabic" pitchFamily="34" charset="0"/>
-                <a:ea typeface="IBM Plex Sans Arabic" pitchFamily="34" charset="-122"/>
-                <a:cs typeface="IBM Plex Sans Arabic" pitchFamily="34" charset="-120"/>
-              </a:rPr>
-              <a:t>نحتاج: توجيه خبراء · شريك سحابي محلي · 10 شركات للتجربة</a:t>
-            </a:r>
-            <a:endParaRPr lang="en-US" sz="1800" dirty="0"/>
+              <a:rPr lang="en-US" sz="1500" dirty="0">
+                <a:solidFill>
+                  <a:srgbClr val="7F6C72"/>
+                </a:solidFill>
+                <a:latin typeface="IBM Plex Sans Arabic" pitchFamily="34" charset="0"/>
+                <a:ea typeface="IBM Plex Sans Arabic" pitchFamily="34" charset="-122"/>
+                <a:cs typeface="IBM Plex Sans Arabic" pitchFamily="34" charset="-120"/>
+              </a:rPr>
+              <a:t>مثال: شركة افتراضية من 120 موظفاً</a:t>
+            </a:r>
+            <a:endParaRPr lang="en-US" sz="1500" dirty="0"/>
           </a:p>
         </p:txBody>
       </p:sp>
@@ -3936,8 +4152,8 @@
         </p:nvSpPr>
         <p:spPr>
           <a:xfrm>
-            <a:off x="10600639" y="987552"/>
-            <a:ext cx="1133856" cy="384048"/>
+            <a:off x="9759391" y="987552"/>
+            <a:ext cx="1975104" cy="384048"/>
           </a:xfrm>
           <a:prstGeom prst="roundRect">
             <a:avLst>
@@ -3958,8 +4174,8 @@
         </p:nvSpPr>
         <p:spPr>
           <a:xfrm>
-            <a:off x="10600639" y="987552"/>
-            <a:ext cx="1133856" cy="384048"/>
+            <a:off x="9759391" y="987552"/>
+            <a:ext cx="1975104" cy="384048"/>
           </a:xfrm>
           <a:prstGeom prst="rect">
             <a:avLst/>
@@ -3983,7 +4199,7 @@
                 <a:ea typeface="IBM Plex Sans Arabic" pitchFamily="34" charset="-122"/>
                 <a:cs typeface="IBM Plex Sans Arabic" pitchFamily="34" charset="-120"/>
               </a:rPr>
-              <a:t>الختام</a:t>
+              <a:t>الخطوة التالية</a:t>
             </a:r>
             <a:endParaRPr lang="en-US" sz="1300" dirty="0"/>
           </a:p>
@@ -4086,6 +4302,861 @@
                 <a:cs typeface="IBM Plex Sans Arabic" pitchFamily="34" charset="-120"/>
               </a:rPr>
               <a:t>11</a:t>
+            </a:r>
+            <a:endParaRPr lang="en-US" sz="1100" dirty="0"/>
+          </a:p>
+        </p:txBody>
+      </p:sp>
+      <p:sp>
+        <p:nvSpPr>
+          <p:cNvPr id="22" name="Text 17"/>
+          <p:cNvSpPr txBox="1"/>
+          <p:nvPr/>
+        </p:nvSpPr>
+        <p:spPr>
+          <a:xfrm>
+            <a:off x="457200" y="1600200"/>
+            <a:ext cx="11277295" cy="731520"/>
+          </a:xfrm>
+          <a:prstGeom prst="rect">
+            <a:avLst/>
+          </a:prstGeom>
+          <a:noFill/>
+          <a:ln/>
+        </p:spPr>
+        <p:txBody>
+          <a:bodyPr wrap="square" lIns="0" tIns="0" rIns="0" bIns="0" rtlCol="0" anchor="ctr"/>
+          <a:lstStyle/>
+          <a:p>
+            <a:pPr rtl="1" algn="r" indent="0" marL="0">
+              <a:buNone/>
+            </a:pPr>
+            <a:r>
+              <a:rPr lang="en-US" sz="3400" b="1" dirty="0">
+                <a:solidFill>
+                  <a:srgbClr val="21141A"/>
+                </a:solidFill>
+                <a:latin typeface="IBM Plex Sans Arabic" pitchFamily="34" charset="0"/>
+                <a:ea typeface="IBM Plex Sans Arabic" pitchFamily="34" charset="-122"/>
+                <a:cs typeface="IBM Plex Sans Arabic" pitchFamily="34" charset="-120"/>
+              </a:rPr>
+              <a:t>ما بعد التحدي</a:t>
+            </a:r>
+            <a:endParaRPr lang="en-US" sz="3400" dirty="0"/>
+          </a:p>
+        </p:txBody>
+      </p:sp>
+      <p:sp>
+        <p:nvSpPr>
+          <p:cNvPr id="23" name="Shape 18"/>
+          <p:cNvSpPr/>
+          <p:nvPr/>
+        </p:nvSpPr>
+        <p:spPr>
+          <a:xfrm>
+            <a:off x="8188757" y="2697480"/>
+            <a:ext cx="3545738" cy="1920240"/>
+          </a:xfrm>
+          <a:prstGeom prst="roundRect">
+            <a:avLst>
+              <a:gd name="adj" fmla="val 9524"/>
+            </a:avLst>
+          </a:prstGeom>
+          <a:solidFill>
+            <a:srgbClr val="8E2F3C"/>
+          </a:solidFill>
+          <a:ln/>
+        </p:spPr>
+      </p:sp>
+      <p:pic>
+        <p:nvPicPr>
+          <p:cNvPr id="24" name="Image 3" descr="/tmp/claude-0/-home-claude/750ff410-f4aa-5276-9360-1e19d018b112/scratchpad/c/assets/i-scale-cr.png">    </p:cNvPr>
+          <p:cNvPicPr>
+            <a:picLocks noChangeAspect="1"/>
+          </p:cNvPicPr>
+          <p:nvPr/>
+        </p:nvPicPr>
+        <p:blipFill>
+          <a:blip r:embed="rId4"/>
+          <a:stretch>
+            <a:fillRect/>
+          </a:stretch>
+        </p:blipFill>
+        <p:spPr>
+          <a:xfrm>
+            <a:off x="9618726" y="3017520"/>
+            <a:ext cx="685800" cy="685800"/>
+          </a:xfrm>
+          <a:prstGeom prst="rect">
+            <a:avLst/>
+          </a:prstGeom>
+        </p:spPr>
+      </p:pic>
+      <p:sp>
+        <p:nvSpPr>
+          <p:cNvPr id="25" name="Text 19"/>
+          <p:cNvSpPr txBox="1"/>
+          <p:nvPr/>
+        </p:nvSpPr>
+        <p:spPr>
+          <a:xfrm>
+            <a:off x="8188757" y="3886200"/>
+            <a:ext cx="3545738" cy="457200"/>
+          </a:xfrm>
+          <a:prstGeom prst="rect">
+            <a:avLst/>
+          </a:prstGeom>
+          <a:noFill/>
+          <a:ln/>
+        </p:spPr>
+        <p:txBody>
+          <a:bodyPr wrap="square" lIns="0" tIns="0" rIns="0" bIns="0" rtlCol="0" anchor="t"/>
+          <a:lstStyle/>
+          <a:p>
+            <a:pPr rtl="1" algn="ctr" indent="0" marL="0">
+              <a:buNone/>
+            </a:pPr>
+            <a:r>
+              <a:rPr lang="en-US" sz="2200" b="1" dirty="0">
+                <a:solidFill>
+                  <a:srgbClr val="FBF6EE"/>
+                </a:solidFill>
+                <a:latin typeface="IBM Plex Sans Arabic" pitchFamily="34" charset="0"/>
+                <a:ea typeface="IBM Plex Sans Arabic" pitchFamily="34" charset="-122"/>
+                <a:cs typeface="IBM Plex Sans Arabic" pitchFamily="34" charset="-120"/>
+              </a:rPr>
+              <a:t>مقارنة السحابات</a:t>
+            </a:r>
+            <a:endParaRPr lang="en-US" sz="2200" dirty="0"/>
+          </a:p>
+        </p:txBody>
+      </p:sp>
+      <p:sp>
+        <p:nvSpPr>
+          <p:cNvPr id="26" name="Shape 20"/>
+          <p:cNvSpPr/>
+          <p:nvPr/>
+        </p:nvSpPr>
+        <p:spPr>
+          <a:xfrm>
+            <a:off x="4322978" y="2697480"/>
+            <a:ext cx="3545738" cy="1920240"/>
+          </a:xfrm>
+          <a:prstGeom prst="roundRect">
+            <a:avLst>
+              <a:gd name="adj" fmla="val 9524"/>
+            </a:avLst>
+          </a:prstGeom>
+          <a:solidFill>
+            <a:srgbClr val="8E2F3C"/>
+          </a:solidFill>
+          <a:ln/>
+        </p:spPr>
+      </p:sp>
+      <p:pic>
+        <p:nvPicPr>
+          <p:cNvPr id="27" name="Image 4" descr="/tmp/claude-0/-home-claude/750ff410-f4aa-5276-9360-1e19d018b112/scratchpad/c/assets/i-server-cr.png">    </p:cNvPr>
+          <p:cNvPicPr>
+            <a:picLocks noChangeAspect="1"/>
+          </p:cNvPicPr>
+          <p:nvPr/>
+        </p:nvPicPr>
+        <p:blipFill>
+          <a:blip r:embed="rId5"/>
+          <a:stretch>
+            <a:fillRect/>
+          </a:stretch>
+        </p:blipFill>
+        <p:spPr>
+          <a:xfrm>
+            <a:off x="5752948" y="3017520"/>
+            <a:ext cx="685800" cy="685800"/>
+          </a:xfrm>
+          <a:prstGeom prst="rect">
+            <a:avLst/>
+          </a:prstGeom>
+        </p:spPr>
+      </p:pic>
+      <p:sp>
+        <p:nvSpPr>
+          <p:cNvPr id="28" name="Text 21"/>
+          <p:cNvSpPr txBox="1"/>
+          <p:nvPr/>
+        </p:nvSpPr>
+        <p:spPr>
+          <a:xfrm>
+            <a:off x="4322978" y="3886200"/>
+            <a:ext cx="3545738" cy="457200"/>
+          </a:xfrm>
+          <a:prstGeom prst="rect">
+            <a:avLst/>
+          </a:prstGeom>
+          <a:noFill/>
+          <a:ln/>
+        </p:spPr>
+        <p:txBody>
+          <a:bodyPr wrap="square" lIns="0" tIns="0" rIns="0" bIns="0" rtlCol="0" anchor="t"/>
+          <a:lstStyle/>
+          <a:p>
+            <a:pPr rtl="1" algn="ctr" indent="0" marL="0">
+              <a:buNone/>
+            </a:pPr>
+            <a:r>
+              <a:rPr lang="en-US" sz="2200" b="1" dirty="0">
+                <a:solidFill>
+                  <a:srgbClr val="FBF6EE"/>
+                </a:solidFill>
+                <a:latin typeface="IBM Plex Sans Arabic" pitchFamily="34" charset="0"/>
+                <a:ea typeface="IBM Plex Sans Arabic" pitchFamily="34" charset="-122"/>
+                <a:cs typeface="IBM Plex Sans Arabic" pitchFamily="34" charset="-120"/>
+              </a:rPr>
+              <a:t>البنية الهجينة</a:t>
+            </a:r>
+            <a:endParaRPr lang="en-US" sz="2200" dirty="0"/>
+          </a:p>
+        </p:txBody>
+      </p:sp>
+      <p:sp>
+        <p:nvSpPr>
+          <p:cNvPr id="29" name="Shape 22"/>
+          <p:cNvSpPr/>
+          <p:nvPr/>
+        </p:nvSpPr>
+        <p:spPr>
+          <a:xfrm>
+            <a:off x="457200" y="2697480"/>
+            <a:ext cx="3545738" cy="1920240"/>
+          </a:xfrm>
+          <a:prstGeom prst="roundRect">
+            <a:avLst>
+              <a:gd name="adj" fmla="val 9524"/>
+            </a:avLst>
+          </a:prstGeom>
+          <a:solidFill>
+            <a:srgbClr val="8E2F3C"/>
+          </a:solidFill>
+          <a:ln/>
+        </p:spPr>
+      </p:sp>
+      <p:pic>
+        <p:nvPicPr>
+          <p:cNvPr id="30" name="Image 5" descr="/tmp/claude-0/-home-claude/750ff410-f4aa-5276-9360-1e19d018b112/scratchpad/c/assets/i-bell-cr.png">    </p:cNvPr>
+          <p:cNvPicPr>
+            <a:picLocks noChangeAspect="1"/>
+          </p:cNvPicPr>
+          <p:nvPr/>
+        </p:nvPicPr>
+        <p:blipFill>
+          <a:blip r:embed="rId6"/>
+          <a:stretch>
+            <a:fillRect/>
+          </a:stretch>
+        </p:blipFill>
+        <p:spPr>
+          <a:xfrm>
+            <a:off x="1887169" y="3017520"/>
+            <a:ext cx="685800" cy="685800"/>
+          </a:xfrm>
+          <a:prstGeom prst="rect">
+            <a:avLst/>
+          </a:prstGeom>
+        </p:spPr>
+      </p:pic>
+      <p:sp>
+        <p:nvSpPr>
+          <p:cNvPr id="31" name="Text 23"/>
+          <p:cNvSpPr txBox="1"/>
+          <p:nvPr/>
+        </p:nvSpPr>
+        <p:spPr>
+          <a:xfrm>
+            <a:off x="457200" y="3886200"/>
+            <a:ext cx="3545738" cy="457200"/>
+          </a:xfrm>
+          <a:prstGeom prst="rect">
+            <a:avLst/>
+          </a:prstGeom>
+          <a:noFill/>
+          <a:ln/>
+        </p:spPr>
+        <p:txBody>
+          <a:bodyPr wrap="square" lIns="0" tIns="0" rIns="0" bIns="0" rtlCol="0" anchor="t"/>
+          <a:lstStyle/>
+          <a:p>
+            <a:pPr rtl="1" algn="ctr" indent="0" marL="0">
+              <a:buNone/>
+            </a:pPr>
+            <a:r>
+              <a:rPr lang="en-US" sz="2200" b="1" dirty="0">
+                <a:solidFill>
+                  <a:srgbClr val="FBF6EE"/>
+                </a:solidFill>
+                <a:latin typeface="IBM Plex Sans Arabic" pitchFamily="34" charset="0"/>
+                <a:ea typeface="IBM Plex Sans Arabic" pitchFamily="34" charset="-122"/>
+                <a:cs typeface="IBM Plex Sans Arabic" pitchFamily="34" charset="-120"/>
+              </a:rPr>
+              <a:t>إنذار مبكر 24/7</a:t>
+            </a:r>
+            <a:endParaRPr lang="en-US" sz="2200" dirty="0"/>
+          </a:p>
+        </p:txBody>
+      </p:sp>
+      <p:sp>
+        <p:nvSpPr>
+          <p:cNvPr id="32" name="Text 24"/>
+          <p:cNvSpPr txBox="1"/>
+          <p:nvPr/>
+        </p:nvSpPr>
+        <p:spPr>
+          <a:xfrm>
+            <a:off x="457200" y="5029200"/>
+            <a:ext cx="11277295" cy="457200"/>
+          </a:xfrm>
+          <a:prstGeom prst="rect">
+            <a:avLst/>
+          </a:prstGeom>
+          <a:noFill/>
+          <a:ln/>
+        </p:spPr>
+        <p:txBody>
+          <a:bodyPr wrap="square" lIns="0" tIns="0" rIns="0" bIns="0" rtlCol="0" anchor="ctr"/>
+          <a:lstStyle/>
+          <a:p>
+            <a:pPr rtl="1" algn="ctr" indent="0" marL="0">
+              <a:buNone/>
+            </a:pPr>
+            <a:r>
+              <a:rPr lang="en-US" sz="1800" b="1" dirty="0">
+                <a:solidFill>
+                  <a:srgbClr val="21141A"/>
+                </a:solidFill>
+                <a:latin typeface="IBM Plex Sans Arabic" pitchFamily="34" charset="0"/>
+                <a:ea typeface="IBM Plex Sans Arabic" pitchFamily="34" charset="-122"/>
+                <a:cs typeface="IBM Plex Sans Arabic" pitchFamily="34" charset="-120"/>
+              </a:rPr>
+              <a:t>نحتاج: توجيه خبراء · شريك سحابي محلي · 10 شركات للتجربة</a:t>
+            </a:r>
+            <a:endParaRPr lang="en-US" sz="1800" dirty="0"/>
+          </a:p>
+        </p:txBody>
+      </p:sp>
+    </p:spTree>
+  </p:cSld>
+  <p:clrMapOvr>
+    <a:masterClrMapping/>
+  </p:clrMapOvr>
+</p:sld>
+</file>
+
+<file path=ppt/slides/slide12.xml><?xml version="1.0" encoding="utf-8"?>
+<p:sld xmlns:a="http://schemas.openxmlformats.org/drawingml/2006/main" xmlns:r="http://schemas.openxmlformats.org/officeDocument/2006/relationships" xmlns:p="http://schemas.openxmlformats.org/presentationml/2006/main">
+  <p:cSld name="Slide 12">
+    <p:bg>
+      <p:bgPr>
+        <a:solidFill>
+          <a:srgbClr val="F8F3EF"/>
+        </a:solidFill>
+      </p:bgPr>
+    </p:bg>
+    <p:spTree>
+      <p:nvGrpSpPr>
+        <p:cNvPr id="1" name=""/>
+        <p:cNvGrpSpPr/>
+        <p:nvPr/>
+      </p:nvGrpSpPr>
+      <p:grpSpPr>
+        <a:xfrm>
+          <a:off x="0" y="0"/>
+          <a:ext cx="0" cy="0"/>
+          <a:chOff x="0" y="0"/>
+          <a:chExt cx="0" cy="0"/>
+        </a:xfrm>
+      </p:grpSpPr>
+      <p:sp>
+        <p:nvSpPr>
+          <p:cNvPr id="2" name="Shape 0"/>
+          <p:cNvSpPr/>
+          <p:nvPr/>
+        </p:nvSpPr>
+        <p:spPr>
+          <a:xfrm>
+            <a:off x="3017520" y="384048"/>
+            <a:ext cx="100584" cy="100584"/>
+          </a:xfrm>
+          <a:prstGeom prst="rect">
+            <a:avLst/>
+          </a:prstGeom>
+          <a:solidFill>
+            <a:srgbClr val="D48A93"/>
+          </a:solidFill>
+          <a:ln/>
+        </p:spPr>
+      </p:sp>
+      <p:sp>
+        <p:nvSpPr>
+          <p:cNvPr id="3" name="Shape 1"/>
+          <p:cNvSpPr/>
+          <p:nvPr/>
+        </p:nvSpPr>
+        <p:spPr>
+          <a:xfrm>
+            <a:off x="3429000" y="658368"/>
+            <a:ext cx="64008" cy="64008"/>
+          </a:xfrm>
+          <a:prstGeom prst="rect">
+            <a:avLst/>
+          </a:prstGeom>
+          <a:solidFill>
+            <a:srgbClr val="C9A46E"/>
+          </a:solidFill>
+          <a:ln/>
+        </p:spPr>
+      </p:sp>
+      <p:sp>
+        <p:nvSpPr>
+          <p:cNvPr id="4" name="Shape 2"/>
+          <p:cNvSpPr/>
+          <p:nvPr/>
+        </p:nvSpPr>
+        <p:spPr>
+          <a:xfrm>
+            <a:off x="4206240" y="329184"/>
+            <a:ext cx="82296" cy="82296"/>
+          </a:xfrm>
+          <a:prstGeom prst="rect">
+            <a:avLst/>
+          </a:prstGeom>
+          <a:solidFill>
+            <a:srgbClr val="7FB27A"/>
+          </a:solidFill>
+          <a:ln/>
+        </p:spPr>
+      </p:sp>
+      <p:sp>
+        <p:nvSpPr>
+          <p:cNvPr id="5" name="Shape 3"/>
+          <p:cNvSpPr/>
+          <p:nvPr/>
+        </p:nvSpPr>
+        <p:spPr>
+          <a:xfrm>
+            <a:off x="4937760" y="603504"/>
+            <a:ext cx="54864" cy="54864"/>
+          </a:xfrm>
+          <a:prstGeom prst="rect">
+            <a:avLst/>
+          </a:prstGeom>
+          <a:solidFill>
+            <a:srgbClr val="D48A93"/>
+          </a:solidFill>
+          <a:ln/>
+        </p:spPr>
+      </p:sp>
+      <p:sp>
+        <p:nvSpPr>
+          <p:cNvPr id="6" name="Shape 4"/>
+          <p:cNvSpPr/>
+          <p:nvPr/>
+        </p:nvSpPr>
+        <p:spPr>
+          <a:xfrm>
+            <a:off x="7223760" y="365760"/>
+            <a:ext cx="73152" cy="73152"/>
+          </a:xfrm>
+          <a:prstGeom prst="rect">
+            <a:avLst/>
+          </a:prstGeom>
+          <a:solidFill>
+            <a:srgbClr val="C9A46E"/>
+          </a:solidFill>
+          <a:ln/>
+        </p:spPr>
+      </p:sp>
+      <p:sp>
+        <p:nvSpPr>
+          <p:cNvPr id="7" name="Shape 5"/>
+          <p:cNvSpPr/>
+          <p:nvPr/>
+        </p:nvSpPr>
+        <p:spPr>
+          <a:xfrm>
+            <a:off x="7955280" y="640080"/>
+            <a:ext cx="100584" cy="100584"/>
+          </a:xfrm>
+          <a:prstGeom prst="rect">
+            <a:avLst/>
+          </a:prstGeom>
+          <a:solidFill>
+            <a:srgbClr val="D48A93"/>
+          </a:solidFill>
+          <a:ln/>
+        </p:spPr>
+      </p:sp>
+      <p:sp>
+        <p:nvSpPr>
+          <p:cNvPr id="8" name="Shape 6"/>
+          <p:cNvSpPr/>
+          <p:nvPr/>
+        </p:nvSpPr>
+        <p:spPr>
+          <a:xfrm>
+            <a:off x="8686800" y="329184"/>
+            <a:ext cx="54864" cy="54864"/>
+          </a:xfrm>
+          <a:prstGeom prst="rect">
+            <a:avLst/>
+          </a:prstGeom>
+          <a:solidFill>
+            <a:srgbClr val="7FB27A"/>
+          </a:solidFill>
+          <a:ln/>
+        </p:spPr>
+      </p:sp>
+      <p:sp>
+        <p:nvSpPr>
+          <p:cNvPr id="9" name="Shape 7"/>
+          <p:cNvSpPr/>
+          <p:nvPr/>
+        </p:nvSpPr>
+        <p:spPr>
+          <a:xfrm>
+            <a:off x="9372600" y="566928"/>
+            <a:ext cx="73152" cy="73152"/>
+          </a:xfrm>
+          <a:prstGeom prst="rect">
+            <a:avLst/>
+          </a:prstGeom>
+          <a:solidFill>
+            <a:srgbClr val="E3D5CC"/>
+          </a:solidFill>
+          <a:ln/>
+        </p:spPr>
+      </p:sp>
+      <p:sp>
+        <p:nvSpPr>
+          <p:cNvPr id="10" name="Shape 8"/>
+          <p:cNvSpPr/>
+          <p:nvPr/>
+        </p:nvSpPr>
+        <p:spPr>
+          <a:xfrm>
+            <a:off x="2194560" y="6473952"/>
+            <a:ext cx="64008" cy="64008"/>
+          </a:xfrm>
+          <a:prstGeom prst="rect">
+            <a:avLst/>
+          </a:prstGeom>
+          <a:solidFill>
+            <a:srgbClr val="C9A46E"/>
+          </a:solidFill>
+          <a:ln/>
+        </p:spPr>
+      </p:sp>
+      <p:sp>
+        <p:nvSpPr>
+          <p:cNvPr id="11" name="Shape 9"/>
+          <p:cNvSpPr/>
+          <p:nvPr/>
+        </p:nvSpPr>
+        <p:spPr>
+          <a:xfrm>
+            <a:off x="4480560" y="6547104"/>
+            <a:ext cx="45720" cy="45720"/>
+          </a:xfrm>
+          <a:prstGeom prst="rect">
+            <a:avLst/>
+          </a:prstGeom>
+          <a:solidFill>
+            <a:srgbClr val="D48A93"/>
+          </a:solidFill>
+          <a:ln/>
+        </p:spPr>
+      </p:sp>
+      <p:sp>
+        <p:nvSpPr>
+          <p:cNvPr id="12" name="Shape 10"/>
+          <p:cNvSpPr/>
+          <p:nvPr/>
+        </p:nvSpPr>
+        <p:spPr>
+          <a:xfrm>
+            <a:off x="7589520" y="6492240"/>
+            <a:ext cx="54864" cy="54864"/>
+          </a:xfrm>
+          <a:prstGeom prst="rect">
+            <a:avLst/>
+          </a:prstGeom>
+          <a:solidFill>
+            <a:srgbClr val="7FB27A"/>
+          </a:solidFill>
+          <a:ln/>
+        </p:spPr>
+      </p:sp>
+      <p:sp>
+        <p:nvSpPr>
+          <p:cNvPr id="13" name="Shape 11"/>
+          <p:cNvSpPr/>
+          <p:nvPr/>
+        </p:nvSpPr>
+        <p:spPr>
+          <a:xfrm>
+            <a:off x="9692640" y="6528816"/>
+            <a:ext cx="73152" cy="73152"/>
+          </a:xfrm>
+          <a:prstGeom prst="rect">
+            <a:avLst/>
+          </a:prstGeom>
+          <a:solidFill>
+            <a:srgbClr val="D48A93"/>
+          </a:solidFill>
+          <a:ln/>
+        </p:spPr>
+      </p:sp>
+      <p:pic>
+        <p:nvPicPr>
+          <p:cNvPr id="14" name="Image 0" descr="/tmp/claude-0/-home-claude/750ff410-f4aa-5276-9360-1e19d018b112/scratchpad/c/assets/ct-icon.png">    </p:cNvPr>
+          <p:cNvPicPr>
+            <a:picLocks noChangeAspect="1"/>
+          </p:cNvPicPr>
+          <p:nvPr/>
+        </p:nvPicPr>
+        <p:blipFill>
+          <a:blip r:embed="rId1"/>
+          <a:stretch>
+            <a:fillRect/>
+          </a:stretch>
+        </p:blipFill>
+        <p:spPr>
+          <a:xfrm>
+            <a:off x="457200" y="329184"/>
+            <a:ext cx="384048" cy="384048"/>
+          </a:xfrm>
+          <a:prstGeom prst="rect">
+            <a:avLst/>
+          </a:prstGeom>
+        </p:spPr>
+      </p:pic>
+      <p:sp>
+        <p:nvSpPr>
+          <p:cNvPr id="15" name="Text 12"/>
+          <p:cNvSpPr txBox="1"/>
+          <p:nvPr/>
+        </p:nvSpPr>
+        <p:spPr>
+          <a:xfrm>
+            <a:off x="932688" y="320040"/>
+            <a:ext cx="1828800" cy="402336"/>
+          </a:xfrm>
+          <a:prstGeom prst="rect">
+            <a:avLst/>
+          </a:prstGeom>
+          <a:noFill/>
+          <a:ln/>
+        </p:spPr>
+        <p:txBody>
+          <a:bodyPr wrap="square" lIns="0" tIns="0" rIns="0" bIns="0" rtlCol="0" anchor="ctr"/>
+          <a:lstStyle/>
+          <a:p>
+            <a:pPr algn="l" indent="0" marL="0">
+              <a:buNone/>
+            </a:pPr>
+            <a:r>
+              <a:rPr lang="en-US" sz="1800" b="1" dirty="0">
+                <a:solidFill>
+                  <a:srgbClr val="21141A"/>
+                </a:solidFill>
+                <a:latin typeface="IBM Plex Sans Arabic" pitchFamily="34" charset="0"/>
+                <a:ea typeface="IBM Plex Sans Arabic" pitchFamily="34" charset="-122"/>
+                <a:cs typeface="IBM Plex Sans Arabic" pitchFamily="34" charset="-120"/>
+              </a:rPr>
+              <a:t>CloudTrim</a:t>
+            </a:r>
+            <a:endParaRPr lang="en-US" sz="1800" dirty="0"/>
+          </a:p>
+        </p:txBody>
+      </p:sp>
+      <p:pic>
+        <p:nvPicPr>
+          <p:cNvPr id="16" name="Image 1" descr="/tmp/claude-0/-home-claude/750ff410-f4aa-5276-9360-1e19d018b112/scratchpad/c/assets/venturex-ink.png">    </p:cNvPr>
+          <p:cNvPicPr>
+            <a:picLocks noChangeAspect="1"/>
+          </p:cNvPicPr>
+          <p:nvPr/>
+        </p:nvPicPr>
+        <p:blipFill>
+          <a:blip r:embed="rId2"/>
+          <a:stretch>
+            <a:fillRect/>
+          </a:stretch>
+        </p:blipFill>
+        <p:spPr>
+          <a:xfrm>
+            <a:off x="10490566" y="256032"/>
+            <a:ext cx="1243929" cy="548640"/>
+          </a:xfrm>
+          <a:prstGeom prst="rect">
+            <a:avLst/>
+          </a:prstGeom>
+        </p:spPr>
+      </p:pic>
+      <p:sp>
+        <p:nvSpPr>
+          <p:cNvPr id="17" name="Shape 13"/>
+          <p:cNvSpPr/>
+          <p:nvPr/>
+        </p:nvSpPr>
+        <p:spPr>
+          <a:xfrm>
+            <a:off x="10600639" y="987552"/>
+            <a:ext cx="1133856" cy="384048"/>
+          </a:xfrm>
+          <a:prstGeom prst="roundRect">
+            <a:avLst>
+              <a:gd name="adj" fmla="val 50000"/>
+            </a:avLst>
+          </a:prstGeom>
+          <a:solidFill>
+            <a:srgbClr val="8E2F3C"/>
+          </a:solidFill>
+          <a:ln/>
+        </p:spPr>
+      </p:sp>
+      <p:sp>
+        <p:nvSpPr>
+          <p:cNvPr id="18" name="Text 14"/>
+          <p:cNvSpPr txBox="1"/>
+          <p:nvPr/>
+        </p:nvSpPr>
+        <p:spPr>
+          <a:xfrm>
+            <a:off x="10600639" y="987552"/>
+            <a:ext cx="1133856" cy="384048"/>
+          </a:xfrm>
+          <a:prstGeom prst="rect">
+            <a:avLst/>
+          </a:prstGeom>
+          <a:noFill/>
+          <a:ln/>
+        </p:spPr>
+        <p:txBody>
+          <a:bodyPr wrap="square" lIns="0" tIns="0" rIns="0" bIns="0" rtlCol="0" anchor="ctr"/>
+          <a:lstStyle/>
+          <a:p>
+            <a:pPr rtl="1" algn="ctr" indent="0" marL="0">
+              <a:buNone/>
+            </a:pPr>
+            <a:r>
+              <a:rPr lang="en-US" sz="1300" b="1" dirty="0">
+                <a:solidFill>
+                  <a:srgbClr val="FBF6EE"/>
+                </a:solidFill>
+                <a:latin typeface="IBM Plex Sans Arabic" pitchFamily="34" charset="0"/>
+                <a:ea typeface="IBM Plex Sans Arabic" pitchFamily="34" charset="-122"/>
+                <a:cs typeface="IBM Plex Sans Arabic" pitchFamily="34" charset="-120"/>
+              </a:rPr>
+              <a:t>الختام</a:t>
+            </a:r>
+            <a:endParaRPr lang="en-US" sz="1300" dirty="0"/>
+          </a:p>
+        </p:txBody>
+      </p:sp>
+      <p:pic>
+        <p:nvPicPr>
+          <p:cNvPr id="19" name="Image 2" descr="/tmp/claude-0/-home-claude/750ff410-f4aa-5276-9360-1e19d018b112/scratchpad/c/assets/organizers-ink.png">    </p:cNvPr>
+          <p:cNvPicPr>
+            <a:picLocks noChangeAspect="1"/>
+          </p:cNvPicPr>
+          <p:nvPr/>
+        </p:nvPicPr>
+        <p:blipFill>
+          <a:blip r:embed="rId3"/>
+          <a:stretch>
+            <a:fillRect/>
+          </a:stretch>
+        </p:blipFill>
+        <p:spPr>
+          <a:xfrm>
+            <a:off x="457200" y="6309360"/>
+            <a:ext cx="848839" cy="365760"/>
+          </a:xfrm>
+          <a:prstGeom prst="rect">
+            <a:avLst/>
+          </a:prstGeom>
+        </p:spPr>
+      </p:pic>
+      <p:sp>
+        <p:nvSpPr>
+          <p:cNvPr id="20" name="Text 15"/>
+          <p:cNvSpPr txBox="1"/>
+          <p:nvPr/>
+        </p:nvSpPr>
+        <p:spPr>
+          <a:xfrm>
+            <a:off x="4270248" y="6382512"/>
+            <a:ext cx="3657600" cy="274320"/>
+          </a:xfrm>
+          <a:prstGeom prst="rect">
+            <a:avLst/>
+          </a:prstGeom>
+          <a:noFill/>
+          <a:ln/>
+        </p:spPr>
+        <p:txBody>
+          <a:bodyPr wrap="square" lIns="0" tIns="0" rIns="0" bIns="0" rtlCol="0" anchor="t"/>
+          <a:lstStyle/>
+          <a:p>
+            <a:pPr rtl="1" algn="ctr" indent="0" marL="0">
+              <a:buNone/>
+            </a:pPr>
+            <a:r>
+              <a:rPr lang="en-US" sz="1000" dirty="0">
+                <a:solidFill>
+                  <a:srgbClr val="7F6C72"/>
+                </a:solidFill>
+                <a:latin typeface="IBM Plex Sans Arabic" pitchFamily="34" charset="0"/>
+                <a:ea typeface="IBM Plex Sans Arabic" pitchFamily="34" charset="-122"/>
+                <a:cs typeface="IBM Plex Sans Arabic" pitchFamily="34" charset="-120"/>
+              </a:rPr>
+              <a:t>VentureX 2026 · فريق SSB</a:t>
+            </a:r>
+            <a:endParaRPr lang="en-US" sz="1000" dirty="0"/>
+          </a:p>
+        </p:txBody>
+      </p:sp>
+      <p:sp>
+        <p:nvSpPr>
+          <p:cNvPr id="21" name="Text 16"/>
+          <p:cNvSpPr txBox="1"/>
+          <p:nvPr/>
+        </p:nvSpPr>
+        <p:spPr>
+          <a:xfrm>
+            <a:off x="11185855" y="6382512"/>
+            <a:ext cx="548640" cy="274320"/>
+          </a:xfrm>
+          <a:prstGeom prst="rect">
+            <a:avLst/>
+          </a:prstGeom>
+          <a:noFill/>
+          <a:ln/>
+        </p:spPr>
+        <p:txBody>
+          <a:bodyPr wrap="square" lIns="0" tIns="0" rIns="0" bIns="0" rtlCol="0" anchor="t"/>
+          <a:lstStyle/>
+          <a:p>
+            <a:pPr algn="r" indent="0" marL="0">
+              <a:buNone/>
+            </a:pPr>
+            <a:r>
+              <a:rPr lang="en-US" sz="1100" b="1" dirty="0">
+                <a:solidFill>
+                  <a:srgbClr val="7F6C72"/>
+                </a:solidFill>
+                <a:latin typeface="IBM Plex Sans Arabic" pitchFamily="34" charset="0"/>
+                <a:ea typeface="IBM Plex Sans Arabic" pitchFamily="34" charset="-122"/>
+                <a:cs typeface="IBM Plex Sans Arabic" pitchFamily="34" charset="-120"/>
+              </a:rPr>
+              <a:t>12</a:t>
             </a:r>
             <a:endParaRPr lang="en-US" sz="1100" dirty="0"/>
           </a:p>
@@ -11558,8 +12629,8 @@
         </p:nvSpPr>
         <p:spPr>
           <a:xfrm>
-            <a:off x="9759391" y="987552"/>
-            <a:ext cx="1975104" cy="384048"/>
+            <a:off x="10074859" y="987552"/>
+            <a:ext cx="1659636" cy="384048"/>
           </a:xfrm>
           <a:prstGeom prst="roundRect">
             <a:avLst>
@@ -11580,8 +12651,8 @@
         </p:nvSpPr>
         <p:spPr>
           <a:xfrm>
-            <a:off x="9759391" y="987552"/>
-            <a:ext cx="1975104" cy="384048"/>
+            <a:off x="10074859" y="987552"/>
+            <a:ext cx="1659636" cy="384048"/>
           </a:xfrm>
           <a:prstGeom prst="rect">
             <a:avLst/>
@@ -11605,7 +12676,7 @@
                 <a:ea typeface="IBM Plex Sans Arabic" pitchFamily="34" charset="-122"/>
                 <a:cs typeface="IBM Plex Sans Arabic" pitchFamily="34" charset="-120"/>
               </a:rPr>
-              <a:t>قابلية التنفيذ</a:t>
+              <a:t>نموذج العمل</a:t>
             </a:r>
             <a:endParaRPr lang="en-US" sz="1300" dirty="0"/>
           </a:p>
@@ -11721,8 +12792,8 @@
         </p:nvSpPr>
         <p:spPr>
           <a:xfrm>
-            <a:off x="6172200" y="1691640"/>
-            <a:ext cx="5562295" cy="502920"/>
+            <a:off x="457200" y="1600200"/>
+            <a:ext cx="11277295" cy="731520"/>
           </a:xfrm>
           <a:prstGeom prst="rect">
             <a:avLst/>
@@ -11738,17 +12809,17 @@
               <a:buNone/>
             </a:pPr>
             <a:r>
-              <a:rPr lang="en-US" sz="2100" b="1" dirty="0">
-                <a:solidFill>
-                  <a:srgbClr val="8E2F3C"/>
-                </a:solidFill>
-                <a:latin typeface="IBM Plex Sans Arabic" pitchFamily="34" charset="0"/>
-                <a:ea typeface="IBM Plex Sans Arabic" pitchFamily="34" charset="-122"/>
-                <a:cs typeface="IBM Plex Sans Arabic" pitchFamily="34" charset="-120"/>
-              </a:rPr>
-              <a:t>كيف يمكن تنفيذ الحل في الوقت الحالي؟</a:t>
-            </a:r>
-            <a:endParaRPr lang="en-US" sz="2100" dirty="0"/>
+              <a:rPr lang="en-US" sz="3400" b="1" dirty="0">
+                <a:solidFill>
+                  <a:srgbClr val="21141A"/>
+                </a:solidFill>
+                <a:latin typeface="IBM Plex Sans Arabic" pitchFamily="34" charset="0"/>
+                <a:ea typeface="IBM Plex Sans Arabic" pitchFamily="34" charset="-122"/>
+                <a:cs typeface="IBM Plex Sans Arabic" pitchFamily="34" charset="-120"/>
+              </a:rPr>
+              <a:t>ابدأ مجاناً، ثم ادفع لكل مورد</a:t>
+            </a:r>
+            <a:endParaRPr lang="en-US" sz="3400" dirty="0"/>
           </a:p>
         </p:txBody>
       </p:sp>
@@ -11760,12 +12831,12 @@
         </p:nvSpPr>
         <p:spPr>
           <a:xfrm>
-            <a:off x="6172200" y="2423160"/>
-            <a:ext cx="5562295" cy="1005840"/>
+            <a:off x="8188757" y="2606040"/>
+            <a:ext cx="3545738" cy="2606040"/>
           </a:xfrm>
           <a:prstGeom prst="roundRect">
             <a:avLst>
-              <a:gd name="adj" fmla="val 14545"/>
+              <a:gd name="adj" fmla="val 7018"/>
             </a:avLst>
           </a:prstGeom>
           <a:solidFill>
@@ -11779,31 +12850,9 @@
           </a:ln>
         </p:spPr>
       </p:sp>
-      <p:sp>
-        <p:nvSpPr>
-          <p:cNvPr id="24" name="Shape 19"/>
-          <p:cNvSpPr/>
-          <p:nvPr/>
-        </p:nvSpPr>
-        <p:spPr>
-          <a:xfrm>
-            <a:off x="10865815" y="2606040"/>
-            <a:ext cx="640080" cy="640080"/>
-          </a:xfrm>
-          <a:prstGeom prst="roundRect">
-            <a:avLst>
-              <a:gd name="adj" fmla="val 20000"/>
-            </a:avLst>
-          </a:prstGeom>
-          <a:solidFill>
-            <a:srgbClr val="F1E4DF"/>
-          </a:solidFill>
-          <a:ln/>
-        </p:spPr>
-      </p:sp>
       <p:pic>
         <p:nvPicPr>
-          <p:cNvPr id="25" name="Image 3" descr="/tmp/claude-0/-home-claude/750ff410-f4aa-5276-9360-1e19d018b112/scratchpad/c/assets/i-plug-br.png">    </p:cNvPr>
+          <p:cNvPr id="24" name="Image 3" descr="/tmp/claude-0/-home-claude/750ff410-f4aa-5276-9360-1e19d018b112/scratchpad/c/assets/i-gift-br.png">    </p:cNvPr>
           <p:cNvPicPr>
             <a:picLocks noChangeAspect="1"/>
           </p:cNvPicPr>
@@ -11817,8 +12866,8 @@
         </p:blipFill>
         <p:spPr>
           <a:xfrm>
-            <a:off x="10957255" y="2697480"/>
-            <a:ext cx="457200" cy="457200"/>
+            <a:off x="9687306" y="2880360"/>
+            <a:ext cx="548640" cy="548640"/>
           </a:xfrm>
           <a:prstGeom prst="rect">
             <a:avLst/>
@@ -11827,14 +12876,53 @@
       </p:pic>
       <p:sp>
         <p:nvSpPr>
+          <p:cNvPr id="25" name="Text 19"/>
+          <p:cNvSpPr txBox="1"/>
+          <p:nvPr/>
+        </p:nvSpPr>
+        <p:spPr>
+          <a:xfrm>
+            <a:off x="8188757" y="3520440"/>
+            <a:ext cx="3545738" cy="365760"/>
+          </a:xfrm>
+          <a:prstGeom prst="rect">
+            <a:avLst/>
+          </a:prstGeom>
+          <a:noFill/>
+          <a:ln/>
+        </p:spPr>
+        <p:txBody>
+          <a:bodyPr wrap="square" lIns="0" tIns="0" rIns="0" bIns="0" rtlCol="0" anchor="ctr"/>
+          <a:lstStyle/>
+          <a:p>
+            <a:pPr rtl="1" algn="ctr" indent="0" marL="0">
+              <a:buNone/>
+            </a:pPr>
+            <a:r>
+              <a:rPr lang="en-US" sz="1700" b="1" dirty="0">
+                <a:solidFill>
+                  <a:srgbClr val="7F6C72"/>
+                </a:solidFill>
+                <a:latin typeface="IBM Plex Sans Arabic" pitchFamily="34" charset="0"/>
+                <a:ea typeface="IBM Plex Sans Arabic" pitchFamily="34" charset="-122"/>
+                <a:cs typeface="IBM Plex Sans Arabic" pitchFamily="34" charset="-120"/>
+              </a:rPr>
+              <a:t>الفحص الأول</a:t>
+            </a:r>
+            <a:endParaRPr lang="en-US" sz="1700" dirty="0"/>
+          </a:p>
+        </p:txBody>
+      </p:sp>
+      <p:sp>
+        <p:nvSpPr>
           <p:cNvPr id="26" name="Text 20"/>
           <p:cNvSpPr txBox="1"/>
           <p:nvPr/>
         </p:nvSpPr>
         <p:spPr>
           <a:xfrm>
-            <a:off x="6446520" y="2423160"/>
-            <a:ext cx="4236415" cy="1005840"/>
+            <a:off x="8188757" y="3886200"/>
+            <a:ext cx="3545738" cy="777240"/>
           </a:xfrm>
           <a:prstGeom prst="rect">
             <a:avLst/>
@@ -11846,10 +12934,46 @@
           <a:bodyPr wrap="square" lIns="0" tIns="0" rIns="0" bIns="0" rtlCol="0" anchor="ctr"/>
           <a:lstStyle/>
           <a:p>
-            <a:pPr rtl="1" algn="r" indent="0" marL="0">
-              <a:lnSpc>
-                <a:spcPct val="110000"/>
-              </a:lnSpc>
+            <a:pPr rtl="1" algn="ctr" indent="0" marL="0">
+              <a:buNone/>
+            </a:pPr>
+            <a:r>
+              <a:rPr lang="en-US" sz="4000" b="1" dirty="0">
+                <a:solidFill>
+                  <a:srgbClr val="8E2F3C"/>
+                </a:solidFill>
+                <a:latin typeface="IBM Plex Sans Arabic" pitchFamily="34" charset="0"/>
+                <a:ea typeface="IBM Plex Sans Arabic" pitchFamily="34" charset="-122"/>
+                <a:cs typeface="IBM Plex Sans Arabic" pitchFamily="34" charset="-120"/>
+              </a:rPr>
+              <a:t>مجاني</a:t>
+            </a:r>
+            <a:endParaRPr lang="en-US" sz="4000" dirty="0"/>
+          </a:p>
+        </p:txBody>
+      </p:sp>
+      <p:sp>
+        <p:nvSpPr>
+          <p:cNvPr id="27" name="Text 21"/>
+          <p:cNvSpPr txBox="1"/>
+          <p:nvPr/>
+        </p:nvSpPr>
+        <p:spPr>
+          <a:xfrm>
+            <a:off x="8188757" y="4663440"/>
+            <a:ext cx="3545738" cy="365760"/>
+          </a:xfrm>
+          <a:prstGeom prst="rect">
+            <a:avLst/>
+          </a:prstGeom>
+          <a:noFill/>
+          <a:ln/>
+        </p:spPr>
+        <p:txBody>
+          <a:bodyPr wrap="square" lIns="0" tIns="0" rIns="0" bIns="0" rtlCol="0" anchor="ctr"/>
+          <a:lstStyle/>
+          <a:p>
+            <a:pPr rtl="1" algn="ctr" indent="0" marL="0">
               <a:buNone/>
             </a:pPr>
             <a:r>
@@ -11861,7 +12985,7 @@
                 <a:ea typeface="IBM Plex Sans Arabic" pitchFamily="34" charset="-122"/>
                 <a:cs typeface="IBM Plex Sans Arabic" pitchFamily="34" charset="-120"/>
               </a:rPr>
-              <a:t>ربط المنصة بحساب الشركة السحابي عبر API</a:t>
+              <a:t>تقرير الهدر كاملاً</a:t>
             </a:r>
             <a:endParaRPr lang="en-US" sz="1600" dirty="0"/>
           </a:p>
@@ -11869,56 +12993,29 @@
       </p:sp>
       <p:sp>
         <p:nvSpPr>
-          <p:cNvPr id="27" name="Shape 21"/>
-          <p:cNvSpPr/>
-          <p:nvPr/>
-        </p:nvSpPr>
-        <p:spPr>
-          <a:xfrm>
-            <a:off x="6172200" y="3611880"/>
-            <a:ext cx="5562295" cy="1005840"/>
+          <p:cNvPr id="28" name="Shape 22"/>
+          <p:cNvSpPr/>
+          <p:nvPr/>
+        </p:nvSpPr>
+        <p:spPr>
+          <a:xfrm>
+            <a:off x="4322978" y="2606040"/>
+            <a:ext cx="3545738" cy="2606040"/>
           </a:xfrm>
           <a:prstGeom prst="roundRect">
             <a:avLst>
-              <a:gd name="adj" fmla="val 14545"/>
+              <a:gd name="adj" fmla="val 7018"/>
             </a:avLst>
           </a:prstGeom>
           <a:solidFill>
-            <a:srgbClr val="FFFBF8"/>
-          </a:solidFill>
-          <a:ln w="9525">
-            <a:solidFill>
-              <a:srgbClr val="E3D5CC"/>
-            </a:solidFill>
-            <a:prstDash val="solid"/>
-          </a:ln>
-        </p:spPr>
-      </p:sp>
-      <p:sp>
-        <p:nvSpPr>
-          <p:cNvPr id="28" name="Shape 22"/>
-          <p:cNvSpPr/>
-          <p:nvPr/>
-        </p:nvSpPr>
-        <p:spPr>
-          <a:xfrm>
-            <a:off x="10865815" y="3794760"/>
-            <a:ext cx="640080" cy="640080"/>
-          </a:xfrm>
-          <a:prstGeom prst="roundRect">
-            <a:avLst>
-              <a:gd name="adj" fmla="val 20000"/>
-            </a:avLst>
-          </a:prstGeom>
-          <a:solidFill>
-            <a:srgbClr val="F1E4DF"/>
+            <a:srgbClr val="8E2F3C"/>
           </a:solidFill>
           <a:ln/>
         </p:spPr>
       </p:sp>
       <p:pic>
         <p:nvPicPr>
-          <p:cNvPr id="29" name="Image 4" descr="/tmp/claude-0/-home-claude/750ff410-f4aa-5276-9360-1e19d018b112/scratchpad/c/assets/i-bot-br.png">    </p:cNvPr>
+          <p:cNvPr id="29" name="Image 4" descr="/tmp/claude-0/-home-claude/750ff410-f4aa-5276-9360-1e19d018b112/scratchpad/c/assets/i-gauge-cr.png">    </p:cNvPr>
           <p:cNvPicPr>
             <a:picLocks noChangeAspect="1"/>
           </p:cNvPicPr>
@@ -11932,8 +13029,8 @@
         </p:blipFill>
         <p:spPr>
           <a:xfrm>
-            <a:off x="10957255" y="3886200"/>
-            <a:ext cx="457200" cy="457200"/>
+            <a:off x="5821528" y="2880360"/>
+            <a:ext cx="548640" cy="548640"/>
           </a:xfrm>
           <a:prstGeom prst="rect">
             <a:avLst/>
@@ -11948,8 +13045,8 @@
         </p:nvSpPr>
         <p:spPr>
           <a:xfrm>
-            <a:off x="6446520" y="3611880"/>
-            <a:ext cx="4236415" cy="1005840"/>
+            <a:off x="4322978" y="3520440"/>
+            <a:ext cx="3545738" cy="365760"/>
           </a:xfrm>
           <a:prstGeom prst="rect">
             <a:avLst/>
@@ -11961,22 +13058,97 @@
           <a:bodyPr wrap="square" lIns="0" tIns="0" rIns="0" bIns="0" rtlCol="0" anchor="ctr"/>
           <a:lstStyle/>
           <a:p>
-            <a:pPr rtl="1" algn="r" indent="0" marL="0">
-              <a:lnSpc>
-                <a:spcPct val="110000"/>
-              </a:lnSpc>
+            <a:pPr rtl="1" algn="ctr" indent="0" marL="0">
+              <a:buNone/>
+            </a:pPr>
+            <a:r>
+              <a:rPr lang="en-US" sz="1700" b="1" dirty="0">
+                <a:solidFill>
+                  <a:srgbClr val="F1E4DF"/>
+                </a:solidFill>
+                <a:latin typeface="IBM Plex Sans Arabic" pitchFamily="34" charset="0"/>
+                <a:ea typeface="IBM Plex Sans Arabic" pitchFamily="34" charset="-122"/>
+                <a:cs typeface="IBM Plex Sans Arabic" pitchFamily="34" charset="-120"/>
+              </a:rPr>
+              <a:t>حسب الاستخدام</a:t>
+            </a:r>
+            <a:endParaRPr lang="en-US" sz="1700" dirty="0"/>
+          </a:p>
+        </p:txBody>
+      </p:sp>
+      <p:sp>
+        <p:nvSpPr>
+          <p:cNvPr id="31" name="Text 24"/>
+          <p:cNvSpPr txBox="1"/>
+          <p:nvPr/>
+        </p:nvSpPr>
+        <p:spPr>
+          <a:xfrm>
+            <a:off x="4322978" y="3886200"/>
+            <a:ext cx="3545738" cy="777240"/>
+          </a:xfrm>
+          <a:prstGeom prst="rect">
+            <a:avLst/>
+          </a:prstGeom>
+          <a:noFill/>
+          <a:ln/>
+        </p:spPr>
+        <p:txBody>
+          <a:bodyPr wrap="square" lIns="0" tIns="0" rIns="0" bIns="0" rtlCol="0" anchor="ctr"/>
+          <a:lstStyle/>
+          <a:p>
+            <a:pPr rtl="1" algn="ctr" indent="0" marL="0">
+              <a:buNone/>
+            </a:pPr>
+            <a:r>
+              <a:rPr lang="en-US" sz="4000" b="1" dirty="0">
+                <a:solidFill>
+                  <a:srgbClr val="FBF6EE"/>
+                </a:solidFill>
+                <a:latin typeface="IBM Plex Sans Arabic" pitchFamily="34" charset="0"/>
+                <a:ea typeface="IBM Plex Sans Arabic" pitchFamily="34" charset="-122"/>
+                <a:cs typeface="IBM Plex Sans Arabic" pitchFamily="34" charset="-120"/>
+              </a:rPr>
+              <a:t>من 15 ريال</a:t>
+            </a:r>
+            <a:endParaRPr lang="en-US" sz="4000" dirty="0"/>
+          </a:p>
+        </p:txBody>
+      </p:sp>
+      <p:sp>
+        <p:nvSpPr>
+          <p:cNvPr id="32" name="Text 25"/>
+          <p:cNvSpPr txBox="1"/>
+          <p:nvPr/>
+        </p:nvSpPr>
+        <p:spPr>
+          <a:xfrm>
+            <a:off x="4322978" y="4663440"/>
+            <a:ext cx="3545738" cy="365760"/>
+          </a:xfrm>
+          <a:prstGeom prst="rect">
+            <a:avLst/>
+          </a:prstGeom>
+          <a:noFill/>
+          <a:ln/>
+        </p:spPr>
+        <p:txBody>
+          <a:bodyPr wrap="square" lIns="0" tIns="0" rIns="0" bIns="0" rtlCol="0" anchor="ctr"/>
+          <a:lstStyle/>
+          <a:p>
+            <a:pPr rtl="1" algn="ctr" indent="0" marL="0">
               <a:buNone/>
             </a:pPr>
             <a:r>
               <a:rPr lang="en-US" sz="1600" dirty="0">
                 <a:solidFill>
-                  <a:srgbClr val="21141A"/>
-                </a:solidFill>
-                <a:latin typeface="IBM Plex Sans Arabic" pitchFamily="34" charset="0"/>
-                <a:ea typeface="IBM Plex Sans Arabic" pitchFamily="34" charset="-122"/>
-                <a:cs typeface="IBM Plex Sans Arabic" pitchFamily="34" charset="-120"/>
-              </a:rPr>
-              <a:t>نموذج ذكاء اصطناعي يمسح البنية فوراً ويطابقها مع أفضل الممارسات ويحلل الأحمال</a:t>
+                  <a:srgbClr val="FBF6EE"/>
+                </a:solidFill>
+                <a:latin typeface="IBM Plex Sans Arabic" pitchFamily="34" charset="0"/>
+                <a:ea typeface="IBM Plex Sans Arabic" pitchFamily="34" charset="-122"/>
+                <a:cs typeface="IBM Plex Sans Arabic" pitchFamily="34" charset="-120"/>
+              </a:rPr>
+              <a:t>لكل مورد شهرياً</a:t>
             </a:r>
             <a:endParaRPr lang="en-US" sz="1600" dirty="0"/>
           </a:p>
@@ -11984,18 +13156,18 @@
       </p:sp>
       <p:sp>
         <p:nvSpPr>
-          <p:cNvPr id="31" name="Shape 24"/>
-          <p:cNvSpPr/>
-          <p:nvPr/>
-        </p:nvSpPr>
-        <p:spPr>
-          <a:xfrm>
-            <a:off x="6172200" y="4800600"/>
-            <a:ext cx="5562295" cy="1005840"/>
+          <p:cNvPr id="33" name="Shape 26"/>
+          <p:cNvSpPr/>
+          <p:nvPr/>
+        </p:nvSpPr>
+        <p:spPr>
+          <a:xfrm>
+            <a:off x="457200" y="2606040"/>
+            <a:ext cx="3545738" cy="2606040"/>
           </a:xfrm>
           <a:prstGeom prst="roundRect">
             <a:avLst>
-              <a:gd name="adj" fmla="val 14545"/>
+              <a:gd name="adj" fmla="val 7018"/>
             </a:avLst>
           </a:prstGeom>
           <a:solidFill>
@@ -12009,31 +13181,9 @@
           </a:ln>
         </p:spPr>
       </p:sp>
-      <p:sp>
-        <p:nvSpPr>
-          <p:cNvPr id="32" name="Shape 25"/>
-          <p:cNvSpPr/>
-          <p:nvPr/>
-        </p:nvSpPr>
-        <p:spPr>
-          <a:xfrm>
-            <a:off x="10865815" y="4983480"/>
-            <a:ext cx="640080" cy="640080"/>
-          </a:xfrm>
-          <a:prstGeom prst="roundRect">
-            <a:avLst>
-              <a:gd name="adj" fmla="val 20000"/>
-            </a:avLst>
-          </a:prstGeom>
-          <a:solidFill>
-            <a:srgbClr val="F1E4DF"/>
-          </a:solidFill>
-          <a:ln/>
-        </p:spPr>
-      </p:sp>
       <p:pic>
         <p:nvPicPr>
-          <p:cNvPr id="33" name="Image 5" descr="/tmp/claude-0/-home-claude/750ff410-f4aa-5276-9360-1e19d018b112/scratchpad/c/assets/i-check-br.png">    </p:cNvPr>
+          <p:cNvPr id="34" name="Image 5" descr="/tmp/claude-0/-home-claude/750ff410-f4aa-5276-9360-1e19d018b112/scratchpad/c/assets/i-handshake-br.png">    </p:cNvPr>
           <p:cNvPicPr>
             <a:picLocks noChangeAspect="1"/>
           </p:cNvPicPr>
@@ -12047,8 +13197,8 @@
         </p:blipFill>
         <p:spPr>
           <a:xfrm>
-            <a:off x="10957255" y="5074920"/>
-            <a:ext cx="457200" cy="457200"/>
+            <a:off x="1955749" y="2880360"/>
+            <a:ext cx="548640" cy="548640"/>
           </a:xfrm>
           <a:prstGeom prst="rect">
             <a:avLst/>
@@ -12057,14 +13207,14 @@
       </p:pic>
       <p:sp>
         <p:nvSpPr>
-          <p:cNvPr id="34" name="Text 26"/>
-          <p:cNvSpPr txBox="1"/>
-          <p:nvPr/>
-        </p:nvSpPr>
-        <p:spPr>
-          <a:xfrm>
-            <a:off x="6446520" y="4800600"/>
-            <a:ext cx="4236415" cy="1005840"/>
+          <p:cNvPr id="35" name="Text 27"/>
+          <p:cNvSpPr txBox="1"/>
+          <p:nvPr/>
+        </p:nvSpPr>
+        <p:spPr>
+          <a:xfrm>
+            <a:off x="457200" y="3520440"/>
+            <a:ext cx="3545738" cy="365760"/>
           </a:xfrm>
           <a:prstGeom prst="rect">
             <a:avLst/>
@@ -12076,10 +13226,85 @@
           <a:bodyPr wrap="square" lIns="0" tIns="0" rIns="0" bIns="0" rtlCol="0" anchor="ctr"/>
           <a:lstStyle/>
           <a:p>
-            <a:pPr rtl="1" algn="r" indent="0" marL="0">
-              <a:lnSpc>
-                <a:spcPct val="110000"/>
-              </a:lnSpc>
+            <a:pPr rtl="1" algn="ctr" indent="0" marL="0">
+              <a:buNone/>
+            </a:pPr>
+            <a:r>
+              <a:rPr lang="en-US" sz="1700" b="1" dirty="0">
+                <a:solidFill>
+                  <a:srgbClr val="7F6C72"/>
+                </a:solidFill>
+                <a:latin typeface="IBM Plex Sans Arabic" pitchFamily="34" charset="0"/>
+                <a:ea typeface="IBM Plex Sans Arabic" pitchFamily="34" charset="-122"/>
+                <a:cs typeface="IBM Plex Sans Arabic" pitchFamily="34" charset="-120"/>
+              </a:rPr>
+              <a:t>استشارات FinOps</a:t>
+            </a:r>
+            <a:endParaRPr lang="en-US" sz="1700" dirty="0"/>
+          </a:p>
+        </p:txBody>
+      </p:sp>
+      <p:sp>
+        <p:nvSpPr>
+          <p:cNvPr id="36" name="Text 28"/>
+          <p:cNvSpPr txBox="1"/>
+          <p:nvPr/>
+        </p:nvSpPr>
+        <p:spPr>
+          <a:xfrm>
+            <a:off x="457200" y="3886200"/>
+            <a:ext cx="3545738" cy="777240"/>
+          </a:xfrm>
+          <a:prstGeom prst="rect">
+            <a:avLst/>
+          </a:prstGeom>
+          <a:noFill/>
+          <a:ln/>
+        </p:spPr>
+        <p:txBody>
+          <a:bodyPr wrap="square" lIns="0" tIns="0" rIns="0" bIns="0" rtlCol="0" anchor="ctr"/>
+          <a:lstStyle/>
+          <a:p>
+            <a:pPr rtl="1" algn="ctr" indent="0" marL="0">
+              <a:buNone/>
+            </a:pPr>
+            <a:r>
+              <a:rPr lang="en-US" sz="4000" b="1" dirty="0">
+                <a:solidFill>
+                  <a:srgbClr val="8E2F3C"/>
+                </a:solidFill>
+                <a:latin typeface="IBM Plex Sans Arabic" pitchFamily="34" charset="0"/>
+                <a:ea typeface="IBM Plex Sans Arabic" pitchFamily="34" charset="-122"/>
+                <a:cs typeface="IBM Plex Sans Arabic" pitchFamily="34" charset="-120"/>
+              </a:rPr>
+              <a:t>حسب المشروع</a:t>
+            </a:r>
+            <a:endParaRPr lang="en-US" sz="4000" dirty="0"/>
+          </a:p>
+        </p:txBody>
+      </p:sp>
+      <p:sp>
+        <p:nvSpPr>
+          <p:cNvPr id="37" name="Text 29"/>
+          <p:cNvSpPr txBox="1"/>
+          <p:nvPr/>
+        </p:nvSpPr>
+        <p:spPr>
+          <a:xfrm>
+            <a:off x="457200" y="4663440"/>
+            <a:ext cx="3545738" cy="365760"/>
+          </a:xfrm>
+          <a:prstGeom prst="rect">
+            <a:avLst/>
+          </a:prstGeom>
+          <a:noFill/>
+          <a:ln/>
+        </p:spPr>
+        <p:txBody>
+          <a:bodyPr wrap="square" lIns="0" tIns="0" rIns="0" bIns="0" rtlCol="0" anchor="ctr"/>
+          <a:lstStyle/>
+          <a:p>
+            <a:pPr rtl="1" algn="ctr" indent="0" marL="0">
               <a:buNone/>
             </a:pPr>
             <a:r>
@@ -12091,7 +13316,7 @@
                 <a:ea typeface="IBM Plex Sans Arabic" pitchFamily="34" charset="-122"/>
                 <a:cs typeface="IBM Plex Sans Arabic" pitchFamily="34" charset="-120"/>
               </a:rPr>
-              <a:t>زر تفاعلي بضغطة واحدة لإيقاف المورد أو تقليصه عبر API</a:t>
+              <a:t>مهندس FinOps مخصص</a:t>
             </a:r>
             <a:endParaRPr lang="en-US" sz="1600" dirty="0"/>
           </a:p>
@@ -12099,36 +13324,14 @@
       </p:sp>
       <p:sp>
         <p:nvSpPr>
-          <p:cNvPr id="35" name="Shape 27"/>
-          <p:cNvSpPr/>
-          <p:nvPr/>
-        </p:nvSpPr>
-        <p:spPr>
-          <a:xfrm>
-            <a:off x="457200" y="1691640"/>
-            <a:ext cx="5257800" cy="4114800"/>
-          </a:xfrm>
-          <a:prstGeom prst="roundRect">
-            <a:avLst>
-              <a:gd name="adj" fmla="val 4444"/>
-            </a:avLst>
-          </a:prstGeom>
-          <a:solidFill>
-            <a:srgbClr val="8E2F3C"/>
-          </a:solidFill>
-          <a:ln/>
-        </p:spPr>
-      </p:sp>
-      <p:sp>
-        <p:nvSpPr>
-          <p:cNvPr id="36" name="Text 28"/>
-          <p:cNvSpPr txBox="1"/>
-          <p:nvPr/>
-        </p:nvSpPr>
-        <p:spPr>
-          <a:xfrm>
-            <a:off x="777240" y="1920240"/>
-            <a:ext cx="4617720" cy="502920"/>
+          <p:cNvPr id="38" name="Text 30"/>
+          <p:cNvSpPr txBox="1"/>
+          <p:nvPr/>
+        </p:nvSpPr>
+        <p:spPr>
+          <a:xfrm>
+            <a:off x="457200" y="5486400"/>
+            <a:ext cx="11277295" cy="411480"/>
           </a:xfrm>
           <a:prstGeom prst="rect">
             <a:avLst/>
@@ -12140,274 +13343,19 @@
           <a:bodyPr wrap="square" lIns="0" tIns="0" rIns="0" bIns="0" rtlCol="0" anchor="ctr"/>
           <a:lstStyle/>
           <a:p>
-            <a:pPr rtl="1" algn="r" indent="0" marL="0">
-              <a:buNone/>
-            </a:pPr>
-            <a:r>
-              <a:rPr lang="en-US" sz="2100" b="1" dirty="0">
-                <a:solidFill>
-                  <a:srgbClr val="FBF6EE"/>
-                </a:solidFill>
-                <a:latin typeface="IBM Plex Sans Arabic" pitchFamily="34" charset="0"/>
-                <a:ea typeface="IBM Plex Sans Arabic" pitchFamily="34" charset="-122"/>
-                <a:cs typeface="IBM Plex Sans Arabic" pitchFamily="34" charset="-120"/>
-              </a:rPr>
-              <a:t>ما التقنيات المتوفرة لتنفيذه؟</a:t>
-            </a:r>
-            <a:endParaRPr lang="en-US" sz="2100" dirty="0"/>
-          </a:p>
-        </p:txBody>
-      </p:sp>
-      <p:sp>
-        <p:nvSpPr>
-          <p:cNvPr id="37" name="Shape 29"/>
-          <p:cNvSpPr/>
-          <p:nvPr/>
-        </p:nvSpPr>
-        <p:spPr>
-          <a:xfrm>
-            <a:off x="777240" y="2651760"/>
-            <a:ext cx="4617720" cy="804672"/>
-          </a:xfrm>
-          <a:prstGeom prst="roundRect">
-            <a:avLst>
-              <a:gd name="adj" fmla="val 15909"/>
-            </a:avLst>
-          </a:prstGeom>
-          <a:solidFill>
-            <a:srgbClr val="FBF6EE"/>
-          </a:solidFill>
-          <a:ln/>
-        </p:spPr>
-      </p:sp>
-      <p:pic>
-        <p:nvPicPr>
-          <p:cNvPr id="38" name="Image 6" descr="/tmp/claude-0/-home-claude/750ff410-f4aa-5276-9360-1e19d018b112/scratchpad/c/assets/i-cloud-br.png">    </p:cNvPr>
-          <p:cNvPicPr>
-            <a:picLocks noChangeAspect="1"/>
-          </p:cNvPicPr>
-          <p:nvPr/>
-        </p:nvPicPr>
-        <p:blipFill>
-          <a:blip r:embed="rId7"/>
-          <a:stretch>
-            <a:fillRect/>
-          </a:stretch>
-        </p:blipFill>
-        <p:spPr>
-          <a:xfrm>
-            <a:off x="4754880" y="2825496"/>
-            <a:ext cx="457200" cy="457200"/>
-          </a:xfrm>
-          <a:prstGeom prst="rect">
-            <a:avLst/>
-          </a:prstGeom>
-        </p:spPr>
-      </p:pic>
-      <p:sp>
-        <p:nvSpPr>
-          <p:cNvPr id="39" name="Text 30"/>
-          <p:cNvSpPr txBox="1"/>
-          <p:nvPr/>
-        </p:nvSpPr>
-        <p:spPr>
-          <a:xfrm>
-            <a:off x="1005840" y="2651760"/>
-            <a:ext cx="3657600" cy="804672"/>
-          </a:xfrm>
-          <a:prstGeom prst="rect">
-            <a:avLst/>
-          </a:prstGeom>
-          <a:noFill/>
-          <a:ln/>
-        </p:spPr>
-        <p:txBody>
-          <a:bodyPr wrap="square" lIns="0" tIns="0" rIns="0" bIns="0" rtlCol="0" anchor="ctr"/>
-          <a:lstStyle/>
-          <a:p>
-            <a:pPr rtl="1" algn="r" indent="0" marL="0">
+            <a:pPr rtl="1" algn="ctr" indent="0" marL="0">
               <a:buNone/>
             </a:pPr>
             <a:r>
               <a:rPr lang="en-US" sz="1800" b="1" dirty="0">
                 <a:solidFill>
-                  <a:srgbClr val="21141A"/>
-                </a:solidFill>
-                <a:latin typeface="IBM Plex Sans Arabic" pitchFamily="34" charset="0"/>
-                <a:ea typeface="IBM Plex Sans Arabic" pitchFamily="34" charset="-122"/>
-                <a:cs typeface="IBM Plex Sans Arabic" pitchFamily="34" charset="-120"/>
-              </a:rPr>
-              <a:t>Cloud APIs</a:t>
-            </a:r>
-            <a:endParaRPr lang="en-US" sz="1800" dirty="0"/>
-          </a:p>
-        </p:txBody>
-      </p:sp>
-      <p:sp>
-        <p:nvSpPr>
-          <p:cNvPr id="40" name="Shape 31"/>
-          <p:cNvSpPr/>
-          <p:nvPr/>
-        </p:nvSpPr>
-        <p:spPr>
-          <a:xfrm>
-            <a:off x="777240" y="3639312"/>
-            <a:ext cx="4617720" cy="804672"/>
-          </a:xfrm>
-          <a:prstGeom prst="roundRect">
-            <a:avLst>
-              <a:gd name="adj" fmla="val 15909"/>
-            </a:avLst>
-          </a:prstGeom>
-          <a:solidFill>
-            <a:srgbClr val="FBF6EE"/>
-          </a:solidFill>
-          <a:ln/>
-        </p:spPr>
-      </p:sp>
-      <p:pic>
-        <p:nvPicPr>
-          <p:cNvPr id="41" name="Image 7" descr="/tmp/claude-0/-home-claude/750ff410-f4aa-5276-9360-1e19d018b112/scratchpad/c/assets/i-brain-br.png">    </p:cNvPr>
-          <p:cNvPicPr>
-            <a:picLocks noChangeAspect="1"/>
-          </p:cNvPicPr>
-          <p:nvPr/>
-        </p:nvPicPr>
-        <p:blipFill>
-          <a:blip r:embed="rId8"/>
-          <a:stretch>
-            <a:fillRect/>
-          </a:stretch>
-        </p:blipFill>
-        <p:spPr>
-          <a:xfrm>
-            <a:off x="4754880" y="3813048"/>
-            <a:ext cx="457200" cy="457200"/>
-          </a:xfrm>
-          <a:prstGeom prst="rect">
-            <a:avLst/>
-          </a:prstGeom>
-        </p:spPr>
-      </p:pic>
-      <p:sp>
-        <p:nvSpPr>
-          <p:cNvPr id="42" name="Text 32"/>
-          <p:cNvSpPr txBox="1"/>
-          <p:nvPr/>
-        </p:nvSpPr>
-        <p:spPr>
-          <a:xfrm>
-            <a:off x="1005840" y="3639312"/>
-            <a:ext cx="3657600" cy="804672"/>
-          </a:xfrm>
-          <a:prstGeom prst="rect">
-            <a:avLst/>
-          </a:prstGeom>
-          <a:noFill/>
-          <a:ln/>
-        </p:spPr>
-        <p:txBody>
-          <a:bodyPr wrap="square" lIns="0" tIns="0" rIns="0" bIns="0" rtlCol="0" anchor="ctr"/>
-          <a:lstStyle/>
-          <a:p>
-            <a:pPr rtl="1" algn="r" indent="0" marL="0">
-              <a:buNone/>
-            </a:pPr>
-            <a:r>
-              <a:rPr lang="en-US" sz="1800" b="1" dirty="0">
-                <a:solidFill>
-                  <a:srgbClr val="21141A"/>
-                </a:solidFill>
-                <a:latin typeface="IBM Plex Sans Arabic" pitchFamily="34" charset="0"/>
-                <a:ea typeface="IBM Plex Sans Arabic" pitchFamily="34" charset="-122"/>
-                <a:cs typeface="IBM Plex Sans Arabic" pitchFamily="34" charset="-120"/>
-              </a:rPr>
-              <a:t>AI Models</a:t>
-            </a:r>
-            <a:endParaRPr lang="en-US" sz="1800" dirty="0"/>
-          </a:p>
-        </p:txBody>
-      </p:sp>
-      <p:sp>
-        <p:nvSpPr>
-          <p:cNvPr id="43" name="Shape 33"/>
-          <p:cNvSpPr/>
-          <p:nvPr/>
-        </p:nvSpPr>
-        <p:spPr>
-          <a:xfrm>
-            <a:off x="777240" y="4626864"/>
-            <a:ext cx="4617720" cy="804672"/>
-          </a:xfrm>
-          <a:prstGeom prst="roundRect">
-            <a:avLst>
-              <a:gd name="adj" fmla="val 15909"/>
-            </a:avLst>
-          </a:prstGeom>
-          <a:solidFill>
-            <a:srgbClr val="FBF6EE"/>
-          </a:solidFill>
-          <a:ln/>
-        </p:spPr>
-      </p:sp>
-      <p:pic>
-        <p:nvPicPr>
-          <p:cNvPr id="44" name="Image 8" descr="/tmp/claude-0/-home-claude/750ff410-f4aa-5276-9360-1e19d018b112/scratchpad/c/assets/i-code-br.png">    </p:cNvPr>
-          <p:cNvPicPr>
-            <a:picLocks noChangeAspect="1"/>
-          </p:cNvPicPr>
-          <p:nvPr/>
-        </p:nvPicPr>
-        <p:blipFill>
-          <a:blip r:embed="rId9"/>
-          <a:stretch>
-            <a:fillRect/>
-          </a:stretch>
-        </p:blipFill>
-        <p:spPr>
-          <a:xfrm>
-            <a:off x="4754880" y="4800600"/>
-            <a:ext cx="457200" cy="457200"/>
-          </a:xfrm>
-          <a:prstGeom prst="rect">
-            <a:avLst/>
-          </a:prstGeom>
-        </p:spPr>
-      </p:pic>
-      <p:sp>
-        <p:nvSpPr>
-          <p:cNvPr id="45" name="Text 34"/>
-          <p:cNvSpPr txBox="1"/>
-          <p:nvPr/>
-        </p:nvSpPr>
-        <p:spPr>
-          <a:xfrm>
-            <a:off x="1005840" y="4626864"/>
-            <a:ext cx="3657600" cy="804672"/>
-          </a:xfrm>
-          <a:prstGeom prst="rect">
-            <a:avLst/>
-          </a:prstGeom>
-          <a:noFill/>
-          <a:ln/>
-        </p:spPr>
-        <p:txBody>
-          <a:bodyPr wrap="square" lIns="0" tIns="0" rIns="0" bIns="0" rtlCol="0" anchor="ctr"/>
-          <a:lstStyle/>
-          <a:p>
-            <a:pPr rtl="1" algn="r" indent="0" marL="0">
-              <a:buNone/>
-            </a:pPr>
-            <a:r>
-              <a:rPr lang="en-US" sz="1800" b="1" dirty="0">
-                <a:solidFill>
-                  <a:srgbClr val="21141A"/>
-                </a:solidFill>
-                <a:latin typeface="IBM Plex Sans Arabic" pitchFamily="34" charset="0"/>
-                <a:ea typeface="IBM Plex Sans Arabic" pitchFamily="34" charset="-122"/>
-                <a:cs typeface="IBM Plex Sans Arabic" pitchFamily="34" charset="-120"/>
-              </a:rPr>
-              <a:t>أدوات تطوير الواجهات والمواقع</a:t>
+                  <a:srgbClr val="8E2F3C"/>
+                </a:solidFill>
+                <a:latin typeface="IBM Plex Sans Arabic" pitchFamily="34" charset="0"/>
+                <a:ea typeface="IBM Plex Sans Arabic" pitchFamily="34" charset="-122"/>
+                <a:cs typeface="IBM Plex Sans Arabic" pitchFamily="34" charset="-120"/>
+              </a:rPr>
+              <a:t>بلا اشتراك ثابت، وبسقف شهري تحدده أنت</a:t>
             </a:r>
             <a:endParaRPr lang="en-US" sz="1800" dirty="0"/>
           </a:p>
@@ -12827,7 +13775,7 @@
                 <a:ea typeface="IBM Plex Sans Arabic" pitchFamily="34" charset="-122"/>
                 <a:cs typeface="IBM Plex Sans Arabic" pitchFamily="34" charset="-120"/>
               </a:rPr>
-              <a:t>النموذج الأولي</a:t>
+              <a:t>قابلية التنفيذ</a:t>
             </a:r>
             <a:endParaRPr lang="en-US" sz="1300" dirty="0"/>
           </a:p>
@@ -12943,8 +13891,8 @@
         </p:nvSpPr>
         <p:spPr>
           <a:xfrm>
-            <a:off x="457200" y="1600200"/>
-            <a:ext cx="11277295" cy="731520"/>
+            <a:off x="6172200" y="1691640"/>
+            <a:ext cx="5562295" cy="502920"/>
           </a:xfrm>
           <a:prstGeom prst="rect">
             <a:avLst/>
@@ -12960,23 +13908,72 @@
               <a:buNone/>
             </a:pPr>
             <a:r>
-              <a:rPr lang="en-US" sz="3400" b="1" dirty="0">
-                <a:solidFill>
-                  <a:srgbClr val="21141A"/>
-                </a:solidFill>
-                <a:latin typeface="IBM Plex Sans Arabic" pitchFamily="34" charset="0"/>
-                <a:ea typeface="IBM Plex Sans Arabic" pitchFamily="34" charset="-122"/>
-                <a:cs typeface="IBM Plex Sans Arabic" pitchFamily="34" charset="-120"/>
-              </a:rPr>
-              <a:t>يعمل الآن، جرّبه بنفسك</a:t>
-            </a:r>
-            <a:endParaRPr lang="en-US" sz="3400" dirty="0"/>
-          </a:p>
-        </p:txBody>
+              <a:rPr lang="en-US" sz="2100" b="1" dirty="0">
+                <a:solidFill>
+                  <a:srgbClr val="8E2F3C"/>
+                </a:solidFill>
+                <a:latin typeface="IBM Plex Sans Arabic" pitchFamily="34" charset="0"/>
+                <a:ea typeface="IBM Plex Sans Arabic" pitchFamily="34" charset="-122"/>
+                <a:cs typeface="IBM Plex Sans Arabic" pitchFamily="34" charset="-120"/>
+              </a:rPr>
+              <a:t>كيف يمكن تنفيذ الحل في الوقت الحالي؟</a:t>
+            </a:r>
+            <a:endParaRPr lang="en-US" sz="2100" dirty="0"/>
+          </a:p>
+        </p:txBody>
+      </p:sp>
+      <p:sp>
+        <p:nvSpPr>
+          <p:cNvPr id="23" name="Shape 18"/>
+          <p:cNvSpPr/>
+          <p:nvPr/>
+        </p:nvSpPr>
+        <p:spPr>
+          <a:xfrm>
+            <a:off x="6172200" y="2423160"/>
+            <a:ext cx="5562295" cy="1005840"/>
+          </a:xfrm>
+          <a:prstGeom prst="roundRect">
+            <a:avLst>
+              <a:gd name="adj" fmla="val 14545"/>
+            </a:avLst>
+          </a:prstGeom>
+          <a:solidFill>
+            <a:srgbClr val="FFFBF8"/>
+          </a:solidFill>
+          <a:ln w="9525">
+            <a:solidFill>
+              <a:srgbClr val="E3D5CC"/>
+            </a:solidFill>
+            <a:prstDash val="solid"/>
+          </a:ln>
+        </p:spPr>
+      </p:sp>
+      <p:sp>
+        <p:nvSpPr>
+          <p:cNvPr id="24" name="Shape 19"/>
+          <p:cNvSpPr/>
+          <p:nvPr/>
+        </p:nvSpPr>
+        <p:spPr>
+          <a:xfrm>
+            <a:off x="10865815" y="2606040"/>
+            <a:ext cx="640080" cy="640080"/>
+          </a:xfrm>
+          <a:prstGeom prst="roundRect">
+            <a:avLst>
+              <a:gd name="adj" fmla="val 20000"/>
+            </a:avLst>
+          </a:prstGeom>
+          <a:solidFill>
+            <a:srgbClr val="F1E4DF"/>
+          </a:solidFill>
+          <a:ln/>
+        </p:spPr>
       </p:sp>
       <p:pic>
         <p:nvPicPr>
-          <p:cNvPr id="23" name="Image 3" descr="/tmp/claude-0/-home-claude/750ff410-f4aa-5276-9360-1e19d018b112/scratchpad/c/assets/m-lap-hero.png">    </p:cNvPr>
+          <p:cNvPr id="25" name="Image 3" descr="/tmp/claude-0/-home-claude/750ff410-f4aa-5276-9360-1e19d018b112/scratchpad/c/assets/i-plug-br.png">    </p:cNvPr>
           <p:cNvPicPr>
             <a:picLocks noChangeAspect="1"/>
           </p:cNvPicPr>
@@ -12990,17 +13987,108 @@
         </p:blipFill>
         <p:spPr>
           <a:xfrm>
-            <a:off x="6156655" y="2514600"/>
-            <a:ext cx="5577840" cy="3420196"/>
+            <a:off x="10957255" y="2697480"/>
+            <a:ext cx="457200" cy="457200"/>
           </a:xfrm>
           <a:prstGeom prst="rect">
             <a:avLst/>
           </a:prstGeom>
         </p:spPr>
       </p:pic>
+      <p:sp>
+        <p:nvSpPr>
+          <p:cNvPr id="26" name="Text 20"/>
+          <p:cNvSpPr txBox="1"/>
+          <p:nvPr/>
+        </p:nvSpPr>
+        <p:spPr>
+          <a:xfrm>
+            <a:off x="6446520" y="2423160"/>
+            <a:ext cx="4236415" cy="1005840"/>
+          </a:xfrm>
+          <a:prstGeom prst="rect">
+            <a:avLst/>
+          </a:prstGeom>
+          <a:noFill/>
+          <a:ln/>
+        </p:spPr>
+        <p:txBody>
+          <a:bodyPr wrap="square" lIns="0" tIns="0" rIns="0" bIns="0" rtlCol="0" anchor="ctr"/>
+          <a:lstStyle/>
+          <a:p>
+            <a:pPr rtl="1" algn="r" indent="0" marL="0">
+              <a:lnSpc>
+                <a:spcPct val="110000"/>
+              </a:lnSpc>
+              <a:buNone/>
+            </a:pPr>
+            <a:r>
+              <a:rPr lang="en-US" sz="1600" dirty="0">
+                <a:solidFill>
+                  <a:srgbClr val="21141A"/>
+                </a:solidFill>
+                <a:latin typeface="IBM Plex Sans Arabic" pitchFamily="34" charset="0"/>
+                <a:ea typeface="IBM Plex Sans Arabic" pitchFamily="34" charset="-122"/>
+                <a:cs typeface="IBM Plex Sans Arabic" pitchFamily="34" charset="-120"/>
+              </a:rPr>
+              <a:t>ربط المنصة بحساب الشركة السحابي عبر API</a:t>
+            </a:r>
+            <a:endParaRPr lang="en-US" sz="1600" dirty="0"/>
+          </a:p>
+        </p:txBody>
+      </p:sp>
+      <p:sp>
+        <p:nvSpPr>
+          <p:cNvPr id="27" name="Shape 21"/>
+          <p:cNvSpPr/>
+          <p:nvPr/>
+        </p:nvSpPr>
+        <p:spPr>
+          <a:xfrm>
+            <a:off x="6172200" y="3611880"/>
+            <a:ext cx="5562295" cy="1005840"/>
+          </a:xfrm>
+          <a:prstGeom prst="roundRect">
+            <a:avLst>
+              <a:gd name="adj" fmla="val 14545"/>
+            </a:avLst>
+          </a:prstGeom>
+          <a:solidFill>
+            <a:srgbClr val="FFFBF8"/>
+          </a:solidFill>
+          <a:ln w="9525">
+            <a:solidFill>
+              <a:srgbClr val="E3D5CC"/>
+            </a:solidFill>
+            <a:prstDash val="solid"/>
+          </a:ln>
+        </p:spPr>
+      </p:sp>
+      <p:sp>
+        <p:nvSpPr>
+          <p:cNvPr id="28" name="Shape 22"/>
+          <p:cNvSpPr/>
+          <p:nvPr/>
+        </p:nvSpPr>
+        <p:spPr>
+          <a:xfrm>
+            <a:off x="10865815" y="3794760"/>
+            <a:ext cx="640080" cy="640080"/>
+          </a:xfrm>
+          <a:prstGeom prst="roundRect">
+            <a:avLst>
+              <a:gd name="adj" fmla="val 20000"/>
+            </a:avLst>
+          </a:prstGeom>
+          <a:solidFill>
+            <a:srgbClr val="F1E4DF"/>
+          </a:solidFill>
+          <a:ln/>
+        </p:spPr>
+      </p:sp>
       <p:pic>
         <p:nvPicPr>
-          <p:cNvPr id="24" name="Image 4" descr="/tmp/claude-0/-home-claude/750ff410-f4aa-5276-9360-1e19d018b112/scratchpad/c/assets/m-ph-start.png">    </p:cNvPr>
+          <p:cNvPr id="29" name="Image 4" descr="/tmp/claude-0/-home-claude/750ff410-f4aa-5276-9360-1e19d018b112/scratchpad/c/assets/i-bot-br.png">    </p:cNvPr>
           <p:cNvPicPr>
             <a:picLocks noChangeAspect="1"/>
           </p:cNvPicPr>
@@ -13014,8 +14102,8 @@
         </p:blipFill>
         <p:spPr>
           <a:xfrm>
-            <a:off x="5090163" y="2697480"/>
-            <a:ext cx="1569412" cy="3246120"/>
+            <a:off x="10957255" y="3886200"/>
+            <a:ext cx="457200" cy="457200"/>
           </a:xfrm>
           <a:prstGeom prst="rect">
             <a:avLst/>
@@ -13024,51 +14112,98 @@
       </p:pic>
       <p:sp>
         <p:nvSpPr>
-          <p:cNvPr id="25" name="Shape 18"/>
-          <p:cNvSpPr/>
-          <p:nvPr/>
-        </p:nvSpPr>
-        <p:spPr>
-          <a:xfrm>
-            <a:off x="640080" y="2606040"/>
-            <a:ext cx="2651760" cy="3246120"/>
+          <p:cNvPr id="30" name="Text 23"/>
+          <p:cNvSpPr txBox="1"/>
+          <p:nvPr/>
+        </p:nvSpPr>
+        <p:spPr>
+          <a:xfrm>
+            <a:off x="6446520" y="3611880"/>
+            <a:ext cx="4236415" cy="1005840"/>
+          </a:xfrm>
+          <a:prstGeom prst="rect">
+            <a:avLst/>
+          </a:prstGeom>
+          <a:noFill/>
+          <a:ln/>
+        </p:spPr>
+        <p:txBody>
+          <a:bodyPr wrap="square" lIns="0" tIns="0" rIns="0" bIns="0" rtlCol="0" anchor="ctr"/>
+          <a:lstStyle/>
+          <a:p>
+            <a:pPr rtl="1" algn="r" indent="0" marL="0">
+              <a:lnSpc>
+                <a:spcPct val="110000"/>
+              </a:lnSpc>
+              <a:buNone/>
+            </a:pPr>
+            <a:r>
+              <a:rPr lang="en-US" sz="1600" dirty="0">
+                <a:solidFill>
+                  <a:srgbClr val="21141A"/>
+                </a:solidFill>
+                <a:latin typeface="IBM Plex Sans Arabic" pitchFamily="34" charset="0"/>
+                <a:ea typeface="IBM Plex Sans Arabic" pitchFamily="34" charset="-122"/>
+                <a:cs typeface="IBM Plex Sans Arabic" pitchFamily="34" charset="-120"/>
+              </a:rPr>
+              <a:t>نموذج ذكاء اصطناعي يمسح البنية فوراً ويطابقها مع أفضل الممارسات ويحلل الأحمال</a:t>
+            </a:r>
+            <a:endParaRPr lang="en-US" sz="1600" dirty="0"/>
+          </a:p>
+        </p:txBody>
+      </p:sp>
+      <p:sp>
+        <p:nvSpPr>
+          <p:cNvPr id="31" name="Shape 24"/>
+          <p:cNvSpPr/>
+          <p:nvPr/>
+        </p:nvSpPr>
+        <p:spPr>
+          <a:xfrm>
+            <a:off x="6172200" y="4800600"/>
+            <a:ext cx="5562295" cy="1005840"/>
           </a:xfrm>
           <a:prstGeom prst="roundRect">
             <a:avLst>
-              <a:gd name="adj" fmla="val 6207"/>
+              <a:gd name="adj" fmla="val 14545"/>
             </a:avLst>
           </a:prstGeom>
           <a:solidFill>
-            <a:srgbClr val="8E2F3C"/>
-          </a:solidFill>
-          <a:ln/>
-        </p:spPr>
-      </p:sp>
-      <p:sp>
-        <p:nvSpPr>
-          <p:cNvPr id="26" name="Shape 19"/>
-          <p:cNvSpPr/>
-          <p:nvPr/>
-        </p:nvSpPr>
-        <p:spPr>
-          <a:xfrm>
-            <a:off x="822960" y="2788920"/>
-            <a:ext cx="2286000" cy="2286000"/>
+            <a:srgbClr val="FFFBF8"/>
+          </a:solidFill>
+          <a:ln w="9525">
+            <a:solidFill>
+              <a:srgbClr val="E3D5CC"/>
+            </a:solidFill>
+            <a:prstDash val="solid"/>
+          </a:ln>
+        </p:spPr>
+      </p:sp>
+      <p:sp>
+        <p:nvSpPr>
+          <p:cNvPr id="32" name="Shape 25"/>
+          <p:cNvSpPr/>
+          <p:nvPr/>
+        </p:nvSpPr>
+        <p:spPr>
+          <a:xfrm>
+            <a:off x="10865815" y="4983480"/>
+            <a:ext cx="640080" cy="640080"/>
           </a:xfrm>
           <a:prstGeom prst="roundRect">
             <a:avLst>
-              <a:gd name="adj" fmla="val 4800"/>
+              <a:gd name="adj" fmla="val 20000"/>
             </a:avLst>
           </a:prstGeom>
           <a:solidFill>
-            <a:srgbClr val="FFFBF8"/>
+            <a:srgbClr val="F1E4DF"/>
           </a:solidFill>
           <a:ln/>
         </p:spPr>
       </p:sp>
       <p:pic>
         <p:nvPicPr>
-          <p:cNvPr id="27" name="Image 5" descr="/tmp/claude-0/-home-claude/750ff410-f4aa-5276-9360-1e19d018b112/scratchpad/c/assets/qr.png">    </p:cNvPr>
+          <p:cNvPr id="33" name="Image 5" descr="/tmp/claude-0/-home-claude/750ff410-f4aa-5276-9360-1e19d018b112/scratchpad/c/assets/i-check-br.png">    </p:cNvPr>
           <p:cNvPicPr>
             <a:picLocks noChangeAspect="1"/>
           </p:cNvPicPr>
@@ -13082,8 +14217,8 @@
         </p:blipFill>
         <p:spPr>
           <a:xfrm>
-            <a:off x="914400" y="2880360"/>
-            <a:ext cx="2103120" cy="2103120"/>
+            <a:off x="10957255" y="5074920"/>
+            <a:ext cx="457200" cy="457200"/>
           </a:xfrm>
           <a:prstGeom prst="rect">
             <a:avLst/>
@@ -13092,30 +14227,94 @@
       </p:pic>
       <p:sp>
         <p:nvSpPr>
-          <p:cNvPr id="28" name="Text 20"/>
-          <p:cNvSpPr txBox="1"/>
-          <p:nvPr/>
-        </p:nvSpPr>
-        <p:spPr>
-          <a:xfrm>
-            <a:off x="640080" y="5212080"/>
-            <a:ext cx="2651760" cy="365760"/>
-          </a:xfrm>
-          <a:prstGeom prst="rect">
-            <a:avLst/>
-          </a:prstGeom>
-          <a:noFill/>
-          <a:ln/>
-        </p:spPr>
-        <p:txBody>
-          <a:bodyPr wrap="square" lIns="0" tIns="0" rIns="0" bIns="0" rtlCol="0" anchor="t"/>
-          <a:lstStyle/>
-          <a:p>
-            <a:pPr rtl="1" algn="ctr" indent="0" marL="0">
-              <a:buNone/>
-            </a:pPr>
-            <a:r>
-              <a:rPr lang="en-US" sz="1600" b="1" dirty="0">
+          <p:cNvPr id="34" name="Text 26"/>
+          <p:cNvSpPr txBox="1"/>
+          <p:nvPr/>
+        </p:nvSpPr>
+        <p:spPr>
+          <a:xfrm>
+            <a:off x="6446520" y="4800600"/>
+            <a:ext cx="4236415" cy="1005840"/>
+          </a:xfrm>
+          <a:prstGeom prst="rect">
+            <a:avLst/>
+          </a:prstGeom>
+          <a:noFill/>
+          <a:ln/>
+        </p:spPr>
+        <p:txBody>
+          <a:bodyPr wrap="square" lIns="0" tIns="0" rIns="0" bIns="0" rtlCol="0" anchor="ctr"/>
+          <a:lstStyle/>
+          <a:p>
+            <a:pPr rtl="1" algn="r" indent="0" marL="0">
+              <a:lnSpc>
+                <a:spcPct val="110000"/>
+              </a:lnSpc>
+              <a:buNone/>
+            </a:pPr>
+            <a:r>
+              <a:rPr lang="en-US" sz="1600" dirty="0">
+                <a:solidFill>
+                  <a:srgbClr val="21141A"/>
+                </a:solidFill>
+                <a:latin typeface="IBM Plex Sans Arabic" pitchFamily="34" charset="0"/>
+                <a:ea typeface="IBM Plex Sans Arabic" pitchFamily="34" charset="-122"/>
+                <a:cs typeface="IBM Plex Sans Arabic" pitchFamily="34" charset="-120"/>
+              </a:rPr>
+              <a:t>زر تفاعلي بضغطة واحدة لإيقاف المورد أو تقليصه عبر API</a:t>
+            </a:r>
+            <a:endParaRPr lang="en-US" sz="1600" dirty="0"/>
+          </a:p>
+        </p:txBody>
+      </p:sp>
+      <p:sp>
+        <p:nvSpPr>
+          <p:cNvPr id="35" name="Shape 27"/>
+          <p:cNvSpPr/>
+          <p:nvPr/>
+        </p:nvSpPr>
+        <p:spPr>
+          <a:xfrm>
+            <a:off x="457200" y="1691640"/>
+            <a:ext cx="5257800" cy="4114800"/>
+          </a:xfrm>
+          <a:prstGeom prst="roundRect">
+            <a:avLst>
+              <a:gd name="adj" fmla="val 4444"/>
+            </a:avLst>
+          </a:prstGeom>
+          <a:solidFill>
+            <a:srgbClr val="8E2F3C"/>
+          </a:solidFill>
+          <a:ln/>
+        </p:spPr>
+      </p:sp>
+      <p:sp>
+        <p:nvSpPr>
+          <p:cNvPr id="36" name="Text 28"/>
+          <p:cNvSpPr txBox="1"/>
+          <p:nvPr/>
+        </p:nvSpPr>
+        <p:spPr>
+          <a:xfrm>
+            <a:off x="777240" y="1920240"/>
+            <a:ext cx="4617720" cy="502920"/>
+          </a:xfrm>
+          <a:prstGeom prst="rect">
+            <a:avLst/>
+          </a:prstGeom>
+          <a:noFill/>
+          <a:ln/>
+        </p:spPr>
+        <p:txBody>
+          <a:bodyPr wrap="square" lIns="0" tIns="0" rIns="0" bIns="0" rtlCol="0" anchor="ctr"/>
+          <a:lstStyle/>
+          <a:p>
+            <a:pPr rtl="1" algn="r" indent="0" marL="0">
+              <a:buNone/>
+            </a:pPr>
+            <a:r>
+              <a:rPr lang="en-US" sz="2100" b="1" dirty="0">
                 <a:solidFill>
                   <a:srgbClr val="FBF6EE"/>
                 </a:solidFill>
@@ -13123,9 +14322,264 @@
                 <a:ea typeface="IBM Plex Sans Arabic" pitchFamily="34" charset="-122"/>
                 <a:cs typeface="IBM Plex Sans Arabic" pitchFamily="34" charset="-120"/>
               </a:rPr>
-              <a:t>امسح وجرّب</a:t>
-            </a:r>
-            <a:endParaRPr lang="en-US" sz="1600" dirty="0"/>
+              <a:t>ما التقنيات المتوفرة لتنفيذه؟</a:t>
+            </a:r>
+            <a:endParaRPr lang="en-US" sz="2100" dirty="0"/>
+          </a:p>
+        </p:txBody>
+      </p:sp>
+      <p:sp>
+        <p:nvSpPr>
+          <p:cNvPr id="37" name="Shape 29"/>
+          <p:cNvSpPr/>
+          <p:nvPr/>
+        </p:nvSpPr>
+        <p:spPr>
+          <a:xfrm>
+            <a:off x="777240" y="2651760"/>
+            <a:ext cx="4617720" cy="804672"/>
+          </a:xfrm>
+          <a:prstGeom prst="roundRect">
+            <a:avLst>
+              <a:gd name="adj" fmla="val 15909"/>
+            </a:avLst>
+          </a:prstGeom>
+          <a:solidFill>
+            <a:srgbClr val="FBF6EE"/>
+          </a:solidFill>
+          <a:ln/>
+        </p:spPr>
+      </p:sp>
+      <p:pic>
+        <p:nvPicPr>
+          <p:cNvPr id="38" name="Image 6" descr="/tmp/claude-0/-home-claude/750ff410-f4aa-5276-9360-1e19d018b112/scratchpad/c/assets/i-cloud-br.png">    </p:cNvPr>
+          <p:cNvPicPr>
+            <a:picLocks noChangeAspect="1"/>
+          </p:cNvPicPr>
+          <p:nvPr/>
+        </p:nvPicPr>
+        <p:blipFill>
+          <a:blip r:embed="rId7"/>
+          <a:stretch>
+            <a:fillRect/>
+          </a:stretch>
+        </p:blipFill>
+        <p:spPr>
+          <a:xfrm>
+            <a:off x="4754880" y="2825496"/>
+            <a:ext cx="457200" cy="457200"/>
+          </a:xfrm>
+          <a:prstGeom prst="rect">
+            <a:avLst/>
+          </a:prstGeom>
+        </p:spPr>
+      </p:pic>
+      <p:sp>
+        <p:nvSpPr>
+          <p:cNvPr id="39" name="Text 30"/>
+          <p:cNvSpPr txBox="1"/>
+          <p:nvPr/>
+        </p:nvSpPr>
+        <p:spPr>
+          <a:xfrm>
+            <a:off x="1005840" y="2651760"/>
+            <a:ext cx="3657600" cy="804672"/>
+          </a:xfrm>
+          <a:prstGeom prst="rect">
+            <a:avLst/>
+          </a:prstGeom>
+          <a:noFill/>
+          <a:ln/>
+        </p:spPr>
+        <p:txBody>
+          <a:bodyPr wrap="square" lIns="0" tIns="0" rIns="0" bIns="0" rtlCol="0" anchor="ctr"/>
+          <a:lstStyle/>
+          <a:p>
+            <a:pPr rtl="1" algn="r" indent="0" marL="0">
+              <a:buNone/>
+            </a:pPr>
+            <a:r>
+              <a:rPr lang="en-US" sz="1800" b="1" dirty="0">
+                <a:solidFill>
+                  <a:srgbClr val="21141A"/>
+                </a:solidFill>
+                <a:latin typeface="IBM Plex Sans Arabic" pitchFamily="34" charset="0"/>
+                <a:ea typeface="IBM Plex Sans Arabic" pitchFamily="34" charset="-122"/>
+                <a:cs typeface="IBM Plex Sans Arabic" pitchFamily="34" charset="-120"/>
+              </a:rPr>
+              <a:t>Cloud APIs</a:t>
+            </a:r>
+            <a:endParaRPr lang="en-US" sz="1800" dirty="0"/>
+          </a:p>
+        </p:txBody>
+      </p:sp>
+      <p:sp>
+        <p:nvSpPr>
+          <p:cNvPr id="40" name="Shape 31"/>
+          <p:cNvSpPr/>
+          <p:nvPr/>
+        </p:nvSpPr>
+        <p:spPr>
+          <a:xfrm>
+            <a:off x="777240" y="3639312"/>
+            <a:ext cx="4617720" cy="804672"/>
+          </a:xfrm>
+          <a:prstGeom prst="roundRect">
+            <a:avLst>
+              <a:gd name="adj" fmla="val 15909"/>
+            </a:avLst>
+          </a:prstGeom>
+          <a:solidFill>
+            <a:srgbClr val="FBF6EE"/>
+          </a:solidFill>
+          <a:ln/>
+        </p:spPr>
+      </p:sp>
+      <p:pic>
+        <p:nvPicPr>
+          <p:cNvPr id="41" name="Image 7" descr="/tmp/claude-0/-home-claude/750ff410-f4aa-5276-9360-1e19d018b112/scratchpad/c/assets/i-brain-br.png">    </p:cNvPr>
+          <p:cNvPicPr>
+            <a:picLocks noChangeAspect="1"/>
+          </p:cNvPicPr>
+          <p:nvPr/>
+        </p:nvPicPr>
+        <p:blipFill>
+          <a:blip r:embed="rId8"/>
+          <a:stretch>
+            <a:fillRect/>
+          </a:stretch>
+        </p:blipFill>
+        <p:spPr>
+          <a:xfrm>
+            <a:off x="4754880" y="3813048"/>
+            <a:ext cx="457200" cy="457200"/>
+          </a:xfrm>
+          <a:prstGeom prst="rect">
+            <a:avLst/>
+          </a:prstGeom>
+        </p:spPr>
+      </p:pic>
+      <p:sp>
+        <p:nvSpPr>
+          <p:cNvPr id="42" name="Text 32"/>
+          <p:cNvSpPr txBox="1"/>
+          <p:nvPr/>
+        </p:nvSpPr>
+        <p:spPr>
+          <a:xfrm>
+            <a:off x="1005840" y="3639312"/>
+            <a:ext cx="3657600" cy="804672"/>
+          </a:xfrm>
+          <a:prstGeom prst="rect">
+            <a:avLst/>
+          </a:prstGeom>
+          <a:noFill/>
+          <a:ln/>
+        </p:spPr>
+        <p:txBody>
+          <a:bodyPr wrap="square" lIns="0" tIns="0" rIns="0" bIns="0" rtlCol="0" anchor="ctr"/>
+          <a:lstStyle/>
+          <a:p>
+            <a:pPr rtl="1" algn="r" indent="0" marL="0">
+              <a:buNone/>
+            </a:pPr>
+            <a:r>
+              <a:rPr lang="en-US" sz="1800" b="1" dirty="0">
+                <a:solidFill>
+                  <a:srgbClr val="21141A"/>
+                </a:solidFill>
+                <a:latin typeface="IBM Plex Sans Arabic" pitchFamily="34" charset="0"/>
+                <a:ea typeface="IBM Plex Sans Arabic" pitchFamily="34" charset="-122"/>
+                <a:cs typeface="IBM Plex Sans Arabic" pitchFamily="34" charset="-120"/>
+              </a:rPr>
+              <a:t>AI Models</a:t>
+            </a:r>
+            <a:endParaRPr lang="en-US" sz="1800" dirty="0"/>
+          </a:p>
+        </p:txBody>
+      </p:sp>
+      <p:sp>
+        <p:nvSpPr>
+          <p:cNvPr id="43" name="Shape 33"/>
+          <p:cNvSpPr/>
+          <p:nvPr/>
+        </p:nvSpPr>
+        <p:spPr>
+          <a:xfrm>
+            <a:off x="777240" y="4626864"/>
+            <a:ext cx="4617720" cy="804672"/>
+          </a:xfrm>
+          <a:prstGeom prst="roundRect">
+            <a:avLst>
+              <a:gd name="adj" fmla="val 15909"/>
+            </a:avLst>
+          </a:prstGeom>
+          <a:solidFill>
+            <a:srgbClr val="FBF6EE"/>
+          </a:solidFill>
+          <a:ln/>
+        </p:spPr>
+      </p:sp>
+      <p:pic>
+        <p:nvPicPr>
+          <p:cNvPr id="44" name="Image 8" descr="/tmp/claude-0/-home-claude/750ff410-f4aa-5276-9360-1e19d018b112/scratchpad/c/assets/i-code-br.png">    </p:cNvPr>
+          <p:cNvPicPr>
+            <a:picLocks noChangeAspect="1"/>
+          </p:cNvPicPr>
+          <p:nvPr/>
+        </p:nvPicPr>
+        <p:blipFill>
+          <a:blip r:embed="rId9"/>
+          <a:stretch>
+            <a:fillRect/>
+          </a:stretch>
+        </p:blipFill>
+        <p:spPr>
+          <a:xfrm>
+            <a:off x="4754880" y="4800600"/>
+            <a:ext cx="457200" cy="457200"/>
+          </a:xfrm>
+          <a:prstGeom prst="rect">
+            <a:avLst/>
+          </a:prstGeom>
+        </p:spPr>
+      </p:pic>
+      <p:sp>
+        <p:nvSpPr>
+          <p:cNvPr id="45" name="Text 34"/>
+          <p:cNvSpPr txBox="1"/>
+          <p:nvPr/>
+        </p:nvSpPr>
+        <p:spPr>
+          <a:xfrm>
+            <a:off x="1005840" y="4626864"/>
+            <a:ext cx="3657600" cy="804672"/>
+          </a:xfrm>
+          <a:prstGeom prst="rect">
+            <a:avLst/>
+          </a:prstGeom>
+          <a:noFill/>
+          <a:ln/>
+        </p:spPr>
+        <p:txBody>
+          <a:bodyPr wrap="square" lIns="0" tIns="0" rIns="0" bIns="0" rtlCol="0" anchor="ctr"/>
+          <a:lstStyle/>
+          <a:p>
+            <a:pPr rtl="1" algn="r" indent="0" marL="0">
+              <a:buNone/>
+            </a:pPr>
+            <a:r>
+              <a:rPr lang="en-US" sz="1800" b="1" dirty="0">
+                <a:solidFill>
+                  <a:srgbClr val="21141A"/>
+                </a:solidFill>
+                <a:latin typeface="IBM Plex Sans Arabic" pitchFamily="34" charset="0"/>
+                <a:ea typeface="IBM Plex Sans Arabic" pitchFamily="34" charset="-122"/>
+                <a:cs typeface="IBM Plex Sans Arabic" pitchFamily="34" charset="-120"/>
+              </a:rPr>
+              <a:t>أدوات تطوير الواجهات والمواقع</a:t>
+            </a:r>
+            <a:endParaRPr lang="en-US" sz="1800" dirty="0"/>
           </a:p>
         </p:txBody>
       </p:sp>
@@ -13496,8 +14950,8 @@
         </p:nvSpPr>
         <p:spPr>
           <a:xfrm>
-            <a:off x="8918143" y="987552"/>
-            <a:ext cx="2816352" cy="384048"/>
+            <a:off x="9759391" y="987552"/>
+            <a:ext cx="1975104" cy="384048"/>
           </a:xfrm>
           <a:prstGeom prst="roundRect">
             <a:avLst>
@@ -13518,8 +14972,8 @@
         </p:nvSpPr>
         <p:spPr>
           <a:xfrm>
-            <a:off x="8918143" y="987552"/>
-            <a:ext cx="2816352" cy="384048"/>
+            <a:off x="9759391" y="987552"/>
+            <a:ext cx="1975104" cy="384048"/>
           </a:xfrm>
           <a:prstGeom prst="rect">
             <a:avLst/>
@@ -13543,7 +14997,7 @@
                 <a:ea typeface="IBM Plex Sans Arabic" pitchFamily="34" charset="-122"/>
                 <a:cs typeface="IBM Plex Sans Arabic" pitchFamily="34" charset="-120"/>
               </a:rPr>
-              <a:t>الأثر والقيمة المتوقعة</a:t>
+              <a:t>النموذج الأولي</a:t>
             </a:r>
             <a:endParaRPr lang="en-US" sz="1300" dirty="0"/>
           </a:p>
@@ -13684,42 +15138,15 @@
                 <a:ea typeface="IBM Plex Sans Arabic" pitchFamily="34" charset="-122"/>
                 <a:cs typeface="IBM Plex Sans Arabic" pitchFamily="34" charset="-120"/>
               </a:rPr>
-              <a:t>أثر بالأرقام</a:t>
+              <a:t>يعمل الآن، جرّبه بنفسك</a:t>
             </a:r>
             <a:endParaRPr lang="en-US" sz="3400" dirty="0"/>
           </a:p>
         </p:txBody>
-      </p:sp>
-      <p:sp>
-        <p:nvSpPr>
-          <p:cNvPr id="23" name="Shape 18"/>
-          <p:cNvSpPr/>
-          <p:nvPr/>
-        </p:nvSpPr>
-        <p:spPr>
-          <a:xfrm>
-            <a:off x="8188757" y="2697480"/>
-            <a:ext cx="3545738" cy="2377440"/>
-          </a:xfrm>
-          <a:prstGeom prst="roundRect">
-            <a:avLst>
-              <a:gd name="adj" fmla="val 7692"/>
-            </a:avLst>
-          </a:prstGeom>
-          <a:solidFill>
-            <a:srgbClr val="FFFBF8"/>
-          </a:solidFill>
-          <a:ln w="9525">
-            <a:solidFill>
-              <a:srgbClr val="E3D5CC"/>
-            </a:solidFill>
-            <a:prstDash val="solid"/>
-          </a:ln>
-        </p:spPr>
       </p:sp>
       <p:pic>
         <p:nvPicPr>
-          <p:cNvPr id="24" name="Image 3" descr="/tmp/claude-0/-home-claude/750ff410-f4aa-5276-9360-1e19d018b112/scratchpad/c/assets/i-wallet-br.png">    </p:cNvPr>
+          <p:cNvPr id="23" name="Image 3" descr="/tmp/claude-0/-home-claude/750ff410-f4aa-5276-9360-1e19d018b112/scratchpad/c/assets/m-lap-hero.png">    </p:cNvPr>
           <p:cNvPicPr>
             <a:picLocks noChangeAspect="1"/>
           </p:cNvPicPr>
@@ -13733,117 +15160,17 @@
         </p:blipFill>
         <p:spPr>
           <a:xfrm>
-            <a:off x="9687306" y="2971800"/>
-            <a:ext cx="548640" cy="548640"/>
+            <a:off x="6156655" y="2514600"/>
+            <a:ext cx="5577840" cy="3420196"/>
           </a:xfrm>
           <a:prstGeom prst="rect">
             <a:avLst/>
           </a:prstGeom>
         </p:spPr>
       </p:pic>
-      <p:sp>
-        <p:nvSpPr>
-          <p:cNvPr id="25" name="Text 19"/>
-          <p:cNvSpPr txBox="1"/>
-          <p:nvPr/>
-        </p:nvSpPr>
-        <p:spPr>
-          <a:xfrm>
-            <a:off x="8188757" y="3566160"/>
-            <a:ext cx="3545738" cy="868680"/>
-          </a:xfrm>
-          <a:prstGeom prst="rect">
-            <a:avLst/>
-          </a:prstGeom>
-          <a:noFill/>
-          <a:ln/>
-        </p:spPr>
-        <p:txBody>
-          <a:bodyPr wrap="square" lIns="0" tIns="0" rIns="0" bIns="0" rtlCol="0" anchor="ctr"/>
-          <a:lstStyle/>
-          <a:p>
-            <a:pPr algn="ctr" indent="0" marL="0">
-              <a:buNone/>
-            </a:pPr>
-            <a:r>
-              <a:rPr lang="en-US" sz="5400" b="1" dirty="0">
-                <a:solidFill>
-                  <a:srgbClr val="8E2F3C"/>
-                </a:solidFill>
-                <a:latin typeface="IBM Plex Sans Arabic" pitchFamily="34" charset="0"/>
-                <a:ea typeface="IBM Plex Sans Arabic" pitchFamily="34" charset="-122"/>
-                <a:cs typeface="IBM Plex Sans Arabic" pitchFamily="34" charset="-120"/>
-              </a:rPr>
-              <a:t>10.8%</a:t>
-            </a:r>
-            <a:endParaRPr lang="en-US" sz="5400" dirty="0"/>
-          </a:p>
-        </p:txBody>
-      </p:sp>
-      <p:sp>
-        <p:nvSpPr>
-          <p:cNvPr id="26" name="Text 20"/>
-          <p:cNvSpPr txBox="1"/>
-          <p:nvPr/>
-        </p:nvSpPr>
-        <p:spPr>
-          <a:xfrm>
-            <a:off x="8463077" y="4480560"/>
-            <a:ext cx="2997098" cy="411480"/>
-          </a:xfrm>
-          <a:prstGeom prst="rect">
-            <a:avLst/>
-          </a:prstGeom>
-          <a:noFill/>
-          <a:ln/>
-        </p:spPr>
-        <p:txBody>
-          <a:bodyPr wrap="square" lIns="0" tIns="0" rIns="0" bIns="0" rtlCol="0" anchor="ctr"/>
-          <a:lstStyle/>
-          <a:p>
-            <a:pPr rtl="1" algn="ctr" indent="0" marL="0">
-              <a:buNone/>
-            </a:pPr>
-            <a:r>
-              <a:rPr lang="en-US" sz="1800" dirty="0">
-                <a:solidFill>
-                  <a:srgbClr val="21141A"/>
-                </a:solidFill>
-                <a:latin typeface="IBM Plex Sans Arabic" pitchFamily="34" charset="0"/>
-                <a:ea typeface="IBM Plex Sans Arabic" pitchFamily="34" charset="-122"/>
-                <a:cs typeface="IBM Plex Sans Arabic" pitchFamily="34" charset="-120"/>
-              </a:rPr>
-              <a:t>توفير من الفاتورة</a:t>
-            </a:r>
-            <a:endParaRPr lang="en-US" sz="1800" dirty="0"/>
-          </a:p>
-        </p:txBody>
-      </p:sp>
-      <p:sp>
-        <p:nvSpPr>
-          <p:cNvPr id="27" name="Shape 21"/>
-          <p:cNvSpPr/>
-          <p:nvPr/>
-        </p:nvSpPr>
-        <p:spPr>
-          <a:xfrm>
-            <a:off x="4322978" y="2697480"/>
-            <a:ext cx="3545738" cy="2377440"/>
-          </a:xfrm>
-          <a:prstGeom prst="roundRect">
-            <a:avLst>
-              <a:gd name="adj" fmla="val 7692"/>
-            </a:avLst>
-          </a:prstGeom>
-          <a:solidFill>
-            <a:srgbClr val="8E2F3C"/>
-          </a:solidFill>
-          <a:ln/>
-        </p:spPr>
-      </p:sp>
       <p:pic>
         <p:nvPicPr>
-          <p:cNvPr id="28" name="Image 4" descr="/tmp/claude-0/-home-claude/750ff410-f4aa-5276-9360-1e19d018b112/scratchpad/c/assets/i-trend-cr.png">    </p:cNvPr>
+          <p:cNvPr id="24" name="Image 4" descr="/tmp/claude-0/-home-claude/750ff410-f4aa-5276-9360-1e19d018b112/scratchpad/c/assets/m-ph-start.png">    </p:cNvPr>
           <p:cNvPicPr>
             <a:picLocks noChangeAspect="1"/>
           </p:cNvPicPr>
@@ -13857,8 +15184,8 @@
         </p:blipFill>
         <p:spPr>
           <a:xfrm>
-            <a:off x="5821528" y="2971800"/>
-            <a:ext cx="548640" cy="548640"/>
+            <a:off x="5090163" y="2697480"/>
+            <a:ext cx="1569412" cy="3246120"/>
           </a:xfrm>
           <a:prstGeom prst="rect">
             <a:avLst/>
@@ -13867,112 +15194,51 @@
       </p:pic>
       <p:sp>
         <p:nvSpPr>
-          <p:cNvPr id="29" name="Text 22"/>
-          <p:cNvSpPr txBox="1"/>
-          <p:nvPr/>
-        </p:nvSpPr>
-        <p:spPr>
-          <a:xfrm>
-            <a:off x="4322978" y="3566160"/>
-            <a:ext cx="3545738" cy="868680"/>
-          </a:xfrm>
-          <a:prstGeom prst="rect">
-            <a:avLst/>
-          </a:prstGeom>
-          <a:noFill/>
-          <a:ln/>
-        </p:spPr>
-        <p:txBody>
-          <a:bodyPr wrap="square" lIns="0" tIns="0" rIns="0" bIns="0" rtlCol="0" anchor="ctr"/>
-          <a:lstStyle/>
-          <a:p>
-            <a:pPr algn="ctr" indent="0" marL="0">
-              <a:buNone/>
-            </a:pPr>
-            <a:r>
-              <a:rPr lang="en-US" sz="5400" b="1" dirty="0">
-                <a:solidFill>
-                  <a:srgbClr val="FBF6EE"/>
-                </a:solidFill>
-                <a:latin typeface="IBM Plex Sans Arabic" pitchFamily="34" charset="0"/>
-                <a:ea typeface="IBM Plex Sans Arabic" pitchFamily="34" charset="-122"/>
-                <a:cs typeface="IBM Plex Sans Arabic" pitchFamily="34" charset="-120"/>
-              </a:rPr>
-              <a:t>110K</a:t>
-            </a:r>
-            <a:endParaRPr lang="en-US" sz="5400" dirty="0"/>
-          </a:p>
-        </p:txBody>
-      </p:sp>
-      <p:sp>
-        <p:nvSpPr>
-          <p:cNvPr id="30" name="Text 23"/>
-          <p:cNvSpPr txBox="1"/>
-          <p:nvPr/>
-        </p:nvSpPr>
-        <p:spPr>
-          <a:xfrm>
-            <a:off x="4597298" y="4480560"/>
-            <a:ext cx="2997098" cy="411480"/>
-          </a:xfrm>
-          <a:prstGeom prst="rect">
-            <a:avLst/>
-          </a:prstGeom>
-          <a:noFill/>
-          <a:ln/>
-        </p:spPr>
-        <p:txBody>
-          <a:bodyPr wrap="square" lIns="0" tIns="0" rIns="0" bIns="0" rtlCol="0" anchor="ctr"/>
-          <a:lstStyle/>
-          <a:p>
-            <a:pPr rtl="1" algn="ctr" indent="0" marL="0">
-              <a:buNone/>
-            </a:pPr>
-            <a:r>
-              <a:rPr lang="en-US" sz="1800" dirty="0">
-                <a:solidFill>
-                  <a:srgbClr val="FBF6EE"/>
-                </a:solidFill>
-                <a:latin typeface="IBM Plex Sans Arabic" pitchFamily="34" charset="0"/>
-                <a:ea typeface="IBM Plex Sans Arabic" pitchFamily="34" charset="-122"/>
-                <a:cs typeface="IBM Plex Sans Arabic" pitchFamily="34" charset="-120"/>
-              </a:rPr>
-              <a:t>ريال سنوياً</a:t>
-            </a:r>
-            <a:endParaRPr lang="en-US" sz="1800" dirty="0"/>
-          </a:p>
-        </p:txBody>
-      </p:sp>
-      <p:sp>
-        <p:nvSpPr>
-          <p:cNvPr id="31" name="Shape 24"/>
-          <p:cNvSpPr/>
-          <p:nvPr/>
-        </p:nvSpPr>
-        <p:spPr>
-          <a:xfrm>
-            <a:off x="457200" y="2697480"/>
-            <a:ext cx="3545738" cy="2377440"/>
+          <p:cNvPr id="25" name="Shape 18"/>
+          <p:cNvSpPr/>
+          <p:nvPr/>
+        </p:nvSpPr>
+        <p:spPr>
+          <a:xfrm>
+            <a:off x="640080" y="2606040"/>
+            <a:ext cx="2651760" cy="3246120"/>
           </a:xfrm>
           <a:prstGeom prst="roundRect">
             <a:avLst>
-              <a:gd name="adj" fmla="val 7692"/>
+              <a:gd name="adj" fmla="val 6207"/>
             </a:avLst>
           </a:prstGeom>
           <a:solidFill>
+            <a:srgbClr val="8E2F3C"/>
+          </a:solidFill>
+          <a:ln/>
+        </p:spPr>
+      </p:sp>
+      <p:sp>
+        <p:nvSpPr>
+          <p:cNvPr id="26" name="Shape 19"/>
+          <p:cNvSpPr/>
+          <p:nvPr/>
+        </p:nvSpPr>
+        <p:spPr>
+          <a:xfrm>
+            <a:off x="822960" y="2788920"/>
+            <a:ext cx="2286000" cy="2286000"/>
+          </a:xfrm>
+          <a:prstGeom prst="roundRect">
+            <a:avLst>
+              <a:gd name="adj" fmla="val 4800"/>
+            </a:avLst>
+          </a:prstGeom>
+          <a:solidFill>
             <a:srgbClr val="FFFBF8"/>
           </a:solidFill>
-          <a:ln w="9525">
-            <a:solidFill>
-              <a:srgbClr val="E3D5CC"/>
-            </a:solidFill>
-            <a:prstDash val="solid"/>
-          </a:ln>
+          <a:ln/>
         </p:spPr>
       </p:sp>
       <p:pic>
         <p:nvPicPr>
-          <p:cNvPr id="32" name="Image 5" descr="/tmp/claude-0/-home-claude/750ff410-f4aa-5276-9360-1e19d018b112/scratchpad/c/assets/i-clock-br.png">    </p:cNvPr>
+          <p:cNvPr id="27" name="Image 5" descr="/tmp/claude-0/-home-claude/750ff410-f4aa-5276-9360-1e19d018b112/scratchpad/c/assets/qr.png">    </p:cNvPr>
           <p:cNvPicPr>
             <a:picLocks noChangeAspect="1"/>
           </p:cNvPicPr>
@@ -13986,8 +15252,8 @@
         </p:blipFill>
         <p:spPr>
           <a:xfrm>
-            <a:off x="1955749" y="2971800"/>
-            <a:ext cx="548640" cy="548640"/>
+            <a:off x="914400" y="2880360"/>
+            <a:ext cx="2103120" cy="2103120"/>
           </a:xfrm>
           <a:prstGeom prst="rect">
             <a:avLst/>
@@ -13996,118 +15262,40 @@
       </p:pic>
       <p:sp>
         <p:nvSpPr>
-          <p:cNvPr id="33" name="Text 25"/>
-          <p:cNvSpPr txBox="1"/>
-          <p:nvPr/>
-        </p:nvSpPr>
-        <p:spPr>
-          <a:xfrm>
-            <a:off x="457200" y="3566160"/>
-            <a:ext cx="3545738" cy="868680"/>
-          </a:xfrm>
-          <a:prstGeom prst="rect">
-            <a:avLst/>
-          </a:prstGeom>
-          <a:noFill/>
-          <a:ln/>
-        </p:spPr>
-        <p:txBody>
-          <a:bodyPr wrap="square" lIns="0" tIns="0" rIns="0" bIns="0" rtlCol="0" anchor="ctr"/>
-          <a:lstStyle/>
-          <a:p>
-            <a:pPr algn="ctr" indent="0" marL="0">
-              <a:buNone/>
-            </a:pPr>
-            <a:r>
-              <a:rPr lang="en-US" sz="5400" b="1" dirty="0">
-                <a:solidFill>
-                  <a:srgbClr val="8E2F3C"/>
-                </a:solidFill>
-                <a:latin typeface="IBM Plex Sans Arabic" pitchFamily="34" charset="0"/>
-                <a:ea typeface="IBM Plex Sans Arabic" pitchFamily="34" charset="-122"/>
-                <a:cs typeface="IBM Plex Sans Arabic" pitchFamily="34" charset="-120"/>
-              </a:rPr>
-              <a:t>دقائق</a:t>
-            </a:r>
-            <a:endParaRPr lang="en-US" sz="5400" dirty="0"/>
-          </a:p>
-        </p:txBody>
-      </p:sp>
-      <p:sp>
-        <p:nvSpPr>
-          <p:cNvPr id="34" name="Text 26"/>
-          <p:cNvSpPr txBox="1"/>
-          <p:nvPr/>
-        </p:nvSpPr>
-        <p:spPr>
-          <a:xfrm>
-            <a:off x="731520" y="4480560"/>
-            <a:ext cx="2997098" cy="411480"/>
-          </a:xfrm>
-          <a:prstGeom prst="rect">
-            <a:avLst/>
-          </a:prstGeom>
-          <a:noFill/>
-          <a:ln/>
-        </p:spPr>
-        <p:txBody>
-          <a:bodyPr wrap="square" lIns="0" tIns="0" rIns="0" bIns="0" rtlCol="0" anchor="ctr"/>
+          <p:cNvPr id="28" name="Text 20"/>
+          <p:cNvSpPr txBox="1"/>
+          <p:nvPr/>
+        </p:nvSpPr>
+        <p:spPr>
+          <a:xfrm>
+            <a:off x="640080" y="5212080"/>
+            <a:ext cx="2651760" cy="365760"/>
+          </a:xfrm>
+          <a:prstGeom prst="rect">
+            <a:avLst/>
+          </a:prstGeom>
+          <a:noFill/>
+          <a:ln/>
+        </p:spPr>
+        <p:txBody>
+          <a:bodyPr wrap="square" lIns="0" tIns="0" rIns="0" bIns="0" rtlCol="0" anchor="t"/>
           <a:lstStyle/>
           <a:p>
             <a:pPr rtl="1" algn="ctr" indent="0" marL="0">
               <a:buNone/>
             </a:pPr>
             <a:r>
-              <a:rPr lang="en-US" sz="1800" dirty="0">
-                <a:solidFill>
-                  <a:srgbClr val="21141A"/>
-                </a:solidFill>
-                <a:latin typeface="IBM Plex Sans Arabic" pitchFamily="34" charset="0"/>
-                <a:ea typeface="IBM Plex Sans Arabic" pitchFamily="34" charset="-122"/>
-                <a:cs typeface="IBM Plex Sans Arabic" pitchFamily="34" charset="-120"/>
-              </a:rPr>
-              <a:t>بدل أسابيع</a:t>
-            </a:r>
-            <a:endParaRPr lang="en-US" sz="1800" dirty="0"/>
-          </a:p>
-        </p:txBody>
-      </p:sp>
-      <p:sp>
-        <p:nvSpPr>
-          <p:cNvPr id="35" name="Text 27"/>
-          <p:cNvSpPr txBox="1"/>
-          <p:nvPr/>
-        </p:nvSpPr>
-        <p:spPr>
-          <a:xfrm>
-            <a:off x="457200" y="5349240"/>
-            <a:ext cx="11277295" cy="365760"/>
-          </a:xfrm>
-          <a:prstGeom prst="rect">
-            <a:avLst/>
-          </a:prstGeom>
-          <a:noFill/>
-          <a:ln/>
-        </p:spPr>
-        <p:txBody>
-          <a:bodyPr wrap="square" lIns="0" tIns="0" rIns="0" bIns="0" rtlCol="0" anchor="t"/>
-          <a:lstStyle/>
-          <a:p>
-            <a:pPr rtl="1" algn="ctr" indent="0" marL="0">
-              <a:buNone/>
-            </a:pPr>
-            <a:r>
-              <a:rPr lang="en-US" sz="1500" dirty="0">
-                <a:solidFill>
-                  <a:srgbClr val="7F6C72"/>
-                </a:solidFill>
-                <a:latin typeface="IBM Plex Sans Arabic" pitchFamily="34" charset="0"/>
-                <a:ea typeface="IBM Plex Sans Arabic" pitchFamily="34" charset="-122"/>
-                <a:cs typeface="IBM Plex Sans Arabic" pitchFamily="34" charset="-120"/>
-              </a:rPr>
-              <a:t>مثال: شركة افتراضية من 120 موظفاً</a:t>
-            </a:r>
-            <a:endParaRPr lang="en-US" sz="1500" dirty="0"/>
+              <a:rPr lang="en-US" sz="1600" b="1" dirty="0">
+                <a:solidFill>
+                  <a:srgbClr val="FBF6EE"/>
+                </a:solidFill>
+                <a:latin typeface="IBM Plex Sans Arabic" pitchFamily="34" charset="0"/>
+                <a:ea typeface="IBM Plex Sans Arabic" pitchFamily="34" charset="-122"/>
+                <a:cs typeface="IBM Plex Sans Arabic" pitchFamily="34" charset="-120"/>
+              </a:rPr>
+              <a:t>امسح وجرّب</a:t>
+            </a:r>
+            <a:endParaRPr lang="en-US" sz="1600" dirty="0"/>
           </a:p>
         </p:txBody>
       </p:sp>

--- a/pitch/SSB_VentureX.pptx
+++ b/pitch/SSB_VentureX.pptx
@@ -12786,57 +12786,18 @@
       </p:sp>
       <p:sp>
         <p:nvSpPr>
-          <p:cNvPr id="22" name="Text 17"/>
-          <p:cNvSpPr txBox="1"/>
-          <p:nvPr/>
-        </p:nvSpPr>
-        <p:spPr>
-          <a:xfrm>
-            <a:off x="457200" y="1600200"/>
-            <a:ext cx="11277295" cy="731520"/>
-          </a:xfrm>
-          <a:prstGeom prst="rect">
-            <a:avLst/>
-          </a:prstGeom>
-          <a:noFill/>
-          <a:ln/>
-        </p:spPr>
-        <p:txBody>
-          <a:bodyPr wrap="square" lIns="0" tIns="0" rIns="0" bIns="0" rtlCol="0" anchor="ctr"/>
-          <a:lstStyle/>
-          <a:p>
-            <a:pPr rtl="1" algn="r" indent="0" marL="0">
-              <a:buNone/>
-            </a:pPr>
-            <a:r>
-              <a:rPr lang="en-US" sz="3400" b="1" dirty="0">
-                <a:solidFill>
-                  <a:srgbClr val="21141A"/>
-                </a:solidFill>
-                <a:latin typeface="IBM Plex Sans Arabic" pitchFamily="34" charset="0"/>
-                <a:ea typeface="IBM Plex Sans Arabic" pitchFamily="34" charset="-122"/>
-                <a:cs typeface="IBM Plex Sans Arabic" pitchFamily="34" charset="-120"/>
-              </a:rPr>
-              <a:t>ابدأ مجاناً، ثم ادفع لكل مورد</a:t>
-            </a:r>
-            <a:endParaRPr lang="en-US" sz="3400" dirty="0"/>
-          </a:p>
-        </p:txBody>
-      </p:sp>
-      <p:sp>
-        <p:nvSpPr>
-          <p:cNvPr id="23" name="Shape 18"/>
-          <p:cNvSpPr/>
-          <p:nvPr/>
-        </p:nvSpPr>
-        <p:spPr>
-          <a:xfrm>
-            <a:off x="8188757" y="2606040"/>
-            <a:ext cx="3545738" cy="2606040"/>
+          <p:cNvPr id="22" name="Shape 17"/>
+          <p:cNvSpPr/>
+          <p:nvPr/>
+        </p:nvSpPr>
+        <p:spPr>
+          <a:xfrm>
+            <a:off x="9566819" y="1554480"/>
+            <a:ext cx="2167677" cy="3017520"/>
           </a:xfrm>
           <a:prstGeom prst="roundRect">
             <a:avLst>
-              <a:gd name="adj" fmla="val 7018"/>
+              <a:gd name="adj" fmla="val 5906"/>
             </a:avLst>
           </a:prstGeom>
           <a:solidFill>
@@ -12852,7 +12813,7 @@
       </p:sp>
       <p:pic>
         <p:nvPicPr>
-          <p:cNvPr id="24" name="Image 3" descr="/tmp/claude-0/-home-claude/750ff410-f4aa-5276-9360-1e19d018b112/scratchpad/c/assets/i-gift-br.png">    </p:cNvPr>
+          <p:cNvPr id="23" name="Image 3" descr="/tmp/claude-0/-home-claude/750ff410-f4aa-5276-9360-1e19d018b112/scratchpad/c/assets/i-users-br.png">    </p:cNvPr>
           <p:cNvPicPr>
             <a:picLocks noChangeAspect="1"/>
           </p:cNvPicPr>
@@ -12866,8 +12827,8 @@
         </p:blipFill>
         <p:spPr>
           <a:xfrm>
-            <a:off x="9687306" y="2880360"/>
-            <a:ext cx="548640" cy="548640"/>
+            <a:off x="11240719" y="1709928"/>
+            <a:ext cx="310896" cy="310896"/>
           </a:xfrm>
           <a:prstGeom prst="rect">
             <a:avLst/>
@@ -12876,14 +12837,14 @@
       </p:pic>
       <p:sp>
         <p:nvSpPr>
-          <p:cNvPr id="25" name="Text 19"/>
-          <p:cNvSpPr txBox="1"/>
-          <p:nvPr/>
-        </p:nvSpPr>
-        <p:spPr>
-          <a:xfrm>
-            <a:off x="8188757" y="3520440"/>
-            <a:ext cx="3545738" cy="365760"/>
+          <p:cNvPr id="24" name="Text 18"/>
+          <p:cNvSpPr txBox="1"/>
+          <p:nvPr/>
+        </p:nvSpPr>
+        <p:spPr>
+          <a:xfrm>
+            <a:off x="9703979" y="1682496"/>
+            <a:ext cx="1481877" cy="365760"/>
           </a:xfrm>
           <a:prstGeom prst="rect">
             <a:avLst/>
@@ -12895,23 +12856,43 @@
           <a:bodyPr wrap="square" lIns="0" tIns="0" rIns="0" bIns="0" rtlCol="0" anchor="ctr"/>
           <a:lstStyle/>
           <a:p>
-            <a:pPr rtl="1" algn="ctr" indent="0" marL="0">
-              <a:buNone/>
-            </a:pPr>
-            <a:r>
-              <a:rPr lang="en-US" sz="1700" b="1" dirty="0">
-                <a:solidFill>
-                  <a:srgbClr val="7F6C72"/>
-                </a:solidFill>
-                <a:latin typeface="IBM Plex Sans Arabic" pitchFamily="34" charset="0"/>
-                <a:ea typeface="IBM Plex Sans Arabic" pitchFamily="34" charset="-122"/>
-                <a:cs typeface="IBM Plex Sans Arabic" pitchFamily="34" charset="-120"/>
-              </a:rPr>
-              <a:t>الفحص الأول</a:t>
-            </a:r>
-            <a:endParaRPr lang="en-US" sz="1700" dirty="0"/>
-          </a:p>
-        </p:txBody>
+            <a:pPr rtl="1" algn="r" indent="0" marL="0">
+              <a:buNone/>
+            </a:pPr>
+            <a:r>
+              <a:rPr lang="en-US" sz="1400" b="1" dirty="0">
+                <a:solidFill>
+                  <a:srgbClr val="8E2F3C"/>
+                </a:solidFill>
+                <a:latin typeface="IBM Plex Sans Arabic" pitchFamily="34" charset="0"/>
+                <a:ea typeface="IBM Plex Sans Arabic" pitchFamily="34" charset="-122"/>
+                <a:cs typeface="IBM Plex Sans Arabic" pitchFamily="34" charset="-120"/>
+              </a:rPr>
+              <a:t>شرائح العملاء</a:t>
+            </a:r>
+            <a:endParaRPr lang="en-US" sz="1400" dirty="0"/>
+          </a:p>
+        </p:txBody>
+      </p:sp>
+      <p:sp>
+        <p:nvSpPr>
+          <p:cNvPr id="25" name="Shape 19"/>
+          <p:cNvSpPr/>
+          <p:nvPr/>
+        </p:nvSpPr>
+        <p:spPr>
+          <a:xfrm>
+            <a:off x="11460175" y="2295144"/>
+            <a:ext cx="82296" cy="82296"/>
+          </a:xfrm>
+          <a:prstGeom prst="rect">
+            <a:avLst/>
+          </a:prstGeom>
+          <a:solidFill>
+            <a:srgbClr val="D48A93"/>
+          </a:solidFill>
+          <a:ln/>
+        </p:spPr>
       </p:sp>
       <p:sp>
         <p:nvSpPr>
@@ -12921,8 +12902,8 @@
         </p:nvSpPr>
         <p:spPr>
           <a:xfrm>
-            <a:off x="8188757" y="3886200"/>
-            <a:ext cx="3545738" cy="777240"/>
+            <a:off x="9703979" y="2176272"/>
+            <a:ext cx="1664757" cy="329184"/>
           </a:xfrm>
           <a:prstGeom prst="rect">
             <a:avLst/>
@@ -12934,34 +12915,54 @@
           <a:bodyPr wrap="square" lIns="0" tIns="0" rIns="0" bIns="0" rtlCol="0" anchor="ctr"/>
           <a:lstStyle/>
           <a:p>
-            <a:pPr rtl="1" algn="ctr" indent="0" marL="0">
-              <a:buNone/>
-            </a:pPr>
-            <a:r>
-              <a:rPr lang="en-US" sz="4000" b="1" dirty="0">
-                <a:solidFill>
-                  <a:srgbClr val="8E2F3C"/>
-                </a:solidFill>
-                <a:latin typeface="IBM Plex Sans Arabic" pitchFamily="34" charset="0"/>
-                <a:ea typeface="IBM Plex Sans Arabic" pitchFamily="34" charset="-122"/>
-                <a:cs typeface="IBM Plex Sans Arabic" pitchFamily="34" charset="-120"/>
-              </a:rPr>
-              <a:t>مجاني</a:t>
-            </a:r>
-            <a:endParaRPr lang="en-US" sz="4000" dirty="0"/>
-          </a:p>
-        </p:txBody>
-      </p:sp>
-      <p:sp>
-        <p:nvSpPr>
-          <p:cNvPr id="27" name="Text 21"/>
-          <p:cNvSpPr txBox="1"/>
-          <p:nvPr/>
-        </p:nvSpPr>
-        <p:spPr>
-          <a:xfrm>
-            <a:off x="8188757" y="4663440"/>
-            <a:ext cx="3545738" cy="365760"/>
+            <a:pPr rtl="1" algn="r" indent="0" marL="0">
+              <a:buNone/>
+            </a:pPr>
+            <a:r>
+              <a:rPr lang="en-US" sz="1350" dirty="0">
+                <a:solidFill>
+                  <a:srgbClr val="21141A"/>
+                </a:solidFill>
+                <a:latin typeface="IBM Plex Sans Arabic" pitchFamily="34" charset="0"/>
+                <a:ea typeface="IBM Plex Sans Arabic" pitchFamily="34" charset="-122"/>
+                <a:cs typeface="IBM Plex Sans Arabic" pitchFamily="34" charset="-120"/>
+              </a:rPr>
+              <a:t>شركات 50 إلى 250 موظفاً</a:t>
+            </a:r>
+            <a:endParaRPr lang="en-US" sz="1350" dirty="0"/>
+          </a:p>
+        </p:txBody>
+      </p:sp>
+      <p:sp>
+        <p:nvSpPr>
+          <p:cNvPr id="27" name="Shape 21"/>
+          <p:cNvSpPr/>
+          <p:nvPr/>
+        </p:nvSpPr>
+        <p:spPr>
+          <a:xfrm>
+            <a:off x="11460175" y="2660904"/>
+            <a:ext cx="82296" cy="82296"/>
+          </a:xfrm>
+          <a:prstGeom prst="rect">
+            <a:avLst/>
+          </a:prstGeom>
+          <a:solidFill>
+            <a:srgbClr val="D48A93"/>
+          </a:solidFill>
+          <a:ln/>
+        </p:spPr>
+      </p:sp>
+      <p:sp>
+        <p:nvSpPr>
+          <p:cNvPr id="28" name="Text 22"/>
+          <p:cNvSpPr txBox="1"/>
+          <p:nvPr/>
+        </p:nvSpPr>
+        <p:spPr>
+          <a:xfrm>
+            <a:off x="9703979" y="2542032"/>
+            <a:ext cx="1664757" cy="329184"/>
           </a:xfrm>
           <a:prstGeom prst="rect">
             <a:avLst/>
@@ -12973,11 +12974,11 @@
           <a:bodyPr wrap="square" lIns="0" tIns="0" rIns="0" bIns="0" rtlCol="0" anchor="ctr"/>
           <a:lstStyle/>
           <a:p>
-            <a:pPr rtl="1" algn="ctr" indent="0" marL="0">
-              <a:buNone/>
-            </a:pPr>
-            <a:r>
-              <a:rPr lang="en-US" sz="1600" dirty="0">
+            <a:pPr rtl="1" algn="r" indent="0" marL="0">
+              <a:buNone/>
+            </a:pPr>
+            <a:r>
+              <a:rPr lang="en-US" sz="1350" dirty="0">
                 <a:solidFill>
                   <a:srgbClr val="21141A"/>
                 </a:solidFill>
@@ -12985,37 +12986,101 @@
                 <a:ea typeface="IBM Plex Sans Arabic" pitchFamily="34" charset="-122"/>
                 <a:cs typeface="IBM Plex Sans Arabic" pitchFamily="34" charset="-120"/>
               </a:rPr>
-              <a:t>تقرير الهدر كاملاً</a:t>
-            </a:r>
-            <a:endParaRPr lang="en-US" sz="1600" dirty="0"/>
-          </a:p>
-        </p:txBody>
-      </p:sp>
-      <p:sp>
-        <p:nvSpPr>
-          <p:cNvPr id="28" name="Shape 22"/>
-          <p:cNvSpPr/>
-          <p:nvPr/>
-        </p:nvSpPr>
-        <p:spPr>
-          <a:xfrm>
-            <a:off x="4322978" y="2606040"/>
-            <a:ext cx="3545738" cy="2606040"/>
+              <a:t>شركات ناشئة</a:t>
+            </a:r>
+            <a:endParaRPr lang="en-US" sz="1350" dirty="0"/>
+          </a:p>
+        </p:txBody>
+      </p:sp>
+      <p:sp>
+        <p:nvSpPr>
+          <p:cNvPr id="29" name="Shape 23"/>
+          <p:cNvSpPr/>
+          <p:nvPr/>
+        </p:nvSpPr>
+        <p:spPr>
+          <a:xfrm>
+            <a:off x="11460175" y="3026664"/>
+            <a:ext cx="82296" cy="82296"/>
+          </a:xfrm>
+          <a:prstGeom prst="rect">
+            <a:avLst/>
+          </a:prstGeom>
+          <a:solidFill>
+            <a:srgbClr val="D48A93"/>
+          </a:solidFill>
+          <a:ln/>
+        </p:spPr>
+      </p:sp>
+      <p:sp>
+        <p:nvSpPr>
+          <p:cNvPr id="30" name="Text 24"/>
+          <p:cNvSpPr txBox="1"/>
+          <p:nvPr/>
+        </p:nvSpPr>
+        <p:spPr>
+          <a:xfrm>
+            <a:off x="9703979" y="2907792"/>
+            <a:ext cx="1664757" cy="329184"/>
+          </a:xfrm>
+          <a:prstGeom prst="rect">
+            <a:avLst/>
+          </a:prstGeom>
+          <a:noFill/>
+          <a:ln/>
+        </p:spPr>
+        <p:txBody>
+          <a:bodyPr wrap="square" lIns="0" tIns="0" rIns="0" bIns="0" rtlCol="0" anchor="ctr"/>
+          <a:lstStyle/>
+          <a:p>
+            <a:pPr rtl="1" algn="r" indent="0" marL="0">
+              <a:buNone/>
+            </a:pPr>
+            <a:r>
+              <a:rPr lang="en-US" sz="1350" dirty="0">
+                <a:solidFill>
+                  <a:srgbClr val="21141A"/>
+                </a:solidFill>
+                <a:latin typeface="IBM Plex Sans Arabic" pitchFamily="34" charset="0"/>
+                <a:ea typeface="IBM Plex Sans Arabic" pitchFamily="34" charset="-122"/>
+                <a:cs typeface="IBM Plex Sans Arabic" pitchFamily="34" charset="-120"/>
+              </a:rPr>
+              <a:t>بلا فريق FinOps</a:t>
+            </a:r>
+            <a:endParaRPr lang="en-US" sz="1350" dirty="0"/>
+          </a:p>
+        </p:txBody>
+      </p:sp>
+      <p:sp>
+        <p:nvSpPr>
+          <p:cNvPr id="31" name="Shape 25"/>
+          <p:cNvSpPr/>
+          <p:nvPr/>
+        </p:nvSpPr>
+        <p:spPr>
+          <a:xfrm>
+            <a:off x="7289414" y="1554480"/>
+            <a:ext cx="2167677" cy="1453896"/>
           </a:xfrm>
           <a:prstGeom prst="roundRect">
             <a:avLst>
-              <a:gd name="adj" fmla="val 7018"/>
+              <a:gd name="adj" fmla="val 8805"/>
             </a:avLst>
           </a:prstGeom>
           <a:solidFill>
-            <a:srgbClr val="8E2F3C"/>
-          </a:solidFill>
-          <a:ln/>
+            <a:srgbClr val="FFFBF8"/>
+          </a:solidFill>
+          <a:ln w="9525">
+            <a:solidFill>
+              <a:srgbClr val="E3D5CC"/>
+            </a:solidFill>
+            <a:prstDash val="solid"/>
+          </a:ln>
         </p:spPr>
       </p:sp>
       <p:pic>
         <p:nvPicPr>
-          <p:cNvPr id="29" name="Image 4" descr="/tmp/claude-0/-home-claude/750ff410-f4aa-5276-9360-1e19d018b112/scratchpad/c/assets/i-gauge-cr.png">    </p:cNvPr>
+          <p:cNvPr id="32" name="Image 4" descr="/tmp/claude-0/-home-claude/750ff410-f4aa-5276-9360-1e19d018b112/scratchpad/c/assets/i-msg-br.png">    </p:cNvPr>
           <p:cNvPicPr>
             <a:picLocks noChangeAspect="1"/>
           </p:cNvPicPr>
@@ -13029,8 +13094,8 @@
         </p:blipFill>
         <p:spPr>
           <a:xfrm>
-            <a:off x="5821528" y="2880360"/>
-            <a:ext cx="548640" cy="548640"/>
+            <a:off x="8963315" y="1709928"/>
+            <a:ext cx="310896" cy="310896"/>
           </a:xfrm>
           <a:prstGeom prst="rect">
             <a:avLst/>
@@ -13039,14 +13104,14 @@
       </p:pic>
       <p:sp>
         <p:nvSpPr>
-          <p:cNvPr id="30" name="Text 23"/>
-          <p:cNvSpPr txBox="1"/>
-          <p:nvPr/>
-        </p:nvSpPr>
-        <p:spPr>
-          <a:xfrm>
-            <a:off x="4322978" y="3520440"/>
-            <a:ext cx="3545738" cy="365760"/>
+          <p:cNvPr id="33" name="Text 26"/>
+          <p:cNvSpPr txBox="1"/>
+          <p:nvPr/>
+        </p:nvSpPr>
+        <p:spPr>
+          <a:xfrm>
+            <a:off x="7426574" y="1682496"/>
+            <a:ext cx="1481877" cy="365760"/>
           </a:xfrm>
           <a:prstGeom prst="rect">
             <a:avLst/>
@@ -13058,34 +13123,54 @@
           <a:bodyPr wrap="square" lIns="0" tIns="0" rIns="0" bIns="0" rtlCol="0" anchor="ctr"/>
           <a:lstStyle/>
           <a:p>
-            <a:pPr rtl="1" algn="ctr" indent="0" marL="0">
-              <a:buNone/>
-            </a:pPr>
-            <a:r>
-              <a:rPr lang="en-US" sz="1700" b="1" dirty="0">
-                <a:solidFill>
-                  <a:srgbClr val="F1E4DF"/>
-                </a:solidFill>
-                <a:latin typeface="IBM Plex Sans Arabic" pitchFamily="34" charset="0"/>
-                <a:ea typeface="IBM Plex Sans Arabic" pitchFamily="34" charset="-122"/>
-                <a:cs typeface="IBM Plex Sans Arabic" pitchFamily="34" charset="-120"/>
-              </a:rPr>
-              <a:t>حسب الاستخدام</a:t>
-            </a:r>
-            <a:endParaRPr lang="en-US" sz="1700" dirty="0"/>
-          </a:p>
-        </p:txBody>
-      </p:sp>
-      <p:sp>
-        <p:nvSpPr>
-          <p:cNvPr id="31" name="Text 24"/>
-          <p:cNvSpPr txBox="1"/>
-          <p:nvPr/>
-        </p:nvSpPr>
-        <p:spPr>
-          <a:xfrm>
-            <a:off x="4322978" y="3886200"/>
-            <a:ext cx="3545738" cy="777240"/>
+            <a:pPr rtl="1" algn="r" indent="0" marL="0">
+              <a:buNone/>
+            </a:pPr>
+            <a:r>
+              <a:rPr lang="en-US" sz="1400" b="1" dirty="0">
+                <a:solidFill>
+                  <a:srgbClr val="8E2F3C"/>
+                </a:solidFill>
+                <a:latin typeface="IBM Plex Sans Arabic" pitchFamily="34" charset="0"/>
+                <a:ea typeface="IBM Plex Sans Arabic" pitchFamily="34" charset="-122"/>
+                <a:cs typeface="IBM Plex Sans Arabic" pitchFamily="34" charset="-120"/>
+              </a:rPr>
+              <a:t>العلاقات مع العملاء</a:t>
+            </a:r>
+            <a:endParaRPr lang="en-US" sz="1400" dirty="0"/>
+          </a:p>
+        </p:txBody>
+      </p:sp>
+      <p:sp>
+        <p:nvSpPr>
+          <p:cNvPr id="34" name="Shape 27"/>
+          <p:cNvSpPr/>
+          <p:nvPr/>
+        </p:nvSpPr>
+        <p:spPr>
+          <a:xfrm>
+            <a:off x="9182771" y="2295144"/>
+            <a:ext cx="82296" cy="82296"/>
+          </a:xfrm>
+          <a:prstGeom prst="rect">
+            <a:avLst/>
+          </a:prstGeom>
+          <a:solidFill>
+            <a:srgbClr val="D48A93"/>
+          </a:solidFill>
+          <a:ln/>
+        </p:spPr>
+      </p:sp>
+      <p:sp>
+        <p:nvSpPr>
+          <p:cNvPr id="35" name="Text 28"/>
+          <p:cNvSpPr txBox="1"/>
+          <p:nvPr/>
+        </p:nvSpPr>
+        <p:spPr>
+          <a:xfrm>
+            <a:off x="7426574" y="2176272"/>
+            <a:ext cx="1664757" cy="329184"/>
           </a:xfrm>
           <a:prstGeom prst="rect">
             <a:avLst/>
@@ -13097,34 +13182,54 @@
           <a:bodyPr wrap="square" lIns="0" tIns="0" rIns="0" bIns="0" rtlCol="0" anchor="ctr"/>
           <a:lstStyle/>
           <a:p>
-            <a:pPr rtl="1" algn="ctr" indent="0" marL="0">
-              <a:buNone/>
-            </a:pPr>
-            <a:r>
-              <a:rPr lang="en-US" sz="4000" b="1" dirty="0">
-                <a:solidFill>
-                  <a:srgbClr val="FBF6EE"/>
-                </a:solidFill>
-                <a:latin typeface="IBM Plex Sans Arabic" pitchFamily="34" charset="0"/>
-                <a:ea typeface="IBM Plex Sans Arabic" pitchFamily="34" charset="-122"/>
-                <a:cs typeface="IBM Plex Sans Arabic" pitchFamily="34" charset="-120"/>
-              </a:rPr>
-              <a:t>من 15 ريال</a:t>
-            </a:r>
-            <a:endParaRPr lang="en-US" sz="4000" dirty="0"/>
-          </a:p>
-        </p:txBody>
-      </p:sp>
-      <p:sp>
-        <p:nvSpPr>
-          <p:cNvPr id="32" name="Text 25"/>
-          <p:cNvSpPr txBox="1"/>
-          <p:nvPr/>
-        </p:nvSpPr>
-        <p:spPr>
-          <a:xfrm>
-            <a:off x="4322978" y="4663440"/>
-            <a:ext cx="3545738" cy="365760"/>
+            <a:pPr rtl="1" algn="r" indent="0" marL="0">
+              <a:buNone/>
+            </a:pPr>
+            <a:r>
+              <a:rPr lang="en-US" sz="1250" dirty="0">
+                <a:solidFill>
+                  <a:srgbClr val="21141A"/>
+                </a:solidFill>
+                <a:latin typeface="IBM Plex Sans Arabic" pitchFamily="34" charset="0"/>
+                <a:ea typeface="IBM Plex Sans Arabic" pitchFamily="34" charset="-122"/>
+                <a:cs typeface="IBM Plex Sans Arabic" pitchFamily="34" charset="-120"/>
+              </a:rPr>
+              <a:t>تنبيهات واتساب</a:t>
+            </a:r>
+            <a:endParaRPr lang="en-US" sz="1250" dirty="0"/>
+          </a:p>
+        </p:txBody>
+      </p:sp>
+      <p:sp>
+        <p:nvSpPr>
+          <p:cNvPr id="36" name="Shape 29"/>
+          <p:cNvSpPr/>
+          <p:nvPr/>
+        </p:nvSpPr>
+        <p:spPr>
+          <a:xfrm>
+            <a:off x="9182771" y="2624328"/>
+            <a:ext cx="82296" cy="82296"/>
+          </a:xfrm>
+          <a:prstGeom prst="rect">
+            <a:avLst/>
+          </a:prstGeom>
+          <a:solidFill>
+            <a:srgbClr val="D48A93"/>
+          </a:solidFill>
+          <a:ln/>
+        </p:spPr>
+      </p:sp>
+      <p:sp>
+        <p:nvSpPr>
+          <p:cNvPr id="37" name="Text 30"/>
+          <p:cNvSpPr txBox="1"/>
+          <p:nvPr/>
+        </p:nvSpPr>
+        <p:spPr>
+          <a:xfrm>
+            <a:off x="7426574" y="2505456"/>
+            <a:ext cx="1664757" cy="329184"/>
           </a:xfrm>
           <a:prstGeom prst="rect">
             <a:avLst/>
@@ -13136,38 +13241,38 @@
           <a:bodyPr wrap="square" lIns="0" tIns="0" rIns="0" bIns="0" rtlCol="0" anchor="ctr"/>
           <a:lstStyle/>
           <a:p>
-            <a:pPr rtl="1" algn="ctr" indent="0" marL="0">
-              <a:buNone/>
-            </a:pPr>
-            <a:r>
-              <a:rPr lang="en-US" sz="1600" dirty="0">
-                <a:solidFill>
-                  <a:srgbClr val="FBF6EE"/>
-                </a:solidFill>
-                <a:latin typeface="IBM Plex Sans Arabic" pitchFamily="34" charset="0"/>
-                <a:ea typeface="IBM Plex Sans Arabic" pitchFamily="34" charset="-122"/>
-                <a:cs typeface="IBM Plex Sans Arabic" pitchFamily="34" charset="-120"/>
-              </a:rPr>
-              <a:t>لكل مورد شهرياً</a:t>
-            </a:r>
-            <a:endParaRPr lang="en-US" sz="1600" dirty="0"/>
-          </a:p>
-        </p:txBody>
-      </p:sp>
-      <p:sp>
-        <p:nvSpPr>
-          <p:cNvPr id="33" name="Shape 26"/>
-          <p:cNvSpPr/>
-          <p:nvPr/>
-        </p:nvSpPr>
-        <p:spPr>
-          <a:xfrm>
-            <a:off x="457200" y="2606040"/>
-            <a:ext cx="3545738" cy="2606040"/>
+            <a:pPr rtl="1" algn="r" indent="0" marL="0">
+              <a:buNone/>
+            </a:pPr>
+            <a:r>
+              <a:rPr lang="en-US" sz="1250" dirty="0">
+                <a:solidFill>
+                  <a:srgbClr val="21141A"/>
+                </a:solidFill>
+                <a:latin typeface="IBM Plex Sans Arabic" pitchFamily="34" charset="0"/>
+                <a:ea typeface="IBM Plex Sans Arabic" pitchFamily="34" charset="-122"/>
+                <a:cs typeface="IBM Plex Sans Arabic" pitchFamily="34" charset="-120"/>
+              </a:rPr>
+              <a:t>دعم بالعربي</a:t>
+            </a:r>
+            <a:endParaRPr lang="en-US" sz="1250" dirty="0"/>
+          </a:p>
+        </p:txBody>
+      </p:sp>
+      <p:sp>
+        <p:nvSpPr>
+          <p:cNvPr id="38" name="Shape 31"/>
+          <p:cNvSpPr/>
+          <p:nvPr/>
+        </p:nvSpPr>
+        <p:spPr>
+          <a:xfrm>
+            <a:off x="7289414" y="3118104"/>
+            <a:ext cx="2167677" cy="1453896"/>
           </a:xfrm>
           <a:prstGeom prst="roundRect">
             <a:avLst>
-              <a:gd name="adj" fmla="val 7018"/>
+              <a:gd name="adj" fmla="val 8805"/>
             </a:avLst>
           </a:prstGeom>
           <a:solidFill>
@@ -13183,7 +13288,7 @@
       </p:sp>
       <p:pic>
         <p:nvPicPr>
-          <p:cNvPr id="34" name="Image 5" descr="/tmp/claude-0/-home-claude/750ff410-f4aa-5276-9360-1e19d018b112/scratchpad/c/assets/i-handshake-br.png">    </p:cNvPr>
+          <p:cNvPr id="39" name="Image 5" descr="/tmp/claude-0/-home-claude/750ff410-f4aa-5276-9360-1e19d018b112/scratchpad/c/assets/i-mega-br.png">    </p:cNvPr>
           <p:cNvPicPr>
             <a:picLocks noChangeAspect="1"/>
           </p:cNvPicPr>
@@ -13197,8 +13302,8 @@
         </p:blipFill>
         <p:spPr>
           <a:xfrm>
-            <a:off x="1955749" y="2880360"/>
-            <a:ext cx="548640" cy="548640"/>
+            <a:off x="8963315" y="3273552"/>
+            <a:ext cx="310896" cy="310896"/>
           </a:xfrm>
           <a:prstGeom prst="rect">
             <a:avLst/>
@@ -13207,14 +13312,14 @@
       </p:pic>
       <p:sp>
         <p:nvSpPr>
-          <p:cNvPr id="35" name="Text 27"/>
-          <p:cNvSpPr txBox="1"/>
-          <p:nvPr/>
-        </p:nvSpPr>
-        <p:spPr>
-          <a:xfrm>
-            <a:off x="457200" y="3520440"/>
-            <a:ext cx="3545738" cy="365760"/>
+          <p:cNvPr id="40" name="Text 32"/>
+          <p:cNvSpPr txBox="1"/>
+          <p:nvPr/>
+        </p:nvSpPr>
+        <p:spPr>
+          <a:xfrm>
+            <a:off x="7426574" y="3246120"/>
+            <a:ext cx="1481877" cy="365760"/>
           </a:xfrm>
           <a:prstGeom prst="rect">
             <a:avLst/>
@@ -13226,34 +13331,54 @@
           <a:bodyPr wrap="square" lIns="0" tIns="0" rIns="0" bIns="0" rtlCol="0" anchor="ctr"/>
           <a:lstStyle/>
           <a:p>
-            <a:pPr rtl="1" algn="ctr" indent="0" marL="0">
-              <a:buNone/>
-            </a:pPr>
-            <a:r>
-              <a:rPr lang="en-US" sz="1700" b="1" dirty="0">
-                <a:solidFill>
-                  <a:srgbClr val="7F6C72"/>
-                </a:solidFill>
-                <a:latin typeface="IBM Plex Sans Arabic" pitchFamily="34" charset="0"/>
-                <a:ea typeface="IBM Plex Sans Arabic" pitchFamily="34" charset="-122"/>
-                <a:cs typeface="IBM Plex Sans Arabic" pitchFamily="34" charset="-120"/>
-              </a:rPr>
-              <a:t>استشارات FinOps</a:t>
-            </a:r>
-            <a:endParaRPr lang="en-US" sz="1700" dirty="0"/>
-          </a:p>
-        </p:txBody>
-      </p:sp>
-      <p:sp>
-        <p:nvSpPr>
-          <p:cNvPr id="36" name="Text 28"/>
-          <p:cNvSpPr txBox="1"/>
-          <p:nvPr/>
-        </p:nvSpPr>
-        <p:spPr>
-          <a:xfrm>
-            <a:off x="457200" y="3886200"/>
-            <a:ext cx="3545738" cy="777240"/>
+            <a:pPr rtl="1" algn="r" indent="0" marL="0">
+              <a:buNone/>
+            </a:pPr>
+            <a:r>
+              <a:rPr lang="en-US" sz="1400" b="1" dirty="0">
+                <a:solidFill>
+                  <a:srgbClr val="8E2F3C"/>
+                </a:solidFill>
+                <a:latin typeface="IBM Plex Sans Arabic" pitchFamily="34" charset="0"/>
+                <a:ea typeface="IBM Plex Sans Arabic" pitchFamily="34" charset="-122"/>
+                <a:cs typeface="IBM Plex Sans Arabic" pitchFamily="34" charset="-120"/>
+              </a:rPr>
+              <a:t>القنوات</a:t>
+            </a:r>
+            <a:endParaRPr lang="en-US" sz="1400" dirty="0"/>
+          </a:p>
+        </p:txBody>
+      </p:sp>
+      <p:sp>
+        <p:nvSpPr>
+          <p:cNvPr id="41" name="Shape 33"/>
+          <p:cNvSpPr/>
+          <p:nvPr/>
+        </p:nvSpPr>
+        <p:spPr>
+          <a:xfrm>
+            <a:off x="9182771" y="3858768"/>
+            <a:ext cx="82296" cy="82296"/>
+          </a:xfrm>
+          <a:prstGeom prst="rect">
+            <a:avLst/>
+          </a:prstGeom>
+          <a:solidFill>
+            <a:srgbClr val="D48A93"/>
+          </a:solidFill>
+          <a:ln/>
+        </p:spPr>
+      </p:sp>
+      <p:sp>
+        <p:nvSpPr>
+          <p:cNvPr id="42" name="Text 34"/>
+          <p:cNvSpPr txBox="1"/>
+          <p:nvPr/>
+        </p:nvSpPr>
+        <p:spPr>
+          <a:xfrm>
+            <a:off x="7426574" y="3739896"/>
+            <a:ext cx="1664757" cy="329184"/>
           </a:xfrm>
           <a:prstGeom prst="rect">
             <a:avLst/>
@@ -13265,11 +13390,481 @@
           <a:bodyPr wrap="square" lIns="0" tIns="0" rIns="0" bIns="0" rtlCol="0" anchor="ctr"/>
           <a:lstStyle/>
           <a:p>
-            <a:pPr rtl="1" algn="ctr" indent="0" marL="0">
-              <a:buNone/>
-            </a:pPr>
-            <a:r>
-              <a:rPr lang="en-US" sz="4000" b="1" dirty="0">
+            <a:pPr rtl="1" algn="r" indent="0" marL="0">
+              <a:buNone/>
+            </a:pPr>
+            <a:r>
+              <a:rPr lang="en-US" sz="1250" dirty="0">
+                <a:solidFill>
+                  <a:srgbClr val="21141A"/>
+                </a:solidFill>
+                <a:latin typeface="IBM Plex Sans Arabic" pitchFamily="34" charset="0"/>
+                <a:ea typeface="IBM Plex Sans Arabic" pitchFamily="34" charset="-122"/>
+                <a:cs typeface="IBM Plex Sans Arabic" pitchFamily="34" charset="-120"/>
+              </a:rPr>
+              <a:t>الموقع والفحص المجاني</a:t>
+            </a:r>
+            <a:endParaRPr lang="en-US" sz="1250" dirty="0"/>
+          </a:p>
+        </p:txBody>
+      </p:sp>
+      <p:sp>
+        <p:nvSpPr>
+          <p:cNvPr id="43" name="Shape 35"/>
+          <p:cNvSpPr/>
+          <p:nvPr/>
+        </p:nvSpPr>
+        <p:spPr>
+          <a:xfrm>
+            <a:off x="9182771" y="4187952"/>
+            <a:ext cx="82296" cy="82296"/>
+          </a:xfrm>
+          <a:prstGeom prst="rect">
+            <a:avLst/>
+          </a:prstGeom>
+          <a:solidFill>
+            <a:srgbClr val="D48A93"/>
+          </a:solidFill>
+          <a:ln/>
+        </p:spPr>
+      </p:sp>
+      <p:sp>
+        <p:nvSpPr>
+          <p:cNvPr id="44" name="Text 36"/>
+          <p:cNvSpPr txBox="1"/>
+          <p:nvPr/>
+        </p:nvSpPr>
+        <p:spPr>
+          <a:xfrm>
+            <a:off x="7426574" y="4069080"/>
+            <a:ext cx="1664757" cy="329184"/>
+          </a:xfrm>
+          <a:prstGeom prst="rect">
+            <a:avLst/>
+          </a:prstGeom>
+          <a:noFill/>
+          <a:ln/>
+        </p:spPr>
+        <p:txBody>
+          <a:bodyPr wrap="square" lIns="0" tIns="0" rIns="0" bIns="0" rtlCol="0" anchor="ctr"/>
+          <a:lstStyle/>
+          <a:p>
+            <a:pPr rtl="1" algn="r" indent="0" marL="0">
+              <a:buNone/>
+            </a:pPr>
+            <a:r>
+              <a:rPr lang="en-US" sz="1250" dirty="0">
+                <a:solidFill>
+                  <a:srgbClr val="21141A"/>
+                </a:solidFill>
+                <a:latin typeface="IBM Plex Sans Arabic" pitchFamily="34" charset="0"/>
+                <a:ea typeface="IBM Plex Sans Arabic" pitchFamily="34" charset="-122"/>
+                <a:cs typeface="IBM Plex Sans Arabic" pitchFamily="34" charset="-120"/>
+              </a:rPr>
+              <a:t>شركاء السحابة</a:t>
+            </a:r>
+            <a:endParaRPr lang="en-US" sz="1250" dirty="0"/>
+          </a:p>
+        </p:txBody>
+      </p:sp>
+      <p:sp>
+        <p:nvSpPr>
+          <p:cNvPr id="45" name="Shape 37"/>
+          <p:cNvSpPr/>
+          <p:nvPr/>
+        </p:nvSpPr>
+        <p:spPr>
+          <a:xfrm>
+            <a:off x="5012009" y="1554480"/>
+            <a:ext cx="2167677" cy="3017520"/>
+          </a:xfrm>
+          <a:prstGeom prst="roundRect">
+            <a:avLst>
+              <a:gd name="adj" fmla="val 5906"/>
+            </a:avLst>
+          </a:prstGeom>
+          <a:solidFill>
+            <a:srgbClr val="8E2F3C"/>
+          </a:solidFill>
+          <a:ln/>
+        </p:spPr>
+      </p:sp>
+      <p:pic>
+        <p:nvPicPr>
+          <p:cNvPr id="46" name="Image 6" descr="/tmp/claude-0/-home-claude/750ff410-f4aa-5276-9360-1e19d018b112/scratchpad/c/assets/i-gem-cr.png">    </p:cNvPr>
+          <p:cNvPicPr>
+            <a:picLocks noChangeAspect="1"/>
+          </p:cNvPicPr>
+          <p:nvPr/>
+        </p:nvPicPr>
+        <p:blipFill>
+          <a:blip r:embed="rId7"/>
+          <a:stretch>
+            <a:fillRect/>
+          </a:stretch>
+        </p:blipFill>
+        <p:spPr>
+          <a:xfrm>
+            <a:off x="6685910" y="1709928"/>
+            <a:ext cx="310896" cy="310896"/>
+          </a:xfrm>
+          <a:prstGeom prst="rect">
+            <a:avLst/>
+          </a:prstGeom>
+        </p:spPr>
+      </p:pic>
+      <p:sp>
+        <p:nvSpPr>
+          <p:cNvPr id="47" name="Text 38"/>
+          <p:cNvSpPr txBox="1"/>
+          <p:nvPr/>
+        </p:nvSpPr>
+        <p:spPr>
+          <a:xfrm>
+            <a:off x="5149169" y="1682496"/>
+            <a:ext cx="1481877" cy="365760"/>
+          </a:xfrm>
+          <a:prstGeom prst="rect">
+            <a:avLst/>
+          </a:prstGeom>
+          <a:noFill/>
+          <a:ln/>
+        </p:spPr>
+        <p:txBody>
+          <a:bodyPr wrap="square" lIns="0" tIns="0" rIns="0" bIns="0" rtlCol="0" anchor="ctr"/>
+          <a:lstStyle/>
+          <a:p>
+            <a:pPr rtl="1" algn="r" indent="0" marL="0">
+              <a:buNone/>
+            </a:pPr>
+            <a:r>
+              <a:rPr lang="en-US" sz="1400" b="1" dirty="0">
+                <a:solidFill>
+                  <a:srgbClr val="FBF6EE"/>
+                </a:solidFill>
+                <a:latin typeface="IBM Plex Sans Arabic" pitchFamily="34" charset="0"/>
+                <a:ea typeface="IBM Plex Sans Arabic" pitchFamily="34" charset="-122"/>
+                <a:cs typeface="IBM Plex Sans Arabic" pitchFamily="34" charset="-120"/>
+              </a:rPr>
+              <a:t>القيم المقترحة</a:t>
+            </a:r>
+            <a:endParaRPr lang="en-US" sz="1400" dirty="0"/>
+          </a:p>
+        </p:txBody>
+      </p:sp>
+      <p:sp>
+        <p:nvSpPr>
+          <p:cNvPr id="48" name="Shape 39"/>
+          <p:cNvSpPr/>
+          <p:nvPr/>
+        </p:nvSpPr>
+        <p:spPr>
+          <a:xfrm>
+            <a:off x="6905366" y="2295144"/>
+            <a:ext cx="82296" cy="82296"/>
+          </a:xfrm>
+          <a:prstGeom prst="rect">
+            <a:avLst/>
+          </a:prstGeom>
+          <a:solidFill>
+            <a:srgbClr val="C9A46E"/>
+          </a:solidFill>
+          <a:ln/>
+        </p:spPr>
+      </p:sp>
+      <p:sp>
+        <p:nvSpPr>
+          <p:cNvPr id="49" name="Text 40"/>
+          <p:cNvSpPr txBox="1"/>
+          <p:nvPr/>
+        </p:nvSpPr>
+        <p:spPr>
+          <a:xfrm>
+            <a:off x="5149169" y="2176272"/>
+            <a:ext cx="1664757" cy="329184"/>
+          </a:xfrm>
+          <a:prstGeom prst="rect">
+            <a:avLst/>
+          </a:prstGeom>
+          <a:noFill/>
+          <a:ln/>
+        </p:spPr>
+        <p:txBody>
+          <a:bodyPr wrap="square" lIns="0" tIns="0" rIns="0" bIns="0" rtlCol="0" anchor="ctr"/>
+          <a:lstStyle/>
+          <a:p>
+            <a:pPr rtl="1" algn="r" indent="0" marL="0">
+              <a:buNone/>
+            </a:pPr>
+            <a:r>
+              <a:rPr lang="en-US" sz="1350" dirty="0">
+                <a:solidFill>
+                  <a:srgbClr val="FBF6EE"/>
+                </a:solidFill>
+                <a:latin typeface="IBM Plex Sans Arabic" pitchFamily="34" charset="0"/>
+                <a:ea typeface="IBM Plex Sans Arabic" pitchFamily="34" charset="-122"/>
+                <a:cs typeface="IBM Plex Sans Arabic" pitchFamily="34" charset="-120"/>
+              </a:rPr>
+              <a:t>فاتورة سحابة أقل</a:t>
+            </a:r>
+            <a:endParaRPr lang="en-US" sz="1350" dirty="0"/>
+          </a:p>
+        </p:txBody>
+      </p:sp>
+      <p:sp>
+        <p:nvSpPr>
+          <p:cNvPr id="50" name="Shape 41"/>
+          <p:cNvSpPr/>
+          <p:nvPr/>
+        </p:nvSpPr>
+        <p:spPr>
+          <a:xfrm>
+            <a:off x="6905366" y="2660904"/>
+            <a:ext cx="82296" cy="82296"/>
+          </a:xfrm>
+          <a:prstGeom prst="rect">
+            <a:avLst/>
+          </a:prstGeom>
+          <a:solidFill>
+            <a:srgbClr val="C9A46E"/>
+          </a:solidFill>
+          <a:ln/>
+        </p:spPr>
+      </p:sp>
+      <p:sp>
+        <p:nvSpPr>
+          <p:cNvPr id="51" name="Text 42"/>
+          <p:cNvSpPr txBox="1"/>
+          <p:nvPr/>
+        </p:nvSpPr>
+        <p:spPr>
+          <a:xfrm>
+            <a:off x="5149169" y="2542032"/>
+            <a:ext cx="1664757" cy="329184"/>
+          </a:xfrm>
+          <a:prstGeom prst="rect">
+            <a:avLst/>
+          </a:prstGeom>
+          <a:noFill/>
+          <a:ln/>
+        </p:spPr>
+        <p:txBody>
+          <a:bodyPr wrap="square" lIns="0" tIns="0" rIns="0" bIns="0" rtlCol="0" anchor="ctr"/>
+          <a:lstStyle/>
+          <a:p>
+            <a:pPr rtl="1" algn="r" indent="0" marL="0">
+              <a:buNone/>
+            </a:pPr>
+            <a:r>
+              <a:rPr lang="en-US" sz="1350" dirty="0">
+                <a:solidFill>
+                  <a:srgbClr val="FBF6EE"/>
+                </a:solidFill>
+                <a:latin typeface="IBM Plex Sans Arabic" pitchFamily="34" charset="0"/>
+                <a:ea typeface="IBM Plex Sans Arabic" pitchFamily="34" charset="-122"/>
+                <a:cs typeface="IBM Plex Sans Arabic" pitchFamily="34" charset="-120"/>
+              </a:rPr>
+              <a:t>قراءة فقط وآمن</a:t>
+            </a:r>
+            <a:endParaRPr lang="en-US" sz="1350" dirty="0"/>
+          </a:p>
+        </p:txBody>
+      </p:sp>
+      <p:sp>
+        <p:nvSpPr>
+          <p:cNvPr id="52" name="Shape 43"/>
+          <p:cNvSpPr/>
+          <p:nvPr/>
+        </p:nvSpPr>
+        <p:spPr>
+          <a:xfrm>
+            <a:off x="6905366" y="3026664"/>
+            <a:ext cx="82296" cy="82296"/>
+          </a:xfrm>
+          <a:prstGeom prst="rect">
+            <a:avLst/>
+          </a:prstGeom>
+          <a:solidFill>
+            <a:srgbClr val="C9A46E"/>
+          </a:solidFill>
+          <a:ln/>
+        </p:spPr>
+      </p:sp>
+      <p:sp>
+        <p:nvSpPr>
+          <p:cNvPr id="53" name="Text 44"/>
+          <p:cNvSpPr txBox="1"/>
+          <p:nvPr/>
+        </p:nvSpPr>
+        <p:spPr>
+          <a:xfrm>
+            <a:off x="5149169" y="2907792"/>
+            <a:ext cx="1664757" cy="329184"/>
+          </a:xfrm>
+          <a:prstGeom prst="rect">
+            <a:avLst/>
+          </a:prstGeom>
+          <a:noFill/>
+          <a:ln/>
+        </p:spPr>
+        <p:txBody>
+          <a:bodyPr wrap="square" lIns="0" tIns="0" rIns="0" bIns="0" rtlCol="0" anchor="ctr"/>
+          <a:lstStyle/>
+          <a:p>
+            <a:pPr rtl="1" algn="r" indent="0" marL="0">
+              <a:buNone/>
+            </a:pPr>
+            <a:r>
+              <a:rPr lang="en-US" sz="1350" dirty="0">
+                <a:solidFill>
+                  <a:srgbClr val="FBF6EE"/>
+                </a:solidFill>
+                <a:latin typeface="IBM Plex Sans Arabic" pitchFamily="34" charset="0"/>
+                <a:ea typeface="IBM Plex Sans Arabic" pitchFamily="34" charset="-122"/>
+                <a:cs typeface="IBM Plex Sans Arabic" pitchFamily="34" charset="-120"/>
+              </a:rPr>
+              <a:t>تنفيذ بموافقتك</a:t>
+            </a:r>
+            <a:endParaRPr lang="en-US" sz="1350" dirty="0"/>
+          </a:p>
+        </p:txBody>
+      </p:sp>
+      <p:sp>
+        <p:nvSpPr>
+          <p:cNvPr id="54" name="Shape 45"/>
+          <p:cNvSpPr/>
+          <p:nvPr/>
+        </p:nvSpPr>
+        <p:spPr>
+          <a:xfrm>
+            <a:off x="6905366" y="3392424"/>
+            <a:ext cx="82296" cy="82296"/>
+          </a:xfrm>
+          <a:prstGeom prst="rect">
+            <a:avLst/>
+          </a:prstGeom>
+          <a:solidFill>
+            <a:srgbClr val="C9A46E"/>
+          </a:solidFill>
+          <a:ln/>
+        </p:spPr>
+      </p:sp>
+      <p:sp>
+        <p:nvSpPr>
+          <p:cNvPr id="55" name="Text 46"/>
+          <p:cNvSpPr txBox="1"/>
+          <p:nvPr/>
+        </p:nvSpPr>
+        <p:spPr>
+          <a:xfrm>
+            <a:off x="5149169" y="3273552"/>
+            <a:ext cx="1664757" cy="329184"/>
+          </a:xfrm>
+          <a:prstGeom prst="rect">
+            <a:avLst/>
+          </a:prstGeom>
+          <a:noFill/>
+          <a:ln/>
+        </p:spPr>
+        <p:txBody>
+          <a:bodyPr wrap="square" lIns="0" tIns="0" rIns="0" bIns="0" rtlCol="0" anchor="ctr"/>
+          <a:lstStyle/>
+          <a:p>
+            <a:pPr rtl="1" algn="r" indent="0" marL="0">
+              <a:buNone/>
+            </a:pPr>
+            <a:r>
+              <a:rPr lang="en-US" sz="1350" dirty="0">
+                <a:solidFill>
+                  <a:srgbClr val="FBF6EE"/>
+                </a:solidFill>
+                <a:latin typeface="IBM Plex Sans Arabic" pitchFamily="34" charset="0"/>
+                <a:ea typeface="IBM Plex Sans Arabic" pitchFamily="34" charset="-122"/>
+                <a:cs typeface="IBM Plex Sans Arabic" pitchFamily="34" charset="-120"/>
+              </a:rPr>
+              <a:t>السحب المحلية والعالمية</a:t>
+            </a:r>
+            <a:endParaRPr lang="en-US" sz="1350" dirty="0"/>
+          </a:p>
+        </p:txBody>
+      </p:sp>
+      <p:sp>
+        <p:nvSpPr>
+          <p:cNvPr id="56" name="Shape 47"/>
+          <p:cNvSpPr/>
+          <p:nvPr/>
+        </p:nvSpPr>
+        <p:spPr>
+          <a:xfrm>
+            <a:off x="2734605" y="1554480"/>
+            <a:ext cx="2167677" cy="1453896"/>
+          </a:xfrm>
+          <a:prstGeom prst="roundRect">
+            <a:avLst>
+              <a:gd name="adj" fmla="val 8805"/>
+            </a:avLst>
+          </a:prstGeom>
+          <a:solidFill>
+            <a:srgbClr val="FFFBF8"/>
+          </a:solidFill>
+          <a:ln w="9525">
+            <a:solidFill>
+              <a:srgbClr val="E3D5CC"/>
+            </a:solidFill>
+            <a:prstDash val="solid"/>
+          </a:ln>
+        </p:spPr>
+      </p:sp>
+      <p:pic>
+        <p:nvPicPr>
+          <p:cNvPr id="57" name="Image 7" descr="/tmp/claude-0/-home-claude/750ff410-f4aa-5276-9360-1e19d018b112/scratchpad/c/assets/i-act-br.png">    </p:cNvPr>
+          <p:cNvPicPr>
+            <a:picLocks noChangeAspect="1"/>
+          </p:cNvPicPr>
+          <p:nvPr/>
+        </p:nvPicPr>
+        <p:blipFill>
+          <a:blip r:embed="rId8"/>
+          <a:stretch>
+            <a:fillRect/>
+          </a:stretch>
+        </p:blipFill>
+        <p:spPr>
+          <a:xfrm>
+            <a:off x="4408505" y="1709928"/>
+            <a:ext cx="310896" cy="310896"/>
+          </a:xfrm>
+          <a:prstGeom prst="rect">
+            <a:avLst/>
+          </a:prstGeom>
+        </p:spPr>
+      </p:pic>
+      <p:sp>
+        <p:nvSpPr>
+          <p:cNvPr id="58" name="Text 48"/>
+          <p:cNvSpPr txBox="1"/>
+          <p:nvPr/>
+        </p:nvSpPr>
+        <p:spPr>
+          <a:xfrm>
+            <a:off x="2871765" y="1682496"/>
+            <a:ext cx="1481877" cy="365760"/>
+          </a:xfrm>
+          <a:prstGeom prst="rect">
+            <a:avLst/>
+          </a:prstGeom>
+          <a:noFill/>
+          <a:ln/>
+        </p:spPr>
+        <p:txBody>
+          <a:bodyPr wrap="square" lIns="0" tIns="0" rIns="0" bIns="0" rtlCol="0" anchor="ctr"/>
+          <a:lstStyle/>
+          <a:p>
+            <a:pPr rtl="1" algn="r" indent="0" marL="0">
+              <a:buNone/>
+            </a:pPr>
+            <a:r>
+              <a:rPr lang="en-US" sz="1400" b="1" dirty="0">
                 <a:solidFill>
                   <a:srgbClr val="8E2F3C"/>
                 </a:solidFill>
@@ -13277,22 +13872,42 @@
                 <a:ea typeface="IBM Plex Sans Arabic" pitchFamily="34" charset="-122"/>
                 <a:cs typeface="IBM Plex Sans Arabic" pitchFamily="34" charset="-120"/>
               </a:rPr>
-              <a:t>حسب المشروع</a:t>
-            </a:r>
-            <a:endParaRPr lang="en-US" sz="4000" dirty="0"/>
-          </a:p>
-        </p:txBody>
-      </p:sp>
-      <p:sp>
-        <p:nvSpPr>
-          <p:cNvPr id="37" name="Text 29"/>
-          <p:cNvSpPr txBox="1"/>
-          <p:nvPr/>
-        </p:nvSpPr>
-        <p:spPr>
-          <a:xfrm>
-            <a:off x="457200" y="4663440"/>
-            <a:ext cx="3545738" cy="365760"/>
+              <a:t>الأنشطة الرئيسية</a:t>
+            </a:r>
+            <a:endParaRPr lang="en-US" sz="1400" dirty="0"/>
+          </a:p>
+        </p:txBody>
+      </p:sp>
+      <p:sp>
+        <p:nvSpPr>
+          <p:cNvPr id="59" name="Shape 49"/>
+          <p:cNvSpPr/>
+          <p:nvPr/>
+        </p:nvSpPr>
+        <p:spPr>
+          <a:xfrm>
+            <a:off x="4627961" y="2295144"/>
+            <a:ext cx="82296" cy="82296"/>
+          </a:xfrm>
+          <a:prstGeom prst="rect">
+            <a:avLst/>
+          </a:prstGeom>
+          <a:solidFill>
+            <a:srgbClr val="D48A93"/>
+          </a:solidFill>
+          <a:ln/>
+        </p:spPr>
+      </p:sp>
+      <p:sp>
+        <p:nvSpPr>
+          <p:cNvPr id="60" name="Text 50"/>
+          <p:cNvSpPr txBox="1"/>
+          <p:nvPr/>
+        </p:nvSpPr>
+        <p:spPr>
+          <a:xfrm>
+            <a:off x="2871765" y="2176272"/>
+            <a:ext cx="1664757" cy="329184"/>
           </a:xfrm>
           <a:prstGeom prst="rect">
             <a:avLst/>
@@ -13304,11 +13919,11 @@
           <a:bodyPr wrap="square" lIns="0" tIns="0" rIns="0" bIns="0" rtlCol="0" anchor="ctr"/>
           <a:lstStyle/>
           <a:p>
-            <a:pPr rtl="1" algn="ctr" indent="0" marL="0">
-              <a:buNone/>
-            </a:pPr>
-            <a:r>
-              <a:rPr lang="en-US" sz="1600" dirty="0">
+            <a:pPr rtl="1" algn="r" indent="0" marL="0">
+              <a:buNone/>
+            </a:pPr>
+            <a:r>
+              <a:rPr lang="en-US" sz="1250" dirty="0">
                 <a:solidFill>
                   <a:srgbClr val="21141A"/>
                 </a:solidFill>
@@ -13316,22 +13931,42 @@
                 <a:ea typeface="IBM Plex Sans Arabic" pitchFamily="34" charset="-122"/>
                 <a:cs typeface="IBM Plex Sans Arabic" pitchFamily="34" charset="-120"/>
               </a:rPr>
-              <a:t>مهندس FinOps مخصص</a:t>
-            </a:r>
-            <a:endParaRPr lang="en-US" sz="1600" dirty="0"/>
-          </a:p>
-        </p:txBody>
-      </p:sp>
-      <p:sp>
-        <p:nvSpPr>
-          <p:cNvPr id="38" name="Text 30"/>
-          <p:cNvSpPr txBox="1"/>
-          <p:nvPr/>
-        </p:nvSpPr>
-        <p:spPr>
-          <a:xfrm>
-            <a:off x="457200" y="5486400"/>
-            <a:ext cx="11277295" cy="411480"/>
+              <a:t>كشف الهدر وتحليله</a:t>
+            </a:r>
+            <a:endParaRPr lang="en-US" sz="1250" dirty="0"/>
+          </a:p>
+        </p:txBody>
+      </p:sp>
+      <p:sp>
+        <p:nvSpPr>
+          <p:cNvPr id="61" name="Shape 51"/>
+          <p:cNvSpPr/>
+          <p:nvPr/>
+        </p:nvSpPr>
+        <p:spPr>
+          <a:xfrm>
+            <a:off x="4627961" y="2624328"/>
+            <a:ext cx="82296" cy="82296"/>
+          </a:xfrm>
+          <a:prstGeom prst="rect">
+            <a:avLst/>
+          </a:prstGeom>
+          <a:solidFill>
+            <a:srgbClr val="D48A93"/>
+          </a:solidFill>
+          <a:ln/>
+        </p:spPr>
+      </p:sp>
+      <p:sp>
+        <p:nvSpPr>
+          <p:cNvPr id="62" name="Text 52"/>
+          <p:cNvSpPr txBox="1"/>
+          <p:nvPr/>
+        </p:nvSpPr>
+        <p:spPr>
+          <a:xfrm>
+            <a:off x="2871765" y="2505456"/>
+            <a:ext cx="1664757" cy="329184"/>
           </a:xfrm>
           <a:prstGeom prst="rect">
             <a:avLst/>
@@ -13343,11 +13978,101 @@
           <a:bodyPr wrap="square" lIns="0" tIns="0" rIns="0" bIns="0" rtlCol="0" anchor="ctr"/>
           <a:lstStyle/>
           <a:p>
-            <a:pPr rtl="1" algn="ctr" indent="0" marL="0">
-              <a:buNone/>
-            </a:pPr>
-            <a:r>
-              <a:rPr lang="en-US" sz="1800" b="1" dirty="0">
+            <a:pPr rtl="1" algn="r" indent="0" marL="0">
+              <a:buNone/>
+            </a:pPr>
+            <a:r>
+              <a:rPr lang="en-US" sz="1250" dirty="0">
+                <a:solidFill>
+                  <a:srgbClr val="21141A"/>
+                </a:solidFill>
+                <a:latin typeface="IBM Plex Sans Arabic" pitchFamily="34" charset="0"/>
+                <a:ea typeface="IBM Plex Sans Arabic" pitchFamily="34" charset="-122"/>
+                <a:cs typeface="IBM Plex Sans Arabic" pitchFamily="34" charset="-120"/>
+              </a:rPr>
+              <a:t>تطوير المنصة</a:t>
+            </a:r>
+            <a:endParaRPr lang="en-US" sz="1250" dirty="0"/>
+          </a:p>
+        </p:txBody>
+      </p:sp>
+      <p:sp>
+        <p:nvSpPr>
+          <p:cNvPr id="63" name="Shape 53"/>
+          <p:cNvSpPr/>
+          <p:nvPr/>
+        </p:nvSpPr>
+        <p:spPr>
+          <a:xfrm>
+            <a:off x="2734605" y="3118104"/>
+            <a:ext cx="2167677" cy="1453896"/>
+          </a:xfrm>
+          <a:prstGeom prst="roundRect">
+            <a:avLst>
+              <a:gd name="adj" fmla="val 8805"/>
+            </a:avLst>
+          </a:prstGeom>
+          <a:solidFill>
+            <a:srgbClr val="FFFBF8"/>
+          </a:solidFill>
+          <a:ln w="9525">
+            <a:solidFill>
+              <a:srgbClr val="E3D5CC"/>
+            </a:solidFill>
+            <a:prstDash val="solid"/>
+          </a:ln>
+        </p:spPr>
+      </p:sp>
+      <p:pic>
+        <p:nvPicPr>
+          <p:cNvPr id="64" name="Image 8" descr="/tmp/claude-0/-home-claude/750ff410-f4aa-5276-9360-1e19d018b112/scratchpad/c/assets/i-box-br.png">    </p:cNvPr>
+          <p:cNvPicPr>
+            <a:picLocks noChangeAspect="1"/>
+          </p:cNvPicPr>
+          <p:nvPr/>
+        </p:nvPicPr>
+        <p:blipFill>
+          <a:blip r:embed="rId9"/>
+          <a:stretch>
+            <a:fillRect/>
+          </a:stretch>
+        </p:blipFill>
+        <p:spPr>
+          <a:xfrm>
+            <a:off x="4408505" y="3273552"/>
+            <a:ext cx="310896" cy="310896"/>
+          </a:xfrm>
+          <a:prstGeom prst="rect">
+            <a:avLst/>
+          </a:prstGeom>
+        </p:spPr>
+      </p:pic>
+      <p:sp>
+        <p:nvSpPr>
+          <p:cNvPr id="65" name="Text 54"/>
+          <p:cNvSpPr txBox="1"/>
+          <p:nvPr/>
+        </p:nvSpPr>
+        <p:spPr>
+          <a:xfrm>
+            <a:off x="2871765" y="3246120"/>
+            <a:ext cx="1481877" cy="365760"/>
+          </a:xfrm>
+          <a:prstGeom prst="rect">
+            <a:avLst/>
+          </a:prstGeom>
+          <a:noFill/>
+          <a:ln/>
+        </p:spPr>
+        <p:txBody>
+          <a:bodyPr wrap="square" lIns="0" tIns="0" rIns="0" bIns="0" rtlCol="0" anchor="ctr"/>
+          <a:lstStyle/>
+          <a:p>
+            <a:pPr rtl="1" algn="r" indent="0" marL="0">
+              <a:buNone/>
+            </a:pPr>
+            <a:r>
+              <a:rPr lang="en-US" sz="1400" b="1" dirty="0">
                 <a:solidFill>
                   <a:srgbClr val="8E2F3C"/>
                 </a:solidFill>
@@ -13355,9 +14080,810 @@
                 <a:ea typeface="IBM Plex Sans Arabic" pitchFamily="34" charset="-122"/>
                 <a:cs typeface="IBM Plex Sans Arabic" pitchFamily="34" charset="-120"/>
               </a:rPr>
-              <a:t>بلا اشتراك ثابت، وبسقف شهري تحدده أنت</a:t>
-            </a:r>
-            <a:endParaRPr lang="en-US" sz="1800" dirty="0"/>
+              <a:t>الموارد الرئيسية</a:t>
+            </a:r>
+            <a:endParaRPr lang="en-US" sz="1400" dirty="0"/>
+          </a:p>
+        </p:txBody>
+      </p:sp>
+      <p:sp>
+        <p:nvSpPr>
+          <p:cNvPr id="66" name="Shape 55"/>
+          <p:cNvSpPr/>
+          <p:nvPr/>
+        </p:nvSpPr>
+        <p:spPr>
+          <a:xfrm>
+            <a:off x="4627961" y="3858768"/>
+            <a:ext cx="82296" cy="82296"/>
+          </a:xfrm>
+          <a:prstGeom prst="rect">
+            <a:avLst/>
+          </a:prstGeom>
+          <a:solidFill>
+            <a:srgbClr val="D48A93"/>
+          </a:solidFill>
+          <a:ln/>
+        </p:spPr>
+      </p:sp>
+      <p:sp>
+        <p:nvSpPr>
+          <p:cNvPr id="67" name="Text 56"/>
+          <p:cNvSpPr txBox="1"/>
+          <p:nvPr/>
+        </p:nvSpPr>
+        <p:spPr>
+          <a:xfrm>
+            <a:off x="2871765" y="3739896"/>
+            <a:ext cx="1664757" cy="329184"/>
+          </a:xfrm>
+          <a:prstGeom prst="rect">
+            <a:avLst/>
+          </a:prstGeom>
+          <a:noFill/>
+          <a:ln/>
+        </p:spPr>
+        <p:txBody>
+          <a:bodyPr wrap="square" lIns="0" tIns="0" rIns="0" bIns="0" rtlCol="0" anchor="ctr"/>
+          <a:lstStyle/>
+          <a:p>
+            <a:pPr rtl="1" algn="r" indent="0" marL="0">
+              <a:buNone/>
+            </a:pPr>
+            <a:r>
+              <a:rPr lang="en-US" sz="1250" dirty="0">
+                <a:solidFill>
+                  <a:srgbClr val="21141A"/>
+                </a:solidFill>
+                <a:latin typeface="IBM Plex Sans Arabic" pitchFamily="34" charset="0"/>
+                <a:ea typeface="IBM Plex Sans Arabic" pitchFamily="34" charset="-122"/>
+                <a:cs typeface="IBM Plex Sans Arabic" pitchFamily="34" charset="-120"/>
+              </a:rPr>
+              <a:t>نموذج الذكاء الاصطناعي</a:t>
+            </a:r>
+            <a:endParaRPr lang="en-US" sz="1250" dirty="0"/>
+          </a:p>
+        </p:txBody>
+      </p:sp>
+      <p:sp>
+        <p:nvSpPr>
+          <p:cNvPr id="68" name="Shape 57"/>
+          <p:cNvSpPr/>
+          <p:nvPr/>
+        </p:nvSpPr>
+        <p:spPr>
+          <a:xfrm>
+            <a:off x="4627961" y="4187952"/>
+            <a:ext cx="82296" cy="82296"/>
+          </a:xfrm>
+          <a:prstGeom prst="rect">
+            <a:avLst/>
+          </a:prstGeom>
+          <a:solidFill>
+            <a:srgbClr val="D48A93"/>
+          </a:solidFill>
+          <a:ln/>
+        </p:spPr>
+      </p:sp>
+      <p:sp>
+        <p:nvSpPr>
+          <p:cNvPr id="69" name="Text 58"/>
+          <p:cNvSpPr txBox="1"/>
+          <p:nvPr/>
+        </p:nvSpPr>
+        <p:spPr>
+          <a:xfrm>
+            <a:off x="2871765" y="4069080"/>
+            <a:ext cx="1664757" cy="329184"/>
+          </a:xfrm>
+          <a:prstGeom prst="rect">
+            <a:avLst/>
+          </a:prstGeom>
+          <a:noFill/>
+          <a:ln/>
+        </p:spPr>
+        <p:txBody>
+          <a:bodyPr wrap="square" lIns="0" tIns="0" rIns="0" bIns="0" rtlCol="0" anchor="ctr"/>
+          <a:lstStyle/>
+          <a:p>
+            <a:pPr rtl="1" algn="r" indent="0" marL="0">
+              <a:buNone/>
+            </a:pPr>
+            <a:r>
+              <a:rPr lang="en-US" sz="1250" dirty="0">
+                <a:solidFill>
+                  <a:srgbClr val="21141A"/>
+                </a:solidFill>
+                <a:latin typeface="IBM Plex Sans Arabic" pitchFamily="34" charset="0"/>
+                <a:ea typeface="IBM Plex Sans Arabic" pitchFamily="34" charset="-122"/>
+                <a:cs typeface="IBM Plex Sans Arabic" pitchFamily="34" charset="-120"/>
+              </a:rPr>
+              <a:t>فريق تقني وFinOps</a:t>
+            </a:r>
+            <a:endParaRPr lang="en-US" sz="1250" dirty="0"/>
+          </a:p>
+        </p:txBody>
+      </p:sp>
+      <p:sp>
+        <p:nvSpPr>
+          <p:cNvPr id="70" name="Shape 59"/>
+          <p:cNvSpPr/>
+          <p:nvPr/>
+        </p:nvSpPr>
+        <p:spPr>
+          <a:xfrm>
+            <a:off x="457200" y="1554480"/>
+            <a:ext cx="2167677" cy="3017520"/>
+          </a:xfrm>
+          <a:prstGeom prst="roundRect">
+            <a:avLst>
+              <a:gd name="adj" fmla="val 5906"/>
+            </a:avLst>
+          </a:prstGeom>
+          <a:solidFill>
+            <a:srgbClr val="FFFBF8"/>
+          </a:solidFill>
+          <a:ln w="9525">
+            <a:solidFill>
+              <a:srgbClr val="E3D5CC"/>
+            </a:solidFill>
+            <a:prstDash val="solid"/>
+          </a:ln>
+        </p:spPr>
+      </p:sp>
+      <p:pic>
+        <p:nvPicPr>
+          <p:cNvPr id="71" name="Image 9" descr="/tmp/claude-0/-home-claude/750ff410-f4aa-5276-9360-1e19d018b112/scratchpad/c/assets/i-handshake-br.png">    </p:cNvPr>
+          <p:cNvPicPr>
+            <a:picLocks noChangeAspect="1"/>
+          </p:cNvPicPr>
+          <p:nvPr/>
+        </p:nvPicPr>
+        <p:blipFill>
+          <a:blip r:embed="rId10"/>
+          <a:stretch>
+            <a:fillRect/>
+          </a:stretch>
+        </p:blipFill>
+        <p:spPr>
+          <a:xfrm>
+            <a:off x="2131101" y="1709928"/>
+            <a:ext cx="310896" cy="310896"/>
+          </a:xfrm>
+          <a:prstGeom prst="rect">
+            <a:avLst/>
+          </a:prstGeom>
+        </p:spPr>
+      </p:pic>
+      <p:sp>
+        <p:nvSpPr>
+          <p:cNvPr id="72" name="Text 60"/>
+          <p:cNvSpPr txBox="1"/>
+          <p:nvPr/>
+        </p:nvSpPr>
+        <p:spPr>
+          <a:xfrm>
+            <a:off x="594360" y="1682496"/>
+            <a:ext cx="1481877" cy="365760"/>
+          </a:xfrm>
+          <a:prstGeom prst="rect">
+            <a:avLst/>
+          </a:prstGeom>
+          <a:noFill/>
+          <a:ln/>
+        </p:spPr>
+        <p:txBody>
+          <a:bodyPr wrap="square" lIns="0" tIns="0" rIns="0" bIns="0" rtlCol="0" anchor="ctr"/>
+          <a:lstStyle/>
+          <a:p>
+            <a:pPr rtl="1" algn="r" indent="0" marL="0">
+              <a:buNone/>
+            </a:pPr>
+            <a:r>
+              <a:rPr lang="en-US" sz="1400" b="1" dirty="0">
+                <a:solidFill>
+                  <a:srgbClr val="8E2F3C"/>
+                </a:solidFill>
+                <a:latin typeface="IBM Plex Sans Arabic" pitchFamily="34" charset="0"/>
+                <a:ea typeface="IBM Plex Sans Arabic" pitchFamily="34" charset="-122"/>
+                <a:cs typeface="IBM Plex Sans Arabic" pitchFamily="34" charset="-120"/>
+              </a:rPr>
+              <a:t>الشراكات الرئيسية</a:t>
+            </a:r>
+            <a:endParaRPr lang="en-US" sz="1400" dirty="0"/>
+          </a:p>
+        </p:txBody>
+      </p:sp>
+      <p:sp>
+        <p:nvSpPr>
+          <p:cNvPr id="73" name="Shape 61"/>
+          <p:cNvSpPr/>
+          <p:nvPr/>
+        </p:nvSpPr>
+        <p:spPr>
+          <a:xfrm>
+            <a:off x="2350557" y="2295144"/>
+            <a:ext cx="82296" cy="82296"/>
+          </a:xfrm>
+          <a:prstGeom prst="rect">
+            <a:avLst/>
+          </a:prstGeom>
+          <a:solidFill>
+            <a:srgbClr val="D48A93"/>
+          </a:solidFill>
+          <a:ln/>
+        </p:spPr>
+      </p:sp>
+      <p:sp>
+        <p:nvSpPr>
+          <p:cNvPr id="74" name="Text 62"/>
+          <p:cNvSpPr txBox="1"/>
+          <p:nvPr/>
+        </p:nvSpPr>
+        <p:spPr>
+          <a:xfrm>
+            <a:off x="594360" y="2176272"/>
+            <a:ext cx="1664757" cy="329184"/>
+          </a:xfrm>
+          <a:prstGeom prst="rect">
+            <a:avLst/>
+          </a:prstGeom>
+          <a:noFill/>
+          <a:ln/>
+        </p:spPr>
+        <p:txBody>
+          <a:bodyPr wrap="square" lIns="0" tIns="0" rIns="0" bIns="0" rtlCol="0" anchor="ctr"/>
+          <a:lstStyle/>
+          <a:p>
+            <a:pPr rtl="1" algn="r" indent="0" marL="0">
+              <a:buNone/>
+            </a:pPr>
+            <a:r>
+              <a:rPr lang="en-US" sz="1350" dirty="0">
+                <a:solidFill>
+                  <a:srgbClr val="21141A"/>
+                </a:solidFill>
+                <a:latin typeface="IBM Plex Sans Arabic" pitchFamily="34" charset="0"/>
+                <a:ea typeface="IBM Plex Sans Arabic" pitchFamily="34" charset="-122"/>
+                <a:cs typeface="IBM Plex Sans Arabic" pitchFamily="34" charset="-120"/>
+              </a:rPr>
+              <a:t>AWS وAzure وGCP</a:t>
+            </a:r>
+            <a:endParaRPr lang="en-US" sz="1350" dirty="0"/>
+          </a:p>
+        </p:txBody>
+      </p:sp>
+      <p:sp>
+        <p:nvSpPr>
+          <p:cNvPr id="75" name="Shape 63"/>
+          <p:cNvSpPr/>
+          <p:nvPr/>
+        </p:nvSpPr>
+        <p:spPr>
+          <a:xfrm>
+            <a:off x="2350557" y="2660904"/>
+            <a:ext cx="82296" cy="82296"/>
+          </a:xfrm>
+          <a:prstGeom prst="rect">
+            <a:avLst/>
+          </a:prstGeom>
+          <a:solidFill>
+            <a:srgbClr val="D48A93"/>
+          </a:solidFill>
+          <a:ln/>
+        </p:spPr>
+      </p:sp>
+      <p:sp>
+        <p:nvSpPr>
+          <p:cNvPr id="76" name="Text 64"/>
+          <p:cNvSpPr txBox="1"/>
+          <p:nvPr/>
+        </p:nvSpPr>
+        <p:spPr>
+          <a:xfrm>
+            <a:off x="594360" y="2542032"/>
+            <a:ext cx="1664757" cy="329184"/>
+          </a:xfrm>
+          <a:prstGeom prst="rect">
+            <a:avLst/>
+          </a:prstGeom>
+          <a:noFill/>
+          <a:ln/>
+        </p:spPr>
+        <p:txBody>
+          <a:bodyPr wrap="square" lIns="0" tIns="0" rIns="0" bIns="0" rtlCol="0" anchor="ctr"/>
+          <a:lstStyle/>
+          <a:p>
+            <a:pPr rtl="1" algn="r" indent="0" marL="0">
+              <a:buNone/>
+            </a:pPr>
+            <a:r>
+              <a:rPr lang="en-US" sz="1350" dirty="0">
+                <a:solidFill>
+                  <a:srgbClr val="21141A"/>
+                </a:solidFill>
+                <a:latin typeface="IBM Plex Sans Arabic" pitchFamily="34" charset="0"/>
+                <a:ea typeface="IBM Plex Sans Arabic" pitchFamily="34" charset="-122"/>
+                <a:cs typeface="IBM Plex Sans Arabic" pitchFamily="34" charset="-120"/>
+              </a:rPr>
+              <a:t>STC وSCCC وCNTXT</a:t>
+            </a:r>
+            <a:endParaRPr lang="en-US" sz="1350" dirty="0"/>
+          </a:p>
+        </p:txBody>
+      </p:sp>
+      <p:sp>
+        <p:nvSpPr>
+          <p:cNvPr id="77" name="Shape 65"/>
+          <p:cNvSpPr/>
+          <p:nvPr/>
+        </p:nvSpPr>
+        <p:spPr>
+          <a:xfrm>
+            <a:off x="2350557" y="3026664"/>
+            <a:ext cx="82296" cy="82296"/>
+          </a:xfrm>
+          <a:prstGeom prst="rect">
+            <a:avLst/>
+          </a:prstGeom>
+          <a:solidFill>
+            <a:srgbClr val="D48A93"/>
+          </a:solidFill>
+          <a:ln/>
+        </p:spPr>
+      </p:sp>
+      <p:sp>
+        <p:nvSpPr>
+          <p:cNvPr id="78" name="Text 66"/>
+          <p:cNvSpPr txBox="1"/>
+          <p:nvPr/>
+        </p:nvSpPr>
+        <p:spPr>
+          <a:xfrm>
+            <a:off x="594360" y="2907792"/>
+            <a:ext cx="1664757" cy="329184"/>
+          </a:xfrm>
+          <a:prstGeom prst="rect">
+            <a:avLst/>
+          </a:prstGeom>
+          <a:noFill/>
+          <a:ln/>
+        </p:spPr>
+        <p:txBody>
+          <a:bodyPr wrap="square" lIns="0" tIns="0" rIns="0" bIns="0" rtlCol="0" anchor="ctr"/>
+          <a:lstStyle/>
+          <a:p>
+            <a:pPr rtl="1" algn="r" indent="0" marL="0">
+              <a:buNone/>
+            </a:pPr>
+            <a:r>
+              <a:rPr lang="en-US" sz="1350" dirty="0">
+                <a:solidFill>
+                  <a:srgbClr val="21141A"/>
+                </a:solidFill>
+                <a:latin typeface="IBM Plex Sans Arabic" pitchFamily="34" charset="0"/>
+                <a:ea typeface="IBM Plex Sans Arabic" pitchFamily="34" charset="-122"/>
+                <a:cs typeface="IBM Plex Sans Arabic" pitchFamily="34" charset="-120"/>
+              </a:rPr>
+              <a:t>واتساب للأعمال</a:t>
+            </a:r>
+            <a:endParaRPr lang="en-US" sz="1350" dirty="0"/>
+          </a:p>
+        </p:txBody>
+      </p:sp>
+      <p:sp>
+        <p:nvSpPr>
+          <p:cNvPr id="79" name="Shape 67"/>
+          <p:cNvSpPr/>
+          <p:nvPr/>
+        </p:nvSpPr>
+        <p:spPr>
+          <a:xfrm>
+            <a:off x="6150712" y="4681728"/>
+            <a:ext cx="5583784" cy="1417320"/>
+          </a:xfrm>
+          <a:prstGeom prst="roundRect">
+            <a:avLst>
+              <a:gd name="adj" fmla="val 9032"/>
+            </a:avLst>
+          </a:prstGeom>
+          <a:solidFill>
+            <a:srgbClr val="FFFBF8"/>
+          </a:solidFill>
+          <a:ln w="9525">
+            <a:solidFill>
+              <a:srgbClr val="E3D5CC"/>
+            </a:solidFill>
+            <a:prstDash val="solid"/>
+          </a:ln>
+        </p:spPr>
+      </p:sp>
+      <p:pic>
+        <p:nvPicPr>
+          <p:cNvPr id="80" name="Image 10" descr="/tmp/claude-0/-home-claude/750ff410-f4aa-5276-9360-1e19d018b112/scratchpad/c/assets/i-coins-br.png">    </p:cNvPr>
+          <p:cNvPicPr>
+            <a:picLocks noChangeAspect="1"/>
+          </p:cNvPicPr>
+          <p:nvPr/>
+        </p:nvPicPr>
+        <p:blipFill>
+          <a:blip r:embed="rId11"/>
+          <a:stretch>
+            <a:fillRect/>
+          </a:stretch>
+        </p:blipFill>
+        <p:spPr>
+          <a:xfrm>
+            <a:off x="11240719" y="4837176"/>
+            <a:ext cx="310896" cy="310896"/>
+          </a:xfrm>
+          <a:prstGeom prst="rect">
+            <a:avLst/>
+          </a:prstGeom>
+        </p:spPr>
+      </p:pic>
+      <p:sp>
+        <p:nvSpPr>
+          <p:cNvPr id="81" name="Text 68"/>
+          <p:cNvSpPr txBox="1"/>
+          <p:nvPr/>
+        </p:nvSpPr>
+        <p:spPr>
+          <a:xfrm>
+            <a:off x="6287872" y="4809744"/>
+            <a:ext cx="4897984" cy="365760"/>
+          </a:xfrm>
+          <a:prstGeom prst="rect">
+            <a:avLst/>
+          </a:prstGeom>
+          <a:noFill/>
+          <a:ln/>
+        </p:spPr>
+        <p:txBody>
+          <a:bodyPr wrap="square" lIns="0" tIns="0" rIns="0" bIns="0" rtlCol="0" anchor="ctr"/>
+          <a:lstStyle/>
+          <a:p>
+            <a:pPr rtl="1" algn="r" indent="0" marL="0">
+              <a:buNone/>
+            </a:pPr>
+            <a:r>
+              <a:rPr lang="en-US" sz="1400" b="1" dirty="0">
+                <a:solidFill>
+                  <a:srgbClr val="8E2F3C"/>
+                </a:solidFill>
+                <a:latin typeface="IBM Plex Sans Arabic" pitchFamily="34" charset="0"/>
+                <a:ea typeface="IBM Plex Sans Arabic" pitchFamily="34" charset="-122"/>
+                <a:cs typeface="IBM Plex Sans Arabic" pitchFamily="34" charset="-120"/>
+              </a:rPr>
+              <a:t>مصادر الإيرادات</a:t>
+            </a:r>
+            <a:endParaRPr lang="en-US" sz="1400" dirty="0"/>
+          </a:p>
+        </p:txBody>
+      </p:sp>
+      <p:sp>
+        <p:nvSpPr>
+          <p:cNvPr id="82" name="Shape 69"/>
+          <p:cNvSpPr/>
+          <p:nvPr/>
+        </p:nvSpPr>
+        <p:spPr>
+          <a:xfrm>
+            <a:off x="11460175" y="5422392"/>
+            <a:ext cx="82296" cy="82296"/>
+          </a:xfrm>
+          <a:prstGeom prst="rect">
+            <a:avLst/>
+          </a:prstGeom>
+          <a:solidFill>
+            <a:srgbClr val="D48A93"/>
+          </a:solidFill>
+          <a:ln/>
+        </p:spPr>
+      </p:sp>
+      <p:sp>
+        <p:nvSpPr>
+          <p:cNvPr id="83" name="Text 70"/>
+          <p:cNvSpPr txBox="1"/>
+          <p:nvPr/>
+        </p:nvSpPr>
+        <p:spPr>
+          <a:xfrm>
+            <a:off x="6287872" y="5303520"/>
+            <a:ext cx="5080864" cy="329184"/>
+          </a:xfrm>
+          <a:prstGeom prst="rect">
+            <a:avLst/>
+          </a:prstGeom>
+          <a:noFill/>
+          <a:ln/>
+        </p:spPr>
+        <p:txBody>
+          <a:bodyPr wrap="square" lIns="0" tIns="0" rIns="0" bIns="0" rtlCol="0" anchor="ctr"/>
+          <a:lstStyle/>
+          <a:p>
+            <a:pPr rtl="1" algn="r" indent="0" marL="0">
+              <a:buNone/>
+            </a:pPr>
+            <a:r>
+              <a:rPr lang="en-US" sz="1350" dirty="0">
+                <a:solidFill>
+                  <a:srgbClr val="21141A"/>
+                </a:solidFill>
+                <a:latin typeface="IBM Plex Sans Arabic" pitchFamily="34" charset="0"/>
+                <a:ea typeface="IBM Plex Sans Arabic" pitchFamily="34" charset="-122"/>
+                <a:cs typeface="IBM Plex Sans Arabic" pitchFamily="34" charset="-120"/>
+              </a:rPr>
+              <a:t>فحص أول مجاني · من 15 ريال لكل مورد</a:t>
+            </a:r>
+            <a:endParaRPr lang="en-US" sz="1350" dirty="0"/>
+          </a:p>
+        </p:txBody>
+      </p:sp>
+      <p:sp>
+        <p:nvSpPr>
+          <p:cNvPr id="84" name="Shape 71"/>
+          <p:cNvSpPr/>
+          <p:nvPr/>
+        </p:nvSpPr>
+        <p:spPr>
+          <a:xfrm>
+            <a:off x="11460175" y="5788152"/>
+            <a:ext cx="82296" cy="82296"/>
+          </a:xfrm>
+          <a:prstGeom prst="rect">
+            <a:avLst/>
+          </a:prstGeom>
+          <a:solidFill>
+            <a:srgbClr val="D48A93"/>
+          </a:solidFill>
+          <a:ln/>
+        </p:spPr>
+      </p:sp>
+      <p:sp>
+        <p:nvSpPr>
+          <p:cNvPr id="85" name="Text 72"/>
+          <p:cNvSpPr txBox="1"/>
+          <p:nvPr/>
+        </p:nvSpPr>
+        <p:spPr>
+          <a:xfrm>
+            <a:off x="6287872" y="5669280"/>
+            <a:ext cx="5080864" cy="329184"/>
+          </a:xfrm>
+          <a:prstGeom prst="rect">
+            <a:avLst/>
+          </a:prstGeom>
+          <a:noFill/>
+          <a:ln/>
+        </p:spPr>
+        <p:txBody>
+          <a:bodyPr wrap="square" lIns="0" tIns="0" rIns="0" bIns="0" rtlCol="0" anchor="ctr"/>
+          <a:lstStyle/>
+          <a:p>
+            <a:pPr rtl="1" algn="r" indent="0" marL="0">
+              <a:buNone/>
+            </a:pPr>
+            <a:r>
+              <a:rPr lang="en-US" sz="1350" dirty="0">
+                <a:solidFill>
+                  <a:srgbClr val="21141A"/>
+                </a:solidFill>
+                <a:latin typeface="IBM Plex Sans Arabic" pitchFamily="34" charset="0"/>
+                <a:ea typeface="IBM Plex Sans Arabic" pitchFamily="34" charset="-122"/>
+                <a:cs typeface="IBM Plex Sans Arabic" pitchFamily="34" charset="-120"/>
+              </a:rPr>
+              <a:t>استشارات FinOps حسب المشروع</a:t>
+            </a:r>
+            <a:endParaRPr lang="en-US" sz="1350" dirty="0"/>
+          </a:p>
+        </p:txBody>
+      </p:sp>
+      <p:sp>
+        <p:nvSpPr>
+          <p:cNvPr id="86" name="Shape 73"/>
+          <p:cNvSpPr/>
+          <p:nvPr/>
+        </p:nvSpPr>
+        <p:spPr>
+          <a:xfrm>
+            <a:off x="457200" y="4681728"/>
+            <a:ext cx="5583784" cy="1417320"/>
+          </a:xfrm>
+          <a:prstGeom prst="roundRect">
+            <a:avLst>
+              <a:gd name="adj" fmla="val 9032"/>
+            </a:avLst>
+          </a:prstGeom>
+          <a:solidFill>
+            <a:srgbClr val="FFFBF8"/>
+          </a:solidFill>
+          <a:ln w="9525">
+            <a:solidFill>
+              <a:srgbClr val="E3D5CC"/>
+            </a:solidFill>
+            <a:prstDash val="solid"/>
+          </a:ln>
+        </p:spPr>
+      </p:sp>
+      <p:pic>
+        <p:nvPicPr>
+          <p:cNvPr id="87" name="Image 11" descr="/tmp/claude-0/-home-claude/750ff410-f4aa-5276-9360-1e19d018b112/scratchpad/c/assets/i-receipt-br.png">    </p:cNvPr>
+          <p:cNvPicPr>
+            <a:picLocks noChangeAspect="1"/>
+          </p:cNvPicPr>
+          <p:nvPr/>
+        </p:nvPicPr>
+        <p:blipFill>
+          <a:blip r:embed="rId12"/>
+          <a:stretch>
+            <a:fillRect/>
+          </a:stretch>
+        </p:blipFill>
+        <p:spPr>
+          <a:xfrm>
+            <a:off x="5547208" y="4837176"/>
+            <a:ext cx="310896" cy="310896"/>
+          </a:xfrm>
+          <a:prstGeom prst="rect">
+            <a:avLst/>
+          </a:prstGeom>
+        </p:spPr>
+      </p:pic>
+      <p:sp>
+        <p:nvSpPr>
+          <p:cNvPr id="88" name="Text 74"/>
+          <p:cNvSpPr txBox="1"/>
+          <p:nvPr/>
+        </p:nvSpPr>
+        <p:spPr>
+          <a:xfrm>
+            <a:off x="594360" y="4809744"/>
+            <a:ext cx="4897984" cy="365760"/>
+          </a:xfrm>
+          <a:prstGeom prst="rect">
+            <a:avLst/>
+          </a:prstGeom>
+          <a:noFill/>
+          <a:ln/>
+        </p:spPr>
+        <p:txBody>
+          <a:bodyPr wrap="square" lIns="0" tIns="0" rIns="0" bIns="0" rtlCol="0" anchor="ctr"/>
+          <a:lstStyle/>
+          <a:p>
+            <a:pPr rtl="1" algn="r" indent="0" marL="0">
+              <a:buNone/>
+            </a:pPr>
+            <a:r>
+              <a:rPr lang="en-US" sz="1400" b="1" dirty="0">
+                <a:solidFill>
+                  <a:srgbClr val="8E2F3C"/>
+                </a:solidFill>
+                <a:latin typeface="IBM Plex Sans Arabic" pitchFamily="34" charset="0"/>
+                <a:ea typeface="IBM Plex Sans Arabic" pitchFamily="34" charset="-122"/>
+                <a:cs typeface="IBM Plex Sans Arabic" pitchFamily="34" charset="-120"/>
+              </a:rPr>
+              <a:t>هيكل التكاليف</a:t>
+            </a:r>
+            <a:endParaRPr lang="en-US" sz="1400" dirty="0"/>
+          </a:p>
+        </p:txBody>
+      </p:sp>
+      <p:sp>
+        <p:nvSpPr>
+          <p:cNvPr id="89" name="Shape 75"/>
+          <p:cNvSpPr/>
+          <p:nvPr/>
+        </p:nvSpPr>
+        <p:spPr>
+          <a:xfrm>
+            <a:off x="5766664" y="5422392"/>
+            <a:ext cx="82296" cy="82296"/>
+          </a:xfrm>
+          <a:prstGeom prst="rect">
+            <a:avLst/>
+          </a:prstGeom>
+          <a:solidFill>
+            <a:srgbClr val="D48A93"/>
+          </a:solidFill>
+          <a:ln/>
+        </p:spPr>
+      </p:sp>
+      <p:sp>
+        <p:nvSpPr>
+          <p:cNvPr id="90" name="Text 76"/>
+          <p:cNvSpPr txBox="1"/>
+          <p:nvPr/>
+        </p:nvSpPr>
+        <p:spPr>
+          <a:xfrm>
+            <a:off x="594360" y="5303520"/>
+            <a:ext cx="5080864" cy="329184"/>
+          </a:xfrm>
+          <a:prstGeom prst="rect">
+            <a:avLst/>
+          </a:prstGeom>
+          <a:noFill/>
+          <a:ln/>
+        </p:spPr>
+        <p:txBody>
+          <a:bodyPr wrap="square" lIns="0" tIns="0" rIns="0" bIns="0" rtlCol="0" anchor="ctr"/>
+          <a:lstStyle/>
+          <a:p>
+            <a:pPr rtl="1" algn="r" indent="0" marL="0">
+              <a:buNone/>
+            </a:pPr>
+            <a:r>
+              <a:rPr lang="en-US" sz="1350" dirty="0">
+                <a:solidFill>
+                  <a:srgbClr val="21141A"/>
+                </a:solidFill>
+                <a:latin typeface="IBM Plex Sans Arabic" pitchFamily="34" charset="0"/>
+                <a:ea typeface="IBM Plex Sans Arabic" pitchFamily="34" charset="-122"/>
+                <a:cs typeface="IBM Plex Sans Arabic" pitchFamily="34" charset="-120"/>
+              </a:rPr>
+              <a:t>الاستضافة والذكاء الاصطناعي</a:t>
+            </a:r>
+            <a:endParaRPr lang="en-US" sz="1350" dirty="0"/>
+          </a:p>
+        </p:txBody>
+      </p:sp>
+      <p:sp>
+        <p:nvSpPr>
+          <p:cNvPr id="91" name="Shape 77"/>
+          <p:cNvSpPr/>
+          <p:nvPr/>
+        </p:nvSpPr>
+        <p:spPr>
+          <a:xfrm>
+            <a:off x="5766664" y="5788152"/>
+            <a:ext cx="82296" cy="82296"/>
+          </a:xfrm>
+          <a:prstGeom prst="rect">
+            <a:avLst/>
+          </a:prstGeom>
+          <a:solidFill>
+            <a:srgbClr val="D48A93"/>
+          </a:solidFill>
+          <a:ln/>
+        </p:spPr>
+      </p:sp>
+      <p:sp>
+        <p:nvSpPr>
+          <p:cNvPr id="92" name="Text 78"/>
+          <p:cNvSpPr txBox="1"/>
+          <p:nvPr/>
+        </p:nvSpPr>
+        <p:spPr>
+          <a:xfrm>
+            <a:off x="594360" y="5669280"/>
+            <a:ext cx="5080864" cy="329184"/>
+          </a:xfrm>
+          <a:prstGeom prst="rect">
+            <a:avLst/>
+          </a:prstGeom>
+          <a:noFill/>
+          <a:ln/>
+        </p:spPr>
+        <p:txBody>
+          <a:bodyPr wrap="square" lIns="0" tIns="0" rIns="0" bIns="0" rtlCol="0" anchor="ctr"/>
+          <a:lstStyle/>
+          <a:p>
+            <a:pPr rtl="1" algn="r" indent="0" marL="0">
+              <a:buNone/>
+            </a:pPr>
+            <a:r>
+              <a:rPr lang="en-US" sz="1350" dirty="0">
+                <a:solidFill>
+                  <a:srgbClr val="21141A"/>
+                </a:solidFill>
+                <a:latin typeface="IBM Plex Sans Arabic" pitchFamily="34" charset="0"/>
+                <a:ea typeface="IBM Plex Sans Arabic" pitchFamily="34" charset="-122"/>
+                <a:cs typeface="IBM Plex Sans Arabic" pitchFamily="34" charset="-120"/>
+              </a:rPr>
+              <a:t>الفريق والتطوير · التسويق</a:t>
+            </a:r>
+            <a:endParaRPr lang="en-US" sz="1350" dirty="0"/>
           </a:p>
         </p:txBody>
       </p:sp>

--- a/pitch/SSB_VentureX.pptx
+++ b/pitch/SSB_VentureX.pptx
@@ -7382,7 +7382,7 @@
                 <a:ea typeface="IBM Plex Sans Arabic" pitchFamily="34" charset="-122"/>
                 <a:cs typeface="IBM Plex Sans Arabic" pitchFamily="34" charset="-120"/>
               </a:rPr>
-              <a:t>ولا يوجد مختص FinOps في الشركات المتوسطة</a:t>
+              <a:t>والأدوات العالمية معقدة وباهظة ومصممة للمؤسسات الكبرى، بلا دعم محلي</a:t>
             </a:r>
             <a:endParaRPr lang="en-US" sz="1800" dirty="0"/>
           </a:p>
@@ -8276,15 +8276,54 @@
                 <a:ea typeface="IBM Plex Sans Arabic" pitchFamily="34" charset="-122"/>
                 <a:cs typeface="IBM Plex Sans Arabic" pitchFamily="34" charset="-120"/>
               </a:rPr>
-              <a:t>توافق بنقرة واحدة… وتوفّر</a:t>
+              <a:t>توصيات ذكية وتنفيذ بموافقة مسبقة</a:t>
             </a:r>
             <a:endParaRPr lang="en-US" sz="2000" dirty="0"/>
+          </a:p>
+        </p:txBody>
+      </p:sp>
+      <p:sp>
+        <p:nvSpPr>
+          <p:cNvPr id="32" name="Text 27"/>
+          <p:cNvSpPr txBox="1"/>
+          <p:nvPr/>
+        </p:nvSpPr>
+        <p:spPr>
+          <a:xfrm>
+            <a:off x="6766560" y="5321808"/>
+            <a:ext cx="4190695" cy="365760"/>
+          </a:xfrm>
+          <a:prstGeom prst="rect">
+            <a:avLst/>
+          </a:prstGeom>
+          <a:noFill/>
+          <a:ln/>
+        </p:spPr>
+        <p:txBody>
+          <a:bodyPr wrap="square" lIns="0" tIns="0" rIns="0" bIns="0" rtlCol="0" anchor="ctr"/>
+          <a:lstStyle/>
+          <a:p>
+            <a:pPr rtl="1" algn="r" indent="0" marL="0">
+              <a:buNone/>
+            </a:pPr>
+            <a:r>
+              <a:rPr lang="en-US" sz="1500" dirty="0">
+                <a:solidFill>
+                  <a:srgbClr val="7F6C72"/>
+                </a:solidFill>
+                <a:latin typeface="IBM Plex Sans Arabic" pitchFamily="34" charset="0"/>
+                <a:ea typeface="IBM Plex Sans Arabic" pitchFamily="34" charset="-122"/>
+                <a:cs typeface="IBM Plex Sans Arabic" pitchFamily="34" charset="-120"/>
+              </a:rPr>
+              <a:t>أو أتمتة مشروطة، لتفادي أخطاء الإنتاج</a:t>
+            </a:r>
+            <a:endParaRPr lang="en-US" sz="1500" dirty="0"/>
           </a:p>
         </p:txBody>
       </p:sp>
       <p:pic>
         <p:nvPicPr>
-          <p:cNvPr id="32" name="Image 3" descr="/tmp/claude-0/-home-claude/750ff410-f4aa-5276-9360-1e19d018b112/scratchpad/c/assets/m-lap-demo.png">    </p:cNvPr>
+          <p:cNvPr id="33" name="Image 3" descr="/tmp/claude-0/-home-claude/750ff410-f4aa-5276-9360-1e19d018b112/scratchpad/c/assets/m-lap-demo.png">    </p:cNvPr>
           <p:cNvPicPr>
             <a:picLocks noChangeAspect="1"/>
           </p:cNvPicPr>
@@ -8861,7 +8900,7 @@
                 <a:ea typeface="IBM Plex Sans Arabic" pitchFamily="34" charset="-122"/>
                 <a:cs typeface="IBM Plex Sans Arabic" pitchFamily="34" charset="-120"/>
               </a:rPr>
-              <a:t>CloudTrim مقابل أدوات المزودين</a:t>
+              <a:t>كل السحب في لوحة واحدة، بسعر يناسب الشركات المتوسطة</a:t>
             </a:r>
             <a:endParaRPr lang="en-US" sz="3400" dirty="0"/>
           </a:p>
@@ -8875,12 +8914,12 @@
         </p:nvSpPr>
         <p:spPr>
           <a:xfrm>
-            <a:off x="6601968" y="2468880"/>
-            <a:ext cx="1371600" cy="3337560"/>
+            <a:off x="6382512" y="2423160"/>
+            <a:ext cx="2779776" cy="3337560"/>
           </a:xfrm>
           <a:prstGeom prst="roundRect">
             <a:avLst>
-              <a:gd name="adj" fmla="val 9333"/>
+              <a:gd name="adj" fmla="val 4605"/>
             </a:avLst>
           </a:prstGeom>
           <a:solidFill>
@@ -8897,8 +8936,8 @@
         </p:nvSpPr>
         <p:spPr>
           <a:xfrm>
-            <a:off x="6528816" y="2514600"/>
-            <a:ext cx="1517904" cy="594360"/>
+            <a:off x="6309360" y="2468880"/>
+            <a:ext cx="2926080" cy="640080"/>
           </a:xfrm>
           <a:prstGeom prst="rect">
             <a:avLst/>
@@ -8914,7 +8953,7 @@
               <a:buNone/>
             </a:pPr>
             <a:r>
-              <a:rPr lang="en-US" sz="1600" b="1" dirty="0">
+              <a:rPr lang="en-US" sz="1800" b="1" dirty="0">
                 <a:solidFill>
                   <a:srgbClr val="8E2F3C"/>
                 </a:solidFill>
@@ -8924,7 +8963,7 @@
               </a:rPr>
               <a:t>CloudTrim</a:t>
             </a:r>
-            <a:endParaRPr lang="en-US" sz="1600" dirty="0"/>
+            <a:endParaRPr lang="en-US" sz="1800" dirty="0"/>
           </a:p>
         </p:txBody>
       </p:sp>
@@ -8936,8 +8975,8 @@
         </p:nvSpPr>
         <p:spPr>
           <a:xfrm>
-            <a:off x="5010912" y="2532888"/>
-            <a:ext cx="1517904" cy="292608"/>
+            <a:off x="3383280" y="2487168"/>
+            <a:ext cx="2926080" cy="329184"/>
           </a:xfrm>
           <a:prstGeom prst="rect">
             <a:avLst/>
@@ -8949,11 +8988,89 @@
           <a:bodyPr wrap="square" lIns="0" tIns="0" rIns="0" bIns="0" rtlCol="0" anchor="ctr"/>
           <a:lstStyle/>
           <a:p>
+            <a:pPr rtl="1" algn="ctr" indent="0" marL="0">
+              <a:buNone/>
+            </a:pPr>
+            <a:r>
+              <a:rPr lang="en-US" sz="1500" b="1" dirty="0">
+                <a:solidFill>
+                  <a:srgbClr val="21141A"/>
+                </a:solidFill>
+                <a:latin typeface="IBM Plex Sans Arabic" pitchFamily="34" charset="0"/>
+                <a:ea typeface="IBM Plex Sans Arabic" pitchFamily="34" charset="-122"/>
+                <a:cs typeface="IBM Plex Sans Arabic" pitchFamily="34" charset="-120"/>
+              </a:rPr>
+              <a:t>أدوات المزودين</a:t>
+            </a:r>
+            <a:endParaRPr lang="en-US" sz="1500" dirty="0"/>
+          </a:p>
+        </p:txBody>
+      </p:sp>
+      <p:sp>
+        <p:nvSpPr>
+          <p:cNvPr id="26" name="Text 21"/>
+          <p:cNvSpPr txBox="1"/>
+          <p:nvPr/>
+        </p:nvSpPr>
+        <p:spPr>
+          <a:xfrm>
+            <a:off x="3383280" y="2816352"/>
+            <a:ext cx="2926080" cy="256032"/>
+          </a:xfrm>
+          <a:prstGeom prst="rect">
+            <a:avLst/>
+          </a:prstGeom>
+          <a:noFill/>
+          <a:ln/>
+        </p:spPr>
+        <p:txBody>
+          <a:bodyPr wrap="square" lIns="0" tIns="0" rIns="0" bIns="0" rtlCol="0" anchor="ctr"/>
+          <a:lstStyle/>
+          <a:p>
             <a:pPr algn="ctr" indent="0" marL="0">
               <a:buNone/>
             </a:pPr>
             <a:r>
-              <a:rPr lang="en-US" sz="1300" b="1" dirty="0">
+              <a:rPr lang="en-US" sz="1050" dirty="0">
+                <a:solidFill>
+                  <a:srgbClr val="7F6C72"/>
+                </a:solidFill>
+                <a:latin typeface="IBM Plex Sans Arabic" pitchFamily="34" charset="0"/>
+                <a:ea typeface="IBM Plex Sans Arabic" pitchFamily="34" charset="-122"/>
+                <a:cs typeface="IBM Plex Sans Arabic" pitchFamily="34" charset="-120"/>
+              </a:rPr>
+              <a:t>AWS / Azure Cost Management</a:t>
+            </a:r>
+            <a:endParaRPr lang="en-US" sz="1050" dirty="0"/>
+          </a:p>
+        </p:txBody>
+      </p:sp>
+      <p:sp>
+        <p:nvSpPr>
+          <p:cNvPr id="27" name="Text 22"/>
+          <p:cNvSpPr txBox="1"/>
+          <p:nvPr/>
+        </p:nvSpPr>
+        <p:spPr>
+          <a:xfrm>
+            <a:off x="457200" y="2487168"/>
+            <a:ext cx="2926080" cy="329184"/>
+          </a:xfrm>
+          <a:prstGeom prst="rect">
+            <a:avLst/>
+          </a:prstGeom>
+          <a:noFill/>
+          <a:ln/>
+        </p:spPr>
+        <p:txBody>
+          <a:bodyPr wrap="square" lIns="0" tIns="0" rIns="0" bIns="0" rtlCol="0" anchor="ctr"/>
+          <a:lstStyle/>
+          <a:p>
+            <a:pPr rtl="1" algn="ctr" indent="0" marL="0">
+              <a:buNone/>
+            </a:pPr>
+            <a:r>
+              <a:rPr lang="en-US" sz="1500" b="1" dirty="0">
                 <a:solidFill>
                   <a:srgbClr val="21141A"/>
                 </a:solidFill>
@@ -8961,22 +9078,22 @@
                 <a:ea typeface="IBM Plex Sans Arabic" pitchFamily="34" charset="-122"/>
                 <a:cs typeface="IBM Plex Sans Arabic" pitchFamily="34" charset="-120"/>
               </a:rPr>
-              <a:t>AWS</a:t>
-            </a:r>
-            <a:endParaRPr lang="en-US" sz="1300" dirty="0"/>
-          </a:p>
-        </p:txBody>
-      </p:sp>
-      <p:sp>
-        <p:nvSpPr>
-          <p:cNvPr id="26" name="Text 21"/>
-          <p:cNvSpPr txBox="1"/>
-          <p:nvPr/>
-        </p:nvSpPr>
-        <p:spPr>
-          <a:xfrm>
-            <a:off x="5010912" y="2825496"/>
-            <a:ext cx="1517904" cy="256032"/>
+              <a:t>حلول المؤسسات</a:t>
+            </a:r>
+            <a:endParaRPr lang="en-US" sz="1500" dirty="0"/>
+          </a:p>
+        </p:txBody>
+      </p:sp>
+      <p:sp>
+        <p:nvSpPr>
+          <p:cNvPr id="28" name="Text 23"/>
+          <p:cNvSpPr txBox="1"/>
+          <p:nvPr/>
+        </p:nvSpPr>
+        <p:spPr>
+          <a:xfrm>
+            <a:off x="457200" y="2816352"/>
+            <a:ext cx="2926080" cy="256032"/>
           </a:xfrm>
           <a:prstGeom prst="rect">
             <a:avLst/>
@@ -9000,7 +9117,7 @@
                 <a:ea typeface="IBM Plex Sans Arabic" pitchFamily="34" charset="-122"/>
                 <a:cs typeface="IBM Plex Sans Arabic" pitchFamily="34" charset="-120"/>
               </a:rPr>
-              <a:t>Cost Management</a:t>
+              <a:t>STC Multi-Cloud</a:t>
             </a:r>
             <a:endParaRPr lang="en-US" sz="1050" dirty="0"/>
           </a:p>
@@ -9008,280 +9125,7 @@
       </p:sp>
       <p:sp>
         <p:nvSpPr>
-          <p:cNvPr id="27" name="Text 22"/>
-          <p:cNvSpPr txBox="1"/>
-          <p:nvPr/>
-        </p:nvSpPr>
-        <p:spPr>
-          <a:xfrm>
-            <a:off x="3493008" y="2532888"/>
-            <a:ext cx="1517904" cy="292608"/>
-          </a:xfrm>
-          <a:prstGeom prst="rect">
-            <a:avLst/>
-          </a:prstGeom>
-          <a:noFill/>
-          <a:ln/>
-        </p:spPr>
-        <p:txBody>
-          <a:bodyPr wrap="square" lIns="0" tIns="0" rIns="0" bIns="0" rtlCol="0" anchor="ctr"/>
-          <a:lstStyle/>
-          <a:p>
-            <a:pPr algn="ctr" indent="0" marL="0">
-              <a:buNone/>
-            </a:pPr>
-            <a:r>
-              <a:rPr lang="en-US" sz="1300" b="1" dirty="0">
-                <a:solidFill>
-                  <a:srgbClr val="21141A"/>
-                </a:solidFill>
-                <a:latin typeface="IBM Plex Sans Arabic" pitchFamily="34" charset="0"/>
-                <a:ea typeface="IBM Plex Sans Arabic" pitchFamily="34" charset="-122"/>
-                <a:cs typeface="IBM Plex Sans Arabic" pitchFamily="34" charset="-120"/>
-              </a:rPr>
-              <a:t>Google Cloud</a:t>
-            </a:r>
-            <a:endParaRPr lang="en-US" sz="1300" dirty="0"/>
-          </a:p>
-        </p:txBody>
-      </p:sp>
-      <p:sp>
-        <p:nvSpPr>
-          <p:cNvPr id="28" name="Text 23"/>
-          <p:cNvSpPr txBox="1"/>
-          <p:nvPr/>
-        </p:nvSpPr>
-        <p:spPr>
-          <a:xfrm>
-            <a:off x="3493008" y="2825496"/>
-            <a:ext cx="1517904" cy="256032"/>
-          </a:xfrm>
-          <a:prstGeom prst="rect">
-            <a:avLst/>
-          </a:prstGeom>
-          <a:noFill/>
-          <a:ln/>
-        </p:spPr>
-        <p:txBody>
-          <a:bodyPr wrap="square" lIns="0" tIns="0" rIns="0" bIns="0" rtlCol="0" anchor="ctr"/>
-          <a:lstStyle/>
-          <a:p>
-            <a:pPr algn="ctr" indent="0" marL="0">
-              <a:buNone/>
-            </a:pPr>
-            <a:r>
-              <a:rPr lang="en-US" sz="1050" dirty="0">
-                <a:solidFill>
-                  <a:srgbClr val="7F6C72"/>
-                </a:solidFill>
-                <a:latin typeface="IBM Plex Sans Arabic" pitchFamily="34" charset="0"/>
-                <a:ea typeface="IBM Plex Sans Arabic" pitchFamily="34" charset="-122"/>
-                <a:cs typeface="IBM Plex Sans Arabic" pitchFamily="34" charset="-120"/>
-              </a:rPr>
-              <a:t>Cost Management</a:t>
-            </a:r>
-            <a:endParaRPr lang="en-US" sz="1050" dirty="0"/>
-          </a:p>
-        </p:txBody>
-      </p:sp>
-      <p:sp>
-        <p:nvSpPr>
-          <p:cNvPr id="29" name="Text 24"/>
-          <p:cNvSpPr txBox="1"/>
-          <p:nvPr/>
-        </p:nvSpPr>
-        <p:spPr>
-          <a:xfrm>
-            <a:off x="1975104" y="2532888"/>
-            <a:ext cx="1517904" cy="292608"/>
-          </a:xfrm>
-          <a:prstGeom prst="rect">
-            <a:avLst/>
-          </a:prstGeom>
-          <a:noFill/>
-          <a:ln/>
-        </p:spPr>
-        <p:txBody>
-          <a:bodyPr wrap="square" lIns="0" tIns="0" rIns="0" bIns="0" rtlCol="0" anchor="ctr"/>
-          <a:lstStyle/>
-          <a:p>
-            <a:pPr algn="ctr" indent="0" marL="0">
-              <a:buNone/>
-            </a:pPr>
-            <a:r>
-              <a:rPr lang="en-US" sz="1300" b="1" dirty="0">
-                <a:solidFill>
-                  <a:srgbClr val="21141A"/>
-                </a:solidFill>
-                <a:latin typeface="IBM Plex Sans Arabic" pitchFamily="34" charset="0"/>
-                <a:ea typeface="IBM Plex Sans Arabic" pitchFamily="34" charset="-122"/>
-                <a:cs typeface="IBM Plex Sans Arabic" pitchFamily="34" charset="-120"/>
-              </a:rPr>
-              <a:t>Microsoft Azure</a:t>
-            </a:r>
-            <a:endParaRPr lang="en-US" sz="1300" dirty="0"/>
-          </a:p>
-        </p:txBody>
-      </p:sp>
-      <p:sp>
-        <p:nvSpPr>
-          <p:cNvPr id="30" name="Text 25"/>
-          <p:cNvSpPr txBox="1"/>
-          <p:nvPr/>
-        </p:nvSpPr>
-        <p:spPr>
-          <a:xfrm>
-            <a:off x="1975104" y="2825496"/>
-            <a:ext cx="1517904" cy="256032"/>
-          </a:xfrm>
-          <a:prstGeom prst="rect">
-            <a:avLst/>
-          </a:prstGeom>
-          <a:noFill/>
-          <a:ln/>
-        </p:spPr>
-        <p:txBody>
-          <a:bodyPr wrap="square" lIns="0" tIns="0" rIns="0" bIns="0" rtlCol="0" anchor="ctr"/>
-          <a:lstStyle/>
-          <a:p>
-            <a:pPr algn="ctr" indent="0" marL="0">
-              <a:buNone/>
-            </a:pPr>
-            <a:r>
-              <a:rPr lang="en-US" sz="1050" dirty="0">
-                <a:solidFill>
-                  <a:srgbClr val="7F6C72"/>
-                </a:solidFill>
-                <a:latin typeface="IBM Plex Sans Arabic" pitchFamily="34" charset="0"/>
-                <a:ea typeface="IBM Plex Sans Arabic" pitchFamily="34" charset="-122"/>
-                <a:cs typeface="IBM Plex Sans Arabic" pitchFamily="34" charset="-120"/>
-              </a:rPr>
-              <a:t>Cost Management</a:t>
-            </a:r>
-            <a:endParaRPr lang="en-US" sz="1050" dirty="0"/>
-          </a:p>
-        </p:txBody>
-      </p:sp>
-      <p:sp>
-        <p:nvSpPr>
-          <p:cNvPr id="31" name="Text 26"/>
-          <p:cNvSpPr txBox="1"/>
-          <p:nvPr/>
-        </p:nvSpPr>
-        <p:spPr>
-          <a:xfrm>
-            <a:off x="457200" y="2532888"/>
-            <a:ext cx="1517904" cy="292608"/>
-          </a:xfrm>
-          <a:prstGeom prst="rect">
-            <a:avLst/>
-          </a:prstGeom>
-          <a:noFill/>
-          <a:ln/>
-        </p:spPr>
-        <p:txBody>
-          <a:bodyPr wrap="square" lIns="0" tIns="0" rIns="0" bIns="0" rtlCol="0" anchor="ctr"/>
-          <a:lstStyle/>
-          <a:p>
-            <a:pPr algn="ctr" indent="0" marL="0">
-              <a:buNone/>
-            </a:pPr>
-            <a:r>
-              <a:rPr lang="en-US" sz="1300" b="1" dirty="0">
-                <a:solidFill>
-                  <a:srgbClr val="21141A"/>
-                </a:solidFill>
-                <a:latin typeface="IBM Plex Sans Arabic" pitchFamily="34" charset="0"/>
-                <a:ea typeface="IBM Plex Sans Arabic" pitchFamily="34" charset="-122"/>
-                <a:cs typeface="IBM Plex Sans Arabic" pitchFamily="34" charset="-120"/>
-              </a:rPr>
-              <a:t>Oracle Cloud</a:t>
-            </a:r>
-            <a:endParaRPr lang="en-US" sz="1300" dirty="0"/>
-          </a:p>
-        </p:txBody>
-      </p:sp>
-      <p:sp>
-        <p:nvSpPr>
-          <p:cNvPr id="32" name="Text 27"/>
-          <p:cNvSpPr txBox="1"/>
-          <p:nvPr/>
-        </p:nvSpPr>
-        <p:spPr>
-          <a:xfrm>
-            <a:off x="457200" y="2825496"/>
-            <a:ext cx="1517904" cy="256032"/>
-          </a:xfrm>
-          <a:prstGeom prst="rect">
-            <a:avLst/>
-          </a:prstGeom>
-          <a:noFill/>
-          <a:ln/>
-        </p:spPr>
-        <p:txBody>
-          <a:bodyPr wrap="square" lIns="0" tIns="0" rIns="0" bIns="0" rtlCol="0" anchor="ctr"/>
-          <a:lstStyle/>
-          <a:p>
-            <a:pPr algn="ctr" indent="0" marL="0">
-              <a:buNone/>
-            </a:pPr>
-            <a:r>
-              <a:rPr lang="en-US" sz="1050" dirty="0">
-                <a:solidFill>
-                  <a:srgbClr val="7F6C72"/>
-                </a:solidFill>
-                <a:latin typeface="IBM Plex Sans Arabic" pitchFamily="34" charset="0"/>
-                <a:ea typeface="IBM Plex Sans Arabic" pitchFamily="34" charset="-122"/>
-                <a:cs typeface="IBM Plex Sans Arabic" pitchFamily="34" charset="-120"/>
-              </a:rPr>
-              <a:t>Infrastructure</a:t>
-            </a:r>
-            <a:endParaRPr lang="en-US" sz="1050" dirty="0"/>
-          </a:p>
-        </p:txBody>
-      </p:sp>
-      <p:sp>
-        <p:nvSpPr>
-          <p:cNvPr id="33" name="Text 28"/>
-          <p:cNvSpPr txBox="1"/>
-          <p:nvPr/>
-        </p:nvSpPr>
-        <p:spPr>
-          <a:xfrm>
-            <a:off x="8229600" y="2514600"/>
-            <a:ext cx="3504895" cy="594360"/>
-          </a:xfrm>
-          <a:prstGeom prst="rect">
-            <a:avLst/>
-          </a:prstGeom>
-          <a:noFill/>
-          <a:ln/>
-        </p:spPr>
-        <p:txBody>
-          <a:bodyPr wrap="square" lIns="0" tIns="0" rIns="0" bIns="0" rtlCol="0" anchor="ctr"/>
-          <a:lstStyle/>
-          <a:p>
-            <a:pPr rtl="1" algn="r" indent="0" marL="0">
-              <a:buNone/>
-            </a:pPr>
-            <a:r>
-              <a:rPr lang="en-US" sz="1400" b="1" dirty="0">
-                <a:solidFill>
-                  <a:srgbClr val="7F6C72"/>
-                </a:solidFill>
-                <a:latin typeface="IBM Plex Sans Arabic" pitchFamily="34" charset="0"/>
-                <a:ea typeface="IBM Plex Sans Arabic" pitchFamily="34" charset="-122"/>
-                <a:cs typeface="IBM Plex Sans Arabic" pitchFamily="34" charset="-120"/>
-              </a:rPr>
-              <a:t>الميزة</a:t>
-            </a:r>
-            <a:endParaRPr lang="en-US" sz="1400" dirty="0"/>
-          </a:p>
-        </p:txBody>
-      </p:sp>
-      <p:sp>
-        <p:nvSpPr>
-          <p:cNvPr id="34" name="Shape 29"/>
+          <p:cNvPr id="29" name="Shape 24"/>
           <p:cNvSpPr/>
           <p:nvPr/>
         </p:nvSpPr>
@@ -9304,14 +9148,14 @@
       </p:sp>
       <p:sp>
         <p:nvSpPr>
-          <p:cNvPr id="35" name="Text 30"/>
-          <p:cNvSpPr txBox="1"/>
-          <p:nvPr/>
-        </p:nvSpPr>
-        <p:spPr>
-          <a:xfrm>
-            <a:off x="8229600" y="3200400"/>
-            <a:ext cx="3504895" cy="512064"/>
+          <p:cNvPr id="30" name="Text 25"/>
+          <p:cNvSpPr txBox="1"/>
+          <p:nvPr/>
+        </p:nvSpPr>
+        <p:spPr>
+          <a:xfrm>
+            <a:off x="9418320" y="3200400"/>
+            <a:ext cx="2316175" cy="502920"/>
           </a:xfrm>
           <a:prstGeom prst="rect">
             <a:avLst/>
@@ -9327,7 +9171,85 @@
               <a:buNone/>
             </a:pPr>
             <a:r>
-              <a:rPr lang="en-US" sz="1500" dirty="0">
+              <a:rPr lang="en-US" sz="1500" b="1" dirty="0">
+                <a:solidFill>
+                  <a:srgbClr val="7F6C72"/>
+                </a:solidFill>
+                <a:latin typeface="IBM Plex Sans Arabic" pitchFamily="34" charset="0"/>
+                <a:ea typeface="IBM Plex Sans Arabic" pitchFamily="34" charset="-122"/>
+                <a:cs typeface="IBM Plex Sans Arabic" pitchFamily="34" charset="-120"/>
+              </a:rPr>
+              <a:t>الجمهور المستهدف</a:t>
+            </a:r>
+            <a:endParaRPr lang="en-US" sz="1500" dirty="0"/>
+          </a:p>
+        </p:txBody>
+      </p:sp>
+      <p:sp>
+        <p:nvSpPr>
+          <p:cNvPr id="31" name="Text 26"/>
+          <p:cNvSpPr txBox="1"/>
+          <p:nvPr/>
+        </p:nvSpPr>
+        <p:spPr>
+          <a:xfrm>
+            <a:off x="6400800" y="3200400"/>
+            <a:ext cx="2743200" cy="502920"/>
+          </a:xfrm>
+          <a:prstGeom prst="rect">
+            <a:avLst/>
+          </a:prstGeom>
+          <a:noFill/>
+          <a:ln/>
+        </p:spPr>
+        <p:txBody>
+          <a:bodyPr wrap="square" lIns="0" tIns="0" rIns="0" bIns="0" rtlCol="0" anchor="ctr"/>
+          <a:lstStyle/>
+          <a:p>
+            <a:pPr rtl="1" algn="ctr" indent="0" marL="0">
+              <a:buNone/>
+            </a:pPr>
+            <a:r>
+              <a:rPr lang="en-US" sz="1500" b="1" dirty="0">
+                <a:solidFill>
+                  <a:srgbClr val="8E2F3C"/>
+                </a:solidFill>
+                <a:latin typeface="IBM Plex Sans Arabic" pitchFamily="34" charset="0"/>
+                <a:ea typeface="IBM Plex Sans Arabic" pitchFamily="34" charset="-122"/>
+                <a:cs typeface="IBM Plex Sans Arabic" pitchFamily="34" charset="-120"/>
+              </a:rPr>
+              <a:t>الشركات الناشئة والمتوسطة</a:t>
+            </a:r>
+            <a:endParaRPr lang="en-US" sz="1500" dirty="0"/>
+          </a:p>
+        </p:txBody>
+      </p:sp>
+      <p:sp>
+        <p:nvSpPr>
+          <p:cNvPr id="32" name="Text 27"/>
+          <p:cNvSpPr txBox="1"/>
+          <p:nvPr/>
+        </p:nvSpPr>
+        <p:spPr>
+          <a:xfrm>
+            <a:off x="3474720" y="3200400"/>
+            <a:ext cx="2743200" cy="502920"/>
+          </a:xfrm>
+          <a:prstGeom prst="rect">
+            <a:avLst/>
+          </a:prstGeom>
+          <a:noFill/>
+          <a:ln/>
+        </p:spPr>
+        <p:txBody>
+          <a:bodyPr wrap="square" lIns="0" tIns="0" rIns="0" bIns="0" rtlCol="0" anchor="ctr"/>
+          <a:lstStyle/>
+          <a:p>
+            <a:pPr rtl="1" algn="ctr" indent="0" marL="0">
+              <a:buNone/>
+            </a:pPr>
+            <a:r>
+              <a:rPr lang="en-US" sz="1400" dirty="0">
                 <a:solidFill>
                   <a:srgbClr val="21141A"/>
                 </a:solidFill>
@@ -9335,42 +9257,22 @@
                 <a:ea typeface="IBM Plex Sans Arabic" pitchFamily="34" charset="-122"/>
                 <a:cs typeface="IBM Plex Sans Arabic" pitchFamily="34" charset="-120"/>
               </a:rPr>
-              <a:t>STC وSCCC وCNTXT</a:t>
-            </a:r>
-            <a:endParaRPr lang="en-US" sz="1500" dirty="0"/>
-          </a:p>
-        </p:txBody>
-      </p:sp>
-      <p:sp>
-        <p:nvSpPr>
-          <p:cNvPr id="36" name="Shape 31"/>
-          <p:cNvSpPr/>
-          <p:nvPr/>
-        </p:nvSpPr>
-        <p:spPr>
-          <a:xfrm>
-            <a:off x="7114032" y="3282696"/>
-            <a:ext cx="347472" cy="347472"/>
-          </a:xfrm>
-          <a:prstGeom prst="ellipse">
-            <a:avLst/>
-          </a:prstGeom>
-          <a:solidFill>
-            <a:srgbClr val="7FB27A"/>
-          </a:solidFill>
-          <a:ln/>
-        </p:spPr>
-      </p:sp>
-      <p:sp>
-        <p:nvSpPr>
-          <p:cNvPr id="37" name="Text 32"/>
-          <p:cNvSpPr txBox="1"/>
-          <p:nvPr/>
-        </p:nvSpPr>
-        <p:spPr>
-          <a:xfrm>
-            <a:off x="7114032" y="3282696"/>
-            <a:ext cx="347472" cy="347472"/>
+              <a:t>مستخدمو سحابة واحدة</a:t>
+            </a:r>
+            <a:endParaRPr lang="en-US" sz="1400" dirty="0"/>
+          </a:p>
+        </p:txBody>
+      </p:sp>
+      <p:sp>
+        <p:nvSpPr>
+          <p:cNvPr id="33" name="Text 28"/>
+          <p:cNvSpPr txBox="1"/>
+          <p:nvPr/>
+        </p:nvSpPr>
+        <p:spPr>
+          <a:xfrm>
+            <a:off x="548640" y="3200400"/>
+            <a:ext cx="2743200" cy="502920"/>
           </a:xfrm>
           <a:prstGeom prst="rect">
             <a:avLst/>
@@ -9382,269 +9284,33 @@
           <a:bodyPr wrap="square" lIns="0" tIns="0" rIns="0" bIns="0" rtlCol="0" anchor="ctr"/>
           <a:lstStyle/>
           <a:p>
-            <a:pPr algn="ctr" indent="0" marL="0">
-              <a:buNone/>
-            </a:pPr>
-            <a:r>
-              <a:rPr lang="en-US" sz="1300" b="1" dirty="0">
-                <a:solidFill>
-                  <a:srgbClr val="FFFFFF"/>
-                </a:solidFill>
-                <a:latin typeface="IBM Plex Sans Arabic" pitchFamily="34" charset="0"/>
-                <a:ea typeface="IBM Plex Sans Arabic" pitchFamily="34" charset="-122"/>
-                <a:cs typeface="IBM Plex Sans Arabic" pitchFamily="34" charset="-120"/>
-              </a:rPr>
-              <a:t>✓</a:t>
-            </a:r>
-            <a:endParaRPr lang="en-US" sz="1300" dirty="0"/>
-          </a:p>
-        </p:txBody>
-      </p:sp>
-      <p:sp>
-        <p:nvSpPr>
-          <p:cNvPr id="38" name="Shape 33"/>
-          <p:cNvSpPr/>
-          <p:nvPr/>
-        </p:nvSpPr>
-        <p:spPr>
-          <a:xfrm>
-            <a:off x="5596128" y="3282696"/>
-            <a:ext cx="347472" cy="347472"/>
-          </a:xfrm>
-          <a:prstGeom prst="ellipse">
-            <a:avLst/>
-          </a:prstGeom>
-          <a:solidFill>
-            <a:srgbClr val="D48A93"/>
-          </a:solidFill>
-          <a:ln/>
-        </p:spPr>
-      </p:sp>
-      <p:sp>
-        <p:nvSpPr>
-          <p:cNvPr id="39" name="Text 34"/>
-          <p:cNvSpPr txBox="1"/>
-          <p:nvPr/>
-        </p:nvSpPr>
-        <p:spPr>
-          <a:xfrm>
-            <a:off x="5596128" y="3282696"/>
-            <a:ext cx="347472" cy="347472"/>
-          </a:xfrm>
-          <a:prstGeom prst="rect">
-            <a:avLst/>
-          </a:prstGeom>
-          <a:noFill/>
-          <a:ln/>
-        </p:spPr>
-        <p:txBody>
-          <a:bodyPr wrap="square" lIns="0" tIns="0" rIns="0" bIns="0" rtlCol="0" anchor="ctr"/>
-          <a:lstStyle/>
-          <a:p>
-            <a:pPr algn="ctr" indent="0" marL="0">
-              <a:buNone/>
-            </a:pPr>
-            <a:r>
-              <a:rPr lang="en-US" sz="1300" b="1" dirty="0">
-                <a:solidFill>
-                  <a:srgbClr val="FFFFFF"/>
-                </a:solidFill>
-                <a:latin typeface="IBM Plex Sans Arabic" pitchFamily="34" charset="0"/>
-                <a:ea typeface="IBM Plex Sans Arabic" pitchFamily="34" charset="-122"/>
-                <a:cs typeface="IBM Plex Sans Arabic" pitchFamily="34" charset="-120"/>
-              </a:rPr>
-              <a:t>✕</a:t>
-            </a:r>
-            <a:endParaRPr lang="en-US" sz="1300" dirty="0"/>
-          </a:p>
-        </p:txBody>
-      </p:sp>
-      <p:sp>
-        <p:nvSpPr>
-          <p:cNvPr id="40" name="Shape 35"/>
-          <p:cNvSpPr/>
-          <p:nvPr/>
-        </p:nvSpPr>
-        <p:spPr>
-          <a:xfrm>
-            <a:off x="4078224" y="3282696"/>
-            <a:ext cx="347472" cy="347472"/>
-          </a:xfrm>
-          <a:prstGeom prst="ellipse">
-            <a:avLst/>
-          </a:prstGeom>
-          <a:solidFill>
-            <a:srgbClr val="D48A93"/>
-          </a:solidFill>
-          <a:ln/>
-        </p:spPr>
-      </p:sp>
-      <p:sp>
-        <p:nvSpPr>
-          <p:cNvPr id="41" name="Text 36"/>
-          <p:cNvSpPr txBox="1"/>
-          <p:nvPr/>
-        </p:nvSpPr>
-        <p:spPr>
-          <a:xfrm>
-            <a:off x="4078224" y="3282696"/>
-            <a:ext cx="347472" cy="347472"/>
-          </a:xfrm>
-          <a:prstGeom prst="rect">
-            <a:avLst/>
-          </a:prstGeom>
-          <a:noFill/>
-          <a:ln/>
-        </p:spPr>
-        <p:txBody>
-          <a:bodyPr wrap="square" lIns="0" tIns="0" rIns="0" bIns="0" rtlCol="0" anchor="ctr"/>
-          <a:lstStyle/>
-          <a:p>
-            <a:pPr algn="ctr" indent="0" marL="0">
-              <a:buNone/>
-            </a:pPr>
-            <a:r>
-              <a:rPr lang="en-US" sz="1300" b="1" dirty="0">
-                <a:solidFill>
-                  <a:srgbClr val="FFFFFF"/>
-                </a:solidFill>
-                <a:latin typeface="IBM Plex Sans Arabic" pitchFamily="34" charset="0"/>
-                <a:ea typeface="IBM Plex Sans Arabic" pitchFamily="34" charset="-122"/>
-                <a:cs typeface="IBM Plex Sans Arabic" pitchFamily="34" charset="-120"/>
-              </a:rPr>
-              <a:t>✕</a:t>
-            </a:r>
-            <a:endParaRPr lang="en-US" sz="1300" dirty="0"/>
-          </a:p>
-        </p:txBody>
-      </p:sp>
-      <p:sp>
-        <p:nvSpPr>
-          <p:cNvPr id="42" name="Shape 37"/>
-          <p:cNvSpPr/>
-          <p:nvPr/>
-        </p:nvSpPr>
-        <p:spPr>
-          <a:xfrm>
-            <a:off x="2560320" y="3282696"/>
-            <a:ext cx="347472" cy="347472"/>
-          </a:xfrm>
-          <a:prstGeom prst="ellipse">
-            <a:avLst/>
-          </a:prstGeom>
-          <a:solidFill>
-            <a:srgbClr val="D48A93"/>
-          </a:solidFill>
-          <a:ln/>
-        </p:spPr>
-      </p:sp>
-      <p:sp>
-        <p:nvSpPr>
-          <p:cNvPr id="43" name="Text 38"/>
-          <p:cNvSpPr txBox="1"/>
-          <p:nvPr/>
-        </p:nvSpPr>
-        <p:spPr>
-          <a:xfrm>
-            <a:off x="2560320" y="3282696"/>
-            <a:ext cx="347472" cy="347472"/>
-          </a:xfrm>
-          <a:prstGeom prst="rect">
-            <a:avLst/>
-          </a:prstGeom>
-          <a:noFill/>
-          <a:ln/>
-        </p:spPr>
-        <p:txBody>
-          <a:bodyPr wrap="square" lIns="0" tIns="0" rIns="0" bIns="0" rtlCol="0" anchor="ctr"/>
-          <a:lstStyle/>
-          <a:p>
-            <a:pPr algn="ctr" indent="0" marL="0">
-              <a:buNone/>
-            </a:pPr>
-            <a:r>
-              <a:rPr lang="en-US" sz="1300" b="1" dirty="0">
-                <a:solidFill>
-                  <a:srgbClr val="FFFFFF"/>
-                </a:solidFill>
-                <a:latin typeface="IBM Plex Sans Arabic" pitchFamily="34" charset="0"/>
-                <a:ea typeface="IBM Plex Sans Arabic" pitchFamily="34" charset="-122"/>
-                <a:cs typeface="IBM Plex Sans Arabic" pitchFamily="34" charset="-120"/>
-              </a:rPr>
-              <a:t>✕</a:t>
-            </a:r>
-            <a:endParaRPr lang="en-US" sz="1300" dirty="0"/>
-          </a:p>
-        </p:txBody>
-      </p:sp>
-      <p:sp>
-        <p:nvSpPr>
-          <p:cNvPr id="44" name="Shape 39"/>
-          <p:cNvSpPr/>
-          <p:nvPr/>
-        </p:nvSpPr>
-        <p:spPr>
-          <a:xfrm>
-            <a:off x="1042416" y="3282696"/>
-            <a:ext cx="347472" cy="347472"/>
-          </a:xfrm>
-          <a:prstGeom prst="ellipse">
-            <a:avLst/>
-          </a:prstGeom>
-          <a:solidFill>
-            <a:srgbClr val="D48A93"/>
-          </a:solidFill>
-          <a:ln/>
-        </p:spPr>
-      </p:sp>
-      <p:sp>
-        <p:nvSpPr>
-          <p:cNvPr id="45" name="Text 40"/>
-          <p:cNvSpPr txBox="1"/>
-          <p:nvPr/>
-        </p:nvSpPr>
-        <p:spPr>
-          <a:xfrm>
-            <a:off x="1042416" y="3282696"/>
-            <a:ext cx="347472" cy="347472"/>
-          </a:xfrm>
-          <a:prstGeom prst="rect">
-            <a:avLst/>
-          </a:prstGeom>
-          <a:noFill/>
-          <a:ln/>
-        </p:spPr>
-        <p:txBody>
-          <a:bodyPr wrap="square" lIns="0" tIns="0" rIns="0" bIns="0" rtlCol="0" anchor="ctr"/>
-          <a:lstStyle/>
-          <a:p>
-            <a:pPr algn="ctr" indent="0" marL="0">
-              <a:buNone/>
-            </a:pPr>
-            <a:r>
-              <a:rPr lang="en-US" sz="1300" b="1" dirty="0">
-                <a:solidFill>
-                  <a:srgbClr val="FFFFFF"/>
-                </a:solidFill>
-                <a:latin typeface="IBM Plex Sans Arabic" pitchFamily="34" charset="0"/>
-                <a:ea typeface="IBM Plex Sans Arabic" pitchFamily="34" charset="-122"/>
-                <a:cs typeface="IBM Plex Sans Arabic" pitchFamily="34" charset="-120"/>
-              </a:rPr>
-              <a:t>✕</a:t>
-            </a:r>
-            <a:endParaRPr lang="en-US" sz="1300" dirty="0"/>
-          </a:p>
-        </p:txBody>
-      </p:sp>
-      <p:sp>
-        <p:nvSpPr>
-          <p:cNvPr id="46" name="Shape 41"/>
-          <p:cNvSpPr/>
-          <p:nvPr/>
-        </p:nvSpPr>
-        <p:spPr>
-          <a:xfrm>
-            <a:off x="457200" y="3712464"/>
+            <a:pPr rtl="1" algn="ctr" indent="0" marL="0">
+              <a:buNone/>
+            </a:pPr>
+            <a:r>
+              <a:rPr lang="en-US" sz="1400" dirty="0">
+                <a:solidFill>
+                  <a:srgbClr val="21141A"/>
+                </a:solidFill>
+                <a:latin typeface="IBM Plex Sans Arabic" pitchFamily="34" charset="0"/>
+                <a:ea typeface="IBM Plex Sans Arabic" pitchFamily="34" charset="-122"/>
+                <a:cs typeface="IBM Plex Sans Arabic" pitchFamily="34" charset="-120"/>
+              </a:rPr>
+              <a:t>المؤسسات والجهات الحكومية</a:t>
+            </a:r>
+            <a:endParaRPr lang="en-US" sz="1400" dirty="0"/>
+          </a:p>
+        </p:txBody>
+      </p:sp>
+      <p:sp>
+        <p:nvSpPr>
+          <p:cNvPr id="34" name="Shape 29"/>
+          <p:cNvSpPr/>
+          <p:nvPr/>
+        </p:nvSpPr>
+        <p:spPr>
+          <a:xfrm>
+            <a:off x="457200" y="3703320"/>
             <a:ext cx="11277295" cy="0"/>
           </a:xfrm>
           <a:prstGeom prst="line">
@@ -9661,14 +9327,14 @@
       </p:sp>
       <p:sp>
         <p:nvSpPr>
-          <p:cNvPr id="47" name="Text 42"/>
-          <p:cNvSpPr txBox="1"/>
-          <p:nvPr/>
-        </p:nvSpPr>
-        <p:spPr>
-          <a:xfrm>
-            <a:off x="8229600" y="3712464"/>
-            <a:ext cx="3504895" cy="512064"/>
+          <p:cNvPr id="35" name="Text 30"/>
+          <p:cNvSpPr txBox="1"/>
+          <p:nvPr/>
+        </p:nvSpPr>
+        <p:spPr>
+          <a:xfrm>
+            <a:off x="9418320" y="3703320"/>
+            <a:ext cx="2316175" cy="502920"/>
           </a:xfrm>
           <a:prstGeom prst="rect">
             <a:avLst/>
@@ -9684,7 +9350,85 @@
               <a:buNone/>
             </a:pPr>
             <a:r>
-              <a:rPr lang="en-US" sz="1500" dirty="0">
+              <a:rPr lang="en-US" sz="1500" b="1" dirty="0">
+                <a:solidFill>
+                  <a:srgbClr val="7F6C72"/>
+                </a:solidFill>
+                <a:latin typeface="IBM Plex Sans Arabic" pitchFamily="34" charset="0"/>
+                <a:ea typeface="IBM Plex Sans Arabic" pitchFamily="34" charset="-122"/>
+                <a:cs typeface="IBM Plex Sans Arabic" pitchFamily="34" charset="-120"/>
+              </a:rPr>
+              <a:t>السحب المدعومة</a:t>
+            </a:r>
+            <a:endParaRPr lang="en-US" sz="1500" dirty="0"/>
+          </a:p>
+        </p:txBody>
+      </p:sp>
+      <p:sp>
+        <p:nvSpPr>
+          <p:cNvPr id="36" name="Text 31"/>
+          <p:cNvSpPr txBox="1"/>
+          <p:nvPr/>
+        </p:nvSpPr>
+        <p:spPr>
+          <a:xfrm>
+            <a:off x="6400800" y="3703320"/>
+            <a:ext cx="2743200" cy="502920"/>
+          </a:xfrm>
+          <a:prstGeom prst="rect">
+            <a:avLst/>
+          </a:prstGeom>
+          <a:noFill/>
+          <a:ln/>
+        </p:spPr>
+        <p:txBody>
+          <a:bodyPr wrap="square" lIns="0" tIns="0" rIns="0" bIns="0" rtlCol="0" anchor="ctr"/>
+          <a:lstStyle/>
+          <a:p>
+            <a:pPr rtl="1" algn="ctr" indent="0" marL="0">
+              <a:buNone/>
+            </a:pPr>
+            <a:r>
+              <a:rPr lang="en-US" sz="1500" b="1" dirty="0">
+                <a:solidFill>
+                  <a:srgbClr val="8E2F3C"/>
+                </a:solidFill>
+                <a:latin typeface="IBM Plex Sans Arabic" pitchFamily="34" charset="0"/>
+                <a:ea typeface="IBM Plex Sans Arabic" pitchFamily="34" charset="-122"/>
+                <a:cs typeface="IBM Plex Sans Arabic" pitchFamily="34" charset="-120"/>
+              </a:rPr>
+              <a:t>العالمية والمحلية معاً</a:t>
+            </a:r>
+            <a:endParaRPr lang="en-US" sz="1500" dirty="0"/>
+          </a:p>
+        </p:txBody>
+      </p:sp>
+      <p:sp>
+        <p:nvSpPr>
+          <p:cNvPr id="37" name="Text 32"/>
+          <p:cNvSpPr txBox="1"/>
+          <p:nvPr/>
+        </p:nvSpPr>
+        <p:spPr>
+          <a:xfrm>
+            <a:off x="3474720" y="3703320"/>
+            <a:ext cx="2743200" cy="502920"/>
+          </a:xfrm>
+          <a:prstGeom prst="rect">
+            <a:avLst/>
+          </a:prstGeom>
+          <a:noFill/>
+          <a:ln/>
+        </p:spPr>
+        <p:txBody>
+          <a:bodyPr wrap="square" lIns="0" tIns="0" rIns="0" bIns="0" rtlCol="0" anchor="ctr"/>
+          <a:lstStyle/>
+          <a:p>
+            <a:pPr rtl="1" algn="ctr" indent="0" marL="0">
+              <a:buNone/>
+            </a:pPr>
+            <a:r>
+              <a:rPr lang="en-US" sz="1400" dirty="0">
                 <a:solidFill>
                   <a:srgbClr val="21141A"/>
                 </a:solidFill>
@@ -9692,42 +9436,22 @@
                 <a:ea typeface="IBM Plex Sans Arabic" pitchFamily="34" charset="-122"/>
                 <a:cs typeface="IBM Plex Sans Arabic" pitchFamily="34" charset="-120"/>
               </a:rPr>
-              <a:t>كل السحابات في لوحة واحدة</a:t>
-            </a:r>
-            <a:endParaRPr lang="en-US" sz="1500" dirty="0"/>
-          </a:p>
-        </p:txBody>
-      </p:sp>
-      <p:sp>
-        <p:nvSpPr>
-          <p:cNvPr id="48" name="Shape 43"/>
-          <p:cNvSpPr/>
-          <p:nvPr/>
-        </p:nvSpPr>
-        <p:spPr>
-          <a:xfrm>
-            <a:off x="7114032" y="3794760"/>
-            <a:ext cx="347472" cy="347472"/>
-          </a:xfrm>
-          <a:prstGeom prst="ellipse">
-            <a:avLst/>
-          </a:prstGeom>
-          <a:solidFill>
-            <a:srgbClr val="7FB27A"/>
-          </a:solidFill>
-          <a:ln/>
-        </p:spPr>
-      </p:sp>
-      <p:sp>
-        <p:nvSpPr>
-          <p:cNvPr id="49" name="Text 44"/>
-          <p:cNvSpPr txBox="1"/>
-          <p:nvPr/>
-        </p:nvSpPr>
-        <p:spPr>
-          <a:xfrm>
-            <a:off x="7114032" y="3794760"/>
-            <a:ext cx="347472" cy="347472"/>
+              <a:t>سحابة المزود فقط</a:t>
+            </a:r>
+            <a:endParaRPr lang="en-US" sz="1400" dirty="0"/>
+          </a:p>
+        </p:txBody>
+      </p:sp>
+      <p:sp>
+        <p:nvSpPr>
+          <p:cNvPr id="38" name="Text 33"/>
+          <p:cNvSpPr txBox="1"/>
+          <p:nvPr/>
+        </p:nvSpPr>
+        <p:spPr>
+          <a:xfrm>
+            <a:off x="548640" y="3703320"/>
+            <a:ext cx="2743200" cy="502920"/>
           </a:xfrm>
           <a:prstGeom prst="rect">
             <a:avLst/>
@@ -9739,269 +9463,33 @@
           <a:bodyPr wrap="square" lIns="0" tIns="0" rIns="0" bIns="0" rtlCol="0" anchor="ctr"/>
           <a:lstStyle/>
           <a:p>
-            <a:pPr algn="ctr" indent="0" marL="0">
-              <a:buNone/>
-            </a:pPr>
-            <a:r>
-              <a:rPr lang="en-US" sz="1300" b="1" dirty="0">
-                <a:solidFill>
-                  <a:srgbClr val="FFFFFF"/>
-                </a:solidFill>
-                <a:latin typeface="IBM Plex Sans Arabic" pitchFamily="34" charset="0"/>
-                <a:ea typeface="IBM Plex Sans Arabic" pitchFamily="34" charset="-122"/>
-                <a:cs typeface="IBM Plex Sans Arabic" pitchFamily="34" charset="-120"/>
-              </a:rPr>
-              <a:t>✓</a:t>
-            </a:r>
-            <a:endParaRPr lang="en-US" sz="1300" dirty="0"/>
-          </a:p>
-        </p:txBody>
-      </p:sp>
-      <p:sp>
-        <p:nvSpPr>
-          <p:cNvPr id="50" name="Shape 45"/>
-          <p:cNvSpPr/>
-          <p:nvPr/>
-        </p:nvSpPr>
-        <p:spPr>
-          <a:xfrm>
-            <a:off x="5596128" y="3794760"/>
-            <a:ext cx="347472" cy="347472"/>
-          </a:xfrm>
-          <a:prstGeom prst="ellipse">
-            <a:avLst/>
-          </a:prstGeom>
-          <a:solidFill>
-            <a:srgbClr val="D48A93"/>
-          </a:solidFill>
-          <a:ln/>
-        </p:spPr>
-      </p:sp>
-      <p:sp>
-        <p:nvSpPr>
-          <p:cNvPr id="51" name="Text 46"/>
-          <p:cNvSpPr txBox="1"/>
-          <p:nvPr/>
-        </p:nvSpPr>
-        <p:spPr>
-          <a:xfrm>
-            <a:off x="5596128" y="3794760"/>
-            <a:ext cx="347472" cy="347472"/>
-          </a:xfrm>
-          <a:prstGeom prst="rect">
-            <a:avLst/>
-          </a:prstGeom>
-          <a:noFill/>
-          <a:ln/>
-        </p:spPr>
-        <p:txBody>
-          <a:bodyPr wrap="square" lIns="0" tIns="0" rIns="0" bIns="0" rtlCol="0" anchor="ctr"/>
-          <a:lstStyle/>
-          <a:p>
-            <a:pPr algn="ctr" indent="0" marL="0">
-              <a:buNone/>
-            </a:pPr>
-            <a:r>
-              <a:rPr lang="en-US" sz="1300" b="1" dirty="0">
-                <a:solidFill>
-                  <a:srgbClr val="FFFFFF"/>
-                </a:solidFill>
-                <a:latin typeface="IBM Plex Sans Arabic" pitchFamily="34" charset="0"/>
-                <a:ea typeface="IBM Plex Sans Arabic" pitchFamily="34" charset="-122"/>
-                <a:cs typeface="IBM Plex Sans Arabic" pitchFamily="34" charset="-120"/>
-              </a:rPr>
-              <a:t>✕</a:t>
-            </a:r>
-            <a:endParaRPr lang="en-US" sz="1300" dirty="0"/>
-          </a:p>
-        </p:txBody>
-      </p:sp>
-      <p:sp>
-        <p:nvSpPr>
-          <p:cNvPr id="52" name="Shape 47"/>
-          <p:cNvSpPr/>
-          <p:nvPr/>
-        </p:nvSpPr>
-        <p:spPr>
-          <a:xfrm>
-            <a:off x="4078224" y="3794760"/>
-            <a:ext cx="347472" cy="347472"/>
-          </a:xfrm>
-          <a:prstGeom prst="ellipse">
-            <a:avLst/>
-          </a:prstGeom>
-          <a:solidFill>
-            <a:srgbClr val="D48A93"/>
-          </a:solidFill>
-          <a:ln/>
-        </p:spPr>
-      </p:sp>
-      <p:sp>
-        <p:nvSpPr>
-          <p:cNvPr id="53" name="Text 48"/>
-          <p:cNvSpPr txBox="1"/>
-          <p:nvPr/>
-        </p:nvSpPr>
-        <p:spPr>
-          <a:xfrm>
-            <a:off x="4078224" y="3794760"/>
-            <a:ext cx="347472" cy="347472"/>
-          </a:xfrm>
-          <a:prstGeom prst="rect">
-            <a:avLst/>
-          </a:prstGeom>
-          <a:noFill/>
-          <a:ln/>
-        </p:spPr>
-        <p:txBody>
-          <a:bodyPr wrap="square" lIns="0" tIns="0" rIns="0" bIns="0" rtlCol="0" anchor="ctr"/>
-          <a:lstStyle/>
-          <a:p>
-            <a:pPr algn="ctr" indent="0" marL="0">
-              <a:buNone/>
-            </a:pPr>
-            <a:r>
-              <a:rPr lang="en-US" sz="1300" b="1" dirty="0">
-                <a:solidFill>
-                  <a:srgbClr val="FFFFFF"/>
-                </a:solidFill>
-                <a:latin typeface="IBM Plex Sans Arabic" pitchFamily="34" charset="0"/>
-                <a:ea typeface="IBM Plex Sans Arabic" pitchFamily="34" charset="-122"/>
-                <a:cs typeface="IBM Plex Sans Arabic" pitchFamily="34" charset="-120"/>
-              </a:rPr>
-              <a:t>✕</a:t>
-            </a:r>
-            <a:endParaRPr lang="en-US" sz="1300" dirty="0"/>
-          </a:p>
-        </p:txBody>
-      </p:sp>
-      <p:sp>
-        <p:nvSpPr>
-          <p:cNvPr id="54" name="Shape 49"/>
-          <p:cNvSpPr/>
-          <p:nvPr/>
-        </p:nvSpPr>
-        <p:spPr>
-          <a:xfrm>
-            <a:off x="2560320" y="3794760"/>
-            <a:ext cx="347472" cy="347472"/>
-          </a:xfrm>
-          <a:prstGeom prst="ellipse">
-            <a:avLst/>
-          </a:prstGeom>
-          <a:solidFill>
-            <a:srgbClr val="D48A93"/>
-          </a:solidFill>
-          <a:ln/>
-        </p:spPr>
-      </p:sp>
-      <p:sp>
-        <p:nvSpPr>
-          <p:cNvPr id="55" name="Text 50"/>
-          <p:cNvSpPr txBox="1"/>
-          <p:nvPr/>
-        </p:nvSpPr>
-        <p:spPr>
-          <a:xfrm>
-            <a:off x="2560320" y="3794760"/>
-            <a:ext cx="347472" cy="347472"/>
-          </a:xfrm>
-          <a:prstGeom prst="rect">
-            <a:avLst/>
-          </a:prstGeom>
-          <a:noFill/>
-          <a:ln/>
-        </p:spPr>
-        <p:txBody>
-          <a:bodyPr wrap="square" lIns="0" tIns="0" rIns="0" bIns="0" rtlCol="0" anchor="ctr"/>
-          <a:lstStyle/>
-          <a:p>
-            <a:pPr algn="ctr" indent="0" marL="0">
-              <a:buNone/>
-            </a:pPr>
-            <a:r>
-              <a:rPr lang="en-US" sz="1300" b="1" dirty="0">
-                <a:solidFill>
-                  <a:srgbClr val="FFFFFF"/>
-                </a:solidFill>
-                <a:latin typeface="IBM Plex Sans Arabic" pitchFamily="34" charset="0"/>
-                <a:ea typeface="IBM Plex Sans Arabic" pitchFamily="34" charset="-122"/>
-                <a:cs typeface="IBM Plex Sans Arabic" pitchFamily="34" charset="-120"/>
-              </a:rPr>
-              <a:t>✕</a:t>
-            </a:r>
-            <a:endParaRPr lang="en-US" sz="1300" dirty="0"/>
-          </a:p>
-        </p:txBody>
-      </p:sp>
-      <p:sp>
-        <p:nvSpPr>
-          <p:cNvPr id="56" name="Shape 51"/>
-          <p:cNvSpPr/>
-          <p:nvPr/>
-        </p:nvSpPr>
-        <p:spPr>
-          <a:xfrm>
-            <a:off x="1042416" y="3794760"/>
-            <a:ext cx="347472" cy="347472"/>
-          </a:xfrm>
-          <a:prstGeom prst="ellipse">
-            <a:avLst/>
-          </a:prstGeom>
-          <a:solidFill>
-            <a:srgbClr val="D48A93"/>
-          </a:solidFill>
-          <a:ln/>
-        </p:spPr>
-      </p:sp>
-      <p:sp>
-        <p:nvSpPr>
-          <p:cNvPr id="57" name="Text 52"/>
-          <p:cNvSpPr txBox="1"/>
-          <p:nvPr/>
-        </p:nvSpPr>
-        <p:spPr>
-          <a:xfrm>
-            <a:off x="1042416" y="3794760"/>
-            <a:ext cx="347472" cy="347472"/>
-          </a:xfrm>
-          <a:prstGeom prst="rect">
-            <a:avLst/>
-          </a:prstGeom>
-          <a:noFill/>
-          <a:ln/>
-        </p:spPr>
-        <p:txBody>
-          <a:bodyPr wrap="square" lIns="0" tIns="0" rIns="0" bIns="0" rtlCol="0" anchor="ctr"/>
-          <a:lstStyle/>
-          <a:p>
-            <a:pPr algn="ctr" indent="0" marL="0">
-              <a:buNone/>
-            </a:pPr>
-            <a:r>
-              <a:rPr lang="en-US" sz="1300" b="1" dirty="0">
-                <a:solidFill>
-                  <a:srgbClr val="FFFFFF"/>
-                </a:solidFill>
-                <a:latin typeface="IBM Plex Sans Arabic" pitchFamily="34" charset="0"/>
-                <a:ea typeface="IBM Plex Sans Arabic" pitchFamily="34" charset="-122"/>
-                <a:cs typeface="IBM Plex Sans Arabic" pitchFamily="34" charset="-120"/>
-              </a:rPr>
-              <a:t>✕</a:t>
-            </a:r>
-            <a:endParaRPr lang="en-US" sz="1300" dirty="0"/>
-          </a:p>
-        </p:txBody>
-      </p:sp>
-      <p:sp>
-        <p:nvSpPr>
-          <p:cNvPr id="58" name="Shape 53"/>
-          <p:cNvSpPr/>
-          <p:nvPr/>
-        </p:nvSpPr>
-        <p:spPr>
-          <a:xfrm>
-            <a:off x="457200" y="4224528"/>
+            <a:pPr rtl="1" algn="ctr" indent="0" marL="0">
+              <a:buNone/>
+            </a:pPr>
+            <a:r>
+              <a:rPr lang="en-US" sz="1400" dirty="0">
+                <a:solidFill>
+                  <a:srgbClr val="21141A"/>
+                </a:solidFill>
+                <a:latin typeface="IBM Plex Sans Arabic" pitchFamily="34" charset="0"/>
+                <a:ea typeface="IBM Plex Sans Arabic" pitchFamily="34" charset="-122"/>
+                <a:cs typeface="IBM Plex Sans Arabic" pitchFamily="34" charset="-120"/>
+              </a:rPr>
+              <a:t>متعددة بعقد مؤسسي</a:t>
+            </a:r>
+            <a:endParaRPr lang="en-US" sz="1400" dirty="0"/>
+          </a:p>
+        </p:txBody>
+      </p:sp>
+      <p:sp>
+        <p:nvSpPr>
+          <p:cNvPr id="39" name="Shape 34"/>
+          <p:cNvSpPr/>
+          <p:nvPr/>
+        </p:nvSpPr>
+        <p:spPr>
+          <a:xfrm>
+            <a:off x="457200" y="4206240"/>
             <a:ext cx="11277295" cy="0"/>
           </a:xfrm>
           <a:prstGeom prst="line">
@@ -10018,14 +9506,14 @@
       </p:sp>
       <p:sp>
         <p:nvSpPr>
-          <p:cNvPr id="59" name="Text 54"/>
-          <p:cNvSpPr txBox="1"/>
-          <p:nvPr/>
-        </p:nvSpPr>
-        <p:spPr>
-          <a:xfrm>
-            <a:off x="8229600" y="4224528"/>
-            <a:ext cx="3504895" cy="512064"/>
+          <p:cNvPr id="40" name="Text 35"/>
+          <p:cNvSpPr txBox="1"/>
+          <p:nvPr/>
+        </p:nvSpPr>
+        <p:spPr>
+          <a:xfrm>
+            <a:off x="9418320" y="4206240"/>
+            <a:ext cx="2316175" cy="502920"/>
           </a:xfrm>
           <a:prstGeom prst="rect">
             <a:avLst/>
@@ -10041,7 +9529,85 @@
               <a:buNone/>
             </a:pPr>
             <a:r>
-              <a:rPr lang="en-US" sz="1500" dirty="0">
+              <a:rPr lang="en-US" sz="1500" b="1" dirty="0">
+                <a:solidFill>
+                  <a:srgbClr val="7F6C72"/>
+                </a:solidFill>
+                <a:latin typeface="IBM Plex Sans Arabic" pitchFamily="34" charset="0"/>
+                <a:ea typeface="IBM Plex Sans Arabic" pitchFamily="34" charset="-122"/>
+                <a:cs typeface="IBM Plex Sans Arabic" pitchFamily="34" charset="-120"/>
+              </a:rPr>
+              <a:t>سرعة التفعيل</a:t>
+            </a:r>
+            <a:endParaRPr lang="en-US" sz="1500" dirty="0"/>
+          </a:p>
+        </p:txBody>
+      </p:sp>
+      <p:sp>
+        <p:nvSpPr>
+          <p:cNvPr id="41" name="Text 36"/>
+          <p:cNvSpPr txBox="1"/>
+          <p:nvPr/>
+        </p:nvSpPr>
+        <p:spPr>
+          <a:xfrm>
+            <a:off x="6400800" y="4206240"/>
+            <a:ext cx="2743200" cy="502920"/>
+          </a:xfrm>
+          <a:prstGeom prst="rect">
+            <a:avLst/>
+          </a:prstGeom>
+          <a:noFill/>
+          <a:ln/>
+        </p:spPr>
+        <p:txBody>
+          <a:bodyPr wrap="square" lIns="0" tIns="0" rIns="0" bIns="0" rtlCol="0" anchor="ctr"/>
+          <a:lstStyle/>
+          <a:p>
+            <a:pPr rtl="1" algn="ctr" indent="0" marL="0">
+              <a:buNone/>
+            </a:pPr>
+            <a:r>
+              <a:rPr lang="en-US" sz="1500" b="1" dirty="0">
+                <a:solidFill>
+                  <a:srgbClr val="8E2F3C"/>
+                </a:solidFill>
+                <a:latin typeface="IBM Plex Sans Arabic" pitchFamily="34" charset="0"/>
+                <a:ea typeface="IBM Plex Sans Arabic" pitchFamily="34" charset="-122"/>
+                <a:cs typeface="IBM Plex Sans Arabic" pitchFamily="34" charset="-120"/>
+              </a:rPr>
+              <a:t>ذاتي خلال دقائق</a:t>
+            </a:r>
+            <a:endParaRPr lang="en-US" sz="1500" dirty="0"/>
+          </a:p>
+        </p:txBody>
+      </p:sp>
+      <p:sp>
+        <p:nvSpPr>
+          <p:cNvPr id="42" name="Text 37"/>
+          <p:cNvSpPr txBox="1"/>
+          <p:nvPr/>
+        </p:nvSpPr>
+        <p:spPr>
+          <a:xfrm>
+            <a:off x="3474720" y="4206240"/>
+            <a:ext cx="2743200" cy="502920"/>
+          </a:xfrm>
+          <a:prstGeom prst="rect">
+            <a:avLst/>
+          </a:prstGeom>
+          <a:noFill/>
+          <a:ln/>
+        </p:spPr>
+        <p:txBody>
+          <a:bodyPr wrap="square" lIns="0" tIns="0" rIns="0" bIns="0" rtlCol="0" anchor="ctr"/>
+          <a:lstStyle/>
+          <a:p>
+            <a:pPr rtl="1" algn="ctr" indent="0" marL="0">
+              <a:buNone/>
+            </a:pPr>
+            <a:r>
+              <a:rPr lang="en-US" sz="1400" dirty="0">
                 <a:solidFill>
                   <a:srgbClr val="21141A"/>
                 </a:solidFill>
@@ -10049,42 +9615,22 @@
                 <a:ea typeface="IBM Plex Sans Arabic" pitchFamily="34" charset="-122"/>
                 <a:cs typeface="IBM Plex Sans Arabic" pitchFamily="34" charset="-120"/>
               </a:rPr>
-              <a:t>تنفيذ بنقرة بعد موافقتك</a:t>
-            </a:r>
-            <a:endParaRPr lang="en-US" sz="1500" dirty="0"/>
-          </a:p>
-        </p:txBody>
-      </p:sp>
-      <p:sp>
-        <p:nvSpPr>
-          <p:cNvPr id="60" name="Shape 55"/>
-          <p:cNvSpPr/>
-          <p:nvPr/>
-        </p:nvSpPr>
-        <p:spPr>
-          <a:xfrm>
-            <a:off x="7114032" y="4306824"/>
-            <a:ext cx="347472" cy="347472"/>
-          </a:xfrm>
-          <a:prstGeom prst="ellipse">
-            <a:avLst/>
-          </a:prstGeom>
-          <a:solidFill>
-            <a:srgbClr val="7FB27A"/>
-          </a:solidFill>
-          <a:ln/>
-        </p:spPr>
-      </p:sp>
-      <p:sp>
-        <p:nvSpPr>
-          <p:cNvPr id="61" name="Text 56"/>
-          <p:cNvSpPr txBox="1"/>
-          <p:nvPr/>
-        </p:nvSpPr>
-        <p:spPr>
-          <a:xfrm>
-            <a:off x="7114032" y="4306824"/>
-            <a:ext cx="347472" cy="347472"/>
+              <a:t>إعداد هندسي معقد</a:t>
+            </a:r>
+            <a:endParaRPr lang="en-US" sz="1400" dirty="0"/>
+          </a:p>
+        </p:txBody>
+      </p:sp>
+      <p:sp>
+        <p:nvSpPr>
+          <p:cNvPr id="43" name="Text 38"/>
+          <p:cNvSpPr txBox="1"/>
+          <p:nvPr/>
+        </p:nvSpPr>
+        <p:spPr>
+          <a:xfrm>
+            <a:off x="548640" y="4206240"/>
+            <a:ext cx="2743200" cy="502920"/>
           </a:xfrm>
           <a:prstGeom prst="rect">
             <a:avLst/>
@@ -10096,269 +9642,33 @@
           <a:bodyPr wrap="square" lIns="0" tIns="0" rIns="0" bIns="0" rtlCol="0" anchor="ctr"/>
           <a:lstStyle/>
           <a:p>
-            <a:pPr algn="ctr" indent="0" marL="0">
-              <a:buNone/>
-            </a:pPr>
-            <a:r>
-              <a:rPr lang="en-US" sz="1300" b="1" dirty="0">
-                <a:solidFill>
-                  <a:srgbClr val="FFFFFF"/>
-                </a:solidFill>
-                <a:latin typeface="IBM Plex Sans Arabic" pitchFamily="34" charset="0"/>
-                <a:ea typeface="IBM Plex Sans Arabic" pitchFamily="34" charset="-122"/>
-                <a:cs typeface="IBM Plex Sans Arabic" pitchFamily="34" charset="-120"/>
-              </a:rPr>
-              <a:t>✓</a:t>
-            </a:r>
-            <a:endParaRPr lang="en-US" sz="1300" dirty="0"/>
-          </a:p>
-        </p:txBody>
-      </p:sp>
-      <p:sp>
-        <p:nvSpPr>
-          <p:cNvPr id="62" name="Shape 57"/>
-          <p:cNvSpPr/>
-          <p:nvPr/>
-        </p:nvSpPr>
-        <p:spPr>
-          <a:xfrm>
-            <a:off x="5596128" y="4306824"/>
-            <a:ext cx="347472" cy="347472"/>
-          </a:xfrm>
-          <a:prstGeom prst="ellipse">
-            <a:avLst/>
-          </a:prstGeom>
-          <a:solidFill>
-            <a:srgbClr val="C9A46E"/>
-          </a:solidFill>
-          <a:ln/>
-        </p:spPr>
-      </p:sp>
-      <p:sp>
-        <p:nvSpPr>
-          <p:cNvPr id="63" name="Text 58"/>
-          <p:cNvSpPr txBox="1"/>
-          <p:nvPr/>
-        </p:nvSpPr>
-        <p:spPr>
-          <a:xfrm>
-            <a:off x="5596128" y="4306824"/>
-            <a:ext cx="347472" cy="347472"/>
-          </a:xfrm>
-          <a:prstGeom prst="rect">
-            <a:avLst/>
-          </a:prstGeom>
-          <a:noFill/>
-          <a:ln/>
-        </p:spPr>
-        <p:txBody>
-          <a:bodyPr wrap="square" lIns="0" tIns="0" rIns="0" bIns="0" rtlCol="0" anchor="ctr"/>
-          <a:lstStyle/>
-          <a:p>
-            <a:pPr algn="ctr" indent="0" marL="0">
-              <a:buNone/>
-            </a:pPr>
-            <a:r>
-              <a:rPr lang="en-US" sz="1300" b="1" dirty="0">
-                <a:solidFill>
-                  <a:srgbClr val="FFFFFF"/>
-                </a:solidFill>
-                <a:latin typeface="IBM Plex Sans Arabic" pitchFamily="34" charset="0"/>
-                <a:ea typeface="IBM Plex Sans Arabic" pitchFamily="34" charset="-122"/>
-                <a:cs typeface="IBM Plex Sans Arabic" pitchFamily="34" charset="-120"/>
-              </a:rPr>
-              <a:t>~</a:t>
-            </a:r>
-            <a:endParaRPr lang="en-US" sz="1300" dirty="0"/>
-          </a:p>
-        </p:txBody>
-      </p:sp>
-      <p:sp>
-        <p:nvSpPr>
-          <p:cNvPr id="64" name="Shape 59"/>
-          <p:cNvSpPr/>
-          <p:nvPr/>
-        </p:nvSpPr>
-        <p:spPr>
-          <a:xfrm>
-            <a:off x="4078224" y="4306824"/>
-            <a:ext cx="347472" cy="347472"/>
-          </a:xfrm>
-          <a:prstGeom prst="ellipse">
-            <a:avLst/>
-          </a:prstGeom>
-          <a:solidFill>
-            <a:srgbClr val="C9A46E"/>
-          </a:solidFill>
-          <a:ln/>
-        </p:spPr>
-      </p:sp>
-      <p:sp>
-        <p:nvSpPr>
-          <p:cNvPr id="65" name="Text 60"/>
-          <p:cNvSpPr txBox="1"/>
-          <p:nvPr/>
-        </p:nvSpPr>
-        <p:spPr>
-          <a:xfrm>
-            <a:off x="4078224" y="4306824"/>
-            <a:ext cx="347472" cy="347472"/>
-          </a:xfrm>
-          <a:prstGeom prst="rect">
-            <a:avLst/>
-          </a:prstGeom>
-          <a:noFill/>
-          <a:ln/>
-        </p:spPr>
-        <p:txBody>
-          <a:bodyPr wrap="square" lIns="0" tIns="0" rIns="0" bIns="0" rtlCol="0" anchor="ctr"/>
-          <a:lstStyle/>
-          <a:p>
-            <a:pPr algn="ctr" indent="0" marL="0">
-              <a:buNone/>
-            </a:pPr>
-            <a:r>
-              <a:rPr lang="en-US" sz="1300" b="1" dirty="0">
-                <a:solidFill>
-                  <a:srgbClr val="FFFFFF"/>
-                </a:solidFill>
-                <a:latin typeface="IBM Plex Sans Arabic" pitchFamily="34" charset="0"/>
-                <a:ea typeface="IBM Plex Sans Arabic" pitchFamily="34" charset="-122"/>
-                <a:cs typeface="IBM Plex Sans Arabic" pitchFamily="34" charset="-120"/>
-              </a:rPr>
-              <a:t>~</a:t>
-            </a:r>
-            <a:endParaRPr lang="en-US" sz="1300" dirty="0"/>
-          </a:p>
-        </p:txBody>
-      </p:sp>
-      <p:sp>
-        <p:nvSpPr>
-          <p:cNvPr id="66" name="Shape 61"/>
-          <p:cNvSpPr/>
-          <p:nvPr/>
-        </p:nvSpPr>
-        <p:spPr>
-          <a:xfrm>
-            <a:off x="2560320" y="4306824"/>
-            <a:ext cx="347472" cy="347472"/>
-          </a:xfrm>
-          <a:prstGeom prst="ellipse">
-            <a:avLst/>
-          </a:prstGeom>
-          <a:solidFill>
-            <a:srgbClr val="C9A46E"/>
-          </a:solidFill>
-          <a:ln/>
-        </p:spPr>
-      </p:sp>
-      <p:sp>
-        <p:nvSpPr>
-          <p:cNvPr id="67" name="Text 62"/>
-          <p:cNvSpPr txBox="1"/>
-          <p:nvPr/>
-        </p:nvSpPr>
-        <p:spPr>
-          <a:xfrm>
-            <a:off x="2560320" y="4306824"/>
-            <a:ext cx="347472" cy="347472"/>
-          </a:xfrm>
-          <a:prstGeom prst="rect">
-            <a:avLst/>
-          </a:prstGeom>
-          <a:noFill/>
-          <a:ln/>
-        </p:spPr>
-        <p:txBody>
-          <a:bodyPr wrap="square" lIns="0" tIns="0" rIns="0" bIns="0" rtlCol="0" anchor="ctr"/>
-          <a:lstStyle/>
-          <a:p>
-            <a:pPr algn="ctr" indent="0" marL="0">
-              <a:buNone/>
-            </a:pPr>
-            <a:r>
-              <a:rPr lang="en-US" sz="1300" b="1" dirty="0">
-                <a:solidFill>
-                  <a:srgbClr val="FFFFFF"/>
-                </a:solidFill>
-                <a:latin typeface="IBM Plex Sans Arabic" pitchFamily="34" charset="0"/>
-                <a:ea typeface="IBM Plex Sans Arabic" pitchFamily="34" charset="-122"/>
-                <a:cs typeface="IBM Plex Sans Arabic" pitchFamily="34" charset="-120"/>
-              </a:rPr>
-              <a:t>~</a:t>
-            </a:r>
-            <a:endParaRPr lang="en-US" sz="1300" dirty="0"/>
-          </a:p>
-        </p:txBody>
-      </p:sp>
-      <p:sp>
-        <p:nvSpPr>
-          <p:cNvPr id="68" name="Shape 63"/>
-          <p:cNvSpPr/>
-          <p:nvPr/>
-        </p:nvSpPr>
-        <p:spPr>
-          <a:xfrm>
-            <a:off x="1042416" y="4306824"/>
-            <a:ext cx="347472" cy="347472"/>
-          </a:xfrm>
-          <a:prstGeom prst="ellipse">
-            <a:avLst/>
-          </a:prstGeom>
-          <a:solidFill>
-            <a:srgbClr val="C9A46E"/>
-          </a:solidFill>
-          <a:ln/>
-        </p:spPr>
-      </p:sp>
-      <p:sp>
-        <p:nvSpPr>
-          <p:cNvPr id="69" name="Text 64"/>
-          <p:cNvSpPr txBox="1"/>
-          <p:nvPr/>
-        </p:nvSpPr>
-        <p:spPr>
-          <a:xfrm>
-            <a:off x="1042416" y="4306824"/>
-            <a:ext cx="347472" cy="347472"/>
-          </a:xfrm>
-          <a:prstGeom prst="rect">
-            <a:avLst/>
-          </a:prstGeom>
-          <a:noFill/>
-          <a:ln/>
-        </p:spPr>
-        <p:txBody>
-          <a:bodyPr wrap="square" lIns="0" tIns="0" rIns="0" bIns="0" rtlCol="0" anchor="ctr"/>
-          <a:lstStyle/>
-          <a:p>
-            <a:pPr algn="ctr" indent="0" marL="0">
-              <a:buNone/>
-            </a:pPr>
-            <a:r>
-              <a:rPr lang="en-US" sz="1300" b="1" dirty="0">
-                <a:solidFill>
-                  <a:srgbClr val="FFFFFF"/>
-                </a:solidFill>
-                <a:latin typeface="IBM Plex Sans Arabic" pitchFamily="34" charset="0"/>
-                <a:ea typeface="IBM Plex Sans Arabic" pitchFamily="34" charset="-122"/>
-                <a:cs typeface="IBM Plex Sans Arabic" pitchFamily="34" charset="-120"/>
-              </a:rPr>
-              <a:t>~</a:t>
-            </a:r>
-            <a:endParaRPr lang="en-US" sz="1300" dirty="0"/>
-          </a:p>
-        </p:txBody>
-      </p:sp>
-      <p:sp>
-        <p:nvSpPr>
-          <p:cNvPr id="70" name="Shape 65"/>
-          <p:cNvSpPr/>
-          <p:nvPr/>
-        </p:nvSpPr>
-        <p:spPr>
-          <a:xfrm>
-            <a:off x="457200" y="4736592"/>
+            <a:pPr rtl="1" algn="ctr" indent="0" marL="0">
+              <a:buNone/>
+            </a:pPr>
+            <a:r>
+              <a:rPr lang="en-US" sz="1400" dirty="0">
+                <a:solidFill>
+                  <a:srgbClr val="21141A"/>
+                </a:solidFill>
+                <a:latin typeface="IBM Plex Sans Arabic" pitchFamily="34" charset="0"/>
+                <a:ea typeface="IBM Plex Sans Arabic" pitchFamily="34" charset="-122"/>
+                <a:cs typeface="IBM Plex Sans Arabic" pitchFamily="34" charset="-120"/>
+              </a:rPr>
+              <a:t>عقود واجتماعات طويلة</a:t>
+            </a:r>
+            <a:endParaRPr lang="en-US" sz="1400" dirty="0"/>
+          </a:p>
+        </p:txBody>
+      </p:sp>
+      <p:sp>
+        <p:nvSpPr>
+          <p:cNvPr id="44" name="Shape 39"/>
+          <p:cNvSpPr/>
+          <p:nvPr/>
+        </p:nvSpPr>
+        <p:spPr>
+          <a:xfrm>
+            <a:off x="457200" y="4709160"/>
             <a:ext cx="11277295" cy="0"/>
           </a:xfrm>
           <a:prstGeom prst="line">
@@ -10375,14 +9685,14 @@
       </p:sp>
       <p:sp>
         <p:nvSpPr>
-          <p:cNvPr id="71" name="Text 66"/>
-          <p:cNvSpPr txBox="1"/>
-          <p:nvPr/>
-        </p:nvSpPr>
-        <p:spPr>
-          <a:xfrm>
-            <a:off x="8229600" y="4736592"/>
-            <a:ext cx="3504895" cy="512064"/>
+          <p:cNvPr id="45" name="Text 40"/>
+          <p:cNvSpPr txBox="1"/>
+          <p:nvPr/>
+        </p:nvSpPr>
+        <p:spPr>
+          <a:xfrm>
+            <a:off x="9418320" y="4709160"/>
+            <a:ext cx="2316175" cy="502920"/>
           </a:xfrm>
           <a:prstGeom prst="rect">
             <a:avLst/>
@@ -10398,7 +9708,85 @@
               <a:buNone/>
             </a:pPr>
             <a:r>
-              <a:rPr lang="en-US" sz="1500" dirty="0">
+              <a:rPr lang="en-US" sz="1500" b="1" dirty="0">
+                <a:solidFill>
+                  <a:srgbClr val="7F6C72"/>
+                </a:solidFill>
+                <a:latin typeface="IBM Plex Sans Arabic" pitchFamily="34" charset="0"/>
+                <a:ea typeface="IBM Plex Sans Arabic" pitchFamily="34" charset="-122"/>
+                <a:cs typeface="IBM Plex Sans Arabic" pitchFamily="34" charset="-120"/>
+              </a:rPr>
+              <a:t>نموذج التسعير</a:t>
+            </a:r>
+            <a:endParaRPr lang="en-US" sz="1500" dirty="0"/>
+          </a:p>
+        </p:txBody>
+      </p:sp>
+      <p:sp>
+        <p:nvSpPr>
+          <p:cNvPr id="46" name="Text 41"/>
+          <p:cNvSpPr txBox="1"/>
+          <p:nvPr/>
+        </p:nvSpPr>
+        <p:spPr>
+          <a:xfrm>
+            <a:off x="6400800" y="4709160"/>
+            <a:ext cx="2743200" cy="502920"/>
+          </a:xfrm>
+          <a:prstGeom prst="rect">
+            <a:avLst/>
+          </a:prstGeom>
+          <a:noFill/>
+          <a:ln/>
+        </p:spPr>
+        <p:txBody>
+          <a:bodyPr wrap="square" lIns="0" tIns="0" rIns="0" bIns="0" rtlCol="0" anchor="ctr"/>
+          <a:lstStyle/>
+          <a:p>
+            <a:pPr rtl="1" algn="ctr" indent="0" marL="0">
+              <a:buNone/>
+            </a:pPr>
+            <a:r>
+              <a:rPr lang="en-US" sz="1500" b="1" dirty="0">
+                <a:solidFill>
+                  <a:srgbClr val="8E2F3C"/>
+                </a:solidFill>
+                <a:latin typeface="IBM Plex Sans Arabic" pitchFamily="34" charset="0"/>
+                <a:ea typeface="IBM Plex Sans Arabic" pitchFamily="34" charset="-122"/>
+                <a:cs typeface="IBM Plex Sans Arabic" pitchFamily="34" charset="-120"/>
+              </a:rPr>
+              <a:t>اشتراك SaaS مرن</a:t>
+            </a:r>
+            <a:endParaRPr lang="en-US" sz="1500" dirty="0"/>
+          </a:p>
+        </p:txBody>
+      </p:sp>
+      <p:sp>
+        <p:nvSpPr>
+          <p:cNvPr id="47" name="Text 42"/>
+          <p:cNvSpPr txBox="1"/>
+          <p:nvPr/>
+        </p:nvSpPr>
+        <p:spPr>
+          <a:xfrm>
+            <a:off x="3474720" y="4709160"/>
+            <a:ext cx="2743200" cy="502920"/>
+          </a:xfrm>
+          <a:prstGeom prst="rect">
+            <a:avLst/>
+          </a:prstGeom>
+          <a:noFill/>
+          <a:ln/>
+        </p:spPr>
+        <p:txBody>
+          <a:bodyPr wrap="square" lIns="0" tIns="0" rIns="0" bIns="0" rtlCol="0" anchor="ctr"/>
+          <a:lstStyle/>
+          <a:p>
+            <a:pPr rtl="1" algn="ctr" indent="0" marL="0">
+              <a:buNone/>
+            </a:pPr>
+            <a:r>
+              <a:rPr lang="en-US" sz="1400" dirty="0">
                 <a:solidFill>
                   <a:srgbClr val="21141A"/>
                 </a:solidFill>
@@ -10406,42 +9794,22 @@
                 <a:ea typeface="IBM Plex Sans Arabic" pitchFamily="34" charset="-122"/>
                 <a:cs typeface="IBM Plex Sans Arabic" pitchFamily="34" charset="-120"/>
               </a:rPr>
-              <a:t>تنبيهات واتساب وتيليجرام</a:t>
-            </a:r>
-            <a:endParaRPr lang="en-US" sz="1500" dirty="0"/>
-          </a:p>
-        </p:txBody>
-      </p:sp>
-      <p:sp>
-        <p:nvSpPr>
-          <p:cNvPr id="72" name="Shape 67"/>
-          <p:cNvSpPr/>
-          <p:nvPr/>
-        </p:nvSpPr>
-        <p:spPr>
-          <a:xfrm>
-            <a:off x="7114032" y="4818888"/>
-            <a:ext cx="347472" cy="347472"/>
-          </a:xfrm>
-          <a:prstGeom prst="ellipse">
-            <a:avLst/>
-          </a:prstGeom>
-          <a:solidFill>
-            <a:srgbClr val="7FB27A"/>
-          </a:solidFill>
-          <a:ln/>
-        </p:spPr>
-      </p:sp>
-      <p:sp>
-        <p:nvSpPr>
-          <p:cNvPr id="73" name="Text 68"/>
-          <p:cNvSpPr txBox="1"/>
-          <p:nvPr/>
-        </p:nvSpPr>
-        <p:spPr>
-          <a:xfrm>
-            <a:off x="7114032" y="4818888"/>
-            <a:ext cx="347472" cy="347472"/>
+              <a:t>مجاني ضمن السحابة</a:t>
+            </a:r>
+            <a:endParaRPr lang="en-US" sz="1400" dirty="0"/>
+          </a:p>
+        </p:txBody>
+      </p:sp>
+      <p:sp>
+        <p:nvSpPr>
+          <p:cNvPr id="48" name="Text 43"/>
+          <p:cNvSpPr txBox="1"/>
+          <p:nvPr/>
+        </p:nvSpPr>
+        <p:spPr>
+          <a:xfrm>
+            <a:off x="548640" y="4709160"/>
+            <a:ext cx="2743200" cy="502920"/>
           </a:xfrm>
           <a:prstGeom prst="rect">
             <a:avLst/>
@@ -10453,269 +9821,33 @@
           <a:bodyPr wrap="square" lIns="0" tIns="0" rIns="0" bIns="0" rtlCol="0" anchor="ctr"/>
           <a:lstStyle/>
           <a:p>
-            <a:pPr algn="ctr" indent="0" marL="0">
-              <a:buNone/>
-            </a:pPr>
-            <a:r>
-              <a:rPr lang="en-US" sz="1300" b="1" dirty="0">
-                <a:solidFill>
-                  <a:srgbClr val="FFFFFF"/>
-                </a:solidFill>
-                <a:latin typeface="IBM Plex Sans Arabic" pitchFamily="34" charset="0"/>
-                <a:ea typeface="IBM Plex Sans Arabic" pitchFamily="34" charset="-122"/>
-                <a:cs typeface="IBM Plex Sans Arabic" pitchFamily="34" charset="-120"/>
-              </a:rPr>
-              <a:t>✓</a:t>
-            </a:r>
-            <a:endParaRPr lang="en-US" sz="1300" dirty="0"/>
-          </a:p>
-        </p:txBody>
-      </p:sp>
-      <p:sp>
-        <p:nvSpPr>
-          <p:cNvPr id="74" name="Shape 69"/>
-          <p:cNvSpPr/>
-          <p:nvPr/>
-        </p:nvSpPr>
-        <p:spPr>
-          <a:xfrm>
-            <a:off x="5596128" y="4818888"/>
-            <a:ext cx="347472" cy="347472"/>
-          </a:xfrm>
-          <a:prstGeom prst="ellipse">
-            <a:avLst/>
-          </a:prstGeom>
-          <a:solidFill>
-            <a:srgbClr val="D48A93"/>
-          </a:solidFill>
-          <a:ln/>
-        </p:spPr>
-      </p:sp>
-      <p:sp>
-        <p:nvSpPr>
-          <p:cNvPr id="75" name="Text 70"/>
-          <p:cNvSpPr txBox="1"/>
-          <p:nvPr/>
-        </p:nvSpPr>
-        <p:spPr>
-          <a:xfrm>
-            <a:off x="5596128" y="4818888"/>
-            <a:ext cx="347472" cy="347472"/>
-          </a:xfrm>
-          <a:prstGeom prst="rect">
-            <a:avLst/>
-          </a:prstGeom>
-          <a:noFill/>
-          <a:ln/>
-        </p:spPr>
-        <p:txBody>
-          <a:bodyPr wrap="square" lIns="0" tIns="0" rIns="0" bIns="0" rtlCol="0" anchor="ctr"/>
-          <a:lstStyle/>
-          <a:p>
-            <a:pPr algn="ctr" indent="0" marL="0">
-              <a:buNone/>
-            </a:pPr>
-            <a:r>
-              <a:rPr lang="en-US" sz="1300" b="1" dirty="0">
-                <a:solidFill>
-                  <a:srgbClr val="FFFFFF"/>
-                </a:solidFill>
-                <a:latin typeface="IBM Plex Sans Arabic" pitchFamily="34" charset="0"/>
-                <a:ea typeface="IBM Plex Sans Arabic" pitchFamily="34" charset="-122"/>
-                <a:cs typeface="IBM Plex Sans Arabic" pitchFamily="34" charset="-120"/>
-              </a:rPr>
-              <a:t>✕</a:t>
-            </a:r>
-            <a:endParaRPr lang="en-US" sz="1300" dirty="0"/>
-          </a:p>
-        </p:txBody>
-      </p:sp>
-      <p:sp>
-        <p:nvSpPr>
-          <p:cNvPr id="76" name="Shape 71"/>
-          <p:cNvSpPr/>
-          <p:nvPr/>
-        </p:nvSpPr>
-        <p:spPr>
-          <a:xfrm>
-            <a:off x="4078224" y="4818888"/>
-            <a:ext cx="347472" cy="347472"/>
-          </a:xfrm>
-          <a:prstGeom prst="ellipse">
-            <a:avLst/>
-          </a:prstGeom>
-          <a:solidFill>
-            <a:srgbClr val="D48A93"/>
-          </a:solidFill>
-          <a:ln/>
-        </p:spPr>
-      </p:sp>
-      <p:sp>
-        <p:nvSpPr>
-          <p:cNvPr id="77" name="Text 72"/>
-          <p:cNvSpPr txBox="1"/>
-          <p:nvPr/>
-        </p:nvSpPr>
-        <p:spPr>
-          <a:xfrm>
-            <a:off x="4078224" y="4818888"/>
-            <a:ext cx="347472" cy="347472"/>
-          </a:xfrm>
-          <a:prstGeom prst="rect">
-            <a:avLst/>
-          </a:prstGeom>
-          <a:noFill/>
-          <a:ln/>
-        </p:spPr>
-        <p:txBody>
-          <a:bodyPr wrap="square" lIns="0" tIns="0" rIns="0" bIns="0" rtlCol="0" anchor="ctr"/>
-          <a:lstStyle/>
-          <a:p>
-            <a:pPr algn="ctr" indent="0" marL="0">
-              <a:buNone/>
-            </a:pPr>
-            <a:r>
-              <a:rPr lang="en-US" sz="1300" b="1" dirty="0">
-                <a:solidFill>
-                  <a:srgbClr val="FFFFFF"/>
-                </a:solidFill>
-                <a:latin typeface="IBM Plex Sans Arabic" pitchFamily="34" charset="0"/>
-                <a:ea typeface="IBM Plex Sans Arabic" pitchFamily="34" charset="-122"/>
-                <a:cs typeface="IBM Plex Sans Arabic" pitchFamily="34" charset="-120"/>
-              </a:rPr>
-              <a:t>✕</a:t>
-            </a:r>
-            <a:endParaRPr lang="en-US" sz="1300" dirty="0"/>
-          </a:p>
-        </p:txBody>
-      </p:sp>
-      <p:sp>
-        <p:nvSpPr>
-          <p:cNvPr id="78" name="Shape 73"/>
-          <p:cNvSpPr/>
-          <p:nvPr/>
-        </p:nvSpPr>
-        <p:spPr>
-          <a:xfrm>
-            <a:off x="2560320" y="4818888"/>
-            <a:ext cx="347472" cy="347472"/>
-          </a:xfrm>
-          <a:prstGeom prst="ellipse">
-            <a:avLst/>
-          </a:prstGeom>
-          <a:solidFill>
-            <a:srgbClr val="D48A93"/>
-          </a:solidFill>
-          <a:ln/>
-        </p:spPr>
-      </p:sp>
-      <p:sp>
-        <p:nvSpPr>
-          <p:cNvPr id="79" name="Text 74"/>
-          <p:cNvSpPr txBox="1"/>
-          <p:nvPr/>
-        </p:nvSpPr>
-        <p:spPr>
-          <a:xfrm>
-            <a:off x="2560320" y="4818888"/>
-            <a:ext cx="347472" cy="347472"/>
-          </a:xfrm>
-          <a:prstGeom prst="rect">
-            <a:avLst/>
-          </a:prstGeom>
-          <a:noFill/>
-          <a:ln/>
-        </p:spPr>
-        <p:txBody>
-          <a:bodyPr wrap="square" lIns="0" tIns="0" rIns="0" bIns="0" rtlCol="0" anchor="ctr"/>
-          <a:lstStyle/>
-          <a:p>
-            <a:pPr algn="ctr" indent="0" marL="0">
-              <a:buNone/>
-            </a:pPr>
-            <a:r>
-              <a:rPr lang="en-US" sz="1300" b="1" dirty="0">
-                <a:solidFill>
-                  <a:srgbClr val="FFFFFF"/>
-                </a:solidFill>
-                <a:latin typeface="IBM Plex Sans Arabic" pitchFamily="34" charset="0"/>
-                <a:ea typeface="IBM Plex Sans Arabic" pitchFamily="34" charset="-122"/>
-                <a:cs typeface="IBM Plex Sans Arabic" pitchFamily="34" charset="-120"/>
-              </a:rPr>
-              <a:t>✕</a:t>
-            </a:r>
-            <a:endParaRPr lang="en-US" sz="1300" dirty="0"/>
-          </a:p>
-        </p:txBody>
-      </p:sp>
-      <p:sp>
-        <p:nvSpPr>
-          <p:cNvPr id="80" name="Shape 75"/>
-          <p:cNvSpPr/>
-          <p:nvPr/>
-        </p:nvSpPr>
-        <p:spPr>
-          <a:xfrm>
-            <a:off x="1042416" y="4818888"/>
-            <a:ext cx="347472" cy="347472"/>
-          </a:xfrm>
-          <a:prstGeom prst="ellipse">
-            <a:avLst/>
-          </a:prstGeom>
-          <a:solidFill>
-            <a:srgbClr val="D48A93"/>
-          </a:solidFill>
-          <a:ln/>
-        </p:spPr>
-      </p:sp>
-      <p:sp>
-        <p:nvSpPr>
-          <p:cNvPr id="81" name="Text 76"/>
-          <p:cNvSpPr txBox="1"/>
-          <p:nvPr/>
-        </p:nvSpPr>
-        <p:spPr>
-          <a:xfrm>
-            <a:off x="1042416" y="4818888"/>
-            <a:ext cx="347472" cy="347472"/>
-          </a:xfrm>
-          <a:prstGeom prst="rect">
-            <a:avLst/>
-          </a:prstGeom>
-          <a:noFill/>
-          <a:ln/>
-        </p:spPr>
-        <p:txBody>
-          <a:bodyPr wrap="square" lIns="0" tIns="0" rIns="0" bIns="0" rtlCol="0" anchor="ctr"/>
-          <a:lstStyle/>
-          <a:p>
-            <a:pPr algn="ctr" indent="0" marL="0">
-              <a:buNone/>
-            </a:pPr>
-            <a:r>
-              <a:rPr lang="en-US" sz="1300" b="1" dirty="0">
-                <a:solidFill>
-                  <a:srgbClr val="FFFFFF"/>
-                </a:solidFill>
-                <a:latin typeface="IBM Plex Sans Arabic" pitchFamily="34" charset="0"/>
-                <a:ea typeface="IBM Plex Sans Arabic" pitchFamily="34" charset="-122"/>
-                <a:cs typeface="IBM Plex Sans Arabic" pitchFamily="34" charset="-120"/>
-              </a:rPr>
-              <a:t>✕</a:t>
-            </a:r>
-            <a:endParaRPr lang="en-US" sz="1300" dirty="0"/>
-          </a:p>
-        </p:txBody>
-      </p:sp>
-      <p:sp>
-        <p:nvSpPr>
-          <p:cNvPr id="82" name="Shape 77"/>
-          <p:cNvSpPr/>
-          <p:nvPr/>
-        </p:nvSpPr>
-        <p:spPr>
-          <a:xfrm>
-            <a:off x="457200" y="5248656"/>
+            <a:pPr rtl="1" algn="ctr" indent="0" marL="0">
+              <a:buNone/>
+            </a:pPr>
+            <a:r>
+              <a:rPr lang="en-US" sz="1400" dirty="0">
+                <a:solidFill>
+                  <a:srgbClr val="21141A"/>
+                </a:solidFill>
+                <a:latin typeface="IBM Plex Sans Arabic" pitchFamily="34" charset="0"/>
+                <a:ea typeface="IBM Plex Sans Arabic" pitchFamily="34" charset="-122"/>
+                <a:cs typeface="IBM Plex Sans Arabic" pitchFamily="34" charset="-120"/>
+              </a:rPr>
+              <a:t>خدمات مدارة مكلفة</a:t>
+            </a:r>
+            <a:endParaRPr lang="en-US" sz="1400" dirty="0"/>
+          </a:p>
+        </p:txBody>
+      </p:sp>
+      <p:sp>
+        <p:nvSpPr>
+          <p:cNvPr id="49" name="Shape 44"/>
+          <p:cNvSpPr/>
+          <p:nvPr/>
+        </p:nvSpPr>
+        <p:spPr>
+          <a:xfrm>
+            <a:off x="457200" y="5212080"/>
             <a:ext cx="11277295" cy="0"/>
           </a:xfrm>
           <a:prstGeom prst="line">
@@ -10732,14 +9864,14 @@
       </p:sp>
       <p:sp>
         <p:nvSpPr>
-          <p:cNvPr id="83" name="Text 78"/>
-          <p:cNvSpPr txBox="1"/>
-          <p:nvPr/>
-        </p:nvSpPr>
-        <p:spPr>
-          <a:xfrm>
-            <a:off x="8229600" y="5248656"/>
-            <a:ext cx="3504895" cy="512064"/>
+          <p:cNvPr id="50" name="Text 45"/>
+          <p:cNvSpPr txBox="1"/>
+          <p:nvPr/>
+        </p:nvSpPr>
+        <p:spPr>
+          <a:xfrm>
+            <a:off x="9418320" y="5212080"/>
+            <a:ext cx="2316175" cy="502920"/>
           </a:xfrm>
           <a:prstGeom prst="rect">
             <a:avLst/>
@@ -10755,7 +9887,85 @@
               <a:buNone/>
             </a:pPr>
             <a:r>
-              <a:rPr lang="en-US" sz="1500" dirty="0">
+              <a:rPr lang="en-US" sz="1500" b="1" dirty="0">
+                <a:solidFill>
+                  <a:srgbClr val="7F6C72"/>
+                </a:solidFill>
+                <a:latin typeface="IBM Plex Sans Arabic" pitchFamily="34" charset="0"/>
+                <a:ea typeface="IBM Plex Sans Arabic" pitchFamily="34" charset="-122"/>
+                <a:cs typeface="IBM Plex Sans Arabic" pitchFamily="34" charset="-120"/>
+              </a:rPr>
+              <a:t>التركيز</a:t>
+            </a:r>
+            <a:endParaRPr lang="en-US" sz="1500" dirty="0"/>
+          </a:p>
+        </p:txBody>
+      </p:sp>
+      <p:sp>
+        <p:nvSpPr>
+          <p:cNvPr id="51" name="Text 46"/>
+          <p:cNvSpPr txBox="1"/>
+          <p:nvPr/>
+        </p:nvSpPr>
+        <p:spPr>
+          <a:xfrm>
+            <a:off x="6400800" y="5212080"/>
+            <a:ext cx="2743200" cy="502920"/>
+          </a:xfrm>
+          <a:prstGeom prst="rect">
+            <a:avLst/>
+          </a:prstGeom>
+          <a:noFill/>
+          <a:ln/>
+        </p:spPr>
+        <p:txBody>
+          <a:bodyPr wrap="square" lIns="0" tIns="0" rIns="0" bIns="0" rtlCol="0" anchor="ctr"/>
+          <a:lstStyle/>
+          <a:p>
+            <a:pPr rtl="1" algn="ctr" indent="0" marL="0">
+              <a:buNone/>
+            </a:pPr>
+            <a:r>
+              <a:rPr lang="en-US" sz="1500" b="1" dirty="0">
+                <a:solidFill>
+                  <a:srgbClr val="8E2F3C"/>
+                </a:solidFill>
+                <a:latin typeface="IBM Plex Sans Arabic" pitchFamily="34" charset="0"/>
+                <a:ea typeface="IBM Plex Sans Arabic" pitchFamily="34" charset="-122"/>
+                <a:cs typeface="IBM Plex Sans Arabic" pitchFamily="34" charset="-120"/>
+              </a:rPr>
+              <a:t>توفير فوري ومبسط</a:t>
+            </a:r>
+            <a:endParaRPr lang="en-US" sz="1500" dirty="0"/>
+          </a:p>
+        </p:txBody>
+      </p:sp>
+      <p:sp>
+        <p:nvSpPr>
+          <p:cNvPr id="52" name="Text 47"/>
+          <p:cNvSpPr txBox="1"/>
+          <p:nvPr/>
+        </p:nvSpPr>
+        <p:spPr>
+          <a:xfrm>
+            <a:off x="3474720" y="5212080"/>
+            <a:ext cx="2743200" cy="502920"/>
+          </a:xfrm>
+          <a:prstGeom prst="rect">
+            <a:avLst/>
+          </a:prstGeom>
+          <a:noFill/>
+          <a:ln/>
+        </p:spPr>
+        <p:txBody>
+          <a:bodyPr wrap="square" lIns="0" tIns="0" rIns="0" bIns="0" rtlCol="0" anchor="ctr"/>
+          <a:lstStyle/>
+          <a:p>
+            <a:pPr rtl="1" algn="ctr" indent="0" marL="0">
+              <a:buNone/>
+            </a:pPr>
+            <a:r>
+              <a:rPr lang="en-US" sz="1400" dirty="0">
                 <a:solidFill>
                   <a:srgbClr val="21141A"/>
                 </a:solidFill>
@@ -10763,481 +9973,87 @@
                 <a:ea typeface="IBM Plex Sans Arabic" pitchFamily="34" charset="-122"/>
                 <a:cs typeface="IBM Plex Sans Arabic" pitchFamily="34" charset="-120"/>
               </a:rPr>
-              <a:t>سعر مناسب للشركات المتوسطة</a:t>
+              <a:t>أدوات لمهندسي البنية</a:t>
+            </a:r>
+            <a:endParaRPr lang="en-US" sz="1400" dirty="0"/>
+          </a:p>
+        </p:txBody>
+      </p:sp>
+      <p:sp>
+        <p:nvSpPr>
+          <p:cNvPr id="53" name="Text 48"/>
+          <p:cNvSpPr txBox="1"/>
+          <p:nvPr/>
+        </p:nvSpPr>
+        <p:spPr>
+          <a:xfrm>
+            <a:off x="548640" y="5212080"/>
+            <a:ext cx="2743200" cy="502920"/>
+          </a:xfrm>
+          <a:prstGeom prst="rect">
+            <a:avLst/>
+          </a:prstGeom>
+          <a:noFill/>
+          <a:ln/>
+        </p:spPr>
+        <p:txBody>
+          <a:bodyPr wrap="square" lIns="0" tIns="0" rIns="0" bIns="0" rtlCol="0" anchor="ctr"/>
+          <a:lstStyle/>
+          <a:p>
+            <a:pPr rtl="1" algn="ctr" indent="0" marL="0">
+              <a:buNone/>
+            </a:pPr>
+            <a:r>
+              <a:rPr lang="en-US" sz="1400" dirty="0">
+                <a:solidFill>
+                  <a:srgbClr val="21141A"/>
+                </a:solidFill>
+                <a:latin typeface="IBM Plex Sans Arabic" pitchFamily="34" charset="0"/>
+                <a:ea typeface="IBM Plex Sans Arabic" pitchFamily="34" charset="-122"/>
+                <a:cs typeface="IBM Plex Sans Arabic" pitchFamily="34" charset="-120"/>
+              </a:rPr>
+              <a:t>البنية والسيادة</a:t>
+            </a:r>
+            <a:endParaRPr lang="en-US" sz="1400" dirty="0"/>
+          </a:p>
+        </p:txBody>
+      </p:sp>
+      <p:sp>
+        <p:nvSpPr>
+          <p:cNvPr id="54" name="Text 49"/>
+          <p:cNvSpPr txBox="1"/>
+          <p:nvPr/>
+        </p:nvSpPr>
+        <p:spPr>
+          <a:xfrm>
+            <a:off x="457200" y="5870448"/>
+            <a:ext cx="11277295" cy="365760"/>
+          </a:xfrm>
+          <a:prstGeom prst="rect">
+            <a:avLst/>
+          </a:prstGeom>
+          <a:noFill/>
+          <a:ln/>
+        </p:spPr>
+        <p:txBody>
+          <a:bodyPr wrap="square" lIns="0" tIns="0" rIns="0" bIns="0" rtlCol="0" anchor="ctr"/>
+          <a:lstStyle/>
+          <a:p>
+            <a:pPr rtl="1" algn="ctr" indent="0" marL="0">
+              <a:buNone/>
+            </a:pPr>
+            <a:r>
+              <a:rPr lang="en-US" sz="1500" b="1" dirty="0">
+                <a:solidFill>
+                  <a:srgbClr val="8E2F3C"/>
+                </a:solidFill>
+                <a:latin typeface="IBM Plex Sans Arabic" pitchFamily="34" charset="0"/>
+                <a:ea typeface="IBM Plex Sans Arabic" pitchFamily="34" charset="-122"/>
+                <a:cs typeface="IBM Plex Sans Arabic" pitchFamily="34" charset="-120"/>
+              </a:rPr>
+              <a:t>ميزتنا ليست تقنية مستحيلة، بل البساطة والسعر المرن، بلا عقود Enterprise</a:t>
             </a:r>
             <a:endParaRPr lang="en-US" sz="1500" dirty="0"/>
-          </a:p>
-        </p:txBody>
-      </p:sp>
-      <p:sp>
-        <p:nvSpPr>
-          <p:cNvPr id="84" name="Shape 79"/>
-          <p:cNvSpPr/>
-          <p:nvPr/>
-        </p:nvSpPr>
-        <p:spPr>
-          <a:xfrm>
-            <a:off x="7114032" y="5330952"/>
-            <a:ext cx="347472" cy="347472"/>
-          </a:xfrm>
-          <a:prstGeom prst="ellipse">
-            <a:avLst/>
-          </a:prstGeom>
-          <a:solidFill>
-            <a:srgbClr val="7FB27A"/>
-          </a:solidFill>
-          <a:ln/>
-        </p:spPr>
-      </p:sp>
-      <p:sp>
-        <p:nvSpPr>
-          <p:cNvPr id="85" name="Text 80"/>
-          <p:cNvSpPr txBox="1"/>
-          <p:nvPr/>
-        </p:nvSpPr>
-        <p:spPr>
-          <a:xfrm>
-            <a:off x="7114032" y="5330952"/>
-            <a:ext cx="347472" cy="347472"/>
-          </a:xfrm>
-          <a:prstGeom prst="rect">
-            <a:avLst/>
-          </a:prstGeom>
-          <a:noFill/>
-          <a:ln/>
-        </p:spPr>
-        <p:txBody>
-          <a:bodyPr wrap="square" lIns="0" tIns="0" rIns="0" bIns="0" rtlCol="0" anchor="ctr"/>
-          <a:lstStyle/>
-          <a:p>
-            <a:pPr algn="ctr" indent="0" marL="0">
-              <a:buNone/>
-            </a:pPr>
-            <a:r>
-              <a:rPr lang="en-US" sz="1300" b="1" dirty="0">
-                <a:solidFill>
-                  <a:srgbClr val="FFFFFF"/>
-                </a:solidFill>
-                <a:latin typeface="IBM Plex Sans Arabic" pitchFamily="34" charset="0"/>
-                <a:ea typeface="IBM Plex Sans Arabic" pitchFamily="34" charset="-122"/>
-                <a:cs typeface="IBM Plex Sans Arabic" pitchFamily="34" charset="-120"/>
-              </a:rPr>
-              <a:t>✓</a:t>
-            </a:r>
-            <a:endParaRPr lang="en-US" sz="1300" dirty="0"/>
-          </a:p>
-        </p:txBody>
-      </p:sp>
-      <p:sp>
-        <p:nvSpPr>
-          <p:cNvPr id="86" name="Shape 81"/>
-          <p:cNvSpPr/>
-          <p:nvPr/>
-        </p:nvSpPr>
-        <p:spPr>
-          <a:xfrm>
-            <a:off x="5596128" y="5330952"/>
-            <a:ext cx="347472" cy="347472"/>
-          </a:xfrm>
-          <a:prstGeom prst="ellipse">
-            <a:avLst/>
-          </a:prstGeom>
-          <a:solidFill>
-            <a:srgbClr val="7FB27A"/>
-          </a:solidFill>
-          <a:ln/>
-        </p:spPr>
-      </p:sp>
-      <p:sp>
-        <p:nvSpPr>
-          <p:cNvPr id="87" name="Text 82"/>
-          <p:cNvSpPr txBox="1"/>
-          <p:nvPr/>
-        </p:nvSpPr>
-        <p:spPr>
-          <a:xfrm>
-            <a:off x="5596128" y="5330952"/>
-            <a:ext cx="347472" cy="347472"/>
-          </a:xfrm>
-          <a:prstGeom prst="rect">
-            <a:avLst/>
-          </a:prstGeom>
-          <a:noFill/>
-          <a:ln/>
-        </p:spPr>
-        <p:txBody>
-          <a:bodyPr wrap="square" lIns="0" tIns="0" rIns="0" bIns="0" rtlCol="0" anchor="ctr"/>
-          <a:lstStyle/>
-          <a:p>
-            <a:pPr algn="ctr" indent="0" marL="0">
-              <a:buNone/>
-            </a:pPr>
-            <a:r>
-              <a:rPr lang="en-US" sz="1300" b="1" dirty="0">
-                <a:solidFill>
-                  <a:srgbClr val="FFFFFF"/>
-                </a:solidFill>
-                <a:latin typeface="IBM Plex Sans Arabic" pitchFamily="34" charset="0"/>
-                <a:ea typeface="IBM Plex Sans Arabic" pitchFamily="34" charset="-122"/>
-                <a:cs typeface="IBM Plex Sans Arabic" pitchFamily="34" charset="-120"/>
-              </a:rPr>
-              <a:t>✓</a:t>
-            </a:r>
-            <a:endParaRPr lang="en-US" sz="1300" dirty="0"/>
-          </a:p>
-        </p:txBody>
-      </p:sp>
-      <p:sp>
-        <p:nvSpPr>
-          <p:cNvPr id="88" name="Shape 83"/>
-          <p:cNvSpPr/>
-          <p:nvPr/>
-        </p:nvSpPr>
-        <p:spPr>
-          <a:xfrm>
-            <a:off x="4078224" y="5330952"/>
-            <a:ext cx="347472" cy="347472"/>
-          </a:xfrm>
-          <a:prstGeom prst="ellipse">
-            <a:avLst/>
-          </a:prstGeom>
-          <a:solidFill>
-            <a:srgbClr val="7FB27A"/>
-          </a:solidFill>
-          <a:ln/>
-        </p:spPr>
-      </p:sp>
-      <p:sp>
-        <p:nvSpPr>
-          <p:cNvPr id="89" name="Text 84"/>
-          <p:cNvSpPr txBox="1"/>
-          <p:nvPr/>
-        </p:nvSpPr>
-        <p:spPr>
-          <a:xfrm>
-            <a:off x="4078224" y="5330952"/>
-            <a:ext cx="347472" cy="347472"/>
-          </a:xfrm>
-          <a:prstGeom prst="rect">
-            <a:avLst/>
-          </a:prstGeom>
-          <a:noFill/>
-          <a:ln/>
-        </p:spPr>
-        <p:txBody>
-          <a:bodyPr wrap="square" lIns="0" tIns="0" rIns="0" bIns="0" rtlCol="0" anchor="ctr"/>
-          <a:lstStyle/>
-          <a:p>
-            <a:pPr algn="ctr" indent="0" marL="0">
-              <a:buNone/>
-            </a:pPr>
-            <a:r>
-              <a:rPr lang="en-US" sz="1300" b="1" dirty="0">
-                <a:solidFill>
-                  <a:srgbClr val="FFFFFF"/>
-                </a:solidFill>
-                <a:latin typeface="IBM Plex Sans Arabic" pitchFamily="34" charset="0"/>
-                <a:ea typeface="IBM Plex Sans Arabic" pitchFamily="34" charset="-122"/>
-                <a:cs typeface="IBM Plex Sans Arabic" pitchFamily="34" charset="-120"/>
-              </a:rPr>
-              <a:t>✓</a:t>
-            </a:r>
-            <a:endParaRPr lang="en-US" sz="1300" dirty="0"/>
-          </a:p>
-        </p:txBody>
-      </p:sp>
-      <p:sp>
-        <p:nvSpPr>
-          <p:cNvPr id="90" name="Shape 85"/>
-          <p:cNvSpPr/>
-          <p:nvPr/>
-        </p:nvSpPr>
-        <p:spPr>
-          <a:xfrm>
-            <a:off x="2560320" y="5330952"/>
-            <a:ext cx="347472" cy="347472"/>
-          </a:xfrm>
-          <a:prstGeom prst="ellipse">
-            <a:avLst/>
-          </a:prstGeom>
-          <a:solidFill>
-            <a:srgbClr val="7FB27A"/>
-          </a:solidFill>
-          <a:ln/>
-        </p:spPr>
-      </p:sp>
-      <p:sp>
-        <p:nvSpPr>
-          <p:cNvPr id="91" name="Text 86"/>
-          <p:cNvSpPr txBox="1"/>
-          <p:nvPr/>
-        </p:nvSpPr>
-        <p:spPr>
-          <a:xfrm>
-            <a:off x="2560320" y="5330952"/>
-            <a:ext cx="347472" cy="347472"/>
-          </a:xfrm>
-          <a:prstGeom prst="rect">
-            <a:avLst/>
-          </a:prstGeom>
-          <a:noFill/>
-          <a:ln/>
-        </p:spPr>
-        <p:txBody>
-          <a:bodyPr wrap="square" lIns="0" tIns="0" rIns="0" bIns="0" rtlCol="0" anchor="ctr"/>
-          <a:lstStyle/>
-          <a:p>
-            <a:pPr algn="ctr" indent="0" marL="0">
-              <a:buNone/>
-            </a:pPr>
-            <a:r>
-              <a:rPr lang="en-US" sz="1300" b="1" dirty="0">
-                <a:solidFill>
-                  <a:srgbClr val="FFFFFF"/>
-                </a:solidFill>
-                <a:latin typeface="IBM Plex Sans Arabic" pitchFamily="34" charset="0"/>
-                <a:ea typeface="IBM Plex Sans Arabic" pitchFamily="34" charset="-122"/>
-                <a:cs typeface="IBM Plex Sans Arabic" pitchFamily="34" charset="-120"/>
-              </a:rPr>
-              <a:t>✓</a:t>
-            </a:r>
-            <a:endParaRPr lang="en-US" sz="1300" dirty="0"/>
-          </a:p>
-        </p:txBody>
-      </p:sp>
-      <p:sp>
-        <p:nvSpPr>
-          <p:cNvPr id="92" name="Shape 87"/>
-          <p:cNvSpPr/>
-          <p:nvPr/>
-        </p:nvSpPr>
-        <p:spPr>
-          <a:xfrm>
-            <a:off x="1042416" y="5330952"/>
-            <a:ext cx="347472" cy="347472"/>
-          </a:xfrm>
-          <a:prstGeom prst="ellipse">
-            <a:avLst/>
-          </a:prstGeom>
-          <a:solidFill>
-            <a:srgbClr val="7FB27A"/>
-          </a:solidFill>
-          <a:ln/>
-        </p:spPr>
-      </p:sp>
-      <p:sp>
-        <p:nvSpPr>
-          <p:cNvPr id="93" name="Text 88"/>
-          <p:cNvSpPr txBox="1"/>
-          <p:nvPr/>
-        </p:nvSpPr>
-        <p:spPr>
-          <a:xfrm>
-            <a:off x="1042416" y="5330952"/>
-            <a:ext cx="347472" cy="347472"/>
-          </a:xfrm>
-          <a:prstGeom prst="rect">
-            <a:avLst/>
-          </a:prstGeom>
-          <a:noFill/>
-          <a:ln/>
-        </p:spPr>
-        <p:txBody>
-          <a:bodyPr wrap="square" lIns="0" tIns="0" rIns="0" bIns="0" rtlCol="0" anchor="ctr"/>
-          <a:lstStyle/>
-          <a:p>
-            <a:pPr algn="ctr" indent="0" marL="0">
-              <a:buNone/>
-            </a:pPr>
-            <a:r>
-              <a:rPr lang="en-US" sz="1300" b="1" dirty="0">
-                <a:solidFill>
-                  <a:srgbClr val="FFFFFF"/>
-                </a:solidFill>
-                <a:latin typeface="IBM Plex Sans Arabic" pitchFamily="34" charset="0"/>
-                <a:ea typeface="IBM Plex Sans Arabic" pitchFamily="34" charset="-122"/>
-                <a:cs typeface="IBM Plex Sans Arabic" pitchFamily="34" charset="-120"/>
-              </a:rPr>
-              <a:t>✓</a:t>
-            </a:r>
-            <a:endParaRPr lang="en-US" sz="1300" dirty="0"/>
-          </a:p>
-        </p:txBody>
-      </p:sp>
-      <p:sp>
-        <p:nvSpPr>
-          <p:cNvPr id="94" name="Shape 89"/>
-          <p:cNvSpPr/>
-          <p:nvPr/>
-        </p:nvSpPr>
-        <p:spPr>
-          <a:xfrm>
-            <a:off x="11551615" y="5943600"/>
-            <a:ext cx="182880" cy="182880"/>
-          </a:xfrm>
-          <a:prstGeom prst="ellipse">
-            <a:avLst/>
-          </a:prstGeom>
-          <a:solidFill>
-            <a:srgbClr val="7FB27A"/>
-          </a:solidFill>
-          <a:ln/>
-        </p:spPr>
-      </p:sp>
-      <p:sp>
-        <p:nvSpPr>
-          <p:cNvPr id="95" name="Text 90"/>
-          <p:cNvSpPr txBox="1"/>
-          <p:nvPr/>
-        </p:nvSpPr>
-        <p:spPr>
-          <a:xfrm>
-            <a:off x="10865815" y="5879592"/>
-            <a:ext cx="612648" cy="310896"/>
-          </a:xfrm>
-          <a:prstGeom prst="rect">
-            <a:avLst/>
-          </a:prstGeom>
-          <a:noFill/>
-          <a:ln/>
-        </p:spPr>
-        <p:txBody>
-          <a:bodyPr wrap="square" lIns="0" tIns="0" rIns="0" bIns="0" rtlCol="0" anchor="t"/>
-          <a:lstStyle/>
-          <a:p>
-            <a:pPr rtl="1" algn="r" indent="0" marL="0">
-              <a:buNone/>
-            </a:pPr>
-            <a:r>
-              <a:rPr lang="en-US" sz="1200" dirty="0">
-                <a:solidFill>
-                  <a:srgbClr val="7F6C72"/>
-                </a:solidFill>
-                <a:latin typeface="IBM Plex Sans Arabic" pitchFamily="34" charset="0"/>
-                <a:ea typeface="IBM Plex Sans Arabic" pitchFamily="34" charset="-122"/>
-                <a:cs typeface="IBM Plex Sans Arabic" pitchFamily="34" charset="-120"/>
-              </a:rPr>
-              <a:t>نعم</a:t>
-            </a:r>
-            <a:endParaRPr lang="en-US" sz="1200" dirty="0"/>
-          </a:p>
-        </p:txBody>
-      </p:sp>
-      <p:sp>
-        <p:nvSpPr>
-          <p:cNvPr id="96" name="Shape 91"/>
-          <p:cNvSpPr/>
-          <p:nvPr/>
-        </p:nvSpPr>
-        <p:spPr>
-          <a:xfrm>
-            <a:off x="10591495" y="5943600"/>
-            <a:ext cx="182880" cy="182880"/>
-          </a:xfrm>
-          <a:prstGeom prst="ellipse">
-            <a:avLst/>
-          </a:prstGeom>
-          <a:solidFill>
-            <a:srgbClr val="C9A46E"/>
-          </a:solidFill>
-          <a:ln/>
-        </p:spPr>
-      </p:sp>
-      <p:sp>
-        <p:nvSpPr>
-          <p:cNvPr id="97" name="Text 92"/>
-          <p:cNvSpPr txBox="1"/>
-          <p:nvPr/>
-        </p:nvSpPr>
-        <p:spPr>
-          <a:xfrm>
-            <a:off x="9905695" y="5879592"/>
-            <a:ext cx="612648" cy="310896"/>
-          </a:xfrm>
-          <a:prstGeom prst="rect">
-            <a:avLst/>
-          </a:prstGeom>
-          <a:noFill/>
-          <a:ln/>
-        </p:spPr>
-        <p:txBody>
-          <a:bodyPr wrap="square" lIns="0" tIns="0" rIns="0" bIns="0" rtlCol="0" anchor="t"/>
-          <a:lstStyle/>
-          <a:p>
-            <a:pPr rtl="1" algn="r" indent="0" marL="0">
-              <a:buNone/>
-            </a:pPr>
-            <a:r>
-              <a:rPr lang="en-US" sz="1200" dirty="0">
-                <a:solidFill>
-                  <a:srgbClr val="7F6C72"/>
-                </a:solidFill>
-                <a:latin typeface="IBM Plex Sans Arabic" pitchFamily="34" charset="0"/>
-                <a:ea typeface="IBM Plex Sans Arabic" pitchFamily="34" charset="-122"/>
-                <a:cs typeface="IBM Plex Sans Arabic" pitchFamily="34" charset="-120"/>
-              </a:rPr>
-              <a:t>جزئياً</a:t>
-            </a:r>
-            <a:endParaRPr lang="en-US" sz="1200" dirty="0"/>
-          </a:p>
-        </p:txBody>
-      </p:sp>
-      <p:sp>
-        <p:nvSpPr>
-          <p:cNvPr id="98" name="Shape 93"/>
-          <p:cNvSpPr/>
-          <p:nvPr/>
-        </p:nvSpPr>
-        <p:spPr>
-          <a:xfrm>
-            <a:off x="9631375" y="5943600"/>
-            <a:ext cx="182880" cy="182880"/>
-          </a:xfrm>
-          <a:prstGeom prst="ellipse">
-            <a:avLst/>
-          </a:prstGeom>
-          <a:solidFill>
-            <a:srgbClr val="D48A93"/>
-          </a:solidFill>
-          <a:ln/>
-        </p:spPr>
-      </p:sp>
-      <p:sp>
-        <p:nvSpPr>
-          <p:cNvPr id="99" name="Text 94"/>
-          <p:cNvSpPr txBox="1"/>
-          <p:nvPr/>
-        </p:nvSpPr>
-        <p:spPr>
-          <a:xfrm>
-            <a:off x="8945575" y="5879592"/>
-            <a:ext cx="612648" cy="310896"/>
-          </a:xfrm>
-          <a:prstGeom prst="rect">
-            <a:avLst/>
-          </a:prstGeom>
-          <a:noFill/>
-          <a:ln/>
-        </p:spPr>
-        <p:txBody>
-          <a:bodyPr wrap="square" lIns="0" tIns="0" rIns="0" bIns="0" rtlCol="0" anchor="t"/>
-          <a:lstStyle/>
-          <a:p>
-            <a:pPr rtl="1" algn="r" indent="0" marL="0">
-              <a:buNone/>
-            </a:pPr>
-            <a:r>
-              <a:rPr lang="en-US" sz="1200" dirty="0">
-                <a:solidFill>
-                  <a:srgbClr val="7F6C72"/>
-                </a:solidFill>
-                <a:latin typeface="IBM Plex Sans Arabic" pitchFamily="34" charset="0"/>
-                <a:ea typeface="IBM Plex Sans Arabic" pitchFamily="34" charset="-122"/>
-                <a:cs typeface="IBM Plex Sans Arabic" pitchFamily="34" charset="-120"/>
-              </a:rPr>
-              <a:t>لا</a:t>
-            </a:r>
-            <a:endParaRPr lang="en-US" sz="1200" dirty="0"/>
           </a:p>
         </p:txBody>
       </p:sp>
@@ -11796,7 +10612,7 @@
                 <a:ea typeface="IBM Plex Sans Arabic" pitchFamily="34" charset="-122"/>
                 <a:cs typeface="IBM Plex Sans Arabic" pitchFamily="34" charset="-120"/>
               </a:rPr>
-              <a:t>شركات سعودية من 50 إلى 250 موظفاً</a:t>
+              <a:t>شركات فاتورتها السحابية عشرات الآلاف شهرياً</a:t>
             </a:r>
             <a:endParaRPr lang="en-US" sz="3400" dirty="0"/>
           </a:p>
@@ -11835,7 +10651,7 @@
                 <a:ea typeface="IBM Plex Sans Arabic" pitchFamily="34" charset="-122"/>
                 <a:cs typeface="IBM Plex Sans Arabic" pitchFamily="34" charset="-120"/>
               </a:rPr>
-              <a:t>بلا فريق FinOps، وفاتورتها عشرات الآلاف شهرياً</a:t>
+              <a:t>50 إلى 250 موظفاً، وهدر مؤلم يجعل عائد الاشتراك واضحاً</a:t>
             </a:r>
             <a:endParaRPr lang="en-US" sz="1800" dirty="0"/>
           </a:p>
@@ -12793,7 +11609,7 @@
         <p:spPr>
           <a:xfrm>
             <a:off x="9566819" y="1554480"/>
-            <a:ext cx="2167677" cy="3017520"/>
+            <a:ext cx="2167677" cy="2834640"/>
           </a:xfrm>
           <a:prstGeom prst="roundRect">
             <a:avLst>
@@ -13060,11 +11876,11 @@
         <p:spPr>
           <a:xfrm>
             <a:off x="7289414" y="1554480"/>
-            <a:ext cx="2167677" cy="1453896"/>
+            <a:ext cx="2167677" cy="1362456"/>
           </a:xfrm>
           <a:prstGeom prst="roundRect">
             <a:avLst>
-              <a:gd name="adj" fmla="val 8805"/>
+              <a:gd name="adj" fmla="val 9396"/>
             </a:avLst>
           </a:prstGeom>
           <a:solidFill>
@@ -13267,12 +12083,12 @@
         </p:nvSpPr>
         <p:spPr>
           <a:xfrm>
-            <a:off x="7289414" y="3118104"/>
-            <a:ext cx="2167677" cy="1453896"/>
+            <a:off x="7289414" y="3026664"/>
+            <a:ext cx="2167677" cy="1362456"/>
           </a:xfrm>
           <a:prstGeom prst="roundRect">
             <a:avLst>
-              <a:gd name="adj" fmla="val 8805"/>
+              <a:gd name="adj" fmla="val 9396"/>
             </a:avLst>
           </a:prstGeom>
           <a:solidFill>
@@ -13302,7 +12118,7 @@
         </p:blipFill>
         <p:spPr>
           <a:xfrm>
-            <a:off x="8963315" y="3273552"/>
+            <a:off x="8963315" y="3182112"/>
             <a:ext cx="310896" cy="310896"/>
           </a:xfrm>
           <a:prstGeom prst="rect">
@@ -13318,7 +12134,7 @@
         </p:nvSpPr>
         <p:spPr>
           <a:xfrm>
-            <a:off x="7426574" y="3246120"/>
+            <a:off x="7426574" y="3154680"/>
             <a:ext cx="1481877" cy="365760"/>
           </a:xfrm>
           <a:prstGeom prst="rect">
@@ -13357,7 +12173,7 @@
         </p:nvSpPr>
         <p:spPr>
           <a:xfrm>
-            <a:off x="9182771" y="3858768"/>
+            <a:off x="9182771" y="3767328"/>
             <a:ext cx="82296" cy="82296"/>
           </a:xfrm>
           <a:prstGeom prst="rect">
@@ -13377,7 +12193,7 @@
         </p:nvSpPr>
         <p:spPr>
           <a:xfrm>
-            <a:off x="7426574" y="3739896"/>
+            <a:off x="7426574" y="3648456"/>
             <a:ext cx="1664757" cy="329184"/>
           </a:xfrm>
           <a:prstGeom prst="rect">
@@ -13402,7 +12218,7 @@
                 <a:ea typeface="IBM Plex Sans Arabic" pitchFamily="34" charset="-122"/>
                 <a:cs typeface="IBM Plex Sans Arabic" pitchFamily="34" charset="-120"/>
               </a:rPr>
-              <a:t>الموقع والفحص المجاني</a:t>
+              <a:t>الموقع والفحص</a:t>
             </a:r>
             <a:endParaRPr lang="en-US" sz="1250" dirty="0"/>
           </a:p>
@@ -13416,7 +12232,7 @@
         </p:nvSpPr>
         <p:spPr>
           <a:xfrm>
-            <a:off x="9182771" y="4187952"/>
+            <a:off x="9182771" y="4096512"/>
             <a:ext cx="82296" cy="82296"/>
           </a:xfrm>
           <a:prstGeom prst="rect">
@@ -13436,7 +12252,7 @@
         </p:nvSpPr>
         <p:spPr>
           <a:xfrm>
-            <a:off x="7426574" y="4069080"/>
+            <a:off x="7426574" y="3977640"/>
             <a:ext cx="1664757" cy="329184"/>
           </a:xfrm>
           <a:prstGeom prst="rect">
@@ -13476,7 +12292,7 @@
         <p:spPr>
           <a:xfrm>
             <a:off x="5012009" y="1554480"/>
-            <a:ext cx="2167677" cy="3017520"/>
+            <a:ext cx="2167677" cy="2834640"/>
           </a:xfrm>
           <a:prstGeom prst="roundRect">
             <a:avLst>
@@ -13797,11 +12613,11 @@
         <p:spPr>
           <a:xfrm>
             <a:off x="2734605" y="1554480"/>
-            <a:ext cx="2167677" cy="1453896"/>
+            <a:ext cx="2167677" cy="1362456"/>
           </a:xfrm>
           <a:prstGeom prst="roundRect">
             <a:avLst>
-              <a:gd name="adj" fmla="val 8805"/>
+              <a:gd name="adj" fmla="val 9396"/>
             </a:avLst>
           </a:prstGeom>
           <a:solidFill>
@@ -14004,12 +12820,12 @@
         </p:nvSpPr>
         <p:spPr>
           <a:xfrm>
-            <a:off x="2734605" y="3118104"/>
-            <a:ext cx="2167677" cy="1453896"/>
+            <a:off x="2734605" y="3026664"/>
+            <a:ext cx="2167677" cy="1362456"/>
           </a:xfrm>
           <a:prstGeom prst="roundRect">
             <a:avLst>
-              <a:gd name="adj" fmla="val 8805"/>
+              <a:gd name="adj" fmla="val 9396"/>
             </a:avLst>
           </a:prstGeom>
           <a:solidFill>
@@ -14039,7 +12855,7 @@
         </p:blipFill>
         <p:spPr>
           <a:xfrm>
-            <a:off x="4408505" y="3273552"/>
+            <a:off x="4408505" y="3182112"/>
             <a:ext cx="310896" cy="310896"/>
           </a:xfrm>
           <a:prstGeom prst="rect">
@@ -14055,7 +12871,7 @@
         </p:nvSpPr>
         <p:spPr>
           <a:xfrm>
-            <a:off x="2871765" y="3246120"/>
+            <a:off x="2871765" y="3154680"/>
             <a:ext cx="1481877" cy="365760"/>
           </a:xfrm>
           <a:prstGeom prst="rect">
@@ -14094,7 +12910,7 @@
         </p:nvSpPr>
         <p:spPr>
           <a:xfrm>
-            <a:off x="4627961" y="3858768"/>
+            <a:off x="4627961" y="3767328"/>
             <a:ext cx="82296" cy="82296"/>
           </a:xfrm>
           <a:prstGeom prst="rect">
@@ -14114,7 +12930,7 @@
         </p:nvSpPr>
         <p:spPr>
           <a:xfrm>
-            <a:off x="2871765" y="3739896"/>
+            <a:off x="2871765" y="3648456"/>
             <a:ext cx="1664757" cy="329184"/>
           </a:xfrm>
           <a:prstGeom prst="rect">
@@ -14153,7 +12969,7 @@
         </p:nvSpPr>
         <p:spPr>
           <a:xfrm>
-            <a:off x="4627961" y="4187952"/>
+            <a:off x="4627961" y="4096512"/>
             <a:ext cx="82296" cy="82296"/>
           </a:xfrm>
           <a:prstGeom prst="rect">
@@ -14173,7 +12989,7 @@
         </p:nvSpPr>
         <p:spPr>
           <a:xfrm>
-            <a:off x="2871765" y="4069080"/>
+            <a:off x="2871765" y="3977640"/>
             <a:ext cx="1664757" cy="329184"/>
           </a:xfrm>
           <a:prstGeom prst="rect">
@@ -14213,7 +13029,7 @@
         <p:spPr>
           <a:xfrm>
             <a:off x="457200" y="1554480"/>
-            <a:ext cx="2167677" cy="3017520"/>
+            <a:ext cx="2167677" cy="2834640"/>
           </a:xfrm>
           <a:prstGeom prst="roundRect">
             <a:avLst>
@@ -14479,12 +13295,12 @@
         </p:nvSpPr>
         <p:spPr>
           <a:xfrm>
-            <a:off x="6150712" y="4681728"/>
-            <a:ext cx="5583784" cy="1417320"/>
+            <a:off x="6150712" y="4498848"/>
+            <a:ext cx="5583784" cy="1600200"/>
           </a:xfrm>
           <a:prstGeom prst="roundRect">
             <a:avLst>
-              <a:gd name="adj" fmla="val 9032"/>
+              <a:gd name="adj" fmla="val 8000"/>
             </a:avLst>
           </a:prstGeom>
           <a:solidFill>
@@ -14514,7 +13330,7 @@
         </p:blipFill>
         <p:spPr>
           <a:xfrm>
-            <a:off x="11240719" y="4837176"/>
+            <a:off x="11240719" y="4654296"/>
             <a:ext cx="310896" cy="310896"/>
           </a:xfrm>
           <a:prstGeom prst="rect">
@@ -14530,7 +13346,7 @@
         </p:nvSpPr>
         <p:spPr>
           <a:xfrm>
-            <a:off x="6287872" y="4809744"/>
+            <a:off x="6287872" y="4626864"/>
             <a:ext cx="4897984" cy="365760"/>
           </a:xfrm>
           <a:prstGeom prst="rect">
@@ -14569,7 +13385,7 @@
         </p:nvSpPr>
         <p:spPr>
           <a:xfrm>
-            <a:off x="11460175" y="5422392"/>
+            <a:off x="11460175" y="5239512"/>
             <a:ext cx="82296" cy="82296"/>
           </a:xfrm>
           <a:prstGeom prst="rect">
@@ -14589,7 +13405,7 @@
         </p:nvSpPr>
         <p:spPr>
           <a:xfrm>
-            <a:off x="6287872" y="5303520"/>
+            <a:off x="6287872" y="5120640"/>
             <a:ext cx="5080864" cy="329184"/>
           </a:xfrm>
           <a:prstGeom prst="rect">
@@ -14606,7 +13422,7 @@
               <a:buNone/>
             </a:pPr>
             <a:r>
-              <a:rPr lang="en-US" sz="1350" dirty="0">
+              <a:rPr lang="en-US" sz="1300" dirty="0">
                 <a:solidFill>
                   <a:srgbClr val="21141A"/>
                 </a:solidFill>
@@ -14614,9 +13430,9 @@
                 <a:ea typeface="IBM Plex Sans Arabic" pitchFamily="34" charset="-122"/>
                 <a:cs typeface="IBM Plex Sans Arabic" pitchFamily="34" charset="-120"/>
               </a:rPr>
-              <a:t>فحص أول مجاني · من 15 ريال لكل مورد</a:t>
-            </a:r>
-            <a:endParaRPr lang="en-US" sz="1350" dirty="0"/>
+              <a:t>اشتراك SaaS مرن حسب حجم الفاتورة</a:t>
+            </a:r>
+            <a:endParaRPr lang="en-US" sz="1300" dirty="0"/>
           </a:p>
         </p:txBody>
       </p:sp>
@@ -14628,7 +13444,7 @@
         </p:nvSpPr>
         <p:spPr>
           <a:xfrm>
-            <a:off x="11460175" y="5788152"/>
+            <a:off x="11460175" y="5568696"/>
             <a:ext cx="82296" cy="82296"/>
           </a:xfrm>
           <a:prstGeom prst="rect">
@@ -14648,7 +13464,7 @@
         </p:nvSpPr>
         <p:spPr>
           <a:xfrm>
-            <a:off x="6287872" y="5669280"/>
+            <a:off x="6287872" y="5449824"/>
             <a:ext cx="5080864" cy="329184"/>
           </a:xfrm>
           <a:prstGeom prst="rect">
@@ -14665,7 +13481,7 @@
               <a:buNone/>
             </a:pPr>
             <a:r>
-              <a:rPr lang="en-US" sz="1350" dirty="0">
+              <a:rPr lang="en-US" sz="1300" dirty="0">
                 <a:solidFill>
                   <a:srgbClr val="21141A"/>
                 </a:solidFill>
@@ -14673,9 +13489,9 @@
                 <a:ea typeface="IBM Plex Sans Arabic" pitchFamily="34" charset="-122"/>
                 <a:cs typeface="IBM Plex Sans Arabic" pitchFamily="34" charset="-120"/>
               </a:rPr>
-              <a:t>استشارات FinOps حسب المشروع</a:t>
-            </a:r>
-            <a:endParaRPr lang="en-US" sz="1350" dirty="0"/>
+              <a:t>أو نسبة من التوفير المحقق</a:t>
+            </a:r>
+            <a:endParaRPr lang="en-US" sz="1300" dirty="0"/>
           </a:p>
         </p:txBody>
       </p:sp>
@@ -14687,12 +13503,71 @@
         </p:nvSpPr>
         <p:spPr>
           <a:xfrm>
-            <a:off x="457200" y="4681728"/>
-            <a:ext cx="5583784" cy="1417320"/>
+            <a:off x="11460175" y="5897880"/>
+            <a:ext cx="82296" cy="82296"/>
+          </a:xfrm>
+          <a:prstGeom prst="rect">
+            <a:avLst/>
+          </a:prstGeom>
+          <a:solidFill>
+            <a:srgbClr val="D48A93"/>
+          </a:solidFill>
+          <a:ln/>
+        </p:spPr>
+      </p:sp>
+      <p:sp>
+        <p:nvSpPr>
+          <p:cNvPr id="87" name="Text 74"/>
+          <p:cNvSpPr txBox="1"/>
+          <p:nvPr/>
+        </p:nvSpPr>
+        <p:spPr>
+          <a:xfrm>
+            <a:off x="6287872" y="5779008"/>
+            <a:ext cx="5080864" cy="329184"/>
+          </a:xfrm>
+          <a:prstGeom prst="rect">
+            <a:avLst/>
+          </a:prstGeom>
+          <a:noFill/>
+          <a:ln/>
+        </p:spPr>
+        <p:txBody>
+          <a:bodyPr wrap="square" lIns="0" tIns="0" rIns="0" bIns="0" rtlCol="0" anchor="ctr"/>
+          <a:lstStyle/>
+          <a:p>
+            <a:pPr rtl="1" algn="r" indent="0" marL="0">
+              <a:buNone/>
+            </a:pPr>
+            <a:r>
+              <a:rPr lang="en-US" sz="1300" dirty="0">
+                <a:solidFill>
+                  <a:srgbClr val="21141A"/>
+                </a:solidFill>
+                <a:latin typeface="IBM Plex Sans Arabic" pitchFamily="34" charset="0"/>
+                <a:ea typeface="IBM Plex Sans Arabic" pitchFamily="34" charset="-122"/>
+                <a:cs typeface="IBM Plex Sans Arabic" pitchFamily="34" charset="-120"/>
+              </a:rPr>
+              <a:t>فحص أول مجاني · استشارات FinOps</a:t>
+            </a:r>
+            <a:endParaRPr lang="en-US" sz="1300" dirty="0"/>
+          </a:p>
+        </p:txBody>
+      </p:sp>
+      <p:sp>
+        <p:nvSpPr>
+          <p:cNvPr id="88" name="Shape 75"/>
+          <p:cNvSpPr/>
+          <p:nvPr/>
+        </p:nvSpPr>
+        <p:spPr>
+          <a:xfrm>
+            <a:off x="457200" y="4498848"/>
+            <a:ext cx="5583784" cy="1600200"/>
           </a:xfrm>
           <a:prstGeom prst="roundRect">
             <a:avLst>
-              <a:gd name="adj" fmla="val 9032"/>
+              <a:gd name="adj" fmla="val 8000"/>
             </a:avLst>
           </a:prstGeom>
           <a:solidFill>
@@ -14708,7 +13583,7 @@
       </p:sp>
       <p:pic>
         <p:nvPicPr>
-          <p:cNvPr id="87" name="Image 11" descr="/tmp/claude-0/-home-claude/750ff410-f4aa-5276-9360-1e19d018b112/scratchpad/c/assets/i-receipt-br.png">    </p:cNvPr>
+          <p:cNvPr id="89" name="Image 11" descr="/tmp/claude-0/-home-claude/750ff410-f4aa-5276-9360-1e19d018b112/scratchpad/c/assets/i-receipt-br.png">    </p:cNvPr>
           <p:cNvPicPr>
             <a:picLocks noChangeAspect="1"/>
           </p:cNvPicPr>
@@ -14722,7 +13597,7 @@
         </p:blipFill>
         <p:spPr>
           <a:xfrm>
-            <a:off x="5547208" y="4837176"/>
+            <a:off x="5547208" y="4654296"/>
             <a:ext cx="310896" cy="310896"/>
           </a:xfrm>
           <a:prstGeom prst="rect">
@@ -14732,13 +13607,13 @@
       </p:pic>
       <p:sp>
         <p:nvSpPr>
-          <p:cNvPr id="88" name="Text 74"/>
-          <p:cNvSpPr txBox="1"/>
-          <p:nvPr/>
-        </p:nvSpPr>
-        <p:spPr>
-          <a:xfrm>
-            <a:off x="594360" y="4809744"/>
+          <p:cNvPr id="90" name="Text 76"/>
+          <p:cNvSpPr txBox="1"/>
+          <p:nvPr/>
+        </p:nvSpPr>
+        <p:spPr>
+          <a:xfrm>
+            <a:off x="594360" y="4626864"/>
             <a:ext cx="4897984" cy="365760"/>
           </a:xfrm>
           <a:prstGeom prst="rect">
@@ -14771,13 +13646,13 @@
       </p:sp>
       <p:sp>
         <p:nvSpPr>
-          <p:cNvPr id="89" name="Shape 75"/>
-          <p:cNvSpPr/>
-          <p:nvPr/>
-        </p:nvSpPr>
-        <p:spPr>
-          <a:xfrm>
-            <a:off x="5766664" y="5422392"/>
+          <p:cNvPr id="91" name="Shape 77"/>
+          <p:cNvSpPr/>
+          <p:nvPr/>
+        </p:nvSpPr>
+        <p:spPr>
+          <a:xfrm>
+            <a:off x="5766664" y="5239512"/>
             <a:ext cx="82296" cy="82296"/>
           </a:xfrm>
           <a:prstGeom prst="rect">
@@ -14791,13 +13666,13 @@
       </p:sp>
       <p:sp>
         <p:nvSpPr>
-          <p:cNvPr id="90" name="Text 76"/>
-          <p:cNvSpPr txBox="1"/>
-          <p:nvPr/>
-        </p:nvSpPr>
-        <p:spPr>
-          <a:xfrm>
-            <a:off x="594360" y="5303520"/>
+          <p:cNvPr id="92" name="Text 78"/>
+          <p:cNvSpPr txBox="1"/>
+          <p:nvPr/>
+        </p:nvSpPr>
+        <p:spPr>
+          <a:xfrm>
+            <a:off x="594360" y="5120640"/>
             <a:ext cx="5080864" cy="329184"/>
           </a:xfrm>
           <a:prstGeom prst="rect">
@@ -14830,13 +13705,13 @@
       </p:sp>
       <p:sp>
         <p:nvSpPr>
-          <p:cNvPr id="91" name="Shape 77"/>
-          <p:cNvSpPr/>
-          <p:nvPr/>
-        </p:nvSpPr>
-        <p:spPr>
-          <a:xfrm>
-            <a:off x="5766664" y="5788152"/>
+          <p:cNvPr id="93" name="Shape 79"/>
+          <p:cNvSpPr/>
+          <p:nvPr/>
+        </p:nvSpPr>
+        <p:spPr>
+          <a:xfrm>
+            <a:off x="5766664" y="5605272"/>
             <a:ext cx="82296" cy="82296"/>
           </a:xfrm>
           <a:prstGeom prst="rect">
@@ -14850,13 +13725,13 @@
       </p:sp>
       <p:sp>
         <p:nvSpPr>
-          <p:cNvPr id="92" name="Text 78"/>
-          <p:cNvSpPr txBox="1"/>
-          <p:nvPr/>
-        </p:nvSpPr>
-        <p:spPr>
-          <a:xfrm>
-            <a:off x="594360" y="5669280"/>
+          <p:cNvPr id="94" name="Text 80"/>
+          <p:cNvSpPr txBox="1"/>
+          <p:nvPr/>
+        </p:nvSpPr>
+        <p:spPr>
+          <a:xfrm>
+            <a:off x="594360" y="5486400"/>
             <a:ext cx="5080864" cy="329184"/>
           </a:xfrm>
           <a:prstGeom prst="rect">
@@ -15672,7 +14547,7 @@
                 <a:ea typeface="IBM Plex Sans Arabic" pitchFamily="34" charset="-122"/>
                 <a:cs typeface="IBM Plex Sans Arabic" pitchFamily="34" charset="-120"/>
               </a:rPr>
-              <a:t>نموذج ذكاء اصطناعي يمسح البنية فوراً ويطابقها مع أفضل الممارسات ويحلل الأحمال</a:t>
+              <a:t>الذكاء الاصطناعي يحلل مخرجات الـ APIs ويطبّق قواعد FinOps القياسية</a:t>
             </a:r>
             <a:endParaRPr lang="en-US" sz="1600" dirty="0"/>
           </a:p>
@@ -16664,7 +15539,7 @@
                 <a:ea typeface="IBM Plex Sans Arabic" pitchFamily="34" charset="-122"/>
                 <a:cs typeface="IBM Plex Sans Arabic" pitchFamily="34" charset="-120"/>
               </a:rPr>
-              <a:t>يعمل الآن، جرّبه بنفسك</a:t>
+              <a:t>لقطات تجريبية من الواجهات · MVP Design</a:t>
             </a:r>
             <a:endParaRPr lang="en-US" sz="3400" dirty="0"/>
           </a:p>
